--- a/presentations/IPMA_Kyrgyzstan_CoD_Presentation.pptx
+++ b/presentations/IPMA_Kyrgyzstan_CoD_Presentation.pptx
@@ -3239,7 +3239,7 @@
         <p:spPr>
           <a:xfrm>
             <a:off x="10241280" y="457200"/>
-            <a:ext cx="1280160" cy="1280160"/>
+            <a:ext cx="1234440" cy="1234440"/>
           </a:xfrm>
           <a:prstGeom prst="ellipse">
             <a:avLst/>
@@ -3281,7 +3281,7 @@
         </p:nvSpPr>
         <p:spPr>
           <a:xfrm>
-            <a:off x="10469880" y="685800"/>
+            <a:off x="10442448" y="658368"/>
             <a:ext cx="822960" cy="822960"/>
           </a:xfrm>
           <a:prstGeom prst="ellipse">
@@ -3324,8 +3324,8 @@
         </p:nvSpPr>
         <p:spPr>
           <a:xfrm>
-            <a:off x="822960" y="1463040"/>
-            <a:ext cx="9144000" cy="365760"/>
+            <a:off x="822960" y="1417320"/>
+            <a:ext cx="9144000" cy="320040"/>
           </a:xfrm>
           <a:prstGeom prst="rect">
             <a:avLst/>
@@ -3359,7 +3359,7 @@
         </p:nvSpPr>
         <p:spPr>
           <a:xfrm>
-            <a:off x="822960" y="1965960"/>
+            <a:off x="822960" y="1920240"/>
             <a:ext cx="10058400" cy="914400"/>
           </a:xfrm>
           <a:prstGeom prst="rect">
@@ -3395,7 +3395,7 @@
         <p:spPr>
           <a:xfrm>
             <a:off x="822960" y="2926080"/>
-            <a:ext cx="10058400" cy="457200"/>
+            <a:ext cx="10058400" cy="411480"/>
           </a:xfrm>
           <a:prstGeom prst="rect">
             <a:avLst/>
@@ -3429,7 +3429,7 @@
         </p:nvSpPr>
         <p:spPr>
           <a:xfrm>
-            <a:off x="822960" y="3657600"/>
+            <a:off x="822960" y="3520440"/>
             <a:ext cx="10058400" cy="365760"/>
           </a:xfrm>
           <a:prstGeom prst="rect">
@@ -3465,7 +3465,7 @@
         <p:spPr>
           <a:xfrm>
             <a:off x="822960" y="5623560"/>
-            <a:ext cx="9144000" cy="320040"/>
+            <a:ext cx="10058400" cy="320040"/>
           </a:xfrm>
           <a:prstGeom prst="rect">
             <a:avLst/>
@@ -3604,7 +3604,7 @@
         <p:spPr>
           <a:xfrm>
             <a:off x="640080" y="320040"/>
-            <a:ext cx="5486400" cy="274320"/>
+            <a:ext cx="7315200" cy="274320"/>
           </a:xfrm>
           <a:prstGeom prst="rect">
             <a:avLst/>
@@ -3639,7 +3639,7 @@
         <p:spPr>
           <a:xfrm>
             <a:off x="640080" y="594360"/>
-            <a:ext cx="10515600" cy="640080"/>
+            <a:ext cx="10972800" cy="640080"/>
           </a:xfrm>
           <a:prstGeom prst="rect">
             <a:avLst/>
@@ -3654,7 +3654,7 @@
           <a:p>
             <a:pPr algn="l"/>
             <a:r>
-              <a:rPr sz="3200" b="1">
+              <a:rPr sz="3000" b="1">
                 <a:solidFill>
                   <a:srgbClr val="0B1F33"/>
                 </a:solidFill>
@@ -3674,7 +3674,7 @@
         <p:spPr>
           <a:xfrm>
             <a:off x="640080" y="1234440"/>
-            <a:ext cx="10515600" cy="411480"/>
+            <a:ext cx="10972800" cy="365760"/>
           </a:xfrm>
           <a:prstGeom prst="rect">
             <a:avLst/>
@@ -4644,7 +4644,7 @@
         </p:nvSpPr>
         <p:spPr>
           <a:xfrm>
-            <a:off x="548640" y="6446520"/>
+            <a:off x="502920" y="6446520"/>
             <a:ext cx="7315200" cy="320040"/>
           </a:xfrm>
           <a:prstGeom prst="rect">
@@ -4819,7 +4819,7 @@
         <p:spPr>
           <a:xfrm>
             <a:off x="640080" y="320040"/>
-            <a:ext cx="5486400" cy="274320"/>
+            <a:ext cx="7315200" cy="274320"/>
           </a:xfrm>
           <a:prstGeom prst="rect">
             <a:avLst/>
@@ -4854,7 +4854,7 @@
         <p:spPr>
           <a:xfrm>
             <a:off x="640080" y="594360"/>
-            <a:ext cx="10515600" cy="640080"/>
+            <a:ext cx="10972800" cy="640080"/>
           </a:xfrm>
           <a:prstGeom prst="rect">
             <a:avLst/>
@@ -4869,7 +4869,7 @@
           <a:p>
             <a:pPr algn="l"/>
             <a:r>
-              <a:rPr sz="3200" b="1">
+              <a:rPr sz="3000" b="1">
                 <a:solidFill>
                   <a:srgbClr val="0B1F33"/>
                 </a:solidFill>
@@ -4889,7 +4889,7 @@
         <p:spPr>
           <a:xfrm>
             <a:off x="640080" y="1234440"/>
-            <a:ext cx="10515600" cy="411480"/>
+            <a:ext cx="10972800" cy="365760"/>
           </a:xfrm>
           <a:prstGeom prst="rect">
             <a:avLst/>
@@ -4923,7 +4923,7 @@
         </p:nvSpPr>
         <p:spPr>
           <a:xfrm>
-            <a:off x="640080" y="1920240"/>
+            <a:off x="640080" y="1965960"/>
             <a:ext cx="10972800" cy="3840480"/>
           </a:xfrm>
           <a:prstGeom prst="rect">
@@ -4937,7 +4937,7 @@
           </a:bodyPr>
           <a:lstStyle/>
           <a:p>
-            <a:pPr algn="l">
+            <a:pPr>
               <a:spcAft>
                 <a:spcPts val="1600"/>
               </a:spcAft>
@@ -4953,7 +4953,7 @@
             </a:r>
           </a:p>
           <a:p>
-            <a:pPr algn="l">
+            <a:pPr>
               <a:spcAft>
                 <a:spcPts val="1600"/>
               </a:spcAft>
@@ -4969,7 +4969,7 @@
             </a:r>
           </a:p>
           <a:p>
-            <a:pPr algn="l">
+            <a:pPr>
               <a:spcAft>
                 <a:spcPts val="1600"/>
               </a:spcAft>
@@ -4985,7 +4985,7 @@
             </a:r>
           </a:p>
           <a:p>
-            <a:pPr algn="l">
+            <a:pPr>
               <a:spcAft>
                 <a:spcPts val="1600"/>
               </a:spcAft>
@@ -5001,7 +5001,7 @@
             </a:r>
           </a:p>
           <a:p>
-            <a:pPr algn="l">
+            <a:pPr>
               <a:spcAft>
                 <a:spcPts val="1600"/>
               </a:spcAft>
@@ -5017,7 +5017,7 @@
             </a:r>
           </a:p>
           <a:p>
-            <a:pPr algn="l">
+            <a:pPr>
               <a:spcAft>
                 <a:spcPts val="1600"/>
               </a:spcAft>
@@ -5042,7 +5042,7 @@
         </p:nvSpPr>
         <p:spPr>
           <a:xfrm>
-            <a:off x="548640" y="6446520"/>
+            <a:off x="502920" y="6446520"/>
             <a:ext cx="7315200" cy="320040"/>
           </a:xfrm>
           <a:prstGeom prst="rect">
@@ -5217,7 +5217,7 @@
         <p:spPr>
           <a:xfrm>
             <a:off x="640080" y="320040"/>
-            <a:ext cx="5486400" cy="274320"/>
+            <a:ext cx="7315200" cy="274320"/>
           </a:xfrm>
           <a:prstGeom prst="rect">
             <a:avLst/>
@@ -5252,7 +5252,7 @@
         <p:spPr>
           <a:xfrm>
             <a:off x="640080" y="594360"/>
-            <a:ext cx="10515600" cy="640080"/>
+            <a:ext cx="10972800" cy="640080"/>
           </a:xfrm>
           <a:prstGeom prst="rect">
             <a:avLst/>
@@ -5267,7 +5267,7 @@
           <a:p>
             <a:pPr algn="l"/>
             <a:r>
-              <a:rPr sz="3200" b="1">
+              <a:rPr sz="3000" b="1">
                 <a:solidFill>
                   <a:srgbClr val="0B1F33"/>
                 </a:solidFill>
@@ -5287,7 +5287,7 @@
         <p:spPr>
           <a:xfrm>
             <a:off x="640080" y="1234440"/>
-            <a:ext cx="10515600" cy="411480"/>
+            <a:ext cx="10972800" cy="365760"/>
           </a:xfrm>
           <a:prstGeom prst="rect">
             <a:avLst/>
@@ -5945,7 +5945,7 @@
         </p:nvSpPr>
         <p:spPr>
           <a:xfrm>
-            <a:off x="548640" y="6446520"/>
+            <a:off x="502920" y="6446520"/>
             <a:ext cx="7315200" cy="320040"/>
           </a:xfrm>
           <a:prstGeom prst="rect">
@@ -6162,8 +6162,8 @@
         </p:nvSpPr>
         <p:spPr>
           <a:xfrm>
-            <a:off x="822960" y="1463040"/>
-            <a:ext cx="10058400" cy="365760"/>
+            <a:off x="822960" y="1417320"/>
+            <a:ext cx="10058400" cy="320040"/>
           </a:xfrm>
           <a:prstGeom prst="rect">
             <a:avLst/>
@@ -6197,7 +6197,7 @@
         </p:nvSpPr>
         <p:spPr>
           <a:xfrm>
-            <a:off x="822960" y="2011680"/>
+            <a:off x="822960" y="1965960"/>
             <a:ext cx="10515600" cy="1828800"/>
           </a:xfrm>
           <a:prstGeom prst="rect">
@@ -6232,8 +6232,8 @@
         </p:nvSpPr>
         <p:spPr>
           <a:xfrm>
-            <a:off x="822960" y="4114800"/>
-            <a:ext cx="10515600" cy="731520"/>
+            <a:off x="822960" y="4069080"/>
+            <a:ext cx="10515600" cy="822960"/>
           </a:xfrm>
           <a:prstGeom prst="rect">
             <a:avLst/>
@@ -6267,7 +6267,7 @@
         </p:nvSpPr>
         <p:spPr>
           <a:xfrm>
-            <a:off x="548640" y="6446520"/>
+            <a:off x="502920" y="6446520"/>
             <a:ext cx="7315200" cy="320040"/>
           </a:xfrm>
           <a:prstGeom prst="rect">
@@ -6477,7 +6477,7 @@
         <p:spPr>
           <a:xfrm>
             <a:off x="822960" y="2651760"/>
-            <a:ext cx="10515600" cy="457200"/>
+            <a:ext cx="10515600" cy="411480"/>
           </a:xfrm>
           <a:prstGeom prst="rect">
             <a:avLst/>
@@ -6511,7 +6511,7 @@
         </p:nvSpPr>
         <p:spPr>
           <a:xfrm>
-            <a:off x="822960" y="3474720"/>
+            <a:off x="822960" y="3429000"/>
             <a:ext cx="10515600" cy="1828800"/>
           </a:xfrm>
           <a:prstGeom prst="roundRect">
@@ -6554,8 +6554,8 @@
         </p:nvSpPr>
         <p:spPr>
           <a:xfrm>
-            <a:off x="1097280" y="3749039"/>
-            <a:ext cx="9875520" cy="320040"/>
+            <a:off x="1097280" y="3703320"/>
+            <a:ext cx="9875520" cy="274320"/>
           </a:xfrm>
           <a:prstGeom prst="rect">
             <a:avLst/>
@@ -6589,7 +6589,7 @@
         </p:nvSpPr>
         <p:spPr>
           <a:xfrm>
-            <a:off x="1097280" y="4160520"/>
+            <a:off x="1097280" y="4114800"/>
             <a:ext cx="9875520" cy="365760"/>
           </a:xfrm>
           <a:prstGeom prst="rect">
@@ -6659,7 +6659,7 @@
         </p:nvSpPr>
         <p:spPr>
           <a:xfrm>
-            <a:off x="822960" y="5669280"/>
+            <a:off x="822960" y="5623560"/>
             <a:ext cx="10515600" cy="365760"/>
           </a:xfrm>
           <a:prstGeom prst="rect">
@@ -6694,7 +6694,7 @@
         </p:nvSpPr>
         <p:spPr>
           <a:xfrm>
-            <a:off x="548640" y="6446520"/>
+            <a:off x="502920" y="6446520"/>
             <a:ext cx="7315200" cy="320040"/>
           </a:xfrm>
           <a:prstGeom prst="rect">
@@ -6869,7 +6869,7 @@
         <p:spPr>
           <a:xfrm>
             <a:off x="640080" y="320040"/>
-            <a:ext cx="5486400" cy="274320"/>
+            <a:ext cx="7315200" cy="274320"/>
           </a:xfrm>
           <a:prstGeom prst="rect">
             <a:avLst/>
@@ -6904,7 +6904,7 @@
         <p:spPr>
           <a:xfrm>
             <a:off x="640080" y="594360"/>
-            <a:ext cx="10515600" cy="640080"/>
+            <a:ext cx="10972800" cy="640080"/>
           </a:xfrm>
           <a:prstGeom prst="rect">
             <a:avLst/>
@@ -6919,7 +6919,7 @@
           <a:p>
             <a:pPr algn="l"/>
             <a:r>
-              <a:rPr sz="3200" b="1">
+              <a:rPr sz="3000" b="1">
                 <a:solidFill>
                   <a:srgbClr val="0B1F33"/>
                 </a:solidFill>
@@ -6939,7 +6939,7 @@
         <p:spPr>
           <a:xfrm>
             <a:off x="640080" y="1234440"/>
-            <a:ext cx="10515600" cy="411480"/>
+            <a:ext cx="10972800" cy="365760"/>
           </a:xfrm>
           <a:prstGeom prst="rect">
             <a:avLst/>
@@ -7143,7 +7143,7 @@
           </a:bodyPr>
           <a:lstStyle/>
           <a:p>
-            <a:pPr algn="l">
+            <a:pPr>
               <a:spcAft>
                 <a:spcPts val="1000"/>
               </a:spcAft>
@@ -7159,7 +7159,7 @@
             </a:r>
           </a:p>
           <a:p>
-            <a:pPr algn="l">
+            <a:pPr>
               <a:spcAft>
                 <a:spcPts val="1000"/>
               </a:spcAft>
@@ -7175,7 +7175,7 @@
             </a:r>
           </a:p>
           <a:p>
-            <a:pPr algn="l">
+            <a:pPr>
               <a:spcAft>
                 <a:spcPts val="1000"/>
               </a:spcAft>
@@ -7191,7 +7191,7 @@
             </a:r>
           </a:p>
           <a:p>
-            <a:pPr algn="l">
+            <a:pPr>
               <a:spcAft>
                 <a:spcPts val="1000"/>
               </a:spcAft>
@@ -7386,7 +7386,7 @@
           </a:bodyPr>
           <a:lstStyle/>
           <a:p>
-            <a:pPr algn="l">
+            <a:pPr>
               <a:spcAft>
                 <a:spcPts val="1000"/>
               </a:spcAft>
@@ -7402,7 +7402,7 @@
             </a:r>
           </a:p>
           <a:p>
-            <a:pPr algn="l">
+            <a:pPr>
               <a:spcAft>
                 <a:spcPts val="1000"/>
               </a:spcAft>
@@ -7418,7 +7418,7 @@
             </a:r>
           </a:p>
           <a:p>
-            <a:pPr algn="l">
+            <a:pPr>
               <a:spcAft>
                 <a:spcPts val="1000"/>
               </a:spcAft>
@@ -7434,7 +7434,7 @@
             </a:r>
           </a:p>
           <a:p>
-            <a:pPr algn="l">
+            <a:pPr>
               <a:spcAft>
                 <a:spcPts val="1000"/>
               </a:spcAft>
@@ -7459,7 +7459,7 @@
         </p:nvSpPr>
         <p:spPr>
           <a:xfrm>
-            <a:off x="548640" y="6446520"/>
+            <a:off x="502920" y="6446520"/>
             <a:ext cx="7315200" cy="320040"/>
           </a:xfrm>
           <a:prstGeom prst="rect">
@@ -7634,7 +7634,7 @@
         <p:spPr>
           <a:xfrm>
             <a:off x="640080" y="320040"/>
-            <a:ext cx="5486400" cy="274320"/>
+            <a:ext cx="7315200" cy="274320"/>
           </a:xfrm>
           <a:prstGeom prst="rect">
             <a:avLst/>
@@ -7669,7 +7669,7 @@
         <p:spPr>
           <a:xfrm>
             <a:off x="640080" y="594360"/>
-            <a:ext cx="10515600" cy="640080"/>
+            <a:ext cx="10972800" cy="640080"/>
           </a:xfrm>
           <a:prstGeom prst="rect">
             <a:avLst/>
@@ -7684,7 +7684,7 @@
           <a:p>
             <a:pPr algn="l"/>
             <a:r>
-              <a:rPr sz="3200" b="1">
+              <a:rPr sz="3000" b="1">
                 <a:solidFill>
                   <a:srgbClr val="0B1F33"/>
                 </a:solidFill>
@@ -7704,7 +7704,7 @@
         <p:spPr>
           <a:xfrm>
             <a:off x="640080" y="1234440"/>
-            <a:ext cx="10515600" cy="411480"/>
+            <a:ext cx="10972800" cy="365760"/>
           </a:xfrm>
           <a:prstGeom prst="rect">
             <a:avLst/>
@@ -8674,7 +8674,7 @@
         </p:nvSpPr>
         <p:spPr>
           <a:xfrm>
-            <a:off x="548640" y="6446520"/>
+            <a:off x="502920" y="6446520"/>
             <a:ext cx="7315200" cy="320040"/>
           </a:xfrm>
           <a:prstGeom prst="rect">
@@ -8849,7 +8849,7 @@
         <p:spPr>
           <a:xfrm>
             <a:off x="640080" y="320040"/>
-            <a:ext cx="5486400" cy="274320"/>
+            <a:ext cx="7315200" cy="274320"/>
           </a:xfrm>
           <a:prstGeom prst="rect">
             <a:avLst/>
@@ -8884,7 +8884,7 @@
         <p:spPr>
           <a:xfrm>
             <a:off x="640080" y="594360"/>
-            <a:ext cx="10515600" cy="640080"/>
+            <a:ext cx="10972800" cy="640080"/>
           </a:xfrm>
           <a:prstGeom prst="rect">
             <a:avLst/>
@@ -8899,7 +8899,7 @@
           <a:p>
             <a:pPr algn="l"/>
             <a:r>
-              <a:rPr sz="3200" b="1">
+              <a:rPr sz="3000" b="1">
                 <a:solidFill>
                   <a:srgbClr val="0B1F33"/>
                 </a:solidFill>
@@ -8919,7 +8919,7 @@
         <p:spPr>
           <a:xfrm>
             <a:off x="640080" y="1234440"/>
-            <a:ext cx="10515600" cy="411480"/>
+            <a:ext cx="10972800" cy="365760"/>
           </a:xfrm>
           <a:prstGeom prst="rect">
             <a:avLst/>
@@ -9631,7 +9631,7 @@
         </p:nvSpPr>
         <p:spPr>
           <a:xfrm>
-            <a:off x="548640" y="6446520"/>
+            <a:off x="502920" y="6446520"/>
             <a:ext cx="7315200" cy="320040"/>
           </a:xfrm>
           <a:prstGeom prst="rect">
@@ -9849,7 +9849,7 @@
         <p:spPr>
           <a:xfrm>
             <a:off x="822960" y="1645920"/>
-            <a:ext cx="10058400" cy="365760"/>
+            <a:ext cx="10058400" cy="320040"/>
           </a:xfrm>
           <a:prstGeom prst="rect">
             <a:avLst/>
@@ -9883,8 +9883,8 @@
         </p:nvSpPr>
         <p:spPr>
           <a:xfrm>
-            <a:off x="822960" y="2194560"/>
-            <a:ext cx="10515600" cy="2011680"/>
+            <a:off x="822960" y="2148840"/>
+            <a:ext cx="10515600" cy="2103120"/>
           </a:xfrm>
           <a:prstGeom prst="rect">
             <a:avLst/>
@@ -9919,7 +9919,7 @@
         <p:spPr>
           <a:xfrm>
             <a:off x="822960" y="4572000"/>
-            <a:ext cx="10058400" cy="457200"/>
+            <a:ext cx="10058400" cy="411480"/>
           </a:xfrm>
           <a:prstGeom prst="rect">
             <a:avLst/>
@@ -9953,7 +9953,7 @@
         </p:nvSpPr>
         <p:spPr>
           <a:xfrm>
-            <a:off x="548640" y="6446520"/>
+            <a:off x="502920" y="6446520"/>
             <a:ext cx="7315200" cy="320040"/>
           </a:xfrm>
           <a:prstGeom prst="rect">
@@ -10128,7 +10128,7 @@
         <p:spPr>
           <a:xfrm>
             <a:off x="640080" y="320040"/>
-            <a:ext cx="5486400" cy="274320"/>
+            <a:ext cx="7315200" cy="274320"/>
           </a:xfrm>
           <a:prstGeom prst="rect">
             <a:avLst/>
@@ -10163,7 +10163,7 @@
         <p:spPr>
           <a:xfrm>
             <a:off x="640080" y="594360"/>
-            <a:ext cx="10515600" cy="640080"/>
+            <a:ext cx="10972800" cy="640080"/>
           </a:xfrm>
           <a:prstGeom prst="rect">
             <a:avLst/>
@@ -10178,7 +10178,7 @@
           <a:p>
             <a:pPr algn="l"/>
             <a:r>
-              <a:rPr sz="3200" b="1">
+              <a:rPr sz="3000" b="1">
                 <a:solidFill>
                   <a:srgbClr val="0B1F33"/>
                 </a:solidFill>
@@ -10198,7 +10198,7 @@
         <p:spPr>
           <a:xfrm>
             <a:off x="640080" y="1234440"/>
-            <a:ext cx="10515600" cy="411480"/>
+            <a:ext cx="10972800" cy="365760"/>
           </a:xfrm>
           <a:prstGeom prst="rect">
             <a:avLst/>
@@ -11136,7 +11136,7 @@
         </p:nvSpPr>
         <p:spPr>
           <a:xfrm>
-            <a:off x="548640" y="6446520"/>
+            <a:off x="502920" y="6446520"/>
             <a:ext cx="7315200" cy="320040"/>
           </a:xfrm>
           <a:prstGeom prst="rect">
@@ -11311,7 +11311,7 @@
         <p:spPr>
           <a:xfrm>
             <a:off x="640080" y="320040"/>
-            <a:ext cx="5486400" cy="274320"/>
+            <a:ext cx="7315200" cy="274320"/>
           </a:xfrm>
           <a:prstGeom prst="rect">
             <a:avLst/>
@@ -11346,7 +11346,7 @@
         <p:spPr>
           <a:xfrm>
             <a:off x="640080" y="594360"/>
-            <a:ext cx="10515600" cy="640080"/>
+            <a:ext cx="10972800" cy="640080"/>
           </a:xfrm>
           <a:prstGeom prst="rect">
             <a:avLst/>
@@ -11361,7 +11361,7 @@
           <a:p>
             <a:pPr algn="l"/>
             <a:r>
-              <a:rPr sz="3200" b="1">
+              <a:rPr sz="3000" b="1">
                 <a:solidFill>
                   <a:srgbClr val="0B1F33"/>
                 </a:solidFill>
@@ -11381,7 +11381,7 @@
         <p:spPr>
           <a:xfrm>
             <a:off x="640080" y="1234440"/>
-            <a:ext cx="10515600" cy="411480"/>
+            <a:ext cx="10972800" cy="365760"/>
           </a:xfrm>
           <a:prstGeom prst="rect">
             <a:avLst/>
@@ -11519,7 +11519,7 @@
             <a:r>
               <a:rPr sz="2200" b="1">
                 <a:solidFill>
-                  <a:srgbClr val="FFFFFF"/>
+                  <a:srgbClr val="0B1F33"/>
                 </a:solidFill>
                 <a:latin typeface="Georgia"/>
               </a:rPr>
@@ -11554,7 +11554,7 @@
             <a:r>
               <a:rPr sz="1300" b="0">
                 <a:solidFill>
-                  <a:srgbClr val="FFFFFF"/>
+                  <a:srgbClr val="0B1F33"/>
                 </a:solidFill>
                 <a:latin typeface="Calibri"/>
               </a:rPr>
@@ -11585,7 +11585,7 @@
           </a:bodyPr>
           <a:lstStyle/>
           <a:p>
-            <a:pPr algn="l">
+            <a:pPr>
               <a:spcAft>
                 <a:spcPts val="1200"/>
               </a:spcAft>
@@ -11601,7 +11601,7 @@
             </a:r>
           </a:p>
           <a:p>
-            <a:pPr algn="l">
+            <a:pPr>
               <a:spcAft>
                 <a:spcPts val="1200"/>
               </a:spcAft>
@@ -11617,7 +11617,7 @@
             </a:r>
           </a:p>
           <a:p>
-            <a:pPr algn="l">
+            <a:pPr>
               <a:spcAft>
                 <a:spcPts val="1200"/>
               </a:spcAft>
@@ -11633,7 +11633,7 @@
             </a:r>
           </a:p>
           <a:p>
-            <a:pPr algn="l">
+            <a:pPr>
               <a:spcAft>
                 <a:spcPts val="1200"/>
               </a:spcAft>
@@ -11828,7 +11828,7 @@
           </a:bodyPr>
           <a:lstStyle/>
           <a:p>
-            <a:pPr algn="l">
+            <a:pPr>
               <a:spcAft>
                 <a:spcPts val="1200"/>
               </a:spcAft>
@@ -11844,7 +11844,7 @@
             </a:r>
           </a:p>
           <a:p>
-            <a:pPr algn="l">
+            <a:pPr>
               <a:spcAft>
                 <a:spcPts val="1200"/>
               </a:spcAft>
@@ -11860,7 +11860,7 @@
             </a:r>
           </a:p>
           <a:p>
-            <a:pPr algn="l">
+            <a:pPr>
               <a:spcAft>
                 <a:spcPts val="1200"/>
               </a:spcAft>
@@ -11876,7 +11876,7 @@
             </a:r>
           </a:p>
           <a:p>
-            <a:pPr algn="l">
+            <a:pPr>
               <a:spcAft>
                 <a:spcPts val="1200"/>
               </a:spcAft>
@@ -12071,7 +12071,7 @@
           </a:bodyPr>
           <a:lstStyle/>
           <a:p>
-            <a:pPr algn="l">
+            <a:pPr>
               <a:spcAft>
                 <a:spcPts val="1200"/>
               </a:spcAft>
@@ -12087,7 +12087,7 @@
             </a:r>
           </a:p>
           <a:p>
-            <a:pPr algn="l">
+            <a:pPr>
               <a:spcAft>
                 <a:spcPts val="1200"/>
               </a:spcAft>
@@ -12103,7 +12103,7 @@
             </a:r>
           </a:p>
           <a:p>
-            <a:pPr algn="l">
+            <a:pPr>
               <a:spcAft>
                 <a:spcPts val="1200"/>
               </a:spcAft>
@@ -12119,7 +12119,7 @@
             </a:r>
           </a:p>
           <a:p>
-            <a:pPr algn="l">
+            <a:pPr>
               <a:spcAft>
                 <a:spcPts val="1200"/>
               </a:spcAft>
@@ -12144,7 +12144,7 @@
         </p:nvSpPr>
         <p:spPr>
           <a:xfrm>
-            <a:off x="548640" y="6446520"/>
+            <a:off x="502920" y="6446520"/>
             <a:ext cx="7315200" cy="320040"/>
           </a:xfrm>
           <a:prstGeom prst="rect">
@@ -12319,7 +12319,7 @@
         <p:spPr>
           <a:xfrm>
             <a:off x="640080" y="320040"/>
-            <a:ext cx="5486400" cy="274320"/>
+            <a:ext cx="7315200" cy="274320"/>
           </a:xfrm>
           <a:prstGeom prst="rect">
             <a:avLst/>
@@ -12354,7 +12354,7 @@
         <p:spPr>
           <a:xfrm>
             <a:off x="640080" y="594360"/>
-            <a:ext cx="10515600" cy="640080"/>
+            <a:ext cx="10972800" cy="640080"/>
           </a:xfrm>
           <a:prstGeom prst="rect">
             <a:avLst/>
@@ -12369,7 +12369,7 @@
           <a:p>
             <a:pPr algn="l"/>
             <a:r>
-              <a:rPr sz="3200" b="1">
+              <a:rPr sz="3000" b="1">
                 <a:solidFill>
                   <a:srgbClr val="0B1F33"/>
                 </a:solidFill>
@@ -12389,7 +12389,7 @@
         <p:spPr>
           <a:xfrm>
             <a:off x="640080" y="1234440"/>
-            <a:ext cx="10515600" cy="411480"/>
+            <a:ext cx="10972800" cy="365760"/>
           </a:xfrm>
           <a:prstGeom prst="rect">
             <a:avLst/>
@@ -12423,23 +12423,23 @@
         </p:nvSpPr>
         <p:spPr>
           <a:xfrm>
-            <a:off x="640080" y="1828800"/>
-            <a:ext cx="10972800" cy="914400"/>
-          </a:xfrm>
-          <a:prstGeom prst="rect">
-            <a:avLst/>
-          </a:prstGeom>
-          <a:noFill/>
-        </p:spPr>
-        <p:txBody>
-          <a:bodyPr wrap="square">
-            <a:spAutoFit/>
-          </a:bodyPr>
-          <a:lstStyle/>
-          <a:p>
-            <a:pPr algn="l">
+            <a:off x="640080" y="1783080"/>
+            <a:ext cx="10972800" cy="822960"/>
+          </a:xfrm>
+          <a:prstGeom prst="rect">
+            <a:avLst/>
+          </a:prstGeom>
+          <a:noFill/>
+        </p:spPr>
+        <p:txBody>
+          <a:bodyPr wrap="square">
+            <a:spAutoFit/>
+          </a:bodyPr>
+          <a:lstStyle/>
+          <a:p>
+            <a:pPr>
               <a:spcAft>
-                <a:spcPts val="800"/>
+                <a:spcPts val="600"/>
               </a:spcAft>
             </a:pPr>
             <a:r>
@@ -12453,9 +12453,9 @@
             </a:r>
           </a:p>
           <a:p>
-            <a:pPr algn="l">
+            <a:pPr>
               <a:spcAft>
-                <a:spcPts val="800"/>
+                <a:spcPts val="600"/>
               </a:spcAft>
             </a:pPr>
             <a:r>
@@ -12478,7 +12478,7 @@
         </p:nvSpPr>
         <p:spPr>
           <a:xfrm>
-            <a:off x="640080" y="3017520"/>
+            <a:off x="640080" y="2926080"/>
             <a:ext cx="5440680" cy="1234440"/>
           </a:xfrm>
           <a:prstGeom prst="roundRect">
@@ -12521,7 +12521,7 @@
         </p:nvSpPr>
         <p:spPr>
           <a:xfrm>
-            <a:off x="960120" y="3246120"/>
+            <a:off x="960120" y="3154680"/>
             <a:ext cx="4846320" cy="320040"/>
           </a:xfrm>
           <a:prstGeom prst="rect">
@@ -12556,7 +12556,7 @@
         </p:nvSpPr>
         <p:spPr>
           <a:xfrm>
-            <a:off x="960120" y="3657600"/>
+            <a:off x="960120" y="3566160"/>
             <a:ext cx="4846320" cy="411480"/>
           </a:xfrm>
           <a:prstGeom prst="rect">
@@ -12591,7 +12591,7 @@
         </p:nvSpPr>
         <p:spPr>
           <a:xfrm>
-            <a:off x="6309360" y="3017520"/>
+            <a:off x="6309360" y="2926080"/>
             <a:ext cx="5440680" cy="1234440"/>
           </a:xfrm>
           <a:prstGeom prst="roundRect">
@@ -12634,7 +12634,7 @@
         </p:nvSpPr>
         <p:spPr>
           <a:xfrm>
-            <a:off x="6629400" y="3246120"/>
+            <a:off x="6629400" y="3154680"/>
             <a:ext cx="4846320" cy="320040"/>
           </a:xfrm>
           <a:prstGeom prst="rect">
@@ -12669,7 +12669,7 @@
         </p:nvSpPr>
         <p:spPr>
           <a:xfrm>
-            <a:off x="6629400" y="3657600"/>
+            <a:off x="6629400" y="3566160"/>
             <a:ext cx="4846320" cy="411480"/>
           </a:xfrm>
           <a:prstGeom prst="rect">
@@ -12704,7 +12704,7 @@
         </p:nvSpPr>
         <p:spPr>
           <a:xfrm>
-            <a:off x="640080" y="4434840"/>
+            <a:off x="640080" y="4343400"/>
             <a:ext cx="5440680" cy="1234440"/>
           </a:xfrm>
           <a:prstGeom prst="roundRect">
@@ -12747,7 +12747,7 @@
         </p:nvSpPr>
         <p:spPr>
           <a:xfrm>
-            <a:off x="960120" y="4663440"/>
+            <a:off x="960120" y="4572000"/>
             <a:ext cx="4846320" cy="320040"/>
           </a:xfrm>
           <a:prstGeom prst="rect">
@@ -12782,7 +12782,7 @@
         </p:nvSpPr>
         <p:spPr>
           <a:xfrm>
-            <a:off x="960120" y="5074920"/>
+            <a:off x="960120" y="4983480"/>
             <a:ext cx="4846320" cy="411480"/>
           </a:xfrm>
           <a:prstGeom prst="rect">
@@ -12817,7 +12817,7 @@
         </p:nvSpPr>
         <p:spPr>
           <a:xfrm>
-            <a:off x="6309360" y="4434840"/>
+            <a:off x="6309360" y="4343400"/>
             <a:ext cx="5440680" cy="1234440"/>
           </a:xfrm>
           <a:prstGeom prst="roundRect">
@@ -12860,7 +12860,7 @@
         </p:nvSpPr>
         <p:spPr>
           <a:xfrm>
-            <a:off x="6629400" y="4663440"/>
+            <a:off x="6629400" y="4572000"/>
             <a:ext cx="4846320" cy="320040"/>
           </a:xfrm>
           <a:prstGeom prst="rect">
@@ -12895,7 +12895,7 @@
         </p:nvSpPr>
         <p:spPr>
           <a:xfrm>
-            <a:off x="6629400" y="5074920"/>
+            <a:off x="6629400" y="4983480"/>
             <a:ext cx="4846320" cy="411480"/>
           </a:xfrm>
           <a:prstGeom prst="rect">
@@ -12930,7 +12930,7 @@
         </p:nvSpPr>
         <p:spPr>
           <a:xfrm>
-            <a:off x="548640" y="6446520"/>
+            <a:off x="502920" y="6446520"/>
             <a:ext cx="7315200" cy="320040"/>
           </a:xfrm>
           <a:prstGeom prst="rect">
@@ -13105,7 +13105,7 @@
         <p:spPr>
           <a:xfrm>
             <a:off x="640080" y="320040"/>
-            <a:ext cx="5486400" cy="274320"/>
+            <a:ext cx="7315200" cy="274320"/>
           </a:xfrm>
           <a:prstGeom prst="rect">
             <a:avLst/>
@@ -13140,7 +13140,7 @@
         <p:spPr>
           <a:xfrm>
             <a:off x="640080" y="594360"/>
-            <a:ext cx="10515600" cy="640080"/>
+            <a:ext cx="10972800" cy="640080"/>
           </a:xfrm>
           <a:prstGeom prst="rect">
             <a:avLst/>
@@ -13155,7 +13155,7 @@
           <a:p>
             <a:pPr algn="l"/>
             <a:r>
-              <a:rPr sz="3200" b="1">
+              <a:rPr sz="3000" b="1">
                 <a:solidFill>
                   <a:srgbClr val="0B1F33"/>
                 </a:solidFill>
@@ -13175,7 +13175,7 @@
         <p:spPr>
           <a:xfrm>
             <a:off x="640080" y="1234440"/>
-            <a:ext cx="10515600" cy="411480"/>
+            <a:ext cx="10972800" cy="365760"/>
           </a:xfrm>
           <a:prstGeom prst="rect">
             <a:avLst/>
@@ -13196,7 +13196,7 @@
                 </a:solidFill>
                 <a:latin typeface="Calibri"/>
               </a:rPr>
-              <a:t>Quality certification rooted in collaboration</a:t>
+              <a:t>Quality certification rooted in collaboration with peer MAs / CBs</a:t>
             </a:r>
           </a:p>
         </p:txBody>
@@ -13209,56 +13209,21 @@
         </p:nvSpPr>
         <p:spPr>
           <a:xfrm>
-            <a:off x="640080" y="1828800"/>
-            <a:ext cx="10972800" cy="365760"/>
-          </a:xfrm>
-          <a:prstGeom prst="rect">
-            <a:avLst/>
-          </a:prstGeom>
-          <a:noFill/>
-        </p:spPr>
-        <p:txBody>
-          <a:bodyPr wrap="square">
-            <a:spAutoFit/>
-          </a:bodyPr>
-          <a:lstStyle/>
-          <a:p>
-            <a:pPr algn="l"/>
-            <a:r>
-              <a:rPr sz="1500" b="1">
-                <a:solidFill>
-                  <a:srgbClr val="2E6B8A"/>
-                </a:solidFill>
-                <a:latin typeface="Calibri"/>
-              </a:rPr>
-              <a:t>Target: establish CB capability for Kyrgyzstan with peer-MA support.</a:t>
-            </a:r>
-          </a:p>
-        </p:txBody>
-      </p:sp>
-      <p:sp>
-        <p:nvSpPr>
-          <p:cNvPr id="8" name="TextBox 7"/>
-          <p:cNvSpPr txBox="1"/>
-          <p:nvPr/>
-        </p:nvSpPr>
-        <p:spPr>
-          <a:xfrm>
-            <a:off x="640080" y="2377440"/>
-            <a:ext cx="10972800" cy="3474720"/>
-          </a:xfrm>
-          <a:prstGeom prst="rect">
-            <a:avLst/>
-          </a:prstGeom>
-          <a:noFill/>
-        </p:spPr>
-        <p:txBody>
-          <a:bodyPr wrap="square">
-            <a:spAutoFit/>
-          </a:bodyPr>
-          <a:lstStyle/>
-          <a:p>
-            <a:pPr algn="l">
+            <a:off x="640080" y="1965960"/>
+            <a:ext cx="10972800" cy="3840480"/>
+          </a:xfrm>
+          <a:prstGeom prst="rect">
+            <a:avLst/>
+          </a:prstGeom>
+          <a:noFill/>
+        </p:spPr>
+        <p:txBody>
+          <a:bodyPr wrap="square">
+            <a:spAutoFit/>
+          </a:bodyPr>
+          <a:lstStyle/>
+          <a:p>
+            <a:pPr>
               <a:spcAft>
                 <a:spcPts val="1400"/>
               </a:spcAft>
@@ -13274,7 +13239,7 @@
             </a:r>
           </a:p>
           <a:p>
-            <a:pPr algn="l">
+            <a:pPr>
               <a:spcAft>
                 <a:spcPts val="1400"/>
               </a:spcAft>
@@ -13290,7 +13255,7 @@
             </a:r>
           </a:p>
           <a:p>
-            <a:pPr algn="l">
+            <a:pPr>
               <a:spcAft>
                 <a:spcPts val="1400"/>
               </a:spcAft>
@@ -13306,7 +13271,7 @@
             </a:r>
           </a:p>
           <a:p>
-            <a:pPr algn="l">
+            <a:pPr>
               <a:spcAft>
                 <a:spcPts val="1400"/>
               </a:spcAft>
@@ -13322,7 +13287,7 @@
             </a:r>
           </a:p>
           <a:p>
-            <a:pPr algn="l">
+            <a:pPr>
               <a:spcAft>
                 <a:spcPts val="1400"/>
               </a:spcAft>
@@ -13338,7 +13303,7 @@
             </a:r>
           </a:p>
           <a:p>
-            <a:pPr algn="l">
+            <a:pPr>
               <a:spcAft>
                 <a:spcPts val="1400"/>
               </a:spcAft>
@@ -13357,42 +13322,42 @@
       </p:sp>
       <p:sp>
         <p:nvSpPr>
+          <p:cNvPr id="8" name="TextBox 7"/>
+          <p:cNvSpPr txBox="1"/>
+          <p:nvPr/>
+        </p:nvSpPr>
+        <p:spPr>
+          <a:xfrm>
+            <a:off x="502920" y="6446520"/>
+            <a:ext cx="7315200" cy="320040"/>
+          </a:xfrm>
+          <a:prstGeom prst="rect">
+            <a:avLst/>
+          </a:prstGeom>
+          <a:noFill/>
+        </p:spPr>
+        <p:txBody>
+          <a:bodyPr wrap="square">
+            <a:spAutoFit/>
+          </a:bodyPr>
+          <a:lstStyle/>
+          <a:p>
+            <a:pPr algn="l"/>
+            <a:r>
+              <a:rPr sz="1100" b="0">
+                <a:solidFill>
+                  <a:srgbClr val="8A9AA8"/>
+                </a:solidFill>
+                <a:latin typeface="Calibri"/>
+              </a:rPr>
+              <a:t>IPMA Kyrgyzstan  ·  Applying Member Association</a:t>
+            </a:r>
+          </a:p>
+        </p:txBody>
+      </p:sp>
+      <p:sp>
+        <p:nvSpPr>
           <p:cNvPr id="9" name="TextBox 8"/>
-          <p:cNvSpPr txBox="1"/>
-          <p:nvPr/>
-        </p:nvSpPr>
-        <p:spPr>
-          <a:xfrm>
-            <a:off x="548640" y="6446520"/>
-            <a:ext cx="7315200" cy="320040"/>
-          </a:xfrm>
-          <a:prstGeom prst="rect">
-            <a:avLst/>
-          </a:prstGeom>
-          <a:noFill/>
-        </p:spPr>
-        <p:txBody>
-          <a:bodyPr wrap="square">
-            <a:spAutoFit/>
-          </a:bodyPr>
-          <a:lstStyle/>
-          <a:p>
-            <a:pPr algn="l"/>
-            <a:r>
-              <a:rPr sz="1100" b="0">
-                <a:solidFill>
-                  <a:srgbClr val="8A9AA8"/>
-                </a:solidFill>
-                <a:latin typeface="Calibri"/>
-              </a:rPr>
-              <a:t>IPMA Kyrgyzstan  ·  Applying Member Association</a:t>
-            </a:r>
-          </a:p>
-        </p:txBody>
-      </p:sp>
-      <p:sp>
-        <p:nvSpPr>
-          <p:cNvPr id="10" name="TextBox 9"/>
           <p:cNvSpPr txBox="1"/>
           <p:nvPr/>
         </p:nvSpPr>

--- a/presentations/IPMA_Kyrgyzstan_CoD_Presentation.pptx
+++ b/presentations/IPMA_Kyrgyzstan_CoD_Presentation.pptx
@@ -3325,7 +3325,7 @@
         <p:spPr>
           <a:xfrm>
             <a:off x="822960" y="1417320"/>
-            <a:ext cx="9144000" cy="320040"/>
+            <a:ext cx="10058400" cy="320040"/>
           </a:xfrm>
           <a:prstGeom prst="rect">
             <a:avLst/>
@@ -3340,13 +3340,13 @@
           <a:p>
             <a:pPr algn="l"/>
             <a:r>
-              <a:rPr sz="1400" b="1">
+              <a:rPr sz="1300" b="1">
                 <a:solidFill>
                   <a:srgbClr val="C9A227"/>
                 </a:solidFill>
                 <a:latin typeface="Calibri"/>
               </a:rPr>
-              <a:t>COUNCIL OF DELEGATES</a:t>
+              <a:t>СОВЕТ ДЕЛЕГАТОВ (COUNCIL OF DELEGATES)</a:t>
             </a:r>
           </a:p>
         </p:txBody>
@@ -3375,13 +3375,13 @@
           <a:p>
             <a:pPr algn="l"/>
             <a:r>
-              <a:rPr sz="4800" b="1">
+              <a:rPr sz="4600" b="1">
                 <a:solidFill>
                   <a:srgbClr val="FFFFFF"/>
                 </a:solidFill>
                 <a:latin typeface="Georgia"/>
               </a:rPr>
-              <a:t>IPMA Kyrgyzstan</a:t>
+              <a:t>IPMA Кыргызстан</a:t>
             </a:r>
           </a:p>
         </p:txBody>
@@ -3410,13 +3410,13 @@
           <a:p>
             <a:pPr algn="l"/>
             <a:r>
-              <a:rPr sz="2400" b="0">
+              <a:rPr sz="2200" b="0">
                 <a:solidFill>
                   <a:srgbClr val="C5D4DE"/>
                 </a:solidFill>
                 <a:latin typeface="Calibri"/>
               </a:rPr>
-              <a:t>Applying Member Association</a:t>
+              <a:t>Ассоциация-кандидат в члены IPMA</a:t>
             </a:r>
           </a:p>
         </p:txBody>
@@ -3451,7 +3451,7 @@
                 </a:solidFill>
                 <a:latin typeface="Calibri"/>
               </a:rPr>
-              <a:t>Presentation to the IPMA Council of Delegates</a:t>
+              <a:t>Презентация для Совета делегатов IPMA</a:t>
             </a:r>
           </a:p>
         </p:txBody>
@@ -3486,7 +3486,7 @@
                 </a:solidFill>
                 <a:latin typeface="Calibri"/>
               </a:rPr>
-              <a:t>Bringing the IPMA standard to Central Asia  ·  Bishkek, Kyrgyz Republic</a:t>
+              <a:t>Стандарты IPMA в Центральной Азии  ·  Бишкек, Кыргызская Республика</a:t>
             </a:r>
           </a:p>
         </p:txBody>
@@ -3625,7 +3625,7 @@
                 </a:solidFill>
                 <a:latin typeface="Calibri"/>
               </a:rPr>
-              <a:t>IPMA KYRGYZSTAN</a:t>
+              <a:t>IPMA КЫРГЫЗСТАН</a:t>
             </a:r>
           </a:p>
         </p:txBody>
@@ -3654,13 +3654,13 @@
           <a:p>
             <a:pPr algn="l"/>
             <a:r>
-              <a:rPr sz="3000" b="1">
+              <a:rPr sz="2800" b="1">
                 <a:solidFill>
                   <a:srgbClr val="0B1F33"/>
                 </a:solidFill>
                 <a:latin typeface="Georgia"/>
               </a:rPr>
-              <a:t>Promotion of the IPMA ecosystem</a:t>
+              <a:t>Продвижение экосистемы IPMA</a:t>
             </a:r>
           </a:p>
         </p:txBody>
@@ -3695,7 +3695,7 @@
                 </a:solidFill>
                 <a:latin typeface="Calibri"/>
               </a:rPr>
-              <a:t>Visibility, knowledge and community channels</a:t>
+              <a:t>Видимость, знания и каналы сообщества</a:t>
             </a:r>
           </a:p>
         </p:txBody>
@@ -3810,13 +3810,13 @@
           <a:p>
             <a:pPr algn="l"/>
             <a:r>
-              <a:rPr sz="1800" b="1">
+              <a:rPr sz="1700" b="1">
                 <a:solidFill>
                   <a:srgbClr val="0B1F33"/>
                 </a:solidFill>
                 <a:latin typeface="Georgia"/>
               </a:rPr>
-              <a:t>Website</a:t>
+              <a:t>Сайт</a:t>
             </a:r>
           </a:p>
         </p:txBody>
@@ -3851,7 +3851,7 @@
                 </a:solidFill>
                 <a:latin typeface="Calibri"/>
               </a:rPr>
-              <a:t>Official site promoting IPMA values, events and pathways</a:t>
+              <a:t>Официальный ресурс о ценностях IPMA, событиях и путях развития</a:t>
             </a:r>
           </a:p>
         </p:txBody>
@@ -3966,13 +3966,13 @@
           <a:p>
             <a:pPr algn="l"/>
             <a:r>
-              <a:rPr sz="1800" b="1">
+              <a:rPr sz="1700" b="1">
                 <a:solidFill>
                   <a:srgbClr val="0B1F33"/>
                 </a:solidFill>
                 <a:latin typeface="Georgia"/>
               </a:rPr>
-              <a:t>Social media</a:t>
+              <a:t>Соцсети</a:t>
             </a:r>
           </a:p>
         </p:txBody>
@@ -4007,7 +4007,7 @@
                 </a:solidFill>
                 <a:latin typeface="Calibri"/>
               </a:rPr>
-              <a:t>LinkedIn, Instagram and professional channels in KR</a:t>
+              <a:t>LinkedIn, Instagram и профессиональные каналы в КР</a:t>
             </a:r>
           </a:p>
         </p:txBody>
@@ -4122,13 +4122,13 @@
           <a:p>
             <a:pPr algn="l"/>
             <a:r>
-              <a:rPr sz="1800" b="1">
+              <a:rPr sz="1700" b="1">
                 <a:solidFill>
                   <a:srgbClr val="0B1F33"/>
                 </a:solidFill>
                 <a:latin typeface="Georgia"/>
               </a:rPr>
-              <a:t>Universities</a:t>
+              <a:t>Университеты</a:t>
             </a:r>
           </a:p>
         </p:txBody>
@@ -4163,7 +4163,7 @@
                 </a:solidFill>
                 <a:latin typeface="Calibri"/>
               </a:rPr>
-              <a:t>Guest lectures and curriculum links in Bishkek and beyond</a:t>
+              <a:t>Гостевые лекции и связи с программами в Бишкеке и регионах</a:t>
             </a:r>
           </a:p>
         </p:txBody>
@@ -4278,13 +4278,13 @@
           <a:p>
             <a:pPr algn="l"/>
             <a:r>
-              <a:rPr sz="1800" b="1">
+              <a:rPr sz="1700" b="1">
                 <a:solidFill>
                   <a:srgbClr val="0B1F33"/>
                 </a:solidFill>
                 <a:latin typeface="Georgia"/>
               </a:rPr>
-              <a:t>Events</a:t>
+              <a:t>Мероприятия</a:t>
             </a:r>
           </a:p>
         </p:txBody>
@@ -4319,7 +4319,7 @@
                 </a:solidFill>
                 <a:latin typeface="Calibri"/>
               </a:rPr>
-              <a:t>Webinars, conferences and knowledge forums</a:t>
+              <a:t>Вебинары, конференции и форумы обмена знаниями</a:t>
             </a:r>
           </a:p>
         </p:txBody>
@@ -4434,13 +4434,13 @@
           <a:p>
             <a:pPr algn="l"/>
             <a:r>
-              <a:rPr sz="1800" b="1">
+              <a:rPr sz="1700" b="1">
                 <a:solidFill>
                   <a:srgbClr val="0B1F33"/>
                 </a:solidFill>
                 <a:latin typeface="Georgia"/>
               </a:rPr>
-              <a:t>Publications</a:t>
+              <a:t>Публикации</a:t>
             </a:r>
           </a:p>
         </p:txBody>
@@ -4475,7 +4475,7 @@
                 </a:solidFill>
                 <a:latin typeface="Calibri"/>
               </a:rPr>
-              <a:t>Professional articles and case studies from local practice</a:t>
+              <a:t>Профессиональные статьи и кейсы из местной практики</a:t>
             </a:r>
           </a:p>
         </p:txBody>
@@ -4590,13 +4590,13 @@
           <a:p>
             <a:pPr algn="l"/>
             <a:r>
-              <a:rPr sz="1800" b="1">
+              <a:rPr sz="1700" b="1">
                 <a:solidFill>
                   <a:srgbClr val="0B1F33"/>
                 </a:solidFill>
                 <a:latin typeface="Georgia"/>
               </a:rPr>
-              <a:t>Regional links</a:t>
+              <a:t>Региональные связи</a:t>
             </a:r>
           </a:p>
         </p:txBody>
@@ -4631,7 +4631,7 @@
                 </a:solidFill>
                 <a:latin typeface="Calibri"/>
               </a:rPr>
-              <a:t>Exchange with Central Asian and neighbouring MAs</a:t>
+              <a:t>Обмен с MA Центральной Азии и соседних стран</a:t>
             </a:r>
           </a:p>
         </p:txBody>
@@ -4645,7 +4645,7 @@
         <p:spPr>
           <a:xfrm>
             <a:off x="502920" y="6446520"/>
-            <a:ext cx="7315200" cy="320040"/>
+            <a:ext cx="8229600" cy="320040"/>
           </a:xfrm>
           <a:prstGeom prst="rect">
             <a:avLst/>
@@ -4666,7 +4666,7 @@
                 </a:solidFill>
                 <a:latin typeface="Calibri"/>
               </a:rPr>
-              <a:t>IPMA Kyrgyzstan  ·  Applying Member Association</a:t>
+              <a:t>IPMA Кыргызстан  ·  Ассоциация-кандидат</a:t>
             </a:r>
           </a:p>
         </p:txBody>
@@ -4840,7 +4840,7 @@
                 </a:solidFill>
                 <a:latin typeface="Calibri"/>
               </a:rPr>
-              <a:t>IPMA KYRGYZSTAN</a:t>
+              <a:t>IPMA КЫРГЫЗСТАН</a:t>
             </a:r>
           </a:p>
         </p:txBody>
@@ -4869,13 +4869,13 @@
           <a:p>
             <a:pPr algn="l"/>
             <a:r>
-              <a:rPr sz="3000" b="1">
+              <a:rPr sz="2800" b="1">
                 <a:solidFill>
                   <a:srgbClr val="0B1F33"/>
                 </a:solidFill>
                 <a:latin typeface="Georgia"/>
               </a:rPr>
-              <a:t>Development of Young Crew Kyrgyzstan</a:t>
+              <a:t>Развитие Young Crew Кыргызстан</a:t>
             </a:r>
           </a:p>
         </p:txBody>
@@ -4910,7 +4910,7 @@
                 </a:solidFill>
                 <a:latin typeface="Calibri"/>
               </a:rPr>
-              <a:t>Starting PM careers with IPMA standards</a:t>
+              <a:t>Старт карьеры в управлении проектами со стандартами IPMA</a:t>
             </a:r>
           </a:p>
         </p:txBody>
@@ -4939,97 +4939,97 @@
           <a:p>
             <a:pPr>
               <a:spcAft>
-                <a:spcPts val="1600"/>
+                <a:spcPts val="1400"/>
               </a:spcAft>
             </a:pPr>
             <a:r>
-              <a:rPr sz="1700" b="0">
+              <a:rPr sz="1500" b="0">
                 <a:solidFill>
                   <a:srgbClr val="1C2834"/>
                 </a:solidFill>
                 <a:latin typeface="Calibri"/>
               </a:rPr>
-              <a:t>• Introduce ambitious youth to IPMA standards, values and global community</a:t>
+              <a:t>• Знакомить амбициозную молодёжь со стандартами, ценностями и глобальным сообществом IPMA</a:t>
             </a:r>
           </a:p>
           <a:p>
             <a:pPr>
               <a:spcAft>
-                <a:spcPts val="1600"/>
+                <a:spcPts val="1400"/>
               </a:spcAft>
             </a:pPr>
             <a:r>
-              <a:rPr sz="1700" b="0">
+              <a:rPr sz="1500" b="0">
                 <a:solidFill>
                   <a:srgbClr val="1C2834"/>
                 </a:solidFill>
                 <a:latin typeface="Calibri"/>
               </a:rPr>
-              <a:t>• Connect students and early-career professionals to Young Crew Kyrgyzstan</a:t>
+              <a:t>• Привлекать студентов и молодых специалистов в Young Crew Кыргызстан</a:t>
             </a:r>
           </a:p>
           <a:p>
             <a:pPr>
               <a:spcAft>
-                <a:spcPts val="1600"/>
+                <a:spcPts val="1400"/>
               </a:spcAft>
             </a:pPr>
             <a:r>
-              <a:rPr sz="1700" b="0">
+              <a:rPr sz="1500" b="0">
                 <a:solidFill>
                   <a:srgbClr val="1C2834"/>
                 </a:solidFill>
                 <a:latin typeface="Calibri"/>
               </a:rPr>
-              <a:t>• Partner with universities in Bishkek and regional centres to enrich PM education</a:t>
+              <a:t>• Партнёрство с университетами Бишкека и регионов для обогащения образования PM</a:t>
             </a:r>
           </a:p>
           <a:p>
             <a:pPr>
               <a:spcAft>
-                <a:spcPts val="1600"/>
+                <a:spcPts val="1400"/>
               </a:spcAft>
             </a:pPr>
             <a:r>
-              <a:rPr sz="1700" b="0">
+              <a:rPr sz="1500" b="0">
                 <a:solidFill>
                   <a:srgbClr val="1C2834"/>
                 </a:solidFill>
                 <a:latin typeface="Calibri"/>
               </a:rPr>
-              <a:t>• Support pathways from academic programmes toward IPMA Level D certification</a:t>
+              <a:t>• Поддерживать путь от учебных программ к сертификации IPMA Level D</a:t>
             </a:r>
           </a:p>
           <a:p>
             <a:pPr>
               <a:spcAft>
-                <a:spcPts val="1600"/>
+                <a:spcPts val="1400"/>
               </a:spcAft>
             </a:pPr>
             <a:r>
-              <a:rPr sz="1700" b="0">
+              <a:rPr sz="1500" b="0">
                 <a:solidFill>
                   <a:srgbClr val="1C2834"/>
                 </a:solidFill>
                 <a:latin typeface="Calibri"/>
               </a:rPr>
-              <a:t>• Link Young Crew talent with employers facing project capability shortages</a:t>
+              <a:t>• Связывать таланты Young Crew с работодателями, которым нужны проектные компетенции</a:t>
             </a:r>
           </a:p>
           <a:p>
             <a:pPr>
               <a:spcAft>
-                <a:spcPts val="1600"/>
+                <a:spcPts val="1400"/>
               </a:spcAft>
             </a:pPr>
             <a:r>
-              <a:rPr sz="1700" b="0">
+              <a:rPr sz="1500" b="0">
                 <a:solidFill>
                   <a:srgbClr val="1C2834"/>
                 </a:solidFill>
                 <a:latin typeface="Calibri"/>
               </a:rPr>
-              <a:t>• Encourage regional Young Crew collaboration across Central Asia</a:t>
+              <a:t>• Развивать региональное сотрудничество Young Crew в Центральной Азии</a:t>
             </a:r>
           </a:p>
         </p:txBody>
@@ -5043,7 +5043,7 @@
         <p:spPr>
           <a:xfrm>
             <a:off x="502920" y="6446520"/>
-            <a:ext cx="7315200" cy="320040"/>
+            <a:ext cx="8229600" cy="320040"/>
           </a:xfrm>
           <a:prstGeom prst="rect">
             <a:avLst/>
@@ -5064,7 +5064,7 @@
                 </a:solidFill>
                 <a:latin typeface="Calibri"/>
               </a:rPr>
-              <a:t>IPMA Kyrgyzstan  ·  Applying Member Association</a:t>
+              <a:t>IPMA Кыргызстан  ·  Ассоциация-кандидат</a:t>
             </a:r>
           </a:p>
         </p:txBody>
@@ -5238,7 +5238,7 @@
                 </a:solidFill>
                 <a:latin typeface="Calibri"/>
               </a:rPr>
-              <a:t>IPMA KYRGYZSTAN</a:t>
+              <a:t>IPMA КЫРГЫЗСТАН</a:t>
             </a:r>
           </a:p>
         </p:txBody>
@@ -5267,13 +5267,13 @@
           <a:p>
             <a:pPr algn="l"/>
             <a:r>
-              <a:rPr sz="3000" b="1">
+              <a:rPr sz="2800" b="1">
                 <a:solidFill>
                   <a:srgbClr val="0B1F33"/>
                 </a:solidFill>
                 <a:latin typeface="Georgia"/>
               </a:rPr>
-              <a:t>Our distinctive contribution</a:t>
+              <a:t>Наш особый вклад</a:t>
             </a:r>
           </a:p>
         </p:txBody>
@@ -5308,7 +5308,7 @@
                 </a:solidFill>
                 <a:latin typeface="Calibri"/>
               </a:rPr>
-              <a:t>Why IPMA Kyrgyzstan matters for the IPMA family</a:t>
+              <a:t>Почему IPMA Кыргызстан важен для семьи IPMA</a:t>
             </a:r>
           </a:p>
         </p:txBody>
@@ -5407,7 +5407,7 @@
         </p:nvSpPr>
         <p:spPr>
           <a:xfrm>
-            <a:off x="1005840" y="1965960"/>
+            <a:off x="1005840" y="1938528"/>
             <a:ext cx="10241280" cy="274320"/>
           </a:xfrm>
           <a:prstGeom prst="rect">
@@ -5423,13 +5423,13 @@
           <a:p>
             <a:pPr algn="l"/>
             <a:r>
-              <a:rPr sz="1600" b="1">
+              <a:rPr sz="1500" b="1">
                 <a:solidFill>
                   <a:srgbClr val="0B1F33"/>
                 </a:solidFill>
                 <a:latin typeface="Georgia"/>
               </a:rPr>
-              <a:t>Central Asia presence</a:t>
+              <a:t>Присутствие в Центральной Азии</a:t>
             </a:r>
           </a:p>
         </p:txBody>
@@ -5442,8 +5442,8 @@
         </p:nvSpPr>
         <p:spPr>
           <a:xfrm>
-            <a:off x="1005840" y="2286000"/>
-            <a:ext cx="10241280" cy="365760"/>
+            <a:off x="1005840" y="2267712"/>
+            <a:ext cx="10241280" cy="411480"/>
           </a:xfrm>
           <a:prstGeom prst="rect">
             <a:avLst/>
@@ -5458,13 +5458,13 @@
           <a:p>
             <a:pPr algn="l"/>
             <a:r>
-              <a:rPr sz="1300" b="0">
+              <a:rPr sz="1200" b="0">
                 <a:solidFill>
                   <a:srgbClr val="5A6B78"/>
                 </a:solidFill>
                 <a:latin typeface="Calibri"/>
               </a:rPr>
-              <a:t>Extend the IPMA footprint into a strategically important region with growing infrastructure and energy investment.</a:t>
+              <a:t>Расширить присутствие IPMA в стратегически важном регионе с растущими инвестициями в инфраструктуру и энергетику.</a:t>
             </a:r>
           </a:p>
         </p:txBody>
@@ -5563,7 +5563,7 @@
         </p:nvSpPr>
         <p:spPr>
           <a:xfrm>
-            <a:off x="1005840" y="3017520"/>
+            <a:off x="1005840" y="2990088"/>
             <a:ext cx="10241280" cy="274320"/>
           </a:xfrm>
           <a:prstGeom prst="rect">
@@ -5579,13 +5579,13 @@
           <a:p>
             <a:pPr algn="l"/>
             <a:r>
-              <a:rPr sz="1600" b="1">
+              <a:rPr sz="1500" b="1">
                 <a:solidFill>
                   <a:srgbClr val="0B1F33"/>
                 </a:solidFill>
                 <a:latin typeface="Georgia"/>
               </a:rPr>
-              <a:t>Bilingual reach</a:t>
+              <a:t>Двуязычный охват</a:t>
             </a:r>
           </a:p>
         </p:txBody>
@@ -5598,8 +5598,8 @@
         </p:nvSpPr>
         <p:spPr>
           <a:xfrm>
-            <a:off x="1005840" y="3337560"/>
-            <a:ext cx="10241280" cy="365760"/>
+            <a:off x="1005840" y="3319272"/>
+            <a:ext cx="10241280" cy="411480"/>
           </a:xfrm>
           <a:prstGeom prst="rect">
             <a:avLst/>
@@ -5614,13 +5614,13 @@
           <a:p>
             <a:pPr algn="l"/>
             <a:r>
-              <a:rPr sz="1300" b="0">
+              <a:rPr sz="1200" b="0">
                 <a:solidFill>
                   <a:srgbClr val="5A6B78"/>
                 </a:solidFill>
                 <a:latin typeface="Calibri"/>
               </a:rPr>
-              <a:t>Serve Russian- and Kyrgyz-speaking professionals and open accessible pathways into the IPMA ecosystem.</a:t>
+              <a:t>Работать с русско- и кыргызскоязычными специалистами и открывать доступные пути в экосистему IPMA.</a:t>
             </a:r>
           </a:p>
         </p:txBody>
@@ -5719,7 +5719,7 @@
         </p:nvSpPr>
         <p:spPr>
           <a:xfrm>
-            <a:off x="1005840" y="4069080"/>
+            <a:off x="1005840" y="4041648"/>
             <a:ext cx="10241280" cy="274320"/>
           </a:xfrm>
           <a:prstGeom prst="rect">
@@ -5735,13 +5735,13 @@
           <a:p>
             <a:pPr algn="l"/>
             <a:r>
-              <a:rPr sz="1600" b="1">
+              <a:rPr sz="1500" b="1">
                 <a:solidFill>
                   <a:srgbClr val="0B1F33"/>
                 </a:solidFill>
                 <a:latin typeface="Georgia"/>
               </a:rPr>
-              <a:t>Public &amp; donor projects</a:t>
+              <a:t>Государственные и донорские проекты</a:t>
             </a:r>
           </a:p>
         </p:txBody>
@@ -5754,8 +5754,8 @@
         </p:nvSpPr>
         <p:spPr>
           <a:xfrm>
-            <a:off x="1005840" y="4389120"/>
-            <a:ext cx="10241280" cy="365760"/>
+            <a:off x="1005840" y="4370832"/>
+            <a:ext cx="10241280" cy="411480"/>
           </a:xfrm>
           <a:prstGeom prst="rect">
             <a:avLst/>
@@ -5770,13 +5770,13 @@
           <a:p>
             <a:pPr algn="l"/>
             <a:r>
-              <a:rPr sz="1300" b="0">
+              <a:rPr sz="1200" b="0">
                 <a:solidFill>
                   <a:srgbClr val="5A6B78"/>
                 </a:solidFill>
                 <a:latin typeface="Calibri"/>
               </a:rPr>
-              <a:t>Raise competence where national programmes and international projects need reliable P3M practice.</a:t>
+              <a:t>Повышать компетентность там, где национальные программы и международные проекты нуждаются в надёжной практике P3M.</a:t>
             </a:r>
           </a:p>
         </p:txBody>
@@ -5875,7 +5875,7 @@
         </p:nvSpPr>
         <p:spPr>
           <a:xfrm>
-            <a:off x="1005840" y="5120639"/>
+            <a:off x="1005840" y="5093207"/>
             <a:ext cx="10241280" cy="274320"/>
           </a:xfrm>
           <a:prstGeom prst="rect">
@@ -5891,13 +5891,13 @@
           <a:p>
             <a:pPr algn="l"/>
             <a:r>
-              <a:rPr sz="1600" b="1">
+              <a:rPr sz="1500" b="1">
                 <a:solidFill>
                   <a:srgbClr val="0B1F33"/>
                 </a:solidFill>
                 <a:latin typeface="Georgia"/>
               </a:rPr>
-              <a:t>Peer collaboration</a:t>
+              <a:t>Партнёрство с другими MA</a:t>
             </a:r>
           </a:p>
         </p:txBody>
@@ -5910,8 +5910,8 @@
         </p:nvSpPr>
         <p:spPr>
           <a:xfrm>
-            <a:off x="1005840" y="5440679"/>
-            <a:ext cx="10241280" cy="365760"/>
+            <a:off x="1005840" y="5422391"/>
+            <a:ext cx="10241280" cy="411480"/>
           </a:xfrm>
           <a:prstGeom prst="rect">
             <a:avLst/>
@@ -5926,13 +5926,13 @@
           <a:p>
             <a:pPr algn="l"/>
             <a:r>
-              <a:rPr sz="1300" b="0">
+              <a:rPr sz="1200" b="0">
                 <a:solidFill>
                   <a:srgbClr val="5A6B78"/>
                 </a:solidFill>
                 <a:latin typeface="Calibri"/>
               </a:rPr>
-              <a:t>Learn from mature MAs and CBs, and share back local insights from emerging-market project environments.</a:t>
+              <a:t>Учиться у зрелых ассоциаций и CB и делиться опытом emerging-рынков проектной среды.</a:t>
             </a:r>
           </a:p>
         </p:txBody>
@@ -5946,7 +5946,7 @@
         <p:spPr>
           <a:xfrm>
             <a:off x="502920" y="6446520"/>
-            <a:ext cx="7315200" cy="320040"/>
+            <a:ext cx="8229600" cy="320040"/>
           </a:xfrm>
           <a:prstGeom prst="rect">
             <a:avLst/>
@@ -5967,7 +5967,7 @@
                 </a:solidFill>
                 <a:latin typeface="Calibri"/>
               </a:rPr>
-              <a:t>IPMA Kyrgyzstan  ·  Applying Member Association</a:t>
+              <a:t>IPMA Кыргызстан  ·  Ассоциация-кандидат</a:t>
             </a:r>
           </a:p>
         </p:txBody>
@@ -6162,7 +6162,7 @@
         </p:nvSpPr>
         <p:spPr>
           <a:xfrm>
-            <a:off x="822960" y="1417320"/>
+            <a:off x="822960" y="1371600"/>
             <a:ext cx="10058400" cy="320040"/>
           </a:xfrm>
           <a:prstGeom prst="rect">
@@ -6184,7 +6184,7 @@
                 </a:solidFill>
                 <a:latin typeface="Calibri"/>
               </a:rPr>
-              <a:t>WE WELCOME YOUR SUPPORT</a:t>
+              <a:t>МЫ ПРОСИМ ВАШЕЙ ПОДДЕРЖКИ</a:t>
             </a:r>
           </a:p>
         </p:txBody>
@@ -6197,8 +6197,8 @@
         </p:nvSpPr>
         <p:spPr>
           <a:xfrm>
-            <a:off x="822960" y="1965960"/>
-            <a:ext cx="10515600" cy="1828800"/>
+            <a:off x="822960" y="1920240"/>
+            <a:ext cx="10515600" cy="1920240"/>
           </a:xfrm>
           <a:prstGeom prst="rect">
             <a:avLst/>
@@ -6213,13 +6213,13 @@
           <a:p>
             <a:pPr algn="l"/>
             <a:r>
-              <a:rPr sz="2400" b="0">
+              <a:rPr sz="2200" b="0">
                 <a:solidFill>
                   <a:srgbClr val="FFFFFF"/>
                 </a:solidFill>
                 <a:latin typeface="Georgia"/>
               </a:rPr>
-              <a:t>The IPMA Kyrgyzstan team is ready to establish a distinct Member Association, grow a national P3M community, and collaborate with IPMA globally and through peer associations.</a:t>
+              <a:t>Команда IPMA Кыргызстан готова создать самостоятельную Member Association, вырастить национальное сообщество P3M и сотрудничать с IPMA глобально и через другие ассоциации.</a:t>
             </a:r>
           </a:p>
         </p:txBody>
@@ -6232,8 +6232,8 @@
         </p:nvSpPr>
         <p:spPr>
           <a:xfrm>
-            <a:off x="822960" y="4069080"/>
-            <a:ext cx="10515600" cy="822960"/>
+            <a:off x="822960" y="4114800"/>
+            <a:ext cx="10515600" cy="914400"/>
           </a:xfrm>
           <a:prstGeom prst="rect">
             <a:avLst/>
@@ -6248,13 +6248,13 @@
           <a:p>
             <a:pPr algn="l"/>
             <a:r>
-              <a:rPr sz="1600" b="0">
+              <a:rPr sz="1500" b="0">
                 <a:solidFill>
                   <a:srgbClr val="C5D4DE"/>
                 </a:solidFill>
                 <a:latin typeface="Calibri"/>
               </a:rPr>
-              <a:t>We respectfully ask for your support as an Applying Member Association — and look forward to contributing a new Central Asian voice to the IPMA family.</a:t>
+              <a:t>Мы уважительно просим поддержать нас как ассоциацию-кандидата — и с нетерпением ждём возможности привнести голос Центральной Азии в семью IPMA.</a:t>
             </a:r>
           </a:p>
         </p:txBody>
@@ -6268,7 +6268,7 @@
         <p:spPr>
           <a:xfrm>
             <a:off x="502920" y="6446520"/>
-            <a:ext cx="7315200" cy="320040"/>
+            <a:ext cx="8229600" cy="320040"/>
           </a:xfrm>
           <a:prstGeom prst="rect">
             <a:avLst/>
@@ -6289,7 +6289,7 @@
                 </a:solidFill>
                 <a:latin typeface="Calibri"/>
               </a:rPr>
-              <a:t>IPMA Kyrgyzstan  ·  Applying Member Association</a:t>
+              <a:t>IPMA Кыргызстан  ·  Ассоциация-кандидат</a:t>
             </a:r>
           </a:p>
         </p:txBody>
@@ -6463,7 +6463,7 @@
                 </a:solidFill>
                 <a:latin typeface="Georgia"/>
               </a:rPr>
-              <a:t>Thank you for your attention</a:t>
+              <a:t>Спасибо за внимание</a:t>
             </a:r>
           </a:p>
         </p:txBody>
@@ -6498,7 +6498,7 @@
                 </a:solidFill>
                 <a:latin typeface="Calibri"/>
               </a:rPr>
-              <a:t>Looking forward to future cooperation within the IPMA family</a:t>
+              <a:t>Ждём сотрудничества в семье IPMA</a:t>
             </a:r>
           </a:p>
         </p:txBody>
@@ -6576,7 +6576,7 @@
                 </a:solidFill>
                 <a:latin typeface="Calibri"/>
               </a:rPr>
-              <a:t>CONTACTS</a:t>
+              <a:t>КОНТАКТЫ</a:t>
             </a:r>
           </a:p>
         </p:txBody>
@@ -6611,7 +6611,7 @@
                 </a:solidFill>
                 <a:latin typeface="Calibri"/>
               </a:rPr>
-              <a:t>President:  [name]@[organisation].kg</a:t>
+              <a:t>Президент:  [имя]@[организация].kg</a:t>
             </a:r>
           </a:p>
         </p:txBody>
@@ -6646,7 +6646,7 @@
                 </a:solidFill>
                 <a:latin typeface="Calibri"/>
               </a:rPr>
-              <a:t>Vice-President:  [name]@[organisation].kg</a:t>
+              <a:t>Вице-президент:  [имя]@[организация].kg</a:t>
             </a:r>
           </a:p>
         </p:txBody>
@@ -6681,7 +6681,7 @@
                 </a:solidFill>
                 <a:latin typeface="Calibri"/>
               </a:rPr>
-              <a:t>Any questions?</a:t>
+              <a:t>Вопросы?</a:t>
             </a:r>
           </a:p>
         </p:txBody>
@@ -6695,7 +6695,7 @@
         <p:spPr>
           <a:xfrm>
             <a:off x="502920" y="6446520"/>
-            <a:ext cx="7315200" cy="320040"/>
+            <a:ext cx="8229600" cy="320040"/>
           </a:xfrm>
           <a:prstGeom prst="rect">
             <a:avLst/>
@@ -6716,7 +6716,7 @@
                 </a:solidFill>
                 <a:latin typeface="Calibri"/>
               </a:rPr>
-              <a:t>IPMA Kyrgyzstan  ·  Applying Member Association</a:t>
+              <a:t>IPMA Кыргызстан  ·  Ассоциация-кандидат</a:t>
             </a:r>
           </a:p>
         </p:txBody>
@@ -6890,7 +6890,7 @@
                 </a:solidFill>
                 <a:latin typeface="Calibri"/>
               </a:rPr>
-              <a:t>IPMA KYRGYZSTAN</a:t>
+              <a:t>IPMA КЫРГЫЗСТАН</a:t>
             </a:r>
           </a:p>
         </p:txBody>
@@ -6919,13 +6919,13 @@
           <a:p>
             <a:pPr algn="l"/>
             <a:r>
-              <a:rPr sz="3000" b="1">
+              <a:rPr sz="2800" b="1">
                 <a:solidFill>
                   <a:srgbClr val="0B1F33"/>
                 </a:solidFill>
                 <a:latin typeface="Georgia"/>
               </a:rPr>
-              <a:t>Introduction of ourselves</a:t>
+              <a:t>Представление команды</a:t>
             </a:r>
           </a:p>
         </p:txBody>
@@ -6960,7 +6960,7 @@
                 </a:solidFill>
                 <a:latin typeface="Calibri"/>
               </a:rPr>
-              <a:t>Leadership of the applying Member Association</a:t>
+              <a:t>Руководство ассоциации-кандидата</a:t>
             </a:r>
           </a:p>
         </p:txBody>
@@ -7081,7 +7081,7 @@
                 </a:solidFill>
                 <a:latin typeface="Calibri"/>
               </a:rPr>
-              <a:t>PRESIDENT</a:t>
+              <a:t>ПРЕЗИДЕНТ</a:t>
             </a:r>
           </a:p>
         </p:txBody>
@@ -7116,7 +7116,7 @@
                 </a:solidFill>
                 <a:latin typeface="Georgia"/>
               </a:rPr>
-              <a:t>[Name Surname]</a:t>
+              <a:t>[Имя Фамилия]</a:t>
             </a:r>
           </a:p>
         </p:txBody>
@@ -7145,65 +7145,65 @@
           <a:p>
             <a:pPr>
               <a:spcAft>
-                <a:spcPts val="1000"/>
+                <a:spcPts val="900"/>
               </a:spcAft>
             </a:pPr>
             <a:r>
-              <a:rPr sz="1400" b="0">
+              <a:rPr sz="1300" b="0">
                 <a:solidFill>
                   <a:srgbClr val="1C2834"/>
                 </a:solidFill>
                 <a:latin typeface="Calibri"/>
               </a:rPr>
-              <a:t>• Project management practitioner / academic with experience in Kyrgyzstan</a:t>
+              <a:t>• Практик / преподаватель в области управления проектами в Кыргызстане</a:t>
             </a:r>
           </a:p>
           <a:p>
             <a:pPr>
               <a:spcAft>
-                <a:spcPts val="1000"/>
+                <a:spcPts val="900"/>
               </a:spcAft>
             </a:pPr>
             <a:r>
-              <a:rPr sz="1400" b="0">
+              <a:rPr sz="1300" b="0">
                 <a:solidFill>
                   <a:srgbClr val="1C2834"/>
                 </a:solidFill>
                 <a:latin typeface="Calibri"/>
               </a:rPr>
-              <a:t>• Leadership in establishing a national PM professional community</a:t>
+              <a:t>• Опыт формирования национального профессионального сообщества PM</a:t>
             </a:r>
           </a:p>
           <a:p>
             <a:pPr>
               <a:spcAft>
-                <a:spcPts val="1000"/>
+                <a:spcPts val="900"/>
               </a:spcAft>
             </a:pPr>
             <a:r>
-              <a:rPr sz="1400" b="0">
+              <a:rPr sz="1300" b="0">
                 <a:solidFill>
                   <a:srgbClr val="1C2834"/>
                 </a:solidFill>
                 <a:latin typeface="Calibri"/>
               </a:rPr>
-              <a:t>• Strong links with universities, public sector and industry partners</a:t>
+              <a:t>• Связи с университетами, госсектором и бизнес-партнёрами</a:t>
             </a:r>
           </a:p>
           <a:p>
             <a:pPr>
               <a:spcAft>
-                <a:spcPts val="1000"/>
+                <a:spcPts val="900"/>
               </a:spcAft>
             </a:pPr>
             <a:r>
-              <a:rPr sz="1400" b="0">
+              <a:rPr sz="1300" b="0">
                 <a:solidFill>
                   <a:srgbClr val="1C2834"/>
                 </a:solidFill>
                 <a:latin typeface="Calibri"/>
               </a:rPr>
-              <a:t>• Committed to aligning national practice with IPMA values and standards</a:t>
+              <a:t>• Готовность выстраивать практику в соответствии с ценностями IPMA</a:t>
             </a:r>
           </a:p>
         </p:txBody>
@@ -7324,7 +7324,7 @@
                 </a:solidFill>
                 <a:latin typeface="Calibri"/>
               </a:rPr>
-              <a:t>VICE-PRESIDENT</a:t>
+              <a:t>ВИЦЕ-ПРЕЗИДЕНТ</a:t>
             </a:r>
           </a:p>
         </p:txBody>
@@ -7359,7 +7359,7 @@
                 </a:solidFill>
                 <a:latin typeface="Georgia"/>
               </a:rPr>
-              <a:t>[Name Surname]</a:t>
+              <a:t>[Имя Фамилия]</a:t>
             </a:r>
           </a:p>
         </p:txBody>
@@ -7388,65 +7388,65 @@
           <a:p>
             <a:pPr>
               <a:spcAft>
-                <a:spcPts val="1000"/>
+                <a:spcPts val="900"/>
               </a:spcAft>
             </a:pPr>
             <a:r>
-              <a:rPr sz="1400" b="0">
+              <a:rPr sz="1300" b="0">
                 <a:solidFill>
                   <a:srgbClr val="1C2834"/>
                 </a:solidFill>
                 <a:latin typeface="Calibri"/>
               </a:rPr>
-              <a:t>• Experience in education, certification pathways and community building</a:t>
+              <a:t>• Опыт в образовании, сертификационных траекториях и развитии сообщества</a:t>
             </a:r>
           </a:p>
           <a:p>
             <a:pPr>
               <a:spcAft>
-                <a:spcPts val="1000"/>
+                <a:spcPts val="900"/>
               </a:spcAft>
             </a:pPr>
             <a:r>
-              <a:rPr sz="1400" b="0">
+              <a:rPr sz="1300" b="0">
                 <a:solidFill>
                   <a:srgbClr val="1C2834"/>
                 </a:solidFill>
                 <a:latin typeface="Calibri"/>
               </a:rPr>
-              <a:t>• Focus on Young Crew development and university engagement</a:t>
+              <a:t>• Фокус на Young Crew и работе с университетами</a:t>
             </a:r>
           </a:p>
           <a:p>
             <a:pPr>
               <a:spcAft>
-                <a:spcPts val="1000"/>
+                <a:spcPts val="900"/>
               </a:spcAft>
             </a:pPr>
             <a:r>
-              <a:rPr sz="1400" b="0">
+              <a:rPr sz="1300" b="0">
                 <a:solidFill>
                   <a:srgbClr val="1C2834"/>
                 </a:solidFill>
                 <a:latin typeface="Calibri"/>
               </a:rPr>
-              <a:t>• Author / contributor in project and programme management topics</a:t>
+              <a:t>• Автор / участник публикаций по управлению проектами и программами</a:t>
             </a:r>
           </a:p>
           <a:p>
             <a:pPr>
               <a:spcAft>
-                <a:spcPts val="1000"/>
+                <a:spcPts val="900"/>
               </a:spcAft>
             </a:pPr>
             <a:r>
-              <a:rPr sz="1400" b="0">
+              <a:rPr sz="1300" b="0">
                 <a:solidFill>
                   <a:srgbClr val="1C2834"/>
                 </a:solidFill>
                 <a:latin typeface="Calibri"/>
               </a:rPr>
-              <a:t>• Ready to co-lead IPMA Kyrgyzstan operations and partnerships</a:t>
+              <a:t>• Готовность совместно вести операционную работу и партнёрства</a:t>
             </a:r>
           </a:p>
         </p:txBody>
@@ -7460,7 +7460,7 @@
         <p:spPr>
           <a:xfrm>
             <a:off x="502920" y="6446520"/>
-            <a:ext cx="7315200" cy="320040"/>
+            <a:ext cx="8229600" cy="320040"/>
           </a:xfrm>
           <a:prstGeom prst="rect">
             <a:avLst/>
@@ -7481,7 +7481,7 @@
                 </a:solidFill>
                 <a:latin typeface="Calibri"/>
               </a:rPr>
-              <a:t>IPMA Kyrgyzstan  ·  Applying Member Association</a:t>
+              <a:t>IPMA Кыргызстан  ·  Ассоциация-кандидат</a:t>
             </a:r>
           </a:p>
         </p:txBody>
@@ -7655,7 +7655,7 @@
                 </a:solidFill>
                 <a:latin typeface="Calibri"/>
               </a:rPr>
-              <a:t>IPMA KYRGYZSTAN</a:t>
+              <a:t>IPMA КЫРГЫЗСТАН</a:t>
             </a:r>
           </a:p>
         </p:txBody>
@@ -7684,13 +7684,13 @@
           <a:p>
             <a:pPr algn="l"/>
             <a:r>
-              <a:rPr sz="3000" b="1">
+              <a:rPr sz="2800" b="1">
                 <a:solidFill>
                   <a:srgbClr val="0B1F33"/>
                 </a:solidFill>
                 <a:latin typeface="Georgia"/>
               </a:rPr>
-              <a:t>A team ready to build IPMA Kyrgyzstan</a:t>
+              <a:t>Команда готова к запуску</a:t>
             </a:r>
           </a:p>
         </p:txBody>
@@ -7725,7 +7725,7 @@
                 </a:solidFill>
                 <a:latin typeface="Calibri"/>
               </a:rPr>
-              <a:t>Governance roles prepared for launch</a:t>
+              <a:t>Ключевые роли управления ассоциацией</a:t>
             </a:r>
           </a:p>
         </p:txBody>
@@ -7824,8 +7824,8 @@
         </p:nvSpPr>
         <p:spPr>
           <a:xfrm>
-            <a:off x="914400" y="2240280"/>
-            <a:ext cx="3108960" cy="411480"/>
+            <a:off x="914400" y="2194560"/>
+            <a:ext cx="3108960" cy="457200"/>
           </a:xfrm>
           <a:prstGeom prst="rect">
             <a:avLst/>
@@ -7840,13 +7840,13 @@
           <a:p>
             <a:pPr algn="l"/>
             <a:r>
-              <a:rPr sz="1800" b="1">
+              <a:rPr sz="1600" b="1">
                 <a:solidFill>
                   <a:srgbClr val="0B1F33"/>
                 </a:solidFill>
                 <a:latin typeface="Georgia"/>
               </a:rPr>
-              <a:t>President</a:t>
+              <a:t>Президент</a:t>
             </a:r>
           </a:p>
         </p:txBody>
@@ -7881,7 +7881,7 @@
                 </a:solidFill>
                 <a:latin typeface="Calibri"/>
               </a:rPr>
-              <a:t>Overall leadership &amp; CoD representation</a:t>
+              <a:t>Общее руководство и представительство на CoD</a:t>
             </a:r>
           </a:p>
         </p:txBody>
@@ -7980,8 +7980,8 @@
         </p:nvSpPr>
         <p:spPr>
           <a:xfrm>
-            <a:off x="4663440" y="2240280"/>
-            <a:ext cx="3108960" cy="411480"/>
+            <a:off x="4663440" y="2194560"/>
+            <a:ext cx="3108960" cy="457200"/>
           </a:xfrm>
           <a:prstGeom prst="rect">
             <a:avLst/>
@@ -7996,13 +7996,13 @@
           <a:p>
             <a:pPr algn="l"/>
             <a:r>
-              <a:rPr sz="1800" b="1">
+              <a:rPr sz="1600" b="1">
                 <a:solidFill>
                   <a:srgbClr val="0B1F33"/>
                 </a:solidFill>
                 <a:latin typeface="Georgia"/>
               </a:rPr>
-              <a:t>Vice-President</a:t>
+              <a:t>Вице-президент</a:t>
             </a:r>
           </a:p>
         </p:txBody>
@@ -8037,7 +8037,7 @@
                 </a:solidFill>
                 <a:latin typeface="Calibri"/>
               </a:rPr>
-              <a:t>Membership, partners &amp; operations</a:t>
+              <a:t>Членство, партнёры и операционная работа</a:t>
             </a:r>
           </a:p>
         </p:txBody>
@@ -8136,8 +8136,8 @@
         </p:nvSpPr>
         <p:spPr>
           <a:xfrm>
-            <a:off x="8412479" y="2240280"/>
-            <a:ext cx="3108960" cy="411480"/>
+            <a:off x="8412479" y="2194560"/>
+            <a:ext cx="3108960" cy="457200"/>
           </a:xfrm>
           <a:prstGeom prst="rect">
             <a:avLst/>
@@ -8152,13 +8152,13 @@
           <a:p>
             <a:pPr algn="l"/>
             <a:r>
-              <a:rPr sz="1800" b="1">
+              <a:rPr sz="1600" b="1">
                 <a:solidFill>
                   <a:srgbClr val="0B1F33"/>
                 </a:solidFill>
                 <a:latin typeface="Georgia"/>
               </a:rPr>
-              <a:t>Certification Lead</a:t>
+              <a:t>Руководитель сертификации</a:t>
             </a:r>
           </a:p>
         </p:txBody>
@@ -8193,7 +8193,7 @@
                 </a:solidFill>
                 <a:latin typeface="Calibri"/>
               </a:rPr>
-              <a:t>CB setup, assessors &amp; quality</a:t>
+              <a:t>Создание CB, ассессоры и качество</a:t>
             </a:r>
           </a:p>
         </p:txBody>
@@ -8292,8 +8292,8 @@
         </p:nvSpPr>
         <p:spPr>
           <a:xfrm>
-            <a:off x="914400" y="4206240"/>
-            <a:ext cx="3108960" cy="411480"/>
+            <a:off x="914400" y="4160520"/>
+            <a:ext cx="3108960" cy="457200"/>
           </a:xfrm>
           <a:prstGeom prst="rect">
             <a:avLst/>
@@ -8308,13 +8308,13 @@
           <a:p>
             <a:pPr algn="l"/>
             <a:r>
-              <a:rPr sz="1800" b="1">
+              <a:rPr sz="1600" b="1">
                 <a:solidFill>
                   <a:srgbClr val="0B1F33"/>
                 </a:solidFill>
                 <a:latin typeface="Georgia"/>
               </a:rPr>
-              <a:t>Young Crew Lead</a:t>
+              <a:t>Лидер Young Crew</a:t>
             </a:r>
           </a:p>
         </p:txBody>
@@ -8349,7 +8349,7 @@
                 </a:solidFill>
                 <a:latin typeface="Calibri"/>
               </a:rPr>
-              <a:t>Universities &amp; early-career talent</a:t>
+              <a:t>Университеты и молодые специалисты</a:t>
             </a:r>
           </a:p>
         </p:txBody>
@@ -8448,8 +8448,8 @@
         </p:nvSpPr>
         <p:spPr>
           <a:xfrm>
-            <a:off x="4663440" y="4206240"/>
-            <a:ext cx="3108960" cy="411480"/>
+            <a:off x="4663440" y="4160520"/>
+            <a:ext cx="3108960" cy="457200"/>
           </a:xfrm>
           <a:prstGeom prst="rect">
             <a:avLst/>
@@ -8464,13 +8464,13 @@
           <a:p>
             <a:pPr algn="l"/>
             <a:r>
-              <a:rPr sz="1800" b="1">
+              <a:rPr sz="1600" b="1">
                 <a:solidFill>
                   <a:srgbClr val="0B1F33"/>
                 </a:solidFill>
                 <a:latin typeface="Georgia"/>
               </a:rPr>
-              <a:t>Communications</a:t>
+              <a:t>Коммуникации</a:t>
             </a:r>
           </a:p>
         </p:txBody>
@@ -8505,7 +8505,7 @@
                 </a:solidFill>
                 <a:latin typeface="Calibri"/>
               </a:rPr>
-              <a:t>Ecosystem, events &amp; digital presence</a:t>
+              <a:t>Экосистема, мероприятия и цифровой канал</a:t>
             </a:r>
           </a:p>
         </p:txBody>
@@ -8604,8 +8604,8 @@
         </p:nvSpPr>
         <p:spPr>
           <a:xfrm>
-            <a:off x="8412479" y="4206240"/>
-            <a:ext cx="3108960" cy="411480"/>
+            <a:off x="8412479" y="4160520"/>
+            <a:ext cx="3108960" cy="457200"/>
           </a:xfrm>
           <a:prstGeom prst="rect">
             <a:avLst/>
@@ -8620,13 +8620,13 @@
           <a:p>
             <a:pPr algn="l"/>
             <a:r>
-              <a:rPr sz="1800" b="1">
+              <a:rPr sz="1600" b="1">
                 <a:solidFill>
                   <a:srgbClr val="0B1F33"/>
                 </a:solidFill>
                 <a:latin typeface="Georgia"/>
               </a:rPr>
-              <a:t>Treasurer</a:t>
+              <a:t>Казначей</a:t>
             </a:r>
           </a:p>
         </p:txBody>
@@ -8661,7 +8661,7 @@
                 </a:solidFill>
                 <a:latin typeface="Calibri"/>
               </a:rPr>
-              <a:t>Not-for-profit financial stewardship</a:t>
+              <a:t>Финансовое управление НКО</a:t>
             </a:r>
           </a:p>
         </p:txBody>
@@ -8675,7 +8675,7 @@
         <p:spPr>
           <a:xfrm>
             <a:off x="502920" y="6446520"/>
-            <a:ext cx="7315200" cy="320040"/>
+            <a:ext cx="8229600" cy="320040"/>
           </a:xfrm>
           <a:prstGeom prst="rect">
             <a:avLst/>
@@ -8696,7 +8696,7 @@
                 </a:solidFill>
                 <a:latin typeface="Calibri"/>
               </a:rPr>
-              <a:t>IPMA Kyrgyzstan  ·  Applying Member Association</a:t>
+              <a:t>IPMA Кыргызстан  ·  Ассоциация-кандидат</a:t>
             </a:r>
           </a:p>
         </p:txBody>
@@ -8870,7 +8870,7 @@
                 </a:solidFill>
                 <a:latin typeface="Calibri"/>
               </a:rPr>
-              <a:t>IPMA KYRGYZSTAN</a:t>
+              <a:t>IPMA КЫРГЫЗСТАН</a:t>
             </a:r>
           </a:p>
         </p:txBody>
@@ -8899,13 +8899,13 @@
           <a:p>
             <a:pPr algn="l"/>
             <a:r>
-              <a:rPr sz="3000" b="1">
+              <a:rPr sz="2800" b="1">
                 <a:solidFill>
                   <a:srgbClr val="0B1F33"/>
                 </a:solidFill>
                 <a:latin typeface="Georgia"/>
               </a:rPr>
-              <a:t>Strategic position of Kyrgyzstan</a:t>
+              <a:t>Стратегическое положение Кыргызстана</a:t>
             </a:r>
           </a:p>
         </p:txBody>
@@ -8940,7 +8940,7 @@
                 </a:solidFill>
                 <a:latin typeface="Calibri"/>
               </a:rPr>
-              <a:t>A Central Asian gateway for professional project management</a:t>
+              <a:t>Центральноазиатский мост для профессионального управления проектами</a:t>
             </a:r>
           </a:p>
         </p:txBody>
@@ -8997,7 +8997,7 @@
         <p:spPr>
           <a:xfrm>
             <a:off x="868680" y="1965960"/>
-            <a:ext cx="2194560" cy="365760"/>
+            <a:ext cx="2377440" cy="365760"/>
           </a:xfrm>
           <a:prstGeom prst="rect">
             <a:avLst/>
@@ -9018,7 +9018,7 @@
                 </a:solidFill>
                 <a:latin typeface="Calibri"/>
               </a:rPr>
-              <a:t>Area</a:t>
+              <a:t>Площадь</a:t>
             </a:r>
           </a:p>
         </p:txBody>
@@ -9031,8 +9031,8 @@
         </p:nvSpPr>
         <p:spPr>
           <a:xfrm>
-            <a:off x="3108960" y="1965960"/>
-            <a:ext cx="8229600" cy="365760"/>
+            <a:off x="3291840" y="1965960"/>
+            <a:ext cx="8046720" cy="365760"/>
           </a:xfrm>
           <a:prstGeom prst="rect">
             <a:avLst/>
@@ -9047,13 +9047,13 @@
           <a:p>
             <a:pPr algn="l"/>
             <a:r>
-              <a:rPr sz="1400" b="0">
+              <a:rPr sz="1300" b="0">
                 <a:solidFill>
                   <a:srgbClr val="1C2834"/>
                 </a:solidFill>
                 <a:latin typeface="Calibri"/>
               </a:rPr>
-              <a:t>199,900 km² — mountainous heart of Central Asia</a:t>
+              <a:t>199 900 км² — горное сердце Центральной Азии</a:t>
             </a:r>
           </a:p>
         </p:txBody>
@@ -9110,7 +9110,7 @@
         <p:spPr>
           <a:xfrm>
             <a:off x="868680" y="2651760"/>
-            <a:ext cx="2194560" cy="365760"/>
+            <a:ext cx="2377440" cy="365760"/>
           </a:xfrm>
           <a:prstGeom prst="rect">
             <a:avLst/>
@@ -9131,7 +9131,7 @@
                 </a:solidFill>
                 <a:latin typeface="Calibri"/>
               </a:rPr>
-              <a:t>Population</a:t>
+              <a:t>Население</a:t>
             </a:r>
           </a:p>
         </p:txBody>
@@ -9144,8 +9144,8 @@
         </p:nvSpPr>
         <p:spPr>
           <a:xfrm>
-            <a:off x="3108960" y="2651760"/>
-            <a:ext cx="8229600" cy="365760"/>
+            <a:off x="3291840" y="2651760"/>
+            <a:ext cx="8046720" cy="365760"/>
           </a:xfrm>
           <a:prstGeom prst="rect">
             <a:avLst/>
@@ -9160,13 +9160,13 @@
           <a:p>
             <a:pPr algn="l"/>
             <a:r>
-              <a:rPr sz="1400" b="0">
+              <a:rPr sz="1300" b="0">
                 <a:solidFill>
                   <a:srgbClr val="1C2834"/>
                 </a:solidFill>
                 <a:latin typeface="Calibri"/>
               </a:rPr>
-              <a:t>~7.2 million (2024)</a:t>
+              <a:t>~7,2 млн (2024)</a:t>
             </a:r>
           </a:p>
         </p:txBody>
@@ -9223,7 +9223,7 @@
         <p:spPr>
           <a:xfrm>
             <a:off x="868680" y="3337560"/>
-            <a:ext cx="2194560" cy="365760"/>
+            <a:ext cx="2377440" cy="365760"/>
           </a:xfrm>
           <a:prstGeom prst="rect">
             <a:avLst/>
@@ -9244,7 +9244,7 @@
                 </a:solidFill>
                 <a:latin typeface="Calibri"/>
               </a:rPr>
-              <a:t>Capital / HQ</a:t>
+              <a:t>Столица / офис</a:t>
             </a:r>
           </a:p>
         </p:txBody>
@@ -9257,8 +9257,8 @@
         </p:nvSpPr>
         <p:spPr>
           <a:xfrm>
-            <a:off x="3108960" y="3337560"/>
-            <a:ext cx="8229600" cy="365760"/>
+            <a:off x="3291840" y="3337560"/>
+            <a:ext cx="8046720" cy="365760"/>
           </a:xfrm>
           <a:prstGeom prst="rect">
             <a:avLst/>
@@ -9273,13 +9273,13 @@
           <a:p>
             <a:pPr algn="l"/>
             <a:r>
-              <a:rPr sz="1400" b="0">
+              <a:rPr sz="1300" b="0">
                 <a:solidFill>
                   <a:srgbClr val="1C2834"/>
                 </a:solidFill>
                 <a:latin typeface="Calibri"/>
               </a:rPr>
-              <a:t>Bishkek — proposed head office of the MA</a:t>
+              <a:t>Бишкек — предполагаемая штаб-квартира ассоциации</a:t>
             </a:r>
           </a:p>
         </p:txBody>
@@ -9336,7 +9336,7 @@
         <p:spPr>
           <a:xfrm>
             <a:off x="868680" y="4023360"/>
-            <a:ext cx="2194560" cy="365760"/>
+            <a:ext cx="2377440" cy="365760"/>
           </a:xfrm>
           <a:prstGeom prst="rect">
             <a:avLst/>
@@ -9357,7 +9357,7 @@
                 </a:solidFill>
                 <a:latin typeface="Calibri"/>
               </a:rPr>
-              <a:t>Key sectors</a:t>
+              <a:t>Отрасли</a:t>
             </a:r>
           </a:p>
         </p:txBody>
@@ -9370,8 +9370,8 @@
         </p:nvSpPr>
         <p:spPr>
           <a:xfrm>
-            <a:off x="3108960" y="4023360"/>
-            <a:ext cx="8229600" cy="365760"/>
+            <a:off x="3291840" y="4023360"/>
+            <a:ext cx="8046720" cy="365760"/>
           </a:xfrm>
           <a:prstGeom prst="rect">
             <a:avLst/>
@@ -9386,13 +9386,13 @@
           <a:p>
             <a:pPr algn="l"/>
             <a:r>
-              <a:rPr sz="1400" b="0">
+              <a:rPr sz="1300" b="0">
                 <a:solidFill>
                   <a:srgbClr val="1C2834"/>
                 </a:solidFill>
                 <a:latin typeface="Calibri"/>
               </a:rPr>
-              <a:t>Energy &amp; hydropower, mining, infrastructure, agriculture, IT &amp; digital services, public investment programmes</a:t>
+              <a:t>Энергетика и ГЭС, добыча, инфраструктура, сельское хозяйство, IT, госпрограммы инвестиций</a:t>
             </a:r>
           </a:p>
         </p:txBody>
@@ -9449,7 +9449,7 @@
         <p:spPr>
           <a:xfrm>
             <a:off x="868680" y="4709160"/>
-            <a:ext cx="2194560" cy="365760"/>
+            <a:ext cx="2377440" cy="365760"/>
           </a:xfrm>
           <a:prstGeom prst="rect">
             <a:avLst/>
@@ -9470,7 +9470,7 @@
                 </a:solidFill>
                 <a:latin typeface="Calibri"/>
               </a:rPr>
-              <a:t>Regional role</a:t>
+              <a:t>Регион</a:t>
             </a:r>
           </a:p>
         </p:txBody>
@@ -9483,8 +9483,8 @@
         </p:nvSpPr>
         <p:spPr>
           <a:xfrm>
-            <a:off x="3108960" y="4709160"/>
-            <a:ext cx="8229600" cy="365760"/>
+            <a:off x="3291840" y="4709160"/>
+            <a:ext cx="8046720" cy="365760"/>
           </a:xfrm>
           <a:prstGeom prst="rect">
             <a:avLst/>
@@ -9499,13 +9499,13 @@
           <a:p>
             <a:pPr algn="l"/>
             <a:r>
-              <a:rPr sz="1400" b="0">
+              <a:rPr sz="1300" b="0">
                 <a:solidFill>
                   <a:srgbClr val="1C2834"/>
                 </a:solidFill>
                 <a:latin typeface="Calibri"/>
               </a:rPr>
-              <a:t>Bridge between Central Asia, corridor projects and Eurasian markets</a:t>
+              <a:t>Связующее звено между Центральной Азией, коридорными проектами и евразийскими рынками</a:t>
             </a:r>
           </a:p>
         </p:txBody>
@@ -9562,7 +9562,7 @@
         <p:spPr>
           <a:xfrm>
             <a:off x="868680" y="5394960"/>
-            <a:ext cx="2194560" cy="365760"/>
+            <a:ext cx="2377440" cy="365760"/>
           </a:xfrm>
           <a:prstGeom prst="rect">
             <a:avLst/>
@@ -9583,7 +9583,7 @@
                 </a:solidFill>
                 <a:latin typeface="Calibri"/>
               </a:rPr>
-              <a:t>Opportunity</a:t>
+              <a:t>Возможность</a:t>
             </a:r>
           </a:p>
         </p:txBody>
@@ -9596,8 +9596,8 @@
         </p:nvSpPr>
         <p:spPr>
           <a:xfrm>
-            <a:off x="3108960" y="5394960"/>
-            <a:ext cx="8229600" cy="365760"/>
+            <a:off x="3291840" y="5394960"/>
+            <a:ext cx="8046720" cy="365760"/>
           </a:xfrm>
           <a:prstGeom prst="rect">
             <a:avLst/>
@@ -9612,13 +9612,13 @@
           <a:p>
             <a:pPr algn="l"/>
             <a:r>
-              <a:rPr sz="1400" b="0">
+              <a:rPr sz="1300" b="0">
                 <a:solidFill>
                   <a:srgbClr val="1C2834"/>
                 </a:solidFill>
                 <a:latin typeface="Calibri"/>
               </a:rPr>
-              <a:t>Growing demand for competent P3M capability in national and donor-funded projects</a:t>
+              <a:t>Растущий спрос на компетенции P3M в национальных и донорских проектах</a:t>
             </a:r>
           </a:p>
         </p:txBody>
@@ -9632,7 +9632,7 @@
         <p:spPr>
           <a:xfrm>
             <a:off x="502920" y="6446520"/>
-            <a:ext cx="7315200" cy="320040"/>
+            <a:ext cx="8229600" cy="320040"/>
           </a:xfrm>
           <a:prstGeom prst="rect">
             <a:avLst/>
@@ -9653,7 +9653,7 @@
                 </a:solidFill>
                 <a:latin typeface="Calibri"/>
               </a:rPr>
-              <a:t>IPMA Kyrgyzstan  ·  Applying Member Association</a:t>
+              <a:t>IPMA Кыргызстан  ·  Ассоциация-кандидат</a:t>
             </a:r>
           </a:p>
         </p:txBody>
@@ -9848,7 +9848,7 @@
         </p:nvSpPr>
         <p:spPr>
           <a:xfrm>
-            <a:off x="822960" y="1645920"/>
+            <a:off x="822960" y="1554480"/>
             <a:ext cx="10058400" cy="320040"/>
           </a:xfrm>
           <a:prstGeom prst="rect">
@@ -9870,7 +9870,7 @@
                 </a:solidFill>
                 <a:latin typeface="Calibri"/>
               </a:rPr>
-              <a:t>OUR MISSION</a:t>
+              <a:t>НАША МИССИЯ</a:t>
             </a:r>
           </a:p>
         </p:txBody>
@@ -9883,8 +9883,8 @@
         </p:nvSpPr>
         <p:spPr>
           <a:xfrm>
-            <a:off x="822960" y="2148840"/>
-            <a:ext cx="10515600" cy="2103120"/>
+            <a:off x="822960" y="2057400"/>
+            <a:ext cx="10515600" cy="2286000"/>
           </a:xfrm>
           <a:prstGeom prst="rect">
             <a:avLst/>
@@ -9899,13 +9899,13 @@
           <a:p>
             <a:pPr algn="l"/>
             <a:r>
-              <a:rPr sz="2600" b="0">
+              <a:rPr sz="2400" b="0">
                 <a:solidFill>
                   <a:srgbClr val="FFFFFF"/>
                 </a:solidFill>
                 <a:latin typeface="Georgia"/>
               </a:rPr>
-              <a:t>Promote and strengthen professionalism in project, programme and portfolio management across Kyrgyzstan — so that public and private projects achieve their objectives efficiently, ethically and in line with IPMA values and standards.</a:t>
+              <a:t>Продвигать и укреплять профессионализм в управлении проектами, программами и портфелями в Кыргызстане — чтобы государственные и частные проекты достигали целей эффективно, этично и в соответствии с ценностями и стандартами IPMA.</a:t>
             </a:r>
           </a:p>
         </p:txBody>
@@ -9918,7 +9918,7 @@
         </p:nvSpPr>
         <p:spPr>
           <a:xfrm>
-            <a:off x="822960" y="4572000"/>
+            <a:off x="822960" y="4617720"/>
             <a:ext cx="10058400" cy="411480"/>
           </a:xfrm>
           <a:prstGeom prst="rect">
@@ -9940,7 +9940,7 @@
                 </a:solidFill>
                 <a:latin typeface="Calibri"/>
               </a:rPr>
-              <a:t>A national home for the IPMA ecosystem in Central Asia.</a:t>
+              <a:t>Национальный дом экосистемы IPMA в Центральной Азии.</a:t>
             </a:r>
           </a:p>
         </p:txBody>
@@ -9954,7 +9954,7 @@
         <p:spPr>
           <a:xfrm>
             <a:off x="502920" y="6446520"/>
-            <a:ext cx="7315200" cy="320040"/>
+            <a:ext cx="8229600" cy="320040"/>
           </a:xfrm>
           <a:prstGeom prst="rect">
             <a:avLst/>
@@ -9975,7 +9975,7 @@
                 </a:solidFill>
                 <a:latin typeface="Calibri"/>
               </a:rPr>
-              <a:t>IPMA Kyrgyzstan  ·  Applying Member Association</a:t>
+              <a:t>IPMA Кыргызстан  ·  Ассоциация-кандидат</a:t>
             </a:r>
           </a:p>
         </p:txBody>
@@ -10149,7 +10149,7 @@
                 </a:solidFill>
                 <a:latin typeface="Calibri"/>
               </a:rPr>
-              <a:t>IPMA KYRGYZSTAN</a:t>
+              <a:t>IPMA КЫРГЫЗСТАН</a:t>
             </a:r>
           </a:p>
         </p:txBody>
@@ -10178,13 +10178,13 @@
           <a:p>
             <a:pPr algn="l"/>
             <a:r>
-              <a:rPr sz="3000" b="1">
+              <a:rPr sz="2800" b="1">
                 <a:solidFill>
                   <a:srgbClr val="0B1F33"/>
                 </a:solidFill>
                 <a:latin typeface="Georgia"/>
               </a:rPr>
-              <a:t>Strategic goals</a:t>
+              <a:t>Стратегические цели</a:t>
             </a:r>
           </a:p>
         </p:txBody>
@@ -10219,7 +10219,7 @@
                 </a:solidFill>
                 <a:latin typeface="Calibri"/>
               </a:rPr>
-              <a:t>Clear priorities for the first three years</a:t>
+              <a:t>Приоритеты первых трёх лет</a:t>
             </a:r>
           </a:p>
         </p:txBody>
@@ -10326,13 +10326,13 @@
           <a:p>
             <a:pPr algn="l"/>
             <a:r>
-              <a:rPr sz="1400" b="0">
+              <a:rPr sz="1300" b="0">
                 <a:solidFill>
                   <a:srgbClr val="1C2834"/>
                 </a:solidFill>
                 <a:latin typeface="Calibri"/>
               </a:rPr>
-              <a:t>Establish IPMA Kyrgyzstan as a recognised professional body in the Kyrgyz Republic.</a:t>
+              <a:t>Сделать IPMA Кыргызстан признанным профессиональным органом в Кыргызской Республике.</a:t>
             </a:r>
           </a:p>
         </p:txBody>
@@ -10439,13 +10439,13 @@
           <a:p>
             <a:pPr algn="l"/>
             <a:r>
-              <a:rPr sz="1400" b="0">
+              <a:rPr sz="1300" b="0">
                 <a:solidFill>
                   <a:srgbClr val="1C2834"/>
                 </a:solidFill>
                 <a:latin typeface="Calibri"/>
               </a:rPr>
-              <a:t>Grow a stable community of individual and corporate members from a clear baseline.</a:t>
+              <a:t>Вырастить устойчивое сообщество индивидуальных и корпоративных членов.</a:t>
             </a:r>
           </a:p>
         </p:txBody>
@@ -10552,13 +10552,13 @@
           <a:p>
             <a:pPr algn="l"/>
             <a:r>
-              <a:rPr sz="1400" b="0">
+              <a:rPr sz="1300" b="0">
                 <a:solidFill>
                   <a:srgbClr val="1C2834"/>
                 </a:solidFill>
                 <a:latin typeface="Calibri"/>
               </a:rPr>
-              <a:t>Establish the Kyrgyzstan Certification Body across all 4 IPMA levels.</a:t>
+              <a:t>Создать сертифицирующий орган (CB) Кыргызстана по всем 4 уровням IPMA.</a:t>
             </a:r>
           </a:p>
         </p:txBody>
@@ -10665,13 +10665,13 @@
           <a:p>
             <a:pPr algn="l"/>
             <a:r>
-              <a:rPr sz="1400" b="0">
+              <a:rPr sz="1300" b="0">
                 <a:solidFill>
                   <a:srgbClr val="1C2834"/>
                 </a:solidFill>
                 <a:latin typeface="Calibri"/>
               </a:rPr>
-              <a:t>Achieve sustained certification growth and quality of assessment.</a:t>
+              <a:t>Обеспечить рост сертификации и высокое качество оценки.</a:t>
             </a:r>
           </a:p>
         </p:txBody>
@@ -10778,13 +10778,13 @@
           <a:p>
             <a:pPr algn="l"/>
             <a:r>
-              <a:rPr sz="1400" b="0">
+              <a:rPr sz="1300" b="0">
                 <a:solidFill>
                   <a:srgbClr val="1C2834"/>
                 </a:solidFill>
                 <a:latin typeface="Calibri"/>
               </a:rPr>
-              <a:t>Promote the IPMA standard across Kyrgyzstan and the wider Central Asian region.</a:t>
+              <a:t>Продвигать стандарт IPMA в Кыргызстане и шире в Центральной Азии.</a:t>
             </a:r>
           </a:p>
         </p:txBody>
@@ -10891,13 +10891,13 @@
           <a:p>
             <a:pPr algn="l"/>
             <a:r>
-              <a:rPr sz="1400" b="0">
+              <a:rPr sz="1300" b="0">
                 <a:solidFill>
                   <a:srgbClr val="1C2834"/>
                 </a:solidFill>
                 <a:latin typeface="Calibri"/>
               </a:rPr>
-              <a:t>Launch and develop Young Crew Kyrgyzstan with universities.</a:t>
+              <a:t>Запустить и развивать Young Crew Кыргызстан вместе с университетами.</a:t>
             </a:r>
           </a:p>
         </p:txBody>
@@ -11004,13 +11004,13 @@
           <a:p>
             <a:pPr algn="l"/>
             <a:r>
-              <a:rPr sz="1400" b="0">
+              <a:rPr sz="1300" b="0">
                 <a:solidFill>
                   <a:srgbClr val="1C2834"/>
                 </a:solidFill>
                 <a:latin typeface="Calibri"/>
               </a:rPr>
-              <a:t>Participate in and organise IPMA events, webinars and knowledge exchanges.</a:t>
+              <a:t>Участвовать в мероприятиях IPMA и организовывать собственные события и вебинары.</a:t>
             </a:r>
           </a:p>
         </p:txBody>
@@ -11117,13 +11117,13 @@
           <a:p>
             <a:pPr algn="l"/>
             <a:r>
-              <a:rPr sz="1400" b="0">
+              <a:rPr sz="1300" b="0">
                 <a:solidFill>
                   <a:srgbClr val="1C2834"/>
                 </a:solidFill>
                 <a:latin typeface="Calibri"/>
               </a:rPr>
-              <a:t>Build durable partnerships with training providers, employers and peer MAs.</a:t>
+              <a:t>Выстроить партнёрства с провайдерами обучения, работодателями и другими MA.</a:t>
             </a:r>
           </a:p>
         </p:txBody>
@@ -11137,7 +11137,7 @@
         <p:spPr>
           <a:xfrm>
             <a:off x="502920" y="6446520"/>
-            <a:ext cx="7315200" cy="320040"/>
+            <a:ext cx="8229600" cy="320040"/>
           </a:xfrm>
           <a:prstGeom prst="rect">
             <a:avLst/>
@@ -11158,7 +11158,7 @@
                 </a:solidFill>
                 <a:latin typeface="Calibri"/>
               </a:rPr>
-              <a:t>IPMA Kyrgyzstan  ·  Applying Member Association</a:t>
+              <a:t>IPMA Кыргызстан  ·  Ассоциация-кандидат</a:t>
             </a:r>
           </a:p>
         </p:txBody>
@@ -11332,7 +11332,7 @@
                 </a:solidFill>
                 <a:latin typeface="Calibri"/>
               </a:rPr>
-              <a:t>IPMA KYRGYZSTAN</a:t>
+              <a:t>IPMA КЫРГЫЗСТАН</a:t>
             </a:r>
           </a:p>
         </p:txBody>
@@ -11361,13 +11361,13 @@
           <a:p>
             <a:pPr algn="l"/>
             <a:r>
-              <a:rPr sz="3000" b="1">
+              <a:rPr sz="2800" b="1">
                 <a:solidFill>
                   <a:srgbClr val="0B1F33"/>
                 </a:solidFill>
                 <a:latin typeface="Georgia"/>
               </a:rPr>
-              <a:t>Roadmap 2025–2027</a:t>
+              <a:t>Дорожная карта 2025–2027</a:t>
             </a:r>
           </a:p>
         </p:txBody>
@@ -11402,7 +11402,7 @@
                 </a:solidFill>
                 <a:latin typeface="Calibri"/>
               </a:rPr>
-              <a:t>Stabilise · Grow · Scale</a:t>
+              <a:t>Стабилизация · Рост · Масштаб</a:t>
             </a:r>
           </a:p>
         </p:txBody>
@@ -11459,7 +11459,7 @@
         <p:spPr>
           <a:xfrm>
             <a:off x="640080" y="1874519"/>
-            <a:ext cx="3611880" cy="822960"/>
+            <a:ext cx="3611880" cy="868680"/>
           </a:xfrm>
           <a:prstGeom prst="rect">
             <a:avLst/>
@@ -11537,7 +11537,7 @@
         <p:spPr>
           <a:xfrm>
             <a:off x="868680" y="2331720"/>
-            <a:ext cx="3108960" cy="274320"/>
+            <a:ext cx="3108960" cy="320040"/>
           </a:xfrm>
           <a:prstGeom prst="rect">
             <a:avLst/>
@@ -11552,13 +11552,13 @@
           <a:p>
             <a:pPr algn="l"/>
             <a:r>
-              <a:rPr sz="1300" b="0">
+              <a:rPr sz="1200" b="0">
                 <a:solidFill>
                   <a:srgbClr val="0B1F33"/>
                 </a:solidFill>
                 <a:latin typeface="Calibri"/>
               </a:rPr>
-              <a:t>Establish &amp; launch</a:t>
+              <a:t>Создание и запуск</a:t>
             </a:r>
           </a:p>
         </p:txBody>
@@ -11571,7 +11571,7 @@
         </p:nvSpPr>
         <p:spPr>
           <a:xfrm>
-            <a:off x="914400" y="2926080"/>
+            <a:off x="914400" y="2971800"/>
             <a:ext cx="3108960" cy="2743200"/>
           </a:xfrm>
           <a:prstGeom prst="rect">
@@ -11587,65 +11587,65 @@
           <a:p>
             <a:pPr>
               <a:spcAft>
-                <a:spcPts val="1200"/>
+                <a:spcPts val="1100"/>
               </a:spcAft>
             </a:pPr>
             <a:r>
-              <a:rPr sz="1400" b="0">
+              <a:rPr sz="1300" b="0">
                 <a:solidFill>
                   <a:srgbClr val="1C2834"/>
                 </a:solidFill>
                 <a:latin typeface="Calibri"/>
               </a:rPr>
-              <a:t>• Register non-profit association</a:t>
+              <a:t>• Зарегистрировать некоммерческую ассоциацию</a:t>
             </a:r>
           </a:p>
           <a:p>
             <a:pPr>
               <a:spcAft>
-                <a:spcPts val="1200"/>
+                <a:spcPts val="1100"/>
               </a:spcAft>
             </a:pPr>
             <a:r>
-              <a:rPr sz="1400" b="0">
+              <a:rPr sz="1300" b="0">
                 <a:solidFill>
                   <a:srgbClr val="1C2834"/>
                 </a:solidFill>
                 <a:latin typeface="Calibri"/>
               </a:rPr>
-              <a:t>• Become IPMA Applying Member Association</a:t>
+              <a:t>• Стать ассоциацией-кандидатом IPMA (AMA)</a:t>
             </a:r>
           </a:p>
           <a:p>
             <a:pPr>
               <a:spcAft>
-                <a:spcPts val="1200"/>
+                <a:spcPts val="1100"/>
               </a:spcAft>
             </a:pPr>
             <a:r>
-              <a:rPr sz="1400" b="0">
+              <a:rPr sz="1300" b="0">
                 <a:solidFill>
                   <a:srgbClr val="1C2834"/>
                 </a:solidFill>
                 <a:latin typeface="Calibri"/>
               </a:rPr>
-              <a:t>• Form Board and operating model</a:t>
+              <a:t>• Сформировать совет и операционную модель</a:t>
             </a:r>
           </a:p>
           <a:p>
             <a:pPr>
               <a:spcAft>
-                <a:spcPts val="1200"/>
+                <a:spcPts val="1100"/>
               </a:spcAft>
             </a:pPr>
             <a:r>
-              <a:rPr sz="1400" b="0">
+              <a:rPr sz="1300" b="0">
                 <a:solidFill>
                   <a:srgbClr val="1C2834"/>
                 </a:solidFill>
                 <a:latin typeface="Calibri"/>
               </a:rPr>
-              <a:t>• Target: ~25 founding members</a:t>
+              <a:t>• Цель: ~25 членов-основателей</a:t>
             </a:r>
           </a:p>
         </p:txBody>
@@ -11702,7 +11702,7 @@
         <p:spPr>
           <a:xfrm>
             <a:off x="4434840" y="1874519"/>
-            <a:ext cx="3611880" cy="822960"/>
+            <a:ext cx="3611880" cy="868680"/>
           </a:xfrm>
           <a:prstGeom prst="rect">
             <a:avLst/>
@@ -11780,7 +11780,7 @@
         <p:spPr>
           <a:xfrm>
             <a:off x="4663440" y="2331720"/>
-            <a:ext cx="3108960" cy="274320"/>
+            <a:ext cx="3108960" cy="320040"/>
           </a:xfrm>
           <a:prstGeom prst="rect">
             <a:avLst/>
@@ -11795,13 +11795,13 @@
           <a:p>
             <a:pPr algn="l"/>
             <a:r>
-              <a:rPr sz="1300" b="0">
+              <a:rPr sz="1200" b="0">
                 <a:solidFill>
                   <a:srgbClr val="FFFFFF"/>
                 </a:solidFill>
                 <a:latin typeface="Calibri"/>
               </a:rPr>
-              <a:t>Promote &amp; certify</a:t>
+              <a:t>Продвижение и сертификация</a:t>
             </a:r>
           </a:p>
         </p:txBody>
@@ -11814,7 +11814,7 @@
         </p:nvSpPr>
         <p:spPr>
           <a:xfrm>
-            <a:off x="4709160" y="2926080"/>
+            <a:off x="4709160" y="2971800"/>
             <a:ext cx="3108960" cy="2743200"/>
           </a:xfrm>
           <a:prstGeom prst="rect">
@@ -11830,65 +11830,65 @@
           <a:p>
             <a:pPr>
               <a:spcAft>
-                <a:spcPts val="1200"/>
+                <a:spcPts val="1100"/>
               </a:spcAft>
             </a:pPr>
             <a:r>
-              <a:rPr sz="1400" b="0">
+              <a:rPr sz="1300" b="0">
                 <a:solidFill>
                   <a:srgbClr val="1C2834"/>
                 </a:solidFill>
                 <a:latin typeface="Calibri"/>
               </a:rPr>
-              <a:t>• Grow membership and visibility</a:t>
+              <a:t>• Рост членства и узнаваемости</a:t>
             </a:r>
           </a:p>
           <a:p>
             <a:pPr>
               <a:spcAft>
-                <a:spcPts val="1200"/>
+                <a:spcPts val="1100"/>
               </a:spcAft>
             </a:pPr>
             <a:r>
-              <a:rPr sz="1400" b="0">
+              <a:rPr sz="1300" b="0">
                 <a:solidFill>
                   <a:srgbClr val="1C2834"/>
                 </a:solidFill>
                 <a:latin typeface="Calibri"/>
               </a:rPr>
-              <a:t>• Launch Certification Body pathway</a:t>
+              <a:t>• Запуск пути к Certification Body</a:t>
             </a:r>
           </a:p>
           <a:p>
             <a:pPr>
               <a:spcAft>
-                <a:spcPts val="1200"/>
+                <a:spcPts val="1100"/>
               </a:spcAft>
             </a:pPr>
             <a:r>
-              <a:rPr sz="1400" b="0">
+              <a:rPr sz="1300" b="0">
                 <a:solidFill>
                   <a:srgbClr val="1C2834"/>
                 </a:solidFill>
                 <a:latin typeface="Calibri"/>
               </a:rPr>
-              <a:t>• University &amp; corporate outreach</a:t>
+              <a:t>• Работа с вузами и корпоративным сектором</a:t>
             </a:r>
           </a:p>
           <a:p>
             <a:pPr>
               <a:spcAft>
-                <a:spcPts val="1200"/>
+                <a:spcPts val="1100"/>
               </a:spcAft>
             </a:pPr>
             <a:r>
-              <a:rPr sz="1400" b="0">
+              <a:rPr sz="1300" b="0">
                 <a:solidFill>
                   <a:srgbClr val="1C2834"/>
                 </a:solidFill>
                 <a:latin typeface="Calibri"/>
               </a:rPr>
-              <a:t>• Target: ~60 members</a:t>
+              <a:t>• Цель: ~60 членов</a:t>
             </a:r>
           </a:p>
         </p:txBody>
@@ -11945,7 +11945,7 @@
         <p:spPr>
           <a:xfrm>
             <a:off x="8229600" y="1874519"/>
-            <a:ext cx="3611880" cy="822960"/>
+            <a:ext cx="3611880" cy="868680"/>
           </a:xfrm>
           <a:prstGeom prst="rect">
             <a:avLst/>
@@ -12023,7 +12023,7 @@
         <p:spPr>
           <a:xfrm>
             <a:off x="8458200" y="2331720"/>
-            <a:ext cx="3108960" cy="274320"/>
+            <a:ext cx="3108960" cy="320040"/>
           </a:xfrm>
           <a:prstGeom prst="rect">
             <a:avLst/>
@@ -12038,13 +12038,13 @@
           <a:p>
             <a:pPr algn="l"/>
             <a:r>
-              <a:rPr sz="1300" b="0">
+              <a:rPr sz="1200" b="0">
                 <a:solidFill>
                   <a:srgbClr val="FFFFFF"/>
                 </a:solidFill>
                 <a:latin typeface="Calibri"/>
               </a:rPr>
-              <a:t>Scale &amp; show results</a:t>
+              <a:t>Масштаб и результаты</a:t>
             </a:r>
           </a:p>
         </p:txBody>
@@ -12057,7 +12057,7 @@
         </p:nvSpPr>
         <p:spPr>
           <a:xfrm>
-            <a:off x="8503920" y="2926080"/>
+            <a:off x="8503920" y="2971800"/>
             <a:ext cx="3108960" cy="2743200"/>
           </a:xfrm>
           <a:prstGeom prst="rect">
@@ -12073,65 +12073,65 @@
           <a:p>
             <a:pPr>
               <a:spcAft>
-                <a:spcPts val="1200"/>
+                <a:spcPts val="1100"/>
               </a:spcAft>
             </a:pPr>
             <a:r>
-              <a:rPr sz="1400" b="0">
+              <a:rPr sz="1300" b="0">
                 <a:solidFill>
                   <a:srgbClr val="1C2834"/>
                 </a:solidFill>
                 <a:latin typeface="Calibri"/>
               </a:rPr>
-              <a:t>• Present results to IPMA family</a:t>
+              <a:t>• Представить результаты семье IPMA</a:t>
             </a:r>
           </a:p>
           <a:p>
             <a:pPr>
               <a:spcAft>
-                <a:spcPts val="1200"/>
+                <a:spcPts val="1100"/>
               </a:spcAft>
             </a:pPr>
             <a:r>
-              <a:rPr sz="1400" b="0">
+              <a:rPr sz="1300" b="0">
                 <a:solidFill>
                   <a:srgbClr val="1C2834"/>
                 </a:solidFill>
                 <a:latin typeface="Calibri"/>
               </a:rPr>
-              <a:t>• Expand certification volumes</a:t>
+              <a:t>• Увеличить объёмы сертификации</a:t>
             </a:r>
           </a:p>
           <a:p>
             <a:pPr>
               <a:spcAft>
-                <a:spcPts val="1200"/>
+                <a:spcPts val="1100"/>
               </a:spcAft>
             </a:pPr>
             <a:r>
-              <a:rPr sz="1400" b="0">
+              <a:rPr sz="1300" b="0">
                 <a:solidFill>
                   <a:srgbClr val="1C2834"/>
                 </a:solidFill>
                 <a:latin typeface="Calibri"/>
               </a:rPr>
-              <a:t>• Regional Central Asia collaboration</a:t>
+              <a:t>• Региональное сотрудничество в ЦА</a:t>
             </a:r>
           </a:p>
           <a:p>
             <a:pPr>
               <a:spcAft>
-                <a:spcPts val="1200"/>
+                <a:spcPts val="1100"/>
               </a:spcAft>
             </a:pPr>
             <a:r>
-              <a:rPr sz="1400" b="0">
+              <a:rPr sz="1300" b="0">
                 <a:solidFill>
                   <a:srgbClr val="1C2834"/>
                 </a:solidFill>
                 <a:latin typeface="Calibri"/>
               </a:rPr>
-              <a:t>• Target: 100+ members</a:t>
+              <a:t>• Цель: 100+ членов</a:t>
             </a:r>
           </a:p>
         </p:txBody>
@@ -12145,7 +12145,7 @@
         <p:spPr>
           <a:xfrm>
             <a:off x="502920" y="6446520"/>
-            <a:ext cx="7315200" cy="320040"/>
+            <a:ext cx="8229600" cy="320040"/>
           </a:xfrm>
           <a:prstGeom prst="rect">
             <a:avLst/>
@@ -12166,7 +12166,7 @@
                 </a:solidFill>
                 <a:latin typeface="Calibri"/>
               </a:rPr>
-              <a:t>IPMA Kyrgyzstan  ·  Applying Member Association</a:t>
+              <a:t>IPMA Кыргызстан  ·  Ассоциация-кандидат</a:t>
             </a:r>
           </a:p>
         </p:txBody>
@@ -12340,7 +12340,7 @@
                 </a:solidFill>
                 <a:latin typeface="Calibri"/>
               </a:rPr>
-              <a:t>IPMA KYRGYZSTAN</a:t>
+              <a:t>IPMA КЫРГЫЗСТАН</a:t>
             </a:r>
           </a:p>
         </p:txBody>
@@ -12369,13 +12369,13 @@
           <a:p>
             <a:pPr algn="l"/>
             <a:r>
-              <a:rPr sz="3000" b="1">
+              <a:rPr sz="2800" b="1">
                 <a:solidFill>
                   <a:srgbClr val="0B1F33"/>
                 </a:solidFill>
                 <a:latin typeface="Georgia"/>
               </a:rPr>
-              <a:t>We will grow membership</a:t>
+              <a:t>Мы будем наращивать членство</a:t>
             </a:r>
           </a:p>
         </p:txBody>
@@ -12410,7 +12410,7 @@
                 </a:solidFill>
                 <a:latin typeface="Calibri"/>
               </a:rPr>
-              <a:t>Building the first national IPMA community in Kyrgyzstan</a:t>
+              <a:t>Создание первого национального сообщества IPMA в Кыргызстане</a:t>
             </a:r>
           </a:p>
         </p:txBody>
@@ -12424,7 +12424,7 @@
         <p:spPr>
           <a:xfrm>
             <a:off x="640080" y="1783080"/>
-            <a:ext cx="10972800" cy="822960"/>
+            <a:ext cx="10972800" cy="777240"/>
           </a:xfrm>
           <a:prstGeom prst="rect">
             <a:avLst/>
@@ -12439,33 +12439,33 @@
           <a:p>
             <a:pPr>
               <a:spcAft>
-                <a:spcPts val="600"/>
+                <a:spcPts val="500"/>
               </a:spcAft>
             </a:pPr>
             <a:r>
-              <a:rPr sz="1500" b="0">
+              <a:rPr sz="1400" b="0">
                 <a:solidFill>
                   <a:srgbClr val="1C2834"/>
                 </a:solidFill>
                 <a:latin typeface="Calibri"/>
               </a:rPr>
-              <a:t>Today there is no established IPMA Member Association serving Kyrgyzstan.</a:t>
+              <a:t>Сегодня в стране нет действующей Member Association IPMA.</a:t>
             </a:r>
           </a:p>
           <a:p>
             <a:pPr>
               <a:spcAft>
-                <a:spcPts val="600"/>
+                <a:spcPts val="500"/>
               </a:spcAft>
             </a:pPr>
             <a:r>
-              <a:rPr sz="1500" b="0">
+              <a:rPr sz="1400" b="0">
                 <a:solidFill>
                   <a:srgbClr val="1C2834"/>
                 </a:solidFill>
                 <a:latin typeface="Calibri"/>
               </a:rPr>
-              <a:t>We will open membership with clear value for professionals, employers and educators.</a:t>
+              <a:t>Мы откроем членство с понятной ценностью для специалистов, работодателей и образования.</a:t>
             </a:r>
           </a:p>
         </p:txBody>
@@ -12478,7 +12478,7 @@
         </p:nvSpPr>
         <p:spPr>
           <a:xfrm>
-            <a:off x="640080" y="2926080"/>
+            <a:off x="640080" y="2880360"/>
             <a:ext cx="5440680" cy="1234440"/>
           </a:xfrm>
           <a:prstGeom prst="roundRect">
@@ -12521,7 +12521,7 @@
         </p:nvSpPr>
         <p:spPr>
           <a:xfrm>
-            <a:off x="960120" y="3154680"/>
+            <a:off x="960120" y="3108960"/>
             <a:ext cx="4846320" cy="320040"/>
           </a:xfrm>
           <a:prstGeom prst="rect">
@@ -12537,13 +12537,13 @@
           <a:p>
             <a:pPr algn="l"/>
             <a:r>
-              <a:rPr sz="1600" b="1">
+              <a:rPr sz="1500" b="1">
                 <a:solidFill>
                   <a:srgbClr val="0B1F33"/>
                 </a:solidFill>
                 <a:latin typeface="Georgia"/>
               </a:rPr>
-              <a:t>Individual members</a:t>
+              <a:t>Индивидуальные члены</a:t>
             </a:r>
           </a:p>
         </p:txBody>
@@ -12556,7 +12556,7 @@
         </p:nvSpPr>
         <p:spPr>
           <a:xfrm>
-            <a:off x="960120" y="3566160"/>
+            <a:off x="960120" y="3520440"/>
             <a:ext cx="4846320" cy="411480"/>
           </a:xfrm>
           <a:prstGeom prst="rect">
@@ -12578,7 +12578,7 @@
                 </a:solidFill>
                 <a:latin typeface="Calibri"/>
               </a:rPr>
-              <a:t>Practitioners seeking competence, network and recognition</a:t>
+              <a:t>Практики, которым нужны компетенции, сеть и признание</a:t>
             </a:r>
           </a:p>
         </p:txBody>
@@ -12591,7 +12591,7 @@
         </p:nvSpPr>
         <p:spPr>
           <a:xfrm>
-            <a:off x="6309360" y="2926080"/>
+            <a:off x="6309360" y="2880360"/>
             <a:ext cx="5440680" cy="1234440"/>
           </a:xfrm>
           <a:prstGeom prst="roundRect">
@@ -12634,7 +12634,7 @@
         </p:nvSpPr>
         <p:spPr>
           <a:xfrm>
-            <a:off x="6629400" y="3154680"/>
+            <a:off x="6629400" y="3108960"/>
             <a:ext cx="4846320" cy="320040"/>
           </a:xfrm>
           <a:prstGeom prst="rect">
@@ -12650,13 +12650,13 @@
           <a:p>
             <a:pPr algn="l"/>
             <a:r>
-              <a:rPr sz="1600" b="1">
+              <a:rPr sz="1500" b="1">
                 <a:solidFill>
                   <a:srgbClr val="0B1F33"/>
                 </a:solidFill>
                 <a:latin typeface="Georgia"/>
               </a:rPr>
-              <a:t>Corporate members</a:t>
+              <a:t>Корпоративные члены</a:t>
             </a:r>
           </a:p>
         </p:txBody>
@@ -12669,7 +12669,7 @@
         </p:nvSpPr>
         <p:spPr>
           <a:xfrm>
-            <a:off x="6629400" y="3566160"/>
+            <a:off x="6629400" y="3520440"/>
             <a:ext cx="4846320" cy="411480"/>
           </a:xfrm>
           <a:prstGeom prst="rect">
@@ -12691,7 +12691,7 @@
                 </a:solidFill>
                 <a:latin typeface="Calibri"/>
               </a:rPr>
-              <a:t>Employers investing in project capability and standards</a:t>
+              <a:t>Работодатели, инвестирующие в стандарты и проектные способности</a:t>
             </a:r>
           </a:p>
         </p:txBody>
@@ -12704,7 +12704,7 @@
         </p:nvSpPr>
         <p:spPr>
           <a:xfrm>
-            <a:off x="640080" y="4343400"/>
+            <a:off x="640080" y="4297680"/>
             <a:ext cx="5440680" cy="1234440"/>
           </a:xfrm>
           <a:prstGeom prst="roundRect">
@@ -12747,7 +12747,7 @@
         </p:nvSpPr>
         <p:spPr>
           <a:xfrm>
-            <a:off x="960120" y="4572000"/>
+            <a:off x="960120" y="4526280"/>
             <a:ext cx="4846320" cy="320040"/>
           </a:xfrm>
           <a:prstGeom prst="rect">
@@ -12763,13 +12763,13 @@
           <a:p>
             <a:pPr algn="l"/>
             <a:r>
-              <a:rPr sz="1600" b="1">
+              <a:rPr sz="1500" b="1">
                 <a:solidFill>
                   <a:srgbClr val="0B1F33"/>
                 </a:solidFill>
                 <a:latin typeface="Georgia"/>
               </a:rPr>
-              <a:t>Education providers</a:t>
+              <a:t>Образовательные организации</a:t>
             </a:r>
           </a:p>
         </p:txBody>
@@ -12782,7 +12782,7 @@
         </p:nvSpPr>
         <p:spPr>
           <a:xfrm>
-            <a:off x="960120" y="4983480"/>
+            <a:off x="960120" y="4937760"/>
             <a:ext cx="4846320" cy="411480"/>
           </a:xfrm>
           <a:prstGeom prst="rect">
@@ -12804,7 +12804,7 @@
                 </a:solidFill>
                 <a:latin typeface="Calibri"/>
               </a:rPr>
-              <a:t>Universities embedding IPMA into programmes</a:t>
+              <a:t>Университеты, встраивающие IPMA в учебные программы</a:t>
             </a:r>
           </a:p>
         </p:txBody>
@@ -12817,7 +12817,7 @@
         </p:nvSpPr>
         <p:spPr>
           <a:xfrm>
-            <a:off x="6309360" y="4343400"/>
+            <a:off x="6309360" y="4297680"/>
             <a:ext cx="5440680" cy="1234440"/>
           </a:xfrm>
           <a:prstGeom prst="roundRect">
@@ -12860,7 +12860,7 @@
         </p:nvSpPr>
         <p:spPr>
           <a:xfrm>
-            <a:off x="6629400" y="4572000"/>
+            <a:off x="6629400" y="4526280"/>
             <a:ext cx="4846320" cy="320040"/>
           </a:xfrm>
           <a:prstGeom prst="rect">
@@ -12876,13 +12876,13 @@
           <a:p>
             <a:pPr algn="l"/>
             <a:r>
-              <a:rPr sz="1600" b="1">
+              <a:rPr sz="1500" b="1">
                 <a:solidFill>
                   <a:srgbClr val="0B1F33"/>
                 </a:solidFill>
                 <a:latin typeface="Georgia"/>
               </a:rPr>
-              <a:t>Training providers</a:t>
+              <a:t>Провайдеры обучения</a:t>
             </a:r>
           </a:p>
         </p:txBody>
@@ -12895,7 +12895,7 @@
         </p:nvSpPr>
         <p:spPr>
           <a:xfrm>
-            <a:off x="6629400" y="4983480"/>
+            <a:off x="6629400" y="4937760"/>
             <a:ext cx="4846320" cy="411480"/>
           </a:xfrm>
           <a:prstGeom prst="rect">
@@ -12917,7 +12917,7 @@
                 </a:solidFill>
                 <a:latin typeface="Calibri"/>
               </a:rPr>
-              <a:t>ATOs and partners supporting certification pathways</a:t>
+              <a:t>ATO и партнёры, поддерживающие пути сертификации</a:t>
             </a:r>
           </a:p>
         </p:txBody>
@@ -12931,7 +12931,7 @@
         <p:spPr>
           <a:xfrm>
             <a:off x="502920" y="6446520"/>
-            <a:ext cx="7315200" cy="320040"/>
+            <a:ext cx="8229600" cy="320040"/>
           </a:xfrm>
           <a:prstGeom prst="rect">
             <a:avLst/>
@@ -12952,7 +12952,7 @@
                 </a:solidFill>
                 <a:latin typeface="Calibri"/>
               </a:rPr>
-              <a:t>IPMA Kyrgyzstan  ·  Applying Member Association</a:t>
+              <a:t>IPMA Кыргызстан  ·  Ассоциация-кандидат</a:t>
             </a:r>
           </a:p>
         </p:txBody>
@@ -13126,7 +13126,7 @@
                 </a:solidFill>
                 <a:latin typeface="Calibri"/>
               </a:rPr>
-              <a:t>IPMA KYRGYZSTAN</a:t>
+              <a:t>IPMA КЫРГЫЗСТАН</a:t>
             </a:r>
           </a:p>
         </p:txBody>
@@ -13155,13 +13155,13 @@
           <a:p>
             <a:pPr algn="l"/>
             <a:r>
-              <a:rPr sz="3000" b="1">
+              <a:rPr sz="2800" b="1">
                 <a:solidFill>
                   <a:srgbClr val="0B1F33"/>
                 </a:solidFill>
                 <a:latin typeface="Georgia"/>
               </a:rPr>
-              <a:t>Co-creating our Certification Body</a:t>
+              <a:t>Совместное создание Certification Body</a:t>
             </a:r>
           </a:p>
         </p:txBody>
@@ -13196,7 +13196,7 @@
                 </a:solidFill>
                 <a:latin typeface="Calibri"/>
               </a:rPr>
-              <a:t>Quality certification rooted in collaboration with peer MAs / CBs</a:t>
+              <a:t>Качественная сертификация через сотрудничество с опытными MA / CB</a:t>
             </a:r>
           </a:p>
         </p:txBody>
@@ -13225,97 +13225,97 @@
           <a:p>
             <a:pPr>
               <a:spcAft>
-                <a:spcPts val="1400"/>
+                <a:spcPts val="1300"/>
               </a:spcAft>
             </a:pPr>
             <a:r>
-              <a:rPr sz="1600" b="0">
+              <a:rPr sz="1500" b="0">
                 <a:solidFill>
                   <a:srgbClr val="1C2834"/>
                 </a:solidFill>
                 <a:latin typeface="Calibri"/>
               </a:rPr>
-              <a:t>• Offer all 4 IPMA certification levels, with a phased start where needed</a:t>
+              <a:t>• Предложить все 4 уровня сертификации IPMA, при необходимости — поэтапный старт</a:t>
             </a:r>
           </a:p>
           <a:p>
             <a:pPr>
               <a:spcAft>
-                <a:spcPts val="1400"/>
+                <a:spcPts val="1300"/>
               </a:spcAft>
             </a:pPr>
             <a:r>
-              <a:rPr sz="1600" b="0">
+              <a:rPr sz="1500" b="0">
                 <a:solidFill>
                   <a:srgbClr val="1C2834"/>
                 </a:solidFill>
                 <a:latin typeface="Calibri"/>
               </a:rPr>
-              <a:t>• Collaborate with established MAs / CBs to harmonise process and quality</a:t>
+              <a:t>• Сотрудничать с действующими MA / CB для гармонизации процессов и качества</a:t>
             </a:r>
           </a:p>
           <a:p>
             <a:pPr>
               <a:spcAft>
-                <a:spcPts val="1400"/>
+                <a:spcPts val="1300"/>
               </a:spcAft>
             </a:pPr>
             <a:r>
-              <a:rPr sz="1600" b="0">
+              <a:rPr sz="1500" b="0">
                 <a:solidFill>
                   <a:srgbClr val="1C2834"/>
                 </a:solidFill>
                 <a:latin typeface="Calibri"/>
               </a:rPr>
-              <a:t>• Build a committed pool of assessors and share capacity regionally where appropriate</a:t>
+              <a:t>• Сформировать пул ассессоров и при необходимости делить ресурсы в регионе</a:t>
             </a:r>
           </a:p>
           <a:p>
             <a:pPr>
               <a:spcAft>
-                <a:spcPts val="1400"/>
+                <a:spcPts val="1300"/>
               </a:spcAft>
             </a:pPr>
             <a:r>
-              <a:rPr sz="1600" b="0">
+              <a:rPr sz="1500" b="0">
                 <a:solidFill>
                   <a:srgbClr val="1C2834"/>
                 </a:solidFill>
                 <a:latin typeface="Calibri"/>
               </a:rPr>
-              <a:t>• Outsource examination processing where it strengthens reliability and speed</a:t>
+              <a:t>• При необходимости аутсорсить обработку экзаменов для надёжности и скорости</a:t>
             </a:r>
           </a:p>
           <a:p>
             <a:pPr>
               <a:spcAft>
-                <a:spcPts val="1400"/>
+                <a:spcPts val="1300"/>
               </a:spcAft>
             </a:pPr>
             <a:r>
-              <a:rPr sz="1600" b="0">
+              <a:rPr sz="1500" b="0">
                 <a:solidFill>
                   <a:srgbClr val="1C2834"/>
                 </a:solidFill>
                 <a:latin typeface="Calibri"/>
               </a:rPr>
-              <a:t>• Protect candidate experience and the reputation of the IPMA brand</a:t>
+              <a:t>• Защищать опыт кандидатов и репутацию бренда IPMA</a:t>
             </a:r>
           </a:p>
           <a:p>
             <a:pPr>
               <a:spcAft>
-                <a:spcPts val="1400"/>
+                <a:spcPts val="1300"/>
               </a:spcAft>
             </a:pPr>
             <a:r>
-              <a:rPr sz="1600" b="0">
+              <a:rPr sz="1500" b="0">
                 <a:solidFill>
                   <a:srgbClr val="1C2834"/>
                 </a:solidFill>
                 <a:latin typeface="Calibri"/>
               </a:rPr>
-              <a:t>• Reinvest certification income into community development and Young Crew</a:t>
+              <a:t>• Реинвестировать доходы от сертификации в развитие сообщества и Young Crew</a:t>
             </a:r>
           </a:p>
         </p:txBody>
@@ -13329,7 +13329,7 @@
         <p:spPr>
           <a:xfrm>
             <a:off x="502920" y="6446520"/>
-            <a:ext cx="7315200" cy="320040"/>
+            <a:ext cx="8229600" cy="320040"/>
           </a:xfrm>
           <a:prstGeom prst="rect">
             <a:avLst/>
@@ -13350,7 +13350,7 @@
                 </a:solidFill>
                 <a:latin typeface="Calibri"/>
               </a:rPr>
-              <a:t>IPMA Kyrgyzstan  ·  Applying Member Association</a:t>
+              <a:t>IPMA Кыргызстан  ·  Ассоциация-кандидат</a:t>
             </a:r>
           </a:p>
         </p:txBody>

--- a/presentations/IPMA_Kyrgyzstan_CoD_Presentation.pptx
+++ b/presentations/IPMA_Kyrgyzstan_CoD_Presentation.pptx
@@ -3185,29 +3185,53 @@
           </a:p>
         </p:txBody>
       </p:sp>
-      <p:sp>
-        <p:nvSpPr>
-          <p:cNvPr id="4" name="TextBox 3"/>
-          <p:cNvSpPr txBox="1"/>
-          <p:nvPr/>
-        </p:nvSpPr>
-        <p:spPr>
-          <a:xfrm>
-            <a:off x="731520" y="1463040"/>
-            <a:ext cx="10515600" cy="320040"/>
-          </a:xfrm>
-          <a:prstGeom prst="rect">
-            <a:avLst/>
-          </a:prstGeom>
-          <a:noFill/>
-        </p:spPr>
-        <p:txBody>
-          <a:bodyPr wrap="square">
-            <a:spAutoFit/>
-          </a:bodyPr>
-          <a:lstStyle/>
-          <a:p>
-            <a:pPr algn="l"/>
+      <p:pic>
+        <p:nvPicPr>
+          <p:cNvPr id="4" name="Picture 3" descr="kgpmu-logo-full.png"/>
+          <p:cNvPicPr>
+            <a:picLocks noChangeAspect="1"/>
+          </p:cNvPicPr>
+          <p:nvPr/>
+        </p:nvPicPr>
+        <p:blipFill>
+          <a:blip r:embed="rId2"/>
+          <a:stretch>
+            <a:fillRect/>
+          </a:stretch>
+        </p:blipFill>
+        <p:spPr>
+          <a:xfrm>
+            <a:off x="4175607" y="822960"/>
+            <a:ext cx="3840480" cy="1823761"/>
+          </a:xfrm>
+          <a:prstGeom prst="rect">
+            <a:avLst/>
+          </a:prstGeom>
+        </p:spPr>
+      </p:pic>
+      <p:sp>
+        <p:nvSpPr>
+          <p:cNvPr id="5" name="TextBox 4"/>
+          <p:cNvSpPr txBox="1"/>
+          <p:nvPr/>
+        </p:nvSpPr>
+        <p:spPr>
+          <a:xfrm>
+            <a:off x="731520" y="2606040"/>
+            <a:ext cx="10698480" cy="320040"/>
+          </a:xfrm>
+          <a:prstGeom prst="rect">
+            <a:avLst/>
+          </a:prstGeom>
+          <a:noFill/>
+        </p:spPr>
+        <p:txBody>
+          <a:bodyPr wrap="square">
+            <a:spAutoFit/>
+          </a:bodyPr>
+          <a:lstStyle/>
+          <a:p>
+            <a:pPr algn="ctr"/>
             <a:r>
               <a:rPr sz="1300" b="1">
                 <a:solidFill>
@@ -3222,29 +3246,29 @@
       </p:sp>
       <p:sp>
         <p:nvSpPr>
-          <p:cNvPr id="5" name="TextBox 4"/>
-          <p:cNvSpPr txBox="1"/>
-          <p:nvPr/>
-        </p:nvSpPr>
-        <p:spPr>
-          <a:xfrm>
-            <a:off x="731520" y="1965960"/>
-            <a:ext cx="10515600" cy="1097280"/>
-          </a:xfrm>
-          <a:prstGeom prst="rect">
-            <a:avLst/>
-          </a:prstGeom>
-          <a:noFill/>
-        </p:spPr>
-        <p:txBody>
-          <a:bodyPr wrap="square">
-            <a:spAutoFit/>
-          </a:bodyPr>
-          <a:lstStyle/>
-          <a:p>
-            <a:pPr algn="l"/>
-            <a:r>
-              <a:rPr sz="3600" b="1">
+          <p:cNvPr id="6" name="TextBox 5"/>
+          <p:cNvSpPr txBox="1"/>
+          <p:nvPr/>
+        </p:nvSpPr>
+        <p:spPr>
+          <a:xfrm>
+            <a:off x="731520" y="3017520"/>
+            <a:ext cx="10698480" cy="914400"/>
+          </a:xfrm>
+          <a:prstGeom prst="rect">
+            <a:avLst/>
+          </a:prstGeom>
+          <a:noFill/>
+        </p:spPr>
+        <p:txBody>
+          <a:bodyPr wrap="square">
+            <a:spAutoFit/>
+          </a:bodyPr>
+          <a:lstStyle/>
+          <a:p>
+            <a:pPr algn="ctr"/>
+            <a:r>
+              <a:rPr sz="3200" b="1">
                 <a:solidFill>
                   <a:srgbClr val="FFFFFF"/>
                 </a:solidFill>
@@ -3258,29 +3282,29 @@
       </p:sp>
       <p:sp>
         <p:nvSpPr>
-          <p:cNvPr id="6" name="TextBox 5"/>
-          <p:cNvSpPr txBox="1"/>
-          <p:nvPr/>
-        </p:nvSpPr>
-        <p:spPr>
-          <a:xfrm>
-            <a:off x="731520" y="3291840"/>
-            <a:ext cx="10058400" cy="457200"/>
-          </a:xfrm>
-          <a:prstGeom prst="rect">
-            <a:avLst/>
-          </a:prstGeom>
-          <a:noFill/>
-        </p:spPr>
-        <p:txBody>
-          <a:bodyPr wrap="square">
-            <a:spAutoFit/>
-          </a:bodyPr>
-          <a:lstStyle/>
-          <a:p>
-            <a:pPr algn="l"/>
-            <a:r>
-              <a:rPr sz="1600" b="0">
+          <p:cNvPr id="7" name="TextBox 6"/>
+          <p:cNvSpPr txBox="1"/>
+          <p:nvPr/>
+        </p:nvSpPr>
+        <p:spPr>
+          <a:xfrm>
+            <a:off x="731520" y="4114800"/>
+            <a:ext cx="10698480" cy="365760"/>
+          </a:xfrm>
+          <a:prstGeom prst="rect">
+            <a:avLst/>
+          </a:prstGeom>
+          <a:noFill/>
+        </p:spPr>
+        <p:txBody>
+          <a:bodyPr wrap="square">
+            <a:spAutoFit/>
+          </a:bodyPr>
+          <a:lstStyle/>
+          <a:p>
+            <a:pPr algn="ctr"/>
+            <a:r>
+              <a:rPr sz="1500" b="0">
                 <a:solidFill>
                   <a:srgbClr val="F3DCC9"/>
                 </a:solidFill>
@@ -3293,14 +3317,14 @@
       </p:sp>
       <p:sp>
         <p:nvSpPr>
-          <p:cNvPr id="7" name="Rounded Rectangle 6"/>
+          <p:cNvPr id="8" name="Rounded Rectangle 7"/>
           <p:cNvSpPr/>
           <p:nvPr/>
         </p:nvSpPr>
         <p:spPr>
           <a:xfrm>
-            <a:off x="731520" y="4023360"/>
-            <a:ext cx="9601200" cy="640080"/>
+            <a:off x="1645920" y="4709160"/>
+            <a:ext cx="8869680" cy="594360"/>
           </a:xfrm>
           <a:prstGeom prst="roundRect">
             <a:avLst/>
@@ -3336,29 +3360,29 @@
       </p:sp>
       <p:sp>
         <p:nvSpPr>
-          <p:cNvPr id="8" name="TextBox 7"/>
-          <p:cNvSpPr txBox="1"/>
-          <p:nvPr/>
-        </p:nvSpPr>
-        <p:spPr>
-          <a:xfrm>
-            <a:off x="914400" y="4160520"/>
-            <a:ext cx="9144000" cy="411480"/>
-          </a:xfrm>
-          <a:prstGeom prst="rect">
-            <a:avLst/>
-          </a:prstGeom>
-          <a:noFill/>
-        </p:spPr>
-        <p:txBody>
-          <a:bodyPr wrap="square">
-            <a:spAutoFit/>
-          </a:bodyPr>
-          <a:lstStyle/>
-          <a:p>
-            <a:pPr algn="l"/>
-            <a:r>
-              <a:rPr sz="1500" b="1">
+          <p:cNvPr id="9" name="TextBox 8"/>
+          <p:cNvSpPr txBox="1"/>
+          <p:nvPr/>
+        </p:nvSpPr>
+        <p:spPr>
+          <a:xfrm>
+            <a:off x="1828800" y="4828032"/>
+            <a:ext cx="8503920" cy="365760"/>
+          </a:xfrm>
+          <a:prstGeom prst="rect">
+            <a:avLst/>
+          </a:prstGeom>
+          <a:noFill/>
+        </p:spPr>
+        <p:txBody>
+          <a:bodyPr wrap="square">
+            <a:spAutoFit/>
+          </a:bodyPr>
+          <a:lstStyle/>
+          <a:p>
+            <a:pPr algn="ctr"/>
+            <a:r>
+              <a:rPr sz="1400" b="1">
                 <a:solidFill>
                   <a:srgbClr val="FFFFFF"/>
                 </a:solidFill>
@@ -3371,29 +3395,29 @@
       </p:sp>
       <p:sp>
         <p:nvSpPr>
-          <p:cNvPr id="9" name="TextBox 8"/>
-          <p:cNvSpPr txBox="1"/>
-          <p:nvPr/>
-        </p:nvSpPr>
-        <p:spPr>
-          <a:xfrm>
-            <a:off x="731520" y="5029200"/>
-            <a:ext cx="10058400" cy="365760"/>
-          </a:xfrm>
-          <a:prstGeom prst="rect">
-            <a:avLst/>
-          </a:prstGeom>
-          <a:noFill/>
-        </p:spPr>
-        <p:txBody>
-          <a:bodyPr wrap="square">
-            <a:spAutoFit/>
-          </a:bodyPr>
-          <a:lstStyle/>
-          <a:p>
-            <a:pPr algn="l"/>
-            <a:r>
-              <a:rPr sz="1500" b="0">
+          <p:cNvPr id="10" name="TextBox 9"/>
+          <p:cNvSpPr txBox="1"/>
+          <p:nvPr/>
+        </p:nvSpPr>
+        <p:spPr>
+          <a:xfrm>
+            <a:off x="731520" y="5532120"/>
+            <a:ext cx="10698480" cy="320040"/>
+          </a:xfrm>
+          <a:prstGeom prst="rect">
+            <a:avLst/>
+          </a:prstGeom>
+          <a:noFill/>
+        </p:spPr>
+        <p:txBody>
+          <a:bodyPr wrap="square">
+            <a:spAutoFit/>
+          </a:bodyPr>
+          <a:lstStyle/>
+          <a:p>
+            <a:pPr algn="ctr"/>
+            <a:r>
+              <a:rPr sz="1400" b="0">
                 <a:solidFill>
                   <a:srgbClr val="F3DCC9"/>
                 </a:solidFill>
@@ -3508,16 +3532,40 @@
           </a:p>
         </p:txBody>
       </p:sp>
-      <p:sp>
-        <p:nvSpPr>
-          <p:cNvPr id="4" name="TextBox 3"/>
+      <p:pic>
+        <p:nvPicPr>
+          <p:cNvPr id="4" name="Picture 3" descr="kgpmu-emblem.png"/>
+          <p:cNvPicPr>
+            <a:picLocks noChangeAspect="1"/>
+          </p:cNvPicPr>
+          <p:nvPr/>
+        </p:nvPicPr>
+        <p:blipFill>
+          <a:blip r:embed="rId2"/>
+          <a:stretch>
+            <a:fillRect/>
+          </a:stretch>
+        </p:blipFill>
+        <p:spPr>
+          <a:xfrm>
+            <a:off x="11201400" y="228600"/>
+            <a:ext cx="708894" cy="640080"/>
+          </a:xfrm>
+          <a:prstGeom prst="rect">
+            <a:avLst/>
+          </a:prstGeom>
+        </p:spPr>
+      </p:pic>
+      <p:sp>
+        <p:nvSpPr>
+          <p:cNvPr id="5" name="TextBox 4"/>
           <p:cNvSpPr txBox="1"/>
           <p:nvPr/>
         </p:nvSpPr>
         <p:spPr>
           <a:xfrm>
             <a:off x="548640" y="320040"/>
-            <a:ext cx="10972800" cy="274320"/>
+            <a:ext cx="10058400" cy="274320"/>
           </a:xfrm>
           <a:prstGeom prst="rect">
             <a:avLst/>
@@ -3545,14 +3593,14 @@
       </p:sp>
       <p:sp>
         <p:nvSpPr>
-          <p:cNvPr id="5" name="TextBox 4"/>
+          <p:cNvPr id="6" name="TextBox 5"/>
           <p:cNvSpPr txBox="1"/>
           <p:nvPr/>
         </p:nvSpPr>
         <p:spPr>
           <a:xfrm>
             <a:off x="548640" y="640080"/>
-            <a:ext cx="10972800" cy="548640"/>
+            <a:ext cx="10241280" cy="548640"/>
           </a:xfrm>
           <a:prstGeom prst="rect">
             <a:avLst/>
@@ -3580,7 +3628,7 @@
       </p:sp>
       <p:sp>
         <p:nvSpPr>
-          <p:cNvPr id="6" name="Rounded Rectangle 5"/>
+          <p:cNvPr id="7" name="Rounded Rectangle 6"/>
           <p:cNvSpPr/>
           <p:nvPr/>
         </p:nvSpPr>
@@ -3623,7 +3671,7 @@
       </p:sp>
       <p:sp>
         <p:nvSpPr>
-          <p:cNvPr id="7" name="TextBox 6"/>
+          <p:cNvPr id="8" name="TextBox 7"/>
           <p:cNvSpPr txBox="1"/>
           <p:nvPr/>
         </p:nvSpPr>
@@ -3658,7 +3706,7 @@
       </p:sp>
       <p:sp>
         <p:nvSpPr>
-          <p:cNvPr id="8" name="TextBox 7"/>
+          <p:cNvPr id="9" name="TextBox 8"/>
           <p:cNvSpPr txBox="1"/>
           <p:nvPr/>
         </p:nvSpPr>
@@ -3693,7 +3741,7 @@
       </p:sp>
       <p:sp>
         <p:nvSpPr>
-          <p:cNvPr id="9" name="Rounded Rectangle 8"/>
+          <p:cNvPr id="10" name="Rounded Rectangle 9"/>
           <p:cNvSpPr/>
           <p:nvPr/>
         </p:nvSpPr>
@@ -3736,7 +3784,7 @@
       </p:sp>
       <p:sp>
         <p:nvSpPr>
-          <p:cNvPr id="10" name="TextBox 9"/>
+          <p:cNvPr id="11" name="TextBox 10"/>
           <p:cNvSpPr txBox="1"/>
           <p:nvPr/>
         </p:nvSpPr>
@@ -3771,7 +3819,7 @@
       </p:sp>
       <p:sp>
         <p:nvSpPr>
-          <p:cNvPr id="11" name="TextBox 10"/>
+          <p:cNvPr id="12" name="TextBox 11"/>
           <p:cNvSpPr txBox="1"/>
           <p:nvPr/>
         </p:nvSpPr>
@@ -3806,7 +3854,7 @@
       </p:sp>
       <p:sp>
         <p:nvSpPr>
-          <p:cNvPr id="12" name="Rounded Rectangle 11"/>
+          <p:cNvPr id="13" name="Rounded Rectangle 12"/>
           <p:cNvSpPr/>
           <p:nvPr/>
         </p:nvSpPr>
@@ -3849,7 +3897,7 @@
       </p:sp>
       <p:sp>
         <p:nvSpPr>
-          <p:cNvPr id="13" name="TextBox 12"/>
+          <p:cNvPr id="14" name="TextBox 13"/>
           <p:cNvSpPr txBox="1"/>
           <p:nvPr/>
         </p:nvSpPr>
@@ -3884,7 +3932,7 @@
       </p:sp>
       <p:sp>
         <p:nvSpPr>
-          <p:cNvPr id="14" name="TextBox 13"/>
+          <p:cNvPr id="15" name="TextBox 14"/>
           <p:cNvSpPr txBox="1"/>
           <p:nvPr/>
         </p:nvSpPr>
@@ -3919,7 +3967,7 @@
       </p:sp>
       <p:sp>
         <p:nvSpPr>
-          <p:cNvPr id="15" name="Rounded Rectangle 14"/>
+          <p:cNvPr id="16" name="Rounded Rectangle 15"/>
           <p:cNvSpPr/>
           <p:nvPr/>
         </p:nvSpPr>
@@ -3962,7 +4010,7 @@
       </p:sp>
       <p:sp>
         <p:nvSpPr>
-          <p:cNvPr id="16" name="TextBox 15"/>
+          <p:cNvPr id="17" name="TextBox 16"/>
           <p:cNvSpPr txBox="1"/>
           <p:nvPr/>
         </p:nvSpPr>
@@ -3997,7 +4045,7 @@
       </p:sp>
       <p:sp>
         <p:nvSpPr>
-          <p:cNvPr id="17" name="TextBox 16"/>
+          <p:cNvPr id="18" name="TextBox 17"/>
           <p:cNvSpPr txBox="1"/>
           <p:nvPr/>
         </p:nvSpPr>
@@ -4032,7 +4080,7 @@
       </p:sp>
       <p:sp>
         <p:nvSpPr>
-          <p:cNvPr id="18" name="TextBox 17"/>
+          <p:cNvPr id="19" name="TextBox 18"/>
           <p:cNvSpPr txBox="1"/>
           <p:nvPr/>
         </p:nvSpPr>
@@ -4067,7 +4115,7 @@
       </p:sp>
       <p:sp>
         <p:nvSpPr>
-          <p:cNvPr id="19" name="TextBox 18"/>
+          <p:cNvPr id="20" name="TextBox 19"/>
           <p:cNvSpPr txBox="1"/>
           <p:nvPr/>
         </p:nvSpPr>
@@ -4204,16 +4252,40 @@
           </a:p>
         </p:txBody>
       </p:sp>
-      <p:sp>
-        <p:nvSpPr>
-          <p:cNvPr id="4" name="TextBox 3"/>
+      <p:pic>
+        <p:nvPicPr>
+          <p:cNvPr id="4" name="Picture 3" descr="kgpmu-emblem.png"/>
+          <p:cNvPicPr>
+            <a:picLocks noChangeAspect="1"/>
+          </p:cNvPicPr>
+          <p:nvPr/>
+        </p:nvPicPr>
+        <p:blipFill>
+          <a:blip r:embed="rId2"/>
+          <a:stretch>
+            <a:fillRect/>
+          </a:stretch>
+        </p:blipFill>
+        <p:spPr>
+          <a:xfrm>
+            <a:off x="11201400" y="228600"/>
+            <a:ext cx="708894" cy="640080"/>
+          </a:xfrm>
+          <a:prstGeom prst="rect">
+            <a:avLst/>
+          </a:prstGeom>
+        </p:spPr>
+      </p:pic>
+      <p:sp>
+        <p:nvSpPr>
+          <p:cNvPr id="5" name="TextBox 4"/>
           <p:cNvSpPr txBox="1"/>
           <p:nvPr/>
         </p:nvSpPr>
         <p:spPr>
           <a:xfrm>
             <a:off x="548640" y="320040"/>
-            <a:ext cx="10972800" cy="274320"/>
+            <a:ext cx="10058400" cy="274320"/>
           </a:xfrm>
           <a:prstGeom prst="rect">
             <a:avLst/>
@@ -4241,14 +4313,14 @@
       </p:sp>
       <p:sp>
         <p:nvSpPr>
-          <p:cNvPr id="5" name="TextBox 4"/>
+          <p:cNvPr id="6" name="TextBox 5"/>
           <p:cNvSpPr txBox="1"/>
           <p:nvPr/>
         </p:nvSpPr>
         <p:spPr>
           <a:xfrm>
             <a:off x="548640" y="640080"/>
-            <a:ext cx="10972800" cy="548640"/>
+            <a:ext cx="10241280" cy="548640"/>
           </a:xfrm>
           <a:prstGeom prst="rect">
             <a:avLst/>
@@ -4276,7 +4348,7 @@
       </p:sp>
       <p:sp>
         <p:nvSpPr>
-          <p:cNvPr id="6" name="TextBox 5"/>
+          <p:cNvPr id="7" name="TextBox 6"/>
           <p:cNvSpPr txBox="1"/>
           <p:nvPr/>
         </p:nvSpPr>
@@ -4379,7 +4451,7 @@
       </p:sp>
       <p:sp>
         <p:nvSpPr>
-          <p:cNvPr id="7" name="TextBox 6"/>
+          <p:cNvPr id="8" name="TextBox 7"/>
           <p:cNvSpPr txBox="1"/>
           <p:nvPr/>
         </p:nvSpPr>
@@ -4414,7 +4486,7 @@
       </p:sp>
       <p:sp>
         <p:nvSpPr>
-          <p:cNvPr id="8" name="TextBox 7"/>
+          <p:cNvPr id="9" name="TextBox 8"/>
           <p:cNvSpPr txBox="1"/>
           <p:nvPr/>
         </p:nvSpPr>
@@ -4551,29 +4623,53 @@
           </a:p>
         </p:txBody>
       </p:sp>
-      <p:sp>
-        <p:nvSpPr>
-          <p:cNvPr id="4" name="TextBox 3"/>
-          <p:cNvSpPr txBox="1"/>
-          <p:nvPr/>
-        </p:nvSpPr>
-        <p:spPr>
-          <a:xfrm>
-            <a:off x="731520" y="1371600"/>
-            <a:ext cx="10515600" cy="320040"/>
-          </a:xfrm>
-          <a:prstGeom prst="rect">
-            <a:avLst/>
-          </a:prstGeom>
-          <a:noFill/>
-        </p:spPr>
-        <p:txBody>
-          <a:bodyPr wrap="square">
-            <a:spAutoFit/>
-          </a:bodyPr>
-          <a:lstStyle/>
-          <a:p>
-            <a:pPr algn="l"/>
+      <p:pic>
+        <p:nvPicPr>
+          <p:cNvPr id="4" name="Picture 3" descr="kgpmu-logo-full.png"/>
+          <p:cNvPicPr>
+            <a:picLocks noChangeAspect="1"/>
+          </p:cNvPicPr>
+          <p:nvPr/>
+        </p:nvPicPr>
+        <p:blipFill>
+          <a:blip r:embed="rId2"/>
+          <a:stretch>
+            <a:fillRect/>
+          </a:stretch>
+        </p:blipFill>
+        <p:spPr>
+          <a:xfrm>
+            <a:off x="4541367" y="640080"/>
+            <a:ext cx="3108960" cy="1476378"/>
+          </a:xfrm>
+          <a:prstGeom prst="rect">
+            <a:avLst/>
+          </a:prstGeom>
+        </p:spPr>
+      </p:pic>
+      <p:sp>
+        <p:nvSpPr>
+          <p:cNvPr id="5" name="TextBox 4"/>
+          <p:cNvSpPr txBox="1"/>
+          <p:nvPr/>
+        </p:nvSpPr>
+        <p:spPr>
+          <a:xfrm>
+            <a:off x="731520" y="2286000"/>
+            <a:ext cx="10698480" cy="320040"/>
+          </a:xfrm>
+          <a:prstGeom prst="rect">
+            <a:avLst/>
+          </a:prstGeom>
+          <a:noFill/>
+        </p:spPr>
+        <p:txBody>
+          <a:bodyPr wrap="square">
+            <a:spAutoFit/>
+          </a:bodyPr>
+          <a:lstStyle/>
+          <a:p>
+            <a:pPr algn="ctr"/>
             <a:r>
               <a:rPr sz="1300" b="1">
                 <a:solidFill>
@@ -4588,29 +4684,29 @@
       </p:sp>
       <p:sp>
         <p:nvSpPr>
-          <p:cNvPr id="5" name="TextBox 4"/>
-          <p:cNvSpPr txBox="1"/>
-          <p:nvPr/>
-        </p:nvSpPr>
-        <p:spPr>
-          <a:xfrm>
-            <a:off x="731520" y="1828800"/>
-            <a:ext cx="10515600" cy="731520"/>
-          </a:xfrm>
-          <a:prstGeom prst="rect">
-            <a:avLst/>
-          </a:prstGeom>
-          <a:noFill/>
-        </p:spPr>
-        <p:txBody>
-          <a:bodyPr wrap="square">
-            <a:spAutoFit/>
-          </a:bodyPr>
-          <a:lstStyle/>
-          <a:p>
-            <a:pPr algn="l"/>
-            <a:r>
-              <a:rPr sz="3200" b="1">
+          <p:cNvPr id="6" name="TextBox 5"/>
+          <p:cNvSpPr txBox="1"/>
+          <p:nvPr/>
+        </p:nvSpPr>
+        <p:spPr>
+          <a:xfrm>
+            <a:off x="731520" y="2697480"/>
+            <a:ext cx="10698480" cy="548640"/>
+          </a:xfrm>
+          <a:prstGeom prst="rect">
+            <a:avLst/>
+          </a:prstGeom>
+          <a:noFill/>
+        </p:spPr>
+        <p:txBody>
+          <a:bodyPr wrap="square">
+            <a:spAutoFit/>
+          </a:bodyPr>
+          <a:lstStyle/>
+          <a:p>
+            <a:pPr algn="ctr"/>
+            <a:r>
+              <a:rPr sz="2800" b="1">
                 <a:solidFill>
                   <a:srgbClr val="FFFFFF"/>
                 </a:solidFill>
@@ -4623,29 +4719,29 @@
       </p:sp>
       <p:sp>
         <p:nvSpPr>
-          <p:cNvPr id="6" name="TextBox 5"/>
-          <p:cNvSpPr txBox="1"/>
-          <p:nvPr/>
-        </p:nvSpPr>
-        <p:spPr>
-          <a:xfrm>
-            <a:off x="731520" y="2651760"/>
-            <a:ext cx="10515600" cy="914400"/>
-          </a:xfrm>
-          <a:prstGeom prst="rect">
-            <a:avLst/>
-          </a:prstGeom>
-          <a:noFill/>
-        </p:spPr>
-        <p:txBody>
-          <a:bodyPr wrap="square">
-            <a:spAutoFit/>
-          </a:bodyPr>
-          <a:lstStyle/>
-          <a:p>
-            <a:pPr algn="l"/>
-            <a:r>
-              <a:rPr sz="1600" b="0">
+          <p:cNvPr id="7" name="TextBox 6"/>
+          <p:cNvSpPr txBox="1"/>
+          <p:nvPr/>
+        </p:nvSpPr>
+        <p:spPr>
+          <a:xfrm>
+            <a:off x="1371600" y="3383280"/>
+            <a:ext cx="9418320" cy="731520"/>
+          </a:xfrm>
+          <a:prstGeom prst="rect">
+            <a:avLst/>
+          </a:prstGeom>
+          <a:noFill/>
+        </p:spPr>
+        <p:txBody>
+          <a:bodyPr wrap="square">
+            <a:spAutoFit/>
+          </a:bodyPr>
+          <a:lstStyle/>
+          <a:p>
+            <a:pPr algn="ctr"/>
+            <a:r>
+              <a:rPr sz="1500" b="0">
                 <a:solidFill>
                   <a:srgbClr val="F3DCC9"/>
                 </a:solidFill>
@@ -4658,14 +4754,14 @@
       </p:sp>
       <p:sp>
         <p:nvSpPr>
-          <p:cNvPr id="7" name="Rounded Rectangle 6"/>
+          <p:cNvPr id="8" name="Rounded Rectangle 7"/>
           <p:cNvSpPr/>
           <p:nvPr/>
         </p:nvSpPr>
         <p:spPr>
           <a:xfrm>
-            <a:off x="731520" y="3840480"/>
-            <a:ext cx="10515600" cy="1828800"/>
+            <a:off x="2011680" y="4297680"/>
+            <a:ext cx="8138160" cy="1554480"/>
           </a:xfrm>
           <a:prstGeom prst="roundRect">
             <a:avLst/>
@@ -4701,29 +4797,29 @@
       </p:sp>
       <p:sp>
         <p:nvSpPr>
-          <p:cNvPr id="8" name="TextBox 7"/>
-          <p:cNvSpPr txBox="1"/>
-          <p:nvPr/>
-        </p:nvSpPr>
-        <p:spPr>
-          <a:xfrm>
-            <a:off x="1005840" y="4069080"/>
-            <a:ext cx="10058400" cy="1371600"/>
-          </a:xfrm>
-          <a:prstGeom prst="rect">
-            <a:avLst/>
-          </a:prstGeom>
-          <a:noFill/>
-        </p:spPr>
-        <p:txBody>
-          <a:bodyPr wrap="square">
-            <a:spAutoFit/>
-          </a:bodyPr>
-          <a:lstStyle/>
-          <a:p>
-            <a:pPr algn="l"/>
-            <a:r>
-              <a:rPr sz="1600" b="0">
+          <p:cNvPr id="9" name="TextBox 8"/>
+          <p:cNvSpPr txBox="1"/>
+          <p:nvPr/>
+        </p:nvSpPr>
+        <p:spPr>
+          <a:xfrm>
+            <a:off x="2286000" y="4526280"/>
+            <a:ext cx="7589520" cy="1188720"/>
+          </a:xfrm>
+          <a:prstGeom prst="rect">
+            <a:avLst/>
+          </a:prstGeom>
+          <a:noFill/>
+        </p:spPr>
+        <p:txBody>
+          <a:bodyPr wrap="square">
+            <a:spAutoFit/>
+          </a:bodyPr>
+          <a:lstStyle/>
+          <a:p>
+            <a:pPr algn="ctr"/>
+            <a:r>
+              <a:rPr sz="1500" b="0">
                 <a:solidFill>
                   <a:srgbClr val="FFFFFF"/>
                 </a:solidFill>
@@ -4738,7 +4834,7 @@
       </p:sp>
       <p:sp>
         <p:nvSpPr>
-          <p:cNvPr id="9" name="TextBox 8"/>
+          <p:cNvPr id="10" name="TextBox 9"/>
           <p:cNvSpPr txBox="1"/>
           <p:nvPr/>
         </p:nvSpPr>
@@ -4773,7 +4869,7 @@
       </p:sp>
       <p:sp>
         <p:nvSpPr>
-          <p:cNvPr id="10" name="TextBox 9"/>
+          <p:cNvPr id="11" name="TextBox 10"/>
           <p:cNvSpPr txBox="1"/>
           <p:nvPr/>
         </p:nvSpPr>
@@ -4910,16 +5006,40 @@
           </a:p>
         </p:txBody>
       </p:sp>
-      <p:sp>
-        <p:nvSpPr>
-          <p:cNvPr id="4" name="TextBox 3"/>
+      <p:pic>
+        <p:nvPicPr>
+          <p:cNvPr id="4" name="Picture 3" descr="kgpmu-emblem.png"/>
+          <p:cNvPicPr>
+            <a:picLocks noChangeAspect="1"/>
+          </p:cNvPicPr>
+          <p:nvPr/>
+        </p:nvPicPr>
+        <p:blipFill>
+          <a:blip r:embed="rId2"/>
+          <a:stretch>
+            <a:fillRect/>
+          </a:stretch>
+        </p:blipFill>
+        <p:spPr>
+          <a:xfrm>
+            <a:off x="11201400" y="228600"/>
+            <a:ext cx="708894" cy="640080"/>
+          </a:xfrm>
+          <a:prstGeom prst="rect">
+            <a:avLst/>
+          </a:prstGeom>
+        </p:spPr>
+      </p:pic>
+      <p:sp>
+        <p:nvSpPr>
+          <p:cNvPr id="5" name="TextBox 4"/>
           <p:cNvSpPr txBox="1"/>
           <p:nvPr/>
         </p:nvSpPr>
         <p:spPr>
           <a:xfrm>
             <a:off x="548640" y="320040"/>
-            <a:ext cx="10972800" cy="274320"/>
+            <a:ext cx="10058400" cy="274320"/>
           </a:xfrm>
           <a:prstGeom prst="rect">
             <a:avLst/>
@@ -4947,14 +5067,14 @@
       </p:sp>
       <p:sp>
         <p:nvSpPr>
-          <p:cNvPr id="5" name="TextBox 4"/>
+          <p:cNvPr id="6" name="TextBox 5"/>
           <p:cNvSpPr txBox="1"/>
           <p:nvPr/>
         </p:nvSpPr>
         <p:spPr>
           <a:xfrm>
             <a:off x="548640" y="640080"/>
-            <a:ext cx="10972800" cy="548640"/>
+            <a:ext cx="10241280" cy="548640"/>
           </a:xfrm>
           <a:prstGeom prst="rect">
             <a:avLst/>
@@ -4982,7 +5102,7 @@
       </p:sp>
       <p:sp>
         <p:nvSpPr>
-          <p:cNvPr id="6" name="Rounded Rectangle 5"/>
+          <p:cNvPr id="7" name="Rounded Rectangle 6"/>
           <p:cNvSpPr/>
           <p:nvPr/>
         </p:nvSpPr>
@@ -5025,7 +5145,7 @@
       </p:sp>
       <p:sp>
         <p:nvSpPr>
-          <p:cNvPr id="7" name="TextBox 6"/>
+          <p:cNvPr id="8" name="TextBox 7"/>
           <p:cNvSpPr txBox="1"/>
           <p:nvPr/>
         </p:nvSpPr>
@@ -5060,7 +5180,7 @@
       </p:sp>
       <p:sp>
         <p:nvSpPr>
-          <p:cNvPr id="8" name="TextBox 7"/>
+          <p:cNvPr id="9" name="TextBox 8"/>
           <p:cNvSpPr txBox="1"/>
           <p:nvPr/>
         </p:nvSpPr>
@@ -5131,7 +5251,7 @@
       </p:sp>
       <p:sp>
         <p:nvSpPr>
-          <p:cNvPr id="9" name="TextBox 8"/>
+          <p:cNvPr id="10" name="TextBox 9"/>
           <p:cNvSpPr txBox="1"/>
           <p:nvPr/>
         </p:nvSpPr>
@@ -5166,7 +5286,7 @@
       </p:sp>
       <p:sp>
         <p:nvSpPr>
-          <p:cNvPr id="10" name="TextBox 9"/>
+          <p:cNvPr id="11" name="TextBox 10"/>
           <p:cNvSpPr txBox="1"/>
           <p:nvPr/>
         </p:nvSpPr>
@@ -5201,7 +5321,7 @@
       </p:sp>
       <p:sp>
         <p:nvSpPr>
-          <p:cNvPr id="11" name="TextBox 10"/>
+          <p:cNvPr id="12" name="TextBox 11"/>
           <p:cNvSpPr txBox="1"/>
           <p:nvPr/>
         </p:nvSpPr>
@@ -5338,16 +5458,40 @@
           </a:p>
         </p:txBody>
       </p:sp>
-      <p:sp>
-        <p:nvSpPr>
-          <p:cNvPr id="4" name="TextBox 3"/>
+      <p:pic>
+        <p:nvPicPr>
+          <p:cNvPr id="4" name="Picture 3" descr="kgpmu-emblem.png"/>
+          <p:cNvPicPr>
+            <a:picLocks noChangeAspect="1"/>
+          </p:cNvPicPr>
+          <p:nvPr/>
+        </p:nvPicPr>
+        <p:blipFill>
+          <a:blip r:embed="rId2"/>
+          <a:stretch>
+            <a:fillRect/>
+          </a:stretch>
+        </p:blipFill>
+        <p:spPr>
+          <a:xfrm>
+            <a:off x="11201400" y="228600"/>
+            <a:ext cx="708894" cy="640080"/>
+          </a:xfrm>
+          <a:prstGeom prst="rect">
+            <a:avLst/>
+          </a:prstGeom>
+        </p:spPr>
+      </p:pic>
+      <p:sp>
+        <p:nvSpPr>
+          <p:cNvPr id="5" name="TextBox 4"/>
           <p:cNvSpPr txBox="1"/>
           <p:nvPr/>
         </p:nvSpPr>
         <p:spPr>
           <a:xfrm>
             <a:off x="548640" y="320040"/>
-            <a:ext cx="10972800" cy="274320"/>
+            <a:ext cx="10058400" cy="274320"/>
           </a:xfrm>
           <a:prstGeom prst="rect">
             <a:avLst/>
@@ -5375,14 +5519,14 @@
       </p:sp>
       <p:sp>
         <p:nvSpPr>
-          <p:cNvPr id="5" name="TextBox 4"/>
+          <p:cNvPr id="6" name="TextBox 5"/>
           <p:cNvSpPr txBox="1"/>
           <p:nvPr/>
         </p:nvSpPr>
         <p:spPr>
           <a:xfrm>
             <a:off x="548640" y="640080"/>
-            <a:ext cx="10972800" cy="548640"/>
+            <a:ext cx="10241280" cy="548640"/>
           </a:xfrm>
           <a:prstGeom prst="rect">
             <a:avLst/>
@@ -5410,7 +5554,7 @@
       </p:sp>
       <p:sp>
         <p:nvSpPr>
-          <p:cNvPr id="6" name="TextBox 5"/>
+          <p:cNvPr id="7" name="TextBox 6"/>
           <p:cNvSpPr txBox="1"/>
           <p:nvPr/>
         </p:nvSpPr>
@@ -5445,7 +5589,7 @@
       </p:sp>
       <p:sp>
         <p:nvSpPr>
-          <p:cNvPr id="7" name="Rounded Rectangle 6"/>
+          <p:cNvPr id="8" name="Rounded Rectangle 7"/>
           <p:cNvSpPr/>
           <p:nvPr/>
         </p:nvSpPr>
@@ -5488,7 +5632,7 @@
       </p:sp>
       <p:sp>
         <p:nvSpPr>
-          <p:cNvPr id="8" name="TextBox 7"/>
+          <p:cNvPr id="9" name="TextBox 8"/>
           <p:cNvSpPr txBox="1"/>
           <p:nvPr/>
         </p:nvSpPr>
@@ -5523,7 +5667,7 @@
       </p:sp>
       <p:sp>
         <p:nvSpPr>
-          <p:cNvPr id="9" name="TextBox 8"/>
+          <p:cNvPr id="10" name="TextBox 9"/>
           <p:cNvSpPr txBox="1"/>
           <p:nvPr/>
         </p:nvSpPr>
@@ -5558,7 +5702,7 @@
       </p:sp>
       <p:sp>
         <p:nvSpPr>
-          <p:cNvPr id="10" name="Rounded Rectangle 9"/>
+          <p:cNvPr id="11" name="Rounded Rectangle 10"/>
           <p:cNvSpPr/>
           <p:nvPr/>
         </p:nvSpPr>
@@ -5601,7 +5745,7 @@
       </p:sp>
       <p:sp>
         <p:nvSpPr>
-          <p:cNvPr id="11" name="TextBox 10"/>
+          <p:cNvPr id="12" name="TextBox 11"/>
           <p:cNvSpPr txBox="1"/>
           <p:nvPr/>
         </p:nvSpPr>
@@ -5636,7 +5780,7 @@
       </p:sp>
       <p:sp>
         <p:nvSpPr>
-          <p:cNvPr id="12" name="TextBox 11"/>
+          <p:cNvPr id="13" name="TextBox 12"/>
           <p:cNvSpPr txBox="1"/>
           <p:nvPr/>
         </p:nvSpPr>
@@ -5671,7 +5815,7 @@
       </p:sp>
       <p:sp>
         <p:nvSpPr>
-          <p:cNvPr id="13" name="Rounded Rectangle 12"/>
+          <p:cNvPr id="14" name="Rounded Rectangle 13"/>
           <p:cNvSpPr/>
           <p:nvPr/>
         </p:nvSpPr>
@@ -5714,7 +5858,7 @@
       </p:sp>
       <p:sp>
         <p:nvSpPr>
-          <p:cNvPr id="14" name="TextBox 13"/>
+          <p:cNvPr id="15" name="TextBox 14"/>
           <p:cNvSpPr txBox="1"/>
           <p:nvPr/>
         </p:nvSpPr>
@@ -5749,7 +5893,7 @@
       </p:sp>
       <p:sp>
         <p:nvSpPr>
-          <p:cNvPr id="15" name="TextBox 14"/>
+          <p:cNvPr id="16" name="TextBox 15"/>
           <p:cNvSpPr txBox="1"/>
           <p:nvPr/>
         </p:nvSpPr>
@@ -5784,7 +5928,7 @@
       </p:sp>
       <p:sp>
         <p:nvSpPr>
-          <p:cNvPr id="16" name="Rounded Rectangle 15"/>
+          <p:cNvPr id="17" name="Rounded Rectangle 16"/>
           <p:cNvSpPr/>
           <p:nvPr/>
         </p:nvSpPr>
@@ -5827,7 +5971,7 @@
       </p:sp>
       <p:sp>
         <p:nvSpPr>
-          <p:cNvPr id="17" name="TextBox 16"/>
+          <p:cNvPr id="18" name="TextBox 17"/>
           <p:cNvSpPr txBox="1"/>
           <p:nvPr/>
         </p:nvSpPr>
@@ -5862,7 +6006,7 @@
       </p:sp>
       <p:sp>
         <p:nvSpPr>
-          <p:cNvPr id="18" name="TextBox 17"/>
+          <p:cNvPr id="19" name="TextBox 18"/>
           <p:cNvSpPr txBox="1"/>
           <p:nvPr/>
         </p:nvSpPr>
@@ -5897,7 +6041,7 @@
       </p:sp>
       <p:sp>
         <p:nvSpPr>
-          <p:cNvPr id="19" name="TextBox 18"/>
+          <p:cNvPr id="20" name="TextBox 19"/>
           <p:cNvSpPr txBox="1"/>
           <p:nvPr/>
         </p:nvSpPr>
@@ -5932,7 +6076,7 @@
       </p:sp>
       <p:sp>
         <p:nvSpPr>
-          <p:cNvPr id="20" name="TextBox 19"/>
+          <p:cNvPr id="21" name="TextBox 20"/>
           <p:cNvSpPr txBox="1"/>
           <p:nvPr/>
         </p:nvSpPr>
@@ -6069,16 +6213,40 @@
           </a:p>
         </p:txBody>
       </p:sp>
-      <p:sp>
-        <p:nvSpPr>
-          <p:cNvPr id="4" name="TextBox 3"/>
+      <p:pic>
+        <p:nvPicPr>
+          <p:cNvPr id="4" name="Picture 3" descr="kgpmu-emblem.png"/>
+          <p:cNvPicPr>
+            <a:picLocks noChangeAspect="1"/>
+          </p:cNvPicPr>
+          <p:nvPr/>
+        </p:nvPicPr>
+        <p:blipFill>
+          <a:blip r:embed="rId2"/>
+          <a:stretch>
+            <a:fillRect/>
+          </a:stretch>
+        </p:blipFill>
+        <p:spPr>
+          <a:xfrm>
+            <a:off x="11201400" y="228600"/>
+            <a:ext cx="708894" cy="640080"/>
+          </a:xfrm>
+          <a:prstGeom prst="rect">
+            <a:avLst/>
+          </a:prstGeom>
+        </p:spPr>
+      </p:pic>
+      <p:sp>
+        <p:nvSpPr>
+          <p:cNvPr id="5" name="TextBox 4"/>
           <p:cNvSpPr txBox="1"/>
           <p:nvPr/>
         </p:nvSpPr>
         <p:spPr>
           <a:xfrm>
             <a:off x="548640" y="320040"/>
-            <a:ext cx="10972800" cy="274320"/>
+            <a:ext cx="10058400" cy="274320"/>
           </a:xfrm>
           <a:prstGeom prst="rect">
             <a:avLst/>
@@ -6106,14 +6274,14 @@
       </p:sp>
       <p:sp>
         <p:nvSpPr>
-          <p:cNvPr id="5" name="TextBox 4"/>
+          <p:cNvPr id="6" name="TextBox 5"/>
           <p:cNvSpPr txBox="1"/>
           <p:nvPr/>
         </p:nvSpPr>
         <p:spPr>
           <a:xfrm>
             <a:off x="548640" y="640080"/>
-            <a:ext cx="10972800" cy="548640"/>
+            <a:ext cx="10241280" cy="548640"/>
           </a:xfrm>
           <a:prstGeom prst="rect">
             <a:avLst/>
@@ -6141,7 +6309,7 @@
       </p:sp>
       <p:sp>
         <p:nvSpPr>
-          <p:cNvPr id="6" name="Rounded Rectangle 5"/>
+          <p:cNvPr id="7" name="Rounded Rectangle 6"/>
           <p:cNvSpPr/>
           <p:nvPr/>
         </p:nvSpPr>
@@ -6184,7 +6352,7 @@
       </p:sp>
       <p:sp>
         <p:nvSpPr>
-          <p:cNvPr id="7" name="TextBox 6"/>
+          <p:cNvPr id="8" name="TextBox 7"/>
           <p:cNvSpPr txBox="1"/>
           <p:nvPr/>
         </p:nvSpPr>
@@ -6219,7 +6387,7 @@
       </p:sp>
       <p:sp>
         <p:nvSpPr>
-          <p:cNvPr id="8" name="TextBox 7"/>
+          <p:cNvPr id="9" name="TextBox 8"/>
           <p:cNvSpPr txBox="1"/>
           <p:nvPr/>
         </p:nvSpPr>
@@ -6254,7 +6422,7 @@
       </p:sp>
       <p:sp>
         <p:nvSpPr>
-          <p:cNvPr id="9" name="Rounded Rectangle 8"/>
+          <p:cNvPr id="10" name="Rounded Rectangle 9"/>
           <p:cNvSpPr/>
           <p:nvPr/>
         </p:nvSpPr>
@@ -6297,7 +6465,7 @@
       </p:sp>
       <p:sp>
         <p:nvSpPr>
-          <p:cNvPr id="10" name="TextBox 9"/>
+          <p:cNvPr id="11" name="TextBox 10"/>
           <p:cNvSpPr txBox="1"/>
           <p:nvPr/>
         </p:nvSpPr>
@@ -6332,7 +6500,7 @@
       </p:sp>
       <p:sp>
         <p:nvSpPr>
-          <p:cNvPr id="11" name="TextBox 10"/>
+          <p:cNvPr id="12" name="TextBox 11"/>
           <p:cNvSpPr txBox="1"/>
           <p:nvPr/>
         </p:nvSpPr>
@@ -6367,7 +6535,7 @@
       </p:sp>
       <p:sp>
         <p:nvSpPr>
-          <p:cNvPr id="12" name="Rounded Rectangle 11"/>
+          <p:cNvPr id="13" name="Rounded Rectangle 12"/>
           <p:cNvSpPr/>
           <p:nvPr/>
         </p:nvSpPr>
@@ -6410,7 +6578,7 @@
       </p:sp>
       <p:sp>
         <p:nvSpPr>
-          <p:cNvPr id="13" name="TextBox 12"/>
+          <p:cNvPr id="14" name="TextBox 13"/>
           <p:cNvSpPr txBox="1"/>
           <p:nvPr/>
         </p:nvSpPr>
@@ -6445,7 +6613,7 @@
       </p:sp>
       <p:sp>
         <p:nvSpPr>
-          <p:cNvPr id="14" name="TextBox 13"/>
+          <p:cNvPr id="15" name="TextBox 14"/>
           <p:cNvSpPr txBox="1"/>
           <p:nvPr/>
         </p:nvSpPr>
@@ -6480,7 +6648,7 @@
       </p:sp>
       <p:sp>
         <p:nvSpPr>
-          <p:cNvPr id="15" name="Rounded Rectangle 14"/>
+          <p:cNvPr id="16" name="Rounded Rectangle 15"/>
           <p:cNvSpPr/>
           <p:nvPr/>
         </p:nvSpPr>
@@ -6523,7 +6691,7 @@
       </p:sp>
       <p:sp>
         <p:nvSpPr>
-          <p:cNvPr id="16" name="TextBox 15"/>
+          <p:cNvPr id="17" name="TextBox 16"/>
           <p:cNvSpPr txBox="1"/>
           <p:nvPr/>
         </p:nvSpPr>
@@ -6558,7 +6726,7 @@
       </p:sp>
       <p:sp>
         <p:nvSpPr>
-          <p:cNvPr id="17" name="TextBox 16"/>
+          <p:cNvPr id="18" name="TextBox 17"/>
           <p:cNvSpPr txBox="1"/>
           <p:nvPr/>
         </p:nvSpPr>
@@ -6593,7 +6761,7 @@
       </p:sp>
       <p:sp>
         <p:nvSpPr>
-          <p:cNvPr id="18" name="TextBox 17"/>
+          <p:cNvPr id="19" name="TextBox 18"/>
           <p:cNvSpPr txBox="1"/>
           <p:nvPr/>
         </p:nvSpPr>
@@ -6664,7 +6832,7 @@
       </p:sp>
       <p:sp>
         <p:nvSpPr>
-          <p:cNvPr id="19" name="TextBox 18"/>
+          <p:cNvPr id="20" name="TextBox 19"/>
           <p:cNvSpPr txBox="1"/>
           <p:nvPr/>
         </p:nvSpPr>
@@ -6699,7 +6867,7 @@
       </p:sp>
       <p:sp>
         <p:nvSpPr>
-          <p:cNvPr id="20" name="TextBox 19"/>
+          <p:cNvPr id="21" name="TextBox 20"/>
           <p:cNvSpPr txBox="1"/>
           <p:nvPr/>
         </p:nvSpPr>
@@ -6836,16 +7004,40 @@
           </a:p>
         </p:txBody>
       </p:sp>
-      <p:sp>
-        <p:nvSpPr>
-          <p:cNvPr id="4" name="TextBox 3"/>
+      <p:pic>
+        <p:nvPicPr>
+          <p:cNvPr id="4" name="Picture 3" descr="kgpmu-emblem.png"/>
+          <p:cNvPicPr>
+            <a:picLocks noChangeAspect="1"/>
+          </p:cNvPicPr>
+          <p:nvPr/>
+        </p:nvPicPr>
+        <p:blipFill>
+          <a:blip r:embed="rId2"/>
+          <a:stretch>
+            <a:fillRect/>
+          </a:stretch>
+        </p:blipFill>
+        <p:spPr>
+          <a:xfrm>
+            <a:off x="11201400" y="228600"/>
+            <a:ext cx="708894" cy="640080"/>
+          </a:xfrm>
+          <a:prstGeom prst="rect">
+            <a:avLst/>
+          </a:prstGeom>
+        </p:spPr>
+      </p:pic>
+      <p:sp>
+        <p:nvSpPr>
+          <p:cNvPr id="5" name="TextBox 4"/>
           <p:cNvSpPr txBox="1"/>
           <p:nvPr/>
         </p:nvSpPr>
         <p:spPr>
           <a:xfrm>
             <a:off x="548640" y="320040"/>
-            <a:ext cx="10972800" cy="274320"/>
+            <a:ext cx="10058400" cy="274320"/>
           </a:xfrm>
           <a:prstGeom prst="rect">
             <a:avLst/>
@@ -6873,14 +7065,14 @@
       </p:sp>
       <p:sp>
         <p:nvSpPr>
-          <p:cNvPr id="5" name="TextBox 4"/>
+          <p:cNvPr id="6" name="TextBox 5"/>
           <p:cNvSpPr txBox="1"/>
           <p:nvPr/>
         </p:nvSpPr>
         <p:spPr>
           <a:xfrm>
             <a:off x="548640" y="640080"/>
-            <a:ext cx="10972800" cy="548640"/>
+            <a:ext cx="10241280" cy="548640"/>
           </a:xfrm>
           <a:prstGeom prst="rect">
             <a:avLst/>
@@ -6908,7 +7100,7 @@
       </p:sp>
       <p:sp>
         <p:nvSpPr>
-          <p:cNvPr id="6" name="TextBox 5"/>
+          <p:cNvPr id="7" name="TextBox 6"/>
           <p:cNvSpPr txBox="1"/>
           <p:nvPr/>
         </p:nvSpPr>
@@ -6943,7 +7135,7 @@
       </p:sp>
       <p:sp>
         <p:nvSpPr>
-          <p:cNvPr id="7" name="Rounded Rectangle 6"/>
+          <p:cNvPr id="8" name="Rounded Rectangle 7"/>
           <p:cNvSpPr/>
           <p:nvPr/>
         </p:nvSpPr>
@@ -6986,7 +7178,7 @@
       </p:sp>
       <p:sp>
         <p:nvSpPr>
-          <p:cNvPr id="8" name="TextBox 7"/>
+          <p:cNvPr id="9" name="TextBox 8"/>
           <p:cNvSpPr txBox="1"/>
           <p:nvPr/>
         </p:nvSpPr>
@@ -7021,7 +7213,7 @@
       </p:sp>
       <p:sp>
         <p:nvSpPr>
-          <p:cNvPr id="9" name="TextBox 8"/>
+          <p:cNvPr id="10" name="TextBox 9"/>
           <p:cNvSpPr txBox="1"/>
           <p:nvPr/>
         </p:nvSpPr>
@@ -7056,7 +7248,7 @@
       </p:sp>
       <p:sp>
         <p:nvSpPr>
-          <p:cNvPr id="10" name="TextBox 9"/>
+          <p:cNvPr id="11" name="TextBox 10"/>
           <p:cNvSpPr txBox="1"/>
           <p:nvPr/>
         </p:nvSpPr>
@@ -7193,16 +7385,40 @@
           </a:p>
         </p:txBody>
       </p:sp>
-      <p:sp>
-        <p:nvSpPr>
-          <p:cNvPr id="4" name="TextBox 3"/>
+      <p:pic>
+        <p:nvPicPr>
+          <p:cNvPr id="4" name="Picture 3" descr="kgpmu-emblem.png"/>
+          <p:cNvPicPr>
+            <a:picLocks noChangeAspect="1"/>
+          </p:cNvPicPr>
+          <p:nvPr/>
+        </p:nvPicPr>
+        <p:blipFill>
+          <a:blip r:embed="rId2"/>
+          <a:stretch>
+            <a:fillRect/>
+          </a:stretch>
+        </p:blipFill>
+        <p:spPr>
+          <a:xfrm>
+            <a:off x="11201400" y="228600"/>
+            <a:ext cx="708894" cy="640080"/>
+          </a:xfrm>
+          <a:prstGeom prst="rect">
+            <a:avLst/>
+          </a:prstGeom>
+        </p:spPr>
+      </p:pic>
+      <p:sp>
+        <p:nvSpPr>
+          <p:cNvPr id="5" name="TextBox 4"/>
           <p:cNvSpPr txBox="1"/>
           <p:nvPr/>
         </p:nvSpPr>
         <p:spPr>
           <a:xfrm>
             <a:off x="548640" y="320040"/>
-            <a:ext cx="10972800" cy="274320"/>
+            <a:ext cx="10058400" cy="274320"/>
           </a:xfrm>
           <a:prstGeom prst="rect">
             <a:avLst/>
@@ -7230,14 +7446,14 @@
       </p:sp>
       <p:sp>
         <p:nvSpPr>
-          <p:cNvPr id="5" name="TextBox 4"/>
+          <p:cNvPr id="6" name="TextBox 5"/>
           <p:cNvSpPr txBox="1"/>
           <p:nvPr/>
         </p:nvSpPr>
         <p:spPr>
           <a:xfrm>
             <a:off x="548640" y="640080"/>
-            <a:ext cx="10972800" cy="548640"/>
+            <a:ext cx="10241280" cy="548640"/>
           </a:xfrm>
           <a:prstGeom prst="rect">
             <a:avLst/>
@@ -7265,7 +7481,7 @@
       </p:sp>
       <p:sp>
         <p:nvSpPr>
-          <p:cNvPr id="6" name="Rounded Rectangle 5"/>
+          <p:cNvPr id="7" name="Rounded Rectangle 6"/>
           <p:cNvSpPr/>
           <p:nvPr/>
         </p:nvSpPr>
@@ -7308,7 +7524,7 @@
       </p:sp>
       <p:sp>
         <p:nvSpPr>
-          <p:cNvPr id="7" name="TextBox 6"/>
+          <p:cNvPr id="8" name="TextBox 7"/>
           <p:cNvSpPr txBox="1"/>
           <p:nvPr/>
         </p:nvSpPr>
@@ -7343,7 +7559,7 @@
       </p:sp>
       <p:sp>
         <p:nvSpPr>
-          <p:cNvPr id="8" name="TextBox 7"/>
+          <p:cNvPr id="9" name="TextBox 8"/>
           <p:cNvSpPr txBox="1"/>
           <p:nvPr/>
         </p:nvSpPr>
@@ -7378,7 +7594,7 @@
       </p:sp>
       <p:sp>
         <p:nvSpPr>
-          <p:cNvPr id="9" name="Rounded Rectangle 8"/>
+          <p:cNvPr id="10" name="Rounded Rectangle 9"/>
           <p:cNvSpPr/>
           <p:nvPr/>
         </p:nvSpPr>
@@ -7421,7 +7637,7 @@
       </p:sp>
       <p:sp>
         <p:nvSpPr>
-          <p:cNvPr id="10" name="TextBox 9"/>
+          <p:cNvPr id="11" name="TextBox 10"/>
           <p:cNvSpPr txBox="1"/>
           <p:nvPr/>
         </p:nvSpPr>
@@ -7456,7 +7672,7 @@
       </p:sp>
       <p:sp>
         <p:nvSpPr>
-          <p:cNvPr id="11" name="TextBox 10"/>
+          <p:cNvPr id="12" name="TextBox 11"/>
           <p:cNvSpPr txBox="1"/>
           <p:nvPr/>
         </p:nvSpPr>
@@ -7491,7 +7707,7 @@
       </p:sp>
       <p:sp>
         <p:nvSpPr>
-          <p:cNvPr id="12" name="Rounded Rectangle 11"/>
+          <p:cNvPr id="13" name="Rounded Rectangle 12"/>
           <p:cNvSpPr/>
           <p:nvPr/>
         </p:nvSpPr>
@@ -7534,7 +7750,7 @@
       </p:sp>
       <p:sp>
         <p:nvSpPr>
-          <p:cNvPr id="13" name="TextBox 12"/>
+          <p:cNvPr id="14" name="TextBox 13"/>
           <p:cNvSpPr txBox="1"/>
           <p:nvPr/>
         </p:nvSpPr>
@@ -7569,7 +7785,7 @@
       </p:sp>
       <p:sp>
         <p:nvSpPr>
-          <p:cNvPr id="14" name="TextBox 13"/>
+          <p:cNvPr id="15" name="TextBox 14"/>
           <p:cNvSpPr txBox="1"/>
           <p:nvPr/>
         </p:nvSpPr>
@@ -7604,7 +7820,7 @@
       </p:sp>
       <p:sp>
         <p:nvSpPr>
-          <p:cNvPr id="15" name="Rounded Rectangle 14"/>
+          <p:cNvPr id="16" name="Rounded Rectangle 15"/>
           <p:cNvSpPr/>
           <p:nvPr/>
         </p:nvSpPr>
@@ -7647,7 +7863,7 @@
       </p:sp>
       <p:sp>
         <p:nvSpPr>
-          <p:cNvPr id="16" name="TextBox 15"/>
+          <p:cNvPr id="17" name="TextBox 16"/>
           <p:cNvSpPr txBox="1"/>
           <p:nvPr/>
         </p:nvSpPr>
@@ -7682,7 +7898,7 @@
       </p:sp>
       <p:sp>
         <p:nvSpPr>
-          <p:cNvPr id="17" name="TextBox 16"/>
+          <p:cNvPr id="18" name="TextBox 17"/>
           <p:cNvSpPr txBox="1"/>
           <p:nvPr/>
         </p:nvSpPr>
@@ -7717,7 +7933,7 @@
       </p:sp>
       <p:sp>
         <p:nvSpPr>
-          <p:cNvPr id="18" name="TextBox 17"/>
+          <p:cNvPr id="19" name="TextBox 18"/>
           <p:cNvSpPr txBox="1"/>
           <p:nvPr/>
         </p:nvSpPr>
@@ -7752,7 +7968,7 @@
       </p:sp>
       <p:sp>
         <p:nvSpPr>
-          <p:cNvPr id="19" name="TextBox 18"/>
+          <p:cNvPr id="20" name="TextBox 19"/>
           <p:cNvSpPr txBox="1"/>
           <p:nvPr/>
         </p:nvSpPr>
@@ -7889,16 +8105,40 @@
           </a:p>
         </p:txBody>
       </p:sp>
-      <p:sp>
-        <p:nvSpPr>
-          <p:cNvPr id="4" name="TextBox 3"/>
+      <p:pic>
+        <p:nvPicPr>
+          <p:cNvPr id="4" name="Picture 3" descr="kgpmu-emblem.png"/>
+          <p:cNvPicPr>
+            <a:picLocks noChangeAspect="1"/>
+          </p:cNvPicPr>
+          <p:nvPr/>
+        </p:nvPicPr>
+        <p:blipFill>
+          <a:blip r:embed="rId2"/>
+          <a:stretch>
+            <a:fillRect/>
+          </a:stretch>
+        </p:blipFill>
+        <p:spPr>
+          <a:xfrm>
+            <a:off x="11201400" y="228600"/>
+            <a:ext cx="708894" cy="640080"/>
+          </a:xfrm>
+          <a:prstGeom prst="rect">
+            <a:avLst/>
+          </a:prstGeom>
+        </p:spPr>
+      </p:pic>
+      <p:sp>
+        <p:nvSpPr>
+          <p:cNvPr id="5" name="TextBox 4"/>
           <p:cNvSpPr txBox="1"/>
           <p:nvPr/>
         </p:nvSpPr>
         <p:spPr>
           <a:xfrm>
             <a:off x="548640" y="320040"/>
-            <a:ext cx="10972800" cy="274320"/>
+            <a:ext cx="10058400" cy="274320"/>
           </a:xfrm>
           <a:prstGeom prst="rect">
             <a:avLst/>
@@ -7926,14 +8166,14 @@
       </p:sp>
       <p:sp>
         <p:nvSpPr>
-          <p:cNvPr id="5" name="TextBox 4"/>
+          <p:cNvPr id="6" name="TextBox 5"/>
           <p:cNvSpPr txBox="1"/>
           <p:nvPr/>
         </p:nvSpPr>
         <p:spPr>
           <a:xfrm>
             <a:off x="548640" y="640080"/>
-            <a:ext cx="10972800" cy="548640"/>
+            <a:ext cx="10241280" cy="548640"/>
           </a:xfrm>
           <a:prstGeom prst="rect">
             <a:avLst/>
@@ -7961,7 +8201,7 @@
       </p:sp>
       <p:sp>
         <p:nvSpPr>
-          <p:cNvPr id="6" name="TextBox 5"/>
+          <p:cNvPr id="7" name="TextBox 6"/>
           <p:cNvSpPr txBox="1"/>
           <p:nvPr/>
         </p:nvSpPr>
@@ -8096,7 +8336,7 @@
       </p:sp>
       <p:sp>
         <p:nvSpPr>
-          <p:cNvPr id="7" name="TextBox 6"/>
+          <p:cNvPr id="8" name="TextBox 7"/>
           <p:cNvSpPr txBox="1"/>
           <p:nvPr/>
         </p:nvSpPr>
@@ -8131,7 +8371,7 @@
       </p:sp>
       <p:sp>
         <p:nvSpPr>
-          <p:cNvPr id="8" name="TextBox 7"/>
+          <p:cNvPr id="9" name="TextBox 8"/>
           <p:cNvSpPr txBox="1"/>
           <p:nvPr/>
         </p:nvSpPr>
@@ -8268,16 +8508,40 @@
           </a:p>
         </p:txBody>
       </p:sp>
-      <p:sp>
-        <p:nvSpPr>
-          <p:cNvPr id="4" name="TextBox 3"/>
+      <p:pic>
+        <p:nvPicPr>
+          <p:cNvPr id="4" name="Picture 3" descr="kgpmu-emblem.png"/>
+          <p:cNvPicPr>
+            <a:picLocks noChangeAspect="1"/>
+          </p:cNvPicPr>
+          <p:nvPr/>
+        </p:nvPicPr>
+        <p:blipFill>
+          <a:blip r:embed="rId2"/>
+          <a:stretch>
+            <a:fillRect/>
+          </a:stretch>
+        </p:blipFill>
+        <p:spPr>
+          <a:xfrm>
+            <a:off x="11201400" y="228600"/>
+            <a:ext cx="708894" cy="640080"/>
+          </a:xfrm>
+          <a:prstGeom prst="rect">
+            <a:avLst/>
+          </a:prstGeom>
+        </p:spPr>
+      </p:pic>
+      <p:sp>
+        <p:nvSpPr>
+          <p:cNvPr id="5" name="TextBox 4"/>
           <p:cNvSpPr txBox="1"/>
           <p:nvPr/>
         </p:nvSpPr>
         <p:spPr>
           <a:xfrm>
             <a:off x="548640" y="320040"/>
-            <a:ext cx="10972800" cy="274320"/>
+            <a:ext cx="10058400" cy="274320"/>
           </a:xfrm>
           <a:prstGeom prst="rect">
             <a:avLst/>
@@ -8305,14 +8569,14 @@
       </p:sp>
       <p:sp>
         <p:nvSpPr>
-          <p:cNvPr id="5" name="TextBox 4"/>
+          <p:cNvPr id="6" name="TextBox 5"/>
           <p:cNvSpPr txBox="1"/>
           <p:nvPr/>
         </p:nvSpPr>
         <p:spPr>
           <a:xfrm>
             <a:off x="548640" y="640080"/>
-            <a:ext cx="10972800" cy="548640"/>
+            <a:ext cx="10241280" cy="548640"/>
           </a:xfrm>
           <a:prstGeom prst="rect">
             <a:avLst/>
@@ -8340,7 +8604,7 @@
       </p:sp>
       <p:sp>
         <p:nvSpPr>
-          <p:cNvPr id="6" name="TextBox 5"/>
+          <p:cNvPr id="7" name="TextBox 6"/>
           <p:cNvSpPr txBox="1"/>
           <p:nvPr/>
         </p:nvSpPr>
@@ -8375,7 +8639,7 @@
       </p:sp>
       <p:sp>
         <p:nvSpPr>
-          <p:cNvPr id="7" name="Rounded Rectangle 6"/>
+          <p:cNvPr id="8" name="Rounded Rectangle 7"/>
           <p:cNvSpPr/>
           <p:nvPr/>
         </p:nvSpPr>
@@ -8418,7 +8682,7 @@
       </p:sp>
       <p:sp>
         <p:nvSpPr>
-          <p:cNvPr id="8" name="TextBox 7"/>
+          <p:cNvPr id="9" name="TextBox 8"/>
           <p:cNvSpPr txBox="1"/>
           <p:nvPr/>
         </p:nvSpPr>
@@ -8453,7 +8717,7 @@
       </p:sp>
       <p:sp>
         <p:nvSpPr>
-          <p:cNvPr id="9" name="TextBox 8"/>
+          <p:cNvPr id="10" name="TextBox 9"/>
           <p:cNvSpPr txBox="1"/>
           <p:nvPr/>
         </p:nvSpPr>
@@ -8488,7 +8752,7 @@
       </p:sp>
       <p:sp>
         <p:nvSpPr>
-          <p:cNvPr id="10" name="Rounded Rectangle 9"/>
+          <p:cNvPr id="11" name="Rounded Rectangle 10"/>
           <p:cNvSpPr/>
           <p:nvPr/>
         </p:nvSpPr>
@@ -8531,7 +8795,7 @@
       </p:sp>
       <p:sp>
         <p:nvSpPr>
-          <p:cNvPr id="11" name="TextBox 10"/>
+          <p:cNvPr id="12" name="TextBox 11"/>
           <p:cNvSpPr txBox="1"/>
           <p:nvPr/>
         </p:nvSpPr>
@@ -8566,7 +8830,7 @@
       </p:sp>
       <p:sp>
         <p:nvSpPr>
-          <p:cNvPr id="12" name="TextBox 11"/>
+          <p:cNvPr id="13" name="TextBox 12"/>
           <p:cNvSpPr txBox="1"/>
           <p:nvPr/>
         </p:nvSpPr>
@@ -8601,7 +8865,7 @@
       </p:sp>
       <p:sp>
         <p:nvSpPr>
-          <p:cNvPr id="13" name="Rounded Rectangle 12"/>
+          <p:cNvPr id="14" name="Rounded Rectangle 13"/>
           <p:cNvSpPr/>
           <p:nvPr/>
         </p:nvSpPr>
@@ -8644,7 +8908,7 @@
       </p:sp>
       <p:sp>
         <p:nvSpPr>
-          <p:cNvPr id="14" name="TextBox 13"/>
+          <p:cNvPr id="15" name="TextBox 14"/>
           <p:cNvSpPr txBox="1"/>
           <p:nvPr/>
         </p:nvSpPr>
@@ -8679,7 +8943,7 @@
       </p:sp>
       <p:sp>
         <p:nvSpPr>
-          <p:cNvPr id="15" name="TextBox 14"/>
+          <p:cNvPr id="16" name="TextBox 15"/>
           <p:cNvSpPr txBox="1"/>
           <p:nvPr/>
         </p:nvSpPr>
@@ -8714,7 +8978,7 @@
       </p:sp>
       <p:sp>
         <p:nvSpPr>
-          <p:cNvPr id="16" name="Rounded Rectangle 15"/>
+          <p:cNvPr id="17" name="Rounded Rectangle 16"/>
           <p:cNvSpPr/>
           <p:nvPr/>
         </p:nvSpPr>
@@ -8757,7 +9021,7 @@
       </p:sp>
       <p:sp>
         <p:nvSpPr>
-          <p:cNvPr id="17" name="TextBox 16"/>
+          <p:cNvPr id="18" name="TextBox 17"/>
           <p:cNvSpPr txBox="1"/>
           <p:nvPr/>
         </p:nvSpPr>
@@ -8792,7 +9056,7 @@
       </p:sp>
       <p:sp>
         <p:nvSpPr>
-          <p:cNvPr id="18" name="TextBox 17"/>
+          <p:cNvPr id="19" name="TextBox 18"/>
           <p:cNvSpPr txBox="1"/>
           <p:nvPr/>
         </p:nvSpPr>
@@ -8827,7 +9091,7 @@
       </p:sp>
       <p:sp>
         <p:nvSpPr>
-          <p:cNvPr id="19" name="TextBox 18"/>
+          <p:cNvPr id="20" name="TextBox 19"/>
           <p:cNvSpPr txBox="1"/>
           <p:nvPr/>
         </p:nvSpPr>
@@ -8862,7 +9126,7 @@
       </p:sp>
       <p:sp>
         <p:nvSpPr>
-          <p:cNvPr id="20" name="TextBox 19"/>
+          <p:cNvPr id="21" name="TextBox 20"/>
           <p:cNvSpPr txBox="1"/>
           <p:nvPr/>
         </p:nvSpPr>
@@ -8999,16 +9263,40 @@
           </a:p>
         </p:txBody>
       </p:sp>
-      <p:sp>
-        <p:nvSpPr>
-          <p:cNvPr id="4" name="TextBox 3"/>
+      <p:pic>
+        <p:nvPicPr>
+          <p:cNvPr id="4" name="Picture 3" descr="kgpmu-emblem.png"/>
+          <p:cNvPicPr>
+            <a:picLocks noChangeAspect="1"/>
+          </p:cNvPicPr>
+          <p:nvPr/>
+        </p:nvPicPr>
+        <p:blipFill>
+          <a:blip r:embed="rId2"/>
+          <a:stretch>
+            <a:fillRect/>
+          </a:stretch>
+        </p:blipFill>
+        <p:spPr>
+          <a:xfrm>
+            <a:off x="11201400" y="228600"/>
+            <a:ext cx="708894" cy="640080"/>
+          </a:xfrm>
+          <a:prstGeom prst="rect">
+            <a:avLst/>
+          </a:prstGeom>
+        </p:spPr>
+      </p:pic>
+      <p:sp>
+        <p:nvSpPr>
+          <p:cNvPr id="5" name="TextBox 4"/>
           <p:cNvSpPr txBox="1"/>
           <p:nvPr/>
         </p:nvSpPr>
         <p:spPr>
           <a:xfrm>
             <a:off x="548640" y="320040"/>
-            <a:ext cx="10972800" cy="274320"/>
+            <a:ext cx="10058400" cy="274320"/>
           </a:xfrm>
           <a:prstGeom prst="rect">
             <a:avLst/>
@@ -9036,14 +9324,14 @@
       </p:sp>
       <p:sp>
         <p:nvSpPr>
-          <p:cNvPr id="5" name="TextBox 4"/>
+          <p:cNvPr id="6" name="TextBox 5"/>
           <p:cNvSpPr txBox="1"/>
           <p:nvPr/>
         </p:nvSpPr>
         <p:spPr>
           <a:xfrm>
             <a:off x="548640" y="640080"/>
-            <a:ext cx="10972800" cy="548640"/>
+            <a:ext cx="10241280" cy="548640"/>
           </a:xfrm>
           <a:prstGeom prst="rect">
             <a:avLst/>
@@ -9071,7 +9359,7 @@
       </p:sp>
       <p:sp>
         <p:nvSpPr>
-          <p:cNvPr id="6" name="Rounded Rectangle 5"/>
+          <p:cNvPr id="7" name="Rounded Rectangle 6"/>
           <p:cNvSpPr/>
           <p:nvPr/>
         </p:nvSpPr>
@@ -9114,7 +9402,7 @@
       </p:sp>
       <p:sp>
         <p:nvSpPr>
-          <p:cNvPr id="7" name="TextBox 6"/>
+          <p:cNvPr id="8" name="TextBox 7"/>
           <p:cNvSpPr txBox="1"/>
           <p:nvPr/>
         </p:nvSpPr>
@@ -9149,7 +9437,7 @@
       </p:sp>
       <p:sp>
         <p:nvSpPr>
-          <p:cNvPr id="8" name="TextBox 7"/>
+          <p:cNvPr id="9" name="TextBox 8"/>
           <p:cNvSpPr txBox="1"/>
           <p:nvPr/>
         </p:nvSpPr>
@@ -9184,7 +9472,7 @@
       </p:sp>
       <p:sp>
         <p:nvSpPr>
-          <p:cNvPr id="9" name="Rounded Rectangle 8"/>
+          <p:cNvPr id="10" name="Rounded Rectangle 9"/>
           <p:cNvSpPr/>
           <p:nvPr/>
         </p:nvSpPr>
@@ -9227,7 +9515,7 @@
       </p:sp>
       <p:sp>
         <p:nvSpPr>
-          <p:cNvPr id="10" name="TextBox 9"/>
+          <p:cNvPr id="11" name="TextBox 10"/>
           <p:cNvSpPr txBox="1"/>
           <p:nvPr/>
         </p:nvSpPr>
@@ -9262,7 +9550,7 @@
       </p:sp>
       <p:sp>
         <p:nvSpPr>
-          <p:cNvPr id="11" name="TextBox 10"/>
+          <p:cNvPr id="12" name="TextBox 11"/>
           <p:cNvSpPr txBox="1"/>
           <p:nvPr/>
         </p:nvSpPr>
@@ -9297,7 +9585,7 @@
       </p:sp>
       <p:sp>
         <p:nvSpPr>
-          <p:cNvPr id="12" name="Rounded Rectangle 11"/>
+          <p:cNvPr id="13" name="Rounded Rectangle 12"/>
           <p:cNvSpPr/>
           <p:nvPr/>
         </p:nvSpPr>
@@ -9340,7 +9628,7 @@
       </p:sp>
       <p:sp>
         <p:nvSpPr>
-          <p:cNvPr id="13" name="TextBox 12"/>
+          <p:cNvPr id="14" name="TextBox 13"/>
           <p:cNvSpPr txBox="1"/>
           <p:nvPr/>
         </p:nvSpPr>
@@ -9375,7 +9663,7 @@
       </p:sp>
       <p:sp>
         <p:nvSpPr>
-          <p:cNvPr id="14" name="TextBox 13"/>
+          <p:cNvPr id="15" name="TextBox 14"/>
           <p:cNvSpPr txBox="1"/>
           <p:nvPr/>
         </p:nvSpPr>
@@ -9410,7 +9698,7 @@
       </p:sp>
       <p:sp>
         <p:nvSpPr>
-          <p:cNvPr id="15" name="TextBox 14"/>
+          <p:cNvPr id="16" name="TextBox 15"/>
           <p:cNvSpPr txBox="1"/>
           <p:nvPr/>
         </p:nvSpPr>
@@ -9445,7 +9733,7 @@
       </p:sp>
       <p:sp>
         <p:nvSpPr>
-          <p:cNvPr id="16" name="TextBox 15"/>
+          <p:cNvPr id="17" name="TextBox 16"/>
           <p:cNvSpPr txBox="1"/>
           <p:nvPr/>
         </p:nvSpPr>
@@ -9480,7 +9768,7 @@
       </p:sp>
       <p:sp>
         <p:nvSpPr>
-          <p:cNvPr id="17" name="TextBox 16"/>
+          <p:cNvPr id="18" name="TextBox 17"/>
           <p:cNvSpPr txBox="1"/>
           <p:nvPr/>
         </p:nvSpPr>
@@ -9515,7 +9803,7 @@
       </p:sp>
       <p:sp>
         <p:nvSpPr>
-          <p:cNvPr id="18" name="TextBox 17"/>
+          <p:cNvPr id="19" name="TextBox 18"/>
           <p:cNvSpPr txBox="1"/>
           <p:nvPr/>
         </p:nvSpPr>

--- a/presentations/IPMA_Kyrgyzstan_CoD_Presentation.pptx
+++ b/presentations/IPMA_Kyrgyzstan_CoD_Presentation.pptx
@@ -3187,7 +3187,7 @@
       </p:sp>
       <p:pic>
         <p:nvPicPr>
-          <p:cNvPr id="4" name="Picture 3" descr="kgpmu-logo-full.png"/>
+          <p:cNvPr id="4" name="Picture 3" descr="ipma-kr-logo-white.png"/>
           <p:cNvPicPr>
             <a:picLocks noChangeAspect="1"/>
           </p:cNvPicPr>
@@ -3201,8 +3201,8 @@
         </p:blipFill>
         <p:spPr>
           <a:xfrm>
-            <a:off x="4175607" y="822960"/>
-            <a:ext cx="3840480" cy="1823761"/>
+            <a:off x="3535527" y="914400"/>
+            <a:ext cx="5120640" cy="1496630"/>
           </a:xfrm>
           <a:prstGeom prst="rect">
             <a:avLst/>
@@ -3217,7 +3217,7 @@
         </p:nvSpPr>
         <p:spPr>
           <a:xfrm>
-            <a:off x="731520" y="2606040"/>
+            <a:off x="731520" y="2788920"/>
             <a:ext cx="10698480" cy="320040"/>
           </a:xfrm>
           <a:prstGeom prst="rect">
@@ -3252,7 +3252,7 @@
         </p:nvSpPr>
         <p:spPr>
           <a:xfrm>
-            <a:off x="731520" y="3017520"/>
+            <a:off x="731520" y="3200400"/>
             <a:ext cx="10698480" cy="914400"/>
           </a:xfrm>
           <a:prstGeom prst="rect">
@@ -3268,7 +3268,7 @@
           <a:p>
             <a:pPr algn="ctr"/>
             <a:r>
-              <a:rPr sz="3200" b="1">
+              <a:rPr sz="3000" b="1">
                 <a:solidFill>
                   <a:srgbClr val="FFFFFF"/>
                 </a:solidFill>
@@ -3288,7 +3288,7 @@
         </p:nvSpPr>
         <p:spPr>
           <a:xfrm>
-            <a:off x="731520" y="4114800"/>
+            <a:off x="731520" y="4251960"/>
             <a:ext cx="10698480" cy="365760"/>
           </a:xfrm>
           <a:prstGeom prst="rect">
@@ -3310,7 +3310,7 @@
                 </a:solidFill>
                 <a:latin typeface="Calibri"/>
               </a:rPr>
-              <a:t>ОО «KgPMU» · Kyrgyz Project Management Union · ipma.kg</a:t>
+              <a:t>ОО «KgPMU» · IPMA Kyrgyz Republic · ipma.kg</a:t>
             </a:r>
           </a:p>
         </p:txBody>
@@ -3323,7 +3323,7 @@
         </p:nvSpPr>
         <p:spPr>
           <a:xfrm>
-            <a:off x="1645920" y="4709160"/>
+            <a:off x="1645920" y="4800600"/>
             <a:ext cx="8869680" cy="594360"/>
           </a:xfrm>
           <a:prstGeom prst="roundRect">
@@ -3366,7 +3366,7 @@
         </p:nvSpPr>
         <p:spPr>
           <a:xfrm>
-            <a:off x="1828800" y="4828032"/>
+            <a:off x="1828800" y="4919472"/>
             <a:ext cx="8503920" cy="365760"/>
           </a:xfrm>
           <a:prstGeom prst="rect">
@@ -3401,7 +3401,7 @@
         </p:nvSpPr>
         <p:spPr>
           <a:xfrm>
-            <a:off x="731520" y="5532120"/>
+            <a:off x="731520" y="5623560"/>
             <a:ext cx="10698480" cy="320040"/>
           </a:xfrm>
           <a:prstGeom prst="rect">
@@ -3534,7 +3534,7 @@
       </p:sp>
       <p:pic>
         <p:nvPicPr>
-          <p:cNvPr id="4" name="Picture 3" descr="kgpmu-emblem.png"/>
+          <p:cNvPr id="4" name="Picture 3" descr="ipma-kr-emblem.png"/>
           <p:cNvPicPr>
             <a:picLocks noChangeAspect="1"/>
           </p:cNvPicPr>
@@ -3548,8 +3548,8 @@
         </p:blipFill>
         <p:spPr>
           <a:xfrm>
-            <a:off x="11201400" y="228600"/>
-            <a:ext cx="708894" cy="640080"/>
+            <a:off x="11292840" y="201168"/>
+            <a:ext cx="661788" cy="658368"/>
           </a:xfrm>
           <a:prstGeom prst="rect">
             <a:avLst/>
@@ -4108,7 +4108,7 @@
                 </a:solidFill>
                 <a:latin typeface="Calibri"/>
               </a:rPr>
-              <a:t>KgPMU · ipma.kg · Ассоциация-заявитель IPMA</a:t>
+              <a:t>IPMA Kyrgyz Republic · ipma.kg · Ассоциация-заявитель</a:t>
             </a:r>
           </a:p>
         </p:txBody>
@@ -4254,7 +4254,7 @@
       </p:sp>
       <p:pic>
         <p:nvPicPr>
-          <p:cNvPr id="4" name="Picture 3" descr="kgpmu-emblem.png"/>
+          <p:cNvPr id="4" name="Picture 3" descr="ipma-kr-emblem.png"/>
           <p:cNvPicPr>
             <a:picLocks noChangeAspect="1"/>
           </p:cNvPicPr>
@@ -4268,8 +4268,8 @@
         </p:blipFill>
         <p:spPr>
           <a:xfrm>
-            <a:off x="11201400" y="228600"/>
-            <a:ext cx="708894" cy="640080"/>
+            <a:off x="11292840" y="201168"/>
+            <a:ext cx="661788" cy="658368"/>
           </a:xfrm>
           <a:prstGeom prst="rect">
             <a:avLst/>
@@ -4479,7 +4479,7 @@
                 </a:solidFill>
                 <a:latin typeface="Calibri"/>
               </a:rPr>
-              <a:t>KgPMU · ipma.kg · Ассоциация-заявитель IPMA</a:t>
+              <a:t>IPMA Kyrgyz Republic · ipma.kg · Ассоциация-заявитель</a:t>
             </a:r>
           </a:p>
         </p:txBody>
@@ -4625,7 +4625,7 @@
       </p:sp>
       <p:pic>
         <p:nvPicPr>
-          <p:cNvPr id="4" name="Picture 3" descr="kgpmu-logo-full.png"/>
+          <p:cNvPr id="4" name="Picture 3" descr="ipma-kr-logo-white.png"/>
           <p:cNvPicPr>
             <a:picLocks noChangeAspect="1"/>
           </p:cNvPicPr>
@@ -4639,8 +4639,8 @@
         </p:blipFill>
         <p:spPr>
           <a:xfrm>
-            <a:off x="4541367" y="640080"/>
-            <a:ext cx="3108960" cy="1476378"/>
+            <a:off x="3992727" y="685800"/>
+            <a:ext cx="4206240" cy="1229375"/>
           </a:xfrm>
           <a:prstGeom prst="rect">
             <a:avLst/>
@@ -4655,7 +4655,7 @@
         </p:nvSpPr>
         <p:spPr>
           <a:xfrm>
-            <a:off x="731520" y="2286000"/>
+            <a:off x="731520" y="2331720"/>
             <a:ext cx="10698480" cy="320040"/>
           </a:xfrm>
           <a:prstGeom prst="rect">
@@ -4690,8 +4690,8 @@
         </p:nvSpPr>
         <p:spPr>
           <a:xfrm>
-            <a:off x="731520" y="2697480"/>
-            <a:ext cx="10698480" cy="548640"/>
+            <a:off x="731520" y="2743200"/>
+            <a:ext cx="10698480" cy="502920"/>
           </a:xfrm>
           <a:prstGeom prst="rect">
             <a:avLst/>
@@ -4747,7 +4747,7 @@
                 </a:solidFill>
                 <a:latin typeface="Calibri"/>
               </a:rPr>
-              <a:t>KgPMU уже является Ассоциацией-заявителем IPMA и готова двигаться к полноправному членству и сертификации в Центральной Азии.</a:t>
+              <a:t>KgPMU / IPMA Kyrgyz Republic уже является Ассоциацией-заявителем IPMA и готова двигаться к полноправному членству и сертификации в Центральной Азии.</a:t>
             </a:r>
           </a:p>
         </p:txBody>
@@ -4862,7 +4862,7 @@
                 </a:solidFill>
                 <a:latin typeface="Calibri"/>
               </a:rPr>
-              <a:t>KgPMU · ipma.kg · Ассоциация-заявитель IPMA</a:t>
+              <a:t>IPMA Kyrgyz Republic · ipma.kg · Ассоциация-заявитель</a:t>
             </a:r>
           </a:p>
         </p:txBody>
@@ -5008,7 +5008,7 @@
       </p:sp>
       <p:pic>
         <p:nvPicPr>
-          <p:cNvPr id="4" name="Picture 3" descr="kgpmu-emblem.png"/>
+          <p:cNvPr id="4" name="Picture 3" descr="ipma-kr-emblem.png"/>
           <p:cNvPicPr>
             <a:picLocks noChangeAspect="1"/>
           </p:cNvPicPr>
@@ -5022,8 +5022,8 @@
         </p:blipFill>
         <p:spPr>
           <a:xfrm>
-            <a:off x="11201400" y="228600"/>
-            <a:ext cx="708894" cy="640080"/>
+            <a:off x="11292840" y="201168"/>
+            <a:ext cx="661788" cy="658368"/>
           </a:xfrm>
           <a:prstGeom prst="rect">
             <a:avLst/>
@@ -5314,7 +5314,7 @@
                 </a:solidFill>
                 <a:latin typeface="Calibri"/>
               </a:rPr>
-              <a:t>KgPMU · ipma.kg · Ассоциация-заявитель IPMA</a:t>
+              <a:t>IPMA Kyrgyz Republic · ipma.kg · Ассоциация-заявитель</a:t>
             </a:r>
           </a:p>
         </p:txBody>
@@ -5460,7 +5460,7 @@
       </p:sp>
       <p:pic>
         <p:nvPicPr>
-          <p:cNvPr id="4" name="Picture 3" descr="kgpmu-emblem.png"/>
+          <p:cNvPr id="4" name="Picture 3" descr="ipma-kr-emblem.png"/>
           <p:cNvPicPr>
             <a:picLocks noChangeAspect="1"/>
           </p:cNvPicPr>
@@ -5474,8 +5474,8 @@
         </p:blipFill>
         <p:spPr>
           <a:xfrm>
-            <a:off x="11201400" y="228600"/>
-            <a:ext cx="708894" cy="640080"/>
+            <a:off x="11292840" y="201168"/>
+            <a:ext cx="661788" cy="658368"/>
           </a:xfrm>
           <a:prstGeom prst="rect">
             <a:avLst/>
@@ -6069,7 +6069,7 @@
                 </a:solidFill>
                 <a:latin typeface="Calibri"/>
               </a:rPr>
-              <a:t>KgPMU · ipma.kg · Ассоциация-заявитель IPMA</a:t>
+              <a:t>IPMA Kyrgyz Republic · ipma.kg · Ассоциация-заявитель</a:t>
             </a:r>
           </a:p>
         </p:txBody>
@@ -6215,7 +6215,7 @@
       </p:sp>
       <p:pic>
         <p:nvPicPr>
-          <p:cNvPr id="4" name="Picture 3" descr="kgpmu-emblem.png"/>
+          <p:cNvPr id="4" name="Picture 3" descr="ipma-kr-emblem.png"/>
           <p:cNvPicPr>
             <a:picLocks noChangeAspect="1"/>
           </p:cNvPicPr>
@@ -6229,8 +6229,8 @@
         </p:blipFill>
         <p:spPr>
           <a:xfrm>
-            <a:off x="11201400" y="228600"/>
-            <a:ext cx="708894" cy="640080"/>
+            <a:off x="11292840" y="201168"/>
+            <a:ext cx="661788" cy="658368"/>
           </a:xfrm>
           <a:prstGeom prst="rect">
             <a:avLst/>
@@ -6860,7 +6860,7 @@
                 </a:solidFill>
                 <a:latin typeface="Calibri"/>
               </a:rPr>
-              <a:t>KgPMU · ipma.kg · Ассоциация-заявитель IPMA</a:t>
+              <a:t>IPMA Kyrgyz Republic · ipma.kg · Ассоциация-заявитель</a:t>
             </a:r>
           </a:p>
         </p:txBody>
@@ -7006,7 +7006,7 @@
       </p:sp>
       <p:pic>
         <p:nvPicPr>
-          <p:cNvPr id="4" name="Picture 3" descr="kgpmu-emblem.png"/>
+          <p:cNvPr id="4" name="Picture 3" descr="ipma-kr-emblem.png"/>
           <p:cNvPicPr>
             <a:picLocks noChangeAspect="1"/>
           </p:cNvPicPr>
@@ -7020,8 +7020,8 @@
         </p:blipFill>
         <p:spPr>
           <a:xfrm>
-            <a:off x="11201400" y="228600"/>
-            <a:ext cx="708894" cy="640080"/>
+            <a:off x="11292840" y="201168"/>
+            <a:ext cx="661788" cy="658368"/>
           </a:xfrm>
           <a:prstGeom prst="rect">
             <a:avLst/>
@@ -7241,7 +7241,7 @@
                 </a:solidFill>
                 <a:latin typeface="Calibri"/>
               </a:rPr>
-              <a:t>KgPMU · ipma.kg · Ассоциация-заявитель IPMA</a:t>
+              <a:t>IPMA Kyrgyz Republic · ipma.kg · Ассоциация-заявитель</a:t>
             </a:r>
           </a:p>
         </p:txBody>
@@ -7387,7 +7387,7 @@
       </p:sp>
       <p:pic>
         <p:nvPicPr>
-          <p:cNvPr id="4" name="Picture 3" descr="kgpmu-emblem.png"/>
+          <p:cNvPr id="4" name="Picture 3" descr="ipma-kr-emblem.png"/>
           <p:cNvPicPr>
             <a:picLocks noChangeAspect="1"/>
           </p:cNvPicPr>
@@ -7401,8 +7401,8 @@
         </p:blipFill>
         <p:spPr>
           <a:xfrm>
-            <a:off x="11201400" y="228600"/>
-            <a:ext cx="708894" cy="640080"/>
+            <a:off x="11292840" y="201168"/>
+            <a:ext cx="661788" cy="658368"/>
           </a:xfrm>
           <a:prstGeom prst="rect">
             <a:avLst/>
@@ -7961,7 +7961,7 @@
                 </a:solidFill>
                 <a:latin typeface="Calibri"/>
               </a:rPr>
-              <a:t>KgPMU · ipma.kg · Ассоциация-заявитель IPMA</a:t>
+              <a:t>IPMA Kyrgyz Republic · ipma.kg · Ассоциация-заявитель</a:t>
             </a:r>
           </a:p>
         </p:txBody>
@@ -8107,7 +8107,7 @@
       </p:sp>
       <p:pic>
         <p:nvPicPr>
-          <p:cNvPr id="4" name="Picture 3" descr="kgpmu-emblem.png"/>
+          <p:cNvPr id="4" name="Picture 3" descr="ipma-kr-emblem.png"/>
           <p:cNvPicPr>
             <a:picLocks noChangeAspect="1"/>
           </p:cNvPicPr>
@@ -8121,8 +8121,8 @@
         </p:blipFill>
         <p:spPr>
           <a:xfrm>
-            <a:off x="11201400" y="228600"/>
-            <a:ext cx="708894" cy="640080"/>
+            <a:off x="11292840" y="201168"/>
+            <a:ext cx="661788" cy="658368"/>
           </a:xfrm>
           <a:prstGeom prst="rect">
             <a:avLst/>
@@ -8364,7 +8364,7 @@
                 </a:solidFill>
                 <a:latin typeface="Calibri"/>
               </a:rPr>
-              <a:t>KgPMU · ipma.kg · Ассоциация-заявитель IPMA</a:t>
+              <a:t>IPMA Kyrgyz Republic · ipma.kg · Ассоциация-заявитель</a:t>
             </a:r>
           </a:p>
         </p:txBody>
@@ -8510,7 +8510,7 @@
       </p:sp>
       <p:pic>
         <p:nvPicPr>
-          <p:cNvPr id="4" name="Picture 3" descr="kgpmu-emblem.png"/>
+          <p:cNvPr id="4" name="Picture 3" descr="ipma-kr-emblem.png"/>
           <p:cNvPicPr>
             <a:picLocks noChangeAspect="1"/>
           </p:cNvPicPr>
@@ -8524,8 +8524,8 @@
         </p:blipFill>
         <p:spPr>
           <a:xfrm>
-            <a:off x="11201400" y="228600"/>
-            <a:ext cx="708894" cy="640080"/>
+            <a:off x="11292840" y="201168"/>
+            <a:ext cx="661788" cy="658368"/>
           </a:xfrm>
           <a:prstGeom prst="rect">
             <a:avLst/>
@@ -9119,7 +9119,7 @@
                 </a:solidFill>
                 <a:latin typeface="Calibri"/>
               </a:rPr>
-              <a:t>KgPMU · ipma.kg · Ассоциация-заявитель IPMA</a:t>
+              <a:t>IPMA Kyrgyz Republic · ipma.kg · Ассоциация-заявитель</a:t>
             </a:r>
           </a:p>
         </p:txBody>
@@ -9265,7 +9265,7 @@
       </p:sp>
       <p:pic>
         <p:nvPicPr>
-          <p:cNvPr id="4" name="Picture 3" descr="kgpmu-emblem.png"/>
+          <p:cNvPr id="4" name="Picture 3" descr="ipma-kr-emblem.png"/>
           <p:cNvPicPr>
             <a:picLocks noChangeAspect="1"/>
           </p:cNvPicPr>
@@ -9279,8 +9279,8 @@
         </p:blipFill>
         <p:spPr>
           <a:xfrm>
-            <a:off x="11201400" y="228600"/>
-            <a:ext cx="708894" cy="640080"/>
+            <a:off x="11292840" y="201168"/>
+            <a:ext cx="661788" cy="658368"/>
           </a:xfrm>
           <a:prstGeom prst="rect">
             <a:avLst/>
@@ -9796,7 +9796,7 @@
                 </a:solidFill>
                 <a:latin typeface="Calibri"/>
               </a:rPr>
-              <a:t>KgPMU · ipma.kg · Ассоциация-заявитель IPMA</a:t>
+              <a:t>IPMA Kyrgyz Republic · ipma.kg · Ассоциация-заявитель</a:t>
             </a:r>
           </a:p>
         </p:txBody>

--- a/presentations/IPMA_Kyrgyzstan_CoD_Presentation.pptx
+++ b/presentations/IPMA_Kyrgyzstan_CoD_Presentation.pptx
@@ -3114,7 +3114,7 @@
             <a:avLst/>
           </a:prstGeom>
           <a:solidFill>
-            <a:srgbClr val="5C0A17"/>
+            <a:srgbClr val="0D223B"/>
           </a:solidFill>
           <a:ln>
             <a:noFill/>
@@ -3144,50 +3144,183 @@
       </p:sp>
       <p:sp>
         <p:nvSpPr>
-          <p:cNvPr id="3" name="Rectangle 2"/>
-          <p:cNvSpPr/>
-          <p:nvPr/>
-        </p:nvSpPr>
-        <p:spPr>
-          <a:xfrm>
-            <a:off x="0" y="0"/>
-            <a:ext cx="12191695" cy="73152"/>
-          </a:xfrm>
-          <a:prstGeom prst="rect">
-            <a:avLst/>
-          </a:prstGeom>
-          <a:solidFill>
-            <a:srgbClr val="FFD54F"/>
-          </a:solidFill>
-          <a:ln>
-            <a:noFill/>
-          </a:ln>
-        </p:spPr>
-        <p:style>
-          <a:lnRef idx="1">
-            <a:schemeClr val="accent1"/>
-          </a:lnRef>
-          <a:fillRef idx="3">
-            <a:schemeClr val="accent1"/>
-          </a:fillRef>
-          <a:effectRef idx="2">
-            <a:schemeClr val="accent1"/>
-          </a:effectRef>
-          <a:fontRef idx="minor">
-            <a:schemeClr val="lt1"/>
-          </a:fontRef>
-        </p:style>
-        <p:txBody>
-          <a:bodyPr rtlCol="0" anchor="ctr"/>
-          <a:lstStyle/>
-          <a:p>
-            <a:pPr algn="ctr"/>
+          <p:cNvPr id="3" name="TextBox 2"/>
+          <p:cNvSpPr txBox="1"/>
+          <p:nvPr/>
+        </p:nvSpPr>
+        <p:spPr>
+          <a:xfrm>
+            <a:off x="11155680" y="5303520"/>
+            <a:ext cx="1371600" cy="1097280"/>
+          </a:xfrm>
+          <a:prstGeom prst="rect">
+            <a:avLst/>
+          </a:prstGeom>
+          <a:noFill/>
+        </p:spPr>
+        <p:txBody>
+          <a:bodyPr wrap="square">
+            <a:spAutoFit/>
+          </a:bodyPr>
+          <a:lstStyle/>
+          <a:p>
+            <a:pPr algn="l"/>
+            <a:r>
+              <a:rPr sz="9600" b="1">
+                <a:solidFill>
+                  <a:srgbClr val="E30613"/>
+                </a:solidFill>
+                <a:latin typeface="Calibri"/>
+              </a:rPr>
+              <a:t>»</a:t>
+            </a:r>
+          </a:p>
+        </p:txBody>
+      </p:sp>
+      <p:sp>
+        <p:nvSpPr>
+          <p:cNvPr id="4" name="TextBox 3"/>
+          <p:cNvSpPr txBox="1"/>
+          <p:nvPr/>
+        </p:nvSpPr>
+        <p:spPr>
+          <a:xfrm>
+            <a:off x="640080" y="1188720"/>
+            <a:ext cx="5943600" cy="320040"/>
+          </a:xfrm>
+          <a:prstGeom prst="rect">
+            <a:avLst/>
+          </a:prstGeom>
+          <a:noFill/>
+        </p:spPr>
+        <p:txBody>
+          <a:bodyPr wrap="square">
+            <a:spAutoFit/>
+          </a:bodyPr>
+          <a:lstStyle/>
+          <a:p>
+            <a:pPr algn="l"/>
+            <a:r>
+              <a:rPr sz="1200" b="1">
+                <a:solidFill>
+                  <a:srgbClr val="7FE0A0"/>
+                </a:solidFill>
+                <a:latin typeface="Calibri"/>
+              </a:rPr>
+              <a:t>IPMA  ·  COUNCIL OF DELEGATES</a:t>
+            </a:r>
+          </a:p>
+        </p:txBody>
+      </p:sp>
+      <p:sp>
+        <p:nvSpPr>
+          <p:cNvPr id="5" name="TextBox 4"/>
+          <p:cNvSpPr txBox="1"/>
+          <p:nvPr/>
+        </p:nvSpPr>
+        <p:spPr>
+          <a:xfrm>
+            <a:off x="640080" y="1737360"/>
+            <a:ext cx="6400800" cy="1463040"/>
+          </a:xfrm>
+          <a:prstGeom prst="rect">
+            <a:avLst/>
+          </a:prstGeom>
+          <a:noFill/>
+        </p:spPr>
+        <p:txBody>
+          <a:bodyPr wrap="square">
+            <a:spAutoFit/>
+          </a:bodyPr>
+          <a:lstStyle/>
+          <a:p>
+            <a:pPr algn="l"/>
+            <a:r>
+              <a:rPr sz="4400" b="1">
+                <a:solidFill>
+                  <a:srgbClr val="FFFFFF"/>
+                </a:solidFill>
+                <a:latin typeface="Arial"/>
+              </a:rPr>
+              <a:t>IPMA Kyrgyz
+Republic</a:t>
+            </a:r>
+          </a:p>
+        </p:txBody>
+      </p:sp>
+      <p:sp>
+        <p:nvSpPr>
+          <p:cNvPr id="6" name="TextBox 5"/>
+          <p:cNvSpPr txBox="1"/>
+          <p:nvPr/>
+        </p:nvSpPr>
+        <p:spPr>
+          <a:xfrm>
+            <a:off x="640080" y="3474720"/>
+            <a:ext cx="5943600" cy="914400"/>
+          </a:xfrm>
+          <a:prstGeom prst="rect">
+            <a:avLst/>
+          </a:prstGeom>
+          <a:noFill/>
+        </p:spPr>
+        <p:txBody>
+          <a:bodyPr wrap="square">
+            <a:spAutoFit/>
+          </a:bodyPr>
+          <a:lstStyle/>
+          <a:p>
+            <a:pPr algn="l"/>
+            <a:r>
+              <a:rPr sz="1600" b="0">
+                <a:solidFill>
+                  <a:srgbClr val="BCD0DF"/>
+                </a:solidFill>
+                <a:latin typeface="Calibri"/>
+              </a:rPr>
+              <a:t>Кыргызское объединение управления проектами (KgPMU) — Ассоциация-заявитель IPMA</a:t>
+            </a:r>
+          </a:p>
+        </p:txBody>
+      </p:sp>
+      <p:sp>
+        <p:nvSpPr>
+          <p:cNvPr id="7" name="TextBox 6"/>
+          <p:cNvSpPr txBox="1"/>
+          <p:nvPr/>
+        </p:nvSpPr>
+        <p:spPr>
+          <a:xfrm>
+            <a:off x="640080" y="4663440"/>
+            <a:ext cx="5943600" cy="365760"/>
+          </a:xfrm>
+          <a:prstGeom prst="rect">
+            <a:avLst/>
+          </a:prstGeom>
+          <a:noFill/>
+        </p:spPr>
+        <p:txBody>
+          <a:bodyPr wrap="square">
+            <a:spAutoFit/>
+          </a:bodyPr>
+          <a:lstStyle/>
+          <a:p>
+            <a:pPr algn="l"/>
+            <a:r>
+              <a:rPr sz="1400" b="0">
+                <a:solidFill>
+                  <a:srgbClr val="8FB0C4"/>
+                </a:solidFill>
+                <a:latin typeface="Calibri"/>
+              </a:rPr>
+              <a:t>Представляет: Урмат Мекишев, Президент</a:t>
+            </a:r>
           </a:p>
         </p:txBody>
       </p:sp>
       <p:pic>
         <p:nvPicPr>
-          <p:cNvPr id="4" name="Picture 3" descr="ipma-kr-logo-white.png"/>
+          <p:cNvPr id="8" name="Picture 7" descr="ipma-kr-logo-white.png"/>
           <p:cNvPicPr>
             <a:picLocks noChangeAspect="1"/>
           </p:cNvPicPr>
@@ -3201,8 +3334,8 @@
         </p:blipFill>
         <p:spPr>
           <a:xfrm>
-            <a:off x="3535527" y="914400"/>
-            <a:ext cx="5120640" cy="1496630"/>
+            <a:off x="6949440" y="2011680"/>
+            <a:ext cx="4389120" cy="1282826"/>
           </a:xfrm>
           <a:prstGeom prst="rect">
             <a:avLst/>
@@ -3211,184 +3344,35 @@
       </p:pic>
       <p:sp>
         <p:nvSpPr>
-          <p:cNvPr id="5" name="TextBox 4"/>
-          <p:cNvSpPr txBox="1"/>
-          <p:nvPr/>
-        </p:nvSpPr>
-        <p:spPr>
-          <a:xfrm>
-            <a:off x="731520" y="2788920"/>
-            <a:ext cx="10698480" cy="320040"/>
-          </a:xfrm>
-          <a:prstGeom prst="rect">
-            <a:avLst/>
-          </a:prstGeom>
-          <a:noFill/>
-        </p:spPr>
-        <p:txBody>
-          <a:bodyPr wrap="square">
-            <a:spAutoFit/>
-          </a:bodyPr>
-          <a:lstStyle/>
-          <a:p>
-            <a:pPr algn="ctr"/>
-            <a:r>
-              <a:rPr sz="1300" b="1">
-                <a:solidFill>
-                  <a:srgbClr val="FFD54F"/>
-                </a:solidFill>
-                <a:latin typeface="Calibri"/>
-              </a:rPr>
-              <a:t>IPMA · COUNCIL OF DELEGATES</a:t>
-            </a:r>
-          </a:p>
-        </p:txBody>
-      </p:sp>
-      <p:sp>
-        <p:nvSpPr>
-          <p:cNvPr id="6" name="TextBox 5"/>
-          <p:cNvSpPr txBox="1"/>
-          <p:nvPr/>
-        </p:nvSpPr>
-        <p:spPr>
-          <a:xfrm>
-            <a:off x="731520" y="3200400"/>
-            <a:ext cx="10698480" cy="914400"/>
-          </a:xfrm>
-          <a:prstGeom prst="rect">
-            <a:avLst/>
-          </a:prstGeom>
-          <a:noFill/>
-        </p:spPr>
-        <p:txBody>
-          <a:bodyPr wrap="square">
-            <a:spAutoFit/>
-          </a:bodyPr>
-          <a:lstStyle/>
-          <a:p>
-            <a:pPr algn="ctr"/>
-            <a:r>
-              <a:rPr sz="3000" b="1">
-                <a:solidFill>
-                  <a:srgbClr val="FFFFFF"/>
-                </a:solidFill>
-                <a:latin typeface="Georgia"/>
-              </a:rPr>
-              <a:t>Кыргызское объединение
-управления проектами</a:t>
-            </a:r>
-          </a:p>
-        </p:txBody>
-      </p:sp>
-      <p:sp>
-        <p:nvSpPr>
-          <p:cNvPr id="7" name="TextBox 6"/>
-          <p:cNvSpPr txBox="1"/>
-          <p:nvPr/>
-        </p:nvSpPr>
-        <p:spPr>
-          <a:xfrm>
-            <a:off x="731520" y="4251960"/>
-            <a:ext cx="10698480" cy="365760"/>
-          </a:xfrm>
-          <a:prstGeom prst="rect">
-            <a:avLst/>
-          </a:prstGeom>
-          <a:noFill/>
-        </p:spPr>
-        <p:txBody>
-          <a:bodyPr wrap="square">
-            <a:spAutoFit/>
-          </a:bodyPr>
-          <a:lstStyle/>
-          <a:p>
-            <a:pPr algn="ctr"/>
-            <a:r>
-              <a:rPr sz="1500" b="0">
-                <a:solidFill>
-                  <a:srgbClr val="F3DCC9"/>
-                </a:solidFill>
-                <a:latin typeface="Calibri"/>
-              </a:rPr>
-              <a:t>ОО «KgPMU» · IPMA Kyrgyz Republic · ipma.kg</a:t>
-            </a:r>
-          </a:p>
-        </p:txBody>
-      </p:sp>
-      <p:sp>
-        <p:nvSpPr>
-          <p:cNvPr id="8" name="Rounded Rectangle 7"/>
-          <p:cNvSpPr/>
-          <p:nvPr/>
-        </p:nvSpPr>
-        <p:spPr>
-          <a:xfrm>
-            <a:off x="1645920" y="4800600"/>
-            <a:ext cx="8869680" cy="594360"/>
-          </a:xfrm>
-          <a:prstGeom prst="roundRect">
-            <a:avLst/>
-          </a:prstGeom>
-          <a:solidFill>
-            <a:srgbClr val="A3122A"/>
-          </a:solidFill>
-          <a:ln>
-            <a:noFill/>
-          </a:ln>
-        </p:spPr>
-        <p:style>
-          <a:lnRef idx="1">
-            <a:schemeClr val="accent1"/>
-          </a:lnRef>
-          <a:fillRef idx="3">
-            <a:schemeClr val="accent1"/>
-          </a:fillRef>
-          <a:effectRef idx="2">
-            <a:schemeClr val="accent1"/>
-          </a:effectRef>
-          <a:fontRef idx="minor">
-            <a:schemeClr val="lt1"/>
-          </a:fontRef>
-        </p:style>
-        <p:txBody>
-          <a:bodyPr rtlCol="0" anchor="ctr"/>
-          <a:lstStyle/>
-          <a:p>
-            <a:pPr algn="ctr"/>
-          </a:p>
-        </p:txBody>
-      </p:sp>
-      <p:sp>
-        <p:nvSpPr>
           <p:cNvPr id="9" name="TextBox 8"/>
           <p:cNvSpPr txBox="1"/>
           <p:nvPr/>
         </p:nvSpPr>
         <p:spPr>
           <a:xfrm>
-            <a:off x="1828800" y="4919472"/>
-            <a:ext cx="8503920" cy="365760"/>
-          </a:xfrm>
-          <a:prstGeom prst="rect">
-            <a:avLst/>
-          </a:prstGeom>
-          <a:noFill/>
-        </p:spPr>
-        <p:txBody>
-          <a:bodyPr wrap="square">
-            <a:spAutoFit/>
-          </a:bodyPr>
-          <a:lstStyle/>
-          <a:p>
-            <a:pPr algn="ctr"/>
-            <a:r>
-              <a:rPr sz="1400" b="1">
-                <a:solidFill>
-                  <a:srgbClr val="FFFFFF"/>
-                </a:solidFill>
-                <a:latin typeface="Calibri"/>
-              </a:rPr>
-              <a:t>Статус IPMA: Ассоциация-заявитель (Applying Member Association)</a:t>
+            <a:off x="502920" y="6446520"/>
+            <a:ext cx="8229600" cy="274320"/>
+          </a:xfrm>
+          <a:prstGeom prst="rect">
+            <a:avLst/>
+          </a:prstGeom>
+          <a:noFill/>
+        </p:spPr>
+        <p:txBody>
+          <a:bodyPr wrap="square">
+            <a:spAutoFit/>
+          </a:bodyPr>
+          <a:lstStyle/>
+          <a:p>
+            <a:pPr algn="l"/>
+            <a:r>
+              <a:rPr sz="1100" b="0">
+                <a:solidFill>
+                  <a:srgbClr val="8FA6B8"/>
+                </a:solidFill>
+                <a:latin typeface="Calibri"/>
+              </a:rPr>
+              <a:t>IPMA Kyrgyz Republic  ·  ipma.kg</a:t>
             </a:r>
           </a:p>
         </p:txBody>
@@ -3401,29 +3385,29 @@
         </p:nvSpPr>
         <p:spPr>
           <a:xfrm>
-            <a:off x="731520" y="5623560"/>
-            <a:ext cx="10698480" cy="320040"/>
-          </a:xfrm>
-          <a:prstGeom prst="rect">
-            <a:avLst/>
-          </a:prstGeom>
-          <a:noFill/>
-        </p:spPr>
-        <p:txBody>
-          <a:bodyPr wrap="square">
-            <a:spAutoFit/>
-          </a:bodyPr>
-          <a:lstStyle/>
-          <a:p>
-            <a:pPr algn="ctr"/>
-            <a:r>
-              <a:rPr sz="1400" b="0">
-                <a:solidFill>
-                  <a:srgbClr val="F3DCC9"/>
-                </a:solidFill>
-                <a:latin typeface="Calibri"/>
-              </a:rPr>
-              <a:t>Представляет: Урмат Мекишев, Президент KgPMU</a:t>
+            <a:off x="10515600" y="6446520"/>
+            <a:ext cx="1280160" cy="274320"/>
+          </a:xfrm>
+          <a:prstGeom prst="rect">
+            <a:avLst/>
+          </a:prstGeom>
+          <a:noFill/>
+        </p:spPr>
+        <p:txBody>
+          <a:bodyPr wrap="square">
+            <a:spAutoFit/>
+          </a:bodyPr>
+          <a:lstStyle/>
+          <a:p>
+            <a:pPr algn="r"/>
+            <a:r>
+              <a:rPr sz="1100" b="0">
+                <a:solidFill>
+                  <a:srgbClr val="8FA6B8"/>
+                </a:solidFill>
+                <a:latin typeface="Calibri"/>
+              </a:rPr>
+              <a:t>01 / 12</a:t>
             </a:r>
           </a:p>
         </p:txBody>
@@ -3461,7 +3445,7 @@
             <a:avLst/>
           </a:prstGeom>
           <a:solidFill>
-            <a:srgbClr val="5C0A17"/>
+            <a:srgbClr val="EEF2F1"/>
           </a:solidFill>
           <a:ln>
             <a:noFill/>
@@ -3489,52 +3473,9 @@
           </a:p>
         </p:txBody>
       </p:sp>
-      <p:sp>
-        <p:nvSpPr>
-          <p:cNvPr id="3" name="Rectangle 2"/>
-          <p:cNvSpPr/>
-          <p:nvPr/>
-        </p:nvSpPr>
-        <p:spPr>
-          <a:xfrm>
-            <a:off x="0" y="0"/>
-            <a:ext cx="12191695" cy="73152"/>
-          </a:xfrm>
-          <a:prstGeom prst="rect">
-            <a:avLst/>
-          </a:prstGeom>
-          <a:solidFill>
-            <a:srgbClr val="FFD54F"/>
-          </a:solidFill>
-          <a:ln>
-            <a:noFill/>
-          </a:ln>
-        </p:spPr>
-        <p:style>
-          <a:lnRef idx="1">
-            <a:schemeClr val="accent1"/>
-          </a:lnRef>
-          <a:fillRef idx="3">
-            <a:schemeClr val="accent1"/>
-          </a:fillRef>
-          <a:effectRef idx="2">
-            <a:schemeClr val="accent1"/>
-          </a:effectRef>
-          <a:fontRef idx="minor">
-            <a:schemeClr val="lt1"/>
-          </a:fontRef>
-        </p:style>
-        <p:txBody>
-          <a:bodyPr rtlCol="0" anchor="ctr"/>
-          <a:lstStyle/>
-          <a:p>
-            <a:pPr algn="ctr"/>
-          </a:p>
-        </p:txBody>
-      </p:sp>
       <p:pic>
         <p:nvPicPr>
-          <p:cNvPr id="4" name="Picture 3" descr="ipma-kr-emblem.png"/>
+          <p:cNvPr id="3" name="Picture 2" descr="ipma-kr-emblem.png"/>
           <p:cNvPicPr>
             <a:picLocks noChangeAspect="1"/>
           </p:cNvPicPr>
@@ -3548,8 +3489,8 @@
         </p:blipFill>
         <p:spPr>
           <a:xfrm>
-            <a:off x="11292840" y="201168"/>
-            <a:ext cx="661788" cy="658368"/>
+            <a:off x="11292840" y="228600"/>
+            <a:ext cx="597448" cy="594360"/>
           </a:xfrm>
           <a:prstGeom prst="rect">
             <a:avLst/>
@@ -3558,14 +3499,49 @@
       </p:pic>
       <p:sp>
         <p:nvSpPr>
+          <p:cNvPr id="4" name="TextBox 3"/>
+          <p:cNvSpPr txBox="1"/>
+          <p:nvPr/>
+        </p:nvSpPr>
+        <p:spPr>
+          <a:xfrm>
+            <a:off x="548640" y="320040"/>
+            <a:ext cx="10972800" cy="274320"/>
+          </a:xfrm>
+          <a:prstGeom prst="rect">
+            <a:avLst/>
+          </a:prstGeom>
+          <a:noFill/>
+        </p:spPr>
+        <p:txBody>
+          <a:bodyPr wrap="square">
+            <a:spAutoFit/>
+          </a:bodyPr>
+          <a:lstStyle/>
+          <a:p>
+            <a:pPr algn="l"/>
+            <a:r>
+              <a:rPr sz="1100" b="1">
+                <a:solidFill>
+                  <a:srgbClr val="1F7A34"/>
+                </a:solidFill>
+                <a:latin typeface="Calibri"/>
+              </a:rPr>
+              <a:t>10  »  ЭКОСИСТЕМА</a:t>
+            </a:r>
+          </a:p>
+        </p:txBody>
+      </p:sp>
+      <p:sp>
+        <p:nvSpPr>
           <p:cNvPr id="5" name="TextBox 4"/>
           <p:cNvSpPr txBox="1"/>
           <p:nvPr/>
         </p:nvSpPr>
         <p:spPr>
           <a:xfrm>
-            <a:off x="548640" y="320040"/>
-            <a:ext cx="10058400" cy="274320"/>
+            <a:off x="548640" y="640080"/>
+            <a:ext cx="10515600" cy="548640"/>
           </a:xfrm>
           <a:prstGeom prst="rect">
             <a:avLst/>
@@ -3580,46 +3556,11 @@
           <a:p>
             <a:pPr algn="l"/>
             <a:r>
-              <a:rPr sz="1100" b="1">
-                <a:solidFill>
-                  <a:srgbClr val="FFD54F"/>
-                </a:solidFill>
-                <a:latin typeface="Calibri"/>
-              </a:rPr>
-              <a:t>08 · ЭКОСИСТЕМА</a:t>
-            </a:r>
-          </a:p>
-        </p:txBody>
-      </p:sp>
-      <p:sp>
-        <p:nvSpPr>
-          <p:cNvPr id="6" name="TextBox 5"/>
-          <p:cNvSpPr txBox="1"/>
-          <p:nvPr/>
-        </p:nvSpPr>
-        <p:spPr>
-          <a:xfrm>
-            <a:off x="548640" y="640080"/>
-            <a:ext cx="10241280" cy="548640"/>
-          </a:xfrm>
-          <a:prstGeom prst="rect">
-            <a:avLst/>
-          </a:prstGeom>
-          <a:noFill/>
-        </p:spPr>
-        <p:txBody>
-          <a:bodyPr wrap="square">
-            <a:spAutoFit/>
-          </a:bodyPr>
-          <a:lstStyle/>
-          <a:p>
-            <a:pPr algn="l"/>
-            <a:r>
               <a:rPr sz="2800" b="1">
                 <a:solidFill>
-                  <a:srgbClr val="FFFFFF"/>
-                </a:solidFill>
-                <a:latin typeface="Georgia"/>
+                  <a:srgbClr val="0D223B"/>
+                </a:solidFill>
+                <a:latin typeface="Arial"/>
               </a:rPr>
               <a:t>Экосистема и продвижение</a:t>
             </a:r>
@@ -3628,20 +3569,20 @@
       </p:sp>
       <p:sp>
         <p:nvSpPr>
-          <p:cNvPr id="7" name="Rounded Rectangle 6"/>
+          <p:cNvPr id="6" name="Rounded Rectangle 5"/>
           <p:cNvSpPr/>
           <p:nvPr/>
         </p:nvSpPr>
         <p:spPr>
           <a:xfrm>
-            <a:off x="548640" y="1417320"/>
-            <a:ext cx="5486400" cy="1371600"/>
+            <a:off x="548640" y="1463040"/>
+            <a:ext cx="5486400" cy="1828800"/>
           </a:xfrm>
           <a:prstGeom prst="roundRect">
             <a:avLst/>
           </a:prstGeom>
           <a:solidFill>
-            <a:srgbClr val="7A0C1E"/>
+            <a:srgbClr val="FFFFFF"/>
           </a:solidFill>
           <a:ln>
             <a:noFill/>
@@ -3671,14 +3612,49 @@
       </p:sp>
       <p:sp>
         <p:nvSpPr>
+          <p:cNvPr id="7" name="TextBox 6"/>
+          <p:cNvSpPr txBox="1"/>
+          <p:nvPr/>
+        </p:nvSpPr>
+        <p:spPr>
+          <a:xfrm>
+            <a:off x="868680" y="1828800"/>
+            <a:ext cx="4846320" cy="365760"/>
+          </a:xfrm>
+          <a:prstGeom prst="rect">
+            <a:avLst/>
+          </a:prstGeom>
+          <a:noFill/>
+        </p:spPr>
+        <p:txBody>
+          <a:bodyPr wrap="square">
+            <a:spAutoFit/>
+          </a:bodyPr>
+          <a:lstStyle/>
+          <a:p>
+            <a:pPr algn="l"/>
+            <a:r>
+              <a:rPr sz="1800" b="1">
+                <a:solidFill>
+                  <a:srgbClr val="0D223B"/>
+                </a:solidFill>
+                <a:latin typeface="Calibri"/>
+              </a:rPr>
+              <a:t>Госсектор</a:t>
+            </a:r>
+          </a:p>
+        </p:txBody>
+      </p:sp>
+      <p:sp>
+        <p:nvSpPr>
           <p:cNvPr id="8" name="TextBox 7"/>
           <p:cNvSpPr txBox="1"/>
           <p:nvPr/>
         </p:nvSpPr>
         <p:spPr>
           <a:xfrm>
-            <a:off x="822960" y="1691640"/>
-            <a:ext cx="4937760" cy="320040"/>
+            <a:off x="868680" y="2377440"/>
+            <a:ext cx="4846320" cy="457200"/>
           </a:xfrm>
           <a:prstGeom prst="rect">
             <a:avLst/>
@@ -3693,44 +3669,9 @@
           <a:p>
             <a:pPr algn="l"/>
             <a:r>
-              <a:rPr sz="1600" b="1">
-                <a:solidFill>
-                  <a:srgbClr val="FFD54F"/>
-                </a:solidFill>
-                <a:latin typeface="Calibri"/>
-              </a:rPr>
-              <a:t>Госсектор</a:t>
-            </a:r>
-          </a:p>
-        </p:txBody>
-      </p:sp>
-      <p:sp>
-        <p:nvSpPr>
-          <p:cNvPr id="9" name="TextBox 8"/>
-          <p:cNvSpPr txBox="1"/>
-          <p:nvPr/>
-        </p:nvSpPr>
-        <p:spPr>
-          <a:xfrm>
-            <a:off x="822960" y="2148840"/>
-            <a:ext cx="4937760" cy="365760"/>
-          </a:xfrm>
-          <a:prstGeom prst="rect">
-            <a:avLst/>
-          </a:prstGeom>
-          <a:noFill/>
-        </p:spPr>
-        <p:txBody>
-          <a:bodyPr wrap="square">
-            <a:spAutoFit/>
-          </a:bodyPr>
-          <a:lstStyle/>
-          <a:p>
-            <a:pPr algn="l"/>
-            <a:r>
               <a:rPr sz="1400" b="0">
                 <a:solidFill>
-                  <a:srgbClr val="FFFFFF"/>
+                  <a:srgbClr val="28394A"/>
                 </a:solidFill>
                 <a:latin typeface="Calibri"/>
               </a:rPr>
@@ -3741,20 +3682,20 @@
       </p:sp>
       <p:sp>
         <p:nvSpPr>
-          <p:cNvPr id="10" name="Rounded Rectangle 9"/>
+          <p:cNvPr id="9" name="Rounded Rectangle 8"/>
           <p:cNvSpPr/>
           <p:nvPr/>
         </p:nvSpPr>
         <p:spPr>
           <a:xfrm>
-            <a:off x="6309359" y="1417320"/>
-            <a:ext cx="5486400" cy="1371600"/>
+            <a:off x="6309359" y="1463040"/>
+            <a:ext cx="5486400" cy="1828800"/>
           </a:xfrm>
           <a:prstGeom prst="roundRect">
             <a:avLst/>
           </a:prstGeom>
           <a:solidFill>
-            <a:srgbClr val="7A0C1E"/>
+            <a:srgbClr val="FFFFFF"/>
           </a:solidFill>
           <a:ln>
             <a:noFill/>
@@ -3784,14 +3725,49 @@
       </p:sp>
       <p:sp>
         <p:nvSpPr>
+          <p:cNvPr id="10" name="TextBox 9"/>
+          <p:cNvSpPr txBox="1"/>
+          <p:nvPr/>
+        </p:nvSpPr>
+        <p:spPr>
+          <a:xfrm>
+            <a:off x="6629399" y="1828800"/>
+            <a:ext cx="4846320" cy="365760"/>
+          </a:xfrm>
+          <a:prstGeom prst="rect">
+            <a:avLst/>
+          </a:prstGeom>
+          <a:noFill/>
+        </p:spPr>
+        <p:txBody>
+          <a:bodyPr wrap="square">
+            <a:spAutoFit/>
+          </a:bodyPr>
+          <a:lstStyle/>
+          <a:p>
+            <a:pPr algn="l"/>
+            <a:r>
+              <a:rPr sz="1800" b="1">
+                <a:solidFill>
+                  <a:srgbClr val="0D223B"/>
+                </a:solidFill>
+                <a:latin typeface="Calibri"/>
+              </a:rPr>
+              <a:t>Бизнес</a:t>
+            </a:r>
+          </a:p>
+        </p:txBody>
+      </p:sp>
+      <p:sp>
+        <p:nvSpPr>
           <p:cNvPr id="11" name="TextBox 10"/>
           <p:cNvSpPr txBox="1"/>
           <p:nvPr/>
         </p:nvSpPr>
         <p:spPr>
           <a:xfrm>
-            <a:off x="6583679" y="1691640"/>
-            <a:ext cx="4937760" cy="320040"/>
+            <a:off x="6629399" y="2377440"/>
+            <a:ext cx="4846320" cy="457200"/>
           </a:xfrm>
           <a:prstGeom prst="rect">
             <a:avLst/>
@@ -3806,44 +3782,9 @@
           <a:p>
             <a:pPr algn="l"/>
             <a:r>
-              <a:rPr sz="1600" b="1">
-                <a:solidFill>
-                  <a:srgbClr val="FFD54F"/>
-                </a:solidFill>
-                <a:latin typeface="Calibri"/>
-              </a:rPr>
-              <a:t>Бизнес</a:t>
-            </a:r>
-          </a:p>
-        </p:txBody>
-      </p:sp>
-      <p:sp>
-        <p:nvSpPr>
-          <p:cNvPr id="12" name="TextBox 11"/>
-          <p:cNvSpPr txBox="1"/>
-          <p:nvPr/>
-        </p:nvSpPr>
-        <p:spPr>
-          <a:xfrm>
-            <a:off x="6583679" y="2148840"/>
-            <a:ext cx="4937760" cy="365760"/>
-          </a:xfrm>
-          <a:prstGeom prst="rect">
-            <a:avLst/>
-          </a:prstGeom>
-          <a:noFill/>
-        </p:spPr>
-        <p:txBody>
-          <a:bodyPr wrap="square">
-            <a:spAutoFit/>
-          </a:bodyPr>
-          <a:lstStyle/>
-          <a:p>
-            <a:pPr algn="l"/>
-            <a:r>
               <a:rPr sz="1400" b="0">
                 <a:solidFill>
-                  <a:srgbClr val="FFFFFF"/>
+                  <a:srgbClr val="28394A"/>
                 </a:solidFill>
                 <a:latin typeface="Calibri"/>
               </a:rPr>
@@ -3854,20 +3795,20 @@
       </p:sp>
       <p:sp>
         <p:nvSpPr>
-          <p:cNvPr id="13" name="Rounded Rectangle 12"/>
+          <p:cNvPr id="12" name="Rounded Rectangle 11"/>
           <p:cNvSpPr/>
           <p:nvPr/>
         </p:nvSpPr>
         <p:spPr>
           <a:xfrm>
-            <a:off x="548640" y="2971800"/>
-            <a:ext cx="5486400" cy="1371600"/>
+            <a:off x="548640" y="3566160"/>
+            <a:ext cx="5486400" cy="1828800"/>
           </a:xfrm>
           <a:prstGeom prst="roundRect">
             <a:avLst/>
           </a:prstGeom>
           <a:solidFill>
-            <a:srgbClr val="7A0C1E"/>
+            <a:srgbClr val="FFFFFF"/>
           </a:solidFill>
           <a:ln>
             <a:noFill/>
@@ -3897,14 +3838,49 @@
       </p:sp>
       <p:sp>
         <p:nvSpPr>
+          <p:cNvPr id="13" name="TextBox 12"/>
+          <p:cNvSpPr txBox="1"/>
+          <p:nvPr/>
+        </p:nvSpPr>
+        <p:spPr>
+          <a:xfrm>
+            <a:off x="868680" y="3931920"/>
+            <a:ext cx="4846320" cy="365760"/>
+          </a:xfrm>
+          <a:prstGeom prst="rect">
+            <a:avLst/>
+          </a:prstGeom>
+          <a:noFill/>
+        </p:spPr>
+        <p:txBody>
+          <a:bodyPr wrap="square">
+            <a:spAutoFit/>
+          </a:bodyPr>
+          <a:lstStyle/>
+          <a:p>
+            <a:pPr algn="l"/>
+            <a:r>
+              <a:rPr sz="1800" b="1">
+                <a:solidFill>
+                  <a:srgbClr val="0D223B"/>
+                </a:solidFill>
+                <a:latin typeface="Calibri"/>
+              </a:rPr>
+              <a:t>Образование</a:t>
+            </a:r>
+          </a:p>
+        </p:txBody>
+      </p:sp>
+      <p:sp>
+        <p:nvSpPr>
           <p:cNvPr id="14" name="TextBox 13"/>
           <p:cNvSpPr txBox="1"/>
           <p:nvPr/>
         </p:nvSpPr>
         <p:spPr>
           <a:xfrm>
-            <a:off x="822960" y="3246120"/>
-            <a:ext cx="4937760" cy="320040"/>
+            <a:off x="868680" y="4480560"/>
+            <a:ext cx="4846320" cy="457200"/>
           </a:xfrm>
           <a:prstGeom prst="rect">
             <a:avLst/>
@@ -3919,44 +3895,9 @@
           <a:p>
             <a:pPr algn="l"/>
             <a:r>
-              <a:rPr sz="1600" b="1">
-                <a:solidFill>
-                  <a:srgbClr val="FFD54F"/>
-                </a:solidFill>
-                <a:latin typeface="Calibri"/>
-              </a:rPr>
-              <a:t>Образование</a:t>
-            </a:r>
-          </a:p>
-        </p:txBody>
-      </p:sp>
-      <p:sp>
-        <p:nvSpPr>
-          <p:cNvPr id="15" name="TextBox 14"/>
-          <p:cNvSpPr txBox="1"/>
-          <p:nvPr/>
-        </p:nvSpPr>
-        <p:spPr>
-          <a:xfrm>
-            <a:off x="822960" y="3703320"/>
-            <a:ext cx="4937760" cy="365760"/>
-          </a:xfrm>
-          <a:prstGeom prst="rect">
-            <a:avLst/>
-          </a:prstGeom>
-          <a:noFill/>
-        </p:spPr>
-        <p:txBody>
-          <a:bodyPr wrap="square">
-            <a:spAutoFit/>
-          </a:bodyPr>
-          <a:lstStyle/>
-          <a:p>
-            <a:pPr algn="l"/>
-            <a:r>
               <a:rPr sz="1400" b="0">
                 <a:solidFill>
-                  <a:srgbClr val="FFFFFF"/>
+                  <a:srgbClr val="28394A"/>
                 </a:solidFill>
                 <a:latin typeface="Calibri"/>
               </a:rPr>
@@ -3967,20 +3908,20 @@
       </p:sp>
       <p:sp>
         <p:nvSpPr>
-          <p:cNvPr id="16" name="Rounded Rectangle 15"/>
+          <p:cNvPr id="15" name="Rounded Rectangle 14"/>
           <p:cNvSpPr/>
           <p:nvPr/>
         </p:nvSpPr>
         <p:spPr>
           <a:xfrm>
-            <a:off x="6309359" y="2971800"/>
-            <a:ext cx="5486400" cy="1371600"/>
+            <a:off x="6309359" y="3566160"/>
+            <a:ext cx="5486400" cy="1828800"/>
           </a:xfrm>
           <a:prstGeom prst="roundRect">
             <a:avLst/>
           </a:prstGeom>
           <a:solidFill>
-            <a:srgbClr val="7A0C1E"/>
+            <a:srgbClr val="FFFFFF"/>
           </a:solidFill>
           <a:ln>
             <a:noFill/>
@@ -4010,14 +3951,49 @@
       </p:sp>
       <p:sp>
         <p:nvSpPr>
+          <p:cNvPr id="16" name="TextBox 15"/>
+          <p:cNvSpPr txBox="1"/>
+          <p:nvPr/>
+        </p:nvSpPr>
+        <p:spPr>
+          <a:xfrm>
+            <a:off x="6629399" y="3931920"/>
+            <a:ext cx="4846320" cy="365760"/>
+          </a:xfrm>
+          <a:prstGeom prst="rect">
+            <a:avLst/>
+          </a:prstGeom>
+          <a:noFill/>
+        </p:spPr>
+        <p:txBody>
+          <a:bodyPr wrap="square">
+            <a:spAutoFit/>
+          </a:bodyPr>
+          <a:lstStyle/>
+          <a:p>
+            <a:pPr algn="l"/>
+            <a:r>
+              <a:rPr sz="1800" b="1">
+                <a:solidFill>
+                  <a:srgbClr val="0D223B"/>
+                </a:solidFill>
+                <a:latin typeface="Calibri"/>
+              </a:rPr>
+              <a:t>Обучение</a:t>
+            </a:r>
+          </a:p>
+        </p:txBody>
+      </p:sp>
+      <p:sp>
+        <p:nvSpPr>
           <p:cNvPr id="17" name="TextBox 16"/>
           <p:cNvSpPr txBox="1"/>
           <p:nvPr/>
         </p:nvSpPr>
         <p:spPr>
           <a:xfrm>
-            <a:off x="6583679" y="3246120"/>
-            <a:ext cx="4937760" cy="320040"/>
+            <a:off x="6629399" y="4480560"/>
+            <a:ext cx="4846320" cy="457200"/>
           </a:xfrm>
           <a:prstGeom prst="rect">
             <a:avLst/>
@@ -4032,13 +4008,13 @@
           <a:p>
             <a:pPr algn="l"/>
             <a:r>
-              <a:rPr sz="1600" b="1">
-                <a:solidFill>
-                  <a:srgbClr val="FFD54F"/>
-                </a:solidFill>
-                <a:latin typeface="Calibri"/>
-              </a:rPr>
-              <a:t>Обучение</a:t>
+              <a:rPr sz="1400" b="0">
+                <a:solidFill>
+                  <a:srgbClr val="28394A"/>
+                </a:solidFill>
+                <a:latin typeface="Calibri"/>
+              </a:rPr>
+              <a:t>Подготовка к сертификации ICB4</a:t>
             </a:r>
           </a:p>
         </p:txBody>
@@ -4051,8 +4027,8 @@
         </p:nvSpPr>
         <p:spPr>
           <a:xfrm>
-            <a:off x="6583679" y="3703320"/>
-            <a:ext cx="4937760" cy="365760"/>
+            <a:off x="502920" y="6446520"/>
+            <a:ext cx="8229600" cy="274320"/>
           </a:xfrm>
           <a:prstGeom prst="rect">
             <a:avLst/>
@@ -4067,13 +4043,13 @@
           <a:p>
             <a:pPr algn="l"/>
             <a:r>
-              <a:rPr sz="1400" b="0">
-                <a:solidFill>
-                  <a:srgbClr val="FFFFFF"/>
-                </a:solidFill>
-                <a:latin typeface="Calibri"/>
-              </a:rPr>
-              <a:t>Подготовка к сертификации ICB4</a:t>
+              <a:rPr sz="1100" b="0">
+                <a:solidFill>
+                  <a:srgbClr val="5C6B72"/>
+                </a:solidFill>
+                <a:latin typeface="Calibri"/>
+              </a:rPr>
+              <a:t>IPMA Kyrgyz Republic  ·  ipma.kg</a:t>
             </a:r>
           </a:p>
         </p:txBody>
@@ -4086,64 +4062,29 @@
         </p:nvSpPr>
         <p:spPr>
           <a:xfrm>
-            <a:off x="457200" y="6446520"/>
-            <a:ext cx="8229600" cy="274320"/>
-          </a:xfrm>
-          <a:prstGeom prst="rect">
-            <a:avLst/>
-          </a:prstGeom>
-          <a:noFill/>
-        </p:spPr>
-        <p:txBody>
-          <a:bodyPr wrap="square">
-            <a:spAutoFit/>
-          </a:bodyPr>
-          <a:lstStyle/>
-          <a:p>
-            <a:pPr algn="l"/>
+            <a:off x="10515600" y="6446520"/>
+            <a:ext cx="1280160" cy="274320"/>
+          </a:xfrm>
+          <a:prstGeom prst="rect">
+            <a:avLst/>
+          </a:prstGeom>
+          <a:noFill/>
+        </p:spPr>
+        <p:txBody>
+          <a:bodyPr wrap="square">
+            <a:spAutoFit/>
+          </a:bodyPr>
+          <a:lstStyle/>
+          <a:p>
+            <a:pPr algn="r"/>
             <a:r>
               <a:rPr sz="1100" b="0">
                 <a:solidFill>
-                  <a:srgbClr val="F3DCC9"/>
-                </a:solidFill>
-                <a:latin typeface="Calibri"/>
-              </a:rPr>
-              <a:t>IPMA Kyrgyz Republic · ipma.kg · Ассоциация-заявитель</a:t>
-            </a:r>
-          </a:p>
-        </p:txBody>
-      </p:sp>
-      <p:sp>
-        <p:nvSpPr>
-          <p:cNvPr id="20" name="TextBox 19"/>
-          <p:cNvSpPr txBox="1"/>
-          <p:nvPr/>
-        </p:nvSpPr>
-        <p:spPr>
-          <a:xfrm>
-            <a:off x="10424160" y="6446520"/>
-            <a:ext cx="1371600" cy="274320"/>
-          </a:xfrm>
-          <a:prstGeom prst="rect">
-            <a:avLst/>
-          </a:prstGeom>
-          <a:noFill/>
-        </p:spPr>
-        <p:txBody>
-          <a:bodyPr wrap="square">
-            <a:spAutoFit/>
-          </a:bodyPr>
-          <a:lstStyle/>
-          <a:p>
-            <a:pPr algn="r"/>
-            <a:r>
-              <a:rPr sz="1100" b="0">
-                <a:solidFill>
-                  <a:srgbClr val="F3DCC9"/>
-                </a:solidFill>
-                <a:latin typeface="Calibri"/>
-              </a:rPr>
-              <a:t>10/12</a:t>
+                  <a:srgbClr val="5C6B72"/>
+                </a:solidFill>
+                <a:latin typeface="Calibri"/>
+              </a:rPr>
+              <a:t>10 / 12</a:t>
             </a:r>
           </a:p>
         </p:txBody>
@@ -4181,7 +4122,7 @@
             <a:avLst/>
           </a:prstGeom>
           <a:solidFill>
-            <a:srgbClr val="5C0A17"/>
+            <a:srgbClr val="EEF2F1"/>
           </a:solidFill>
           <a:ln>
             <a:noFill/>
@@ -4209,52 +4150,9 @@
           </a:p>
         </p:txBody>
       </p:sp>
-      <p:sp>
-        <p:nvSpPr>
-          <p:cNvPr id="3" name="Rectangle 2"/>
-          <p:cNvSpPr/>
-          <p:nvPr/>
-        </p:nvSpPr>
-        <p:spPr>
-          <a:xfrm>
-            <a:off x="0" y="0"/>
-            <a:ext cx="12191695" cy="73152"/>
-          </a:xfrm>
-          <a:prstGeom prst="rect">
-            <a:avLst/>
-          </a:prstGeom>
-          <a:solidFill>
-            <a:srgbClr val="FFD54F"/>
-          </a:solidFill>
-          <a:ln>
-            <a:noFill/>
-          </a:ln>
-        </p:spPr>
-        <p:style>
-          <a:lnRef idx="1">
-            <a:schemeClr val="accent1"/>
-          </a:lnRef>
-          <a:fillRef idx="3">
-            <a:schemeClr val="accent1"/>
-          </a:fillRef>
-          <a:effectRef idx="2">
-            <a:schemeClr val="accent1"/>
-          </a:effectRef>
-          <a:fontRef idx="minor">
-            <a:schemeClr val="lt1"/>
-          </a:fontRef>
-        </p:style>
-        <p:txBody>
-          <a:bodyPr rtlCol="0" anchor="ctr"/>
-          <a:lstStyle/>
-          <a:p>
-            <a:pPr algn="ctr"/>
-          </a:p>
-        </p:txBody>
-      </p:sp>
       <p:pic>
         <p:nvPicPr>
-          <p:cNvPr id="4" name="Picture 3" descr="ipma-kr-emblem.png"/>
+          <p:cNvPr id="3" name="Picture 2" descr="ipma-kr-emblem.png"/>
           <p:cNvPicPr>
             <a:picLocks noChangeAspect="1"/>
           </p:cNvPicPr>
@@ -4268,8 +4166,8 @@
         </p:blipFill>
         <p:spPr>
           <a:xfrm>
-            <a:off x="11292840" y="201168"/>
-            <a:ext cx="661788" cy="658368"/>
+            <a:off x="11292840" y="228600"/>
+            <a:ext cx="597448" cy="594360"/>
           </a:xfrm>
           <a:prstGeom prst="rect">
             <a:avLst/>
@@ -4278,14 +4176,49 @@
       </p:pic>
       <p:sp>
         <p:nvSpPr>
+          <p:cNvPr id="4" name="TextBox 3"/>
+          <p:cNvSpPr txBox="1"/>
+          <p:nvPr/>
+        </p:nvSpPr>
+        <p:spPr>
+          <a:xfrm>
+            <a:off x="548640" y="320040"/>
+            <a:ext cx="10972800" cy="274320"/>
+          </a:xfrm>
+          <a:prstGeom prst="rect">
+            <a:avLst/>
+          </a:prstGeom>
+          <a:noFill/>
+        </p:spPr>
+        <p:txBody>
+          <a:bodyPr wrap="square">
+            <a:spAutoFit/>
+          </a:bodyPr>
+          <a:lstStyle/>
+          <a:p>
+            <a:pPr algn="l"/>
+            <a:r>
+              <a:rPr sz="1100" b="1">
+                <a:solidFill>
+                  <a:srgbClr val="1F7A34"/>
+                </a:solidFill>
+                <a:latin typeface="Calibri"/>
+              </a:rPr>
+              <a:t>11  »  МОЛОДЁЖЬ</a:t>
+            </a:r>
+          </a:p>
+        </p:txBody>
+      </p:sp>
+      <p:sp>
+        <p:nvSpPr>
           <p:cNvPr id="5" name="TextBox 4"/>
           <p:cNvSpPr txBox="1"/>
           <p:nvPr/>
         </p:nvSpPr>
         <p:spPr>
           <a:xfrm>
-            <a:off x="548640" y="320040"/>
-            <a:ext cx="10058400" cy="274320"/>
+            <a:off x="548640" y="640080"/>
+            <a:ext cx="10515600" cy="548640"/>
           </a:xfrm>
           <a:prstGeom prst="rect">
             <a:avLst/>
@@ -4300,13 +4233,13 @@
           <a:p>
             <a:pPr algn="l"/>
             <a:r>
-              <a:rPr sz="1100" b="1">
-                <a:solidFill>
-                  <a:srgbClr val="FFD54F"/>
-                </a:solidFill>
-                <a:latin typeface="Calibri"/>
-              </a:rPr>
-              <a:t>09 · МОЛОДЁЖЬ</a:t>
+              <a:rPr sz="2800" b="1">
+                <a:solidFill>
+                  <a:srgbClr val="0D223B"/>
+                </a:solidFill>
+                <a:latin typeface="Arial"/>
+              </a:rPr>
+              <a:t>Развитие Young Crew</a:t>
             </a:r>
           </a:p>
         </p:txBody>
@@ -4319,43 +4252,8 @@
         </p:nvSpPr>
         <p:spPr>
           <a:xfrm>
-            <a:off x="548640" y="640080"/>
-            <a:ext cx="10241280" cy="548640"/>
-          </a:xfrm>
-          <a:prstGeom prst="rect">
-            <a:avLst/>
-          </a:prstGeom>
-          <a:noFill/>
-        </p:spPr>
-        <p:txBody>
-          <a:bodyPr wrap="square">
-            <a:spAutoFit/>
-          </a:bodyPr>
-          <a:lstStyle/>
-          <a:p>
-            <a:pPr algn="l"/>
-            <a:r>
-              <a:rPr sz="2800" b="1">
-                <a:solidFill>
-                  <a:srgbClr val="FFFFFF"/>
-                </a:solidFill>
-                <a:latin typeface="Georgia"/>
-              </a:rPr>
-              <a:t>Развитие Young Crew</a:t>
-            </a:r>
-          </a:p>
-        </p:txBody>
-      </p:sp>
-      <p:sp>
-        <p:nvSpPr>
-          <p:cNvPr id="7" name="TextBox 6"/>
-          <p:cNvSpPr txBox="1"/>
-          <p:nvPr/>
-        </p:nvSpPr>
-        <p:spPr>
-          <a:xfrm>
-            <a:off x="548640" y="1463040"/>
-            <a:ext cx="10972800" cy="3657600"/>
+            <a:off x="548640" y="1417320"/>
+            <a:ext cx="10972800" cy="3474720"/>
           </a:xfrm>
           <a:prstGeom prst="rect">
             <a:avLst/>
@@ -4376,11 +4274,11 @@
             <a:r>
               <a:rPr sz="1600" b="0">
                 <a:solidFill>
-                  <a:srgbClr val="FFFFFF"/>
-                </a:solidFill>
-                <a:latin typeface="Calibri"/>
-              </a:rPr>
-              <a:t>• Знакомить молодёжь со стандартами и ценностями IPMA</a:t>
+                  <a:srgbClr val="28394A"/>
+                </a:solidFill>
+                <a:latin typeface="Calibri"/>
+              </a:rPr>
+              <a:t>» Знакомить молодёжь со стандартами и ценностями IPMA</a:t>
             </a:r>
           </a:p>
           <a:p>
@@ -4392,11 +4290,11 @@
             <a:r>
               <a:rPr sz="1600" b="0">
                 <a:solidFill>
-                  <a:srgbClr val="FFFFFF"/>
-                </a:solidFill>
-                <a:latin typeface="Calibri"/>
-              </a:rPr>
-              <a:t>• Привлекать студентов через студенческое членство KgPMU</a:t>
+                  <a:srgbClr val="28394A"/>
+                </a:solidFill>
+                <a:latin typeface="Calibri"/>
+              </a:rPr>
+              <a:t>» Привлекать студентов через студенческое членство KgPMU</a:t>
             </a:r>
           </a:p>
           <a:p>
@@ -4408,11 +4306,11 @@
             <a:r>
               <a:rPr sz="1600" b="0">
                 <a:solidFill>
-                  <a:srgbClr val="FFFFFF"/>
-                </a:solidFill>
-                <a:latin typeface="Calibri"/>
-              </a:rPr>
-              <a:t>• Интегрировать ICB4 в образовательные программы вузов</a:t>
+                  <a:srgbClr val="28394A"/>
+                </a:solidFill>
+                <a:latin typeface="Calibri"/>
+              </a:rPr>
+              <a:t>» Интегрировать ICB4 в образовательные программы вузов</a:t>
             </a:r>
           </a:p>
           <a:p>
@@ -4424,11 +4322,11 @@
             <a:r>
               <a:rPr sz="1600" b="0">
                 <a:solidFill>
-                  <a:srgbClr val="FFFFFF"/>
-                </a:solidFill>
-                <a:latin typeface="Calibri"/>
-              </a:rPr>
-              <a:t>• Поддерживать путь к сертификации IPMA Level D</a:t>
+                  <a:srgbClr val="28394A"/>
+                </a:solidFill>
+                <a:latin typeface="Calibri"/>
+              </a:rPr>
+              <a:t>» Поддерживать путь к сертификации IPMA Level D</a:t>
             </a:r>
           </a:p>
           <a:p>
@@ -4440,24 +4338,102 @@
             <a:r>
               <a:rPr sz="1600" b="0">
                 <a:solidFill>
+                  <a:srgbClr val="28394A"/>
+                </a:solidFill>
+                <a:latin typeface="Calibri"/>
+              </a:rPr>
+              <a:t>» Участие в международных молодёжных форумах Young Crew</a:t>
+            </a:r>
+          </a:p>
+        </p:txBody>
+      </p:sp>
+      <p:sp>
+        <p:nvSpPr>
+          <p:cNvPr id="7" name="Rounded Rectangle 6"/>
+          <p:cNvSpPr/>
+          <p:nvPr/>
+        </p:nvSpPr>
+        <p:spPr>
+          <a:xfrm>
+            <a:off x="548640" y="5029200"/>
+            <a:ext cx="11064240" cy="731520"/>
+          </a:xfrm>
+          <a:prstGeom prst="roundRect">
+            <a:avLst/>
+          </a:prstGeom>
+          <a:solidFill>
+            <a:srgbClr val="2F9E44"/>
+          </a:solidFill>
+          <a:ln>
+            <a:noFill/>
+          </a:ln>
+        </p:spPr>
+        <p:style>
+          <a:lnRef idx="1">
+            <a:schemeClr val="accent1"/>
+          </a:lnRef>
+          <a:fillRef idx="3">
+            <a:schemeClr val="accent1"/>
+          </a:fillRef>
+          <a:effectRef idx="2">
+            <a:schemeClr val="accent1"/>
+          </a:effectRef>
+          <a:fontRef idx="minor">
+            <a:schemeClr val="lt1"/>
+          </a:fontRef>
+        </p:style>
+        <p:txBody>
+          <a:bodyPr rtlCol="0" anchor="ctr"/>
+          <a:lstStyle/>
+          <a:p>
+            <a:pPr algn="ctr"/>
+          </a:p>
+        </p:txBody>
+      </p:sp>
+      <p:sp>
+        <p:nvSpPr>
+          <p:cNvPr id="8" name="TextBox 7"/>
+          <p:cNvSpPr txBox="1"/>
+          <p:nvPr/>
+        </p:nvSpPr>
+        <p:spPr>
+          <a:xfrm>
+            <a:off x="822960" y="5212080"/>
+            <a:ext cx="10515600" cy="411480"/>
+          </a:xfrm>
+          <a:prstGeom prst="rect">
+            <a:avLst/>
+          </a:prstGeom>
+          <a:noFill/>
+        </p:spPr>
+        <p:txBody>
+          <a:bodyPr wrap="square">
+            <a:spAutoFit/>
+          </a:bodyPr>
+          <a:lstStyle/>
+          <a:p>
+            <a:pPr algn="ctr"/>
+            <a:r>
+              <a:rPr sz="1500" b="1">
+                <a:solidFill>
                   <a:srgbClr val="FFFFFF"/>
                 </a:solidFill>
                 <a:latin typeface="Calibri"/>
               </a:rPr>
-              <a:t>• Участие в международных молодёжных форумах Young Crew</a:t>
-            </a:r>
-          </a:p>
-        </p:txBody>
-      </p:sp>
-      <p:sp>
-        <p:nvSpPr>
-          <p:cNvPr id="8" name="TextBox 7"/>
-          <p:cNvSpPr txBox="1"/>
-          <p:nvPr/>
-        </p:nvSpPr>
-        <p:spPr>
-          <a:xfrm>
-            <a:off x="457200" y="6446520"/>
+              <a:t>Поддержка будущего профессии P3M в Кыргызстане</a:t>
+            </a:r>
+          </a:p>
+        </p:txBody>
+      </p:sp>
+      <p:sp>
+        <p:nvSpPr>
+          <p:cNvPr id="9" name="TextBox 8"/>
+          <p:cNvSpPr txBox="1"/>
+          <p:nvPr/>
+        </p:nvSpPr>
+        <p:spPr>
+          <a:xfrm>
+            <a:off x="502920" y="6446520"/>
             <a:ext cx="8229600" cy="274320"/>
           </a:xfrm>
           <a:prstGeom prst="rect">
@@ -4475,25 +4451,25 @@
             <a:r>
               <a:rPr sz="1100" b="0">
                 <a:solidFill>
-                  <a:srgbClr val="F3DCC9"/>
-                </a:solidFill>
-                <a:latin typeface="Calibri"/>
-              </a:rPr>
-              <a:t>IPMA Kyrgyz Republic · ipma.kg · Ассоциация-заявитель</a:t>
-            </a:r>
-          </a:p>
-        </p:txBody>
-      </p:sp>
-      <p:sp>
-        <p:nvSpPr>
-          <p:cNvPr id="9" name="TextBox 8"/>
-          <p:cNvSpPr txBox="1"/>
-          <p:nvPr/>
-        </p:nvSpPr>
-        <p:spPr>
-          <a:xfrm>
-            <a:off x="10424160" y="6446520"/>
-            <a:ext cx="1371600" cy="274320"/>
+                  <a:srgbClr val="5C6B72"/>
+                </a:solidFill>
+                <a:latin typeface="Calibri"/>
+              </a:rPr>
+              <a:t>IPMA Kyrgyz Republic  ·  ipma.kg</a:t>
+            </a:r>
+          </a:p>
+        </p:txBody>
+      </p:sp>
+      <p:sp>
+        <p:nvSpPr>
+          <p:cNvPr id="10" name="TextBox 9"/>
+          <p:cNvSpPr txBox="1"/>
+          <p:nvPr/>
+        </p:nvSpPr>
+        <p:spPr>
+          <a:xfrm>
+            <a:off x="10515600" y="6446520"/>
+            <a:ext cx="1280160" cy="274320"/>
           </a:xfrm>
           <a:prstGeom prst="rect">
             <a:avLst/>
@@ -4510,11 +4486,11 @@
             <a:r>
               <a:rPr sz="1100" b="0">
                 <a:solidFill>
-                  <a:srgbClr val="F3DCC9"/>
-                </a:solidFill>
-                <a:latin typeface="Calibri"/>
-              </a:rPr>
-              <a:t>11/12</a:t>
+                  <a:srgbClr val="5C6B72"/>
+                </a:solidFill>
+                <a:latin typeface="Calibri"/>
+              </a:rPr>
+              <a:t>11 / 12</a:t>
             </a:r>
           </a:p>
         </p:txBody>
@@ -4552,7 +4528,7 @@
             <a:avLst/>
           </a:prstGeom>
           <a:solidFill>
-            <a:srgbClr val="5C0A17"/>
+            <a:srgbClr val="0D223B"/>
           </a:solidFill>
           <a:ln>
             <a:noFill/>
@@ -4582,50 +4558,185 @@
       </p:sp>
       <p:sp>
         <p:nvSpPr>
-          <p:cNvPr id="3" name="Rectangle 2"/>
-          <p:cNvSpPr/>
-          <p:nvPr/>
-        </p:nvSpPr>
-        <p:spPr>
-          <a:xfrm>
-            <a:off x="0" y="0"/>
-            <a:ext cx="12191695" cy="73152"/>
-          </a:xfrm>
-          <a:prstGeom prst="rect">
-            <a:avLst/>
-          </a:prstGeom>
-          <a:solidFill>
-            <a:srgbClr val="FFD54F"/>
-          </a:solidFill>
-          <a:ln>
-            <a:noFill/>
-          </a:ln>
-        </p:spPr>
-        <p:style>
-          <a:lnRef idx="1">
-            <a:schemeClr val="accent1"/>
-          </a:lnRef>
-          <a:fillRef idx="3">
-            <a:schemeClr val="accent1"/>
-          </a:fillRef>
-          <a:effectRef idx="2">
-            <a:schemeClr val="accent1"/>
-          </a:effectRef>
-          <a:fontRef idx="minor">
-            <a:schemeClr val="lt1"/>
-          </a:fontRef>
-        </p:style>
-        <p:txBody>
-          <a:bodyPr rtlCol="0" anchor="ctr"/>
-          <a:lstStyle/>
-          <a:p>
-            <a:pPr algn="ctr"/>
+          <p:cNvPr id="3" name="TextBox 2"/>
+          <p:cNvSpPr txBox="1"/>
+          <p:nvPr/>
+        </p:nvSpPr>
+        <p:spPr>
+          <a:xfrm>
+            <a:off x="11155680" y="5303520"/>
+            <a:ext cx="1371600" cy="1097280"/>
+          </a:xfrm>
+          <a:prstGeom prst="rect">
+            <a:avLst/>
+          </a:prstGeom>
+          <a:noFill/>
+        </p:spPr>
+        <p:txBody>
+          <a:bodyPr wrap="square">
+            <a:spAutoFit/>
+          </a:bodyPr>
+          <a:lstStyle/>
+          <a:p>
+            <a:pPr algn="l"/>
+            <a:r>
+              <a:rPr sz="9600" b="1">
+                <a:solidFill>
+                  <a:srgbClr val="E30613"/>
+                </a:solidFill>
+                <a:latin typeface="Calibri"/>
+              </a:rPr>
+              <a:t>»</a:t>
+            </a:r>
+          </a:p>
+        </p:txBody>
+      </p:sp>
+      <p:sp>
+        <p:nvSpPr>
+          <p:cNvPr id="4" name="TextBox 3"/>
+          <p:cNvSpPr txBox="1"/>
+          <p:nvPr/>
+        </p:nvSpPr>
+        <p:spPr>
+          <a:xfrm>
+            <a:off x="640080" y="1097280"/>
+            <a:ext cx="5943600" cy="320040"/>
+          </a:xfrm>
+          <a:prstGeom prst="rect">
+            <a:avLst/>
+          </a:prstGeom>
+          <a:noFill/>
+        </p:spPr>
+        <p:txBody>
+          <a:bodyPr wrap="square">
+            <a:spAutoFit/>
+          </a:bodyPr>
+          <a:lstStyle/>
+          <a:p>
+            <a:pPr algn="l"/>
+            <a:r>
+              <a:rPr sz="1200" b="1">
+                <a:solidFill>
+                  <a:srgbClr val="7FE0A0"/>
+                </a:solidFill>
+                <a:latin typeface="Calibri"/>
+              </a:rPr>
+              <a:t>СПАСИБО ЗА ВНИМАНИЕ</a:t>
+            </a:r>
+          </a:p>
+        </p:txBody>
+      </p:sp>
+      <p:sp>
+        <p:nvSpPr>
+          <p:cNvPr id="5" name="TextBox 4"/>
+          <p:cNvSpPr txBox="1"/>
+          <p:nvPr/>
+        </p:nvSpPr>
+        <p:spPr>
+          <a:xfrm>
+            <a:off x="640080" y="1645920"/>
+            <a:ext cx="6400800" cy="1097280"/>
+          </a:xfrm>
+          <a:prstGeom prst="rect">
+            <a:avLst/>
+          </a:prstGeom>
+          <a:noFill/>
+        </p:spPr>
+        <p:txBody>
+          <a:bodyPr wrap="square">
+            <a:spAutoFit/>
+          </a:bodyPr>
+          <a:lstStyle/>
+          <a:p>
+            <a:pPr algn="l"/>
+            <a:r>
+              <a:rPr sz="3600" b="1">
+                <a:solidFill>
+                  <a:srgbClr val="FFFFFF"/>
+                </a:solidFill>
+                <a:latin typeface="Arial"/>
+              </a:rPr>
+              <a:t>Мы приглашаем
+к сотрудничеству</a:t>
+            </a:r>
+          </a:p>
+        </p:txBody>
+      </p:sp>
+      <p:sp>
+        <p:nvSpPr>
+          <p:cNvPr id="6" name="TextBox 5"/>
+          <p:cNvSpPr txBox="1"/>
+          <p:nvPr/>
+        </p:nvSpPr>
+        <p:spPr>
+          <a:xfrm>
+            <a:off x="640080" y="3108960"/>
+            <a:ext cx="5943600" cy="1097280"/>
+          </a:xfrm>
+          <a:prstGeom prst="rect">
+            <a:avLst/>
+          </a:prstGeom>
+          <a:noFill/>
+        </p:spPr>
+        <p:txBody>
+          <a:bodyPr wrap="square">
+            <a:spAutoFit/>
+          </a:bodyPr>
+          <a:lstStyle/>
+          <a:p>
+            <a:pPr algn="l"/>
+            <a:r>
+              <a:rPr sz="1500" b="0">
+                <a:solidFill>
+                  <a:srgbClr val="BCD0DF"/>
+                </a:solidFill>
+                <a:latin typeface="Calibri"/>
+              </a:rPr>
+              <a:t>KgPMU уже является Ассоциацией-заявителем IPMA и готова двигаться к Full MA и сертификации в Центральной Азии.</a:t>
+            </a:r>
+          </a:p>
+        </p:txBody>
+      </p:sp>
+      <p:sp>
+        <p:nvSpPr>
+          <p:cNvPr id="7" name="TextBox 6"/>
+          <p:cNvSpPr txBox="1"/>
+          <p:nvPr/>
+        </p:nvSpPr>
+        <p:spPr>
+          <a:xfrm>
+            <a:off x="640080" y="4480560"/>
+            <a:ext cx="5943600" cy="1097280"/>
+          </a:xfrm>
+          <a:prstGeom prst="rect">
+            <a:avLst/>
+          </a:prstGeom>
+          <a:noFill/>
+        </p:spPr>
+        <p:txBody>
+          <a:bodyPr wrap="square">
+            <a:spAutoFit/>
+          </a:bodyPr>
+          <a:lstStyle/>
+          <a:p>
+            <a:pPr algn="l"/>
+            <a:r>
+              <a:rPr sz="1500" b="0">
+                <a:solidFill>
+                  <a:srgbClr val="7FE0A0"/>
+                </a:solidFill>
+                <a:latin typeface="Calibri"/>
+              </a:rPr>
+              <a:t>info@ipma.kg
++996 555 655 755 · ipma.kg
+Урмат Мекишев · Президент KgPMU</a:t>
+            </a:r>
           </a:p>
         </p:txBody>
       </p:sp>
       <p:pic>
         <p:nvPicPr>
-          <p:cNvPr id="4" name="Picture 3" descr="ipma-kr-logo-white.png"/>
+          <p:cNvPr id="8" name="Picture 7" descr="ipma-kr-logo-white.png"/>
           <p:cNvPicPr>
             <a:picLocks noChangeAspect="1"/>
           </p:cNvPicPr>
@@ -4639,7 +4750,7 @@
         </p:blipFill>
         <p:spPr>
           <a:xfrm>
-            <a:off x="3992727" y="685800"/>
+            <a:off x="7132320" y="2103120"/>
             <a:ext cx="4206240" cy="1229375"/>
           </a:xfrm>
           <a:prstGeom prst="rect">
@@ -4649,185 +4760,35 @@
       </p:pic>
       <p:sp>
         <p:nvSpPr>
-          <p:cNvPr id="5" name="TextBox 4"/>
-          <p:cNvSpPr txBox="1"/>
-          <p:nvPr/>
-        </p:nvSpPr>
-        <p:spPr>
-          <a:xfrm>
-            <a:off x="731520" y="2331720"/>
-            <a:ext cx="10698480" cy="320040"/>
-          </a:xfrm>
-          <a:prstGeom prst="rect">
-            <a:avLst/>
-          </a:prstGeom>
-          <a:noFill/>
-        </p:spPr>
-        <p:txBody>
-          <a:bodyPr wrap="square">
-            <a:spAutoFit/>
-          </a:bodyPr>
-          <a:lstStyle/>
-          <a:p>
-            <a:pPr algn="ctr"/>
-            <a:r>
-              <a:rPr sz="1300" b="1">
-                <a:solidFill>
-                  <a:srgbClr val="FFD54F"/>
-                </a:solidFill>
-                <a:latin typeface="Calibri"/>
-              </a:rPr>
-              <a:t>СПАСИБО ЗА ВНИМАНИЕ</a:t>
-            </a:r>
-          </a:p>
-        </p:txBody>
-      </p:sp>
-      <p:sp>
-        <p:nvSpPr>
-          <p:cNvPr id="6" name="TextBox 5"/>
-          <p:cNvSpPr txBox="1"/>
-          <p:nvPr/>
-        </p:nvSpPr>
-        <p:spPr>
-          <a:xfrm>
-            <a:off x="731520" y="2743200"/>
-            <a:ext cx="10698480" cy="502920"/>
-          </a:xfrm>
-          <a:prstGeom prst="rect">
-            <a:avLst/>
-          </a:prstGeom>
-          <a:noFill/>
-        </p:spPr>
-        <p:txBody>
-          <a:bodyPr wrap="square">
-            <a:spAutoFit/>
-          </a:bodyPr>
-          <a:lstStyle/>
-          <a:p>
-            <a:pPr algn="ctr"/>
-            <a:r>
-              <a:rPr sz="2800" b="1">
-                <a:solidFill>
-                  <a:srgbClr val="FFFFFF"/>
-                </a:solidFill>
-                <a:latin typeface="Georgia"/>
-              </a:rPr>
-              <a:t>Мы приглашаем к сотрудничеству</a:t>
-            </a:r>
-          </a:p>
-        </p:txBody>
-      </p:sp>
-      <p:sp>
-        <p:nvSpPr>
-          <p:cNvPr id="7" name="TextBox 6"/>
-          <p:cNvSpPr txBox="1"/>
-          <p:nvPr/>
-        </p:nvSpPr>
-        <p:spPr>
-          <a:xfrm>
-            <a:off x="1371600" y="3383280"/>
-            <a:ext cx="9418320" cy="731520"/>
-          </a:xfrm>
-          <a:prstGeom prst="rect">
-            <a:avLst/>
-          </a:prstGeom>
-          <a:noFill/>
-        </p:spPr>
-        <p:txBody>
-          <a:bodyPr wrap="square">
-            <a:spAutoFit/>
-          </a:bodyPr>
-          <a:lstStyle/>
-          <a:p>
-            <a:pPr algn="ctr"/>
-            <a:r>
-              <a:rPr sz="1500" b="0">
-                <a:solidFill>
-                  <a:srgbClr val="F3DCC9"/>
-                </a:solidFill>
-                <a:latin typeface="Calibri"/>
-              </a:rPr>
-              <a:t>KgPMU / IPMA Kyrgyz Republic уже является Ассоциацией-заявителем IPMA и готова двигаться к полноправному членству и сертификации в Центральной Азии.</a:t>
-            </a:r>
-          </a:p>
-        </p:txBody>
-      </p:sp>
-      <p:sp>
-        <p:nvSpPr>
-          <p:cNvPr id="8" name="Rounded Rectangle 7"/>
-          <p:cNvSpPr/>
-          <p:nvPr/>
-        </p:nvSpPr>
-        <p:spPr>
-          <a:xfrm>
-            <a:off x="2011680" y="4297680"/>
-            <a:ext cx="8138160" cy="1554480"/>
-          </a:xfrm>
-          <a:prstGeom prst="roundRect">
-            <a:avLst/>
-          </a:prstGeom>
-          <a:solidFill>
-            <a:srgbClr val="7A0C1E"/>
-          </a:solidFill>
-          <a:ln>
-            <a:noFill/>
-          </a:ln>
-        </p:spPr>
-        <p:style>
-          <a:lnRef idx="1">
-            <a:schemeClr val="accent1"/>
-          </a:lnRef>
-          <a:fillRef idx="3">
-            <a:schemeClr val="accent1"/>
-          </a:fillRef>
-          <a:effectRef idx="2">
-            <a:schemeClr val="accent1"/>
-          </a:effectRef>
-          <a:fontRef idx="minor">
-            <a:schemeClr val="lt1"/>
-          </a:fontRef>
-        </p:style>
-        <p:txBody>
-          <a:bodyPr rtlCol="0" anchor="ctr"/>
-          <a:lstStyle/>
-          <a:p>
-            <a:pPr algn="ctr"/>
-          </a:p>
-        </p:txBody>
-      </p:sp>
-      <p:sp>
-        <p:nvSpPr>
           <p:cNvPr id="9" name="TextBox 8"/>
           <p:cNvSpPr txBox="1"/>
           <p:nvPr/>
         </p:nvSpPr>
         <p:spPr>
           <a:xfrm>
-            <a:off x="2286000" y="4526280"/>
-            <a:ext cx="7589520" cy="1188720"/>
-          </a:xfrm>
-          <a:prstGeom prst="rect">
-            <a:avLst/>
-          </a:prstGeom>
-          <a:noFill/>
-        </p:spPr>
-        <p:txBody>
-          <a:bodyPr wrap="square">
-            <a:spAutoFit/>
-          </a:bodyPr>
-          <a:lstStyle/>
-          <a:p>
-            <a:pPr algn="ctr"/>
-            <a:r>
-              <a:rPr sz="1500" b="0">
-                <a:solidFill>
-                  <a:srgbClr val="FFFFFF"/>
-                </a:solidFill>
-                <a:latin typeface="Calibri"/>
-              </a:rPr>
-              <a:t>Урмат Мекишев · Президент KgPMU
-info@ipma.kg · +996 555 655 755 · ipma.kg
-Бишкек, Кыргызская Республика</a:t>
+            <a:off x="502920" y="6446520"/>
+            <a:ext cx="8229600" cy="274320"/>
+          </a:xfrm>
+          <a:prstGeom prst="rect">
+            <a:avLst/>
+          </a:prstGeom>
+          <a:noFill/>
+        </p:spPr>
+        <p:txBody>
+          <a:bodyPr wrap="square">
+            <a:spAutoFit/>
+          </a:bodyPr>
+          <a:lstStyle/>
+          <a:p>
+            <a:pPr algn="l"/>
+            <a:r>
+              <a:rPr sz="1100" b="0">
+                <a:solidFill>
+                  <a:srgbClr val="8FA6B8"/>
+                </a:solidFill>
+                <a:latin typeface="Calibri"/>
+              </a:rPr>
+              <a:t>IPMA Kyrgyz Republic  ·  ipma.kg</a:t>
             </a:r>
           </a:p>
         </p:txBody>
@@ -4840,64 +4801,29 @@
         </p:nvSpPr>
         <p:spPr>
           <a:xfrm>
-            <a:off x="457200" y="6446520"/>
-            <a:ext cx="8229600" cy="274320"/>
-          </a:xfrm>
-          <a:prstGeom prst="rect">
-            <a:avLst/>
-          </a:prstGeom>
-          <a:noFill/>
-        </p:spPr>
-        <p:txBody>
-          <a:bodyPr wrap="square">
-            <a:spAutoFit/>
-          </a:bodyPr>
-          <a:lstStyle/>
-          <a:p>
-            <a:pPr algn="l"/>
+            <a:off x="10515600" y="6446520"/>
+            <a:ext cx="1280160" cy="274320"/>
+          </a:xfrm>
+          <a:prstGeom prst="rect">
+            <a:avLst/>
+          </a:prstGeom>
+          <a:noFill/>
+        </p:spPr>
+        <p:txBody>
+          <a:bodyPr wrap="square">
+            <a:spAutoFit/>
+          </a:bodyPr>
+          <a:lstStyle/>
+          <a:p>
+            <a:pPr algn="r"/>
             <a:r>
               <a:rPr sz="1100" b="0">
                 <a:solidFill>
-                  <a:srgbClr val="F3DCC9"/>
-                </a:solidFill>
-                <a:latin typeface="Calibri"/>
-              </a:rPr>
-              <a:t>IPMA Kyrgyz Republic · ipma.kg · Ассоциация-заявитель</a:t>
-            </a:r>
-          </a:p>
-        </p:txBody>
-      </p:sp>
-      <p:sp>
-        <p:nvSpPr>
-          <p:cNvPr id="11" name="TextBox 10"/>
-          <p:cNvSpPr txBox="1"/>
-          <p:nvPr/>
-        </p:nvSpPr>
-        <p:spPr>
-          <a:xfrm>
-            <a:off x="10424160" y="6446520"/>
-            <a:ext cx="1371600" cy="274320"/>
-          </a:xfrm>
-          <a:prstGeom prst="rect">
-            <a:avLst/>
-          </a:prstGeom>
-          <a:noFill/>
-        </p:spPr>
-        <p:txBody>
-          <a:bodyPr wrap="square">
-            <a:spAutoFit/>
-          </a:bodyPr>
-          <a:lstStyle/>
-          <a:p>
-            <a:pPr algn="r"/>
-            <a:r>
-              <a:rPr sz="1100" b="0">
-                <a:solidFill>
-                  <a:srgbClr val="F3DCC9"/>
-                </a:solidFill>
-                <a:latin typeface="Calibri"/>
-              </a:rPr>
-              <a:t>12/12</a:t>
+                  <a:srgbClr val="8FA6B8"/>
+                </a:solidFill>
+                <a:latin typeface="Calibri"/>
+              </a:rPr>
+              <a:t>12 / 12</a:t>
             </a:r>
           </a:p>
         </p:txBody>
@@ -4935,7 +4861,7 @@
             <a:avLst/>
           </a:prstGeom>
           <a:solidFill>
-            <a:srgbClr val="5C0A17"/>
+            <a:srgbClr val="EEF2F1"/>
           </a:solidFill>
           <a:ln>
             <a:noFill/>
@@ -4963,52 +4889,9 @@
           </a:p>
         </p:txBody>
       </p:sp>
-      <p:sp>
-        <p:nvSpPr>
-          <p:cNvPr id="3" name="Rectangle 2"/>
-          <p:cNvSpPr/>
-          <p:nvPr/>
-        </p:nvSpPr>
-        <p:spPr>
-          <a:xfrm>
-            <a:off x="0" y="0"/>
-            <a:ext cx="12191695" cy="73152"/>
-          </a:xfrm>
-          <a:prstGeom prst="rect">
-            <a:avLst/>
-          </a:prstGeom>
-          <a:solidFill>
-            <a:srgbClr val="FFD54F"/>
-          </a:solidFill>
-          <a:ln>
-            <a:noFill/>
-          </a:ln>
-        </p:spPr>
-        <p:style>
-          <a:lnRef idx="1">
-            <a:schemeClr val="accent1"/>
-          </a:lnRef>
-          <a:fillRef idx="3">
-            <a:schemeClr val="accent1"/>
-          </a:fillRef>
-          <a:effectRef idx="2">
-            <a:schemeClr val="accent1"/>
-          </a:effectRef>
-          <a:fontRef idx="minor">
-            <a:schemeClr val="lt1"/>
-          </a:fontRef>
-        </p:style>
-        <p:txBody>
-          <a:bodyPr rtlCol="0" anchor="ctr"/>
-          <a:lstStyle/>
-          <a:p>
-            <a:pPr algn="ctr"/>
-          </a:p>
-        </p:txBody>
-      </p:sp>
       <p:pic>
         <p:nvPicPr>
-          <p:cNvPr id="4" name="Picture 3" descr="ipma-kr-emblem.png"/>
+          <p:cNvPr id="3" name="Picture 2" descr="ipma-kr-emblem.png"/>
           <p:cNvPicPr>
             <a:picLocks noChangeAspect="1"/>
           </p:cNvPicPr>
@@ -5022,8 +4905,8 @@
         </p:blipFill>
         <p:spPr>
           <a:xfrm>
-            <a:off x="11292840" y="201168"/>
-            <a:ext cx="661788" cy="658368"/>
+            <a:off x="11292840" y="228600"/>
+            <a:ext cx="597448" cy="594360"/>
           </a:xfrm>
           <a:prstGeom prst="rect">
             <a:avLst/>
@@ -5032,14 +4915,49 @@
       </p:pic>
       <p:sp>
         <p:nvSpPr>
+          <p:cNvPr id="4" name="TextBox 3"/>
+          <p:cNvSpPr txBox="1"/>
+          <p:nvPr/>
+        </p:nvSpPr>
+        <p:spPr>
+          <a:xfrm>
+            <a:off x="548640" y="320040"/>
+            <a:ext cx="10972800" cy="274320"/>
+          </a:xfrm>
+          <a:prstGeom prst="rect">
+            <a:avLst/>
+          </a:prstGeom>
+          <a:noFill/>
+        </p:spPr>
+        <p:txBody>
+          <a:bodyPr wrap="square">
+            <a:spAutoFit/>
+          </a:bodyPr>
+          <a:lstStyle/>
+          <a:p>
+            <a:pPr algn="l"/>
+            <a:r>
+              <a:rPr sz="1100" b="1">
+                <a:solidFill>
+                  <a:srgbClr val="1F7A34"/>
+                </a:solidFill>
+                <a:latin typeface="Calibri"/>
+              </a:rPr>
+              <a:t>02  »  ВВЕДЕНИЕ</a:t>
+            </a:r>
+          </a:p>
+        </p:txBody>
+      </p:sp>
+      <p:sp>
+        <p:nvSpPr>
           <p:cNvPr id="5" name="TextBox 4"/>
           <p:cNvSpPr txBox="1"/>
           <p:nvPr/>
         </p:nvSpPr>
         <p:spPr>
           <a:xfrm>
-            <a:off x="548640" y="320040"/>
-            <a:ext cx="10058400" cy="274320"/>
+            <a:off x="548640" y="640080"/>
+            <a:ext cx="10515600" cy="548640"/>
           </a:xfrm>
           <a:prstGeom prst="rect">
             <a:avLst/>
@@ -5054,46 +4972,11 @@
           <a:p>
             <a:pPr algn="l"/>
             <a:r>
-              <a:rPr sz="1100" b="1">
-                <a:solidFill>
-                  <a:srgbClr val="FFD54F"/>
-                </a:solidFill>
-                <a:latin typeface="Calibri"/>
-              </a:rPr>
-              <a:t>01 · ВВЕДЕНИЕ</a:t>
-            </a:r>
-          </a:p>
-        </p:txBody>
-      </p:sp>
-      <p:sp>
-        <p:nvSpPr>
-          <p:cNvPr id="6" name="TextBox 5"/>
-          <p:cNvSpPr txBox="1"/>
-          <p:nvPr/>
-        </p:nvSpPr>
-        <p:spPr>
-          <a:xfrm>
-            <a:off x="548640" y="640080"/>
-            <a:ext cx="10241280" cy="548640"/>
-          </a:xfrm>
-          <a:prstGeom prst="rect">
-            <a:avLst/>
-          </a:prstGeom>
-          <a:noFill/>
-        </p:spPr>
-        <p:txBody>
-          <a:bodyPr wrap="square">
-            <a:spAutoFit/>
-          </a:bodyPr>
-          <a:lstStyle/>
-          <a:p>
-            <a:pPr algn="l"/>
-            <a:r>
               <a:rPr sz="2800" b="1">
                 <a:solidFill>
-                  <a:srgbClr val="FFFFFF"/>
-                </a:solidFill>
-                <a:latin typeface="Georgia"/>
+                  <a:srgbClr val="0D223B"/>
+                </a:solidFill>
+                <a:latin typeface="Arial"/>
               </a:rPr>
               <a:t>Кто мы</a:t>
             </a:r>
@@ -5102,20 +4985,20 @@
       </p:sp>
       <p:sp>
         <p:nvSpPr>
-          <p:cNvPr id="7" name="Rounded Rectangle 6"/>
+          <p:cNvPr id="6" name="Rounded Rectangle 5"/>
           <p:cNvSpPr/>
           <p:nvPr/>
         </p:nvSpPr>
         <p:spPr>
           <a:xfrm>
-            <a:off x="548640" y="1463040"/>
-            <a:ext cx="11064240" cy="1005840"/>
+            <a:off x="548640" y="1554480"/>
+            <a:ext cx="5486400" cy="4114800"/>
           </a:xfrm>
           <a:prstGeom prst="roundRect">
             <a:avLst/>
           </a:prstGeom>
           <a:solidFill>
-            <a:srgbClr val="7A0C1E"/>
+            <a:srgbClr val="FFFFFF"/>
           </a:solidFill>
           <a:ln>
             <a:noFill/>
@@ -5145,14 +5028,49 @@
       </p:sp>
       <p:sp>
         <p:nvSpPr>
+          <p:cNvPr id="7" name="TextBox 6"/>
+          <p:cNvSpPr txBox="1"/>
+          <p:nvPr/>
+        </p:nvSpPr>
+        <p:spPr>
+          <a:xfrm>
+            <a:off x="822960" y="1783080"/>
+            <a:ext cx="4937760" cy="274320"/>
+          </a:xfrm>
+          <a:prstGeom prst="rect">
+            <a:avLst/>
+          </a:prstGeom>
+          <a:noFill/>
+        </p:spPr>
+        <p:txBody>
+          <a:bodyPr wrap="square">
+            <a:spAutoFit/>
+          </a:bodyPr>
+          <a:lstStyle/>
+          <a:p>
+            <a:pPr algn="l"/>
+            <a:r>
+              <a:rPr sz="1100" b="1">
+                <a:solidFill>
+                  <a:srgbClr val="1F7A34"/>
+                </a:solidFill>
+                <a:latin typeface="Calibri"/>
+              </a:rPr>
+              <a:t>ПРЕЗИДЕНТ</a:t>
+            </a:r>
+          </a:p>
+        </p:txBody>
+      </p:sp>
+      <p:sp>
+        <p:nvSpPr>
           <p:cNvPr id="8" name="TextBox 7"/>
           <p:cNvSpPr txBox="1"/>
           <p:nvPr/>
         </p:nvSpPr>
         <p:spPr>
           <a:xfrm>
-            <a:off x="822960" y="1600200"/>
-            <a:ext cx="10515600" cy="731520"/>
+            <a:off x="822960" y="2194560"/>
+            <a:ext cx="4937760" cy="548640"/>
           </a:xfrm>
           <a:prstGeom prst="rect">
             <a:avLst/>
@@ -5169,11 +5087,11 @@
             <a:r>
               <a:rPr sz="1800" b="1">
                 <a:solidFill>
-                  <a:srgbClr val="FFFFFF"/>
-                </a:solidFill>
-                <a:latin typeface="Calibri"/>
-              </a:rPr>
-              <a:t>Мекишев Урмат Казбекович — Президент KgPMU, сертифицированный эксперт IPMA</a:t>
+                  <a:srgbClr val="0D223B"/>
+                </a:solidFill>
+                <a:latin typeface="Calibri"/>
+              </a:rPr>
+              <a:t>Мекишев Урмат Казбекович</a:t>
             </a:r>
           </a:p>
         </p:txBody>
@@ -5186,79 +5104,8 @@
         </p:nvSpPr>
         <p:spPr>
           <a:xfrm>
-            <a:off x="548640" y="2743200"/>
-            <a:ext cx="10972800" cy="2011680"/>
-          </a:xfrm>
-          <a:prstGeom prst="rect">
-            <a:avLst/>
-          </a:prstGeom>
-          <a:noFill/>
-        </p:spPr>
-        <p:txBody>
-          <a:bodyPr wrap="square">
-            <a:spAutoFit/>
-          </a:bodyPr>
-          <a:lstStyle/>
-          <a:p>
-            <a:pPr>
-              <a:spcAft>
-                <a:spcPts val="1000"/>
-              </a:spcAft>
-            </a:pPr>
-            <a:r>
-              <a:rPr sz="1500" b="0">
-                <a:solidFill>
-                  <a:srgbClr val="FFFFFF"/>
-                </a:solidFill>
-                <a:latin typeface="Calibri"/>
-              </a:rPr>
-              <a:t>• Более 15 лет опыта в управлении крупными инфраструктурными проектами</a:t>
-            </a:r>
-          </a:p>
-          <a:p>
-            <a:pPr>
-              <a:spcAft>
-                <a:spcPts val="1000"/>
-              </a:spcAft>
-            </a:pPr>
-            <a:r>
-              <a:rPr sz="1500" b="0">
-                <a:solidFill>
-                  <a:srgbClr val="FFFFFF"/>
-                </a:solidFill>
-                <a:latin typeface="Calibri"/>
-              </a:rPr>
-              <a:t>• Инициатор внедрения стандартов IPMA ICB4 в госсекторе и бизнесе КР</a:t>
-            </a:r>
-          </a:p>
-          <a:p>
-            <a:pPr>
-              <a:spcAft>
-                <a:spcPts val="1000"/>
-              </a:spcAft>
-            </a:pPr>
-            <a:r>
-              <a:rPr sz="1500" b="0">
-                <a:solidFill>
-                  <a:srgbClr val="FFFFFF"/>
-                </a:solidFill>
-                <a:latin typeface="Calibri"/>
-              </a:rPr>
-              <a:t>• Почётный член: Бабаев Игбал Алиджанович (президент Азербайджанской ассоциации УП)</a:t>
-            </a:r>
-          </a:p>
-        </p:txBody>
-      </p:sp>
-      <p:sp>
-        <p:nvSpPr>
-          <p:cNvPr id="10" name="TextBox 9"/>
-          <p:cNvSpPr txBox="1"/>
-          <p:nvPr/>
-        </p:nvSpPr>
-        <p:spPr>
-          <a:xfrm>
-            <a:off x="548640" y="4937760"/>
-            <a:ext cx="10972800" cy="914400"/>
+            <a:off x="822960" y="2926080"/>
+            <a:ext cx="4937760" cy="2286000"/>
           </a:xfrm>
           <a:prstGeom prst="rect">
             <a:avLst/>
@@ -5275,12 +5122,55 @@
             <a:r>
               <a:rPr sz="1400" b="0">
                 <a:solidFill>
-                  <a:srgbClr val="FFD54F"/>
-                </a:solidFill>
-                <a:latin typeface="Georgia"/>
-              </a:rPr>
-              <a:t>«Создать в Кыргызстане профессиональное сообщество лидеров…»</a:t>
-            </a:r>
+                  <a:srgbClr val="28394A"/>
+                </a:solidFill>
+                <a:latin typeface="Calibri"/>
+              </a:rPr>
+              <a:t>Сертифицированный эксперт IPMA. Более 15 лет опыта в управлении крупными инфраструктурными проектами. Инициатор внедрения ICB4 в госсекторе и бизнесе КР.</a:t>
+            </a:r>
+          </a:p>
+        </p:txBody>
+      </p:sp>
+      <p:sp>
+        <p:nvSpPr>
+          <p:cNvPr id="10" name="Rounded Rectangle 9"/>
+          <p:cNvSpPr/>
+          <p:nvPr/>
+        </p:nvSpPr>
+        <p:spPr>
+          <a:xfrm>
+            <a:off x="6309359" y="1554480"/>
+            <a:ext cx="5486400" cy="4114800"/>
+          </a:xfrm>
+          <a:prstGeom prst="roundRect">
+            <a:avLst/>
+          </a:prstGeom>
+          <a:solidFill>
+            <a:srgbClr val="FFFFFF"/>
+          </a:solidFill>
+          <a:ln>
+            <a:noFill/>
+          </a:ln>
+        </p:spPr>
+        <p:style>
+          <a:lnRef idx="1">
+            <a:schemeClr val="accent1"/>
+          </a:lnRef>
+          <a:fillRef idx="3">
+            <a:schemeClr val="accent1"/>
+          </a:fillRef>
+          <a:effectRef idx="2">
+            <a:schemeClr val="accent1"/>
+          </a:effectRef>
+          <a:fontRef idx="minor">
+            <a:schemeClr val="lt1"/>
+          </a:fontRef>
+        </p:style>
+        <p:txBody>
+          <a:bodyPr rtlCol="0" anchor="ctr"/>
+          <a:lstStyle/>
+          <a:p>
+            <a:pPr algn="ctr"/>
           </a:p>
         </p:txBody>
       </p:sp>
@@ -5292,7 +5182,112 @@
         </p:nvSpPr>
         <p:spPr>
           <a:xfrm>
-            <a:off x="457200" y="6446520"/>
+            <a:off x="6583679" y="1783080"/>
+            <a:ext cx="4937760" cy="274320"/>
+          </a:xfrm>
+          <a:prstGeom prst="rect">
+            <a:avLst/>
+          </a:prstGeom>
+          <a:noFill/>
+        </p:spPr>
+        <p:txBody>
+          <a:bodyPr wrap="square">
+            <a:spAutoFit/>
+          </a:bodyPr>
+          <a:lstStyle/>
+          <a:p>
+            <a:pPr algn="l"/>
+            <a:r>
+              <a:rPr sz="1100" b="1">
+                <a:solidFill>
+                  <a:srgbClr val="1F7A34"/>
+                </a:solidFill>
+                <a:latin typeface="Calibri"/>
+              </a:rPr>
+              <a:t>ПОЧЁТНЫЙ ЧЛЕН</a:t>
+            </a:r>
+          </a:p>
+        </p:txBody>
+      </p:sp>
+      <p:sp>
+        <p:nvSpPr>
+          <p:cNvPr id="12" name="TextBox 11"/>
+          <p:cNvSpPr txBox="1"/>
+          <p:nvPr/>
+        </p:nvSpPr>
+        <p:spPr>
+          <a:xfrm>
+            <a:off x="6583679" y="2194560"/>
+            <a:ext cx="4937760" cy="548640"/>
+          </a:xfrm>
+          <a:prstGeom prst="rect">
+            <a:avLst/>
+          </a:prstGeom>
+          <a:noFill/>
+        </p:spPr>
+        <p:txBody>
+          <a:bodyPr wrap="square">
+            <a:spAutoFit/>
+          </a:bodyPr>
+          <a:lstStyle/>
+          <a:p>
+            <a:pPr algn="l"/>
+            <a:r>
+              <a:rPr sz="1800" b="1">
+                <a:solidFill>
+                  <a:srgbClr val="0D223B"/>
+                </a:solidFill>
+                <a:latin typeface="Calibri"/>
+              </a:rPr>
+              <a:t>Бабаев Игбал Алиджанович</a:t>
+            </a:r>
+          </a:p>
+        </p:txBody>
+      </p:sp>
+      <p:sp>
+        <p:nvSpPr>
+          <p:cNvPr id="13" name="TextBox 12"/>
+          <p:cNvSpPr txBox="1"/>
+          <p:nvPr/>
+        </p:nvSpPr>
+        <p:spPr>
+          <a:xfrm>
+            <a:off x="6583679" y="2926080"/>
+            <a:ext cx="4937760" cy="2286000"/>
+          </a:xfrm>
+          <a:prstGeom prst="rect">
+            <a:avLst/>
+          </a:prstGeom>
+          <a:noFill/>
+        </p:spPr>
+        <p:txBody>
+          <a:bodyPr wrap="square">
+            <a:spAutoFit/>
+          </a:bodyPr>
+          <a:lstStyle/>
+          <a:p>
+            <a:pPr algn="l"/>
+            <a:r>
+              <a:rPr sz="1400" b="0">
+                <a:solidFill>
+                  <a:srgbClr val="28394A"/>
+                </a:solidFill>
+                <a:latin typeface="Calibri"/>
+              </a:rPr>
+              <a:t>Д.т.н., профессор, президент Азербайджанской ассоциации УП. Поддерживает развитие проектной культуры в Кыргызстане и регионе.</a:t>
+            </a:r>
+          </a:p>
+        </p:txBody>
+      </p:sp>
+      <p:sp>
+        <p:nvSpPr>
+          <p:cNvPr id="14" name="TextBox 13"/>
+          <p:cNvSpPr txBox="1"/>
+          <p:nvPr/>
+        </p:nvSpPr>
+        <p:spPr>
+          <a:xfrm>
+            <a:off x="502920" y="6446520"/>
             <a:ext cx="8229600" cy="274320"/>
           </a:xfrm>
           <a:prstGeom prst="rect">
@@ -5310,25 +5305,25 @@
             <a:r>
               <a:rPr sz="1100" b="0">
                 <a:solidFill>
-                  <a:srgbClr val="F3DCC9"/>
-                </a:solidFill>
-                <a:latin typeface="Calibri"/>
-              </a:rPr>
-              <a:t>IPMA Kyrgyz Republic · ipma.kg · Ассоциация-заявитель</a:t>
-            </a:r>
-          </a:p>
-        </p:txBody>
-      </p:sp>
-      <p:sp>
-        <p:nvSpPr>
-          <p:cNvPr id="12" name="TextBox 11"/>
-          <p:cNvSpPr txBox="1"/>
-          <p:nvPr/>
-        </p:nvSpPr>
-        <p:spPr>
-          <a:xfrm>
-            <a:off x="10424160" y="6446520"/>
-            <a:ext cx="1371600" cy="274320"/>
+                  <a:srgbClr val="5C6B72"/>
+                </a:solidFill>
+                <a:latin typeface="Calibri"/>
+              </a:rPr>
+              <a:t>IPMA Kyrgyz Republic  ·  ipma.kg</a:t>
+            </a:r>
+          </a:p>
+        </p:txBody>
+      </p:sp>
+      <p:sp>
+        <p:nvSpPr>
+          <p:cNvPr id="15" name="TextBox 14"/>
+          <p:cNvSpPr txBox="1"/>
+          <p:nvPr/>
+        </p:nvSpPr>
+        <p:spPr>
+          <a:xfrm>
+            <a:off x="10515600" y="6446520"/>
+            <a:ext cx="1280160" cy="274320"/>
           </a:xfrm>
           <a:prstGeom prst="rect">
             <a:avLst/>
@@ -5345,11 +5340,11 @@
             <a:r>
               <a:rPr sz="1100" b="0">
                 <a:solidFill>
-                  <a:srgbClr val="F3DCC9"/>
-                </a:solidFill>
-                <a:latin typeface="Calibri"/>
-              </a:rPr>
-              <a:t>2/12</a:t>
+                  <a:srgbClr val="5C6B72"/>
+                </a:solidFill>
+                <a:latin typeface="Calibri"/>
+              </a:rPr>
+              <a:t>02 / 12</a:t>
             </a:r>
           </a:p>
         </p:txBody>
@@ -5387,7 +5382,7 @@
             <a:avLst/>
           </a:prstGeom>
           <a:solidFill>
-            <a:srgbClr val="5C0A17"/>
+            <a:srgbClr val="0D223B"/>
           </a:solidFill>
           <a:ln>
             <a:noFill/>
@@ -5417,71 +5412,74 @@
       </p:sp>
       <p:sp>
         <p:nvSpPr>
-          <p:cNvPr id="3" name="Rectangle 2"/>
-          <p:cNvSpPr/>
-          <p:nvPr/>
-        </p:nvSpPr>
-        <p:spPr>
-          <a:xfrm>
-            <a:off x="0" y="0"/>
-            <a:ext cx="12191695" cy="73152"/>
-          </a:xfrm>
-          <a:prstGeom prst="rect">
-            <a:avLst/>
-          </a:prstGeom>
-          <a:solidFill>
-            <a:srgbClr val="FFD54F"/>
-          </a:solidFill>
-          <a:ln>
-            <a:noFill/>
-          </a:ln>
-        </p:spPr>
-        <p:style>
-          <a:lnRef idx="1">
-            <a:schemeClr val="accent1"/>
-          </a:lnRef>
-          <a:fillRef idx="3">
-            <a:schemeClr val="accent1"/>
-          </a:fillRef>
-          <a:effectRef idx="2">
-            <a:schemeClr val="accent1"/>
-          </a:effectRef>
-          <a:fontRef idx="minor">
-            <a:schemeClr val="lt1"/>
-          </a:fontRef>
-        </p:style>
-        <p:txBody>
-          <a:bodyPr rtlCol="0" anchor="ctr"/>
-          <a:lstStyle/>
-          <a:p>
-            <a:pPr algn="ctr"/>
-          </a:p>
-        </p:txBody>
-      </p:sp>
-      <p:pic>
-        <p:nvPicPr>
-          <p:cNvPr id="4" name="Picture 3" descr="ipma-kr-emblem.png"/>
-          <p:cNvPicPr>
-            <a:picLocks noChangeAspect="1"/>
-          </p:cNvPicPr>
-          <p:nvPr/>
-        </p:nvPicPr>
-        <p:blipFill>
-          <a:blip r:embed="rId2"/>
-          <a:stretch>
-            <a:fillRect/>
-          </a:stretch>
-        </p:blipFill>
-        <p:spPr>
-          <a:xfrm>
-            <a:off x="11292840" y="201168"/>
-            <a:ext cx="661788" cy="658368"/>
-          </a:xfrm>
-          <a:prstGeom prst="rect">
-            <a:avLst/>
-          </a:prstGeom>
-        </p:spPr>
-      </p:pic>
+          <p:cNvPr id="3" name="TextBox 2"/>
+          <p:cNvSpPr txBox="1"/>
+          <p:nvPr/>
+        </p:nvSpPr>
+        <p:spPr>
+          <a:xfrm>
+            <a:off x="548640" y="320040"/>
+            <a:ext cx="10972800" cy="274320"/>
+          </a:xfrm>
+          <a:prstGeom prst="rect">
+            <a:avLst/>
+          </a:prstGeom>
+          <a:noFill/>
+        </p:spPr>
+        <p:txBody>
+          <a:bodyPr wrap="square">
+            <a:spAutoFit/>
+          </a:bodyPr>
+          <a:lstStyle/>
+          <a:p>
+            <a:pPr algn="l"/>
+            <a:r>
+              <a:rPr sz="1100" b="1">
+                <a:solidFill>
+                  <a:srgbClr val="7FE0A0"/>
+                </a:solidFill>
+                <a:latin typeface="Calibri"/>
+              </a:rPr>
+              <a:t>03  »  МИССИЯ</a:t>
+            </a:r>
+          </a:p>
+        </p:txBody>
+      </p:sp>
+      <p:sp>
+        <p:nvSpPr>
+          <p:cNvPr id="4" name="TextBox 3"/>
+          <p:cNvSpPr txBox="1"/>
+          <p:nvPr/>
+        </p:nvSpPr>
+        <p:spPr>
+          <a:xfrm>
+            <a:off x="548640" y="640080"/>
+            <a:ext cx="10515600" cy="548640"/>
+          </a:xfrm>
+          <a:prstGeom prst="rect">
+            <a:avLst/>
+          </a:prstGeom>
+          <a:noFill/>
+        </p:spPr>
+        <p:txBody>
+          <a:bodyPr wrap="square">
+            <a:spAutoFit/>
+          </a:bodyPr>
+          <a:lstStyle/>
+          <a:p>
+            <a:pPr algn="l"/>
+            <a:r>
+              <a:rPr sz="2800" b="1">
+                <a:solidFill>
+                  <a:srgbClr val="FFFFFF"/>
+                </a:solidFill>
+                <a:latin typeface="Arial"/>
+              </a:rPr>
+              <a:t>Наша миссия</a:t>
+            </a:r>
+          </a:p>
+        </p:txBody>
+      </p:sp>
       <p:sp>
         <p:nvSpPr>
           <p:cNvPr id="5" name="TextBox 4"/>
@@ -5490,8 +5488,8 @@
         </p:nvSpPr>
         <p:spPr>
           <a:xfrm>
-            <a:off x="548640" y="320040"/>
-            <a:ext cx="10058400" cy="274320"/>
+            <a:off x="640080" y="2011680"/>
+            <a:ext cx="10515600" cy="2743200"/>
           </a:xfrm>
           <a:prstGeom prst="rect">
             <a:avLst/>
@@ -5506,13 +5504,13 @@
           <a:p>
             <a:pPr algn="l"/>
             <a:r>
-              <a:rPr sz="1100" b="1">
-                <a:solidFill>
-                  <a:srgbClr val="FFD54F"/>
-                </a:solidFill>
-                <a:latin typeface="Calibri"/>
-              </a:rPr>
-              <a:t>02 · МИССИЯ</a:t>
+              <a:rPr sz="2600" b="1">
+                <a:solidFill>
+                  <a:srgbClr val="FFFFFF"/>
+                </a:solidFill>
+                <a:latin typeface="Arial"/>
+              </a:rPr>
+              <a:t>Создавать экосистему компетентных проектных лидеров и повышать зрелость управления проектами через образование, сертификацию и обмен практиками по стандартам IPMA ICB4.</a:t>
             </a:r>
           </a:p>
         </p:txBody>
@@ -5525,8 +5523,8 @@
         </p:nvSpPr>
         <p:spPr>
           <a:xfrm>
-            <a:off x="548640" y="640080"/>
-            <a:ext cx="10241280" cy="548640"/>
+            <a:off x="502920" y="6446520"/>
+            <a:ext cx="8229600" cy="274320"/>
           </a:xfrm>
           <a:prstGeom prst="rect">
             <a:avLst/>
@@ -5541,13 +5539,13 @@
           <a:p>
             <a:pPr algn="l"/>
             <a:r>
-              <a:rPr sz="2800" b="1">
-                <a:solidFill>
-                  <a:srgbClr val="FFFFFF"/>
-                </a:solidFill>
-                <a:latin typeface="Georgia"/>
-              </a:rPr>
-              <a:t>Наша миссия</a:t>
+              <a:rPr sz="1100" b="0">
+                <a:solidFill>
+                  <a:srgbClr val="8FA6B8"/>
+                </a:solidFill>
+                <a:latin typeface="Calibri"/>
+              </a:rPr>
+              <a:t>IPMA Kyrgyz Republic  ·  ipma.kg</a:t>
             </a:r>
           </a:p>
         </p:txBody>
@@ -5560,551 +5558,29 @@
         </p:nvSpPr>
         <p:spPr>
           <a:xfrm>
-            <a:off x="548640" y="1463040"/>
-            <a:ext cx="10972800" cy="1371600"/>
-          </a:xfrm>
-          <a:prstGeom prst="rect">
-            <a:avLst/>
-          </a:prstGeom>
-          <a:noFill/>
-        </p:spPr>
-        <p:txBody>
-          <a:bodyPr wrap="square">
-            <a:spAutoFit/>
-          </a:bodyPr>
-          <a:lstStyle/>
-          <a:p>
-            <a:pPr algn="l"/>
-            <a:r>
-              <a:rPr sz="1800" b="0">
-                <a:solidFill>
-                  <a:srgbClr val="FFD54F"/>
-                </a:solidFill>
-                <a:latin typeface="Georgia"/>
-              </a:rPr>
-              <a:t>Создавать экосистему компетентных проектных лидеров и повышать зрелость управления проектами через образование, сертификацию и обмен практиками по стандартам IPMA ICB4.</a:t>
-            </a:r>
-          </a:p>
-        </p:txBody>
-      </p:sp>
-      <p:sp>
-        <p:nvSpPr>
-          <p:cNvPr id="8" name="Rounded Rectangle 7"/>
-          <p:cNvSpPr/>
-          <p:nvPr/>
-        </p:nvSpPr>
-        <p:spPr>
-          <a:xfrm>
-            <a:off x="548640" y="3108960"/>
-            <a:ext cx="5486400" cy="1188720"/>
-          </a:xfrm>
-          <a:prstGeom prst="roundRect">
-            <a:avLst/>
-          </a:prstGeom>
-          <a:solidFill>
-            <a:srgbClr val="7A0C1E"/>
-          </a:solidFill>
-          <a:ln>
-            <a:noFill/>
-          </a:ln>
-        </p:spPr>
-        <p:style>
-          <a:lnRef idx="1">
-            <a:schemeClr val="accent1"/>
-          </a:lnRef>
-          <a:fillRef idx="3">
-            <a:schemeClr val="accent1"/>
-          </a:fillRef>
-          <a:effectRef idx="2">
-            <a:schemeClr val="accent1"/>
-          </a:effectRef>
-          <a:fontRef idx="minor">
-            <a:schemeClr val="lt1"/>
-          </a:fontRef>
-        </p:style>
-        <p:txBody>
-          <a:bodyPr rtlCol="0" anchor="ctr"/>
-          <a:lstStyle/>
-          <a:p>
-            <a:pPr algn="ctr"/>
-          </a:p>
-        </p:txBody>
-      </p:sp>
-      <p:sp>
-        <p:nvSpPr>
-          <p:cNvPr id="9" name="TextBox 8"/>
-          <p:cNvSpPr txBox="1"/>
-          <p:nvPr/>
-        </p:nvSpPr>
-        <p:spPr>
-          <a:xfrm>
-            <a:off x="822960" y="3337560"/>
-            <a:ext cx="4937760" cy="320040"/>
-          </a:xfrm>
-          <a:prstGeom prst="rect">
-            <a:avLst/>
-          </a:prstGeom>
-          <a:noFill/>
-        </p:spPr>
-        <p:txBody>
-          <a:bodyPr wrap="square">
-            <a:spAutoFit/>
-          </a:bodyPr>
-          <a:lstStyle/>
-          <a:p>
-            <a:pPr algn="l"/>
-            <a:r>
-              <a:rPr sz="1600" b="1">
-                <a:solidFill>
-                  <a:srgbClr val="FFD54F"/>
-                </a:solidFill>
-                <a:latin typeface="Calibri"/>
-              </a:rPr>
-              <a:t>Честность</a:t>
-            </a:r>
-          </a:p>
-        </p:txBody>
-      </p:sp>
-      <p:sp>
-        <p:nvSpPr>
-          <p:cNvPr id="10" name="TextBox 9"/>
-          <p:cNvSpPr txBox="1"/>
-          <p:nvPr/>
-        </p:nvSpPr>
-        <p:spPr>
-          <a:xfrm>
-            <a:off x="822960" y="3749040"/>
-            <a:ext cx="4937760" cy="365760"/>
-          </a:xfrm>
-          <a:prstGeom prst="rect">
-            <a:avLst/>
-          </a:prstGeom>
-          <a:noFill/>
-        </p:spPr>
-        <p:txBody>
-          <a:bodyPr wrap="square">
-            <a:spAutoFit/>
-          </a:bodyPr>
-          <a:lstStyle/>
-          <a:p>
-            <a:pPr algn="l"/>
-            <a:r>
-              <a:rPr sz="1400" b="0">
-                <a:solidFill>
-                  <a:srgbClr val="FFFFFF"/>
-                </a:solidFill>
-                <a:latin typeface="Calibri"/>
-              </a:rPr>
-              <a:t>Прозрачность и этика</a:t>
-            </a:r>
-          </a:p>
-        </p:txBody>
-      </p:sp>
-      <p:sp>
-        <p:nvSpPr>
-          <p:cNvPr id="11" name="Rounded Rectangle 10"/>
-          <p:cNvSpPr/>
-          <p:nvPr/>
-        </p:nvSpPr>
-        <p:spPr>
-          <a:xfrm>
-            <a:off x="6309359" y="3108960"/>
-            <a:ext cx="5486400" cy="1188720"/>
-          </a:xfrm>
-          <a:prstGeom prst="roundRect">
-            <a:avLst/>
-          </a:prstGeom>
-          <a:solidFill>
-            <a:srgbClr val="7A0C1E"/>
-          </a:solidFill>
-          <a:ln>
-            <a:noFill/>
-          </a:ln>
-        </p:spPr>
-        <p:style>
-          <a:lnRef idx="1">
-            <a:schemeClr val="accent1"/>
-          </a:lnRef>
-          <a:fillRef idx="3">
-            <a:schemeClr val="accent1"/>
-          </a:fillRef>
-          <a:effectRef idx="2">
-            <a:schemeClr val="accent1"/>
-          </a:effectRef>
-          <a:fontRef idx="minor">
-            <a:schemeClr val="lt1"/>
-          </a:fontRef>
-        </p:style>
-        <p:txBody>
-          <a:bodyPr rtlCol="0" anchor="ctr"/>
-          <a:lstStyle/>
-          <a:p>
-            <a:pPr algn="ctr"/>
-          </a:p>
-        </p:txBody>
-      </p:sp>
-      <p:sp>
-        <p:nvSpPr>
-          <p:cNvPr id="12" name="TextBox 11"/>
-          <p:cNvSpPr txBox="1"/>
-          <p:nvPr/>
-        </p:nvSpPr>
-        <p:spPr>
-          <a:xfrm>
-            <a:off x="6583679" y="3337560"/>
-            <a:ext cx="4937760" cy="320040"/>
-          </a:xfrm>
-          <a:prstGeom prst="rect">
-            <a:avLst/>
-          </a:prstGeom>
-          <a:noFill/>
-        </p:spPr>
-        <p:txBody>
-          <a:bodyPr wrap="square">
-            <a:spAutoFit/>
-          </a:bodyPr>
-          <a:lstStyle/>
-          <a:p>
-            <a:pPr algn="l"/>
-            <a:r>
-              <a:rPr sz="1600" b="1">
-                <a:solidFill>
-                  <a:srgbClr val="FFD54F"/>
-                </a:solidFill>
-                <a:latin typeface="Calibri"/>
-              </a:rPr>
-              <a:t>Ответственность</a:t>
-            </a:r>
-          </a:p>
-        </p:txBody>
-      </p:sp>
-      <p:sp>
-        <p:nvSpPr>
-          <p:cNvPr id="13" name="TextBox 12"/>
-          <p:cNvSpPr txBox="1"/>
-          <p:nvPr/>
-        </p:nvSpPr>
-        <p:spPr>
-          <a:xfrm>
-            <a:off x="6583679" y="3749040"/>
-            <a:ext cx="4937760" cy="365760"/>
-          </a:xfrm>
-          <a:prstGeom prst="rect">
-            <a:avLst/>
-          </a:prstGeom>
-          <a:noFill/>
-        </p:spPr>
-        <p:txBody>
-          <a:bodyPr wrap="square">
-            <a:spAutoFit/>
-          </a:bodyPr>
-          <a:lstStyle/>
-          <a:p>
-            <a:pPr algn="l"/>
-            <a:r>
-              <a:rPr sz="1400" b="0">
-                <a:solidFill>
-                  <a:srgbClr val="FFFFFF"/>
-                </a:solidFill>
-                <a:latin typeface="Calibri"/>
-              </a:rPr>
-              <a:t>Профессионализм мирового уровня</a:t>
-            </a:r>
-          </a:p>
-        </p:txBody>
-      </p:sp>
-      <p:sp>
-        <p:nvSpPr>
-          <p:cNvPr id="14" name="Rounded Rectangle 13"/>
-          <p:cNvSpPr/>
-          <p:nvPr/>
-        </p:nvSpPr>
-        <p:spPr>
-          <a:xfrm>
-            <a:off x="548640" y="4480560"/>
-            <a:ext cx="5486400" cy="1188720"/>
-          </a:xfrm>
-          <a:prstGeom prst="roundRect">
-            <a:avLst/>
-          </a:prstGeom>
-          <a:solidFill>
-            <a:srgbClr val="7A0C1E"/>
-          </a:solidFill>
-          <a:ln>
-            <a:noFill/>
-          </a:ln>
-        </p:spPr>
-        <p:style>
-          <a:lnRef idx="1">
-            <a:schemeClr val="accent1"/>
-          </a:lnRef>
-          <a:fillRef idx="3">
-            <a:schemeClr val="accent1"/>
-          </a:fillRef>
-          <a:effectRef idx="2">
-            <a:schemeClr val="accent1"/>
-          </a:effectRef>
-          <a:fontRef idx="minor">
-            <a:schemeClr val="lt1"/>
-          </a:fontRef>
-        </p:style>
-        <p:txBody>
-          <a:bodyPr rtlCol="0" anchor="ctr"/>
-          <a:lstStyle/>
-          <a:p>
-            <a:pPr algn="ctr"/>
-          </a:p>
-        </p:txBody>
-      </p:sp>
-      <p:sp>
-        <p:nvSpPr>
-          <p:cNvPr id="15" name="TextBox 14"/>
-          <p:cNvSpPr txBox="1"/>
-          <p:nvPr/>
-        </p:nvSpPr>
-        <p:spPr>
-          <a:xfrm>
-            <a:off x="822960" y="4709160"/>
-            <a:ext cx="4937760" cy="320040"/>
-          </a:xfrm>
-          <a:prstGeom prst="rect">
-            <a:avLst/>
-          </a:prstGeom>
-          <a:noFill/>
-        </p:spPr>
-        <p:txBody>
-          <a:bodyPr wrap="square">
-            <a:spAutoFit/>
-          </a:bodyPr>
-          <a:lstStyle/>
-          <a:p>
-            <a:pPr algn="l"/>
-            <a:r>
-              <a:rPr sz="1600" b="1">
-                <a:solidFill>
-                  <a:srgbClr val="FFD54F"/>
-                </a:solidFill>
-                <a:latin typeface="Calibri"/>
-              </a:rPr>
-              <a:t>Уважение и доверие</a:t>
-            </a:r>
-          </a:p>
-        </p:txBody>
-      </p:sp>
-      <p:sp>
-        <p:nvSpPr>
-          <p:cNvPr id="16" name="TextBox 15"/>
-          <p:cNvSpPr txBox="1"/>
-          <p:nvPr/>
-        </p:nvSpPr>
-        <p:spPr>
-          <a:xfrm>
-            <a:off x="822960" y="5120640"/>
-            <a:ext cx="4937760" cy="365760"/>
-          </a:xfrm>
-          <a:prstGeom prst="rect">
-            <a:avLst/>
-          </a:prstGeom>
-          <a:noFill/>
-        </p:spPr>
-        <p:txBody>
-          <a:bodyPr wrap="square">
-            <a:spAutoFit/>
-          </a:bodyPr>
-          <a:lstStyle/>
-          <a:p>
-            <a:pPr algn="l"/>
-            <a:r>
-              <a:rPr sz="1400" b="0">
-                <a:solidFill>
-                  <a:srgbClr val="FFFFFF"/>
-                </a:solidFill>
-                <a:latin typeface="Calibri"/>
-              </a:rPr>
-              <a:t>Независимость оценки</a:t>
-            </a:r>
-          </a:p>
-        </p:txBody>
-      </p:sp>
-      <p:sp>
-        <p:nvSpPr>
-          <p:cNvPr id="17" name="Rounded Rectangle 16"/>
-          <p:cNvSpPr/>
-          <p:nvPr/>
-        </p:nvSpPr>
-        <p:spPr>
-          <a:xfrm>
-            <a:off x="6309359" y="4480560"/>
-            <a:ext cx="5486400" cy="1188720"/>
-          </a:xfrm>
-          <a:prstGeom prst="roundRect">
-            <a:avLst/>
-          </a:prstGeom>
-          <a:solidFill>
-            <a:srgbClr val="7A0C1E"/>
-          </a:solidFill>
-          <a:ln>
-            <a:noFill/>
-          </a:ln>
-        </p:spPr>
-        <p:style>
-          <a:lnRef idx="1">
-            <a:schemeClr val="accent1"/>
-          </a:lnRef>
-          <a:fillRef idx="3">
-            <a:schemeClr val="accent1"/>
-          </a:fillRef>
-          <a:effectRef idx="2">
-            <a:schemeClr val="accent1"/>
-          </a:effectRef>
-          <a:fontRef idx="minor">
-            <a:schemeClr val="lt1"/>
-          </a:fontRef>
-        </p:style>
-        <p:txBody>
-          <a:bodyPr rtlCol="0" anchor="ctr"/>
-          <a:lstStyle/>
-          <a:p>
-            <a:pPr algn="ctr"/>
-          </a:p>
-        </p:txBody>
-      </p:sp>
-      <p:sp>
-        <p:nvSpPr>
-          <p:cNvPr id="18" name="TextBox 17"/>
-          <p:cNvSpPr txBox="1"/>
-          <p:nvPr/>
-        </p:nvSpPr>
-        <p:spPr>
-          <a:xfrm>
-            <a:off x="6583679" y="4709160"/>
-            <a:ext cx="4937760" cy="320040"/>
-          </a:xfrm>
-          <a:prstGeom prst="rect">
-            <a:avLst/>
-          </a:prstGeom>
-          <a:noFill/>
-        </p:spPr>
-        <p:txBody>
-          <a:bodyPr wrap="square">
-            <a:spAutoFit/>
-          </a:bodyPr>
-          <a:lstStyle/>
-          <a:p>
-            <a:pPr algn="l"/>
-            <a:r>
-              <a:rPr sz="1600" b="1">
-                <a:solidFill>
-                  <a:srgbClr val="FFD54F"/>
-                </a:solidFill>
-                <a:latin typeface="Calibri"/>
-              </a:rPr>
-              <a:t>Открытость</a:t>
-            </a:r>
-          </a:p>
-        </p:txBody>
-      </p:sp>
-      <p:sp>
-        <p:nvSpPr>
-          <p:cNvPr id="19" name="TextBox 18"/>
-          <p:cNvSpPr txBox="1"/>
-          <p:nvPr/>
-        </p:nvSpPr>
-        <p:spPr>
-          <a:xfrm>
-            <a:off x="6583679" y="5120640"/>
-            <a:ext cx="4937760" cy="365760"/>
-          </a:xfrm>
-          <a:prstGeom prst="rect">
-            <a:avLst/>
-          </a:prstGeom>
-          <a:noFill/>
-        </p:spPr>
-        <p:txBody>
-          <a:bodyPr wrap="square">
-            <a:spAutoFit/>
-          </a:bodyPr>
-          <a:lstStyle/>
-          <a:p>
-            <a:pPr algn="l"/>
-            <a:r>
-              <a:rPr sz="1400" b="0">
-                <a:solidFill>
-                  <a:srgbClr val="FFFFFF"/>
-                </a:solidFill>
-                <a:latin typeface="Calibri"/>
-              </a:rPr>
-              <a:t>Международные практики на пользу КР</a:t>
-            </a:r>
-          </a:p>
-        </p:txBody>
-      </p:sp>
-      <p:sp>
-        <p:nvSpPr>
-          <p:cNvPr id="20" name="TextBox 19"/>
-          <p:cNvSpPr txBox="1"/>
-          <p:nvPr/>
-        </p:nvSpPr>
-        <p:spPr>
-          <a:xfrm>
-            <a:off x="457200" y="6446520"/>
-            <a:ext cx="8229600" cy="274320"/>
-          </a:xfrm>
-          <a:prstGeom prst="rect">
-            <a:avLst/>
-          </a:prstGeom>
-          <a:noFill/>
-        </p:spPr>
-        <p:txBody>
-          <a:bodyPr wrap="square">
-            <a:spAutoFit/>
-          </a:bodyPr>
-          <a:lstStyle/>
-          <a:p>
-            <a:pPr algn="l"/>
+            <a:off x="10515600" y="6446520"/>
+            <a:ext cx="1280160" cy="274320"/>
+          </a:xfrm>
+          <a:prstGeom prst="rect">
+            <a:avLst/>
+          </a:prstGeom>
+          <a:noFill/>
+        </p:spPr>
+        <p:txBody>
+          <a:bodyPr wrap="square">
+            <a:spAutoFit/>
+          </a:bodyPr>
+          <a:lstStyle/>
+          <a:p>
+            <a:pPr algn="r"/>
             <a:r>
               <a:rPr sz="1100" b="0">
                 <a:solidFill>
-                  <a:srgbClr val="F3DCC9"/>
-                </a:solidFill>
-                <a:latin typeface="Calibri"/>
-              </a:rPr>
-              <a:t>IPMA Kyrgyz Republic · ipma.kg · Ассоциация-заявитель</a:t>
-            </a:r>
-          </a:p>
-        </p:txBody>
-      </p:sp>
-      <p:sp>
-        <p:nvSpPr>
-          <p:cNvPr id="21" name="TextBox 20"/>
-          <p:cNvSpPr txBox="1"/>
-          <p:nvPr/>
-        </p:nvSpPr>
-        <p:spPr>
-          <a:xfrm>
-            <a:off x="10424160" y="6446520"/>
-            <a:ext cx="1371600" cy="274320"/>
-          </a:xfrm>
-          <a:prstGeom prst="rect">
-            <a:avLst/>
-          </a:prstGeom>
-          <a:noFill/>
-        </p:spPr>
-        <p:txBody>
-          <a:bodyPr wrap="square">
-            <a:spAutoFit/>
-          </a:bodyPr>
-          <a:lstStyle/>
-          <a:p>
-            <a:pPr algn="r"/>
-            <a:r>
-              <a:rPr sz="1100" b="0">
-                <a:solidFill>
-                  <a:srgbClr val="F3DCC9"/>
-                </a:solidFill>
-                <a:latin typeface="Calibri"/>
-              </a:rPr>
-              <a:t>3/12</a:t>
+                  <a:srgbClr val="8FA6B8"/>
+                </a:solidFill>
+                <a:latin typeface="Calibri"/>
+              </a:rPr>
+              <a:t>03 / 12</a:t>
             </a:r>
           </a:p>
         </p:txBody>
@@ -6142,7 +5618,7 @@
             <a:avLst/>
           </a:prstGeom>
           <a:solidFill>
-            <a:srgbClr val="5C0A17"/>
+            <a:srgbClr val="EEF2F1"/>
           </a:solidFill>
           <a:ln>
             <a:noFill/>
@@ -6170,52 +5646,9 @@
           </a:p>
         </p:txBody>
       </p:sp>
-      <p:sp>
-        <p:nvSpPr>
-          <p:cNvPr id="3" name="Rectangle 2"/>
-          <p:cNvSpPr/>
-          <p:nvPr/>
-        </p:nvSpPr>
-        <p:spPr>
-          <a:xfrm>
-            <a:off x="0" y="0"/>
-            <a:ext cx="12191695" cy="73152"/>
-          </a:xfrm>
-          <a:prstGeom prst="rect">
-            <a:avLst/>
-          </a:prstGeom>
-          <a:solidFill>
-            <a:srgbClr val="FFD54F"/>
-          </a:solidFill>
-          <a:ln>
-            <a:noFill/>
-          </a:ln>
-        </p:spPr>
-        <p:style>
-          <a:lnRef idx="1">
-            <a:schemeClr val="accent1"/>
-          </a:lnRef>
-          <a:fillRef idx="3">
-            <a:schemeClr val="accent1"/>
-          </a:fillRef>
-          <a:effectRef idx="2">
-            <a:schemeClr val="accent1"/>
-          </a:effectRef>
-          <a:fontRef idx="minor">
-            <a:schemeClr val="lt1"/>
-          </a:fontRef>
-        </p:style>
-        <p:txBody>
-          <a:bodyPr rtlCol="0" anchor="ctr"/>
-          <a:lstStyle/>
-          <a:p>
-            <a:pPr algn="ctr"/>
-          </a:p>
-        </p:txBody>
-      </p:sp>
       <p:pic>
         <p:nvPicPr>
-          <p:cNvPr id="4" name="Picture 3" descr="ipma-kr-emblem.png"/>
+          <p:cNvPr id="3" name="Picture 2" descr="ipma-kr-emblem.png"/>
           <p:cNvPicPr>
             <a:picLocks noChangeAspect="1"/>
           </p:cNvPicPr>
@@ -6229,8 +5662,8 @@
         </p:blipFill>
         <p:spPr>
           <a:xfrm>
-            <a:off x="11292840" y="201168"/>
-            <a:ext cx="661788" cy="658368"/>
+            <a:off x="11292840" y="228600"/>
+            <a:ext cx="597448" cy="594360"/>
           </a:xfrm>
           <a:prstGeom prst="rect">
             <a:avLst/>
@@ -6239,14 +5672,49 @@
       </p:pic>
       <p:sp>
         <p:nvSpPr>
+          <p:cNvPr id="4" name="TextBox 3"/>
+          <p:cNvSpPr txBox="1"/>
+          <p:nvPr/>
+        </p:nvSpPr>
+        <p:spPr>
+          <a:xfrm>
+            <a:off x="548640" y="320040"/>
+            <a:ext cx="10972800" cy="274320"/>
+          </a:xfrm>
+          <a:prstGeom prst="rect">
+            <a:avLst/>
+          </a:prstGeom>
+          <a:noFill/>
+        </p:spPr>
+        <p:txBody>
+          <a:bodyPr wrap="square">
+            <a:spAutoFit/>
+          </a:bodyPr>
+          <a:lstStyle/>
+          <a:p>
+            <a:pPr algn="l"/>
+            <a:r>
+              <a:rPr sz="1100" b="1">
+                <a:solidFill>
+                  <a:srgbClr val="1F7A34"/>
+                </a:solidFill>
+                <a:latin typeface="Calibri"/>
+              </a:rPr>
+              <a:t>04  »  ЦЕННОСТИ</a:t>
+            </a:r>
+          </a:p>
+        </p:txBody>
+      </p:sp>
+      <p:sp>
+        <p:nvSpPr>
           <p:cNvPr id="5" name="TextBox 4"/>
           <p:cNvSpPr txBox="1"/>
           <p:nvPr/>
         </p:nvSpPr>
         <p:spPr>
           <a:xfrm>
-            <a:off x="548640" y="320040"/>
-            <a:ext cx="10058400" cy="274320"/>
+            <a:off x="548640" y="640080"/>
+            <a:ext cx="10515600" cy="548640"/>
           </a:xfrm>
           <a:prstGeom prst="rect">
             <a:avLst/>
@@ -6261,68 +5729,33 @@
           <a:p>
             <a:pPr algn="l"/>
             <a:r>
-              <a:rPr sz="1100" b="1">
-                <a:solidFill>
-                  <a:srgbClr val="FFD54F"/>
-                </a:solidFill>
-                <a:latin typeface="Calibri"/>
-              </a:rPr>
-              <a:t>03 · О КЫРГЫЗСТАНЕ</a:t>
-            </a:r>
-          </a:p>
-        </p:txBody>
-      </p:sp>
-      <p:sp>
-        <p:nvSpPr>
-          <p:cNvPr id="6" name="TextBox 5"/>
-          <p:cNvSpPr txBox="1"/>
-          <p:nvPr/>
-        </p:nvSpPr>
-        <p:spPr>
-          <a:xfrm>
-            <a:off x="548640" y="640080"/>
-            <a:ext cx="10241280" cy="548640"/>
-          </a:xfrm>
-          <a:prstGeom prst="rect">
-            <a:avLst/>
-          </a:prstGeom>
-          <a:noFill/>
-        </p:spPr>
-        <p:txBody>
-          <a:bodyPr wrap="square">
-            <a:spAutoFit/>
-          </a:bodyPr>
-          <a:lstStyle/>
-          <a:p>
-            <a:pPr algn="l"/>
-            <a:r>
               <a:rPr sz="2800" b="1">
                 <a:solidFill>
-                  <a:srgbClr val="FFFFFF"/>
-                </a:solidFill>
-                <a:latin typeface="Georgia"/>
-              </a:rPr>
-              <a:t>Стратегическое положение</a:t>
-            </a:r>
-          </a:p>
-        </p:txBody>
-      </p:sp>
-      <p:sp>
-        <p:nvSpPr>
-          <p:cNvPr id="7" name="Rounded Rectangle 6"/>
+                  <a:srgbClr val="0D223B"/>
+                </a:solidFill>
+                <a:latin typeface="Arial"/>
+              </a:rPr>
+              <a:t>Принципы KgPMU</a:t>
+            </a:r>
+          </a:p>
+        </p:txBody>
+      </p:sp>
+      <p:sp>
+        <p:nvSpPr>
+          <p:cNvPr id="6" name="Rounded Rectangle 5"/>
           <p:cNvSpPr/>
           <p:nvPr/>
         </p:nvSpPr>
         <p:spPr>
           <a:xfrm>
             <a:off x="548640" y="1554480"/>
-            <a:ext cx="2743200" cy="1463040"/>
+            <a:ext cx="5486400" cy="1828800"/>
           </a:xfrm>
           <a:prstGeom prst="roundRect">
             <a:avLst/>
           </a:prstGeom>
           <a:solidFill>
-            <a:srgbClr val="7A0C1E"/>
+            <a:srgbClr val="FFFFFF"/>
           </a:solidFill>
           <a:ln>
             <a:noFill/>
@@ -6352,90 +5785,90 @@
       </p:sp>
       <p:sp>
         <p:nvSpPr>
+          <p:cNvPr id="7" name="TextBox 6"/>
+          <p:cNvSpPr txBox="1"/>
+          <p:nvPr/>
+        </p:nvSpPr>
+        <p:spPr>
+          <a:xfrm>
+            <a:off x="868680" y="1920240"/>
+            <a:ext cx="4846320" cy="365760"/>
+          </a:xfrm>
+          <a:prstGeom prst="rect">
+            <a:avLst/>
+          </a:prstGeom>
+          <a:noFill/>
+        </p:spPr>
+        <p:txBody>
+          <a:bodyPr wrap="square">
+            <a:spAutoFit/>
+          </a:bodyPr>
+          <a:lstStyle/>
+          <a:p>
+            <a:pPr algn="l"/>
+            <a:r>
+              <a:rPr sz="1800" b="1">
+                <a:solidFill>
+                  <a:srgbClr val="0D223B"/>
+                </a:solidFill>
+                <a:latin typeface="Calibri"/>
+              </a:rPr>
+              <a:t>Честность</a:t>
+            </a:r>
+          </a:p>
+        </p:txBody>
+      </p:sp>
+      <p:sp>
+        <p:nvSpPr>
           <p:cNvPr id="8" name="TextBox 7"/>
           <p:cNvSpPr txBox="1"/>
           <p:nvPr/>
         </p:nvSpPr>
         <p:spPr>
           <a:xfrm>
-            <a:off x="685800" y="1874519"/>
-            <a:ext cx="2468880" cy="502920"/>
-          </a:xfrm>
-          <a:prstGeom prst="rect">
-            <a:avLst/>
-          </a:prstGeom>
-          <a:noFill/>
-        </p:spPr>
-        <p:txBody>
-          <a:bodyPr wrap="square">
-            <a:spAutoFit/>
-          </a:bodyPr>
-          <a:lstStyle/>
-          <a:p>
-            <a:pPr algn="ctr"/>
-            <a:r>
-              <a:rPr sz="1600" b="1">
-                <a:solidFill>
-                  <a:srgbClr val="FFD54F"/>
-                </a:solidFill>
-                <a:latin typeface="Calibri"/>
-              </a:rPr>
-              <a:t>≈200 000 км²</a:t>
-            </a:r>
-          </a:p>
-        </p:txBody>
-      </p:sp>
-      <p:sp>
-        <p:nvSpPr>
-          <p:cNvPr id="9" name="TextBox 8"/>
-          <p:cNvSpPr txBox="1"/>
-          <p:nvPr/>
-        </p:nvSpPr>
-        <p:spPr>
-          <a:xfrm>
-            <a:off x="685800" y="2468880"/>
-            <a:ext cx="2468880" cy="365760"/>
-          </a:xfrm>
-          <a:prstGeom prst="rect">
-            <a:avLst/>
-          </a:prstGeom>
-          <a:noFill/>
-        </p:spPr>
-        <p:txBody>
-          <a:bodyPr wrap="square">
-            <a:spAutoFit/>
-          </a:bodyPr>
-          <a:lstStyle/>
-          <a:p>
-            <a:pPr algn="ctr"/>
-            <a:r>
-              <a:rPr sz="1200" b="0">
-                <a:solidFill>
-                  <a:srgbClr val="F3DCC9"/>
-                </a:solidFill>
-                <a:latin typeface="Calibri"/>
-              </a:rPr>
-              <a:t>Площадь</a:t>
-            </a:r>
-          </a:p>
-        </p:txBody>
-      </p:sp>
-      <p:sp>
-        <p:nvSpPr>
-          <p:cNvPr id="10" name="Rounded Rectangle 9"/>
+            <a:off x="868680" y="2468880"/>
+            <a:ext cx="4846320" cy="457200"/>
+          </a:xfrm>
+          <a:prstGeom prst="rect">
+            <a:avLst/>
+          </a:prstGeom>
+          <a:noFill/>
+        </p:spPr>
+        <p:txBody>
+          <a:bodyPr wrap="square">
+            <a:spAutoFit/>
+          </a:bodyPr>
+          <a:lstStyle/>
+          <a:p>
+            <a:pPr algn="l"/>
+            <a:r>
+              <a:rPr sz="1400" b="0">
+                <a:solidFill>
+                  <a:srgbClr val="28394A"/>
+                </a:solidFill>
+                <a:latin typeface="Calibri"/>
+              </a:rPr>
+              <a:t>Прозрачность и этика</a:t>
+            </a:r>
+          </a:p>
+        </p:txBody>
+      </p:sp>
+      <p:sp>
+        <p:nvSpPr>
+          <p:cNvPr id="9" name="Rounded Rectangle 8"/>
           <p:cNvSpPr/>
           <p:nvPr/>
         </p:nvSpPr>
         <p:spPr>
           <a:xfrm>
-            <a:off x="3429000" y="1554480"/>
-            <a:ext cx="2743200" cy="1463040"/>
+            <a:off x="6309359" y="1554480"/>
+            <a:ext cx="5486400" cy="1828800"/>
           </a:xfrm>
           <a:prstGeom prst="roundRect">
             <a:avLst/>
           </a:prstGeom>
           <a:solidFill>
-            <a:srgbClr val="7A0C1E"/>
+            <a:srgbClr val="FFFFFF"/>
           </a:solidFill>
           <a:ln>
             <a:noFill/>
@@ -6465,90 +5898,90 @@
       </p:sp>
       <p:sp>
         <p:nvSpPr>
+          <p:cNvPr id="10" name="TextBox 9"/>
+          <p:cNvSpPr txBox="1"/>
+          <p:nvPr/>
+        </p:nvSpPr>
+        <p:spPr>
+          <a:xfrm>
+            <a:off x="6629399" y="1920240"/>
+            <a:ext cx="4846320" cy="365760"/>
+          </a:xfrm>
+          <a:prstGeom prst="rect">
+            <a:avLst/>
+          </a:prstGeom>
+          <a:noFill/>
+        </p:spPr>
+        <p:txBody>
+          <a:bodyPr wrap="square">
+            <a:spAutoFit/>
+          </a:bodyPr>
+          <a:lstStyle/>
+          <a:p>
+            <a:pPr algn="l"/>
+            <a:r>
+              <a:rPr sz="1800" b="1">
+                <a:solidFill>
+                  <a:srgbClr val="0D223B"/>
+                </a:solidFill>
+                <a:latin typeface="Calibri"/>
+              </a:rPr>
+              <a:t>Ответственность</a:t>
+            </a:r>
+          </a:p>
+        </p:txBody>
+      </p:sp>
+      <p:sp>
+        <p:nvSpPr>
           <p:cNvPr id="11" name="TextBox 10"/>
           <p:cNvSpPr txBox="1"/>
           <p:nvPr/>
         </p:nvSpPr>
         <p:spPr>
           <a:xfrm>
-            <a:off x="3566160" y="1874519"/>
-            <a:ext cx="2468880" cy="502920"/>
-          </a:xfrm>
-          <a:prstGeom prst="rect">
-            <a:avLst/>
-          </a:prstGeom>
-          <a:noFill/>
-        </p:spPr>
-        <p:txBody>
-          <a:bodyPr wrap="square">
-            <a:spAutoFit/>
-          </a:bodyPr>
-          <a:lstStyle/>
-          <a:p>
-            <a:pPr algn="ctr"/>
-            <a:r>
-              <a:rPr sz="1600" b="1">
-                <a:solidFill>
-                  <a:srgbClr val="FFD54F"/>
-                </a:solidFill>
-                <a:latin typeface="Calibri"/>
-              </a:rPr>
-              <a:t>≈7,4 млн</a:t>
-            </a:r>
-          </a:p>
-        </p:txBody>
-      </p:sp>
-      <p:sp>
-        <p:nvSpPr>
-          <p:cNvPr id="12" name="TextBox 11"/>
-          <p:cNvSpPr txBox="1"/>
-          <p:nvPr/>
-        </p:nvSpPr>
-        <p:spPr>
-          <a:xfrm>
-            <a:off x="3566160" y="2468880"/>
-            <a:ext cx="2468880" cy="365760"/>
-          </a:xfrm>
-          <a:prstGeom prst="rect">
-            <a:avLst/>
-          </a:prstGeom>
-          <a:noFill/>
-        </p:spPr>
-        <p:txBody>
-          <a:bodyPr wrap="square">
-            <a:spAutoFit/>
-          </a:bodyPr>
-          <a:lstStyle/>
-          <a:p>
-            <a:pPr algn="ctr"/>
-            <a:r>
-              <a:rPr sz="1200" b="0">
-                <a:solidFill>
-                  <a:srgbClr val="F3DCC9"/>
-                </a:solidFill>
-                <a:latin typeface="Calibri"/>
-              </a:rPr>
-              <a:t>Население</a:t>
-            </a:r>
-          </a:p>
-        </p:txBody>
-      </p:sp>
-      <p:sp>
-        <p:nvSpPr>
-          <p:cNvPr id="13" name="Rounded Rectangle 12"/>
+            <a:off x="6629399" y="2468880"/>
+            <a:ext cx="4846320" cy="457200"/>
+          </a:xfrm>
+          <a:prstGeom prst="rect">
+            <a:avLst/>
+          </a:prstGeom>
+          <a:noFill/>
+        </p:spPr>
+        <p:txBody>
+          <a:bodyPr wrap="square">
+            <a:spAutoFit/>
+          </a:bodyPr>
+          <a:lstStyle/>
+          <a:p>
+            <a:pPr algn="l"/>
+            <a:r>
+              <a:rPr sz="1400" b="0">
+                <a:solidFill>
+                  <a:srgbClr val="28394A"/>
+                </a:solidFill>
+                <a:latin typeface="Calibri"/>
+              </a:rPr>
+              <a:t>Профессионализм мирового уровня</a:t>
+            </a:r>
+          </a:p>
+        </p:txBody>
+      </p:sp>
+      <p:sp>
+        <p:nvSpPr>
+          <p:cNvPr id="12" name="Rounded Rectangle 11"/>
           <p:cNvSpPr/>
           <p:nvPr/>
         </p:nvSpPr>
         <p:spPr>
           <a:xfrm>
-            <a:off x="6309359" y="1554480"/>
-            <a:ext cx="2743200" cy="1463040"/>
+            <a:off x="548640" y="3657600"/>
+            <a:ext cx="5486400" cy="1828800"/>
           </a:xfrm>
           <a:prstGeom prst="roundRect">
             <a:avLst/>
           </a:prstGeom>
           <a:solidFill>
-            <a:srgbClr val="7A0C1E"/>
+            <a:srgbClr val="FFFFFF"/>
           </a:solidFill>
           <a:ln>
             <a:noFill/>
@@ -6578,90 +6011,90 @@
       </p:sp>
       <p:sp>
         <p:nvSpPr>
+          <p:cNvPr id="13" name="TextBox 12"/>
+          <p:cNvSpPr txBox="1"/>
+          <p:nvPr/>
+        </p:nvSpPr>
+        <p:spPr>
+          <a:xfrm>
+            <a:off x="868680" y="4023360"/>
+            <a:ext cx="4846320" cy="365760"/>
+          </a:xfrm>
+          <a:prstGeom prst="rect">
+            <a:avLst/>
+          </a:prstGeom>
+          <a:noFill/>
+        </p:spPr>
+        <p:txBody>
+          <a:bodyPr wrap="square">
+            <a:spAutoFit/>
+          </a:bodyPr>
+          <a:lstStyle/>
+          <a:p>
+            <a:pPr algn="l"/>
+            <a:r>
+              <a:rPr sz="1800" b="1">
+                <a:solidFill>
+                  <a:srgbClr val="0D223B"/>
+                </a:solidFill>
+                <a:latin typeface="Calibri"/>
+              </a:rPr>
+              <a:t>Уважение и доверие</a:t>
+            </a:r>
+          </a:p>
+        </p:txBody>
+      </p:sp>
+      <p:sp>
+        <p:nvSpPr>
           <p:cNvPr id="14" name="TextBox 13"/>
           <p:cNvSpPr txBox="1"/>
           <p:nvPr/>
         </p:nvSpPr>
         <p:spPr>
           <a:xfrm>
-            <a:off x="6446519" y="1874519"/>
-            <a:ext cx="2468880" cy="502920"/>
-          </a:xfrm>
-          <a:prstGeom prst="rect">
-            <a:avLst/>
-          </a:prstGeom>
-          <a:noFill/>
-        </p:spPr>
-        <p:txBody>
-          <a:bodyPr wrap="square">
-            <a:spAutoFit/>
-          </a:bodyPr>
-          <a:lstStyle/>
-          <a:p>
-            <a:pPr algn="ctr"/>
-            <a:r>
-              <a:rPr sz="1600" b="1">
-                <a:solidFill>
-                  <a:srgbClr val="FFD54F"/>
-                </a:solidFill>
-                <a:latin typeface="Calibri"/>
-              </a:rPr>
-              <a:t>Бишкек</a:t>
-            </a:r>
-          </a:p>
-        </p:txBody>
-      </p:sp>
-      <p:sp>
-        <p:nvSpPr>
-          <p:cNvPr id="15" name="TextBox 14"/>
-          <p:cNvSpPr txBox="1"/>
-          <p:nvPr/>
-        </p:nvSpPr>
-        <p:spPr>
-          <a:xfrm>
-            <a:off x="6446519" y="2468880"/>
-            <a:ext cx="2468880" cy="365760"/>
-          </a:xfrm>
-          <a:prstGeom prst="rect">
-            <a:avLst/>
-          </a:prstGeom>
-          <a:noFill/>
-        </p:spPr>
-        <p:txBody>
-          <a:bodyPr wrap="square">
-            <a:spAutoFit/>
-          </a:bodyPr>
-          <a:lstStyle/>
-          <a:p>
-            <a:pPr algn="ctr"/>
-            <a:r>
-              <a:rPr sz="1200" b="0">
-                <a:solidFill>
-                  <a:srgbClr val="F3DCC9"/>
-                </a:solidFill>
-                <a:latin typeface="Calibri"/>
-              </a:rPr>
-              <a:t>Штаб-квартира KgPMU</a:t>
-            </a:r>
-          </a:p>
-        </p:txBody>
-      </p:sp>
-      <p:sp>
-        <p:nvSpPr>
-          <p:cNvPr id="16" name="Rounded Rectangle 15"/>
+            <a:off x="868680" y="4572000"/>
+            <a:ext cx="4846320" cy="457200"/>
+          </a:xfrm>
+          <a:prstGeom prst="rect">
+            <a:avLst/>
+          </a:prstGeom>
+          <a:noFill/>
+        </p:spPr>
+        <p:txBody>
+          <a:bodyPr wrap="square">
+            <a:spAutoFit/>
+          </a:bodyPr>
+          <a:lstStyle/>
+          <a:p>
+            <a:pPr algn="l"/>
+            <a:r>
+              <a:rPr sz="1400" b="0">
+                <a:solidFill>
+                  <a:srgbClr val="28394A"/>
+                </a:solidFill>
+                <a:latin typeface="Calibri"/>
+              </a:rPr>
+              <a:t>Независимость оценки</a:t>
+            </a:r>
+          </a:p>
+        </p:txBody>
+      </p:sp>
+      <p:sp>
+        <p:nvSpPr>
+          <p:cNvPr id="15" name="Rounded Rectangle 14"/>
           <p:cNvSpPr/>
           <p:nvPr/>
         </p:nvSpPr>
         <p:spPr>
           <a:xfrm>
-            <a:off x="9189719" y="1554480"/>
-            <a:ext cx="2743200" cy="1463040"/>
+            <a:off x="6309359" y="3657600"/>
+            <a:ext cx="5486400" cy="1828800"/>
           </a:xfrm>
           <a:prstGeom prst="roundRect">
             <a:avLst/>
           </a:prstGeom>
           <a:solidFill>
-            <a:srgbClr val="7A0C1E"/>
+            <a:srgbClr val="FFFFFF"/>
           </a:solidFill>
           <a:ln>
             <a:noFill/>
@@ -6691,35 +6124,70 @@
       </p:sp>
       <p:sp>
         <p:nvSpPr>
+          <p:cNvPr id="16" name="TextBox 15"/>
+          <p:cNvSpPr txBox="1"/>
+          <p:nvPr/>
+        </p:nvSpPr>
+        <p:spPr>
+          <a:xfrm>
+            <a:off x="6629399" y="4023360"/>
+            <a:ext cx="4846320" cy="365760"/>
+          </a:xfrm>
+          <a:prstGeom prst="rect">
+            <a:avLst/>
+          </a:prstGeom>
+          <a:noFill/>
+        </p:spPr>
+        <p:txBody>
+          <a:bodyPr wrap="square">
+            <a:spAutoFit/>
+          </a:bodyPr>
+          <a:lstStyle/>
+          <a:p>
+            <a:pPr algn="l"/>
+            <a:r>
+              <a:rPr sz="1800" b="1">
+                <a:solidFill>
+                  <a:srgbClr val="0D223B"/>
+                </a:solidFill>
+                <a:latin typeface="Calibri"/>
+              </a:rPr>
+              <a:t>Открытость</a:t>
+            </a:r>
+          </a:p>
+        </p:txBody>
+      </p:sp>
+      <p:sp>
+        <p:nvSpPr>
           <p:cNvPr id="17" name="TextBox 16"/>
           <p:cNvSpPr txBox="1"/>
           <p:nvPr/>
         </p:nvSpPr>
         <p:spPr>
           <a:xfrm>
-            <a:off x="9326879" y="1874519"/>
-            <a:ext cx="2468880" cy="502920"/>
-          </a:xfrm>
-          <a:prstGeom prst="rect">
-            <a:avLst/>
-          </a:prstGeom>
-          <a:noFill/>
-        </p:spPr>
-        <p:txBody>
-          <a:bodyPr wrap="square">
-            <a:spAutoFit/>
-          </a:bodyPr>
-          <a:lstStyle/>
-          <a:p>
-            <a:pPr algn="ctr"/>
-            <a:r>
-              <a:rPr sz="1600" b="1">
-                <a:solidFill>
-                  <a:srgbClr val="FFD54F"/>
-                </a:solidFill>
-                <a:latin typeface="Calibri"/>
-              </a:rPr>
-              <a:t>ЕАЭС</a:t>
+            <a:off x="6629399" y="4572000"/>
+            <a:ext cx="4846320" cy="457200"/>
+          </a:xfrm>
+          <a:prstGeom prst="rect">
+            <a:avLst/>
+          </a:prstGeom>
+          <a:noFill/>
+        </p:spPr>
+        <p:txBody>
+          <a:bodyPr wrap="square">
+            <a:spAutoFit/>
+          </a:bodyPr>
+          <a:lstStyle/>
+          <a:p>
+            <a:pPr algn="l"/>
+            <a:r>
+              <a:rPr sz="1400" b="0">
+                <a:solidFill>
+                  <a:srgbClr val="28394A"/>
+                </a:solidFill>
+                <a:latin typeface="Calibri"/>
+              </a:rPr>
+              <a:t>Международные практики на пользу КР</a:t>
             </a:r>
           </a:p>
         </p:txBody>
@@ -6732,29 +6200,29 @@
         </p:nvSpPr>
         <p:spPr>
           <a:xfrm>
-            <a:off x="9326879" y="2468880"/>
-            <a:ext cx="2468880" cy="365760"/>
-          </a:xfrm>
-          <a:prstGeom prst="rect">
-            <a:avLst/>
-          </a:prstGeom>
-          <a:noFill/>
-        </p:spPr>
-        <p:txBody>
-          <a:bodyPr wrap="square">
-            <a:spAutoFit/>
-          </a:bodyPr>
-          <a:lstStyle/>
-          <a:p>
-            <a:pPr algn="ctr"/>
-            <a:r>
-              <a:rPr sz="1200" b="0">
-                <a:solidFill>
-                  <a:srgbClr val="F3DCC9"/>
-                </a:solidFill>
-                <a:latin typeface="Calibri"/>
-              </a:rPr>
-              <a:t>Единое экон. пространство</a:t>
+            <a:off x="502920" y="6446520"/>
+            <a:ext cx="8229600" cy="274320"/>
+          </a:xfrm>
+          <a:prstGeom prst="rect">
+            <a:avLst/>
+          </a:prstGeom>
+          <a:noFill/>
+        </p:spPr>
+        <p:txBody>
+          <a:bodyPr wrap="square">
+            <a:spAutoFit/>
+          </a:bodyPr>
+          <a:lstStyle/>
+          <a:p>
+            <a:pPr algn="l"/>
+            <a:r>
+              <a:rPr sz="1100" b="0">
+                <a:solidFill>
+                  <a:srgbClr val="5C6B72"/>
+                </a:solidFill>
+                <a:latin typeface="Calibri"/>
+              </a:rPr>
+              <a:t>IPMA Kyrgyz Republic  ·  ipma.kg</a:t>
             </a:r>
           </a:p>
         </p:txBody>
@@ -6767,135 +6235,29 @@
         </p:nvSpPr>
         <p:spPr>
           <a:xfrm>
-            <a:off x="548640" y="3383280"/>
-            <a:ext cx="10972800" cy="2286000"/>
-          </a:xfrm>
-          <a:prstGeom prst="rect">
-            <a:avLst/>
-          </a:prstGeom>
-          <a:noFill/>
-        </p:spPr>
-        <p:txBody>
-          <a:bodyPr wrap="square">
-            <a:spAutoFit/>
-          </a:bodyPr>
-          <a:lstStyle/>
-          <a:p>
-            <a:pPr>
-              <a:spcAft>
-                <a:spcPts val="1200"/>
-              </a:spcAft>
-            </a:pPr>
-            <a:r>
-              <a:rPr sz="1500" b="0">
-                <a:solidFill>
-                  <a:srgbClr val="FFFFFF"/>
-                </a:solidFill>
-                <a:latin typeface="Calibri"/>
-              </a:rPr>
-              <a:t>• Центральная Азия — пересечение маршрутов ЕАЭС и Большого Шёлкового пути</a:t>
-            </a:r>
-          </a:p>
-          <a:p>
-            <a:pPr>
-              <a:spcAft>
-                <a:spcPts val="1200"/>
-              </a:spcAft>
-            </a:pPr>
-            <a:r>
-              <a:rPr sz="1500" b="0">
-                <a:solidFill>
-                  <a:srgbClr val="FFFFFF"/>
-                </a:solidFill>
-                <a:latin typeface="Calibri"/>
-              </a:rPr>
-              <a:t>• Соседи: Казахстан, Узбекистан, Таджикистан, Китай</a:t>
-            </a:r>
-          </a:p>
-          <a:p>
-            <a:pPr>
-              <a:spcAft>
-                <a:spcPts val="1200"/>
-              </a:spcAft>
-            </a:pPr>
-            <a:r>
-              <a:rPr sz="1500" b="0">
-                <a:solidFill>
-                  <a:srgbClr val="FFFFFF"/>
-                </a:solidFill>
-                <a:latin typeface="Calibri"/>
-              </a:rPr>
-              <a:t>• Цифровизация госуправления создаёт устойчивый спрос на P3M-компетенции</a:t>
-            </a:r>
-          </a:p>
-        </p:txBody>
-      </p:sp>
-      <p:sp>
-        <p:nvSpPr>
-          <p:cNvPr id="20" name="TextBox 19"/>
-          <p:cNvSpPr txBox="1"/>
-          <p:nvPr/>
-        </p:nvSpPr>
-        <p:spPr>
-          <a:xfrm>
-            <a:off x="457200" y="6446520"/>
-            <a:ext cx="8229600" cy="274320"/>
-          </a:xfrm>
-          <a:prstGeom prst="rect">
-            <a:avLst/>
-          </a:prstGeom>
-          <a:noFill/>
-        </p:spPr>
-        <p:txBody>
-          <a:bodyPr wrap="square">
-            <a:spAutoFit/>
-          </a:bodyPr>
-          <a:lstStyle/>
-          <a:p>
-            <a:pPr algn="l"/>
+            <a:off x="10515600" y="6446520"/>
+            <a:ext cx="1280160" cy="274320"/>
+          </a:xfrm>
+          <a:prstGeom prst="rect">
+            <a:avLst/>
+          </a:prstGeom>
+          <a:noFill/>
+        </p:spPr>
+        <p:txBody>
+          <a:bodyPr wrap="square">
+            <a:spAutoFit/>
+          </a:bodyPr>
+          <a:lstStyle/>
+          <a:p>
+            <a:pPr algn="r"/>
             <a:r>
               <a:rPr sz="1100" b="0">
                 <a:solidFill>
-                  <a:srgbClr val="F3DCC9"/>
-                </a:solidFill>
-                <a:latin typeface="Calibri"/>
-              </a:rPr>
-              <a:t>IPMA Kyrgyz Republic · ipma.kg · Ассоциация-заявитель</a:t>
-            </a:r>
-          </a:p>
-        </p:txBody>
-      </p:sp>
-      <p:sp>
-        <p:nvSpPr>
-          <p:cNvPr id="21" name="TextBox 20"/>
-          <p:cNvSpPr txBox="1"/>
-          <p:nvPr/>
-        </p:nvSpPr>
-        <p:spPr>
-          <a:xfrm>
-            <a:off x="10424160" y="6446520"/>
-            <a:ext cx="1371600" cy="274320"/>
-          </a:xfrm>
-          <a:prstGeom prst="rect">
-            <a:avLst/>
-          </a:prstGeom>
-          <a:noFill/>
-        </p:spPr>
-        <p:txBody>
-          <a:bodyPr wrap="square">
-            <a:spAutoFit/>
-          </a:bodyPr>
-          <a:lstStyle/>
-          <a:p>
-            <a:pPr algn="r"/>
-            <a:r>
-              <a:rPr sz="1100" b="0">
-                <a:solidFill>
-                  <a:srgbClr val="F3DCC9"/>
-                </a:solidFill>
-                <a:latin typeface="Calibri"/>
-              </a:rPr>
-              <a:t>4/12</a:t>
+                  <a:srgbClr val="5C6B72"/>
+                </a:solidFill>
+                <a:latin typeface="Calibri"/>
+              </a:rPr>
+              <a:t>04 / 12</a:t>
             </a:r>
           </a:p>
         </p:txBody>
@@ -6933,7 +6295,7 @@
             <a:avLst/>
           </a:prstGeom>
           <a:solidFill>
-            <a:srgbClr val="5C0A17"/>
+            <a:srgbClr val="EEF2F1"/>
           </a:solidFill>
           <a:ln>
             <a:noFill/>
@@ -6961,52 +6323,9 @@
           </a:p>
         </p:txBody>
       </p:sp>
-      <p:sp>
-        <p:nvSpPr>
-          <p:cNvPr id="3" name="Rectangle 2"/>
-          <p:cNvSpPr/>
-          <p:nvPr/>
-        </p:nvSpPr>
-        <p:spPr>
-          <a:xfrm>
-            <a:off x="0" y="0"/>
-            <a:ext cx="12191695" cy="73152"/>
-          </a:xfrm>
-          <a:prstGeom prst="rect">
-            <a:avLst/>
-          </a:prstGeom>
-          <a:solidFill>
-            <a:srgbClr val="FFD54F"/>
-          </a:solidFill>
-          <a:ln>
-            <a:noFill/>
-          </a:ln>
-        </p:spPr>
-        <p:style>
-          <a:lnRef idx="1">
-            <a:schemeClr val="accent1"/>
-          </a:lnRef>
-          <a:fillRef idx="3">
-            <a:schemeClr val="accent1"/>
-          </a:fillRef>
-          <a:effectRef idx="2">
-            <a:schemeClr val="accent1"/>
-          </a:effectRef>
-          <a:fontRef idx="minor">
-            <a:schemeClr val="lt1"/>
-          </a:fontRef>
-        </p:style>
-        <p:txBody>
-          <a:bodyPr rtlCol="0" anchor="ctr"/>
-          <a:lstStyle/>
-          <a:p>
-            <a:pPr algn="ctr"/>
-          </a:p>
-        </p:txBody>
-      </p:sp>
       <p:pic>
         <p:nvPicPr>
-          <p:cNvPr id="4" name="Picture 3" descr="ipma-kr-emblem.png"/>
+          <p:cNvPr id="3" name="Picture 2" descr="ipma-kr-emblem.png"/>
           <p:cNvPicPr>
             <a:picLocks noChangeAspect="1"/>
           </p:cNvPicPr>
@@ -7020,8 +6339,8 @@
         </p:blipFill>
         <p:spPr>
           <a:xfrm>
-            <a:off x="11292840" y="201168"/>
-            <a:ext cx="661788" cy="658368"/>
+            <a:off x="11292840" y="228600"/>
+            <a:ext cx="597448" cy="594360"/>
           </a:xfrm>
           <a:prstGeom prst="rect">
             <a:avLst/>
@@ -7030,14 +6349,49 @@
       </p:pic>
       <p:sp>
         <p:nvSpPr>
+          <p:cNvPr id="4" name="TextBox 3"/>
+          <p:cNvSpPr txBox="1"/>
+          <p:nvPr/>
+        </p:nvSpPr>
+        <p:spPr>
+          <a:xfrm>
+            <a:off x="548640" y="320040"/>
+            <a:ext cx="10972800" cy="274320"/>
+          </a:xfrm>
+          <a:prstGeom prst="rect">
+            <a:avLst/>
+          </a:prstGeom>
+          <a:noFill/>
+        </p:spPr>
+        <p:txBody>
+          <a:bodyPr wrap="square">
+            <a:spAutoFit/>
+          </a:bodyPr>
+          <a:lstStyle/>
+          <a:p>
+            <a:pPr algn="l"/>
+            <a:r>
+              <a:rPr sz="1100" b="1">
+                <a:solidFill>
+                  <a:srgbClr val="1F7A34"/>
+                </a:solidFill>
+                <a:latin typeface="Calibri"/>
+              </a:rPr>
+              <a:t>05  »  КЫРГЫЗСТАН</a:t>
+            </a:r>
+          </a:p>
+        </p:txBody>
+      </p:sp>
+      <p:sp>
+        <p:nvSpPr>
           <p:cNvPr id="5" name="TextBox 4"/>
           <p:cNvSpPr txBox="1"/>
           <p:nvPr/>
         </p:nvSpPr>
         <p:spPr>
           <a:xfrm>
-            <a:off x="548640" y="320040"/>
-            <a:ext cx="10058400" cy="274320"/>
+            <a:off x="548640" y="640080"/>
+            <a:ext cx="10515600" cy="548640"/>
           </a:xfrm>
           <a:prstGeom prst="rect">
             <a:avLst/>
@@ -7052,103 +6406,33 @@
           <a:p>
             <a:pPr algn="l"/>
             <a:r>
-              <a:rPr sz="1100" b="1">
-                <a:solidFill>
-                  <a:srgbClr val="FFD54F"/>
-                </a:solidFill>
-                <a:latin typeface="Calibri"/>
-              </a:rPr>
-              <a:t>03 · О КЫРГЫЗСТАНЕ</a:t>
-            </a:r>
-          </a:p>
-        </p:txBody>
-      </p:sp>
-      <p:sp>
-        <p:nvSpPr>
-          <p:cNvPr id="6" name="TextBox 5"/>
-          <p:cNvSpPr txBox="1"/>
-          <p:nvPr/>
-        </p:nvSpPr>
-        <p:spPr>
-          <a:xfrm>
-            <a:off x="548640" y="640080"/>
-            <a:ext cx="10241280" cy="548640"/>
-          </a:xfrm>
-          <a:prstGeom prst="rect">
-            <a:avLst/>
-          </a:prstGeom>
-          <a:noFill/>
-        </p:spPr>
-        <p:txBody>
-          <a:bodyPr wrap="square">
-            <a:spAutoFit/>
-          </a:bodyPr>
-          <a:lstStyle/>
-          <a:p>
-            <a:pPr algn="l"/>
-            <a:r>
               <a:rPr sz="2800" b="1">
                 <a:solidFill>
-                  <a:srgbClr val="FFFFFF"/>
-                </a:solidFill>
-                <a:latin typeface="Georgia"/>
-              </a:rPr>
-              <a:t>Спрос на проектное управление</a:t>
-            </a:r>
-          </a:p>
-        </p:txBody>
-      </p:sp>
-      <p:sp>
-        <p:nvSpPr>
-          <p:cNvPr id="7" name="TextBox 6"/>
-          <p:cNvSpPr txBox="1"/>
-          <p:nvPr/>
-        </p:nvSpPr>
-        <p:spPr>
-          <a:xfrm>
-            <a:off x="548640" y="1417320"/>
-            <a:ext cx="10972800" cy="731520"/>
-          </a:xfrm>
-          <a:prstGeom prst="rect">
-            <a:avLst/>
-          </a:prstGeom>
-          <a:noFill/>
-        </p:spPr>
-        <p:txBody>
-          <a:bodyPr wrap="square">
-            <a:spAutoFit/>
-          </a:bodyPr>
-          <a:lstStyle/>
-          <a:p>
-            <a:pPr algn="l"/>
-            <a:r>
-              <a:rPr sz="1500" b="0">
-                <a:solidFill>
-                  <a:srgbClr val="FFD54F"/>
-                </a:solidFill>
-                <a:latin typeface="Calibri"/>
-              </a:rPr>
-              <a:t>Госуправление · Строительство · IT · Медицина и НПО · Инфраструктура · Цифровизация</a:t>
-            </a:r>
-          </a:p>
-        </p:txBody>
-      </p:sp>
-      <p:sp>
-        <p:nvSpPr>
-          <p:cNvPr id="8" name="Rounded Rectangle 7"/>
+                  <a:srgbClr val="0D223B"/>
+                </a:solidFill>
+                <a:latin typeface="Arial"/>
+              </a:rPr>
+              <a:t>Стратегическое положение</a:t>
+            </a:r>
+          </a:p>
+        </p:txBody>
+      </p:sp>
+      <p:sp>
+        <p:nvSpPr>
+          <p:cNvPr id="6" name="Rounded Rectangle 5"/>
           <p:cNvSpPr/>
           <p:nvPr/>
         </p:nvSpPr>
         <p:spPr>
           <a:xfrm>
-            <a:off x="548640" y="2377440"/>
-            <a:ext cx="11064240" cy="2743200"/>
+            <a:off x="548640" y="1554480"/>
+            <a:ext cx="2743200" cy="1828800"/>
           </a:xfrm>
           <a:prstGeom prst="roundRect">
             <a:avLst/>
           </a:prstGeom>
           <a:solidFill>
-            <a:srgbClr val="7A0C1E"/>
+            <a:srgbClr val="FFFFFF"/>
           </a:solidFill>
           <a:ln>
             <a:noFill/>
@@ -7178,14 +6462,423 @@
       </p:sp>
       <p:sp>
         <p:nvSpPr>
-          <p:cNvPr id="9" name="TextBox 8"/>
-          <p:cNvSpPr txBox="1"/>
-          <p:nvPr/>
-        </p:nvSpPr>
-        <p:spPr>
-          <a:xfrm>
-            <a:off x="822960" y="2834640"/>
-            <a:ext cx="10515600" cy="1828800"/>
+          <p:cNvPr id="7" name="TextBox 6"/>
+          <p:cNvSpPr txBox="1"/>
+          <p:nvPr/>
+        </p:nvSpPr>
+        <p:spPr>
+          <a:xfrm>
+            <a:off x="685800" y="1920240"/>
+            <a:ext cx="2468880" cy="640080"/>
+          </a:xfrm>
+          <a:prstGeom prst="rect">
+            <a:avLst/>
+          </a:prstGeom>
+          <a:noFill/>
+        </p:spPr>
+        <p:txBody>
+          <a:bodyPr wrap="square">
+            <a:spAutoFit/>
+          </a:bodyPr>
+          <a:lstStyle/>
+          <a:p>
+            <a:pPr algn="ctr"/>
+            <a:r>
+              <a:rPr sz="1800" b="1">
+                <a:solidFill>
+                  <a:srgbClr val="0D223B"/>
+                </a:solidFill>
+                <a:latin typeface="Calibri"/>
+              </a:rPr>
+              <a:t>≈200 тыс. км²</a:t>
+            </a:r>
+          </a:p>
+        </p:txBody>
+      </p:sp>
+      <p:sp>
+        <p:nvSpPr>
+          <p:cNvPr id="8" name="TextBox 7"/>
+          <p:cNvSpPr txBox="1"/>
+          <p:nvPr/>
+        </p:nvSpPr>
+        <p:spPr>
+          <a:xfrm>
+            <a:off x="685800" y="2651760"/>
+            <a:ext cx="2468880" cy="365760"/>
+          </a:xfrm>
+          <a:prstGeom prst="rect">
+            <a:avLst/>
+          </a:prstGeom>
+          <a:noFill/>
+        </p:spPr>
+        <p:txBody>
+          <a:bodyPr wrap="square">
+            <a:spAutoFit/>
+          </a:bodyPr>
+          <a:lstStyle/>
+          <a:p>
+            <a:pPr algn="ctr"/>
+            <a:r>
+              <a:rPr sz="1200" b="0">
+                <a:solidFill>
+                  <a:srgbClr val="5C6B72"/>
+                </a:solidFill>
+                <a:latin typeface="Calibri"/>
+              </a:rPr>
+              <a:t>Площадь</a:t>
+            </a:r>
+          </a:p>
+        </p:txBody>
+      </p:sp>
+      <p:sp>
+        <p:nvSpPr>
+          <p:cNvPr id="9" name="Rounded Rectangle 8"/>
+          <p:cNvSpPr/>
+          <p:nvPr/>
+        </p:nvSpPr>
+        <p:spPr>
+          <a:xfrm>
+            <a:off x="3429000" y="1554480"/>
+            <a:ext cx="2743200" cy="1828800"/>
+          </a:xfrm>
+          <a:prstGeom prst="roundRect">
+            <a:avLst/>
+          </a:prstGeom>
+          <a:solidFill>
+            <a:srgbClr val="FFFFFF"/>
+          </a:solidFill>
+          <a:ln>
+            <a:noFill/>
+          </a:ln>
+        </p:spPr>
+        <p:style>
+          <a:lnRef idx="1">
+            <a:schemeClr val="accent1"/>
+          </a:lnRef>
+          <a:fillRef idx="3">
+            <a:schemeClr val="accent1"/>
+          </a:fillRef>
+          <a:effectRef idx="2">
+            <a:schemeClr val="accent1"/>
+          </a:effectRef>
+          <a:fontRef idx="minor">
+            <a:schemeClr val="lt1"/>
+          </a:fontRef>
+        </p:style>
+        <p:txBody>
+          <a:bodyPr rtlCol="0" anchor="ctr"/>
+          <a:lstStyle/>
+          <a:p>
+            <a:pPr algn="ctr"/>
+          </a:p>
+        </p:txBody>
+      </p:sp>
+      <p:sp>
+        <p:nvSpPr>
+          <p:cNvPr id="10" name="TextBox 9"/>
+          <p:cNvSpPr txBox="1"/>
+          <p:nvPr/>
+        </p:nvSpPr>
+        <p:spPr>
+          <a:xfrm>
+            <a:off x="3566160" y="1920240"/>
+            <a:ext cx="2468880" cy="640080"/>
+          </a:xfrm>
+          <a:prstGeom prst="rect">
+            <a:avLst/>
+          </a:prstGeom>
+          <a:noFill/>
+        </p:spPr>
+        <p:txBody>
+          <a:bodyPr wrap="square">
+            <a:spAutoFit/>
+          </a:bodyPr>
+          <a:lstStyle/>
+          <a:p>
+            <a:pPr algn="ctr"/>
+            <a:r>
+              <a:rPr sz="1800" b="1">
+                <a:solidFill>
+                  <a:srgbClr val="0D223B"/>
+                </a:solidFill>
+                <a:latin typeface="Calibri"/>
+              </a:rPr>
+              <a:t>≈7,4 млн</a:t>
+            </a:r>
+          </a:p>
+        </p:txBody>
+      </p:sp>
+      <p:sp>
+        <p:nvSpPr>
+          <p:cNvPr id="11" name="TextBox 10"/>
+          <p:cNvSpPr txBox="1"/>
+          <p:nvPr/>
+        </p:nvSpPr>
+        <p:spPr>
+          <a:xfrm>
+            <a:off x="3566160" y="2651760"/>
+            <a:ext cx="2468880" cy="365760"/>
+          </a:xfrm>
+          <a:prstGeom prst="rect">
+            <a:avLst/>
+          </a:prstGeom>
+          <a:noFill/>
+        </p:spPr>
+        <p:txBody>
+          <a:bodyPr wrap="square">
+            <a:spAutoFit/>
+          </a:bodyPr>
+          <a:lstStyle/>
+          <a:p>
+            <a:pPr algn="ctr"/>
+            <a:r>
+              <a:rPr sz="1200" b="0">
+                <a:solidFill>
+                  <a:srgbClr val="5C6B72"/>
+                </a:solidFill>
+                <a:latin typeface="Calibri"/>
+              </a:rPr>
+              <a:t>Население</a:t>
+            </a:r>
+          </a:p>
+        </p:txBody>
+      </p:sp>
+      <p:sp>
+        <p:nvSpPr>
+          <p:cNvPr id="12" name="Rounded Rectangle 11"/>
+          <p:cNvSpPr/>
+          <p:nvPr/>
+        </p:nvSpPr>
+        <p:spPr>
+          <a:xfrm>
+            <a:off x="6309359" y="1554480"/>
+            <a:ext cx="2743200" cy="1828800"/>
+          </a:xfrm>
+          <a:prstGeom prst="roundRect">
+            <a:avLst/>
+          </a:prstGeom>
+          <a:solidFill>
+            <a:srgbClr val="FFFFFF"/>
+          </a:solidFill>
+          <a:ln>
+            <a:noFill/>
+          </a:ln>
+        </p:spPr>
+        <p:style>
+          <a:lnRef idx="1">
+            <a:schemeClr val="accent1"/>
+          </a:lnRef>
+          <a:fillRef idx="3">
+            <a:schemeClr val="accent1"/>
+          </a:fillRef>
+          <a:effectRef idx="2">
+            <a:schemeClr val="accent1"/>
+          </a:effectRef>
+          <a:fontRef idx="minor">
+            <a:schemeClr val="lt1"/>
+          </a:fontRef>
+        </p:style>
+        <p:txBody>
+          <a:bodyPr rtlCol="0" anchor="ctr"/>
+          <a:lstStyle/>
+          <a:p>
+            <a:pPr algn="ctr"/>
+          </a:p>
+        </p:txBody>
+      </p:sp>
+      <p:sp>
+        <p:nvSpPr>
+          <p:cNvPr id="13" name="TextBox 12"/>
+          <p:cNvSpPr txBox="1"/>
+          <p:nvPr/>
+        </p:nvSpPr>
+        <p:spPr>
+          <a:xfrm>
+            <a:off x="6446519" y="1920240"/>
+            <a:ext cx="2468880" cy="640080"/>
+          </a:xfrm>
+          <a:prstGeom prst="rect">
+            <a:avLst/>
+          </a:prstGeom>
+          <a:noFill/>
+        </p:spPr>
+        <p:txBody>
+          <a:bodyPr wrap="square">
+            <a:spAutoFit/>
+          </a:bodyPr>
+          <a:lstStyle/>
+          <a:p>
+            <a:pPr algn="ctr"/>
+            <a:r>
+              <a:rPr sz="1800" b="1">
+                <a:solidFill>
+                  <a:srgbClr val="0D223B"/>
+                </a:solidFill>
+                <a:latin typeface="Calibri"/>
+              </a:rPr>
+              <a:t>Бишкек</a:t>
+            </a:r>
+          </a:p>
+        </p:txBody>
+      </p:sp>
+      <p:sp>
+        <p:nvSpPr>
+          <p:cNvPr id="14" name="TextBox 13"/>
+          <p:cNvSpPr txBox="1"/>
+          <p:nvPr/>
+        </p:nvSpPr>
+        <p:spPr>
+          <a:xfrm>
+            <a:off x="6446519" y="2651760"/>
+            <a:ext cx="2468880" cy="365760"/>
+          </a:xfrm>
+          <a:prstGeom prst="rect">
+            <a:avLst/>
+          </a:prstGeom>
+          <a:noFill/>
+        </p:spPr>
+        <p:txBody>
+          <a:bodyPr wrap="square">
+            <a:spAutoFit/>
+          </a:bodyPr>
+          <a:lstStyle/>
+          <a:p>
+            <a:pPr algn="ctr"/>
+            <a:r>
+              <a:rPr sz="1200" b="0">
+                <a:solidFill>
+                  <a:srgbClr val="5C6B72"/>
+                </a:solidFill>
+                <a:latin typeface="Calibri"/>
+              </a:rPr>
+              <a:t>Штаб-квартира</a:t>
+            </a:r>
+          </a:p>
+        </p:txBody>
+      </p:sp>
+      <p:sp>
+        <p:nvSpPr>
+          <p:cNvPr id="15" name="Rounded Rectangle 14"/>
+          <p:cNvSpPr/>
+          <p:nvPr/>
+        </p:nvSpPr>
+        <p:spPr>
+          <a:xfrm>
+            <a:off x="9189719" y="1554480"/>
+            <a:ext cx="2743200" cy="1828800"/>
+          </a:xfrm>
+          <a:prstGeom prst="roundRect">
+            <a:avLst/>
+          </a:prstGeom>
+          <a:solidFill>
+            <a:srgbClr val="FFFFFF"/>
+          </a:solidFill>
+          <a:ln>
+            <a:noFill/>
+          </a:ln>
+        </p:spPr>
+        <p:style>
+          <a:lnRef idx="1">
+            <a:schemeClr val="accent1"/>
+          </a:lnRef>
+          <a:fillRef idx="3">
+            <a:schemeClr val="accent1"/>
+          </a:fillRef>
+          <a:effectRef idx="2">
+            <a:schemeClr val="accent1"/>
+          </a:effectRef>
+          <a:fontRef idx="minor">
+            <a:schemeClr val="lt1"/>
+          </a:fontRef>
+        </p:style>
+        <p:txBody>
+          <a:bodyPr rtlCol="0" anchor="ctr"/>
+          <a:lstStyle/>
+          <a:p>
+            <a:pPr algn="ctr"/>
+          </a:p>
+        </p:txBody>
+      </p:sp>
+      <p:sp>
+        <p:nvSpPr>
+          <p:cNvPr id="16" name="TextBox 15"/>
+          <p:cNvSpPr txBox="1"/>
+          <p:nvPr/>
+        </p:nvSpPr>
+        <p:spPr>
+          <a:xfrm>
+            <a:off x="9326879" y="1920240"/>
+            <a:ext cx="2468880" cy="640080"/>
+          </a:xfrm>
+          <a:prstGeom prst="rect">
+            <a:avLst/>
+          </a:prstGeom>
+          <a:noFill/>
+        </p:spPr>
+        <p:txBody>
+          <a:bodyPr wrap="square">
+            <a:spAutoFit/>
+          </a:bodyPr>
+          <a:lstStyle/>
+          <a:p>
+            <a:pPr algn="ctr"/>
+            <a:r>
+              <a:rPr sz="1800" b="1">
+                <a:solidFill>
+                  <a:srgbClr val="0D223B"/>
+                </a:solidFill>
+                <a:latin typeface="Calibri"/>
+              </a:rPr>
+              <a:t>ЕАЭС</a:t>
+            </a:r>
+          </a:p>
+        </p:txBody>
+      </p:sp>
+      <p:sp>
+        <p:nvSpPr>
+          <p:cNvPr id="17" name="TextBox 16"/>
+          <p:cNvSpPr txBox="1"/>
+          <p:nvPr/>
+        </p:nvSpPr>
+        <p:spPr>
+          <a:xfrm>
+            <a:off x="9326879" y="2651760"/>
+            <a:ext cx="2468880" cy="365760"/>
+          </a:xfrm>
+          <a:prstGeom prst="rect">
+            <a:avLst/>
+          </a:prstGeom>
+          <a:noFill/>
+        </p:spPr>
+        <p:txBody>
+          <a:bodyPr wrap="square">
+            <a:spAutoFit/>
+          </a:bodyPr>
+          <a:lstStyle/>
+          <a:p>
+            <a:pPr algn="ctr"/>
+            <a:r>
+              <a:rPr sz="1200" b="0">
+                <a:solidFill>
+                  <a:srgbClr val="5C6B72"/>
+                </a:solidFill>
+                <a:latin typeface="Calibri"/>
+              </a:rPr>
+              <a:t>Единое пространство</a:t>
+            </a:r>
+          </a:p>
+        </p:txBody>
+      </p:sp>
+      <p:sp>
+        <p:nvSpPr>
+          <p:cNvPr id="18" name="TextBox 17"/>
+          <p:cNvSpPr txBox="1"/>
+          <p:nvPr/>
+        </p:nvSpPr>
+        <p:spPr>
+          <a:xfrm>
+            <a:off x="548640" y="3840480"/>
+            <a:ext cx="10972800" cy="1371600"/>
           </a:xfrm>
           <a:prstGeom prst="rect">
             <a:avLst/>
@@ -7200,26 +6893,27 @@
           <a:p>
             <a:pPr algn="l"/>
             <a:r>
-              <a:rPr sz="1800" b="0">
-                <a:solidFill>
-                  <a:srgbClr val="FFFFFF"/>
-                </a:solidFill>
-                <a:latin typeface="Calibri"/>
-              </a:rPr>
-              <a:t>Большинство руководителей проектов — «случайные» PM без формальной сертификации. Это создаёт значительный потенциал для развития сертификации IPMA 4-L-C (уровни A–D).</a:t>
-            </a:r>
-          </a:p>
-        </p:txBody>
-      </p:sp>
-      <p:sp>
-        <p:nvSpPr>
-          <p:cNvPr id="10" name="TextBox 9"/>
-          <p:cNvSpPr txBox="1"/>
-          <p:nvPr/>
-        </p:nvSpPr>
-        <p:spPr>
-          <a:xfrm>
-            <a:off x="457200" y="6446520"/>
+              <a:rPr sz="1500" b="0">
+                <a:solidFill>
+                  <a:srgbClr val="28394A"/>
+                </a:solidFill>
+                <a:latin typeface="Calibri"/>
+              </a:rPr>
+              <a:t>Центральная Азия — пересечение маршрутов ЕАЭС и Большого Шёлкового пути.
+Отрасли: госуправление · строительство · IT · инфраструктура · цифровизация · медицина и НПО</a:t>
+            </a:r>
+          </a:p>
+        </p:txBody>
+      </p:sp>
+      <p:sp>
+        <p:nvSpPr>
+          <p:cNvPr id="19" name="TextBox 18"/>
+          <p:cNvSpPr txBox="1"/>
+          <p:nvPr/>
+        </p:nvSpPr>
+        <p:spPr>
+          <a:xfrm>
+            <a:off x="502920" y="6446520"/>
             <a:ext cx="8229600" cy="274320"/>
           </a:xfrm>
           <a:prstGeom prst="rect">
@@ -7237,25 +6931,25 @@
             <a:r>
               <a:rPr sz="1100" b="0">
                 <a:solidFill>
-                  <a:srgbClr val="F3DCC9"/>
-                </a:solidFill>
-                <a:latin typeface="Calibri"/>
-              </a:rPr>
-              <a:t>IPMA Kyrgyz Republic · ipma.kg · Ассоциация-заявитель</a:t>
-            </a:r>
-          </a:p>
-        </p:txBody>
-      </p:sp>
-      <p:sp>
-        <p:nvSpPr>
-          <p:cNvPr id="11" name="TextBox 10"/>
-          <p:cNvSpPr txBox="1"/>
-          <p:nvPr/>
-        </p:nvSpPr>
-        <p:spPr>
-          <a:xfrm>
-            <a:off x="10424160" y="6446520"/>
-            <a:ext cx="1371600" cy="274320"/>
+                  <a:srgbClr val="5C6B72"/>
+                </a:solidFill>
+                <a:latin typeface="Calibri"/>
+              </a:rPr>
+              <a:t>IPMA Kyrgyz Republic  ·  ipma.kg</a:t>
+            </a:r>
+          </a:p>
+        </p:txBody>
+      </p:sp>
+      <p:sp>
+        <p:nvSpPr>
+          <p:cNvPr id="20" name="TextBox 19"/>
+          <p:cNvSpPr txBox="1"/>
+          <p:nvPr/>
+        </p:nvSpPr>
+        <p:spPr>
+          <a:xfrm>
+            <a:off x="10515600" y="6446520"/>
+            <a:ext cx="1280160" cy="274320"/>
           </a:xfrm>
           <a:prstGeom prst="rect">
             <a:avLst/>
@@ -7272,11 +6966,11 @@
             <a:r>
               <a:rPr sz="1100" b="0">
                 <a:solidFill>
-                  <a:srgbClr val="F3DCC9"/>
-                </a:solidFill>
-                <a:latin typeface="Calibri"/>
-              </a:rPr>
-              <a:t>5/12</a:t>
+                  <a:srgbClr val="5C6B72"/>
+                </a:solidFill>
+                <a:latin typeface="Calibri"/>
+              </a:rPr>
+              <a:t>05 / 12</a:t>
             </a:r>
           </a:p>
         </p:txBody>
@@ -7314,7 +7008,7 @@
             <a:avLst/>
           </a:prstGeom>
           <a:solidFill>
-            <a:srgbClr val="5C0A17"/>
+            <a:srgbClr val="EEF2F1"/>
           </a:solidFill>
           <a:ln>
             <a:noFill/>
@@ -7342,52 +7036,9 @@
           </a:p>
         </p:txBody>
       </p:sp>
-      <p:sp>
-        <p:nvSpPr>
-          <p:cNvPr id="3" name="Rectangle 2"/>
-          <p:cNvSpPr/>
-          <p:nvPr/>
-        </p:nvSpPr>
-        <p:spPr>
-          <a:xfrm>
-            <a:off x="0" y="0"/>
-            <a:ext cx="12191695" cy="73152"/>
-          </a:xfrm>
-          <a:prstGeom prst="rect">
-            <a:avLst/>
-          </a:prstGeom>
-          <a:solidFill>
-            <a:srgbClr val="FFD54F"/>
-          </a:solidFill>
-          <a:ln>
-            <a:noFill/>
-          </a:ln>
-        </p:spPr>
-        <p:style>
-          <a:lnRef idx="1">
-            <a:schemeClr val="accent1"/>
-          </a:lnRef>
-          <a:fillRef idx="3">
-            <a:schemeClr val="accent1"/>
-          </a:fillRef>
-          <a:effectRef idx="2">
-            <a:schemeClr val="accent1"/>
-          </a:effectRef>
-          <a:fontRef idx="minor">
-            <a:schemeClr val="lt1"/>
-          </a:fontRef>
-        </p:style>
-        <p:txBody>
-          <a:bodyPr rtlCol="0" anchor="ctr"/>
-          <a:lstStyle/>
-          <a:p>
-            <a:pPr algn="ctr"/>
-          </a:p>
-        </p:txBody>
-      </p:sp>
       <p:pic>
         <p:nvPicPr>
-          <p:cNvPr id="4" name="Picture 3" descr="ipma-kr-emblem.png"/>
+          <p:cNvPr id="3" name="Picture 2" descr="ipma-kr-emblem.png"/>
           <p:cNvPicPr>
             <a:picLocks noChangeAspect="1"/>
           </p:cNvPicPr>
@@ -7401,8 +7052,8 @@
         </p:blipFill>
         <p:spPr>
           <a:xfrm>
-            <a:off x="11292840" y="201168"/>
-            <a:ext cx="661788" cy="658368"/>
+            <a:off x="11292840" y="228600"/>
+            <a:ext cx="597448" cy="594360"/>
           </a:xfrm>
           <a:prstGeom prst="rect">
             <a:avLst/>
@@ -7411,14 +7062,49 @@
       </p:pic>
       <p:sp>
         <p:nvSpPr>
+          <p:cNvPr id="4" name="TextBox 3"/>
+          <p:cNvSpPr txBox="1"/>
+          <p:nvPr/>
+        </p:nvSpPr>
+        <p:spPr>
+          <a:xfrm>
+            <a:off x="548640" y="320040"/>
+            <a:ext cx="10972800" cy="274320"/>
+          </a:xfrm>
+          <a:prstGeom prst="rect">
+            <a:avLst/>
+          </a:prstGeom>
+          <a:noFill/>
+        </p:spPr>
+        <p:txBody>
+          <a:bodyPr wrap="square">
+            <a:spAutoFit/>
+          </a:bodyPr>
+          <a:lstStyle/>
+          <a:p>
+            <a:pPr algn="l"/>
+            <a:r>
+              <a:rPr sz="1100" b="1">
+                <a:solidFill>
+                  <a:srgbClr val="1F7A34"/>
+                </a:solidFill>
+                <a:latin typeface="Calibri"/>
+              </a:rPr>
+              <a:t>06  »  ПУТЬ</a:t>
+            </a:r>
+          </a:p>
+        </p:txBody>
+      </p:sp>
+      <p:sp>
+        <p:nvSpPr>
           <p:cNvPr id="5" name="TextBox 4"/>
           <p:cNvSpPr txBox="1"/>
           <p:nvPr/>
         </p:nvSpPr>
         <p:spPr>
           <a:xfrm>
-            <a:off x="548640" y="320040"/>
-            <a:ext cx="10058400" cy="274320"/>
+            <a:off x="548640" y="640080"/>
+            <a:ext cx="10515600" cy="548640"/>
           </a:xfrm>
           <a:prstGeom prst="rect">
             <a:avLst/>
@@ -7433,46 +7119,11 @@
           <a:p>
             <a:pPr algn="l"/>
             <a:r>
-              <a:rPr sz="1100" b="1">
-                <a:solidFill>
-                  <a:srgbClr val="FFD54F"/>
-                </a:solidFill>
-                <a:latin typeface="Calibri"/>
-              </a:rPr>
-              <a:t>04 · ПУТЬ KGPMU</a:t>
-            </a:r>
-          </a:p>
-        </p:txBody>
-      </p:sp>
-      <p:sp>
-        <p:nvSpPr>
-          <p:cNvPr id="6" name="TextBox 5"/>
-          <p:cNvSpPr txBox="1"/>
-          <p:nvPr/>
-        </p:nvSpPr>
-        <p:spPr>
-          <a:xfrm>
-            <a:off x="548640" y="640080"/>
-            <a:ext cx="10241280" cy="548640"/>
-          </a:xfrm>
-          <a:prstGeom prst="rect">
-            <a:avLst/>
-          </a:prstGeom>
-          <a:noFill/>
-        </p:spPr>
-        <p:txBody>
-          <a:bodyPr wrap="square">
-            <a:spAutoFit/>
-          </a:bodyPr>
-          <a:lstStyle/>
-          <a:p>
-            <a:pPr algn="l"/>
-            <a:r>
               <a:rPr sz="2800" b="1">
                 <a:solidFill>
-                  <a:srgbClr val="FFFFFF"/>
-                </a:solidFill>
-                <a:latin typeface="Georgia"/>
+                  <a:srgbClr val="0D223B"/>
+                </a:solidFill>
+                <a:latin typeface="Arial"/>
               </a:rPr>
               <a:t>Что уже сделано</a:t>
             </a:r>
@@ -7481,20 +7132,20 @@
       </p:sp>
       <p:sp>
         <p:nvSpPr>
-          <p:cNvPr id="7" name="Rounded Rectangle 6"/>
+          <p:cNvPr id="6" name="Rounded Rectangle 5"/>
           <p:cNvSpPr/>
           <p:nvPr/>
         </p:nvSpPr>
         <p:spPr>
           <a:xfrm>
-            <a:off x="548640" y="1463040"/>
-            <a:ext cx="11064240" cy="914400"/>
+            <a:off x="548640" y="1417320"/>
+            <a:ext cx="11064240" cy="960120"/>
           </a:xfrm>
           <a:prstGeom prst="roundRect">
             <a:avLst/>
           </a:prstGeom>
           <a:solidFill>
-            <a:srgbClr val="7A0C1E"/>
+            <a:srgbClr val="FFFFFF"/>
           </a:solidFill>
           <a:ln>
             <a:noFill/>
@@ -7524,14 +7175,49 @@
       </p:sp>
       <p:sp>
         <p:nvSpPr>
+          <p:cNvPr id="7" name="TextBox 6"/>
+          <p:cNvSpPr txBox="1"/>
+          <p:nvPr/>
+        </p:nvSpPr>
+        <p:spPr>
+          <a:xfrm>
+            <a:off x="822960" y="1691640"/>
+            <a:ext cx="1828800" cy="365760"/>
+          </a:xfrm>
+          <a:prstGeom prst="rect">
+            <a:avLst/>
+          </a:prstGeom>
+          <a:noFill/>
+        </p:spPr>
+        <p:txBody>
+          <a:bodyPr wrap="square">
+            <a:spAutoFit/>
+          </a:bodyPr>
+          <a:lstStyle/>
+          <a:p>
+            <a:pPr algn="l"/>
+            <a:r>
+              <a:rPr sz="1500" b="1">
+                <a:solidFill>
+                  <a:srgbClr val="2F9E44"/>
+                </a:solidFill>
+                <a:latin typeface="Calibri"/>
+              </a:rPr>
+              <a:t>апр 2026</a:t>
+            </a:r>
+          </a:p>
+        </p:txBody>
+      </p:sp>
+      <p:sp>
+        <p:nvSpPr>
           <p:cNvPr id="8" name="TextBox 7"/>
           <p:cNvSpPr txBox="1"/>
           <p:nvPr/>
         </p:nvSpPr>
         <p:spPr>
           <a:xfrm>
-            <a:off x="777240" y="1737360"/>
-            <a:ext cx="1828800" cy="365760"/>
+            <a:off x="2834640" y="1691640"/>
+            <a:ext cx="8412480" cy="411480"/>
           </a:xfrm>
           <a:prstGeom prst="rect">
             <a:avLst/>
@@ -7546,44 +7232,9 @@
           <a:p>
             <a:pPr algn="l"/>
             <a:r>
-              <a:rPr sz="1500" b="1">
-                <a:solidFill>
-                  <a:srgbClr val="FFD54F"/>
-                </a:solidFill>
-                <a:latin typeface="Calibri"/>
-              </a:rPr>
-              <a:t>апр 2026</a:t>
-            </a:r>
-          </a:p>
-        </p:txBody>
-      </p:sp>
-      <p:sp>
-        <p:nvSpPr>
-          <p:cNvPr id="9" name="TextBox 8"/>
-          <p:cNvSpPr txBox="1"/>
-          <p:nvPr/>
-        </p:nvSpPr>
-        <p:spPr>
-          <a:xfrm>
-            <a:off x="2743200" y="1737360"/>
-            <a:ext cx="8503920" cy="411480"/>
-          </a:xfrm>
-          <a:prstGeom prst="rect">
-            <a:avLst/>
-          </a:prstGeom>
-          <a:noFill/>
-        </p:spPr>
-        <p:txBody>
-          <a:bodyPr wrap="square">
-            <a:spAutoFit/>
-          </a:bodyPr>
-          <a:lstStyle/>
-          <a:p>
-            <a:pPr algn="l"/>
-            <a:r>
               <a:rPr sz="1500" b="0">
                 <a:solidFill>
-                  <a:srgbClr val="FFFFFF"/>
+                  <a:srgbClr val="0D223B"/>
                 </a:solidFill>
                 <a:latin typeface="Calibri"/>
               </a:rPr>
@@ -7594,20 +7245,20 @@
       </p:sp>
       <p:sp>
         <p:nvSpPr>
-          <p:cNvPr id="10" name="Rounded Rectangle 9"/>
+          <p:cNvPr id="9" name="Rounded Rectangle 8"/>
           <p:cNvSpPr/>
           <p:nvPr/>
         </p:nvSpPr>
         <p:spPr>
           <a:xfrm>
             <a:off x="548640" y="2514600"/>
-            <a:ext cx="11064240" cy="914400"/>
+            <a:ext cx="11064240" cy="960120"/>
           </a:xfrm>
           <a:prstGeom prst="roundRect">
             <a:avLst/>
           </a:prstGeom>
           <a:solidFill>
-            <a:srgbClr val="7A0C1E"/>
+            <a:srgbClr val="FFFFFF"/>
           </a:solidFill>
           <a:ln>
             <a:noFill/>
@@ -7637,14 +7288,49 @@
       </p:sp>
       <p:sp>
         <p:nvSpPr>
+          <p:cNvPr id="10" name="TextBox 9"/>
+          <p:cNvSpPr txBox="1"/>
+          <p:nvPr/>
+        </p:nvSpPr>
+        <p:spPr>
+          <a:xfrm>
+            <a:off x="822960" y="2788920"/>
+            <a:ext cx="1828800" cy="365760"/>
+          </a:xfrm>
+          <a:prstGeom prst="rect">
+            <a:avLst/>
+          </a:prstGeom>
+          <a:noFill/>
+        </p:spPr>
+        <p:txBody>
+          <a:bodyPr wrap="square">
+            <a:spAutoFit/>
+          </a:bodyPr>
+          <a:lstStyle/>
+          <a:p>
+            <a:pPr algn="l"/>
+            <a:r>
+              <a:rPr sz="1500" b="1">
+                <a:solidFill>
+                  <a:srgbClr val="2F9E44"/>
+                </a:solidFill>
+                <a:latin typeface="Calibri"/>
+              </a:rPr>
+              <a:t>июн 2026</a:t>
+            </a:r>
+          </a:p>
+        </p:txBody>
+      </p:sp>
+      <p:sp>
+        <p:nvSpPr>
           <p:cNvPr id="11" name="TextBox 10"/>
           <p:cNvSpPr txBox="1"/>
           <p:nvPr/>
         </p:nvSpPr>
         <p:spPr>
           <a:xfrm>
-            <a:off x="777240" y="2788920"/>
-            <a:ext cx="1828800" cy="365760"/>
+            <a:off x="2834640" y="2788920"/>
+            <a:ext cx="8412480" cy="411480"/>
           </a:xfrm>
           <a:prstGeom prst="rect">
             <a:avLst/>
@@ -7659,44 +7345,9 @@
           <a:p>
             <a:pPr algn="l"/>
             <a:r>
-              <a:rPr sz="1500" b="1">
-                <a:solidFill>
-                  <a:srgbClr val="FFD54F"/>
-                </a:solidFill>
-                <a:latin typeface="Calibri"/>
-              </a:rPr>
-              <a:t>июн 2026</a:t>
-            </a:r>
-          </a:p>
-        </p:txBody>
-      </p:sp>
-      <p:sp>
-        <p:nvSpPr>
-          <p:cNvPr id="12" name="TextBox 11"/>
-          <p:cNvSpPr txBox="1"/>
-          <p:nvPr/>
-        </p:nvSpPr>
-        <p:spPr>
-          <a:xfrm>
-            <a:off x="2743200" y="2788920"/>
-            <a:ext cx="8503920" cy="411480"/>
-          </a:xfrm>
-          <a:prstGeom prst="rect">
-            <a:avLst/>
-          </a:prstGeom>
-          <a:noFill/>
-        </p:spPr>
-        <p:txBody>
-          <a:bodyPr wrap="square">
-            <a:spAutoFit/>
-          </a:bodyPr>
-          <a:lstStyle/>
-          <a:p>
-            <a:pPr algn="l"/>
-            <a:r>
               <a:rPr sz="1500" b="0">
                 <a:solidFill>
-                  <a:srgbClr val="FFFFFF"/>
+                  <a:srgbClr val="0D223B"/>
                 </a:solidFill>
                 <a:latin typeface="Calibri"/>
               </a:rPr>
@@ -7707,20 +7358,20 @@
       </p:sp>
       <p:sp>
         <p:nvSpPr>
-          <p:cNvPr id="13" name="Rounded Rectangle 12"/>
+          <p:cNvPr id="12" name="Rounded Rectangle 11"/>
           <p:cNvSpPr/>
           <p:nvPr/>
         </p:nvSpPr>
         <p:spPr>
           <a:xfrm>
-            <a:off x="548640" y="3566160"/>
-            <a:ext cx="11064240" cy="914400"/>
+            <a:off x="548640" y="3611880"/>
+            <a:ext cx="11064240" cy="960120"/>
           </a:xfrm>
           <a:prstGeom prst="roundRect">
             <a:avLst/>
           </a:prstGeom>
           <a:solidFill>
-            <a:srgbClr val="7A0C1E"/>
+            <a:srgbClr val="FFFFFF"/>
           </a:solidFill>
           <a:ln>
             <a:noFill/>
@@ -7750,14 +7401,49 @@
       </p:sp>
       <p:sp>
         <p:nvSpPr>
+          <p:cNvPr id="13" name="TextBox 12"/>
+          <p:cNvSpPr txBox="1"/>
+          <p:nvPr/>
+        </p:nvSpPr>
+        <p:spPr>
+          <a:xfrm>
+            <a:off x="822960" y="3886200"/>
+            <a:ext cx="1828800" cy="365760"/>
+          </a:xfrm>
+          <a:prstGeom prst="rect">
+            <a:avLst/>
+          </a:prstGeom>
+          <a:noFill/>
+        </p:spPr>
+        <p:txBody>
+          <a:bodyPr wrap="square">
+            <a:spAutoFit/>
+          </a:bodyPr>
+          <a:lstStyle/>
+          <a:p>
+            <a:pPr algn="l"/>
+            <a:r>
+              <a:rPr sz="1500" b="1">
+                <a:solidFill>
+                  <a:srgbClr val="2F9E44"/>
+                </a:solidFill>
+                <a:latin typeface="Calibri"/>
+              </a:rPr>
+              <a:t>июл 2026</a:t>
+            </a:r>
+          </a:p>
+        </p:txBody>
+      </p:sp>
+      <p:sp>
+        <p:nvSpPr>
           <p:cNvPr id="14" name="TextBox 13"/>
           <p:cNvSpPr txBox="1"/>
           <p:nvPr/>
         </p:nvSpPr>
         <p:spPr>
           <a:xfrm>
-            <a:off x="777240" y="3840480"/>
-            <a:ext cx="1828800" cy="365760"/>
+            <a:off x="2834640" y="3886200"/>
+            <a:ext cx="8412480" cy="411480"/>
           </a:xfrm>
           <a:prstGeom prst="rect">
             <a:avLst/>
@@ -7772,44 +7458,9 @@
           <a:p>
             <a:pPr algn="l"/>
             <a:r>
-              <a:rPr sz="1500" b="1">
-                <a:solidFill>
-                  <a:srgbClr val="FFD54F"/>
-                </a:solidFill>
-                <a:latin typeface="Calibri"/>
-              </a:rPr>
-              <a:t>июл 2026</a:t>
-            </a:r>
-          </a:p>
-        </p:txBody>
-      </p:sp>
-      <p:sp>
-        <p:nvSpPr>
-          <p:cNvPr id="15" name="TextBox 14"/>
-          <p:cNvSpPr txBox="1"/>
-          <p:nvPr/>
-        </p:nvSpPr>
-        <p:spPr>
-          <a:xfrm>
-            <a:off x="2743200" y="3840480"/>
-            <a:ext cx="8503920" cy="411480"/>
-          </a:xfrm>
-          <a:prstGeom prst="rect">
-            <a:avLst/>
-          </a:prstGeom>
-          <a:noFill/>
-        </p:spPr>
-        <p:txBody>
-          <a:bodyPr wrap="square">
-            <a:spAutoFit/>
-          </a:bodyPr>
-          <a:lstStyle/>
-          <a:p>
-            <a:pPr algn="l"/>
-            <a:r>
               <a:rPr sz="1500" b="0">
                 <a:solidFill>
-                  <a:srgbClr val="FFFFFF"/>
+                  <a:srgbClr val="0D223B"/>
                 </a:solidFill>
                 <a:latin typeface="Calibri"/>
               </a:rPr>
@@ -7820,20 +7471,20 @@
       </p:sp>
       <p:sp>
         <p:nvSpPr>
-          <p:cNvPr id="16" name="Rounded Rectangle 15"/>
+          <p:cNvPr id="15" name="Rounded Rectangle 14"/>
           <p:cNvSpPr/>
           <p:nvPr/>
         </p:nvSpPr>
         <p:spPr>
           <a:xfrm>
-            <a:off x="548640" y="4617720"/>
-            <a:ext cx="11064240" cy="914400"/>
+            <a:off x="548640" y="4709159"/>
+            <a:ext cx="11064240" cy="960120"/>
           </a:xfrm>
           <a:prstGeom prst="roundRect">
             <a:avLst/>
           </a:prstGeom>
           <a:solidFill>
-            <a:srgbClr val="7A0C1E"/>
+            <a:srgbClr val="FFFFFF"/>
           </a:solidFill>
           <a:ln>
             <a:noFill/>
@@ -7863,14 +7514,49 @@
       </p:sp>
       <p:sp>
         <p:nvSpPr>
+          <p:cNvPr id="16" name="TextBox 15"/>
+          <p:cNvSpPr txBox="1"/>
+          <p:nvPr/>
+        </p:nvSpPr>
+        <p:spPr>
+          <a:xfrm>
+            <a:off x="822960" y="4983479"/>
+            <a:ext cx="1828800" cy="365760"/>
+          </a:xfrm>
+          <a:prstGeom prst="rect">
+            <a:avLst/>
+          </a:prstGeom>
+          <a:noFill/>
+        </p:spPr>
+        <p:txBody>
+          <a:bodyPr wrap="square">
+            <a:spAutoFit/>
+          </a:bodyPr>
+          <a:lstStyle/>
+          <a:p>
+            <a:pPr algn="l"/>
+            <a:r>
+              <a:rPr sz="1500" b="1">
+                <a:solidFill>
+                  <a:srgbClr val="2F9E44"/>
+                </a:solidFill>
+                <a:latin typeface="Calibri"/>
+              </a:rPr>
+              <a:t>окт 2026</a:t>
+            </a:r>
+          </a:p>
+        </p:txBody>
+      </p:sp>
+      <p:sp>
+        <p:nvSpPr>
           <p:cNvPr id="17" name="TextBox 16"/>
           <p:cNvSpPr txBox="1"/>
           <p:nvPr/>
         </p:nvSpPr>
         <p:spPr>
           <a:xfrm>
-            <a:off x="777240" y="4892040"/>
-            <a:ext cx="1828800" cy="365760"/>
+            <a:off x="2834640" y="4983479"/>
+            <a:ext cx="8412480" cy="411480"/>
           </a:xfrm>
           <a:prstGeom prst="rect">
             <a:avLst/>
@@ -7885,13 +7571,13 @@
           <a:p>
             <a:pPr algn="l"/>
             <a:r>
-              <a:rPr sz="1500" b="1">
-                <a:solidFill>
-                  <a:srgbClr val="FFD54F"/>
-                </a:solidFill>
-                <a:latin typeface="Calibri"/>
-              </a:rPr>
-              <a:t>окт 2026</a:t>
+              <a:rPr sz="1500" b="0">
+                <a:solidFill>
+                  <a:srgbClr val="0D223B"/>
+                </a:solidFill>
+                <a:latin typeface="Calibri"/>
+              </a:rPr>
+              <a:t>План: Full MA + запуск сертификации</a:t>
             </a:r>
           </a:p>
         </p:txBody>
@@ -7904,8 +7590,8 @@
         </p:nvSpPr>
         <p:spPr>
           <a:xfrm>
-            <a:off x="2743200" y="4892040"/>
-            <a:ext cx="8503920" cy="411480"/>
+            <a:off x="502920" y="6446520"/>
+            <a:ext cx="8229600" cy="274320"/>
           </a:xfrm>
           <a:prstGeom prst="rect">
             <a:avLst/>
@@ -7920,13 +7606,13 @@
           <a:p>
             <a:pPr algn="l"/>
             <a:r>
-              <a:rPr sz="1500" b="0">
-                <a:solidFill>
-                  <a:srgbClr val="FFFFFF"/>
-                </a:solidFill>
-                <a:latin typeface="Calibri"/>
-              </a:rPr>
-              <a:t>План: Full MA + запуск сертификации</a:t>
+              <a:rPr sz="1100" b="0">
+                <a:solidFill>
+                  <a:srgbClr val="5C6B72"/>
+                </a:solidFill>
+                <a:latin typeface="Calibri"/>
+              </a:rPr>
+              <a:t>IPMA Kyrgyz Republic  ·  ipma.kg</a:t>
             </a:r>
           </a:p>
         </p:txBody>
@@ -7939,64 +7625,29 @@
         </p:nvSpPr>
         <p:spPr>
           <a:xfrm>
-            <a:off x="457200" y="6446520"/>
-            <a:ext cx="8229600" cy="274320"/>
-          </a:xfrm>
-          <a:prstGeom prst="rect">
-            <a:avLst/>
-          </a:prstGeom>
-          <a:noFill/>
-        </p:spPr>
-        <p:txBody>
-          <a:bodyPr wrap="square">
-            <a:spAutoFit/>
-          </a:bodyPr>
-          <a:lstStyle/>
-          <a:p>
-            <a:pPr algn="l"/>
+            <a:off x="10515600" y="6446520"/>
+            <a:ext cx="1280160" cy="274320"/>
+          </a:xfrm>
+          <a:prstGeom prst="rect">
+            <a:avLst/>
+          </a:prstGeom>
+          <a:noFill/>
+        </p:spPr>
+        <p:txBody>
+          <a:bodyPr wrap="square">
+            <a:spAutoFit/>
+          </a:bodyPr>
+          <a:lstStyle/>
+          <a:p>
+            <a:pPr algn="r"/>
             <a:r>
               <a:rPr sz="1100" b="0">
                 <a:solidFill>
-                  <a:srgbClr val="F3DCC9"/>
-                </a:solidFill>
-                <a:latin typeface="Calibri"/>
-              </a:rPr>
-              <a:t>IPMA Kyrgyz Republic · ipma.kg · Ассоциация-заявитель</a:t>
-            </a:r>
-          </a:p>
-        </p:txBody>
-      </p:sp>
-      <p:sp>
-        <p:nvSpPr>
-          <p:cNvPr id="20" name="TextBox 19"/>
-          <p:cNvSpPr txBox="1"/>
-          <p:nvPr/>
-        </p:nvSpPr>
-        <p:spPr>
-          <a:xfrm>
-            <a:off x="10424160" y="6446520"/>
-            <a:ext cx="1371600" cy="274320"/>
-          </a:xfrm>
-          <a:prstGeom prst="rect">
-            <a:avLst/>
-          </a:prstGeom>
-          <a:noFill/>
-        </p:spPr>
-        <p:txBody>
-          <a:bodyPr wrap="square">
-            <a:spAutoFit/>
-          </a:bodyPr>
-          <a:lstStyle/>
-          <a:p>
-            <a:pPr algn="r"/>
-            <a:r>
-              <a:rPr sz="1100" b="0">
-                <a:solidFill>
-                  <a:srgbClr val="F3DCC9"/>
-                </a:solidFill>
-                <a:latin typeface="Calibri"/>
-              </a:rPr>
-              <a:t>6/12</a:t>
+                  <a:srgbClr val="5C6B72"/>
+                </a:solidFill>
+                <a:latin typeface="Calibri"/>
+              </a:rPr>
+              <a:t>06 / 12</a:t>
             </a:r>
           </a:p>
         </p:txBody>
@@ -8034,7 +7685,7 @@
             <a:avLst/>
           </a:prstGeom>
           <a:solidFill>
-            <a:srgbClr val="5C0A17"/>
+            <a:srgbClr val="EEF2F1"/>
           </a:solidFill>
           <a:ln>
             <a:noFill/>
@@ -8062,52 +7713,9 @@
           </a:p>
         </p:txBody>
       </p:sp>
-      <p:sp>
-        <p:nvSpPr>
-          <p:cNvPr id="3" name="Rectangle 2"/>
-          <p:cNvSpPr/>
-          <p:nvPr/>
-        </p:nvSpPr>
-        <p:spPr>
-          <a:xfrm>
-            <a:off x="0" y="0"/>
-            <a:ext cx="12191695" cy="73152"/>
-          </a:xfrm>
-          <a:prstGeom prst="rect">
-            <a:avLst/>
-          </a:prstGeom>
-          <a:solidFill>
-            <a:srgbClr val="FFD54F"/>
-          </a:solidFill>
-          <a:ln>
-            <a:noFill/>
-          </a:ln>
-        </p:spPr>
-        <p:style>
-          <a:lnRef idx="1">
-            <a:schemeClr val="accent1"/>
-          </a:lnRef>
-          <a:fillRef idx="3">
-            <a:schemeClr val="accent1"/>
-          </a:fillRef>
-          <a:effectRef idx="2">
-            <a:schemeClr val="accent1"/>
-          </a:effectRef>
-          <a:fontRef idx="minor">
-            <a:schemeClr val="lt1"/>
-          </a:fontRef>
-        </p:style>
-        <p:txBody>
-          <a:bodyPr rtlCol="0" anchor="ctr"/>
-          <a:lstStyle/>
-          <a:p>
-            <a:pPr algn="ctr"/>
-          </a:p>
-        </p:txBody>
-      </p:sp>
       <p:pic>
         <p:nvPicPr>
-          <p:cNvPr id="4" name="Picture 3" descr="ipma-kr-emblem.png"/>
+          <p:cNvPr id="3" name="Picture 2" descr="ipma-kr-emblem.png"/>
           <p:cNvPicPr>
             <a:picLocks noChangeAspect="1"/>
           </p:cNvPicPr>
@@ -8121,8 +7729,8 @@
         </p:blipFill>
         <p:spPr>
           <a:xfrm>
-            <a:off x="11292840" y="201168"/>
-            <a:ext cx="661788" cy="658368"/>
+            <a:off x="11292840" y="228600"/>
+            <a:ext cx="597448" cy="594360"/>
           </a:xfrm>
           <a:prstGeom prst="rect">
             <a:avLst/>
@@ -8131,14 +7739,49 @@
       </p:pic>
       <p:sp>
         <p:nvSpPr>
+          <p:cNvPr id="4" name="TextBox 3"/>
+          <p:cNvSpPr txBox="1"/>
+          <p:nvPr/>
+        </p:nvSpPr>
+        <p:spPr>
+          <a:xfrm>
+            <a:off x="548640" y="320040"/>
+            <a:ext cx="10972800" cy="274320"/>
+          </a:xfrm>
+          <a:prstGeom prst="rect">
+            <a:avLst/>
+          </a:prstGeom>
+          <a:noFill/>
+        </p:spPr>
+        <p:txBody>
+          <a:bodyPr wrap="square">
+            <a:spAutoFit/>
+          </a:bodyPr>
+          <a:lstStyle/>
+          <a:p>
+            <a:pPr algn="l"/>
+            <a:r>
+              <a:rPr sz="1100" b="1">
+                <a:solidFill>
+                  <a:srgbClr val="1F7A34"/>
+                </a:solidFill>
+                <a:latin typeface="Calibri"/>
+              </a:rPr>
+              <a:t>07  »  СТРАТЕГИЯ</a:t>
+            </a:r>
+          </a:p>
+        </p:txBody>
+      </p:sp>
+      <p:sp>
+        <p:nvSpPr>
           <p:cNvPr id="5" name="TextBox 4"/>
           <p:cNvSpPr txBox="1"/>
           <p:nvPr/>
         </p:nvSpPr>
         <p:spPr>
           <a:xfrm>
-            <a:off x="548640" y="320040"/>
-            <a:ext cx="10058400" cy="274320"/>
+            <a:off x="548640" y="640080"/>
+            <a:ext cx="10515600" cy="548640"/>
           </a:xfrm>
           <a:prstGeom prst="rect">
             <a:avLst/>
@@ -8153,13 +7796,13 @@
           <a:p>
             <a:pPr algn="l"/>
             <a:r>
-              <a:rPr sz="1100" b="1">
-                <a:solidFill>
-                  <a:srgbClr val="FFD54F"/>
-                </a:solidFill>
-                <a:latin typeface="Calibri"/>
-              </a:rPr>
-              <a:t>05 · СТРАТЕГИЯ</a:t>
+              <a:rPr sz="2800" b="1">
+                <a:solidFill>
+                  <a:srgbClr val="0D223B"/>
+                </a:solidFill>
+                <a:latin typeface="Arial"/>
+              </a:rPr>
+              <a:t>Стратегические цели</a:t>
             </a:r>
           </a:p>
         </p:txBody>
@@ -8167,41 +7810,6 @@
       <p:sp>
         <p:nvSpPr>
           <p:cNvPr id="6" name="TextBox 5"/>
-          <p:cNvSpPr txBox="1"/>
-          <p:nvPr/>
-        </p:nvSpPr>
-        <p:spPr>
-          <a:xfrm>
-            <a:off x="548640" y="640080"/>
-            <a:ext cx="10241280" cy="548640"/>
-          </a:xfrm>
-          <a:prstGeom prst="rect">
-            <a:avLst/>
-          </a:prstGeom>
-          <a:noFill/>
-        </p:spPr>
-        <p:txBody>
-          <a:bodyPr wrap="square">
-            <a:spAutoFit/>
-          </a:bodyPr>
-          <a:lstStyle/>
-          <a:p>
-            <a:pPr algn="l"/>
-            <a:r>
-              <a:rPr sz="2800" b="1">
-                <a:solidFill>
-                  <a:srgbClr val="FFFFFF"/>
-                </a:solidFill>
-                <a:latin typeface="Georgia"/>
-              </a:rPr>
-              <a:t>Стратегические цели</a:t>
-            </a:r>
-          </a:p>
-        </p:txBody>
-      </p:sp>
-      <p:sp>
-        <p:nvSpPr>
-          <p:cNvPr id="7" name="TextBox 6"/>
           <p:cNvSpPr txBox="1"/>
           <p:nvPr/>
         </p:nvSpPr>
@@ -8223,113 +7831,132 @@
           <a:p>
             <a:pPr>
               <a:spcAft>
-                <a:spcPts val="1200"/>
+                <a:spcPts val="1400"/>
               </a:spcAft>
             </a:pPr>
             <a:r>
-              <a:rPr sz="1500" b="0">
-                <a:solidFill>
-                  <a:srgbClr val="FFFFFF"/>
-                </a:solidFill>
-                <a:latin typeface="Calibri"/>
-              </a:rPr>
-              <a:t>• Перейти от Ассоциации-заявителя к Full Member Association</a:t>
+              <a:rPr sz="1600" b="0">
+                <a:solidFill>
+                  <a:srgbClr val="28394A"/>
+                </a:solidFill>
+                <a:latin typeface="Calibri"/>
+              </a:rPr>
+              <a:t>» Перейти от Ассоциации-заявителя к Full Member Association</a:t>
             </a:r>
           </a:p>
           <a:p>
             <a:pPr>
               <a:spcAft>
-                <a:spcPts val="1200"/>
+                <a:spcPts val="1400"/>
               </a:spcAft>
             </a:pPr>
             <a:r>
-              <a:rPr sz="1500" b="0">
-                <a:solidFill>
-                  <a:srgbClr val="FFFFFF"/>
-                </a:solidFill>
-                <a:latin typeface="Calibri"/>
-              </a:rPr>
-              <a:t>• Создать независимый национальный CB по системе IPMA 4-L-C</a:t>
+              <a:rPr sz="1600" b="0">
+                <a:solidFill>
+                  <a:srgbClr val="28394A"/>
+                </a:solidFill>
+                <a:latin typeface="Calibri"/>
+              </a:rPr>
+              <a:t>» Создать независимый национальный CB по системе IPMA 4-L-C</a:t>
             </a:r>
           </a:p>
           <a:p>
             <a:pPr>
               <a:spcAft>
-                <a:spcPts val="1200"/>
+                <a:spcPts val="1400"/>
               </a:spcAft>
             </a:pPr>
             <a:r>
-              <a:rPr sz="1500" b="0">
-                <a:solidFill>
-                  <a:srgbClr val="FFFFFF"/>
-                </a:solidFill>
-                <a:latin typeface="Calibri"/>
-              </a:rPr>
-              <a:t>• Рост членской базы: индивидуальное, студенческое, корпоративное</a:t>
+              <a:rPr sz="1600" b="0">
+                <a:solidFill>
+                  <a:srgbClr val="28394A"/>
+                </a:solidFill>
+                <a:latin typeface="Calibri"/>
+              </a:rPr>
+              <a:t>» Рост членской базы: индивидуальное, студенческое, корпоративное</a:t>
             </a:r>
           </a:p>
           <a:p>
             <a:pPr>
               <a:spcAft>
-                <a:spcPts val="1200"/>
+                <a:spcPts val="1400"/>
               </a:spcAft>
             </a:pPr>
             <a:r>
-              <a:rPr sz="1500" b="0">
-                <a:solidFill>
-                  <a:srgbClr val="FFFFFF"/>
-                </a:solidFill>
-                <a:latin typeface="Calibri"/>
-              </a:rPr>
-              <a:t>• Продвигать ICB4 / OCB / PEB в госсекторе и бизнесе</a:t>
+              <a:rPr sz="1600" b="0">
+                <a:solidFill>
+                  <a:srgbClr val="28394A"/>
+                </a:solidFill>
+                <a:latin typeface="Calibri"/>
+              </a:rPr>
+              <a:t>» Продвигать ICB4 / OCB / PEB в госсекторе и бизнесе</a:t>
             </a:r>
           </a:p>
           <a:p>
             <a:pPr>
               <a:spcAft>
-                <a:spcPts val="1200"/>
+                <a:spcPts val="1400"/>
               </a:spcAft>
             </a:pPr>
             <a:r>
-              <a:rPr sz="1500" b="0">
-                <a:solidFill>
-                  <a:srgbClr val="FFFFFF"/>
-                </a:solidFill>
-                <a:latin typeface="Calibri"/>
-              </a:rPr>
-              <a:t>• Партнёрства с вузами, госорганами и бизнес-сообществом</a:t>
+              <a:rPr sz="1600" b="0">
+                <a:solidFill>
+                  <a:srgbClr val="28394A"/>
+                </a:solidFill>
+                <a:latin typeface="Calibri"/>
+              </a:rPr>
+              <a:t>» Партнёрства с вузами, госорганами и бизнес-сообществом</a:t>
             </a:r>
           </a:p>
           <a:p>
             <a:pPr>
               <a:spcAft>
-                <a:spcPts val="1200"/>
+                <a:spcPts val="1400"/>
               </a:spcAft>
             </a:pPr>
             <a:r>
-              <a:rPr sz="1500" b="0">
-                <a:solidFill>
-                  <a:srgbClr val="FFFFFF"/>
-                </a:solidFill>
-                <a:latin typeface="Calibri"/>
-              </a:rPr>
-              <a:t>• Сотрудничество с MA Центральной Азии и ЕАЭС</a:t>
-            </a:r>
-          </a:p>
-          <a:p>
-            <a:pPr>
-              <a:spcAft>
-                <a:spcPts val="1200"/>
-              </a:spcAft>
-            </a:pPr>
-            <a:r>
-              <a:rPr sz="1500" b="0">
-                <a:solidFill>
-                  <a:srgbClr val="FFFFFF"/>
-                </a:solidFill>
-                <a:latin typeface="Calibri"/>
-              </a:rPr>
-              <a:t>• Запустить Young Crew в Кыргызстане</a:t>
+              <a:rPr sz="1600" b="0">
+                <a:solidFill>
+                  <a:srgbClr val="28394A"/>
+                </a:solidFill>
+                <a:latin typeface="Calibri"/>
+              </a:rPr>
+              <a:t>» Сотрудничество с MA Центральной Азии и ЕАЭС · запуск Young Crew</a:t>
+            </a:r>
+          </a:p>
+        </p:txBody>
+      </p:sp>
+      <p:sp>
+        <p:nvSpPr>
+          <p:cNvPr id="7" name="TextBox 6"/>
+          <p:cNvSpPr txBox="1"/>
+          <p:nvPr/>
+        </p:nvSpPr>
+        <p:spPr>
+          <a:xfrm>
+            <a:off x="502920" y="6446520"/>
+            <a:ext cx="8229600" cy="274320"/>
+          </a:xfrm>
+          <a:prstGeom prst="rect">
+            <a:avLst/>
+          </a:prstGeom>
+          <a:noFill/>
+        </p:spPr>
+        <p:txBody>
+          <a:bodyPr wrap="square">
+            <a:spAutoFit/>
+          </a:bodyPr>
+          <a:lstStyle/>
+          <a:p>
+            <a:pPr algn="l"/>
+            <a:r>
+              <a:rPr sz="1100" b="0">
+                <a:solidFill>
+                  <a:srgbClr val="5C6B72"/>
+                </a:solidFill>
+                <a:latin typeface="Calibri"/>
+              </a:rPr>
+              <a:t>IPMA Kyrgyz Republic  ·  ipma.kg</a:t>
             </a:r>
           </a:p>
         </p:txBody>
@@ -8342,64 +7969,29 @@
         </p:nvSpPr>
         <p:spPr>
           <a:xfrm>
-            <a:off x="457200" y="6446520"/>
-            <a:ext cx="8229600" cy="274320"/>
-          </a:xfrm>
-          <a:prstGeom prst="rect">
-            <a:avLst/>
-          </a:prstGeom>
-          <a:noFill/>
-        </p:spPr>
-        <p:txBody>
-          <a:bodyPr wrap="square">
-            <a:spAutoFit/>
-          </a:bodyPr>
-          <a:lstStyle/>
-          <a:p>
-            <a:pPr algn="l"/>
+            <a:off x="10515600" y="6446520"/>
+            <a:ext cx="1280160" cy="274320"/>
+          </a:xfrm>
+          <a:prstGeom prst="rect">
+            <a:avLst/>
+          </a:prstGeom>
+          <a:noFill/>
+        </p:spPr>
+        <p:txBody>
+          <a:bodyPr wrap="square">
+            <a:spAutoFit/>
+          </a:bodyPr>
+          <a:lstStyle/>
+          <a:p>
+            <a:pPr algn="r"/>
             <a:r>
               <a:rPr sz="1100" b="0">
                 <a:solidFill>
-                  <a:srgbClr val="F3DCC9"/>
-                </a:solidFill>
-                <a:latin typeface="Calibri"/>
-              </a:rPr>
-              <a:t>IPMA Kyrgyz Republic · ipma.kg · Ассоциация-заявитель</a:t>
-            </a:r>
-          </a:p>
-        </p:txBody>
-      </p:sp>
-      <p:sp>
-        <p:nvSpPr>
-          <p:cNvPr id="9" name="TextBox 8"/>
-          <p:cNvSpPr txBox="1"/>
-          <p:nvPr/>
-        </p:nvSpPr>
-        <p:spPr>
-          <a:xfrm>
-            <a:off x="10424160" y="6446520"/>
-            <a:ext cx="1371600" cy="274320"/>
-          </a:xfrm>
-          <a:prstGeom prst="rect">
-            <a:avLst/>
-          </a:prstGeom>
-          <a:noFill/>
-        </p:spPr>
-        <p:txBody>
-          <a:bodyPr wrap="square">
-            <a:spAutoFit/>
-          </a:bodyPr>
-          <a:lstStyle/>
-          <a:p>
-            <a:pPr algn="r"/>
-            <a:r>
-              <a:rPr sz="1100" b="0">
-                <a:solidFill>
-                  <a:srgbClr val="F3DCC9"/>
-                </a:solidFill>
-                <a:latin typeface="Calibri"/>
-              </a:rPr>
-              <a:t>7/12</a:t>
+                  <a:srgbClr val="5C6B72"/>
+                </a:solidFill>
+                <a:latin typeface="Calibri"/>
+              </a:rPr>
+              <a:t>07 / 12</a:t>
             </a:r>
           </a:p>
         </p:txBody>
@@ -8437,7 +8029,7 @@
             <a:avLst/>
           </a:prstGeom>
           <a:solidFill>
-            <a:srgbClr val="5C0A17"/>
+            <a:srgbClr val="EEF2F1"/>
           </a:solidFill>
           <a:ln>
             <a:noFill/>
@@ -8465,52 +8057,9 @@
           </a:p>
         </p:txBody>
       </p:sp>
-      <p:sp>
-        <p:nvSpPr>
-          <p:cNvPr id="3" name="Rectangle 2"/>
-          <p:cNvSpPr/>
-          <p:nvPr/>
-        </p:nvSpPr>
-        <p:spPr>
-          <a:xfrm>
-            <a:off x="0" y="0"/>
-            <a:ext cx="12191695" cy="73152"/>
-          </a:xfrm>
-          <a:prstGeom prst="rect">
-            <a:avLst/>
-          </a:prstGeom>
-          <a:solidFill>
-            <a:srgbClr val="FFD54F"/>
-          </a:solidFill>
-          <a:ln>
-            <a:noFill/>
-          </a:ln>
-        </p:spPr>
-        <p:style>
-          <a:lnRef idx="1">
-            <a:schemeClr val="accent1"/>
-          </a:lnRef>
-          <a:fillRef idx="3">
-            <a:schemeClr val="accent1"/>
-          </a:fillRef>
-          <a:effectRef idx="2">
-            <a:schemeClr val="accent1"/>
-          </a:effectRef>
-          <a:fontRef idx="minor">
-            <a:schemeClr val="lt1"/>
-          </a:fontRef>
-        </p:style>
-        <p:txBody>
-          <a:bodyPr rtlCol="0" anchor="ctr"/>
-          <a:lstStyle/>
-          <a:p>
-            <a:pPr algn="ctr"/>
-          </a:p>
-        </p:txBody>
-      </p:sp>
       <p:pic>
         <p:nvPicPr>
-          <p:cNvPr id="4" name="Picture 3" descr="ipma-kr-emblem.png"/>
+          <p:cNvPr id="3" name="Picture 2" descr="ipma-kr-emblem.png"/>
           <p:cNvPicPr>
             <a:picLocks noChangeAspect="1"/>
           </p:cNvPicPr>
@@ -8524,8 +8073,8 @@
         </p:blipFill>
         <p:spPr>
           <a:xfrm>
-            <a:off x="11292840" y="201168"/>
-            <a:ext cx="661788" cy="658368"/>
+            <a:off x="11292840" y="228600"/>
+            <a:ext cx="597448" cy="594360"/>
           </a:xfrm>
           <a:prstGeom prst="rect">
             <a:avLst/>
@@ -8534,14 +8083,49 @@
       </p:pic>
       <p:sp>
         <p:nvSpPr>
+          <p:cNvPr id="4" name="TextBox 3"/>
+          <p:cNvSpPr txBox="1"/>
+          <p:nvPr/>
+        </p:nvSpPr>
+        <p:spPr>
+          <a:xfrm>
+            <a:off x="548640" y="320040"/>
+            <a:ext cx="10972800" cy="274320"/>
+          </a:xfrm>
+          <a:prstGeom prst="rect">
+            <a:avLst/>
+          </a:prstGeom>
+          <a:noFill/>
+        </p:spPr>
+        <p:txBody>
+          <a:bodyPr wrap="square">
+            <a:spAutoFit/>
+          </a:bodyPr>
+          <a:lstStyle/>
+          <a:p>
+            <a:pPr algn="l"/>
+            <a:r>
+              <a:rPr sz="1100" b="1">
+                <a:solidFill>
+                  <a:srgbClr val="1F7A34"/>
+                </a:solidFill>
+                <a:latin typeface="Calibri"/>
+              </a:rPr>
+              <a:t>08  »  СЕРТИФИКАЦИЯ</a:t>
+            </a:r>
+          </a:p>
+        </p:txBody>
+      </p:sp>
+      <p:sp>
+        <p:nvSpPr>
           <p:cNvPr id="5" name="TextBox 4"/>
           <p:cNvSpPr txBox="1"/>
           <p:nvPr/>
         </p:nvSpPr>
         <p:spPr>
           <a:xfrm>
-            <a:off x="548640" y="320040"/>
-            <a:ext cx="10058400" cy="274320"/>
+            <a:off x="548640" y="640080"/>
+            <a:ext cx="10515600" cy="548640"/>
           </a:xfrm>
           <a:prstGeom prst="rect">
             <a:avLst/>
@@ -8556,13 +8140,13 @@
           <a:p>
             <a:pPr algn="l"/>
             <a:r>
-              <a:rPr sz="1100" b="1">
-                <a:solidFill>
-                  <a:srgbClr val="FFD54F"/>
-                </a:solidFill>
-                <a:latin typeface="Calibri"/>
-              </a:rPr>
-              <a:t>06 · СЕРТИФИКАЦИЯ</a:t>
+              <a:rPr sz="2800" b="1">
+                <a:solidFill>
+                  <a:srgbClr val="0D223B"/>
+                </a:solidFill>
+                <a:latin typeface="Arial"/>
+              </a:rPr>
+              <a:t>Certification Body · уровни IPMA</a:t>
             </a:r>
           </a:p>
         </p:txBody>
@@ -8575,8 +8159,8 @@
         </p:nvSpPr>
         <p:spPr>
           <a:xfrm>
-            <a:off x="548640" y="640080"/>
-            <a:ext cx="10241280" cy="548640"/>
+            <a:off x="548640" y="1325880"/>
+            <a:ext cx="10972800" cy="457200"/>
           </a:xfrm>
           <a:prstGeom prst="rect">
             <a:avLst/>
@@ -8591,68 +8175,33 @@
           <a:p>
             <a:pPr algn="l"/>
             <a:r>
-              <a:rPr sz="2800" b="1">
-                <a:solidFill>
-                  <a:srgbClr val="FFFFFF"/>
-                </a:solidFill>
-                <a:latin typeface="Georgia"/>
-              </a:rPr>
-              <a:t>Certification Body и уровни IPMA</a:t>
-            </a:r>
-          </a:p>
-        </p:txBody>
-      </p:sp>
-      <p:sp>
-        <p:nvSpPr>
-          <p:cNvPr id="7" name="TextBox 6"/>
-          <p:cNvSpPr txBox="1"/>
-          <p:nvPr/>
-        </p:nvSpPr>
-        <p:spPr>
-          <a:xfrm>
-            <a:off x="548640" y="1371600"/>
-            <a:ext cx="10972800" cy="640080"/>
-          </a:xfrm>
-          <a:prstGeom prst="rect">
-            <a:avLst/>
-          </a:prstGeom>
-          <a:noFill/>
-        </p:spPr>
-        <p:txBody>
-          <a:bodyPr wrap="square">
-            <a:spAutoFit/>
-          </a:bodyPr>
-          <a:lstStyle/>
-          <a:p>
-            <a:pPr algn="l"/>
-            <a:r>
-              <a:rPr sz="1500" b="0">
-                <a:solidFill>
-                  <a:srgbClr val="F3DCC9"/>
-                </a:solidFill>
-                <a:latin typeface="Calibri"/>
-              </a:rPr>
-              <a:t>Независимый CB по IPMA 4-L-C. Оценка по ICB4: самооценка, экзамен, интервью.</a:t>
-            </a:r>
-          </a:p>
-        </p:txBody>
-      </p:sp>
-      <p:sp>
-        <p:nvSpPr>
-          <p:cNvPr id="8" name="Rounded Rectangle 7"/>
+              <a:rPr sz="1400" b="0">
+                <a:solidFill>
+                  <a:srgbClr val="5C6B72"/>
+                </a:solidFill>
+                <a:latin typeface="Calibri"/>
+              </a:rPr>
+              <a:t>Независимый CB по 4-L-C. Оценка по ICB4: самооценка, экзамен, интервью.</a:t>
+            </a:r>
+          </a:p>
+        </p:txBody>
+      </p:sp>
+      <p:sp>
+        <p:nvSpPr>
+          <p:cNvPr id="7" name="Rounded Rectangle 6"/>
           <p:cNvSpPr/>
           <p:nvPr/>
         </p:nvSpPr>
         <p:spPr>
           <a:xfrm>
-            <a:off x="548640" y="2286000"/>
-            <a:ext cx="2743200" cy="2926080"/>
+            <a:off x="548640" y="2011680"/>
+            <a:ext cx="2743200" cy="3200400"/>
           </a:xfrm>
           <a:prstGeom prst="roundRect">
             <a:avLst/>
           </a:prstGeom>
           <a:solidFill>
-            <a:srgbClr val="7A0C1E"/>
+            <a:srgbClr val="FFFFFF"/>
           </a:solidFill>
           <a:ln>
             <a:noFill/>
@@ -8682,14 +8231,49 @@
       </p:sp>
       <p:sp>
         <p:nvSpPr>
+          <p:cNvPr id="8" name="TextBox 7"/>
+          <p:cNvSpPr txBox="1"/>
+          <p:nvPr/>
+        </p:nvSpPr>
+        <p:spPr>
+          <a:xfrm>
+            <a:off x="731520" y="2468880"/>
+            <a:ext cx="2377440" cy="548640"/>
+          </a:xfrm>
+          <a:prstGeom prst="rect">
+            <a:avLst/>
+          </a:prstGeom>
+          <a:noFill/>
+        </p:spPr>
+        <p:txBody>
+          <a:bodyPr wrap="square">
+            <a:spAutoFit/>
+          </a:bodyPr>
+          <a:lstStyle/>
+          <a:p>
+            <a:pPr algn="ctr"/>
+            <a:r>
+              <a:rPr sz="3600" b="1">
+                <a:solidFill>
+                  <a:srgbClr val="2F9E44"/>
+                </a:solidFill>
+                <a:latin typeface="Calibri"/>
+              </a:rPr>
+              <a:t>A</a:t>
+            </a:r>
+          </a:p>
+        </p:txBody>
+      </p:sp>
+      <p:sp>
+        <p:nvSpPr>
           <p:cNvPr id="9" name="TextBox 8"/>
           <p:cNvSpPr txBox="1"/>
           <p:nvPr/>
         </p:nvSpPr>
         <p:spPr>
           <a:xfrm>
-            <a:off x="731520" y="2651760"/>
-            <a:ext cx="2377440" cy="548640"/>
+            <a:off x="731520" y="3291840"/>
+            <a:ext cx="2377440" cy="731520"/>
           </a:xfrm>
           <a:prstGeom prst="rect">
             <a:avLst/>
@@ -8704,13 +8288,13 @@
           <a:p>
             <a:pPr algn="ctr"/>
             <a:r>
-              <a:rPr sz="2200" b="1">
-                <a:solidFill>
-                  <a:srgbClr val="FFD54F"/>
-                </a:solidFill>
-                <a:latin typeface="Calibri"/>
-              </a:rPr>
-              <a:t>Level A</a:t>
+              <a:rPr sz="1400" b="1">
+                <a:solidFill>
+                  <a:srgbClr val="0D223B"/>
+                </a:solidFill>
+                <a:latin typeface="Calibri"/>
+              </a:rPr>
+              <a:t>Projects Director</a:t>
             </a:r>
           </a:p>
         </p:txBody>
@@ -8723,8 +8307,8 @@
         </p:nvSpPr>
         <p:spPr>
           <a:xfrm>
-            <a:off x="731520" y="3383280"/>
-            <a:ext cx="2377440" cy="1097280"/>
+            <a:off x="731520" y="4114800"/>
+            <a:ext cx="2377440" cy="457200"/>
           </a:xfrm>
           <a:prstGeom prst="rect">
             <a:avLst/>
@@ -8739,13 +8323,13 @@
           <a:p>
             <a:pPr algn="ctr"/>
             <a:r>
-              <a:rPr sz="1400" b="0">
-                <a:solidFill>
-                  <a:srgbClr val="FFFFFF"/>
-                </a:solidFill>
-                <a:latin typeface="Calibri"/>
-              </a:rPr>
-              <a:t>Projects Director</a:t>
+              <a:rPr sz="1200" b="0">
+                <a:solidFill>
+                  <a:srgbClr val="5C6B72"/>
+                </a:solidFill>
+                <a:latin typeface="Calibri"/>
+              </a:rPr>
+              <a:t>Портфели</a:t>
             </a:r>
           </a:p>
         </p:txBody>
@@ -8758,14 +8342,14 @@
         </p:nvSpPr>
         <p:spPr>
           <a:xfrm>
-            <a:off x="3429000" y="2286000"/>
-            <a:ext cx="2743200" cy="2926080"/>
+            <a:off x="3429000" y="2011680"/>
+            <a:ext cx="2743200" cy="3200400"/>
           </a:xfrm>
           <a:prstGeom prst="roundRect">
             <a:avLst/>
           </a:prstGeom>
           <a:solidFill>
-            <a:srgbClr val="7A0C1E"/>
+            <a:srgbClr val="FFFFFF"/>
           </a:solidFill>
           <a:ln>
             <a:noFill/>
@@ -8801,7 +8385,7 @@
         </p:nvSpPr>
         <p:spPr>
           <a:xfrm>
-            <a:off x="3611880" y="2651760"/>
+            <a:off x="3611880" y="2468880"/>
             <a:ext cx="2377440" cy="548640"/>
           </a:xfrm>
           <a:prstGeom prst="rect">
@@ -8817,13 +8401,13 @@
           <a:p>
             <a:pPr algn="ctr"/>
             <a:r>
-              <a:rPr sz="2200" b="1">
-                <a:solidFill>
-                  <a:srgbClr val="FFD54F"/>
-                </a:solidFill>
-                <a:latin typeface="Calibri"/>
-              </a:rPr>
-              <a:t>Level B</a:t>
+              <a:rPr sz="3600" b="1">
+                <a:solidFill>
+                  <a:srgbClr val="2F9E44"/>
+                </a:solidFill>
+                <a:latin typeface="Calibri"/>
+              </a:rPr>
+              <a:t>B</a:t>
             </a:r>
           </a:p>
         </p:txBody>
@@ -8836,8 +8420,8 @@
         </p:nvSpPr>
         <p:spPr>
           <a:xfrm>
-            <a:off x="3611880" y="3383280"/>
-            <a:ext cx="2377440" cy="1097280"/>
+            <a:off x="3611880" y="3291840"/>
+            <a:ext cx="2377440" cy="731520"/>
           </a:xfrm>
           <a:prstGeom prst="rect">
             <a:avLst/>
@@ -8852,9 +8436,9 @@
           <a:p>
             <a:pPr algn="ctr"/>
             <a:r>
-              <a:rPr sz="1400" b="0">
-                <a:solidFill>
-                  <a:srgbClr val="FFFFFF"/>
+              <a:rPr sz="1400" b="1">
+                <a:solidFill>
+                  <a:srgbClr val="0D223B"/>
                 </a:solidFill>
                 <a:latin typeface="Calibri"/>
               </a:rPr>
@@ -8865,20 +8449,55 @@
       </p:sp>
       <p:sp>
         <p:nvSpPr>
-          <p:cNvPr id="14" name="Rounded Rectangle 13"/>
+          <p:cNvPr id="14" name="TextBox 13"/>
+          <p:cNvSpPr txBox="1"/>
+          <p:nvPr/>
+        </p:nvSpPr>
+        <p:spPr>
+          <a:xfrm>
+            <a:off x="3611880" y="4114800"/>
+            <a:ext cx="2377440" cy="457200"/>
+          </a:xfrm>
+          <a:prstGeom prst="rect">
+            <a:avLst/>
+          </a:prstGeom>
+          <a:noFill/>
+        </p:spPr>
+        <p:txBody>
+          <a:bodyPr wrap="square">
+            <a:spAutoFit/>
+          </a:bodyPr>
+          <a:lstStyle/>
+          <a:p>
+            <a:pPr algn="ctr"/>
+            <a:r>
+              <a:rPr sz="1200" b="0">
+                <a:solidFill>
+                  <a:srgbClr val="5C6B72"/>
+                </a:solidFill>
+                <a:latin typeface="Calibri"/>
+              </a:rPr>
+              <a:t>Сложные проекты</a:t>
+            </a:r>
+          </a:p>
+        </p:txBody>
+      </p:sp>
+      <p:sp>
+        <p:nvSpPr>
+          <p:cNvPr id="15" name="Rounded Rectangle 14"/>
           <p:cNvSpPr/>
           <p:nvPr/>
         </p:nvSpPr>
         <p:spPr>
           <a:xfrm>
-            <a:off x="6309359" y="2286000"/>
-            <a:ext cx="2743200" cy="2926080"/>
+            <a:off x="6309359" y="2011680"/>
+            <a:ext cx="2743200" cy="3200400"/>
           </a:xfrm>
           <a:prstGeom prst="roundRect">
             <a:avLst/>
           </a:prstGeom>
           <a:solidFill>
-            <a:srgbClr val="7A0C1E"/>
+            <a:srgbClr val="FFFFFF"/>
           </a:solidFill>
           <a:ln>
             <a:noFill/>
@@ -8908,13 +8527,13 @@
       </p:sp>
       <p:sp>
         <p:nvSpPr>
-          <p:cNvPr id="15" name="TextBox 14"/>
-          <p:cNvSpPr txBox="1"/>
-          <p:nvPr/>
-        </p:nvSpPr>
-        <p:spPr>
-          <a:xfrm>
-            <a:off x="6492239" y="2651760"/>
+          <p:cNvPr id="16" name="TextBox 15"/>
+          <p:cNvSpPr txBox="1"/>
+          <p:nvPr/>
+        </p:nvSpPr>
+        <p:spPr>
+          <a:xfrm>
+            <a:off x="6492239" y="2468880"/>
             <a:ext cx="2377440" cy="548640"/>
           </a:xfrm>
           <a:prstGeom prst="rect">
@@ -8930,27 +8549,27 @@
           <a:p>
             <a:pPr algn="ctr"/>
             <a:r>
-              <a:rPr sz="2200" b="1">
-                <a:solidFill>
-                  <a:srgbClr val="FFD54F"/>
-                </a:solidFill>
-                <a:latin typeface="Calibri"/>
-              </a:rPr>
-              <a:t>Level C</a:t>
-            </a:r>
-          </a:p>
-        </p:txBody>
-      </p:sp>
-      <p:sp>
-        <p:nvSpPr>
-          <p:cNvPr id="16" name="TextBox 15"/>
-          <p:cNvSpPr txBox="1"/>
-          <p:nvPr/>
-        </p:nvSpPr>
-        <p:spPr>
-          <a:xfrm>
-            <a:off x="6492239" y="3383280"/>
-            <a:ext cx="2377440" cy="1097280"/>
+              <a:rPr sz="3600" b="1">
+                <a:solidFill>
+                  <a:srgbClr val="2F9E44"/>
+                </a:solidFill>
+                <a:latin typeface="Calibri"/>
+              </a:rPr>
+              <a:t>C</a:t>
+            </a:r>
+          </a:p>
+        </p:txBody>
+      </p:sp>
+      <p:sp>
+        <p:nvSpPr>
+          <p:cNvPr id="17" name="TextBox 16"/>
+          <p:cNvSpPr txBox="1"/>
+          <p:nvPr/>
+        </p:nvSpPr>
+        <p:spPr>
+          <a:xfrm>
+            <a:off x="6492239" y="3291840"/>
+            <a:ext cx="2377440" cy="731520"/>
           </a:xfrm>
           <a:prstGeom prst="rect">
             <a:avLst/>
@@ -8965,9 +8584,9 @@
           <a:p>
             <a:pPr algn="ctr"/>
             <a:r>
-              <a:rPr sz="1400" b="0">
-                <a:solidFill>
-                  <a:srgbClr val="FFFFFF"/>
+              <a:rPr sz="1400" b="1">
+                <a:solidFill>
+                  <a:srgbClr val="0D223B"/>
                 </a:solidFill>
                 <a:latin typeface="Calibri"/>
               </a:rPr>
@@ -8978,20 +8597,55 @@
       </p:sp>
       <p:sp>
         <p:nvSpPr>
-          <p:cNvPr id="17" name="Rounded Rectangle 16"/>
+          <p:cNvPr id="18" name="TextBox 17"/>
+          <p:cNvSpPr txBox="1"/>
+          <p:nvPr/>
+        </p:nvSpPr>
+        <p:spPr>
+          <a:xfrm>
+            <a:off x="6492239" y="4114800"/>
+            <a:ext cx="2377440" cy="457200"/>
+          </a:xfrm>
+          <a:prstGeom prst="rect">
+            <a:avLst/>
+          </a:prstGeom>
+          <a:noFill/>
+        </p:spPr>
+        <p:txBody>
+          <a:bodyPr wrap="square">
+            <a:spAutoFit/>
+          </a:bodyPr>
+          <a:lstStyle/>
+          <a:p>
+            <a:pPr algn="ctr"/>
+            <a:r>
+              <a:rPr sz="1200" b="0">
+                <a:solidFill>
+                  <a:srgbClr val="5C6B72"/>
+                </a:solidFill>
+                <a:latin typeface="Calibri"/>
+              </a:rPr>
+              <a:t>Средняя сложность</a:t>
+            </a:r>
+          </a:p>
+        </p:txBody>
+      </p:sp>
+      <p:sp>
+        <p:nvSpPr>
+          <p:cNvPr id="19" name="Rounded Rectangle 18"/>
           <p:cNvSpPr/>
           <p:nvPr/>
         </p:nvSpPr>
         <p:spPr>
           <a:xfrm>
-            <a:off x="9189719" y="2286000"/>
-            <a:ext cx="2743200" cy="2926080"/>
+            <a:off x="9189719" y="2011680"/>
+            <a:ext cx="2743200" cy="3200400"/>
           </a:xfrm>
           <a:prstGeom prst="roundRect">
             <a:avLst/>
           </a:prstGeom>
           <a:solidFill>
-            <a:srgbClr val="7A0C1E"/>
+            <a:srgbClr val="FFFFFF"/>
           </a:solidFill>
           <a:ln>
             <a:noFill/>
@@ -9021,13 +8675,13 @@
       </p:sp>
       <p:sp>
         <p:nvSpPr>
-          <p:cNvPr id="18" name="TextBox 17"/>
-          <p:cNvSpPr txBox="1"/>
-          <p:nvPr/>
-        </p:nvSpPr>
-        <p:spPr>
-          <a:xfrm>
-            <a:off x="9372599" y="2651760"/>
+          <p:cNvPr id="20" name="TextBox 19"/>
+          <p:cNvSpPr txBox="1"/>
+          <p:nvPr/>
+        </p:nvSpPr>
+        <p:spPr>
+          <a:xfrm>
+            <a:off x="9372599" y="2468880"/>
             <a:ext cx="2377440" cy="548640"/>
           </a:xfrm>
           <a:prstGeom prst="rect">
@@ -9043,27 +8697,27 @@
           <a:p>
             <a:pPr algn="ctr"/>
             <a:r>
-              <a:rPr sz="2200" b="1">
-                <a:solidFill>
-                  <a:srgbClr val="FFD54F"/>
-                </a:solidFill>
-                <a:latin typeface="Calibri"/>
-              </a:rPr>
-              <a:t>Level D</a:t>
-            </a:r>
-          </a:p>
-        </p:txBody>
-      </p:sp>
-      <p:sp>
-        <p:nvSpPr>
-          <p:cNvPr id="19" name="TextBox 18"/>
-          <p:cNvSpPr txBox="1"/>
-          <p:nvPr/>
-        </p:nvSpPr>
-        <p:spPr>
-          <a:xfrm>
-            <a:off x="9372599" y="3383280"/>
-            <a:ext cx="2377440" cy="1097280"/>
+              <a:rPr sz="3600" b="1">
+                <a:solidFill>
+                  <a:srgbClr val="2F9E44"/>
+                </a:solidFill>
+                <a:latin typeface="Calibri"/>
+              </a:rPr>
+              <a:t>D</a:t>
+            </a:r>
+          </a:p>
+        </p:txBody>
+      </p:sp>
+      <p:sp>
+        <p:nvSpPr>
+          <p:cNvPr id="21" name="TextBox 20"/>
+          <p:cNvSpPr txBox="1"/>
+          <p:nvPr/>
+        </p:nvSpPr>
+        <p:spPr>
+          <a:xfrm>
+            <a:off x="9372599" y="3291840"/>
+            <a:ext cx="2377440" cy="731520"/>
           </a:xfrm>
           <a:prstGeom prst="rect">
             <a:avLst/>
@@ -9078,9 +8732,9 @@
           <a:p>
             <a:pPr algn="ctr"/>
             <a:r>
-              <a:rPr sz="1400" b="0">
-                <a:solidFill>
-                  <a:srgbClr val="FFFFFF"/>
+              <a:rPr sz="1400" b="1">
+                <a:solidFill>
+                  <a:srgbClr val="0D223B"/>
                 </a:solidFill>
                 <a:latin typeface="Calibri"/>
               </a:rPr>
@@ -9091,13 +8745,48 @@
       </p:sp>
       <p:sp>
         <p:nvSpPr>
-          <p:cNvPr id="20" name="TextBox 19"/>
-          <p:cNvSpPr txBox="1"/>
-          <p:nvPr/>
-        </p:nvSpPr>
-        <p:spPr>
-          <a:xfrm>
-            <a:off x="457200" y="6446520"/>
+          <p:cNvPr id="22" name="TextBox 21"/>
+          <p:cNvSpPr txBox="1"/>
+          <p:nvPr/>
+        </p:nvSpPr>
+        <p:spPr>
+          <a:xfrm>
+            <a:off x="9372599" y="4114800"/>
+            <a:ext cx="2377440" cy="457200"/>
+          </a:xfrm>
+          <a:prstGeom prst="rect">
+            <a:avLst/>
+          </a:prstGeom>
+          <a:noFill/>
+        </p:spPr>
+        <p:txBody>
+          <a:bodyPr wrap="square">
+            <a:spAutoFit/>
+          </a:bodyPr>
+          <a:lstStyle/>
+          <a:p>
+            <a:pPr algn="ctr"/>
+            <a:r>
+              <a:rPr sz="1200" b="0">
+                <a:solidFill>
+                  <a:srgbClr val="5C6B72"/>
+                </a:solidFill>
+                <a:latin typeface="Calibri"/>
+              </a:rPr>
+              <a:t>Базовый уровень</a:t>
+            </a:r>
+          </a:p>
+        </p:txBody>
+      </p:sp>
+      <p:sp>
+        <p:nvSpPr>
+          <p:cNvPr id="23" name="TextBox 22"/>
+          <p:cNvSpPr txBox="1"/>
+          <p:nvPr/>
+        </p:nvSpPr>
+        <p:spPr>
+          <a:xfrm>
+            <a:off x="502920" y="6446520"/>
             <a:ext cx="8229600" cy="274320"/>
           </a:xfrm>
           <a:prstGeom prst="rect">
@@ -9115,25 +8804,25 @@
             <a:r>
               <a:rPr sz="1100" b="0">
                 <a:solidFill>
-                  <a:srgbClr val="F3DCC9"/>
-                </a:solidFill>
-                <a:latin typeface="Calibri"/>
-              </a:rPr>
-              <a:t>IPMA Kyrgyz Republic · ipma.kg · Ассоциация-заявитель</a:t>
-            </a:r>
-          </a:p>
-        </p:txBody>
-      </p:sp>
-      <p:sp>
-        <p:nvSpPr>
-          <p:cNvPr id="21" name="TextBox 20"/>
-          <p:cNvSpPr txBox="1"/>
-          <p:nvPr/>
-        </p:nvSpPr>
-        <p:spPr>
-          <a:xfrm>
-            <a:off x="10424160" y="6446520"/>
-            <a:ext cx="1371600" cy="274320"/>
+                  <a:srgbClr val="5C6B72"/>
+                </a:solidFill>
+                <a:latin typeface="Calibri"/>
+              </a:rPr>
+              <a:t>IPMA Kyrgyz Republic  ·  ipma.kg</a:t>
+            </a:r>
+          </a:p>
+        </p:txBody>
+      </p:sp>
+      <p:sp>
+        <p:nvSpPr>
+          <p:cNvPr id="24" name="TextBox 23"/>
+          <p:cNvSpPr txBox="1"/>
+          <p:nvPr/>
+        </p:nvSpPr>
+        <p:spPr>
+          <a:xfrm>
+            <a:off x="10515600" y="6446520"/>
+            <a:ext cx="1280160" cy="274320"/>
           </a:xfrm>
           <a:prstGeom prst="rect">
             <a:avLst/>
@@ -9150,11 +8839,11 @@
             <a:r>
               <a:rPr sz="1100" b="0">
                 <a:solidFill>
-                  <a:srgbClr val="F3DCC9"/>
-                </a:solidFill>
-                <a:latin typeface="Calibri"/>
-              </a:rPr>
-              <a:t>8/12</a:t>
+                  <a:srgbClr val="5C6B72"/>
+                </a:solidFill>
+                <a:latin typeface="Calibri"/>
+              </a:rPr>
+              <a:t>08 / 12</a:t>
             </a:r>
           </a:p>
         </p:txBody>
@@ -9192,7 +8881,7 @@
             <a:avLst/>
           </a:prstGeom>
           <a:solidFill>
-            <a:srgbClr val="5C0A17"/>
+            <a:srgbClr val="EEF2F1"/>
           </a:solidFill>
           <a:ln>
             <a:noFill/>
@@ -9220,52 +8909,9 @@
           </a:p>
         </p:txBody>
       </p:sp>
-      <p:sp>
-        <p:nvSpPr>
-          <p:cNvPr id="3" name="Rectangle 2"/>
-          <p:cNvSpPr/>
-          <p:nvPr/>
-        </p:nvSpPr>
-        <p:spPr>
-          <a:xfrm>
-            <a:off x="0" y="0"/>
-            <a:ext cx="12191695" cy="73152"/>
-          </a:xfrm>
-          <a:prstGeom prst="rect">
-            <a:avLst/>
-          </a:prstGeom>
-          <a:solidFill>
-            <a:srgbClr val="FFD54F"/>
-          </a:solidFill>
-          <a:ln>
-            <a:noFill/>
-          </a:ln>
-        </p:spPr>
-        <p:style>
-          <a:lnRef idx="1">
-            <a:schemeClr val="accent1"/>
-          </a:lnRef>
-          <a:fillRef idx="3">
-            <a:schemeClr val="accent1"/>
-          </a:fillRef>
-          <a:effectRef idx="2">
-            <a:schemeClr val="accent1"/>
-          </a:effectRef>
-          <a:fontRef idx="minor">
-            <a:schemeClr val="lt1"/>
-          </a:fontRef>
-        </p:style>
-        <p:txBody>
-          <a:bodyPr rtlCol="0" anchor="ctr"/>
-          <a:lstStyle/>
-          <a:p>
-            <a:pPr algn="ctr"/>
-          </a:p>
-        </p:txBody>
-      </p:sp>
       <p:pic>
         <p:nvPicPr>
-          <p:cNvPr id="4" name="Picture 3" descr="ipma-kr-emblem.png"/>
+          <p:cNvPr id="3" name="Picture 2" descr="ipma-kr-emblem.png"/>
           <p:cNvPicPr>
             <a:picLocks noChangeAspect="1"/>
           </p:cNvPicPr>
@@ -9279,8 +8925,8 @@
         </p:blipFill>
         <p:spPr>
           <a:xfrm>
-            <a:off x="11292840" y="201168"/>
-            <a:ext cx="661788" cy="658368"/>
+            <a:off x="11292840" y="228600"/>
+            <a:ext cx="597448" cy="594360"/>
           </a:xfrm>
           <a:prstGeom prst="rect">
             <a:avLst/>
@@ -9289,14 +8935,49 @@
       </p:pic>
       <p:sp>
         <p:nvSpPr>
+          <p:cNvPr id="4" name="TextBox 3"/>
+          <p:cNvSpPr txBox="1"/>
+          <p:nvPr/>
+        </p:nvSpPr>
+        <p:spPr>
+          <a:xfrm>
+            <a:off x="548640" y="320040"/>
+            <a:ext cx="10972800" cy="274320"/>
+          </a:xfrm>
+          <a:prstGeom prst="rect">
+            <a:avLst/>
+          </a:prstGeom>
+          <a:noFill/>
+        </p:spPr>
+        <p:txBody>
+          <a:bodyPr wrap="square">
+            <a:spAutoFit/>
+          </a:bodyPr>
+          <a:lstStyle/>
+          <a:p>
+            <a:pPr algn="l"/>
+            <a:r>
+              <a:rPr sz="1100" b="1">
+                <a:solidFill>
+                  <a:srgbClr val="1F7A34"/>
+                </a:solidFill>
+                <a:latin typeface="Calibri"/>
+              </a:rPr>
+              <a:t>09  »  ЧЛЕНСТВО</a:t>
+            </a:r>
+          </a:p>
+        </p:txBody>
+      </p:sp>
+      <p:sp>
+        <p:nvSpPr>
           <p:cNvPr id="5" name="TextBox 4"/>
           <p:cNvSpPr txBox="1"/>
           <p:nvPr/>
         </p:nvSpPr>
         <p:spPr>
           <a:xfrm>
-            <a:off x="548640" y="320040"/>
-            <a:ext cx="10058400" cy="274320"/>
+            <a:off x="548640" y="640080"/>
+            <a:ext cx="10515600" cy="548640"/>
           </a:xfrm>
           <a:prstGeom prst="rect">
             <a:avLst/>
@@ -9311,46 +8992,11 @@
           <a:p>
             <a:pPr algn="l"/>
             <a:r>
-              <a:rPr sz="1100" b="1">
-                <a:solidFill>
-                  <a:srgbClr val="FFD54F"/>
-                </a:solidFill>
-                <a:latin typeface="Calibri"/>
-              </a:rPr>
-              <a:t>07 · ЧЛЕНСТВО</a:t>
-            </a:r>
-          </a:p>
-        </p:txBody>
-      </p:sp>
-      <p:sp>
-        <p:nvSpPr>
-          <p:cNvPr id="6" name="TextBox 5"/>
-          <p:cNvSpPr txBox="1"/>
-          <p:nvPr/>
-        </p:nvSpPr>
-        <p:spPr>
-          <a:xfrm>
-            <a:off x="548640" y="640080"/>
-            <a:ext cx="10241280" cy="548640"/>
-          </a:xfrm>
-          <a:prstGeom prst="rect">
-            <a:avLst/>
-          </a:prstGeom>
-          <a:noFill/>
-        </p:spPr>
-        <p:txBody>
-          <a:bodyPr wrap="square">
-            <a:spAutoFit/>
-          </a:bodyPr>
-          <a:lstStyle/>
-          <a:p>
-            <a:pPr algn="l"/>
-            <a:r>
               <a:rPr sz="2800" b="1">
                 <a:solidFill>
-                  <a:srgbClr val="FFFFFF"/>
-                </a:solidFill>
-                <a:latin typeface="Georgia"/>
+                  <a:srgbClr val="0D223B"/>
+                </a:solidFill>
+                <a:latin typeface="Arial"/>
               </a:rPr>
               <a:t>Рост членской базы</a:t>
             </a:r>
@@ -9359,20 +9005,20 @@
       </p:sp>
       <p:sp>
         <p:nvSpPr>
-          <p:cNvPr id="7" name="Rounded Rectangle 6"/>
+          <p:cNvPr id="6" name="Rounded Rectangle 5"/>
           <p:cNvSpPr/>
           <p:nvPr/>
         </p:nvSpPr>
         <p:spPr>
           <a:xfrm>
             <a:off x="548640" y="1463040"/>
-            <a:ext cx="11064240" cy="777240"/>
+            <a:ext cx="11064240" cy="868680"/>
           </a:xfrm>
           <a:prstGeom prst="roundRect">
             <a:avLst/>
           </a:prstGeom>
           <a:solidFill>
-            <a:srgbClr val="7A0C1E"/>
+            <a:srgbClr val="FFFFFF"/>
           </a:solidFill>
           <a:ln>
             <a:noFill/>
@@ -9402,14 +9048,49 @@
       </p:sp>
       <p:sp>
         <p:nvSpPr>
+          <p:cNvPr id="7" name="TextBox 6"/>
+          <p:cNvSpPr txBox="1"/>
+          <p:nvPr/>
+        </p:nvSpPr>
+        <p:spPr>
+          <a:xfrm>
+            <a:off x="868680" y="1719072"/>
+            <a:ext cx="1371600" cy="365760"/>
+          </a:xfrm>
+          <a:prstGeom prst="rect">
+            <a:avLst/>
+          </a:prstGeom>
+          <a:noFill/>
+        </p:spPr>
+        <p:txBody>
+          <a:bodyPr wrap="square">
+            <a:spAutoFit/>
+          </a:bodyPr>
+          <a:lstStyle/>
+          <a:p>
+            <a:pPr algn="l"/>
+            <a:r>
+              <a:rPr sz="1800" b="1">
+                <a:solidFill>
+                  <a:srgbClr val="2F9E44"/>
+                </a:solidFill>
+                <a:latin typeface="Calibri"/>
+              </a:rPr>
+              <a:t>2027</a:t>
+            </a:r>
+          </a:p>
+        </p:txBody>
+      </p:sp>
+      <p:sp>
+        <p:nvSpPr>
           <p:cNvPr id="8" name="TextBox 7"/>
           <p:cNvSpPr txBox="1"/>
           <p:nvPr/>
         </p:nvSpPr>
         <p:spPr>
           <a:xfrm>
-            <a:off x="822960" y="1691640"/>
-            <a:ext cx="1371600" cy="365760"/>
+            <a:off x="2560320" y="1719072"/>
+            <a:ext cx="8686800" cy="365760"/>
           </a:xfrm>
           <a:prstGeom prst="rect">
             <a:avLst/>
@@ -9424,44 +9105,9 @@
           <a:p>
             <a:pPr algn="l"/>
             <a:r>
-              <a:rPr sz="1800" b="1">
-                <a:solidFill>
-                  <a:srgbClr val="FFD54F"/>
-                </a:solidFill>
-                <a:latin typeface="Calibri"/>
-              </a:rPr>
-              <a:t>2027</a:t>
-            </a:r>
-          </a:p>
-        </p:txBody>
-      </p:sp>
-      <p:sp>
-        <p:nvSpPr>
-          <p:cNvPr id="9" name="TextBox 8"/>
-          <p:cNvSpPr txBox="1"/>
-          <p:nvPr/>
-        </p:nvSpPr>
-        <p:spPr>
-          <a:xfrm>
-            <a:off x="2468880" y="1691640"/>
-            <a:ext cx="8686800" cy="365760"/>
-          </a:xfrm>
-          <a:prstGeom prst="rect">
-            <a:avLst/>
-          </a:prstGeom>
-          <a:noFill/>
-        </p:spPr>
-        <p:txBody>
-          <a:bodyPr wrap="square">
-            <a:spAutoFit/>
-          </a:bodyPr>
-          <a:lstStyle/>
-          <a:p>
-            <a:pPr algn="l"/>
-            <a:r>
               <a:rPr sz="1500" b="0">
                 <a:solidFill>
-                  <a:srgbClr val="FFFFFF"/>
+                  <a:srgbClr val="0D223B"/>
                 </a:solidFill>
                 <a:latin typeface="Calibri"/>
               </a:rPr>
@@ -9472,20 +9118,20 @@
       </p:sp>
       <p:sp>
         <p:nvSpPr>
-          <p:cNvPr id="10" name="Rounded Rectangle 9"/>
+          <p:cNvPr id="9" name="Rounded Rectangle 8"/>
           <p:cNvSpPr/>
           <p:nvPr/>
         </p:nvSpPr>
         <p:spPr>
           <a:xfrm>
-            <a:off x="548640" y="2331720"/>
-            <a:ext cx="11064240" cy="777240"/>
+            <a:off x="548640" y="2468880"/>
+            <a:ext cx="11064240" cy="868680"/>
           </a:xfrm>
           <a:prstGeom prst="roundRect">
             <a:avLst/>
           </a:prstGeom>
           <a:solidFill>
-            <a:srgbClr val="7A0C1E"/>
+            <a:srgbClr val="FFFFFF"/>
           </a:solidFill>
           <a:ln>
             <a:noFill/>
@@ -9515,14 +9161,49 @@
       </p:sp>
       <p:sp>
         <p:nvSpPr>
+          <p:cNvPr id="10" name="TextBox 9"/>
+          <p:cNvSpPr txBox="1"/>
+          <p:nvPr/>
+        </p:nvSpPr>
+        <p:spPr>
+          <a:xfrm>
+            <a:off x="868680" y="2724912"/>
+            <a:ext cx="1371600" cy="365760"/>
+          </a:xfrm>
+          <a:prstGeom prst="rect">
+            <a:avLst/>
+          </a:prstGeom>
+          <a:noFill/>
+        </p:spPr>
+        <p:txBody>
+          <a:bodyPr wrap="square">
+            <a:spAutoFit/>
+          </a:bodyPr>
+          <a:lstStyle/>
+          <a:p>
+            <a:pPr algn="l"/>
+            <a:r>
+              <a:rPr sz="1800" b="1">
+                <a:solidFill>
+                  <a:srgbClr val="2F9E44"/>
+                </a:solidFill>
+                <a:latin typeface="Calibri"/>
+              </a:rPr>
+              <a:t>2028</a:t>
+            </a:r>
+          </a:p>
+        </p:txBody>
+      </p:sp>
+      <p:sp>
+        <p:nvSpPr>
           <p:cNvPr id="11" name="TextBox 10"/>
           <p:cNvSpPr txBox="1"/>
           <p:nvPr/>
         </p:nvSpPr>
         <p:spPr>
           <a:xfrm>
-            <a:off x="822960" y="2560320"/>
-            <a:ext cx="1371600" cy="365760"/>
+            <a:off x="2560320" y="2724912"/>
+            <a:ext cx="8686800" cy="365760"/>
           </a:xfrm>
           <a:prstGeom prst="rect">
             <a:avLst/>
@@ -9537,44 +9218,9 @@
           <a:p>
             <a:pPr algn="l"/>
             <a:r>
-              <a:rPr sz="1800" b="1">
-                <a:solidFill>
-                  <a:srgbClr val="FFD54F"/>
-                </a:solidFill>
-                <a:latin typeface="Calibri"/>
-              </a:rPr>
-              <a:t>2028</a:t>
-            </a:r>
-          </a:p>
-        </p:txBody>
-      </p:sp>
-      <p:sp>
-        <p:nvSpPr>
-          <p:cNvPr id="12" name="TextBox 11"/>
-          <p:cNvSpPr txBox="1"/>
-          <p:nvPr/>
-        </p:nvSpPr>
-        <p:spPr>
-          <a:xfrm>
-            <a:off x="2468880" y="2560320"/>
-            <a:ext cx="8686800" cy="365760"/>
-          </a:xfrm>
-          <a:prstGeom prst="rect">
-            <a:avLst/>
-          </a:prstGeom>
-          <a:noFill/>
-        </p:spPr>
-        <p:txBody>
-          <a:bodyPr wrap="square">
-            <a:spAutoFit/>
-          </a:bodyPr>
-          <a:lstStyle/>
-          <a:p>
-            <a:pPr algn="l"/>
-            <a:r>
               <a:rPr sz="1500" b="0">
                 <a:solidFill>
-                  <a:srgbClr val="FFFFFF"/>
+                  <a:srgbClr val="0D223B"/>
                 </a:solidFill>
                 <a:latin typeface="Calibri"/>
               </a:rPr>
@@ -9585,20 +9231,20 @@
       </p:sp>
       <p:sp>
         <p:nvSpPr>
-          <p:cNvPr id="13" name="Rounded Rectangle 12"/>
+          <p:cNvPr id="12" name="Rounded Rectangle 11"/>
           <p:cNvSpPr/>
           <p:nvPr/>
         </p:nvSpPr>
         <p:spPr>
           <a:xfrm>
-            <a:off x="548640" y="3200400"/>
-            <a:ext cx="11064240" cy="777240"/>
+            <a:off x="548640" y="3474720"/>
+            <a:ext cx="11064240" cy="868680"/>
           </a:xfrm>
           <a:prstGeom prst="roundRect">
             <a:avLst/>
           </a:prstGeom>
           <a:solidFill>
-            <a:srgbClr val="7A0C1E"/>
+            <a:srgbClr val="FFFFFF"/>
           </a:solidFill>
           <a:ln>
             <a:noFill/>
@@ -9628,14 +9274,49 @@
       </p:sp>
       <p:sp>
         <p:nvSpPr>
+          <p:cNvPr id="13" name="TextBox 12"/>
+          <p:cNvSpPr txBox="1"/>
+          <p:nvPr/>
+        </p:nvSpPr>
+        <p:spPr>
+          <a:xfrm>
+            <a:off x="868680" y="3730752"/>
+            <a:ext cx="1371600" cy="365760"/>
+          </a:xfrm>
+          <a:prstGeom prst="rect">
+            <a:avLst/>
+          </a:prstGeom>
+          <a:noFill/>
+        </p:spPr>
+        <p:txBody>
+          <a:bodyPr wrap="square">
+            <a:spAutoFit/>
+          </a:bodyPr>
+          <a:lstStyle/>
+          <a:p>
+            <a:pPr algn="l"/>
+            <a:r>
+              <a:rPr sz="1800" b="1">
+                <a:solidFill>
+                  <a:srgbClr val="2F9E44"/>
+                </a:solidFill>
+                <a:latin typeface="Calibri"/>
+              </a:rPr>
+              <a:t>2029</a:t>
+            </a:r>
+          </a:p>
+        </p:txBody>
+      </p:sp>
+      <p:sp>
+        <p:nvSpPr>
           <p:cNvPr id="14" name="TextBox 13"/>
           <p:cNvSpPr txBox="1"/>
           <p:nvPr/>
         </p:nvSpPr>
         <p:spPr>
           <a:xfrm>
-            <a:off x="822960" y="3429000"/>
-            <a:ext cx="1371600" cy="365760"/>
+            <a:off x="2560320" y="3730752"/>
+            <a:ext cx="8686800" cy="365760"/>
           </a:xfrm>
           <a:prstGeom prst="rect">
             <a:avLst/>
@@ -9650,13 +9331,13 @@
           <a:p>
             <a:pPr algn="l"/>
             <a:r>
-              <a:rPr sz="1800" b="1">
-                <a:solidFill>
-                  <a:srgbClr val="FFD54F"/>
-                </a:solidFill>
-                <a:latin typeface="Calibri"/>
-              </a:rPr>
-              <a:t>2029</a:t>
+              <a:rPr sz="1500" b="0">
+                <a:solidFill>
+                  <a:srgbClr val="0D223B"/>
+                </a:solidFill>
+                <a:latin typeface="Calibri"/>
+              </a:rPr>
+              <a:t>100+ членов, устойчивый рост сертификации</a:t>
             </a:r>
           </a:p>
         </p:txBody>
@@ -9669,8 +9350,8 @@
         </p:nvSpPr>
         <p:spPr>
           <a:xfrm>
-            <a:off x="2468880" y="3429000"/>
-            <a:ext cx="8686800" cy="365760"/>
+            <a:off x="548640" y="4754880"/>
+            <a:ext cx="10972800" cy="731520"/>
           </a:xfrm>
           <a:prstGeom prst="rect">
             <a:avLst/>
@@ -9685,13 +9366,14 @@
           <a:p>
             <a:pPr algn="l"/>
             <a:r>
-              <a:rPr sz="1500" b="0">
-                <a:solidFill>
-                  <a:srgbClr val="FFFFFF"/>
-                </a:solidFill>
-                <a:latin typeface="Calibri"/>
-              </a:rPr>
-              <a:t>100+ членов, устойчивый рост сертификации</a:t>
+              <a:rPr sz="1400" b="0">
+                <a:solidFill>
+                  <a:srgbClr val="28394A"/>
+                </a:solidFill>
+                <a:latin typeface="Calibri"/>
+              </a:rPr>
+              <a:t>Категории: индивидуальное · студенческое · корпоративное
+Скидки на сертификацию A–D (до 20%), материалы ICB4/OCB/PEB, национальный реестр.</a:t>
             </a:r>
           </a:p>
         </p:txBody>
@@ -9704,8 +9386,8 @@
         </p:nvSpPr>
         <p:spPr>
           <a:xfrm>
-            <a:off x="548640" y="4297680"/>
-            <a:ext cx="10972800" cy="365760"/>
+            <a:off x="502920" y="6446520"/>
+            <a:ext cx="8229600" cy="274320"/>
           </a:xfrm>
           <a:prstGeom prst="rect">
             <a:avLst/>
@@ -9720,13 +9402,13 @@
           <a:p>
             <a:pPr algn="l"/>
             <a:r>
-              <a:rPr sz="1500" b="1">
-                <a:solidFill>
-                  <a:srgbClr val="FFD54F"/>
-                </a:solidFill>
-                <a:latin typeface="Calibri"/>
-              </a:rPr>
-              <a:t>Категории на ipma.kg: индивидуальное · студенческое · корпоративное</a:t>
+              <a:rPr sz="1100" b="0">
+                <a:solidFill>
+                  <a:srgbClr val="5C6B72"/>
+                </a:solidFill>
+                <a:latin typeface="Calibri"/>
+              </a:rPr>
+              <a:t>IPMA Kyrgyz Republic  ·  ipma.kg</a:t>
             </a:r>
           </a:p>
         </p:txBody>
@@ -9739,99 +9421,29 @@
         </p:nvSpPr>
         <p:spPr>
           <a:xfrm>
-            <a:off x="548640" y="4846320"/>
-            <a:ext cx="10972800" cy="914400"/>
-          </a:xfrm>
-          <a:prstGeom prst="rect">
-            <a:avLst/>
-          </a:prstGeom>
-          <a:noFill/>
-        </p:spPr>
-        <p:txBody>
-          <a:bodyPr wrap="square">
-            <a:spAutoFit/>
-          </a:bodyPr>
-          <a:lstStyle/>
-          <a:p>
-            <a:pPr algn="l"/>
-            <a:r>
-              <a:rPr sz="1400" b="0">
-                <a:solidFill>
-                  <a:srgbClr val="F3DCC9"/>
-                </a:solidFill>
-                <a:latin typeface="Calibri"/>
-              </a:rPr>
-              <a:t>Скидки на сертификацию A–D (до 20%), материалы ICB4/OCB/PEB, нетворкинг, национальный реестр.</a:t>
-            </a:r>
-          </a:p>
-        </p:txBody>
-      </p:sp>
-      <p:sp>
-        <p:nvSpPr>
-          <p:cNvPr id="18" name="TextBox 17"/>
-          <p:cNvSpPr txBox="1"/>
-          <p:nvPr/>
-        </p:nvSpPr>
-        <p:spPr>
-          <a:xfrm>
-            <a:off x="457200" y="6446520"/>
-            <a:ext cx="8229600" cy="274320"/>
-          </a:xfrm>
-          <a:prstGeom prst="rect">
-            <a:avLst/>
-          </a:prstGeom>
-          <a:noFill/>
-        </p:spPr>
-        <p:txBody>
-          <a:bodyPr wrap="square">
-            <a:spAutoFit/>
-          </a:bodyPr>
-          <a:lstStyle/>
-          <a:p>
-            <a:pPr algn="l"/>
+            <a:off x="10515600" y="6446520"/>
+            <a:ext cx="1280160" cy="274320"/>
+          </a:xfrm>
+          <a:prstGeom prst="rect">
+            <a:avLst/>
+          </a:prstGeom>
+          <a:noFill/>
+        </p:spPr>
+        <p:txBody>
+          <a:bodyPr wrap="square">
+            <a:spAutoFit/>
+          </a:bodyPr>
+          <a:lstStyle/>
+          <a:p>
+            <a:pPr algn="r"/>
             <a:r>
               <a:rPr sz="1100" b="0">
                 <a:solidFill>
-                  <a:srgbClr val="F3DCC9"/>
-                </a:solidFill>
-                <a:latin typeface="Calibri"/>
-              </a:rPr>
-              <a:t>IPMA Kyrgyz Republic · ipma.kg · Ассоциация-заявитель</a:t>
-            </a:r>
-          </a:p>
-        </p:txBody>
-      </p:sp>
-      <p:sp>
-        <p:nvSpPr>
-          <p:cNvPr id="19" name="TextBox 18"/>
-          <p:cNvSpPr txBox="1"/>
-          <p:nvPr/>
-        </p:nvSpPr>
-        <p:spPr>
-          <a:xfrm>
-            <a:off x="10424160" y="6446520"/>
-            <a:ext cx="1371600" cy="274320"/>
-          </a:xfrm>
-          <a:prstGeom prst="rect">
-            <a:avLst/>
-          </a:prstGeom>
-          <a:noFill/>
-        </p:spPr>
-        <p:txBody>
-          <a:bodyPr wrap="square">
-            <a:spAutoFit/>
-          </a:bodyPr>
-          <a:lstStyle/>
-          <a:p>
-            <a:pPr algn="r"/>
-            <a:r>
-              <a:rPr sz="1100" b="0">
-                <a:solidFill>
-                  <a:srgbClr val="F3DCC9"/>
-                </a:solidFill>
-                <a:latin typeface="Calibri"/>
-              </a:rPr>
-              <a:t>9/12</a:t>
+                  <a:srgbClr val="5C6B72"/>
+                </a:solidFill>
+                <a:latin typeface="Calibri"/>
+              </a:rPr>
+              <a:t>09 / 12</a:t>
             </a:r>
           </a:p>
         </p:txBody>

--- a/presentations/IPMA_Kyrgyzstan_CoD_Presentation.pptx
+++ b/presentations/IPMA_Kyrgyzstan_CoD_Presentation.pptx
@@ -3114,7 +3114,7 @@
             <a:avLst/>
           </a:prstGeom>
           <a:solidFill>
-            <a:srgbClr val="0D223B"/>
+            <a:srgbClr val="07182A"/>
           </a:solidFill>
           <a:ln>
             <a:noFill/>
@@ -3150,27 +3150,27 @@
         </p:nvSpPr>
         <p:spPr>
           <a:xfrm>
-            <a:off x="11155680" y="5303520"/>
-            <a:ext cx="1371600" cy="1097280"/>
-          </a:xfrm>
-          <a:prstGeom prst="rect">
-            <a:avLst/>
-          </a:prstGeom>
-          <a:noFill/>
-        </p:spPr>
-        <p:txBody>
-          <a:bodyPr wrap="square">
-            <a:spAutoFit/>
-          </a:bodyPr>
-          <a:lstStyle/>
-          <a:p>
-            <a:pPr algn="l"/>
-            <a:r>
-              <a:rPr sz="9600" b="1">
+            <a:off x="10789920" y="5120640"/>
+            <a:ext cx="1828800" cy="1371600"/>
+          </a:xfrm>
+          <a:prstGeom prst="rect">
+            <a:avLst/>
+          </a:prstGeom>
+          <a:noFill/>
+        </p:spPr>
+        <p:txBody>
+          <a:bodyPr wrap="square">
+            <a:spAutoFit/>
+          </a:bodyPr>
+          <a:lstStyle/>
+          <a:p>
+            <a:pPr algn="l"/>
+            <a:r>
+              <a:rPr sz="12000" b="1">
                 <a:solidFill>
                   <a:srgbClr val="E30613"/>
                 </a:solidFill>
-                <a:latin typeface="Calibri"/>
+                <a:latin typeface="Arial"/>
               </a:rPr>
               <a:t>»</a:t>
             </a:r>
@@ -3179,36 +3179,44 @@
       </p:sp>
       <p:sp>
         <p:nvSpPr>
-          <p:cNvPr id="4" name="TextBox 3"/>
-          <p:cNvSpPr txBox="1"/>
-          <p:nvPr/>
-        </p:nvSpPr>
-        <p:spPr>
-          <a:xfrm>
-            <a:off x="640080" y="1188720"/>
-            <a:ext cx="5943600" cy="320040"/>
-          </a:xfrm>
-          <a:prstGeom prst="rect">
-            <a:avLst/>
-          </a:prstGeom>
-          <a:noFill/>
-        </p:spPr>
-        <p:txBody>
-          <a:bodyPr wrap="square">
-            <a:spAutoFit/>
-          </a:bodyPr>
-          <a:lstStyle/>
-          <a:p>
-            <a:pPr algn="l"/>
-            <a:r>
-              <a:rPr sz="1200" b="1">
-                <a:solidFill>
-                  <a:srgbClr val="7FE0A0"/>
-                </a:solidFill>
-                <a:latin typeface="Calibri"/>
-              </a:rPr>
-              <a:t>IPMA  ·  COUNCIL OF DELEGATES</a:t>
-            </a:r>
+          <p:cNvPr id="4" name="Rounded Rectangle 3"/>
+          <p:cNvSpPr/>
+          <p:nvPr/>
+        </p:nvSpPr>
+        <p:spPr>
+          <a:xfrm>
+            <a:off x="640080" y="1051560"/>
+            <a:ext cx="3474720" cy="384048"/>
+          </a:xfrm>
+          <a:prstGeom prst="roundRect">
+            <a:avLst/>
+          </a:prstGeom>
+          <a:solidFill>
+            <a:srgbClr val="0F2C45"/>
+          </a:solidFill>
+          <a:ln>
+            <a:noFill/>
+          </a:ln>
+        </p:spPr>
+        <p:style>
+          <a:lnRef idx="1">
+            <a:schemeClr val="accent1"/>
+          </a:lnRef>
+          <a:fillRef idx="3">
+            <a:schemeClr val="accent1"/>
+          </a:fillRef>
+          <a:effectRef idx="2">
+            <a:schemeClr val="accent1"/>
+          </a:effectRef>
+          <a:fontRef idx="minor">
+            <a:schemeClr val="lt1"/>
+          </a:fontRef>
+        </p:style>
+        <p:txBody>
+          <a:bodyPr rtlCol="0" anchor="ctr"/>
+          <a:lstStyle/>
+          <a:p>
+            <a:pPr algn="ctr"/>
           </a:p>
         </p:txBody>
       </p:sp>
@@ -3220,29 +3228,65 @@
         </p:nvSpPr>
         <p:spPr>
           <a:xfrm>
+            <a:off x="777240" y="1115568"/>
+            <a:ext cx="3200400" cy="274320"/>
+          </a:xfrm>
+          <a:prstGeom prst="rect">
+            <a:avLst/>
+          </a:prstGeom>
+          <a:noFill/>
+        </p:spPr>
+        <p:txBody>
+          <a:bodyPr wrap="square">
+            <a:spAutoFit/>
+          </a:bodyPr>
+          <a:lstStyle/>
+          <a:p>
+            <a:pPr algn="l"/>
+            <a:r>
+              <a:rPr sz="1100" b="1">
+                <a:solidFill>
+                  <a:srgbClr val="3DD68C"/>
+                </a:solidFill>
+                <a:latin typeface="Arial"/>
+              </a:rPr>
+              <a:t>COUNCIL OF DELEGATES</a:t>
+            </a:r>
+          </a:p>
+        </p:txBody>
+      </p:sp>
+      <p:sp>
+        <p:nvSpPr>
+          <p:cNvPr id="6" name="TextBox 5"/>
+          <p:cNvSpPr txBox="1"/>
+          <p:nvPr/>
+        </p:nvSpPr>
+        <p:spPr>
+          <a:xfrm>
             <a:off x="640080" y="1737360"/>
-            <a:ext cx="6400800" cy="1463040"/>
-          </a:xfrm>
-          <a:prstGeom prst="rect">
-            <a:avLst/>
-          </a:prstGeom>
-          <a:noFill/>
-        </p:spPr>
-        <p:txBody>
-          <a:bodyPr wrap="square">
-            <a:spAutoFit/>
-          </a:bodyPr>
-          <a:lstStyle/>
-          <a:p>
-            <a:pPr algn="l"/>
-            <a:r>
-              <a:rPr sz="4400" b="1">
+            <a:ext cx="6217920" cy="2194560"/>
+          </a:xfrm>
+          <a:prstGeom prst="rect">
+            <a:avLst/>
+          </a:prstGeom>
+          <a:noFill/>
+        </p:spPr>
+        <p:txBody>
+          <a:bodyPr wrap="square">
+            <a:spAutoFit/>
+          </a:bodyPr>
+          <a:lstStyle/>
+          <a:p>
+            <a:pPr algn="l"/>
+            <a:r>
+              <a:rPr sz="4800" b="1">
                 <a:solidFill>
                   <a:srgbClr val="FFFFFF"/>
                 </a:solidFill>
                 <a:latin typeface="Arial"/>
               </a:rPr>
-              <a:t>IPMA Kyrgyz
+              <a:t>IPMA
+Kyrgyz
 Republic</a:t>
             </a:r>
           </a:p>
@@ -3250,48 +3294,48 @@
       </p:sp>
       <p:sp>
         <p:nvSpPr>
-          <p:cNvPr id="6" name="TextBox 5"/>
-          <p:cNvSpPr txBox="1"/>
-          <p:nvPr/>
-        </p:nvSpPr>
-        <p:spPr>
-          <a:xfrm>
-            <a:off x="640080" y="3474720"/>
-            <a:ext cx="5943600" cy="914400"/>
-          </a:xfrm>
-          <a:prstGeom prst="rect">
-            <a:avLst/>
-          </a:prstGeom>
-          <a:noFill/>
-        </p:spPr>
-        <p:txBody>
-          <a:bodyPr wrap="square">
-            <a:spAutoFit/>
-          </a:bodyPr>
-          <a:lstStyle/>
-          <a:p>
-            <a:pPr algn="l"/>
-            <a:r>
-              <a:rPr sz="1600" b="0">
-                <a:solidFill>
-                  <a:srgbClr val="BCD0DF"/>
-                </a:solidFill>
-                <a:latin typeface="Calibri"/>
-              </a:rPr>
-              <a:t>Кыргызское объединение управления проектами (KgPMU) — Ассоциация-заявитель IPMA</a:t>
-            </a:r>
-          </a:p>
-        </p:txBody>
-      </p:sp>
-      <p:sp>
-        <p:nvSpPr>
           <p:cNvPr id="7" name="TextBox 6"/>
           <p:cNvSpPr txBox="1"/>
           <p:nvPr/>
         </p:nvSpPr>
         <p:spPr>
           <a:xfrm>
-            <a:off x="640080" y="4663440"/>
+            <a:off x="640080" y="4206240"/>
+            <a:ext cx="5943600" cy="822960"/>
+          </a:xfrm>
+          <a:prstGeom prst="rect">
+            <a:avLst/>
+          </a:prstGeom>
+          <a:noFill/>
+        </p:spPr>
+        <p:txBody>
+          <a:bodyPr wrap="square">
+            <a:spAutoFit/>
+          </a:bodyPr>
+          <a:lstStyle/>
+          <a:p>
+            <a:pPr algn="l"/>
+            <a:r>
+              <a:rPr sz="1500" b="0">
+                <a:solidFill>
+                  <a:srgbClr val="B7CBD8"/>
+                </a:solidFill>
+                <a:latin typeface="Arial"/>
+              </a:rPr>
+              <a:t>Кыргызское объединение управления проектами — Ассоциация-заявитель IPMA</a:t>
+            </a:r>
+          </a:p>
+        </p:txBody>
+      </p:sp>
+      <p:sp>
+        <p:nvSpPr>
+          <p:cNvPr id="8" name="TextBox 7"/>
+          <p:cNvSpPr txBox="1"/>
+          <p:nvPr/>
+        </p:nvSpPr>
+        <p:spPr>
+          <a:xfrm>
+            <a:off x="640080" y="5212080"/>
             <a:ext cx="5943600" cy="365760"/>
           </a:xfrm>
           <a:prstGeom prst="rect">
@@ -3307,20 +3351,20 @@
           <a:p>
             <a:pPr algn="l"/>
             <a:r>
-              <a:rPr sz="1400" b="0">
-                <a:solidFill>
-                  <a:srgbClr val="8FB0C4"/>
-                </a:solidFill>
-                <a:latin typeface="Calibri"/>
-              </a:rPr>
-              <a:t>Представляет: Урмат Мекишев, Президент</a:t>
+              <a:rPr sz="1300" b="0">
+                <a:solidFill>
+                  <a:srgbClr val="7F9AAB"/>
+                </a:solidFill>
+                <a:latin typeface="Arial"/>
+              </a:rPr>
+              <a:t>Урмат Мекишев · Президент KgPMU</a:t>
             </a:r>
           </a:p>
         </p:txBody>
       </p:sp>
       <p:pic>
         <p:nvPicPr>
-          <p:cNvPr id="8" name="Picture 7" descr="ipma-kr-logo-white.png"/>
+          <p:cNvPr id="9" name="Picture 8" descr="ipma-kr-logo-white.png"/>
           <p:cNvPicPr>
             <a:picLocks noChangeAspect="1"/>
           </p:cNvPicPr>
@@ -3334,7 +3378,7 @@
         </p:blipFill>
         <p:spPr>
           <a:xfrm>
-            <a:off x="6949440" y="2011680"/>
+            <a:off x="6949440" y="2194560"/>
             <a:ext cx="4389120" cy="1282826"/>
           </a:xfrm>
           <a:prstGeom prst="rect">
@@ -3344,7 +3388,7 @@
       </p:pic>
       <p:sp>
         <p:nvSpPr>
-          <p:cNvPr id="9" name="TextBox 8"/>
+          <p:cNvPr id="10" name="TextBox 9"/>
           <p:cNvSpPr txBox="1"/>
           <p:nvPr/>
         </p:nvSpPr>
@@ -3368,9 +3412,9 @@
             <a:r>
               <a:rPr sz="1100" b="0">
                 <a:solidFill>
-                  <a:srgbClr val="8FA6B8"/>
-                </a:solidFill>
-                <a:latin typeface="Calibri"/>
+                  <a:srgbClr val="7F96A8"/>
+                </a:solidFill>
+                <a:latin typeface="Arial"/>
               </a:rPr>
               <a:t>IPMA Kyrgyz Republic  ·  ipma.kg</a:t>
             </a:r>
@@ -3379,14 +3423,14 @@
       </p:sp>
       <p:sp>
         <p:nvSpPr>
-          <p:cNvPr id="10" name="TextBox 9"/>
-          <p:cNvSpPr txBox="1"/>
-          <p:nvPr/>
-        </p:nvSpPr>
-        <p:spPr>
-          <a:xfrm>
-            <a:off x="10515600" y="6446520"/>
-            <a:ext cx="1280160" cy="274320"/>
+          <p:cNvPr id="11" name="TextBox 10"/>
+          <p:cNvSpPr txBox="1"/>
+          <p:nvPr/>
+        </p:nvSpPr>
+        <p:spPr>
+          <a:xfrm>
+            <a:off x="10424160" y="6446520"/>
+            <a:ext cx="1371600" cy="274320"/>
           </a:xfrm>
           <a:prstGeom prst="rect">
             <a:avLst/>
@@ -3403,9 +3447,9 @@
             <a:r>
               <a:rPr sz="1100" b="0">
                 <a:solidFill>
-                  <a:srgbClr val="8FA6B8"/>
-                </a:solidFill>
-                <a:latin typeface="Calibri"/>
+                  <a:srgbClr val="7F96A8"/>
+                </a:solidFill>
+                <a:latin typeface="Arial"/>
               </a:rPr>
               <a:t>01 / 12</a:t>
             </a:r>
@@ -3445,7 +3489,7 @@
             <a:avLst/>
           </a:prstGeom>
           <a:solidFill>
-            <a:srgbClr val="EEF2F1"/>
+            <a:srgbClr val="E8EEF2"/>
           </a:solidFill>
           <a:ln>
             <a:noFill/>
@@ -3473,9 +3517,52 @@
           </a:p>
         </p:txBody>
       </p:sp>
+      <p:sp>
+        <p:nvSpPr>
+          <p:cNvPr id="3" name="Rectangle 2"/>
+          <p:cNvSpPr/>
+          <p:nvPr/>
+        </p:nvSpPr>
+        <p:spPr>
+          <a:xfrm>
+            <a:off x="0" y="0"/>
+            <a:ext cx="12191695" cy="73152"/>
+          </a:xfrm>
+          <a:prstGeom prst="rect">
+            <a:avLst/>
+          </a:prstGeom>
+          <a:solidFill>
+            <a:srgbClr val="1F8F5F"/>
+          </a:solidFill>
+          <a:ln>
+            <a:noFill/>
+          </a:ln>
+        </p:spPr>
+        <p:style>
+          <a:lnRef idx="1">
+            <a:schemeClr val="accent1"/>
+          </a:lnRef>
+          <a:fillRef idx="3">
+            <a:schemeClr val="accent1"/>
+          </a:fillRef>
+          <a:effectRef idx="2">
+            <a:schemeClr val="accent1"/>
+          </a:effectRef>
+          <a:fontRef idx="minor">
+            <a:schemeClr val="lt1"/>
+          </a:fontRef>
+        </p:style>
+        <p:txBody>
+          <a:bodyPr rtlCol="0" anchor="ctr"/>
+          <a:lstStyle/>
+          <a:p>
+            <a:pPr algn="ctr"/>
+          </a:p>
+        </p:txBody>
+      </p:sp>
       <p:pic>
         <p:nvPicPr>
-          <p:cNvPr id="3" name="Picture 2" descr="ipma-kr-emblem.png"/>
+          <p:cNvPr id="4" name="Picture 3" descr="ipma-kr-emblem.png"/>
           <p:cNvPicPr>
             <a:picLocks noChangeAspect="1"/>
           </p:cNvPicPr>
@@ -3489,8 +3576,8 @@
         </p:blipFill>
         <p:spPr>
           <a:xfrm>
-            <a:off x="11292840" y="228600"/>
-            <a:ext cx="597448" cy="594360"/>
+            <a:off x="11338560" y="256032"/>
+            <a:ext cx="505533" cy="502920"/>
           </a:xfrm>
           <a:prstGeom prst="rect">
             <a:avLst/>
@@ -3499,14 +3586,14 @@
       </p:pic>
       <p:sp>
         <p:nvSpPr>
-          <p:cNvPr id="4" name="TextBox 3"/>
+          <p:cNvPr id="5" name="TextBox 4"/>
           <p:cNvSpPr txBox="1"/>
           <p:nvPr/>
         </p:nvSpPr>
         <p:spPr>
           <a:xfrm>
             <a:off x="548640" y="320040"/>
-            <a:ext cx="10972800" cy="274320"/>
+            <a:ext cx="10058400" cy="274320"/>
           </a:xfrm>
           <a:prstGeom prst="rect">
             <a:avLst/>
@@ -3523,9 +3610,9 @@
             <a:r>
               <a:rPr sz="1100" b="1">
                 <a:solidFill>
-                  <a:srgbClr val="1F7A34"/>
-                </a:solidFill>
-                <a:latin typeface="Calibri"/>
+                  <a:srgbClr val="1F8F5F"/>
+                </a:solidFill>
+                <a:latin typeface="Arial"/>
               </a:rPr>
               <a:t>10  »  ЭКОСИСТЕМА</a:t>
             </a:r>
@@ -3534,55 +3621,55 @@
       </p:sp>
       <p:sp>
         <p:nvSpPr>
-          <p:cNvPr id="5" name="TextBox 4"/>
+          <p:cNvPr id="6" name="TextBox 5"/>
           <p:cNvSpPr txBox="1"/>
           <p:nvPr/>
         </p:nvSpPr>
         <p:spPr>
           <a:xfrm>
             <a:off x="548640" y="640080"/>
-            <a:ext cx="10515600" cy="548640"/>
-          </a:xfrm>
-          <a:prstGeom prst="rect">
-            <a:avLst/>
-          </a:prstGeom>
-          <a:noFill/>
-        </p:spPr>
-        <p:txBody>
-          <a:bodyPr wrap="square">
-            <a:spAutoFit/>
-          </a:bodyPr>
-          <a:lstStyle/>
-          <a:p>
-            <a:pPr algn="l"/>
-            <a:r>
-              <a:rPr sz="2800" b="1">
-                <a:solidFill>
-                  <a:srgbClr val="0D223B"/>
-                </a:solidFill>
-                <a:latin typeface="Arial"/>
-              </a:rPr>
-              <a:t>Экосистема и продвижение</a:t>
-            </a:r>
-          </a:p>
-        </p:txBody>
-      </p:sp>
-      <p:sp>
-        <p:nvSpPr>
-          <p:cNvPr id="6" name="Rounded Rectangle 5"/>
+            <a:ext cx="10058400" cy="640080"/>
+          </a:xfrm>
+          <a:prstGeom prst="rect">
+            <a:avLst/>
+          </a:prstGeom>
+          <a:noFill/>
+        </p:spPr>
+        <p:txBody>
+          <a:bodyPr wrap="square">
+            <a:spAutoFit/>
+          </a:bodyPr>
+          <a:lstStyle/>
+          <a:p>
+            <a:pPr algn="l"/>
+            <a:r>
+              <a:rPr sz="3200" b="1">
+                <a:solidFill>
+                  <a:srgbClr val="07182A"/>
+                </a:solidFill>
+                <a:latin typeface="Arial"/>
+              </a:rPr>
+              <a:t>С кем строим</a:t>
+            </a:r>
+          </a:p>
+        </p:txBody>
+      </p:sp>
+      <p:sp>
+        <p:nvSpPr>
+          <p:cNvPr id="7" name="Rectangle 6"/>
           <p:cNvSpPr/>
           <p:nvPr/>
         </p:nvSpPr>
         <p:spPr>
           <a:xfrm>
-            <a:off x="548640" y="1463040"/>
-            <a:ext cx="5486400" cy="1828800"/>
-          </a:xfrm>
-          <a:prstGeom prst="roundRect">
+            <a:off x="548640" y="1554480"/>
+            <a:ext cx="5394960" cy="54864"/>
+          </a:xfrm>
+          <a:prstGeom prst="rect">
             <a:avLst/>
           </a:prstGeom>
           <a:solidFill>
-            <a:srgbClr val="FFFFFF"/>
+            <a:srgbClr val="1F8F5F"/>
           </a:solidFill>
           <a:ln>
             <a:noFill/>
@@ -3612,14 +3699,14 @@
       </p:sp>
       <p:sp>
         <p:nvSpPr>
-          <p:cNvPr id="7" name="TextBox 6"/>
-          <p:cNvSpPr txBox="1"/>
-          <p:nvPr/>
-        </p:nvSpPr>
-        <p:spPr>
-          <a:xfrm>
-            <a:off x="868680" y="1828800"/>
-            <a:ext cx="4846320" cy="365760"/>
+          <p:cNvPr id="8" name="TextBox 7"/>
+          <p:cNvSpPr txBox="1"/>
+          <p:nvPr/>
+        </p:nvSpPr>
+        <p:spPr>
+          <a:xfrm>
+            <a:off x="548640" y="1874520"/>
+            <a:ext cx="5394960" cy="411480"/>
           </a:xfrm>
           <a:prstGeom prst="rect">
             <a:avLst/>
@@ -3636,9 +3723,9 @@
             <a:r>
               <a:rPr sz="1800" b="1">
                 <a:solidFill>
-                  <a:srgbClr val="0D223B"/>
-                </a:solidFill>
-                <a:latin typeface="Calibri"/>
+                  <a:srgbClr val="07182A"/>
+                </a:solidFill>
+                <a:latin typeface="Arial"/>
               </a:rPr>
               <a:t>Госсектор</a:t>
             </a:r>
@@ -3647,14 +3734,14 @@
       </p:sp>
       <p:sp>
         <p:nvSpPr>
-          <p:cNvPr id="8" name="TextBox 7"/>
-          <p:cNvSpPr txBox="1"/>
-          <p:nvPr/>
-        </p:nvSpPr>
-        <p:spPr>
-          <a:xfrm>
-            <a:off x="868680" y="2377440"/>
-            <a:ext cx="4846320" cy="457200"/>
+          <p:cNvPr id="9" name="TextBox 8"/>
+          <p:cNvSpPr txBox="1"/>
+          <p:nvPr/>
+        </p:nvSpPr>
+        <p:spPr>
+          <a:xfrm>
+            <a:off x="548640" y="2423160"/>
+            <a:ext cx="5394960" cy="640080"/>
           </a:xfrm>
           <a:prstGeom prst="rect">
             <a:avLst/>
@@ -3671,9 +3758,9 @@
             <a:r>
               <a:rPr sz="1400" b="0">
                 <a:solidFill>
-                  <a:srgbClr val="28394A"/>
-                </a:solidFill>
-                <a:latin typeface="Calibri"/>
+                  <a:srgbClr val="3D5566"/>
+                </a:solidFill>
+                <a:latin typeface="Arial"/>
               </a:rPr>
               <a:t>Цифровые и инфраструктурные проекты</a:t>
             </a:r>
@@ -3682,20 +3769,20 @@
       </p:sp>
       <p:sp>
         <p:nvSpPr>
-          <p:cNvPr id="9" name="Rounded Rectangle 8"/>
+          <p:cNvPr id="10" name="Rectangle 9"/>
           <p:cNvSpPr/>
           <p:nvPr/>
         </p:nvSpPr>
         <p:spPr>
           <a:xfrm>
-            <a:off x="6309359" y="1463040"/>
-            <a:ext cx="5486400" cy="1828800"/>
-          </a:xfrm>
-          <a:prstGeom prst="roundRect">
+            <a:off x="6309359" y="1554480"/>
+            <a:ext cx="5394960" cy="54864"/>
+          </a:xfrm>
+          <a:prstGeom prst="rect">
             <a:avLst/>
           </a:prstGeom>
           <a:solidFill>
-            <a:srgbClr val="FFFFFF"/>
+            <a:srgbClr val="1F8F5F"/>
           </a:solidFill>
           <a:ln>
             <a:noFill/>
@@ -3725,14 +3812,14 @@
       </p:sp>
       <p:sp>
         <p:nvSpPr>
-          <p:cNvPr id="10" name="TextBox 9"/>
-          <p:cNvSpPr txBox="1"/>
-          <p:nvPr/>
-        </p:nvSpPr>
-        <p:spPr>
-          <a:xfrm>
-            <a:off x="6629399" y="1828800"/>
-            <a:ext cx="4846320" cy="365760"/>
+          <p:cNvPr id="11" name="TextBox 10"/>
+          <p:cNvSpPr txBox="1"/>
+          <p:nvPr/>
+        </p:nvSpPr>
+        <p:spPr>
+          <a:xfrm>
+            <a:off x="6309359" y="1874520"/>
+            <a:ext cx="5394960" cy="411480"/>
           </a:xfrm>
           <a:prstGeom prst="rect">
             <a:avLst/>
@@ -3749,9 +3836,9 @@
             <a:r>
               <a:rPr sz="1800" b="1">
                 <a:solidFill>
-                  <a:srgbClr val="0D223B"/>
-                </a:solidFill>
-                <a:latin typeface="Calibri"/>
+                  <a:srgbClr val="07182A"/>
+                </a:solidFill>
+                <a:latin typeface="Arial"/>
               </a:rPr>
               <a:t>Бизнес</a:t>
             </a:r>
@@ -3760,14 +3847,14 @@
       </p:sp>
       <p:sp>
         <p:nvSpPr>
-          <p:cNvPr id="11" name="TextBox 10"/>
-          <p:cNvSpPr txBox="1"/>
-          <p:nvPr/>
-        </p:nvSpPr>
-        <p:spPr>
-          <a:xfrm>
-            <a:off x="6629399" y="2377440"/>
-            <a:ext cx="4846320" cy="457200"/>
+          <p:cNvPr id="12" name="TextBox 11"/>
+          <p:cNvSpPr txBox="1"/>
+          <p:nvPr/>
+        </p:nvSpPr>
+        <p:spPr>
+          <a:xfrm>
+            <a:off x="6309359" y="2423160"/>
+            <a:ext cx="5394960" cy="640080"/>
           </a:xfrm>
           <a:prstGeom prst="rect">
             <a:avLst/>
@@ -3784,9 +3871,9 @@
             <a:r>
               <a:rPr sz="1400" b="0">
                 <a:solidFill>
-                  <a:srgbClr val="28394A"/>
-                </a:solidFill>
-                <a:latin typeface="Calibri"/>
+                  <a:srgbClr val="3D5566"/>
+                </a:solidFill>
+                <a:latin typeface="Arial"/>
               </a:rPr>
               <a:t>Компании и подрядчики</a:t>
             </a:r>
@@ -3795,20 +3882,20 @@
       </p:sp>
       <p:sp>
         <p:nvSpPr>
-          <p:cNvPr id="12" name="Rounded Rectangle 11"/>
+          <p:cNvPr id="13" name="Rectangle 12"/>
           <p:cNvSpPr/>
           <p:nvPr/>
         </p:nvSpPr>
         <p:spPr>
           <a:xfrm>
-            <a:off x="548640" y="3566160"/>
-            <a:ext cx="5486400" cy="1828800"/>
-          </a:xfrm>
-          <a:prstGeom prst="roundRect">
+            <a:off x="548640" y="3749039"/>
+            <a:ext cx="5394960" cy="54864"/>
+          </a:xfrm>
+          <a:prstGeom prst="rect">
             <a:avLst/>
           </a:prstGeom>
           <a:solidFill>
-            <a:srgbClr val="FFFFFF"/>
+            <a:srgbClr val="1F8F5F"/>
           </a:solidFill>
           <a:ln>
             <a:noFill/>
@@ -3838,14 +3925,14 @@
       </p:sp>
       <p:sp>
         <p:nvSpPr>
-          <p:cNvPr id="13" name="TextBox 12"/>
-          <p:cNvSpPr txBox="1"/>
-          <p:nvPr/>
-        </p:nvSpPr>
-        <p:spPr>
-          <a:xfrm>
-            <a:off x="868680" y="3931920"/>
-            <a:ext cx="4846320" cy="365760"/>
+          <p:cNvPr id="14" name="TextBox 13"/>
+          <p:cNvSpPr txBox="1"/>
+          <p:nvPr/>
+        </p:nvSpPr>
+        <p:spPr>
+          <a:xfrm>
+            <a:off x="548640" y="4069079"/>
+            <a:ext cx="5394960" cy="411480"/>
           </a:xfrm>
           <a:prstGeom prst="rect">
             <a:avLst/>
@@ -3862,9 +3949,9 @@
             <a:r>
               <a:rPr sz="1800" b="1">
                 <a:solidFill>
-                  <a:srgbClr val="0D223B"/>
-                </a:solidFill>
-                <a:latin typeface="Calibri"/>
+                  <a:srgbClr val="07182A"/>
+                </a:solidFill>
+                <a:latin typeface="Arial"/>
               </a:rPr>
               <a:t>Образование</a:t>
             </a:r>
@@ -3873,14 +3960,14 @@
       </p:sp>
       <p:sp>
         <p:nvSpPr>
-          <p:cNvPr id="14" name="TextBox 13"/>
-          <p:cNvSpPr txBox="1"/>
-          <p:nvPr/>
-        </p:nvSpPr>
-        <p:spPr>
-          <a:xfrm>
-            <a:off x="868680" y="4480560"/>
-            <a:ext cx="4846320" cy="457200"/>
+          <p:cNvPr id="15" name="TextBox 14"/>
+          <p:cNvSpPr txBox="1"/>
+          <p:nvPr/>
+        </p:nvSpPr>
+        <p:spPr>
+          <a:xfrm>
+            <a:off x="548640" y="4617719"/>
+            <a:ext cx="5394960" cy="640080"/>
           </a:xfrm>
           <a:prstGeom prst="rect">
             <a:avLst/>
@@ -3897,9 +3984,9 @@
             <a:r>
               <a:rPr sz="1400" b="0">
                 <a:solidFill>
-                  <a:srgbClr val="28394A"/>
-                </a:solidFill>
-                <a:latin typeface="Calibri"/>
+                  <a:srgbClr val="3D5566"/>
+                </a:solidFill>
+                <a:latin typeface="Arial"/>
               </a:rPr>
               <a:t>Университеты Бишкека</a:t>
             </a:r>
@@ -3908,20 +3995,20 @@
       </p:sp>
       <p:sp>
         <p:nvSpPr>
-          <p:cNvPr id="15" name="Rounded Rectangle 14"/>
+          <p:cNvPr id="16" name="Rectangle 15"/>
           <p:cNvSpPr/>
           <p:nvPr/>
         </p:nvSpPr>
         <p:spPr>
           <a:xfrm>
-            <a:off x="6309359" y="3566160"/>
-            <a:ext cx="5486400" cy="1828800"/>
-          </a:xfrm>
-          <a:prstGeom prst="roundRect">
+            <a:off x="6309359" y="3749039"/>
+            <a:ext cx="5394960" cy="54864"/>
+          </a:xfrm>
+          <a:prstGeom prst="rect">
             <a:avLst/>
           </a:prstGeom>
           <a:solidFill>
-            <a:srgbClr val="FFFFFF"/>
+            <a:srgbClr val="1F8F5F"/>
           </a:solidFill>
           <a:ln>
             <a:noFill/>
@@ -3951,14 +4038,14 @@
       </p:sp>
       <p:sp>
         <p:nvSpPr>
-          <p:cNvPr id="16" name="TextBox 15"/>
-          <p:cNvSpPr txBox="1"/>
-          <p:nvPr/>
-        </p:nvSpPr>
-        <p:spPr>
-          <a:xfrm>
-            <a:off x="6629399" y="3931920"/>
-            <a:ext cx="4846320" cy="365760"/>
+          <p:cNvPr id="17" name="TextBox 16"/>
+          <p:cNvSpPr txBox="1"/>
+          <p:nvPr/>
+        </p:nvSpPr>
+        <p:spPr>
+          <a:xfrm>
+            <a:off x="6309359" y="4069079"/>
+            <a:ext cx="5394960" cy="411480"/>
           </a:xfrm>
           <a:prstGeom prst="rect">
             <a:avLst/>
@@ -3975,9 +4062,9 @@
             <a:r>
               <a:rPr sz="1800" b="1">
                 <a:solidFill>
-                  <a:srgbClr val="0D223B"/>
-                </a:solidFill>
-                <a:latin typeface="Calibri"/>
+                  <a:srgbClr val="07182A"/>
+                </a:solidFill>
+                <a:latin typeface="Arial"/>
               </a:rPr>
               <a:t>Обучение</a:t>
             </a:r>
@@ -3986,14 +4073,14 @@
       </p:sp>
       <p:sp>
         <p:nvSpPr>
-          <p:cNvPr id="17" name="TextBox 16"/>
-          <p:cNvSpPr txBox="1"/>
-          <p:nvPr/>
-        </p:nvSpPr>
-        <p:spPr>
-          <a:xfrm>
-            <a:off x="6629399" y="4480560"/>
-            <a:ext cx="4846320" cy="457200"/>
+          <p:cNvPr id="18" name="TextBox 17"/>
+          <p:cNvSpPr txBox="1"/>
+          <p:nvPr/>
+        </p:nvSpPr>
+        <p:spPr>
+          <a:xfrm>
+            <a:off x="6309359" y="4617719"/>
+            <a:ext cx="5394960" cy="640080"/>
           </a:xfrm>
           <a:prstGeom prst="rect">
             <a:avLst/>
@@ -4010,9 +4097,9 @@
             <a:r>
               <a:rPr sz="1400" b="0">
                 <a:solidFill>
-                  <a:srgbClr val="28394A"/>
-                </a:solidFill>
-                <a:latin typeface="Calibri"/>
+                  <a:srgbClr val="3D5566"/>
+                </a:solidFill>
+                <a:latin typeface="Arial"/>
               </a:rPr>
               <a:t>Подготовка к сертификации ICB4</a:t>
             </a:r>
@@ -4021,7 +4108,7 @@
       </p:sp>
       <p:sp>
         <p:nvSpPr>
-          <p:cNvPr id="18" name="TextBox 17"/>
+          <p:cNvPr id="19" name="TextBox 18"/>
           <p:cNvSpPr txBox="1"/>
           <p:nvPr/>
         </p:nvSpPr>
@@ -4045,9 +4132,9 @@
             <a:r>
               <a:rPr sz="1100" b="0">
                 <a:solidFill>
-                  <a:srgbClr val="5C6B72"/>
-                </a:solidFill>
-                <a:latin typeface="Calibri"/>
+                  <a:srgbClr val="9AAFBD"/>
+                </a:solidFill>
+                <a:latin typeface="Arial"/>
               </a:rPr>
               <a:t>IPMA Kyrgyz Republic  ·  ipma.kg</a:t>
             </a:r>
@@ -4056,14 +4143,14 @@
       </p:sp>
       <p:sp>
         <p:nvSpPr>
-          <p:cNvPr id="19" name="TextBox 18"/>
-          <p:cNvSpPr txBox="1"/>
-          <p:nvPr/>
-        </p:nvSpPr>
-        <p:spPr>
-          <a:xfrm>
-            <a:off x="10515600" y="6446520"/>
-            <a:ext cx="1280160" cy="274320"/>
+          <p:cNvPr id="20" name="TextBox 19"/>
+          <p:cNvSpPr txBox="1"/>
+          <p:nvPr/>
+        </p:nvSpPr>
+        <p:spPr>
+          <a:xfrm>
+            <a:off x="10424160" y="6446520"/>
+            <a:ext cx="1371600" cy="274320"/>
           </a:xfrm>
           <a:prstGeom prst="rect">
             <a:avLst/>
@@ -4080,9 +4167,9 @@
             <a:r>
               <a:rPr sz="1100" b="0">
                 <a:solidFill>
-                  <a:srgbClr val="5C6B72"/>
-                </a:solidFill>
-                <a:latin typeface="Calibri"/>
+                  <a:srgbClr val="9AAFBD"/>
+                </a:solidFill>
+                <a:latin typeface="Arial"/>
               </a:rPr>
               <a:t>10 / 12</a:t>
             </a:r>
@@ -4122,7 +4209,7 @@
             <a:avLst/>
           </a:prstGeom>
           <a:solidFill>
-            <a:srgbClr val="EEF2F1"/>
+            <a:srgbClr val="E8EEF2"/>
           </a:solidFill>
           <a:ln>
             <a:noFill/>
@@ -4150,9 +4237,52 @@
           </a:p>
         </p:txBody>
       </p:sp>
+      <p:sp>
+        <p:nvSpPr>
+          <p:cNvPr id="3" name="Rectangle 2"/>
+          <p:cNvSpPr/>
+          <p:nvPr/>
+        </p:nvSpPr>
+        <p:spPr>
+          <a:xfrm>
+            <a:off x="0" y="0"/>
+            <a:ext cx="12191695" cy="73152"/>
+          </a:xfrm>
+          <a:prstGeom prst="rect">
+            <a:avLst/>
+          </a:prstGeom>
+          <a:solidFill>
+            <a:srgbClr val="1F8F5F"/>
+          </a:solidFill>
+          <a:ln>
+            <a:noFill/>
+          </a:ln>
+        </p:spPr>
+        <p:style>
+          <a:lnRef idx="1">
+            <a:schemeClr val="accent1"/>
+          </a:lnRef>
+          <a:fillRef idx="3">
+            <a:schemeClr val="accent1"/>
+          </a:fillRef>
+          <a:effectRef idx="2">
+            <a:schemeClr val="accent1"/>
+          </a:effectRef>
+          <a:fontRef idx="minor">
+            <a:schemeClr val="lt1"/>
+          </a:fontRef>
+        </p:style>
+        <p:txBody>
+          <a:bodyPr rtlCol="0" anchor="ctr"/>
+          <a:lstStyle/>
+          <a:p>
+            <a:pPr algn="ctr"/>
+          </a:p>
+        </p:txBody>
+      </p:sp>
       <p:pic>
         <p:nvPicPr>
-          <p:cNvPr id="3" name="Picture 2" descr="ipma-kr-emblem.png"/>
+          <p:cNvPr id="4" name="Picture 3" descr="ipma-kr-emblem.png"/>
           <p:cNvPicPr>
             <a:picLocks noChangeAspect="1"/>
           </p:cNvPicPr>
@@ -4166,8 +4296,8 @@
         </p:blipFill>
         <p:spPr>
           <a:xfrm>
-            <a:off x="11292840" y="228600"/>
-            <a:ext cx="597448" cy="594360"/>
+            <a:off x="11338560" y="256032"/>
+            <a:ext cx="505533" cy="502920"/>
           </a:xfrm>
           <a:prstGeom prst="rect">
             <a:avLst/>
@@ -4176,14 +4306,14 @@
       </p:pic>
       <p:sp>
         <p:nvSpPr>
-          <p:cNvPr id="4" name="TextBox 3"/>
+          <p:cNvPr id="5" name="TextBox 4"/>
           <p:cNvSpPr txBox="1"/>
           <p:nvPr/>
         </p:nvSpPr>
         <p:spPr>
           <a:xfrm>
             <a:off x="548640" y="320040"/>
-            <a:ext cx="10972800" cy="274320"/>
+            <a:ext cx="10058400" cy="274320"/>
           </a:xfrm>
           <a:prstGeom prst="rect">
             <a:avLst/>
@@ -4200,9 +4330,9 @@
             <a:r>
               <a:rPr sz="1100" b="1">
                 <a:solidFill>
-                  <a:srgbClr val="1F7A34"/>
-                </a:solidFill>
-                <a:latin typeface="Calibri"/>
+                  <a:srgbClr val="1F8F5F"/>
+                </a:solidFill>
+                <a:latin typeface="Arial"/>
               </a:rPr>
               <a:t>11  »  МОЛОДЁЖЬ</a:t>
             </a:r>
@@ -4211,158 +4341,405 @@
       </p:sp>
       <p:sp>
         <p:nvSpPr>
-          <p:cNvPr id="5" name="TextBox 4"/>
+          <p:cNvPr id="6" name="TextBox 5"/>
           <p:cNvSpPr txBox="1"/>
           <p:nvPr/>
         </p:nvSpPr>
         <p:spPr>
           <a:xfrm>
             <a:off x="548640" y="640080"/>
-            <a:ext cx="10515600" cy="548640"/>
-          </a:xfrm>
-          <a:prstGeom prst="rect">
-            <a:avLst/>
-          </a:prstGeom>
-          <a:noFill/>
-        </p:spPr>
-        <p:txBody>
-          <a:bodyPr wrap="square">
-            <a:spAutoFit/>
-          </a:bodyPr>
-          <a:lstStyle/>
-          <a:p>
-            <a:pPr algn="l"/>
-            <a:r>
-              <a:rPr sz="2800" b="1">
-                <a:solidFill>
-                  <a:srgbClr val="0D223B"/>
-                </a:solidFill>
-                <a:latin typeface="Arial"/>
-              </a:rPr>
-              <a:t>Развитие Young Crew</a:t>
-            </a:r>
-          </a:p>
-        </p:txBody>
-      </p:sp>
-      <p:sp>
-        <p:nvSpPr>
-          <p:cNvPr id="6" name="TextBox 5"/>
+            <a:ext cx="10058400" cy="640080"/>
+          </a:xfrm>
+          <a:prstGeom prst="rect">
+            <a:avLst/>
+          </a:prstGeom>
+          <a:noFill/>
+        </p:spPr>
+        <p:txBody>
+          <a:bodyPr wrap="square">
+            <a:spAutoFit/>
+          </a:bodyPr>
+          <a:lstStyle/>
+          <a:p>
+            <a:pPr algn="l"/>
+            <a:r>
+              <a:rPr sz="3200" b="1">
+                <a:solidFill>
+                  <a:srgbClr val="07182A"/>
+                </a:solidFill>
+                <a:latin typeface="Arial"/>
+              </a:rPr>
+              <a:t>Young Crew</a:t>
+            </a:r>
+          </a:p>
+        </p:txBody>
+      </p:sp>
+      <p:sp>
+        <p:nvSpPr>
+          <p:cNvPr id="7" name="TextBox 6"/>
           <p:cNvSpPr txBox="1"/>
           <p:nvPr/>
         </p:nvSpPr>
         <p:spPr>
           <a:xfrm>
             <a:off x="548640" y="1417320"/>
-            <a:ext cx="10972800" cy="3474720"/>
-          </a:xfrm>
-          <a:prstGeom prst="rect">
-            <a:avLst/>
-          </a:prstGeom>
-          <a:noFill/>
-        </p:spPr>
-        <p:txBody>
-          <a:bodyPr wrap="square">
-            <a:spAutoFit/>
-          </a:bodyPr>
-          <a:lstStyle/>
-          <a:p>
-            <a:pPr>
-              <a:spcAft>
-                <a:spcPts val="1400"/>
-              </a:spcAft>
-            </a:pPr>
-            <a:r>
-              <a:rPr sz="1600" b="0">
-                <a:solidFill>
-                  <a:srgbClr val="28394A"/>
-                </a:solidFill>
-                <a:latin typeface="Calibri"/>
-              </a:rPr>
-              <a:t>» Знакомить молодёжь со стандартами и ценностями IPMA</a:t>
-            </a:r>
-          </a:p>
-          <a:p>
-            <a:pPr>
-              <a:spcAft>
-                <a:spcPts val="1400"/>
-              </a:spcAft>
-            </a:pPr>
-            <a:r>
-              <a:rPr sz="1600" b="0">
-                <a:solidFill>
-                  <a:srgbClr val="28394A"/>
-                </a:solidFill>
-                <a:latin typeface="Calibri"/>
-              </a:rPr>
-              <a:t>» Привлекать студентов через студенческое членство KgPMU</a:t>
-            </a:r>
-          </a:p>
-          <a:p>
-            <a:pPr>
-              <a:spcAft>
-                <a:spcPts val="1400"/>
-              </a:spcAft>
-            </a:pPr>
-            <a:r>
-              <a:rPr sz="1600" b="0">
-                <a:solidFill>
-                  <a:srgbClr val="28394A"/>
-                </a:solidFill>
-                <a:latin typeface="Calibri"/>
-              </a:rPr>
-              <a:t>» Интегрировать ICB4 в образовательные программы вузов</a:t>
-            </a:r>
-          </a:p>
-          <a:p>
-            <a:pPr>
-              <a:spcAft>
-                <a:spcPts val="1400"/>
-              </a:spcAft>
-            </a:pPr>
-            <a:r>
-              <a:rPr sz="1600" b="0">
-                <a:solidFill>
-                  <a:srgbClr val="28394A"/>
-                </a:solidFill>
-                <a:latin typeface="Calibri"/>
-              </a:rPr>
-              <a:t>» Поддерживать путь к сертификации IPMA Level D</a:t>
-            </a:r>
-          </a:p>
-          <a:p>
-            <a:pPr>
-              <a:spcAft>
-                <a:spcPts val="1400"/>
-              </a:spcAft>
-            </a:pPr>
-            <a:r>
-              <a:rPr sz="1600" b="0">
-                <a:solidFill>
-                  <a:srgbClr val="28394A"/>
-                </a:solidFill>
-                <a:latin typeface="Calibri"/>
-              </a:rPr>
-              <a:t>» Участие в международных молодёжных форумах Young Crew</a:t>
-            </a:r>
-          </a:p>
-        </p:txBody>
-      </p:sp>
-      <p:sp>
-        <p:nvSpPr>
-          <p:cNvPr id="7" name="Rounded Rectangle 6"/>
+            <a:ext cx="457200" cy="365760"/>
+          </a:xfrm>
+          <a:prstGeom prst="rect">
+            <a:avLst/>
+          </a:prstGeom>
+          <a:noFill/>
+        </p:spPr>
+        <p:txBody>
+          <a:bodyPr wrap="square">
+            <a:spAutoFit/>
+          </a:bodyPr>
+          <a:lstStyle/>
+          <a:p>
+            <a:pPr algn="l"/>
+            <a:r>
+              <a:rPr sz="1600" b="1">
+                <a:solidFill>
+                  <a:srgbClr val="E30613"/>
+                </a:solidFill>
+                <a:latin typeface="Arial"/>
+              </a:rPr>
+              <a:t>»</a:t>
+            </a:r>
+          </a:p>
+        </p:txBody>
+      </p:sp>
+      <p:sp>
+        <p:nvSpPr>
+          <p:cNvPr id="8" name="TextBox 7"/>
+          <p:cNvSpPr txBox="1"/>
+          <p:nvPr/>
+        </p:nvSpPr>
+        <p:spPr>
+          <a:xfrm>
+            <a:off x="1097280" y="1417320"/>
+            <a:ext cx="10058400" cy="411480"/>
+          </a:xfrm>
+          <a:prstGeom prst="rect">
+            <a:avLst/>
+          </a:prstGeom>
+          <a:noFill/>
+        </p:spPr>
+        <p:txBody>
+          <a:bodyPr wrap="square">
+            <a:spAutoFit/>
+          </a:bodyPr>
+          <a:lstStyle/>
+          <a:p>
+            <a:pPr algn="l"/>
+            <a:r>
+              <a:rPr sz="1500" b="0">
+                <a:solidFill>
+                  <a:srgbClr val="122433"/>
+                </a:solidFill>
+                <a:latin typeface="Arial"/>
+              </a:rPr>
+              <a:t>Знакомить молодёжь со стандартами и ценностями IPMA</a:t>
+            </a:r>
+          </a:p>
+        </p:txBody>
+      </p:sp>
+      <p:sp>
+        <p:nvSpPr>
+          <p:cNvPr id="9" name="TextBox 8"/>
+          <p:cNvSpPr txBox="1"/>
+          <p:nvPr/>
+        </p:nvSpPr>
+        <p:spPr>
+          <a:xfrm>
+            <a:off x="548640" y="2103120"/>
+            <a:ext cx="457200" cy="365760"/>
+          </a:xfrm>
+          <a:prstGeom prst="rect">
+            <a:avLst/>
+          </a:prstGeom>
+          <a:noFill/>
+        </p:spPr>
+        <p:txBody>
+          <a:bodyPr wrap="square">
+            <a:spAutoFit/>
+          </a:bodyPr>
+          <a:lstStyle/>
+          <a:p>
+            <a:pPr algn="l"/>
+            <a:r>
+              <a:rPr sz="1600" b="1">
+                <a:solidFill>
+                  <a:srgbClr val="E30613"/>
+                </a:solidFill>
+                <a:latin typeface="Arial"/>
+              </a:rPr>
+              <a:t>»</a:t>
+            </a:r>
+          </a:p>
+        </p:txBody>
+      </p:sp>
+      <p:sp>
+        <p:nvSpPr>
+          <p:cNvPr id="10" name="TextBox 9"/>
+          <p:cNvSpPr txBox="1"/>
+          <p:nvPr/>
+        </p:nvSpPr>
+        <p:spPr>
+          <a:xfrm>
+            <a:off x="1097280" y="2103120"/>
+            <a:ext cx="10058400" cy="411480"/>
+          </a:xfrm>
+          <a:prstGeom prst="rect">
+            <a:avLst/>
+          </a:prstGeom>
+          <a:noFill/>
+        </p:spPr>
+        <p:txBody>
+          <a:bodyPr wrap="square">
+            <a:spAutoFit/>
+          </a:bodyPr>
+          <a:lstStyle/>
+          <a:p>
+            <a:pPr algn="l"/>
+            <a:r>
+              <a:rPr sz="1500" b="0">
+                <a:solidFill>
+                  <a:srgbClr val="122433"/>
+                </a:solidFill>
+                <a:latin typeface="Arial"/>
+              </a:rPr>
+              <a:t>Привлекать студентов через студенческое членство KgPMU</a:t>
+            </a:r>
+          </a:p>
+        </p:txBody>
+      </p:sp>
+      <p:sp>
+        <p:nvSpPr>
+          <p:cNvPr id="11" name="TextBox 10"/>
+          <p:cNvSpPr txBox="1"/>
+          <p:nvPr/>
+        </p:nvSpPr>
+        <p:spPr>
+          <a:xfrm>
+            <a:off x="548640" y="2788920"/>
+            <a:ext cx="457200" cy="365760"/>
+          </a:xfrm>
+          <a:prstGeom prst="rect">
+            <a:avLst/>
+          </a:prstGeom>
+          <a:noFill/>
+        </p:spPr>
+        <p:txBody>
+          <a:bodyPr wrap="square">
+            <a:spAutoFit/>
+          </a:bodyPr>
+          <a:lstStyle/>
+          <a:p>
+            <a:pPr algn="l"/>
+            <a:r>
+              <a:rPr sz="1600" b="1">
+                <a:solidFill>
+                  <a:srgbClr val="E30613"/>
+                </a:solidFill>
+                <a:latin typeface="Arial"/>
+              </a:rPr>
+              <a:t>»</a:t>
+            </a:r>
+          </a:p>
+        </p:txBody>
+      </p:sp>
+      <p:sp>
+        <p:nvSpPr>
+          <p:cNvPr id="12" name="TextBox 11"/>
+          <p:cNvSpPr txBox="1"/>
+          <p:nvPr/>
+        </p:nvSpPr>
+        <p:spPr>
+          <a:xfrm>
+            <a:off x="1097280" y="2788920"/>
+            <a:ext cx="10058400" cy="411480"/>
+          </a:xfrm>
+          <a:prstGeom prst="rect">
+            <a:avLst/>
+          </a:prstGeom>
+          <a:noFill/>
+        </p:spPr>
+        <p:txBody>
+          <a:bodyPr wrap="square">
+            <a:spAutoFit/>
+          </a:bodyPr>
+          <a:lstStyle/>
+          <a:p>
+            <a:pPr algn="l"/>
+            <a:r>
+              <a:rPr sz="1500" b="0">
+                <a:solidFill>
+                  <a:srgbClr val="122433"/>
+                </a:solidFill>
+                <a:latin typeface="Arial"/>
+              </a:rPr>
+              <a:t>Интегрировать ICB4 в образовательные программы вузов</a:t>
+            </a:r>
+          </a:p>
+        </p:txBody>
+      </p:sp>
+      <p:sp>
+        <p:nvSpPr>
+          <p:cNvPr id="13" name="TextBox 12"/>
+          <p:cNvSpPr txBox="1"/>
+          <p:nvPr/>
+        </p:nvSpPr>
+        <p:spPr>
+          <a:xfrm>
+            <a:off x="548640" y="3474720"/>
+            <a:ext cx="457200" cy="365760"/>
+          </a:xfrm>
+          <a:prstGeom prst="rect">
+            <a:avLst/>
+          </a:prstGeom>
+          <a:noFill/>
+        </p:spPr>
+        <p:txBody>
+          <a:bodyPr wrap="square">
+            <a:spAutoFit/>
+          </a:bodyPr>
+          <a:lstStyle/>
+          <a:p>
+            <a:pPr algn="l"/>
+            <a:r>
+              <a:rPr sz="1600" b="1">
+                <a:solidFill>
+                  <a:srgbClr val="E30613"/>
+                </a:solidFill>
+                <a:latin typeface="Arial"/>
+              </a:rPr>
+              <a:t>»</a:t>
+            </a:r>
+          </a:p>
+        </p:txBody>
+      </p:sp>
+      <p:sp>
+        <p:nvSpPr>
+          <p:cNvPr id="14" name="TextBox 13"/>
+          <p:cNvSpPr txBox="1"/>
+          <p:nvPr/>
+        </p:nvSpPr>
+        <p:spPr>
+          <a:xfrm>
+            <a:off x="1097280" y="3474720"/>
+            <a:ext cx="10058400" cy="411480"/>
+          </a:xfrm>
+          <a:prstGeom prst="rect">
+            <a:avLst/>
+          </a:prstGeom>
+          <a:noFill/>
+        </p:spPr>
+        <p:txBody>
+          <a:bodyPr wrap="square">
+            <a:spAutoFit/>
+          </a:bodyPr>
+          <a:lstStyle/>
+          <a:p>
+            <a:pPr algn="l"/>
+            <a:r>
+              <a:rPr sz="1500" b="0">
+                <a:solidFill>
+                  <a:srgbClr val="122433"/>
+                </a:solidFill>
+                <a:latin typeface="Arial"/>
+              </a:rPr>
+              <a:t>Путь к сертификации IPMA Level D</a:t>
+            </a:r>
+          </a:p>
+        </p:txBody>
+      </p:sp>
+      <p:sp>
+        <p:nvSpPr>
+          <p:cNvPr id="15" name="TextBox 14"/>
+          <p:cNvSpPr txBox="1"/>
+          <p:nvPr/>
+        </p:nvSpPr>
+        <p:spPr>
+          <a:xfrm>
+            <a:off x="548640" y="4160520"/>
+            <a:ext cx="457200" cy="365760"/>
+          </a:xfrm>
+          <a:prstGeom prst="rect">
+            <a:avLst/>
+          </a:prstGeom>
+          <a:noFill/>
+        </p:spPr>
+        <p:txBody>
+          <a:bodyPr wrap="square">
+            <a:spAutoFit/>
+          </a:bodyPr>
+          <a:lstStyle/>
+          <a:p>
+            <a:pPr algn="l"/>
+            <a:r>
+              <a:rPr sz="1600" b="1">
+                <a:solidFill>
+                  <a:srgbClr val="E30613"/>
+                </a:solidFill>
+                <a:latin typeface="Arial"/>
+              </a:rPr>
+              <a:t>»</a:t>
+            </a:r>
+          </a:p>
+        </p:txBody>
+      </p:sp>
+      <p:sp>
+        <p:nvSpPr>
+          <p:cNvPr id="16" name="TextBox 15"/>
+          <p:cNvSpPr txBox="1"/>
+          <p:nvPr/>
+        </p:nvSpPr>
+        <p:spPr>
+          <a:xfrm>
+            <a:off x="1097280" y="4160520"/>
+            <a:ext cx="10058400" cy="411480"/>
+          </a:xfrm>
+          <a:prstGeom prst="rect">
+            <a:avLst/>
+          </a:prstGeom>
+          <a:noFill/>
+        </p:spPr>
+        <p:txBody>
+          <a:bodyPr wrap="square">
+            <a:spAutoFit/>
+          </a:bodyPr>
+          <a:lstStyle/>
+          <a:p>
+            <a:pPr algn="l"/>
+            <a:r>
+              <a:rPr sz="1500" b="0">
+                <a:solidFill>
+                  <a:srgbClr val="122433"/>
+                </a:solidFill>
+                <a:latin typeface="Arial"/>
+              </a:rPr>
+              <a:t>Участие в международных форумах Young Crew</a:t>
+            </a:r>
+          </a:p>
+        </p:txBody>
+      </p:sp>
+      <p:sp>
+        <p:nvSpPr>
+          <p:cNvPr id="17" name="Rounded Rectangle 16"/>
           <p:cNvSpPr/>
           <p:nvPr/>
         </p:nvSpPr>
         <p:spPr>
           <a:xfrm>
-            <a:off x="548640" y="5029200"/>
-            <a:ext cx="11064240" cy="731520"/>
+            <a:off x="548640" y="5120640"/>
+            <a:ext cx="11064240" cy="685800"/>
           </a:xfrm>
           <a:prstGeom prst="roundRect">
             <a:avLst/>
           </a:prstGeom>
           <a:solidFill>
-            <a:srgbClr val="2F9E44"/>
+            <a:srgbClr val="07182A"/>
           </a:solidFill>
           <a:ln>
             <a:noFill/>
@@ -4392,33 +4769,33 @@
       </p:sp>
       <p:sp>
         <p:nvSpPr>
-          <p:cNvPr id="8" name="TextBox 7"/>
-          <p:cNvSpPr txBox="1"/>
-          <p:nvPr/>
-        </p:nvSpPr>
-        <p:spPr>
-          <a:xfrm>
-            <a:off x="822960" y="5212080"/>
-            <a:ext cx="10515600" cy="411480"/>
-          </a:xfrm>
-          <a:prstGeom prst="rect">
-            <a:avLst/>
-          </a:prstGeom>
-          <a:noFill/>
-        </p:spPr>
-        <p:txBody>
-          <a:bodyPr wrap="square">
-            <a:spAutoFit/>
-          </a:bodyPr>
-          <a:lstStyle/>
-          <a:p>
-            <a:pPr algn="ctr"/>
-            <a:r>
-              <a:rPr sz="1500" b="1">
+          <p:cNvPr id="18" name="TextBox 17"/>
+          <p:cNvSpPr txBox="1"/>
+          <p:nvPr/>
+        </p:nvSpPr>
+        <p:spPr>
+          <a:xfrm>
+            <a:off x="822960" y="5285232"/>
+            <a:ext cx="10515600" cy="365760"/>
+          </a:xfrm>
+          <a:prstGeom prst="rect">
+            <a:avLst/>
+          </a:prstGeom>
+          <a:noFill/>
+        </p:spPr>
+        <p:txBody>
+          <a:bodyPr wrap="square">
+            <a:spAutoFit/>
+          </a:bodyPr>
+          <a:lstStyle/>
+          <a:p>
+            <a:pPr algn="l"/>
+            <a:r>
+              <a:rPr sz="1400" b="1">
                 <a:solidFill>
                   <a:srgbClr val="FFFFFF"/>
                 </a:solidFill>
-                <a:latin typeface="Calibri"/>
+                <a:latin typeface="Arial"/>
               </a:rPr>
               <a:t>Поддержка будущего профессии P3M в Кыргызстане</a:t>
             </a:r>
@@ -4427,7 +4804,7 @@
       </p:sp>
       <p:sp>
         <p:nvSpPr>
-          <p:cNvPr id="9" name="TextBox 8"/>
+          <p:cNvPr id="19" name="TextBox 18"/>
           <p:cNvSpPr txBox="1"/>
           <p:nvPr/>
         </p:nvSpPr>
@@ -4451,9 +4828,9 @@
             <a:r>
               <a:rPr sz="1100" b="0">
                 <a:solidFill>
-                  <a:srgbClr val="5C6B72"/>
-                </a:solidFill>
-                <a:latin typeface="Calibri"/>
+                  <a:srgbClr val="9AAFBD"/>
+                </a:solidFill>
+                <a:latin typeface="Arial"/>
               </a:rPr>
               <a:t>IPMA Kyrgyz Republic  ·  ipma.kg</a:t>
             </a:r>
@@ -4462,14 +4839,14 @@
       </p:sp>
       <p:sp>
         <p:nvSpPr>
-          <p:cNvPr id="10" name="TextBox 9"/>
-          <p:cNvSpPr txBox="1"/>
-          <p:nvPr/>
-        </p:nvSpPr>
-        <p:spPr>
-          <a:xfrm>
-            <a:off x="10515600" y="6446520"/>
-            <a:ext cx="1280160" cy="274320"/>
+          <p:cNvPr id="20" name="TextBox 19"/>
+          <p:cNvSpPr txBox="1"/>
+          <p:nvPr/>
+        </p:nvSpPr>
+        <p:spPr>
+          <a:xfrm>
+            <a:off x="10424160" y="6446520"/>
+            <a:ext cx="1371600" cy="274320"/>
           </a:xfrm>
           <a:prstGeom prst="rect">
             <a:avLst/>
@@ -4486,9 +4863,9 @@
             <a:r>
               <a:rPr sz="1100" b="0">
                 <a:solidFill>
-                  <a:srgbClr val="5C6B72"/>
-                </a:solidFill>
-                <a:latin typeface="Calibri"/>
+                  <a:srgbClr val="9AAFBD"/>
+                </a:solidFill>
+                <a:latin typeface="Arial"/>
               </a:rPr>
               <a:t>11 / 12</a:t>
             </a:r>
@@ -4528,7 +4905,7 @@
             <a:avLst/>
           </a:prstGeom>
           <a:solidFill>
-            <a:srgbClr val="0D223B"/>
+            <a:srgbClr val="07182A"/>
           </a:solidFill>
           <a:ln>
             <a:noFill/>
@@ -4564,27 +4941,27 @@
         </p:nvSpPr>
         <p:spPr>
           <a:xfrm>
-            <a:off x="11155680" y="5303520"/>
-            <a:ext cx="1371600" cy="1097280"/>
-          </a:xfrm>
-          <a:prstGeom prst="rect">
-            <a:avLst/>
-          </a:prstGeom>
-          <a:noFill/>
-        </p:spPr>
-        <p:txBody>
-          <a:bodyPr wrap="square">
-            <a:spAutoFit/>
-          </a:bodyPr>
-          <a:lstStyle/>
-          <a:p>
-            <a:pPr algn="l"/>
-            <a:r>
-              <a:rPr sz="9600" b="1">
+            <a:off x="10789920" y="5120640"/>
+            <a:ext cx="1828800" cy="1371600"/>
+          </a:xfrm>
+          <a:prstGeom prst="rect">
+            <a:avLst/>
+          </a:prstGeom>
+          <a:noFill/>
+        </p:spPr>
+        <p:txBody>
+          <a:bodyPr wrap="square">
+            <a:spAutoFit/>
+          </a:bodyPr>
+          <a:lstStyle/>
+          <a:p>
+            <a:pPr algn="l"/>
+            <a:r>
+              <a:rPr sz="12000" b="1">
                 <a:solidFill>
                   <a:srgbClr val="E30613"/>
                 </a:solidFill>
-                <a:latin typeface="Calibri"/>
+                <a:latin typeface="Arial"/>
               </a:rPr>
               <a:t>»</a:t>
             </a:r>
@@ -4593,36 +4970,44 @@
       </p:sp>
       <p:sp>
         <p:nvSpPr>
-          <p:cNvPr id="4" name="TextBox 3"/>
-          <p:cNvSpPr txBox="1"/>
-          <p:nvPr/>
-        </p:nvSpPr>
-        <p:spPr>
-          <a:xfrm>
-            <a:off x="640080" y="1097280"/>
-            <a:ext cx="5943600" cy="320040"/>
-          </a:xfrm>
-          <a:prstGeom prst="rect">
-            <a:avLst/>
-          </a:prstGeom>
-          <a:noFill/>
-        </p:spPr>
-        <p:txBody>
-          <a:bodyPr wrap="square">
-            <a:spAutoFit/>
-          </a:bodyPr>
-          <a:lstStyle/>
-          <a:p>
-            <a:pPr algn="l"/>
-            <a:r>
-              <a:rPr sz="1200" b="1">
-                <a:solidFill>
-                  <a:srgbClr val="7FE0A0"/>
-                </a:solidFill>
-                <a:latin typeface="Calibri"/>
-              </a:rPr>
-              <a:t>СПАСИБО ЗА ВНИМАНИЕ</a:t>
-            </a:r>
+          <p:cNvPr id="4" name="Rounded Rectangle 3"/>
+          <p:cNvSpPr/>
+          <p:nvPr/>
+        </p:nvSpPr>
+        <p:spPr>
+          <a:xfrm>
+            <a:off x="640080" y="1051560"/>
+            <a:ext cx="2011680" cy="384048"/>
+          </a:xfrm>
+          <a:prstGeom prst="roundRect">
+            <a:avLst/>
+          </a:prstGeom>
+          <a:solidFill>
+            <a:srgbClr val="0F2C45"/>
+          </a:solidFill>
+          <a:ln>
+            <a:noFill/>
+          </a:ln>
+        </p:spPr>
+        <p:style>
+          <a:lnRef idx="1">
+            <a:schemeClr val="accent1"/>
+          </a:lnRef>
+          <a:fillRef idx="3">
+            <a:schemeClr val="accent1"/>
+          </a:fillRef>
+          <a:effectRef idx="2">
+            <a:schemeClr val="accent1"/>
+          </a:effectRef>
+          <a:fontRef idx="minor">
+            <a:schemeClr val="lt1"/>
+          </a:fontRef>
+        </p:style>
+        <p:txBody>
+          <a:bodyPr rtlCol="0" anchor="ctr"/>
+          <a:lstStyle/>
+          <a:p>
+            <a:pPr algn="ctr"/>
           </a:p>
         </p:txBody>
       </p:sp>
@@ -4634,8 +5019,43 @@
         </p:nvSpPr>
         <p:spPr>
           <a:xfrm>
-            <a:off x="640080" y="1645920"/>
-            <a:ext cx="6400800" cy="1097280"/>
+            <a:off x="777240" y="1115568"/>
+            <a:ext cx="1828800" cy="274320"/>
+          </a:xfrm>
+          <a:prstGeom prst="rect">
+            <a:avLst/>
+          </a:prstGeom>
+          <a:noFill/>
+        </p:spPr>
+        <p:txBody>
+          <a:bodyPr wrap="square">
+            <a:spAutoFit/>
+          </a:bodyPr>
+          <a:lstStyle/>
+          <a:p>
+            <a:pPr algn="l"/>
+            <a:r>
+              <a:rPr sz="1100" b="1">
+                <a:solidFill>
+                  <a:srgbClr val="3DD68C"/>
+                </a:solidFill>
+                <a:latin typeface="Arial"/>
+              </a:rPr>
+              <a:t>СПАСИБО</a:t>
+            </a:r>
+          </a:p>
+        </p:txBody>
+      </p:sp>
+      <p:sp>
+        <p:nvSpPr>
+          <p:cNvPr id="6" name="TextBox 5"/>
+          <p:cNvSpPr txBox="1"/>
+          <p:nvPr/>
+        </p:nvSpPr>
+        <p:spPr>
+          <a:xfrm>
+            <a:off x="640080" y="1737360"/>
+            <a:ext cx="6400800" cy="1463040"/>
           </a:xfrm>
           <a:prstGeom prst="rect">
             <a:avLst/>
@@ -4656,7 +5076,7 @@
                 </a:solidFill>
                 <a:latin typeface="Arial"/>
               </a:rPr>
-              <a:t>Мы приглашаем
+              <a:t>Приглашаем
 к сотрудничеству</a:t>
             </a:r>
           </a:p>
@@ -4664,79 +5084,79 @@
       </p:sp>
       <p:sp>
         <p:nvSpPr>
-          <p:cNvPr id="6" name="TextBox 5"/>
-          <p:cNvSpPr txBox="1"/>
-          <p:nvPr/>
-        </p:nvSpPr>
-        <p:spPr>
-          <a:xfrm>
-            <a:off x="640080" y="3108960"/>
-            <a:ext cx="5943600" cy="1097280"/>
-          </a:xfrm>
-          <a:prstGeom prst="rect">
-            <a:avLst/>
-          </a:prstGeom>
-          <a:noFill/>
-        </p:spPr>
-        <p:txBody>
-          <a:bodyPr wrap="square">
-            <a:spAutoFit/>
-          </a:bodyPr>
-          <a:lstStyle/>
-          <a:p>
-            <a:pPr algn="l"/>
-            <a:r>
-              <a:rPr sz="1500" b="0">
-                <a:solidFill>
-                  <a:srgbClr val="BCD0DF"/>
-                </a:solidFill>
-                <a:latin typeface="Calibri"/>
-              </a:rPr>
-              <a:t>KgPMU уже является Ассоциацией-заявителем IPMA и готова двигаться к Full MA и сертификации в Центральной Азии.</a:t>
-            </a:r>
-          </a:p>
-        </p:txBody>
-      </p:sp>
-      <p:sp>
-        <p:nvSpPr>
           <p:cNvPr id="7" name="TextBox 6"/>
           <p:cNvSpPr txBox="1"/>
           <p:nvPr/>
         </p:nvSpPr>
         <p:spPr>
           <a:xfrm>
-            <a:off x="640080" y="4480560"/>
-            <a:ext cx="5943600" cy="1097280"/>
-          </a:xfrm>
-          <a:prstGeom prst="rect">
-            <a:avLst/>
-          </a:prstGeom>
-          <a:noFill/>
-        </p:spPr>
-        <p:txBody>
-          <a:bodyPr wrap="square">
-            <a:spAutoFit/>
-          </a:bodyPr>
-          <a:lstStyle/>
-          <a:p>
-            <a:pPr algn="l"/>
-            <a:r>
-              <a:rPr sz="1500" b="0">
-                <a:solidFill>
-                  <a:srgbClr val="7FE0A0"/>
-                </a:solidFill>
-                <a:latin typeface="Calibri"/>
+            <a:off x="640080" y="3474720"/>
+            <a:ext cx="5943600" cy="914400"/>
+          </a:xfrm>
+          <a:prstGeom prst="rect">
+            <a:avLst/>
+          </a:prstGeom>
+          <a:noFill/>
+        </p:spPr>
+        <p:txBody>
+          <a:bodyPr wrap="square">
+            <a:spAutoFit/>
+          </a:bodyPr>
+          <a:lstStyle/>
+          <a:p>
+            <a:pPr algn="l"/>
+            <a:r>
+              <a:rPr sz="1400" b="0">
+                <a:solidFill>
+                  <a:srgbClr val="B7CBD8"/>
+                </a:solidFill>
+                <a:latin typeface="Arial"/>
+              </a:rPr>
+              <a:t>Уже Ассоциация-заявитель. Следующий шаг — Full MA, сертификация и голос Центральной Азии в семье IPMA.</a:t>
+            </a:r>
+          </a:p>
+        </p:txBody>
+      </p:sp>
+      <p:sp>
+        <p:nvSpPr>
+          <p:cNvPr id="8" name="TextBox 7"/>
+          <p:cNvSpPr txBox="1"/>
+          <p:nvPr/>
+        </p:nvSpPr>
+        <p:spPr>
+          <a:xfrm>
+            <a:off x="640080" y="4663440"/>
+            <a:ext cx="5943600" cy="914400"/>
+          </a:xfrm>
+          <a:prstGeom prst="rect">
+            <a:avLst/>
+          </a:prstGeom>
+          <a:noFill/>
+        </p:spPr>
+        <p:txBody>
+          <a:bodyPr wrap="square">
+            <a:spAutoFit/>
+          </a:bodyPr>
+          <a:lstStyle/>
+          <a:p>
+            <a:pPr algn="l"/>
+            <a:r>
+              <a:rPr sz="1400" b="0">
+                <a:solidFill>
+                  <a:srgbClr val="3DD68C"/>
+                </a:solidFill>
+                <a:latin typeface="Arial"/>
               </a:rPr>
               <a:t>info@ipma.kg
 +996 555 655 755 · ipma.kg
-Урмат Мекишев · Президент KgPMU</a:t>
+Урмат Мекишев · Президент · Бишкек</a:t>
             </a:r>
           </a:p>
         </p:txBody>
       </p:sp>
       <p:pic>
         <p:nvPicPr>
-          <p:cNvPr id="8" name="Picture 7" descr="ipma-kr-logo-white.png"/>
+          <p:cNvPr id="9" name="Picture 8" descr="ipma-kr-logo-white.png"/>
           <p:cNvPicPr>
             <a:picLocks noChangeAspect="1"/>
           </p:cNvPicPr>
@@ -4750,8 +5170,8 @@
         </p:blipFill>
         <p:spPr>
           <a:xfrm>
-            <a:off x="7132320" y="2103120"/>
-            <a:ext cx="4206240" cy="1229375"/>
+            <a:off x="7132320" y="2286000"/>
+            <a:ext cx="4114800" cy="1202649"/>
           </a:xfrm>
           <a:prstGeom prst="rect">
             <a:avLst/>
@@ -4760,7 +5180,7 @@
       </p:pic>
       <p:sp>
         <p:nvSpPr>
-          <p:cNvPr id="9" name="TextBox 8"/>
+          <p:cNvPr id="10" name="TextBox 9"/>
           <p:cNvSpPr txBox="1"/>
           <p:nvPr/>
         </p:nvSpPr>
@@ -4784,9 +5204,9 @@
             <a:r>
               <a:rPr sz="1100" b="0">
                 <a:solidFill>
-                  <a:srgbClr val="8FA6B8"/>
-                </a:solidFill>
-                <a:latin typeface="Calibri"/>
+                  <a:srgbClr val="7F96A8"/>
+                </a:solidFill>
+                <a:latin typeface="Arial"/>
               </a:rPr>
               <a:t>IPMA Kyrgyz Republic  ·  ipma.kg</a:t>
             </a:r>
@@ -4795,14 +5215,14 @@
       </p:sp>
       <p:sp>
         <p:nvSpPr>
-          <p:cNvPr id="10" name="TextBox 9"/>
-          <p:cNvSpPr txBox="1"/>
-          <p:nvPr/>
-        </p:nvSpPr>
-        <p:spPr>
-          <a:xfrm>
-            <a:off x="10515600" y="6446520"/>
-            <a:ext cx="1280160" cy="274320"/>
+          <p:cNvPr id="11" name="TextBox 10"/>
+          <p:cNvSpPr txBox="1"/>
+          <p:nvPr/>
+        </p:nvSpPr>
+        <p:spPr>
+          <a:xfrm>
+            <a:off x="10424160" y="6446520"/>
+            <a:ext cx="1371600" cy="274320"/>
           </a:xfrm>
           <a:prstGeom prst="rect">
             <a:avLst/>
@@ -4819,9 +5239,9 @@
             <a:r>
               <a:rPr sz="1100" b="0">
                 <a:solidFill>
-                  <a:srgbClr val="8FA6B8"/>
-                </a:solidFill>
-                <a:latin typeface="Calibri"/>
+                  <a:srgbClr val="7F96A8"/>
+                </a:solidFill>
+                <a:latin typeface="Arial"/>
               </a:rPr>
               <a:t>12 / 12</a:t>
             </a:r>
@@ -4861,7 +5281,7 @@
             <a:avLst/>
           </a:prstGeom>
           <a:solidFill>
-            <a:srgbClr val="EEF2F1"/>
+            <a:srgbClr val="E8EEF2"/>
           </a:solidFill>
           <a:ln>
             <a:noFill/>
@@ -4889,9 +5309,52 @@
           </a:p>
         </p:txBody>
       </p:sp>
+      <p:sp>
+        <p:nvSpPr>
+          <p:cNvPr id="3" name="Rectangle 2"/>
+          <p:cNvSpPr/>
+          <p:nvPr/>
+        </p:nvSpPr>
+        <p:spPr>
+          <a:xfrm>
+            <a:off x="0" y="0"/>
+            <a:ext cx="12191695" cy="73152"/>
+          </a:xfrm>
+          <a:prstGeom prst="rect">
+            <a:avLst/>
+          </a:prstGeom>
+          <a:solidFill>
+            <a:srgbClr val="1F8F5F"/>
+          </a:solidFill>
+          <a:ln>
+            <a:noFill/>
+          </a:ln>
+        </p:spPr>
+        <p:style>
+          <a:lnRef idx="1">
+            <a:schemeClr val="accent1"/>
+          </a:lnRef>
+          <a:fillRef idx="3">
+            <a:schemeClr val="accent1"/>
+          </a:fillRef>
+          <a:effectRef idx="2">
+            <a:schemeClr val="accent1"/>
+          </a:effectRef>
+          <a:fontRef idx="minor">
+            <a:schemeClr val="lt1"/>
+          </a:fontRef>
+        </p:style>
+        <p:txBody>
+          <a:bodyPr rtlCol="0" anchor="ctr"/>
+          <a:lstStyle/>
+          <a:p>
+            <a:pPr algn="ctr"/>
+          </a:p>
+        </p:txBody>
+      </p:sp>
       <p:pic>
         <p:nvPicPr>
-          <p:cNvPr id="3" name="Picture 2" descr="ipma-kr-emblem.png"/>
+          <p:cNvPr id="4" name="Picture 3" descr="ipma-kr-emblem.png"/>
           <p:cNvPicPr>
             <a:picLocks noChangeAspect="1"/>
           </p:cNvPicPr>
@@ -4905,8 +5368,8 @@
         </p:blipFill>
         <p:spPr>
           <a:xfrm>
-            <a:off x="11292840" y="228600"/>
-            <a:ext cx="597448" cy="594360"/>
+            <a:off x="11338560" y="256032"/>
+            <a:ext cx="505533" cy="502920"/>
           </a:xfrm>
           <a:prstGeom prst="rect">
             <a:avLst/>
@@ -4915,14 +5378,14 @@
       </p:pic>
       <p:sp>
         <p:nvSpPr>
-          <p:cNvPr id="4" name="TextBox 3"/>
+          <p:cNvPr id="5" name="TextBox 4"/>
           <p:cNvSpPr txBox="1"/>
           <p:nvPr/>
         </p:nvSpPr>
         <p:spPr>
           <a:xfrm>
             <a:off x="548640" y="320040"/>
-            <a:ext cx="10972800" cy="274320"/>
+            <a:ext cx="10058400" cy="274320"/>
           </a:xfrm>
           <a:prstGeom prst="rect">
             <a:avLst/>
@@ -4939,9 +5402,9 @@
             <a:r>
               <a:rPr sz="1100" b="1">
                 <a:solidFill>
-                  <a:srgbClr val="1F7A34"/>
-                </a:solidFill>
-                <a:latin typeface="Calibri"/>
+                  <a:srgbClr val="1F8F5F"/>
+                </a:solidFill>
+                <a:latin typeface="Arial"/>
               </a:rPr>
               <a:t>02  »  ВВЕДЕНИЕ</a:t>
             </a:r>
@@ -4950,55 +5413,55 @@
       </p:sp>
       <p:sp>
         <p:nvSpPr>
-          <p:cNvPr id="5" name="TextBox 4"/>
+          <p:cNvPr id="6" name="TextBox 5"/>
           <p:cNvSpPr txBox="1"/>
           <p:nvPr/>
         </p:nvSpPr>
         <p:spPr>
           <a:xfrm>
             <a:off x="548640" y="640080"/>
-            <a:ext cx="10515600" cy="548640"/>
-          </a:xfrm>
-          <a:prstGeom prst="rect">
-            <a:avLst/>
-          </a:prstGeom>
-          <a:noFill/>
-        </p:spPr>
-        <p:txBody>
-          <a:bodyPr wrap="square">
-            <a:spAutoFit/>
-          </a:bodyPr>
-          <a:lstStyle/>
-          <a:p>
-            <a:pPr algn="l"/>
-            <a:r>
-              <a:rPr sz="2800" b="1">
-                <a:solidFill>
-                  <a:srgbClr val="0D223B"/>
-                </a:solidFill>
-                <a:latin typeface="Arial"/>
-              </a:rPr>
-              <a:t>Кто мы</a:t>
-            </a:r>
-          </a:p>
-        </p:txBody>
-      </p:sp>
-      <p:sp>
-        <p:nvSpPr>
-          <p:cNvPr id="6" name="Rounded Rectangle 5"/>
+            <a:ext cx="10058400" cy="640080"/>
+          </a:xfrm>
+          <a:prstGeom prst="rect">
+            <a:avLst/>
+          </a:prstGeom>
+          <a:noFill/>
+        </p:spPr>
+        <p:txBody>
+          <a:bodyPr wrap="square">
+            <a:spAutoFit/>
+          </a:bodyPr>
+          <a:lstStyle/>
+          <a:p>
+            <a:pPr algn="l"/>
+            <a:r>
+              <a:rPr sz="3200" b="1">
+                <a:solidFill>
+                  <a:srgbClr val="07182A"/>
+                </a:solidFill>
+                <a:latin typeface="Arial"/>
+              </a:rPr>
+              <a:t>Кто ведёт ассоциацию</a:t>
+            </a:r>
+          </a:p>
+        </p:txBody>
+      </p:sp>
+      <p:sp>
+        <p:nvSpPr>
+          <p:cNvPr id="7" name="Rectangle 6"/>
           <p:cNvSpPr/>
           <p:nvPr/>
         </p:nvSpPr>
         <p:spPr>
           <a:xfrm>
             <a:off x="548640" y="1554480"/>
-            <a:ext cx="5486400" cy="4114800"/>
-          </a:xfrm>
-          <a:prstGeom prst="roundRect">
+            <a:ext cx="73152" cy="4023360"/>
+          </a:xfrm>
+          <a:prstGeom prst="rect">
             <a:avLst/>
           </a:prstGeom>
           <a:solidFill>
-            <a:srgbClr val="FFFFFF"/>
+            <a:srgbClr val="E30613"/>
           </a:solidFill>
           <a:ln>
             <a:noFill/>
@@ -5028,14 +5491,14 @@
       </p:sp>
       <p:sp>
         <p:nvSpPr>
-          <p:cNvPr id="7" name="TextBox 6"/>
-          <p:cNvSpPr txBox="1"/>
-          <p:nvPr/>
-        </p:nvSpPr>
-        <p:spPr>
-          <a:xfrm>
-            <a:off x="822960" y="1783080"/>
-            <a:ext cx="4937760" cy="274320"/>
+          <p:cNvPr id="8" name="TextBox 7"/>
+          <p:cNvSpPr txBox="1"/>
+          <p:nvPr/>
+        </p:nvSpPr>
+        <p:spPr>
+          <a:xfrm>
+            <a:off x="868680" y="1645920"/>
+            <a:ext cx="4846320" cy="274320"/>
           </a:xfrm>
           <a:prstGeom prst="rect">
             <a:avLst/>
@@ -5052,9 +5515,9 @@
             <a:r>
               <a:rPr sz="1100" b="1">
                 <a:solidFill>
-                  <a:srgbClr val="1F7A34"/>
-                </a:solidFill>
-                <a:latin typeface="Calibri"/>
+                  <a:srgbClr val="1F8F5F"/>
+                </a:solidFill>
+                <a:latin typeface="Arial"/>
               </a:rPr>
               <a:t>ПРЕЗИДЕНТ</a:t>
             </a:r>
@@ -5063,14 +5526,14 @@
       </p:sp>
       <p:sp>
         <p:nvSpPr>
-          <p:cNvPr id="8" name="TextBox 7"/>
-          <p:cNvSpPr txBox="1"/>
-          <p:nvPr/>
-        </p:nvSpPr>
-        <p:spPr>
-          <a:xfrm>
-            <a:off x="822960" y="2194560"/>
-            <a:ext cx="4937760" cy="548640"/>
+          <p:cNvPr id="9" name="TextBox 8"/>
+          <p:cNvSpPr txBox="1"/>
+          <p:nvPr/>
+        </p:nvSpPr>
+        <p:spPr>
+          <a:xfrm>
+            <a:off x="868680" y="2011680"/>
+            <a:ext cx="4846320" cy="457200"/>
           </a:xfrm>
           <a:prstGeom prst="rect">
             <a:avLst/>
@@ -5087,9 +5550,9 @@
             <a:r>
               <a:rPr sz="1800" b="1">
                 <a:solidFill>
-                  <a:srgbClr val="0D223B"/>
-                </a:solidFill>
-                <a:latin typeface="Calibri"/>
+                  <a:srgbClr val="07182A"/>
+                </a:solidFill>
+                <a:latin typeface="Arial"/>
               </a:rPr>
               <a:t>Мекишев Урмат Казбекович</a:t>
             </a:r>
@@ -5098,55 +5561,90 @@
       </p:sp>
       <p:sp>
         <p:nvSpPr>
-          <p:cNvPr id="9" name="TextBox 8"/>
-          <p:cNvSpPr txBox="1"/>
-          <p:nvPr/>
-        </p:nvSpPr>
-        <p:spPr>
-          <a:xfrm>
-            <a:off x="822960" y="2926080"/>
-            <a:ext cx="4937760" cy="2286000"/>
-          </a:xfrm>
-          <a:prstGeom prst="rect">
-            <a:avLst/>
-          </a:prstGeom>
-          <a:noFill/>
-        </p:spPr>
-        <p:txBody>
-          <a:bodyPr wrap="square">
-            <a:spAutoFit/>
-          </a:bodyPr>
-          <a:lstStyle/>
-          <a:p>
-            <a:pPr algn="l"/>
-            <a:r>
-              <a:rPr sz="1400" b="0">
-                <a:solidFill>
-                  <a:srgbClr val="28394A"/>
-                </a:solidFill>
-                <a:latin typeface="Calibri"/>
-              </a:rPr>
-              <a:t>Сертифицированный эксперт IPMA. Более 15 лет опыта в управлении крупными инфраструктурными проектами. Инициатор внедрения ICB4 в госсекторе и бизнесе КР.</a:t>
-            </a:r>
-          </a:p>
-        </p:txBody>
-      </p:sp>
-      <p:sp>
-        <p:nvSpPr>
-          <p:cNvPr id="10" name="Rounded Rectangle 9"/>
+          <p:cNvPr id="10" name="TextBox 9"/>
+          <p:cNvSpPr txBox="1"/>
+          <p:nvPr/>
+        </p:nvSpPr>
+        <p:spPr>
+          <a:xfrm>
+            <a:off x="868680" y="2651760"/>
+            <a:ext cx="4846320" cy="1828800"/>
+          </a:xfrm>
+          <a:prstGeom prst="rect">
+            <a:avLst/>
+          </a:prstGeom>
+          <a:noFill/>
+        </p:spPr>
+        <p:txBody>
+          <a:bodyPr wrap="square">
+            <a:spAutoFit/>
+          </a:bodyPr>
+          <a:lstStyle/>
+          <a:p>
+            <a:pPr algn="l"/>
+            <a:r>
+              <a:rPr sz="1300" b="0">
+                <a:solidFill>
+                  <a:srgbClr val="3D5566"/>
+                </a:solidFill>
+                <a:latin typeface="Arial"/>
+              </a:rPr>
+              <a:t>Сертифицированный эксперт IPMA. Более 15 лет в управлении крупными инфраструктурными проектами. Инициатор внедрения ICB4 в госсекторе и бизнесе КР.</a:t>
+            </a:r>
+          </a:p>
+        </p:txBody>
+      </p:sp>
+      <p:sp>
+        <p:nvSpPr>
+          <p:cNvPr id="11" name="TextBox 10"/>
+          <p:cNvSpPr txBox="1"/>
+          <p:nvPr/>
+        </p:nvSpPr>
+        <p:spPr>
+          <a:xfrm>
+            <a:off x="868680" y="4663440"/>
+            <a:ext cx="4846320" cy="822960"/>
+          </a:xfrm>
+          <a:prstGeom prst="rect">
+            <a:avLst/>
+          </a:prstGeom>
+          <a:noFill/>
+        </p:spPr>
+        <p:txBody>
+          <a:bodyPr wrap="square">
+            <a:spAutoFit/>
+          </a:bodyPr>
+          <a:lstStyle/>
+          <a:p>
+            <a:pPr algn="l"/>
+            <a:r>
+              <a:rPr sz="1200" b="0">
+                <a:solidFill>
+                  <a:srgbClr val="122433"/>
+                </a:solidFill>
+                <a:latin typeface="Arial"/>
+              </a:rPr>
+              <a:t>«Создать в Кыргызстане профессиональное сообщество лидеров…»</a:t>
+            </a:r>
+          </a:p>
+        </p:txBody>
+      </p:sp>
+      <p:sp>
+        <p:nvSpPr>
+          <p:cNvPr id="12" name="Rectangle 11"/>
           <p:cNvSpPr/>
           <p:nvPr/>
         </p:nvSpPr>
         <p:spPr>
           <a:xfrm>
-            <a:off x="6309359" y="1554480"/>
-            <a:ext cx="5486400" cy="4114800"/>
-          </a:xfrm>
-          <a:prstGeom prst="roundRect">
+            <a:off x="6309360" y="1554480"/>
+            <a:ext cx="73152" cy="4023360"/>
+          </a:xfrm>
+          <a:prstGeom prst="rect">
             <a:avLst/>
           </a:prstGeom>
           <a:solidFill>
-            <a:srgbClr val="FFFFFF"/>
+            <a:srgbClr val="1F8F5F"/>
           </a:solidFill>
           <a:ln>
             <a:noFill/>
@@ -5176,14 +5674,14 @@
       </p:sp>
       <p:sp>
         <p:nvSpPr>
-          <p:cNvPr id="11" name="TextBox 10"/>
-          <p:cNvSpPr txBox="1"/>
-          <p:nvPr/>
-        </p:nvSpPr>
-        <p:spPr>
-          <a:xfrm>
-            <a:off x="6583679" y="1783080"/>
-            <a:ext cx="4937760" cy="274320"/>
+          <p:cNvPr id="13" name="TextBox 12"/>
+          <p:cNvSpPr txBox="1"/>
+          <p:nvPr/>
+        </p:nvSpPr>
+        <p:spPr>
+          <a:xfrm>
+            <a:off x="6629400" y="1645920"/>
+            <a:ext cx="4846320" cy="274320"/>
           </a:xfrm>
           <a:prstGeom prst="rect">
             <a:avLst/>
@@ -5200,9 +5698,9 @@
             <a:r>
               <a:rPr sz="1100" b="1">
                 <a:solidFill>
-                  <a:srgbClr val="1F7A34"/>
-                </a:solidFill>
-                <a:latin typeface="Calibri"/>
+                  <a:srgbClr val="1F8F5F"/>
+                </a:solidFill>
+                <a:latin typeface="Arial"/>
               </a:rPr>
               <a:t>ПОЧЁТНЫЙ ЧЛЕН</a:t>
             </a:r>
@@ -5211,14 +5709,14 @@
       </p:sp>
       <p:sp>
         <p:nvSpPr>
-          <p:cNvPr id="12" name="TextBox 11"/>
-          <p:cNvSpPr txBox="1"/>
-          <p:nvPr/>
-        </p:nvSpPr>
-        <p:spPr>
-          <a:xfrm>
-            <a:off x="6583679" y="2194560"/>
-            <a:ext cx="4937760" cy="548640"/>
+          <p:cNvPr id="14" name="TextBox 13"/>
+          <p:cNvSpPr txBox="1"/>
+          <p:nvPr/>
+        </p:nvSpPr>
+        <p:spPr>
+          <a:xfrm>
+            <a:off x="6629400" y="2011680"/>
+            <a:ext cx="4846320" cy="457200"/>
           </a:xfrm>
           <a:prstGeom prst="rect">
             <a:avLst/>
@@ -5235,9 +5733,9 @@
             <a:r>
               <a:rPr sz="1800" b="1">
                 <a:solidFill>
-                  <a:srgbClr val="0D223B"/>
-                </a:solidFill>
-                <a:latin typeface="Calibri"/>
+                  <a:srgbClr val="07182A"/>
+                </a:solidFill>
+                <a:latin typeface="Arial"/>
               </a:rPr>
               <a:t>Бабаев Игбал Алиджанович</a:t>
             </a:r>
@@ -5246,33 +5744,33 @@
       </p:sp>
       <p:sp>
         <p:nvSpPr>
-          <p:cNvPr id="13" name="TextBox 12"/>
-          <p:cNvSpPr txBox="1"/>
-          <p:nvPr/>
-        </p:nvSpPr>
-        <p:spPr>
-          <a:xfrm>
-            <a:off x="6583679" y="2926080"/>
-            <a:ext cx="4937760" cy="2286000"/>
-          </a:xfrm>
-          <a:prstGeom prst="rect">
-            <a:avLst/>
-          </a:prstGeom>
-          <a:noFill/>
-        </p:spPr>
-        <p:txBody>
-          <a:bodyPr wrap="square">
-            <a:spAutoFit/>
-          </a:bodyPr>
-          <a:lstStyle/>
-          <a:p>
-            <a:pPr algn="l"/>
-            <a:r>
-              <a:rPr sz="1400" b="0">
-                <a:solidFill>
-                  <a:srgbClr val="28394A"/>
-                </a:solidFill>
-                <a:latin typeface="Calibri"/>
+          <p:cNvPr id="15" name="TextBox 14"/>
+          <p:cNvSpPr txBox="1"/>
+          <p:nvPr/>
+        </p:nvSpPr>
+        <p:spPr>
+          <a:xfrm>
+            <a:off x="6629400" y="2651760"/>
+            <a:ext cx="4846320" cy="2011680"/>
+          </a:xfrm>
+          <a:prstGeom prst="rect">
+            <a:avLst/>
+          </a:prstGeom>
+          <a:noFill/>
+        </p:spPr>
+        <p:txBody>
+          <a:bodyPr wrap="square">
+            <a:spAutoFit/>
+          </a:bodyPr>
+          <a:lstStyle/>
+          <a:p>
+            <a:pPr algn="l"/>
+            <a:r>
+              <a:rPr sz="1300" b="0">
+                <a:solidFill>
+                  <a:srgbClr val="3D5566"/>
+                </a:solidFill>
+                <a:latin typeface="Arial"/>
               </a:rPr>
               <a:t>Д.т.н., профессор, президент Азербайджанской ассоциации УП. Поддерживает развитие проектной культуры в Кыргызстане и регионе.</a:t>
             </a:r>
@@ -5281,7 +5779,7 @@
       </p:sp>
       <p:sp>
         <p:nvSpPr>
-          <p:cNvPr id="14" name="TextBox 13"/>
+          <p:cNvPr id="16" name="TextBox 15"/>
           <p:cNvSpPr txBox="1"/>
           <p:nvPr/>
         </p:nvSpPr>
@@ -5305,9 +5803,9 @@
             <a:r>
               <a:rPr sz="1100" b="0">
                 <a:solidFill>
-                  <a:srgbClr val="5C6B72"/>
-                </a:solidFill>
-                <a:latin typeface="Calibri"/>
+                  <a:srgbClr val="9AAFBD"/>
+                </a:solidFill>
+                <a:latin typeface="Arial"/>
               </a:rPr>
               <a:t>IPMA Kyrgyz Republic  ·  ipma.kg</a:t>
             </a:r>
@@ -5316,14 +5814,14 @@
       </p:sp>
       <p:sp>
         <p:nvSpPr>
-          <p:cNvPr id="15" name="TextBox 14"/>
-          <p:cNvSpPr txBox="1"/>
-          <p:nvPr/>
-        </p:nvSpPr>
-        <p:spPr>
-          <a:xfrm>
-            <a:off x="10515600" y="6446520"/>
-            <a:ext cx="1280160" cy="274320"/>
+          <p:cNvPr id="17" name="TextBox 16"/>
+          <p:cNvSpPr txBox="1"/>
+          <p:nvPr/>
+        </p:nvSpPr>
+        <p:spPr>
+          <a:xfrm>
+            <a:off x="10424160" y="6446520"/>
+            <a:ext cx="1371600" cy="274320"/>
           </a:xfrm>
           <a:prstGeom prst="rect">
             <a:avLst/>
@@ -5340,9 +5838,9 @@
             <a:r>
               <a:rPr sz="1100" b="0">
                 <a:solidFill>
-                  <a:srgbClr val="5C6B72"/>
-                </a:solidFill>
-                <a:latin typeface="Calibri"/>
+                  <a:srgbClr val="9AAFBD"/>
+                </a:solidFill>
+                <a:latin typeface="Arial"/>
               </a:rPr>
               <a:t>02 / 12</a:t>
             </a:r>
@@ -5382,7 +5880,7 @@
             <a:avLst/>
           </a:prstGeom>
           <a:solidFill>
-            <a:srgbClr val="0D223B"/>
+            <a:srgbClr val="07182A"/>
           </a:solidFill>
           <a:ln>
             <a:noFill/>
@@ -5418,8 +5916,43 @@
         </p:nvSpPr>
         <p:spPr>
           <a:xfrm>
+            <a:off x="10789920" y="5120640"/>
+            <a:ext cx="1828800" cy="1371600"/>
+          </a:xfrm>
+          <a:prstGeom prst="rect">
+            <a:avLst/>
+          </a:prstGeom>
+          <a:noFill/>
+        </p:spPr>
+        <p:txBody>
+          <a:bodyPr wrap="square">
+            <a:spAutoFit/>
+          </a:bodyPr>
+          <a:lstStyle/>
+          <a:p>
+            <a:pPr algn="l"/>
+            <a:r>
+              <a:rPr sz="12000" b="1">
+                <a:solidFill>
+                  <a:srgbClr val="E30613"/>
+                </a:solidFill>
+                <a:latin typeface="Arial"/>
+              </a:rPr>
+              <a:t>»</a:t>
+            </a:r>
+          </a:p>
+        </p:txBody>
+      </p:sp>
+      <p:sp>
+        <p:nvSpPr>
+          <p:cNvPr id="4" name="TextBox 3"/>
+          <p:cNvSpPr txBox="1"/>
+          <p:nvPr/>
+        </p:nvSpPr>
+        <p:spPr>
+          <a:xfrm>
             <a:off x="548640" y="320040"/>
-            <a:ext cx="10972800" cy="274320"/>
+            <a:ext cx="10058400" cy="274320"/>
           </a:xfrm>
           <a:prstGeom prst="rect">
             <a:avLst/>
@@ -5436,9 +5969,9 @@
             <a:r>
               <a:rPr sz="1100" b="1">
                 <a:solidFill>
-                  <a:srgbClr val="7FE0A0"/>
-                </a:solidFill>
-                <a:latin typeface="Calibri"/>
+                  <a:srgbClr val="3DD68C"/>
+                </a:solidFill>
+                <a:latin typeface="Arial"/>
               </a:rPr>
               <a:t>03  »  МИССИЯ</a:t>
             </a:r>
@@ -5447,14 +5980,14 @@
       </p:sp>
       <p:sp>
         <p:nvSpPr>
-          <p:cNvPr id="4" name="TextBox 3"/>
-          <p:cNvSpPr txBox="1"/>
-          <p:nvPr/>
-        </p:nvSpPr>
-        <p:spPr>
-          <a:xfrm>
-            <a:off x="548640" y="640080"/>
-            <a:ext cx="10515600" cy="548640"/>
+          <p:cNvPr id="5" name="TextBox 4"/>
+          <p:cNvSpPr txBox="1"/>
+          <p:nvPr/>
+        </p:nvSpPr>
+        <p:spPr>
+          <a:xfrm>
+            <a:off x="640080" y="1828800"/>
+            <a:ext cx="10515600" cy="2560320"/>
           </a:xfrm>
           <a:prstGeom prst="rect">
             <a:avLst/>
@@ -5475,42 +6008,7 @@
                 </a:solidFill>
                 <a:latin typeface="Arial"/>
               </a:rPr>
-              <a:t>Наша миссия</a:t>
-            </a:r>
-          </a:p>
-        </p:txBody>
-      </p:sp>
-      <p:sp>
-        <p:nvSpPr>
-          <p:cNvPr id="5" name="TextBox 4"/>
-          <p:cNvSpPr txBox="1"/>
-          <p:nvPr/>
-        </p:nvSpPr>
-        <p:spPr>
-          <a:xfrm>
-            <a:off x="640080" y="2011680"/>
-            <a:ext cx="10515600" cy="2743200"/>
-          </a:xfrm>
-          <a:prstGeom prst="rect">
-            <a:avLst/>
-          </a:prstGeom>
-          <a:noFill/>
-        </p:spPr>
-        <p:txBody>
-          <a:bodyPr wrap="square">
-            <a:spAutoFit/>
-          </a:bodyPr>
-          <a:lstStyle/>
-          <a:p>
-            <a:pPr algn="l"/>
-            <a:r>
-              <a:rPr sz="2600" b="1">
-                <a:solidFill>
-                  <a:srgbClr val="FFFFFF"/>
-                </a:solidFill>
-                <a:latin typeface="Arial"/>
-              </a:rPr>
-              <a:t>Создавать экосистему компетентных проектных лидеров и повышать зрелость управления проектами через образование, сертификацию и обмен практиками по стандартам IPMA ICB4.</a:t>
+              <a:t>Экосистема компетентных проектных лидеров — через образование, сертификацию и практики IPMA ICB4.</a:t>
             </a:r>
           </a:p>
         </p:txBody>
@@ -5518,6 +6016,41 @@
       <p:sp>
         <p:nvSpPr>
           <p:cNvPr id="6" name="TextBox 5"/>
+          <p:cNvSpPr txBox="1"/>
+          <p:nvPr/>
+        </p:nvSpPr>
+        <p:spPr>
+          <a:xfrm>
+            <a:off x="640080" y="4663440"/>
+            <a:ext cx="9144000" cy="548640"/>
+          </a:xfrm>
+          <a:prstGeom prst="rect">
+            <a:avLst/>
+          </a:prstGeom>
+          <a:noFill/>
+        </p:spPr>
+        <p:txBody>
+          <a:bodyPr wrap="square">
+            <a:spAutoFit/>
+          </a:bodyPr>
+          <a:lstStyle/>
+          <a:p>
+            <a:pPr algn="l"/>
+            <a:r>
+              <a:rPr sz="1500" b="0">
+                <a:solidFill>
+                  <a:srgbClr val="A9C0D0"/>
+                </a:solidFill>
+                <a:latin typeface="Arial"/>
+              </a:rPr>
+              <a:t>Повышаем зрелость управления проектами государства и бизнеса в Кыргызстане.</a:t>
+            </a:r>
+          </a:p>
+        </p:txBody>
+      </p:sp>
+      <p:sp>
+        <p:nvSpPr>
+          <p:cNvPr id="7" name="TextBox 6"/>
           <p:cNvSpPr txBox="1"/>
           <p:nvPr/>
         </p:nvSpPr>
@@ -5541,9 +6074,9 @@
             <a:r>
               <a:rPr sz="1100" b="0">
                 <a:solidFill>
-                  <a:srgbClr val="8FA6B8"/>
-                </a:solidFill>
-                <a:latin typeface="Calibri"/>
+                  <a:srgbClr val="7F96A8"/>
+                </a:solidFill>
+                <a:latin typeface="Arial"/>
               </a:rPr>
               <a:t>IPMA Kyrgyz Republic  ·  ipma.kg</a:t>
             </a:r>
@@ -5552,14 +6085,14 @@
       </p:sp>
       <p:sp>
         <p:nvSpPr>
-          <p:cNvPr id="7" name="TextBox 6"/>
-          <p:cNvSpPr txBox="1"/>
-          <p:nvPr/>
-        </p:nvSpPr>
-        <p:spPr>
-          <a:xfrm>
-            <a:off x="10515600" y="6446520"/>
-            <a:ext cx="1280160" cy="274320"/>
+          <p:cNvPr id="8" name="TextBox 7"/>
+          <p:cNvSpPr txBox="1"/>
+          <p:nvPr/>
+        </p:nvSpPr>
+        <p:spPr>
+          <a:xfrm>
+            <a:off x="10424160" y="6446520"/>
+            <a:ext cx="1371600" cy="274320"/>
           </a:xfrm>
           <a:prstGeom prst="rect">
             <a:avLst/>
@@ -5576,9 +6109,9 @@
             <a:r>
               <a:rPr sz="1100" b="0">
                 <a:solidFill>
-                  <a:srgbClr val="8FA6B8"/>
-                </a:solidFill>
-                <a:latin typeface="Calibri"/>
+                  <a:srgbClr val="7F96A8"/>
+                </a:solidFill>
+                <a:latin typeface="Arial"/>
               </a:rPr>
               <a:t>03 / 12</a:t>
             </a:r>
@@ -5618,7 +6151,7 @@
             <a:avLst/>
           </a:prstGeom>
           <a:solidFill>
-            <a:srgbClr val="EEF2F1"/>
+            <a:srgbClr val="E8EEF2"/>
           </a:solidFill>
           <a:ln>
             <a:noFill/>
@@ -5646,9 +6179,52 @@
           </a:p>
         </p:txBody>
       </p:sp>
+      <p:sp>
+        <p:nvSpPr>
+          <p:cNvPr id="3" name="Rectangle 2"/>
+          <p:cNvSpPr/>
+          <p:nvPr/>
+        </p:nvSpPr>
+        <p:spPr>
+          <a:xfrm>
+            <a:off x="0" y="0"/>
+            <a:ext cx="12191695" cy="73152"/>
+          </a:xfrm>
+          <a:prstGeom prst="rect">
+            <a:avLst/>
+          </a:prstGeom>
+          <a:solidFill>
+            <a:srgbClr val="1F8F5F"/>
+          </a:solidFill>
+          <a:ln>
+            <a:noFill/>
+          </a:ln>
+        </p:spPr>
+        <p:style>
+          <a:lnRef idx="1">
+            <a:schemeClr val="accent1"/>
+          </a:lnRef>
+          <a:fillRef idx="3">
+            <a:schemeClr val="accent1"/>
+          </a:fillRef>
+          <a:effectRef idx="2">
+            <a:schemeClr val="accent1"/>
+          </a:effectRef>
+          <a:fontRef idx="minor">
+            <a:schemeClr val="lt1"/>
+          </a:fontRef>
+        </p:style>
+        <p:txBody>
+          <a:bodyPr rtlCol="0" anchor="ctr"/>
+          <a:lstStyle/>
+          <a:p>
+            <a:pPr algn="ctr"/>
+          </a:p>
+        </p:txBody>
+      </p:sp>
       <p:pic>
         <p:nvPicPr>
-          <p:cNvPr id="3" name="Picture 2" descr="ipma-kr-emblem.png"/>
+          <p:cNvPr id="4" name="Picture 3" descr="ipma-kr-emblem.png"/>
           <p:cNvPicPr>
             <a:picLocks noChangeAspect="1"/>
           </p:cNvPicPr>
@@ -5662,8 +6238,8 @@
         </p:blipFill>
         <p:spPr>
           <a:xfrm>
-            <a:off x="11292840" y="228600"/>
-            <a:ext cx="597448" cy="594360"/>
+            <a:off x="11338560" y="256032"/>
+            <a:ext cx="505533" cy="502920"/>
           </a:xfrm>
           <a:prstGeom prst="rect">
             <a:avLst/>
@@ -5672,14 +6248,14 @@
       </p:pic>
       <p:sp>
         <p:nvSpPr>
-          <p:cNvPr id="4" name="TextBox 3"/>
+          <p:cNvPr id="5" name="TextBox 4"/>
           <p:cNvSpPr txBox="1"/>
           <p:nvPr/>
         </p:nvSpPr>
         <p:spPr>
           <a:xfrm>
             <a:off x="548640" y="320040"/>
-            <a:ext cx="10972800" cy="274320"/>
+            <a:ext cx="10058400" cy="274320"/>
           </a:xfrm>
           <a:prstGeom prst="rect">
             <a:avLst/>
@@ -5696,9 +6272,9 @@
             <a:r>
               <a:rPr sz="1100" b="1">
                 <a:solidFill>
-                  <a:srgbClr val="1F7A34"/>
-                </a:solidFill>
-                <a:latin typeface="Calibri"/>
+                  <a:srgbClr val="1F8F5F"/>
+                </a:solidFill>
+                <a:latin typeface="Arial"/>
               </a:rPr>
               <a:t>04  »  ЦЕННОСТИ</a:t>
             </a:r>
@@ -5707,55 +6283,55 @@
       </p:sp>
       <p:sp>
         <p:nvSpPr>
-          <p:cNvPr id="5" name="TextBox 4"/>
+          <p:cNvPr id="6" name="TextBox 5"/>
           <p:cNvSpPr txBox="1"/>
           <p:nvPr/>
         </p:nvSpPr>
         <p:spPr>
           <a:xfrm>
             <a:off x="548640" y="640080"/>
-            <a:ext cx="10515600" cy="548640"/>
-          </a:xfrm>
-          <a:prstGeom prst="rect">
-            <a:avLst/>
-          </a:prstGeom>
-          <a:noFill/>
-        </p:spPr>
-        <p:txBody>
-          <a:bodyPr wrap="square">
-            <a:spAutoFit/>
-          </a:bodyPr>
-          <a:lstStyle/>
-          <a:p>
-            <a:pPr algn="l"/>
-            <a:r>
-              <a:rPr sz="2800" b="1">
-                <a:solidFill>
-                  <a:srgbClr val="0D223B"/>
-                </a:solidFill>
-                <a:latin typeface="Arial"/>
-              </a:rPr>
-              <a:t>Принципы KgPMU</a:t>
-            </a:r>
-          </a:p>
-        </p:txBody>
-      </p:sp>
-      <p:sp>
-        <p:nvSpPr>
-          <p:cNvPr id="6" name="Rounded Rectangle 5"/>
+            <a:ext cx="10058400" cy="640080"/>
+          </a:xfrm>
+          <a:prstGeom prst="rect">
+            <a:avLst/>
+          </a:prstGeom>
+          <a:noFill/>
+        </p:spPr>
+        <p:txBody>
+          <a:bodyPr wrap="square">
+            <a:spAutoFit/>
+          </a:bodyPr>
+          <a:lstStyle/>
+          <a:p>
+            <a:pPr algn="l"/>
+            <a:r>
+              <a:rPr sz="3200" b="1">
+                <a:solidFill>
+                  <a:srgbClr val="07182A"/>
+                </a:solidFill>
+                <a:latin typeface="Arial"/>
+              </a:rPr>
+              <a:t>На чём стоим</a:t>
+            </a:r>
+          </a:p>
+        </p:txBody>
+      </p:sp>
+      <p:sp>
+        <p:nvSpPr>
+          <p:cNvPr id="7" name="Rectangle 6"/>
           <p:cNvSpPr/>
           <p:nvPr/>
         </p:nvSpPr>
         <p:spPr>
           <a:xfrm>
             <a:off x="548640" y="1554480"/>
-            <a:ext cx="5486400" cy="1828800"/>
-          </a:xfrm>
-          <a:prstGeom prst="roundRect">
+            <a:ext cx="5394960" cy="54864"/>
+          </a:xfrm>
+          <a:prstGeom prst="rect">
             <a:avLst/>
           </a:prstGeom>
           <a:solidFill>
-            <a:srgbClr val="FFFFFF"/>
+            <a:srgbClr val="1F8F5F"/>
           </a:solidFill>
           <a:ln>
             <a:noFill/>
@@ -5785,14 +6361,14 @@
       </p:sp>
       <p:sp>
         <p:nvSpPr>
-          <p:cNvPr id="7" name="TextBox 6"/>
-          <p:cNvSpPr txBox="1"/>
-          <p:nvPr/>
-        </p:nvSpPr>
-        <p:spPr>
-          <a:xfrm>
-            <a:off x="868680" y="1920240"/>
-            <a:ext cx="4846320" cy="365760"/>
+          <p:cNvPr id="8" name="TextBox 7"/>
+          <p:cNvSpPr txBox="1"/>
+          <p:nvPr/>
+        </p:nvSpPr>
+        <p:spPr>
+          <a:xfrm>
+            <a:off x="548640" y="1874520"/>
+            <a:ext cx="5394960" cy="411480"/>
           </a:xfrm>
           <a:prstGeom prst="rect">
             <a:avLst/>
@@ -5809,9 +6385,9 @@
             <a:r>
               <a:rPr sz="1800" b="1">
                 <a:solidFill>
-                  <a:srgbClr val="0D223B"/>
-                </a:solidFill>
-                <a:latin typeface="Calibri"/>
+                  <a:srgbClr val="07182A"/>
+                </a:solidFill>
+                <a:latin typeface="Arial"/>
               </a:rPr>
               <a:t>Честность</a:t>
             </a:r>
@@ -5820,14 +6396,14 @@
       </p:sp>
       <p:sp>
         <p:nvSpPr>
-          <p:cNvPr id="8" name="TextBox 7"/>
-          <p:cNvSpPr txBox="1"/>
-          <p:nvPr/>
-        </p:nvSpPr>
-        <p:spPr>
-          <a:xfrm>
-            <a:off x="868680" y="2468880"/>
-            <a:ext cx="4846320" cy="457200"/>
+          <p:cNvPr id="9" name="TextBox 8"/>
+          <p:cNvSpPr txBox="1"/>
+          <p:nvPr/>
+        </p:nvSpPr>
+        <p:spPr>
+          <a:xfrm>
+            <a:off x="548640" y="2423160"/>
+            <a:ext cx="5394960" cy="640080"/>
           </a:xfrm>
           <a:prstGeom prst="rect">
             <a:avLst/>
@@ -5844,31 +6420,31 @@
             <a:r>
               <a:rPr sz="1400" b="0">
                 <a:solidFill>
-                  <a:srgbClr val="28394A"/>
-                </a:solidFill>
-                <a:latin typeface="Calibri"/>
-              </a:rPr>
-              <a:t>Прозрачность и этика</a:t>
-            </a:r>
-          </a:p>
-        </p:txBody>
-      </p:sp>
-      <p:sp>
-        <p:nvSpPr>
-          <p:cNvPr id="9" name="Rounded Rectangle 8"/>
+                  <a:srgbClr val="3D5566"/>
+                </a:solidFill>
+                <a:latin typeface="Arial"/>
+              </a:rPr>
+              <a:t>Прозрачность и этика в работе и оценке</a:t>
+            </a:r>
+          </a:p>
+        </p:txBody>
+      </p:sp>
+      <p:sp>
+        <p:nvSpPr>
+          <p:cNvPr id="10" name="Rectangle 9"/>
           <p:cNvSpPr/>
           <p:nvPr/>
         </p:nvSpPr>
         <p:spPr>
           <a:xfrm>
             <a:off x="6309359" y="1554480"/>
-            <a:ext cx="5486400" cy="1828800"/>
-          </a:xfrm>
-          <a:prstGeom prst="roundRect">
+            <a:ext cx="5394960" cy="54864"/>
+          </a:xfrm>
+          <a:prstGeom prst="rect">
             <a:avLst/>
           </a:prstGeom>
           <a:solidFill>
-            <a:srgbClr val="FFFFFF"/>
+            <a:srgbClr val="1F8F5F"/>
           </a:solidFill>
           <a:ln>
             <a:noFill/>
@@ -5898,14 +6474,14 @@
       </p:sp>
       <p:sp>
         <p:nvSpPr>
-          <p:cNvPr id="10" name="TextBox 9"/>
-          <p:cNvSpPr txBox="1"/>
-          <p:nvPr/>
-        </p:nvSpPr>
-        <p:spPr>
-          <a:xfrm>
-            <a:off x="6629399" y="1920240"/>
-            <a:ext cx="4846320" cy="365760"/>
+          <p:cNvPr id="11" name="TextBox 10"/>
+          <p:cNvSpPr txBox="1"/>
+          <p:nvPr/>
+        </p:nvSpPr>
+        <p:spPr>
+          <a:xfrm>
+            <a:off x="6309359" y="1874520"/>
+            <a:ext cx="5394960" cy="411480"/>
           </a:xfrm>
           <a:prstGeom prst="rect">
             <a:avLst/>
@@ -5922,9 +6498,9 @@
             <a:r>
               <a:rPr sz="1800" b="1">
                 <a:solidFill>
-                  <a:srgbClr val="0D223B"/>
-                </a:solidFill>
-                <a:latin typeface="Calibri"/>
+                  <a:srgbClr val="07182A"/>
+                </a:solidFill>
+                <a:latin typeface="Arial"/>
               </a:rPr>
               <a:t>Ответственность</a:t>
             </a:r>
@@ -5933,14 +6509,14 @@
       </p:sp>
       <p:sp>
         <p:nvSpPr>
-          <p:cNvPr id="11" name="TextBox 10"/>
-          <p:cNvSpPr txBox="1"/>
-          <p:nvPr/>
-        </p:nvSpPr>
-        <p:spPr>
-          <a:xfrm>
-            <a:off x="6629399" y="2468880"/>
-            <a:ext cx="4846320" cy="457200"/>
+          <p:cNvPr id="12" name="TextBox 11"/>
+          <p:cNvSpPr txBox="1"/>
+          <p:nvPr/>
+        </p:nvSpPr>
+        <p:spPr>
+          <a:xfrm>
+            <a:off x="6309359" y="2423160"/>
+            <a:ext cx="5394960" cy="640080"/>
           </a:xfrm>
           <a:prstGeom prst="rect">
             <a:avLst/>
@@ -5957,9 +6533,9 @@
             <a:r>
               <a:rPr sz="1400" b="0">
                 <a:solidFill>
-                  <a:srgbClr val="28394A"/>
-                </a:solidFill>
-                <a:latin typeface="Calibri"/>
+                  <a:srgbClr val="3D5566"/>
+                </a:solidFill>
+                <a:latin typeface="Arial"/>
               </a:rPr>
               <a:t>Профессионализм мирового уровня</a:t>
             </a:r>
@@ -5968,20 +6544,20 @@
       </p:sp>
       <p:sp>
         <p:nvSpPr>
-          <p:cNvPr id="12" name="Rounded Rectangle 11"/>
+          <p:cNvPr id="13" name="Rectangle 12"/>
           <p:cNvSpPr/>
           <p:nvPr/>
         </p:nvSpPr>
         <p:spPr>
           <a:xfrm>
-            <a:off x="548640" y="3657600"/>
-            <a:ext cx="5486400" cy="1828800"/>
-          </a:xfrm>
-          <a:prstGeom prst="roundRect">
+            <a:off x="548640" y="3749039"/>
+            <a:ext cx="5394960" cy="54864"/>
+          </a:xfrm>
+          <a:prstGeom prst="rect">
             <a:avLst/>
           </a:prstGeom>
           <a:solidFill>
-            <a:srgbClr val="FFFFFF"/>
+            <a:srgbClr val="1F8F5F"/>
           </a:solidFill>
           <a:ln>
             <a:noFill/>
@@ -6011,14 +6587,14 @@
       </p:sp>
       <p:sp>
         <p:nvSpPr>
-          <p:cNvPr id="13" name="TextBox 12"/>
-          <p:cNvSpPr txBox="1"/>
-          <p:nvPr/>
-        </p:nvSpPr>
-        <p:spPr>
-          <a:xfrm>
-            <a:off x="868680" y="4023360"/>
-            <a:ext cx="4846320" cy="365760"/>
+          <p:cNvPr id="14" name="TextBox 13"/>
+          <p:cNvSpPr txBox="1"/>
+          <p:nvPr/>
+        </p:nvSpPr>
+        <p:spPr>
+          <a:xfrm>
+            <a:off x="548640" y="4069079"/>
+            <a:ext cx="5394960" cy="411480"/>
           </a:xfrm>
           <a:prstGeom prst="rect">
             <a:avLst/>
@@ -6035,9 +6611,9 @@
             <a:r>
               <a:rPr sz="1800" b="1">
                 <a:solidFill>
-                  <a:srgbClr val="0D223B"/>
-                </a:solidFill>
-                <a:latin typeface="Calibri"/>
+                  <a:srgbClr val="07182A"/>
+                </a:solidFill>
+                <a:latin typeface="Arial"/>
               </a:rPr>
               <a:t>Уважение и доверие</a:t>
             </a:r>
@@ -6046,14 +6622,14 @@
       </p:sp>
       <p:sp>
         <p:nvSpPr>
-          <p:cNvPr id="14" name="TextBox 13"/>
-          <p:cNvSpPr txBox="1"/>
-          <p:nvPr/>
-        </p:nvSpPr>
-        <p:spPr>
-          <a:xfrm>
-            <a:off x="868680" y="4572000"/>
-            <a:ext cx="4846320" cy="457200"/>
+          <p:cNvPr id="15" name="TextBox 14"/>
+          <p:cNvSpPr txBox="1"/>
+          <p:nvPr/>
+        </p:nvSpPr>
+        <p:spPr>
+          <a:xfrm>
+            <a:off x="548640" y="4617719"/>
+            <a:ext cx="5394960" cy="640080"/>
           </a:xfrm>
           <a:prstGeom prst="rect">
             <a:avLst/>
@@ -6070,31 +6646,31 @@
             <a:r>
               <a:rPr sz="1400" b="0">
                 <a:solidFill>
-                  <a:srgbClr val="28394A"/>
-                </a:solidFill>
-                <a:latin typeface="Calibri"/>
-              </a:rPr>
-              <a:t>Независимость оценки</a:t>
-            </a:r>
-          </a:p>
-        </p:txBody>
-      </p:sp>
-      <p:sp>
-        <p:nvSpPr>
-          <p:cNvPr id="15" name="Rounded Rectangle 14"/>
+                  <a:srgbClr val="3D5566"/>
+                </a:solidFill>
+                <a:latin typeface="Arial"/>
+              </a:rPr>
+              <a:t>Беспристрастность сертификации</a:t>
+            </a:r>
+          </a:p>
+        </p:txBody>
+      </p:sp>
+      <p:sp>
+        <p:nvSpPr>
+          <p:cNvPr id="16" name="Rectangle 15"/>
           <p:cNvSpPr/>
           <p:nvPr/>
         </p:nvSpPr>
         <p:spPr>
           <a:xfrm>
-            <a:off x="6309359" y="3657600"/>
-            <a:ext cx="5486400" cy="1828800"/>
-          </a:xfrm>
-          <a:prstGeom prst="roundRect">
+            <a:off x="6309359" y="3749039"/>
+            <a:ext cx="5394960" cy="54864"/>
+          </a:xfrm>
+          <a:prstGeom prst="rect">
             <a:avLst/>
           </a:prstGeom>
           <a:solidFill>
-            <a:srgbClr val="FFFFFF"/>
+            <a:srgbClr val="1F8F5F"/>
           </a:solidFill>
           <a:ln>
             <a:noFill/>
@@ -6124,14 +6700,14 @@
       </p:sp>
       <p:sp>
         <p:nvSpPr>
-          <p:cNvPr id="16" name="TextBox 15"/>
-          <p:cNvSpPr txBox="1"/>
-          <p:nvPr/>
-        </p:nvSpPr>
-        <p:spPr>
-          <a:xfrm>
-            <a:off x="6629399" y="4023360"/>
-            <a:ext cx="4846320" cy="365760"/>
+          <p:cNvPr id="17" name="TextBox 16"/>
+          <p:cNvSpPr txBox="1"/>
+          <p:nvPr/>
+        </p:nvSpPr>
+        <p:spPr>
+          <a:xfrm>
+            <a:off x="6309359" y="4069079"/>
+            <a:ext cx="5394960" cy="411480"/>
           </a:xfrm>
           <a:prstGeom prst="rect">
             <a:avLst/>
@@ -6148,9 +6724,9 @@
             <a:r>
               <a:rPr sz="1800" b="1">
                 <a:solidFill>
-                  <a:srgbClr val="0D223B"/>
-                </a:solidFill>
-                <a:latin typeface="Calibri"/>
+                  <a:srgbClr val="07182A"/>
+                </a:solidFill>
+                <a:latin typeface="Arial"/>
               </a:rPr>
               <a:t>Открытость</a:t>
             </a:r>
@@ -6159,14 +6735,14 @@
       </p:sp>
       <p:sp>
         <p:nvSpPr>
-          <p:cNvPr id="17" name="TextBox 16"/>
-          <p:cNvSpPr txBox="1"/>
-          <p:nvPr/>
-        </p:nvSpPr>
-        <p:spPr>
-          <a:xfrm>
-            <a:off x="6629399" y="4572000"/>
-            <a:ext cx="4846320" cy="457200"/>
+          <p:cNvPr id="18" name="TextBox 17"/>
+          <p:cNvSpPr txBox="1"/>
+          <p:nvPr/>
+        </p:nvSpPr>
+        <p:spPr>
+          <a:xfrm>
+            <a:off x="6309359" y="4617719"/>
+            <a:ext cx="5394960" cy="640080"/>
           </a:xfrm>
           <a:prstGeom prst="rect">
             <a:avLst/>
@@ -6183,9 +6759,9 @@
             <a:r>
               <a:rPr sz="1400" b="0">
                 <a:solidFill>
-                  <a:srgbClr val="28394A"/>
-                </a:solidFill>
-                <a:latin typeface="Calibri"/>
+                  <a:srgbClr val="3D5566"/>
+                </a:solidFill>
+                <a:latin typeface="Arial"/>
               </a:rPr>
               <a:t>Международные практики на пользу КР</a:t>
             </a:r>
@@ -6194,7 +6770,7 @@
       </p:sp>
       <p:sp>
         <p:nvSpPr>
-          <p:cNvPr id="18" name="TextBox 17"/>
+          <p:cNvPr id="19" name="TextBox 18"/>
           <p:cNvSpPr txBox="1"/>
           <p:nvPr/>
         </p:nvSpPr>
@@ -6218,9 +6794,9 @@
             <a:r>
               <a:rPr sz="1100" b="0">
                 <a:solidFill>
-                  <a:srgbClr val="5C6B72"/>
-                </a:solidFill>
-                <a:latin typeface="Calibri"/>
+                  <a:srgbClr val="9AAFBD"/>
+                </a:solidFill>
+                <a:latin typeface="Arial"/>
               </a:rPr>
               <a:t>IPMA Kyrgyz Republic  ·  ipma.kg</a:t>
             </a:r>
@@ -6229,14 +6805,14 @@
       </p:sp>
       <p:sp>
         <p:nvSpPr>
-          <p:cNvPr id="19" name="TextBox 18"/>
-          <p:cNvSpPr txBox="1"/>
-          <p:nvPr/>
-        </p:nvSpPr>
-        <p:spPr>
-          <a:xfrm>
-            <a:off x="10515600" y="6446520"/>
-            <a:ext cx="1280160" cy="274320"/>
+          <p:cNvPr id="20" name="TextBox 19"/>
+          <p:cNvSpPr txBox="1"/>
+          <p:nvPr/>
+        </p:nvSpPr>
+        <p:spPr>
+          <a:xfrm>
+            <a:off x="10424160" y="6446520"/>
+            <a:ext cx="1371600" cy="274320"/>
           </a:xfrm>
           <a:prstGeom prst="rect">
             <a:avLst/>
@@ -6253,9 +6829,9 @@
             <a:r>
               <a:rPr sz="1100" b="0">
                 <a:solidFill>
-                  <a:srgbClr val="5C6B72"/>
-                </a:solidFill>
-                <a:latin typeface="Calibri"/>
+                  <a:srgbClr val="9AAFBD"/>
+                </a:solidFill>
+                <a:latin typeface="Arial"/>
               </a:rPr>
               <a:t>04 / 12</a:t>
             </a:r>
@@ -6295,7 +6871,7 @@
             <a:avLst/>
           </a:prstGeom>
           <a:solidFill>
-            <a:srgbClr val="EEF2F1"/>
+            <a:srgbClr val="E8EEF2"/>
           </a:solidFill>
           <a:ln>
             <a:noFill/>
@@ -6323,9 +6899,52 @@
           </a:p>
         </p:txBody>
       </p:sp>
+      <p:sp>
+        <p:nvSpPr>
+          <p:cNvPr id="3" name="Rectangle 2"/>
+          <p:cNvSpPr/>
+          <p:nvPr/>
+        </p:nvSpPr>
+        <p:spPr>
+          <a:xfrm>
+            <a:off x="0" y="0"/>
+            <a:ext cx="12191695" cy="73152"/>
+          </a:xfrm>
+          <a:prstGeom prst="rect">
+            <a:avLst/>
+          </a:prstGeom>
+          <a:solidFill>
+            <a:srgbClr val="1F8F5F"/>
+          </a:solidFill>
+          <a:ln>
+            <a:noFill/>
+          </a:ln>
+        </p:spPr>
+        <p:style>
+          <a:lnRef idx="1">
+            <a:schemeClr val="accent1"/>
+          </a:lnRef>
+          <a:fillRef idx="3">
+            <a:schemeClr val="accent1"/>
+          </a:fillRef>
+          <a:effectRef idx="2">
+            <a:schemeClr val="accent1"/>
+          </a:effectRef>
+          <a:fontRef idx="minor">
+            <a:schemeClr val="lt1"/>
+          </a:fontRef>
+        </p:style>
+        <p:txBody>
+          <a:bodyPr rtlCol="0" anchor="ctr"/>
+          <a:lstStyle/>
+          <a:p>
+            <a:pPr algn="ctr"/>
+          </a:p>
+        </p:txBody>
+      </p:sp>
       <p:pic>
         <p:nvPicPr>
-          <p:cNvPr id="3" name="Picture 2" descr="ipma-kr-emblem.png"/>
+          <p:cNvPr id="4" name="Picture 3" descr="ipma-kr-emblem.png"/>
           <p:cNvPicPr>
             <a:picLocks noChangeAspect="1"/>
           </p:cNvPicPr>
@@ -6339,8 +6958,8 @@
         </p:blipFill>
         <p:spPr>
           <a:xfrm>
-            <a:off x="11292840" y="228600"/>
-            <a:ext cx="597448" cy="594360"/>
+            <a:off x="11338560" y="256032"/>
+            <a:ext cx="505533" cy="502920"/>
           </a:xfrm>
           <a:prstGeom prst="rect">
             <a:avLst/>
@@ -6349,14 +6968,14 @@
       </p:pic>
       <p:sp>
         <p:nvSpPr>
-          <p:cNvPr id="4" name="TextBox 3"/>
+          <p:cNvPr id="5" name="TextBox 4"/>
           <p:cNvSpPr txBox="1"/>
           <p:nvPr/>
         </p:nvSpPr>
         <p:spPr>
           <a:xfrm>
             <a:off x="548640" y="320040"/>
-            <a:ext cx="10972800" cy="274320"/>
+            <a:ext cx="10058400" cy="274320"/>
           </a:xfrm>
           <a:prstGeom prst="rect">
             <a:avLst/>
@@ -6373,25 +6992,95 @@
             <a:r>
               <a:rPr sz="1100" b="1">
                 <a:solidFill>
-                  <a:srgbClr val="1F7A34"/>
-                </a:solidFill>
-                <a:latin typeface="Calibri"/>
-              </a:rPr>
-              <a:t>05  »  КЫРГЫЗСТАН</a:t>
-            </a:r>
-          </a:p>
-        </p:txBody>
-      </p:sp>
-      <p:sp>
-        <p:nvSpPr>
-          <p:cNvPr id="5" name="TextBox 4"/>
+                  <a:srgbClr val="1F8F5F"/>
+                </a:solidFill>
+                <a:latin typeface="Arial"/>
+              </a:rPr>
+              <a:t>05  »  КОНТЕКСТ</a:t>
+            </a:r>
+          </a:p>
+        </p:txBody>
+      </p:sp>
+      <p:sp>
+        <p:nvSpPr>
+          <p:cNvPr id="6" name="TextBox 5"/>
           <p:cNvSpPr txBox="1"/>
           <p:nvPr/>
         </p:nvSpPr>
         <p:spPr>
           <a:xfrm>
             <a:off x="548640" y="640080"/>
-            <a:ext cx="10515600" cy="548640"/>
+            <a:ext cx="10058400" cy="640080"/>
+          </a:xfrm>
+          <a:prstGeom prst="rect">
+            <a:avLst/>
+          </a:prstGeom>
+          <a:noFill/>
+        </p:spPr>
+        <p:txBody>
+          <a:bodyPr wrap="square">
+            <a:spAutoFit/>
+          </a:bodyPr>
+          <a:lstStyle/>
+          <a:p>
+            <a:pPr algn="l"/>
+            <a:r>
+              <a:rPr sz="3200" b="1">
+                <a:solidFill>
+                  <a:srgbClr val="07182A"/>
+                </a:solidFill>
+                <a:latin typeface="Arial"/>
+              </a:rPr>
+              <a:t>Кыргызстан</a:t>
+            </a:r>
+          </a:p>
+        </p:txBody>
+      </p:sp>
+      <p:sp>
+        <p:nvSpPr>
+          <p:cNvPr id="7" name="TextBox 6"/>
+          <p:cNvSpPr txBox="1"/>
+          <p:nvPr/>
+        </p:nvSpPr>
+        <p:spPr>
+          <a:xfrm>
+            <a:off x="548640" y="1325880"/>
+            <a:ext cx="10972800" cy="365760"/>
+          </a:xfrm>
+          <a:prstGeom prst="rect">
+            <a:avLst/>
+          </a:prstGeom>
+          <a:noFill/>
+        </p:spPr>
+        <p:txBody>
+          <a:bodyPr wrap="square">
+            <a:spAutoFit/>
+          </a:bodyPr>
+          <a:lstStyle/>
+          <a:p>
+            <a:pPr algn="l"/>
+            <a:r>
+              <a:rPr sz="1400" b="0">
+                <a:solidFill>
+                  <a:srgbClr val="3D5566"/>
+                </a:solidFill>
+                <a:latin typeface="Arial"/>
+              </a:rPr>
+              <a:t>Центральная Азия — пересечение маршрутов ЕАЭС и Большого Шёлкового пути</a:t>
+            </a:r>
+          </a:p>
+        </p:txBody>
+      </p:sp>
+      <p:sp>
+        <p:nvSpPr>
+          <p:cNvPr id="8" name="TextBox 7"/>
+          <p:cNvSpPr txBox="1"/>
+          <p:nvPr/>
+        </p:nvSpPr>
+        <p:spPr>
+          <a:xfrm>
+            <a:off x="548640" y="2194560"/>
+            <a:ext cx="2651760" cy="640080"/>
           </a:xfrm>
           <a:prstGeom prst="rect">
             <a:avLst/>
@@ -6408,31 +7097,66 @@
             <a:r>
               <a:rPr sz="2800" b="1">
                 <a:solidFill>
-                  <a:srgbClr val="0D223B"/>
-                </a:solidFill>
-                <a:latin typeface="Arial"/>
-              </a:rPr>
-              <a:t>Стратегическое положение</a:t>
-            </a:r>
-          </a:p>
-        </p:txBody>
-      </p:sp>
-      <p:sp>
-        <p:nvSpPr>
-          <p:cNvPr id="6" name="Rounded Rectangle 5"/>
+                  <a:srgbClr val="07182A"/>
+                </a:solidFill>
+                <a:latin typeface="Arial"/>
+              </a:rPr>
+              <a:t>≈200k</a:t>
+            </a:r>
+          </a:p>
+        </p:txBody>
+      </p:sp>
+      <p:sp>
+        <p:nvSpPr>
+          <p:cNvPr id="9" name="TextBox 8"/>
+          <p:cNvSpPr txBox="1"/>
+          <p:nvPr/>
+        </p:nvSpPr>
+        <p:spPr>
+          <a:xfrm>
+            <a:off x="548640" y="3017520"/>
+            <a:ext cx="2651760" cy="457200"/>
+          </a:xfrm>
+          <a:prstGeom prst="rect">
+            <a:avLst/>
+          </a:prstGeom>
+          <a:noFill/>
+        </p:spPr>
+        <p:txBody>
+          <a:bodyPr wrap="square">
+            <a:spAutoFit/>
+          </a:bodyPr>
+          <a:lstStyle/>
+          <a:p>
+            <a:pPr algn="l"/>
+            <a:r>
+              <a:rPr sz="1300" b="0">
+                <a:solidFill>
+                  <a:srgbClr val="3D5566"/>
+                </a:solidFill>
+                <a:latin typeface="Arial"/>
+              </a:rPr>
+              <a:t>км²</a:t>
+            </a:r>
+          </a:p>
+        </p:txBody>
+      </p:sp>
+      <p:sp>
+        <p:nvSpPr>
+          <p:cNvPr id="10" name="Rectangle 9"/>
           <p:cNvSpPr/>
           <p:nvPr/>
         </p:nvSpPr>
         <p:spPr>
           <a:xfrm>
-            <a:off x="548640" y="1554480"/>
-            <a:ext cx="2743200" cy="1828800"/>
-          </a:xfrm>
-          <a:prstGeom prst="roundRect">
+            <a:off x="3355848" y="2011680"/>
+            <a:ext cx="18288" cy="1828800"/>
+          </a:xfrm>
+          <a:prstGeom prst="rect">
             <a:avLst/>
           </a:prstGeom>
           <a:solidFill>
-            <a:srgbClr val="FFFFFF"/>
+            <a:srgbClr val="D0DCE3"/>
           </a:solidFill>
           <a:ln>
             <a:noFill/>
@@ -6462,90 +7186,90 @@
       </p:sp>
       <p:sp>
         <p:nvSpPr>
-          <p:cNvPr id="7" name="TextBox 6"/>
-          <p:cNvSpPr txBox="1"/>
-          <p:nvPr/>
-        </p:nvSpPr>
-        <p:spPr>
-          <a:xfrm>
-            <a:off x="685800" y="1920240"/>
-            <a:ext cx="2468880" cy="640080"/>
-          </a:xfrm>
-          <a:prstGeom prst="rect">
-            <a:avLst/>
-          </a:prstGeom>
-          <a:noFill/>
-        </p:spPr>
-        <p:txBody>
-          <a:bodyPr wrap="square">
-            <a:spAutoFit/>
-          </a:bodyPr>
-          <a:lstStyle/>
-          <a:p>
-            <a:pPr algn="ctr"/>
-            <a:r>
-              <a:rPr sz="1800" b="1">
-                <a:solidFill>
-                  <a:srgbClr val="0D223B"/>
-                </a:solidFill>
-                <a:latin typeface="Calibri"/>
-              </a:rPr>
-              <a:t>≈200 тыс. км²</a:t>
-            </a:r>
-          </a:p>
-        </p:txBody>
-      </p:sp>
-      <p:sp>
-        <p:nvSpPr>
-          <p:cNvPr id="8" name="TextBox 7"/>
-          <p:cNvSpPr txBox="1"/>
-          <p:nvPr/>
-        </p:nvSpPr>
-        <p:spPr>
-          <a:xfrm>
-            <a:off x="685800" y="2651760"/>
-            <a:ext cx="2468880" cy="365760"/>
-          </a:xfrm>
-          <a:prstGeom prst="rect">
-            <a:avLst/>
-          </a:prstGeom>
-          <a:noFill/>
-        </p:spPr>
-        <p:txBody>
-          <a:bodyPr wrap="square">
-            <a:spAutoFit/>
-          </a:bodyPr>
-          <a:lstStyle/>
-          <a:p>
-            <a:pPr algn="ctr"/>
-            <a:r>
-              <a:rPr sz="1200" b="0">
-                <a:solidFill>
-                  <a:srgbClr val="5C6B72"/>
-                </a:solidFill>
-                <a:latin typeface="Calibri"/>
-              </a:rPr>
-              <a:t>Площадь</a:t>
-            </a:r>
-          </a:p>
-        </p:txBody>
-      </p:sp>
-      <p:sp>
-        <p:nvSpPr>
-          <p:cNvPr id="9" name="Rounded Rectangle 8"/>
+          <p:cNvPr id="11" name="TextBox 10"/>
+          <p:cNvSpPr txBox="1"/>
+          <p:nvPr/>
+        </p:nvSpPr>
+        <p:spPr>
+          <a:xfrm>
+            <a:off x="3429000" y="2194560"/>
+            <a:ext cx="2651760" cy="640080"/>
+          </a:xfrm>
+          <a:prstGeom prst="rect">
+            <a:avLst/>
+          </a:prstGeom>
+          <a:noFill/>
+        </p:spPr>
+        <p:txBody>
+          <a:bodyPr wrap="square">
+            <a:spAutoFit/>
+          </a:bodyPr>
+          <a:lstStyle/>
+          <a:p>
+            <a:pPr algn="l"/>
+            <a:r>
+              <a:rPr sz="2800" b="1">
+                <a:solidFill>
+                  <a:srgbClr val="07182A"/>
+                </a:solidFill>
+                <a:latin typeface="Arial"/>
+              </a:rPr>
+              <a:t>7,4 млн</a:t>
+            </a:r>
+          </a:p>
+        </p:txBody>
+      </p:sp>
+      <p:sp>
+        <p:nvSpPr>
+          <p:cNvPr id="12" name="TextBox 11"/>
+          <p:cNvSpPr txBox="1"/>
+          <p:nvPr/>
+        </p:nvSpPr>
+        <p:spPr>
+          <a:xfrm>
+            <a:off x="3429000" y="3017520"/>
+            <a:ext cx="2651760" cy="457200"/>
+          </a:xfrm>
+          <a:prstGeom prst="rect">
+            <a:avLst/>
+          </a:prstGeom>
+          <a:noFill/>
+        </p:spPr>
+        <p:txBody>
+          <a:bodyPr wrap="square">
+            <a:spAutoFit/>
+          </a:bodyPr>
+          <a:lstStyle/>
+          <a:p>
+            <a:pPr algn="l"/>
+            <a:r>
+              <a:rPr sz="1300" b="0">
+                <a:solidFill>
+                  <a:srgbClr val="3D5566"/>
+                </a:solidFill>
+                <a:latin typeface="Arial"/>
+              </a:rPr>
+              <a:t>население</a:t>
+            </a:r>
+          </a:p>
+        </p:txBody>
+      </p:sp>
+      <p:sp>
+        <p:nvSpPr>
+          <p:cNvPr id="13" name="Rectangle 12"/>
           <p:cNvSpPr/>
           <p:nvPr/>
         </p:nvSpPr>
         <p:spPr>
           <a:xfrm>
-            <a:off x="3429000" y="1554480"/>
-            <a:ext cx="2743200" cy="1828800"/>
-          </a:xfrm>
-          <a:prstGeom prst="roundRect">
+            <a:off x="6236207" y="2011680"/>
+            <a:ext cx="18288" cy="1828800"/>
+          </a:xfrm>
+          <a:prstGeom prst="rect">
             <a:avLst/>
           </a:prstGeom>
           <a:solidFill>
-            <a:srgbClr val="FFFFFF"/>
+            <a:srgbClr val="D0DCE3"/>
           </a:solidFill>
           <a:ln>
             <a:noFill/>
@@ -6575,90 +7299,90 @@
       </p:sp>
       <p:sp>
         <p:nvSpPr>
-          <p:cNvPr id="10" name="TextBox 9"/>
-          <p:cNvSpPr txBox="1"/>
-          <p:nvPr/>
-        </p:nvSpPr>
-        <p:spPr>
-          <a:xfrm>
-            <a:off x="3566160" y="1920240"/>
-            <a:ext cx="2468880" cy="640080"/>
-          </a:xfrm>
-          <a:prstGeom prst="rect">
-            <a:avLst/>
-          </a:prstGeom>
-          <a:noFill/>
-        </p:spPr>
-        <p:txBody>
-          <a:bodyPr wrap="square">
-            <a:spAutoFit/>
-          </a:bodyPr>
-          <a:lstStyle/>
-          <a:p>
-            <a:pPr algn="ctr"/>
-            <a:r>
-              <a:rPr sz="1800" b="1">
-                <a:solidFill>
-                  <a:srgbClr val="0D223B"/>
-                </a:solidFill>
-                <a:latin typeface="Calibri"/>
-              </a:rPr>
-              <a:t>≈7,4 млн</a:t>
-            </a:r>
-          </a:p>
-        </p:txBody>
-      </p:sp>
-      <p:sp>
-        <p:nvSpPr>
-          <p:cNvPr id="11" name="TextBox 10"/>
-          <p:cNvSpPr txBox="1"/>
-          <p:nvPr/>
-        </p:nvSpPr>
-        <p:spPr>
-          <a:xfrm>
-            <a:off x="3566160" y="2651760"/>
-            <a:ext cx="2468880" cy="365760"/>
-          </a:xfrm>
-          <a:prstGeom prst="rect">
-            <a:avLst/>
-          </a:prstGeom>
-          <a:noFill/>
-        </p:spPr>
-        <p:txBody>
-          <a:bodyPr wrap="square">
-            <a:spAutoFit/>
-          </a:bodyPr>
-          <a:lstStyle/>
-          <a:p>
-            <a:pPr algn="ctr"/>
-            <a:r>
-              <a:rPr sz="1200" b="0">
-                <a:solidFill>
-                  <a:srgbClr val="5C6B72"/>
-                </a:solidFill>
-                <a:latin typeface="Calibri"/>
-              </a:rPr>
-              <a:t>Население</a:t>
-            </a:r>
-          </a:p>
-        </p:txBody>
-      </p:sp>
-      <p:sp>
-        <p:nvSpPr>
-          <p:cNvPr id="12" name="Rounded Rectangle 11"/>
+          <p:cNvPr id="14" name="TextBox 13"/>
+          <p:cNvSpPr txBox="1"/>
+          <p:nvPr/>
+        </p:nvSpPr>
+        <p:spPr>
+          <a:xfrm>
+            <a:off x="6309359" y="2194560"/>
+            <a:ext cx="2651760" cy="640080"/>
+          </a:xfrm>
+          <a:prstGeom prst="rect">
+            <a:avLst/>
+          </a:prstGeom>
+          <a:noFill/>
+        </p:spPr>
+        <p:txBody>
+          <a:bodyPr wrap="square">
+            <a:spAutoFit/>
+          </a:bodyPr>
+          <a:lstStyle/>
+          <a:p>
+            <a:pPr algn="l"/>
+            <a:r>
+              <a:rPr sz="2800" b="1">
+                <a:solidFill>
+                  <a:srgbClr val="07182A"/>
+                </a:solidFill>
+                <a:latin typeface="Arial"/>
+              </a:rPr>
+              <a:t>Бишкек</a:t>
+            </a:r>
+          </a:p>
+        </p:txBody>
+      </p:sp>
+      <p:sp>
+        <p:nvSpPr>
+          <p:cNvPr id="15" name="TextBox 14"/>
+          <p:cNvSpPr txBox="1"/>
+          <p:nvPr/>
+        </p:nvSpPr>
+        <p:spPr>
+          <a:xfrm>
+            <a:off x="6309359" y="3017520"/>
+            <a:ext cx="2651760" cy="457200"/>
+          </a:xfrm>
+          <a:prstGeom prst="rect">
+            <a:avLst/>
+          </a:prstGeom>
+          <a:noFill/>
+        </p:spPr>
+        <p:txBody>
+          <a:bodyPr wrap="square">
+            <a:spAutoFit/>
+          </a:bodyPr>
+          <a:lstStyle/>
+          <a:p>
+            <a:pPr algn="l"/>
+            <a:r>
+              <a:rPr sz="1300" b="0">
+                <a:solidFill>
+                  <a:srgbClr val="3D5566"/>
+                </a:solidFill>
+                <a:latin typeface="Arial"/>
+              </a:rPr>
+              <a:t>штаб-квартира</a:t>
+            </a:r>
+          </a:p>
+        </p:txBody>
+      </p:sp>
+      <p:sp>
+        <p:nvSpPr>
+          <p:cNvPr id="16" name="Rectangle 15"/>
           <p:cNvSpPr/>
           <p:nvPr/>
         </p:nvSpPr>
         <p:spPr>
           <a:xfrm>
-            <a:off x="6309359" y="1554480"/>
-            <a:ext cx="2743200" cy="1828800"/>
-          </a:xfrm>
-          <a:prstGeom prst="roundRect">
+            <a:off x="9116567" y="2011680"/>
+            <a:ext cx="18288" cy="1828800"/>
+          </a:xfrm>
+          <a:prstGeom prst="rect">
             <a:avLst/>
           </a:prstGeom>
           <a:solidFill>
-            <a:srgbClr val="FFFFFF"/>
+            <a:srgbClr val="D0DCE3"/>
           </a:solidFill>
           <a:ln>
             <a:noFill/>
@@ -6688,146 +7412,33 @@
       </p:sp>
       <p:sp>
         <p:nvSpPr>
-          <p:cNvPr id="13" name="TextBox 12"/>
-          <p:cNvSpPr txBox="1"/>
-          <p:nvPr/>
-        </p:nvSpPr>
-        <p:spPr>
-          <a:xfrm>
-            <a:off x="6446519" y="1920240"/>
-            <a:ext cx="2468880" cy="640080"/>
-          </a:xfrm>
-          <a:prstGeom prst="rect">
-            <a:avLst/>
-          </a:prstGeom>
-          <a:noFill/>
-        </p:spPr>
-        <p:txBody>
-          <a:bodyPr wrap="square">
-            <a:spAutoFit/>
-          </a:bodyPr>
-          <a:lstStyle/>
-          <a:p>
-            <a:pPr algn="ctr"/>
-            <a:r>
-              <a:rPr sz="1800" b="1">
-                <a:solidFill>
-                  <a:srgbClr val="0D223B"/>
-                </a:solidFill>
-                <a:latin typeface="Calibri"/>
-              </a:rPr>
-              <a:t>Бишкек</a:t>
-            </a:r>
-          </a:p>
-        </p:txBody>
-      </p:sp>
-      <p:sp>
-        <p:nvSpPr>
-          <p:cNvPr id="14" name="TextBox 13"/>
-          <p:cNvSpPr txBox="1"/>
-          <p:nvPr/>
-        </p:nvSpPr>
-        <p:spPr>
-          <a:xfrm>
-            <a:off x="6446519" y="2651760"/>
-            <a:ext cx="2468880" cy="365760"/>
-          </a:xfrm>
-          <a:prstGeom prst="rect">
-            <a:avLst/>
-          </a:prstGeom>
-          <a:noFill/>
-        </p:spPr>
-        <p:txBody>
-          <a:bodyPr wrap="square">
-            <a:spAutoFit/>
-          </a:bodyPr>
-          <a:lstStyle/>
-          <a:p>
-            <a:pPr algn="ctr"/>
-            <a:r>
-              <a:rPr sz="1200" b="0">
-                <a:solidFill>
-                  <a:srgbClr val="5C6B72"/>
-                </a:solidFill>
-                <a:latin typeface="Calibri"/>
-              </a:rPr>
-              <a:t>Штаб-квартира</a:t>
-            </a:r>
-          </a:p>
-        </p:txBody>
-      </p:sp>
-      <p:sp>
-        <p:nvSpPr>
-          <p:cNvPr id="15" name="Rounded Rectangle 14"/>
-          <p:cNvSpPr/>
-          <p:nvPr/>
-        </p:nvSpPr>
-        <p:spPr>
-          <a:xfrm>
-            <a:off x="9189719" y="1554480"/>
-            <a:ext cx="2743200" cy="1828800"/>
-          </a:xfrm>
-          <a:prstGeom prst="roundRect">
-            <a:avLst/>
-          </a:prstGeom>
-          <a:solidFill>
-            <a:srgbClr val="FFFFFF"/>
-          </a:solidFill>
-          <a:ln>
-            <a:noFill/>
-          </a:ln>
-        </p:spPr>
-        <p:style>
-          <a:lnRef idx="1">
-            <a:schemeClr val="accent1"/>
-          </a:lnRef>
-          <a:fillRef idx="3">
-            <a:schemeClr val="accent1"/>
-          </a:fillRef>
-          <a:effectRef idx="2">
-            <a:schemeClr val="accent1"/>
-          </a:effectRef>
-          <a:fontRef idx="minor">
-            <a:schemeClr val="lt1"/>
-          </a:fontRef>
-        </p:style>
-        <p:txBody>
-          <a:bodyPr rtlCol="0" anchor="ctr"/>
-          <a:lstStyle/>
-          <a:p>
-            <a:pPr algn="ctr"/>
-          </a:p>
-        </p:txBody>
-      </p:sp>
-      <p:sp>
-        <p:nvSpPr>
-          <p:cNvPr id="16" name="TextBox 15"/>
-          <p:cNvSpPr txBox="1"/>
-          <p:nvPr/>
-        </p:nvSpPr>
-        <p:spPr>
-          <a:xfrm>
-            <a:off x="9326879" y="1920240"/>
-            <a:ext cx="2468880" cy="640080"/>
-          </a:xfrm>
-          <a:prstGeom prst="rect">
-            <a:avLst/>
-          </a:prstGeom>
-          <a:noFill/>
-        </p:spPr>
-        <p:txBody>
-          <a:bodyPr wrap="square">
-            <a:spAutoFit/>
-          </a:bodyPr>
-          <a:lstStyle/>
-          <a:p>
-            <a:pPr algn="ctr"/>
-            <a:r>
-              <a:rPr sz="1800" b="1">
-                <a:solidFill>
-                  <a:srgbClr val="0D223B"/>
-                </a:solidFill>
-                <a:latin typeface="Calibri"/>
+          <p:cNvPr id="17" name="TextBox 16"/>
+          <p:cNvSpPr txBox="1"/>
+          <p:nvPr/>
+        </p:nvSpPr>
+        <p:spPr>
+          <a:xfrm>
+            <a:off x="9189719" y="2194560"/>
+            <a:ext cx="2651760" cy="640080"/>
+          </a:xfrm>
+          <a:prstGeom prst="rect">
+            <a:avLst/>
+          </a:prstGeom>
+          <a:noFill/>
+        </p:spPr>
+        <p:txBody>
+          <a:bodyPr wrap="square">
+            <a:spAutoFit/>
+          </a:bodyPr>
+          <a:lstStyle/>
+          <a:p>
+            <a:pPr algn="l"/>
+            <a:r>
+              <a:rPr sz="2800" b="1">
+                <a:solidFill>
+                  <a:srgbClr val="07182A"/>
+                </a:solidFill>
+                <a:latin typeface="Arial"/>
               </a:rPr>
               <a:t>ЕАЭС</a:t>
             </a:r>
@@ -6836,71 +7447,35 @@
       </p:sp>
       <p:sp>
         <p:nvSpPr>
-          <p:cNvPr id="17" name="TextBox 16"/>
-          <p:cNvSpPr txBox="1"/>
-          <p:nvPr/>
-        </p:nvSpPr>
-        <p:spPr>
-          <a:xfrm>
-            <a:off x="9326879" y="2651760"/>
-            <a:ext cx="2468880" cy="365760"/>
-          </a:xfrm>
-          <a:prstGeom prst="rect">
-            <a:avLst/>
-          </a:prstGeom>
-          <a:noFill/>
-        </p:spPr>
-        <p:txBody>
-          <a:bodyPr wrap="square">
-            <a:spAutoFit/>
-          </a:bodyPr>
-          <a:lstStyle/>
-          <a:p>
-            <a:pPr algn="ctr"/>
-            <a:r>
-              <a:rPr sz="1200" b="0">
-                <a:solidFill>
-                  <a:srgbClr val="5C6B72"/>
-                </a:solidFill>
-                <a:latin typeface="Calibri"/>
-              </a:rPr>
-              <a:t>Единое пространство</a:t>
-            </a:r>
-          </a:p>
-        </p:txBody>
-      </p:sp>
-      <p:sp>
-        <p:nvSpPr>
           <p:cNvPr id="18" name="TextBox 17"/>
           <p:cNvSpPr txBox="1"/>
           <p:nvPr/>
         </p:nvSpPr>
         <p:spPr>
           <a:xfrm>
-            <a:off x="548640" y="3840480"/>
-            <a:ext cx="10972800" cy="1371600"/>
-          </a:xfrm>
-          <a:prstGeom prst="rect">
-            <a:avLst/>
-          </a:prstGeom>
-          <a:noFill/>
-        </p:spPr>
-        <p:txBody>
-          <a:bodyPr wrap="square">
-            <a:spAutoFit/>
-          </a:bodyPr>
-          <a:lstStyle/>
-          <a:p>
-            <a:pPr algn="l"/>
-            <a:r>
-              <a:rPr sz="1500" b="0">
-                <a:solidFill>
-                  <a:srgbClr val="28394A"/>
-                </a:solidFill>
-                <a:latin typeface="Calibri"/>
-              </a:rPr>
-              <a:t>Центральная Азия — пересечение маршрутов ЕАЭС и Большого Шёлкового пути.
-Отрасли: госуправление · строительство · IT · инфраструктура · цифровизация · медицина и НПО</a:t>
+            <a:off x="9189719" y="3017520"/>
+            <a:ext cx="2651760" cy="457200"/>
+          </a:xfrm>
+          <a:prstGeom prst="rect">
+            <a:avLst/>
+          </a:prstGeom>
+          <a:noFill/>
+        </p:spPr>
+        <p:txBody>
+          <a:bodyPr wrap="square">
+            <a:spAutoFit/>
+          </a:bodyPr>
+          <a:lstStyle/>
+          <a:p>
+            <a:pPr algn="l"/>
+            <a:r>
+              <a:rPr sz="1300" b="0">
+                <a:solidFill>
+                  <a:srgbClr val="3D5566"/>
+                </a:solidFill>
+                <a:latin typeface="Arial"/>
+              </a:rPr>
+              <a:t>пространство</a:t>
             </a:r>
           </a:p>
         </p:txBody>
@@ -6908,6 +7483,41 @@
       <p:sp>
         <p:nvSpPr>
           <p:cNvPr id="19" name="TextBox 18"/>
+          <p:cNvSpPr txBox="1"/>
+          <p:nvPr/>
+        </p:nvSpPr>
+        <p:spPr>
+          <a:xfrm>
+            <a:off x="548640" y="4572000"/>
+            <a:ext cx="10972800" cy="731520"/>
+          </a:xfrm>
+          <a:prstGeom prst="rect">
+            <a:avLst/>
+          </a:prstGeom>
+          <a:noFill/>
+        </p:spPr>
+        <p:txBody>
+          <a:bodyPr wrap="square">
+            <a:spAutoFit/>
+          </a:bodyPr>
+          <a:lstStyle/>
+          <a:p>
+            <a:pPr algn="l"/>
+            <a:r>
+              <a:rPr sz="1400" b="0">
+                <a:solidFill>
+                  <a:srgbClr val="1F8F5F"/>
+                </a:solidFill>
+                <a:latin typeface="Arial"/>
+              </a:rPr>
+              <a:t>Госуправление · Инфраструктура · Цифровизация · Строительство · IT · Медицина и НПО</a:t>
+            </a:r>
+          </a:p>
+        </p:txBody>
+      </p:sp>
+      <p:sp>
+        <p:nvSpPr>
+          <p:cNvPr id="20" name="TextBox 19"/>
           <p:cNvSpPr txBox="1"/>
           <p:nvPr/>
         </p:nvSpPr>
@@ -6931,9 +7541,9 @@
             <a:r>
               <a:rPr sz="1100" b="0">
                 <a:solidFill>
-                  <a:srgbClr val="5C6B72"/>
-                </a:solidFill>
-                <a:latin typeface="Calibri"/>
+                  <a:srgbClr val="9AAFBD"/>
+                </a:solidFill>
+                <a:latin typeface="Arial"/>
               </a:rPr>
               <a:t>IPMA Kyrgyz Republic  ·  ipma.kg</a:t>
             </a:r>
@@ -6942,14 +7552,14 @@
       </p:sp>
       <p:sp>
         <p:nvSpPr>
-          <p:cNvPr id="20" name="TextBox 19"/>
-          <p:cNvSpPr txBox="1"/>
-          <p:nvPr/>
-        </p:nvSpPr>
-        <p:spPr>
-          <a:xfrm>
-            <a:off x="10515600" y="6446520"/>
-            <a:ext cx="1280160" cy="274320"/>
+          <p:cNvPr id="21" name="TextBox 20"/>
+          <p:cNvSpPr txBox="1"/>
+          <p:nvPr/>
+        </p:nvSpPr>
+        <p:spPr>
+          <a:xfrm>
+            <a:off x="10424160" y="6446520"/>
+            <a:ext cx="1371600" cy="274320"/>
           </a:xfrm>
           <a:prstGeom prst="rect">
             <a:avLst/>
@@ -6966,9 +7576,9 @@
             <a:r>
               <a:rPr sz="1100" b="0">
                 <a:solidFill>
-                  <a:srgbClr val="5C6B72"/>
-                </a:solidFill>
-                <a:latin typeface="Calibri"/>
+                  <a:srgbClr val="9AAFBD"/>
+                </a:solidFill>
+                <a:latin typeface="Arial"/>
               </a:rPr>
               <a:t>05 / 12</a:t>
             </a:r>
@@ -7008,7 +7618,7 @@
             <a:avLst/>
           </a:prstGeom>
           <a:solidFill>
-            <a:srgbClr val="EEF2F1"/>
+            <a:srgbClr val="E8EEF2"/>
           </a:solidFill>
           <a:ln>
             <a:noFill/>
@@ -7036,9 +7646,52 @@
           </a:p>
         </p:txBody>
       </p:sp>
+      <p:sp>
+        <p:nvSpPr>
+          <p:cNvPr id="3" name="Rectangle 2"/>
+          <p:cNvSpPr/>
+          <p:nvPr/>
+        </p:nvSpPr>
+        <p:spPr>
+          <a:xfrm>
+            <a:off x="0" y="0"/>
+            <a:ext cx="12191695" cy="73152"/>
+          </a:xfrm>
+          <a:prstGeom prst="rect">
+            <a:avLst/>
+          </a:prstGeom>
+          <a:solidFill>
+            <a:srgbClr val="1F8F5F"/>
+          </a:solidFill>
+          <a:ln>
+            <a:noFill/>
+          </a:ln>
+        </p:spPr>
+        <p:style>
+          <a:lnRef idx="1">
+            <a:schemeClr val="accent1"/>
+          </a:lnRef>
+          <a:fillRef idx="3">
+            <a:schemeClr val="accent1"/>
+          </a:fillRef>
+          <a:effectRef idx="2">
+            <a:schemeClr val="accent1"/>
+          </a:effectRef>
+          <a:fontRef idx="minor">
+            <a:schemeClr val="lt1"/>
+          </a:fontRef>
+        </p:style>
+        <p:txBody>
+          <a:bodyPr rtlCol="0" anchor="ctr"/>
+          <a:lstStyle/>
+          <a:p>
+            <a:pPr algn="ctr"/>
+          </a:p>
+        </p:txBody>
+      </p:sp>
       <p:pic>
         <p:nvPicPr>
-          <p:cNvPr id="3" name="Picture 2" descr="ipma-kr-emblem.png"/>
+          <p:cNvPr id="4" name="Picture 3" descr="ipma-kr-emblem.png"/>
           <p:cNvPicPr>
             <a:picLocks noChangeAspect="1"/>
           </p:cNvPicPr>
@@ -7052,8 +7705,8 @@
         </p:blipFill>
         <p:spPr>
           <a:xfrm>
-            <a:off x="11292840" y="228600"/>
-            <a:ext cx="597448" cy="594360"/>
+            <a:off x="11338560" y="256032"/>
+            <a:ext cx="505533" cy="502920"/>
           </a:xfrm>
           <a:prstGeom prst="rect">
             <a:avLst/>
@@ -7062,14 +7715,14 @@
       </p:pic>
       <p:sp>
         <p:nvSpPr>
-          <p:cNvPr id="4" name="TextBox 3"/>
+          <p:cNvPr id="5" name="TextBox 4"/>
           <p:cNvSpPr txBox="1"/>
           <p:nvPr/>
         </p:nvSpPr>
         <p:spPr>
           <a:xfrm>
             <a:off x="548640" y="320040"/>
-            <a:ext cx="10972800" cy="274320"/>
+            <a:ext cx="10058400" cy="274320"/>
           </a:xfrm>
           <a:prstGeom prst="rect">
             <a:avLst/>
@@ -7086,9 +7739,9 @@
             <a:r>
               <a:rPr sz="1100" b="1">
                 <a:solidFill>
-                  <a:srgbClr val="1F7A34"/>
-                </a:solidFill>
-                <a:latin typeface="Calibri"/>
+                  <a:srgbClr val="1F8F5F"/>
+                </a:solidFill>
+                <a:latin typeface="Arial"/>
               </a:rPr>
               <a:t>06  »  ПУТЬ</a:t>
             </a:r>
@@ -7097,55 +7750,55 @@
       </p:sp>
       <p:sp>
         <p:nvSpPr>
-          <p:cNvPr id="5" name="TextBox 4"/>
+          <p:cNvPr id="6" name="TextBox 5"/>
           <p:cNvSpPr txBox="1"/>
           <p:nvPr/>
         </p:nvSpPr>
         <p:spPr>
           <a:xfrm>
             <a:off x="548640" y="640080"/>
-            <a:ext cx="10515600" cy="548640"/>
-          </a:xfrm>
-          <a:prstGeom prst="rect">
-            <a:avLst/>
-          </a:prstGeom>
-          <a:noFill/>
-        </p:spPr>
-        <p:txBody>
-          <a:bodyPr wrap="square">
-            <a:spAutoFit/>
-          </a:bodyPr>
-          <a:lstStyle/>
-          <a:p>
-            <a:pPr algn="l"/>
-            <a:r>
-              <a:rPr sz="2800" b="1">
-                <a:solidFill>
-                  <a:srgbClr val="0D223B"/>
-                </a:solidFill>
-                <a:latin typeface="Arial"/>
-              </a:rPr>
-              <a:t>Что уже сделано</a:t>
-            </a:r>
-          </a:p>
-        </p:txBody>
-      </p:sp>
-      <p:sp>
-        <p:nvSpPr>
-          <p:cNvPr id="6" name="Rounded Rectangle 5"/>
+            <a:ext cx="10058400" cy="640080"/>
+          </a:xfrm>
+          <a:prstGeom prst="rect">
+            <a:avLst/>
+          </a:prstGeom>
+          <a:noFill/>
+        </p:spPr>
+        <p:txBody>
+          <a:bodyPr wrap="square">
+            <a:spAutoFit/>
+          </a:bodyPr>
+          <a:lstStyle/>
+          <a:p>
+            <a:pPr algn="l"/>
+            <a:r>
+              <a:rPr sz="3200" b="1">
+                <a:solidFill>
+                  <a:srgbClr val="07182A"/>
+                </a:solidFill>
+                <a:latin typeface="Arial"/>
+              </a:rPr>
+              <a:t>Уже сделано</a:t>
+            </a:r>
+          </a:p>
+        </p:txBody>
+      </p:sp>
+      <p:sp>
+        <p:nvSpPr>
+          <p:cNvPr id="7" name="Oval 6"/>
           <p:cNvSpPr/>
           <p:nvPr/>
         </p:nvSpPr>
         <p:spPr>
           <a:xfrm>
-            <a:off x="548640" y="1417320"/>
-            <a:ext cx="11064240" cy="960120"/>
-          </a:xfrm>
-          <a:prstGeom prst="roundRect">
+            <a:off x="640080" y="1691640"/>
+            <a:ext cx="256032" cy="256032"/>
+          </a:xfrm>
+          <a:prstGeom prst="ellipse">
             <a:avLst/>
           </a:prstGeom>
           <a:solidFill>
-            <a:srgbClr val="FFFFFF"/>
+            <a:srgbClr val="1F8F5F"/>
           </a:solidFill>
           <a:ln>
             <a:noFill/>
@@ -7175,13 +7828,13 @@
       </p:sp>
       <p:sp>
         <p:nvSpPr>
-          <p:cNvPr id="7" name="TextBox 6"/>
-          <p:cNvSpPr txBox="1"/>
-          <p:nvPr/>
-        </p:nvSpPr>
-        <p:spPr>
-          <a:xfrm>
-            <a:off x="822960" y="1691640"/>
+          <p:cNvPr id="8" name="TextBox 7"/>
+          <p:cNvSpPr txBox="1"/>
+          <p:nvPr/>
+        </p:nvSpPr>
+        <p:spPr>
+          <a:xfrm>
+            <a:off x="1188720" y="1645920"/>
             <a:ext cx="1828800" cy="365760"/>
           </a:xfrm>
           <a:prstGeom prst="rect">
@@ -7197,11 +7850,11 @@
           <a:p>
             <a:pPr algn="l"/>
             <a:r>
-              <a:rPr sz="1500" b="1">
-                <a:solidFill>
-                  <a:srgbClr val="2F9E44"/>
-                </a:solidFill>
-                <a:latin typeface="Calibri"/>
+              <a:rPr sz="1400" b="1">
+                <a:solidFill>
+                  <a:srgbClr val="1F8F5F"/>
+                </a:solidFill>
+                <a:latin typeface="Arial"/>
               </a:rPr>
               <a:t>апр 2026</a:t>
             </a:r>
@@ -7210,55 +7863,55 @@
       </p:sp>
       <p:sp>
         <p:nvSpPr>
-          <p:cNvPr id="8" name="TextBox 7"/>
-          <p:cNvSpPr txBox="1"/>
-          <p:nvPr/>
-        </p:nvSpPr>
-        <p:spPr>
-          <a:xfrm>
-            <a:off x="2834640" y="1691640"/>
-            <a:ext cx="8412480" cy="411480"/>
-          </a:xfrm>
-          <a:prstGeom prst="rect">
-            <a:avLst/>
-          </a:prstGeom>
-          <a:noFill/>
-        </p:spPr>
-        <p:txBody>
-          <a:bodyPr wrap="square">
-            <a:spAutoFit/>
-          </a:bodyPr>
-          <a:lstStyle/>
-          <a:p>
-            <a:pPr algn="l"/>
-            <a:r>
-              <a:rPr sz="1500" b="0">
-                <a:solidFill>
-                  <a:srgbClr val="0D223B"/>
-                </a:solidFill>
-                <a:latin typeface="Calibri"/>
-              </a:rPr>
-              <a:t>Регистрация в Минюсте КР — ОО KgPMU</a:t>
-            </a:r>
-          </a:p>
-        </p:txBody>
-      </p:sp>
-      <p:sp>
-        <p:nvSpPr>
-          <p:cNvPr id="9" name="Rounded Rectangle 8"/>
+          <p:cNvPr id="9" name="TextBox 8"/>
+          <p:cNvSpPr txBox="1"/>
+          <p:nvPr/>
+        </p:nvSpPr>
+        <p:spPr>
+          <a:xfrm>
+            <a:off x="3200400" y="1645920"/>
+            <a:ext cx="8229600" cy="411480"/>
+          </a:xfrm>
+          <a:prstGeom prst="rect">
+            <a:avLst/>
+          </a:prstGeom>
+          <a:noFill/>
+        </p:spPr>
+        <p:txBody>
+          <a:bodyPr wrap="square">
+            <a:spAutoFit/>
+          </a:bodyPr>
+          <a:lstStyle/>
+          <a:p>
+            <a:pPr algn="l"/>
+            <a:r>
+              <a:rPr sz="1600" b="1">
+                <a:solidFill>
+                  <a:srgbClr val="07182A"/>
+                </a:solidFill>
+                <a:latin typeface="Arial"/>
+              </a:rPr>
+              <a:t>Регистрация в Минюсте КР</a:t>
+            </a:r>
+          </a:p>
+        </p:txBody>
+      </p:sp>
+      <p:sp>
+        <p:nvSpPr>
+          <p:cNvPr id="10" name="Oval 9"/>
           <p:cNvSpPr/>
           <p:nvPr/>
         </p:nvSpPr>
         <p:spPr>
           <a:xfrm>
-            <a:off x="548640" y="2514600"/>
-            <a:ext cx="11064240" cy="960120"/>
-          </a:xfrm>
-          <a:prstGeom prst="roundRect">
+            <a:off x="640080" y="2788920"/>
+            <a:ext cx="256032" cy="256032"/>
+          </a:xfrm>
+          <a:prstGeom prst="ellipse">
             <a:avLst/>
           </a:prstGeom>
           <a:solidFill>
-            <a:srgbClr val="FFFFFF"/>
+            <a:srgbClr val="1F8F5F"/>
           </a:solidFill>
           <a:ln>
             <a:noFill/>
@@ -7288,13 +7941,13 @@
       </p:sp>
       <p:sp>
         <p:nvSpPr>
-          <p:cNvPr id="10" name="TextBox 9"/>
-          <p:cNvSpPr txBox="1"/>
-          <p:nvPr/>
-        </p:nvSpPr>
-        <p:spPr>
-          <a:xfrm>
-            <a:off x="822960" y="2788920"/>
+          <p:cNvPr id="11" name="TextBox 10"/>
+          <p:cNvSpPr txBox="1"/>
+          <p:nvPr/>
+        </p:nvSpPr>
+        <p:spPr>
+          <a:xfrm>
+            <a:off x="1188720" y="2743200"/>
             <a:ext cx="1828800" cy="365760"/>
           </a:xfrm>
           <a:prstGeom prst="rect">
@@ -7310,11 +7963,11 @@
           <a:p>
             <a:pPr algn="l"/>
             <a:r>
-              <a:rPr sz="1500" b="1">
-                <a:solidFill>
-                  <a:srgbClr val="2F9E44"/>
-                </a:solidFill>
-                <a:latin typeface="Calibri"/>
+              <a:rPr sz="1400" b="1">
+                <a:solidFill>
+                  <a:srgbClr val="1F8F5F"/>
+                </a:solidFill>
+                <a:latin typeface="Arial"/>
               </a:rPr>
               <a:t>июн 2026</a:t>
             </a:r>
@@ -7323,55 +7976,55 @@
       </p:sp>
       <p:sp>
         <p:nvSpPr>
-          <p:cNvPr id="11" name="TextBox 10"/>
-          <p:cNvSpPr txBox="1"/>
-          <p:nvPr/>
-        </p:nvSpPr>
-        <p:spPr>
-          <a:xfrm>
-            <a:off x="2834640" y="2788920"/>
-            <a:ext cx="8412480" cy="411480"/>
-          </a:xfrm>
-          <a:prstGeom prst="rect">
-            <a:avLst/>
-          </a:prstGeom>
-          <a:noFill/>
-        </p:spPr>
-        <p:txBody>
-          <a:bodyPr wrap="square">
-            <a:spAutoFit/>
-          </a:bodyPr>
-          <a:lstStyle/>
-          <a:p>
-            <a:pPr algn="l"/>
-            <a:r>
-              <a:rPr sz="1500" b="0">
-                <a:solidFill>
-                  <a:srgbClr val="0D223B"/>
-                </a:solidFill>
-                <a:latin typeface="Calibri"/>
-              </a:rPr>
-              <a:t>Пакет документов направлен в IPMA</a:t>
-            </a:r>
-          </a:p>
-        </p:txBody>
-      </p:sp>
-      <p:sp>
-        <p:nvSpPr>
-          <p:cNvPr id="12" name="Rounded Rectangle 11"/>
+          <p:cNvPr id="12" name="TextBox 11"/>
+          <p:cNvSpPr txBox="1"/>
+          <p:nvPr/>
+        </p:nvSpPr>
+        <p:spPr>
+          <a:xfrm>
+            <a:off x="3200400" y="2743200"/>
+            <a:ext cx="8229600" cy="411480"/>
+          </a:xfrm>
+          <a:prstGeom prst="rect">
+            <a:avLst/>
+          </a:prstGeom>
+          <a:noFill/>
+        </p:spPr>
+        <p:txBody>
+          <a:bodyPr wrap="square">
+            <a:spAutoFit/>
+          </a:bodyPr>
+          <a:lstStyle/>
+          <a:p>
+            <a:pPr algn="l"/>
+            <a:r>
+              <a:rPr sz="1600" b="1">
+                <a:solidFill>
+                  <a:srgbClr val="07182A"/>
+                </a:solidFill>
+                <a:latin typeface="Arial"/>
+              </a:rPr>
+              <a:t>Документы направлены в IPMA</a:t>
+            </a:r>
+          </a:p>
+        </p:txBody>
+      </p:sp>
+      <p:sp>
+        <p:nvSpPr>
+          <p:cNvPr id="13" name="Oval 12"/>
           <p:cNvSpPr/>
           <p:nvPr/>
         </p:nvSpPr>
         <p:spPr>
           <a:xfrm>
-            <a:off x="548640" y="3611880"/>
-            <a:ext cx="11064240" cy="960120"/>
-          </a:xfrm>
-          <a:prstGeom prst="roundRect">
+            <a:off x="640080" y="3886200"/>
+            <a:ext cx="256032" cy="256032"/>
+          </a:xfrm>
+          <a:prstGeom prst="ellipse">
             <a:avLst/>
           </a:prstGeom>
           <a:solidFill>
-            <a:srgbClr val="FFFFFF"/>
+            <a:srgbClr val="1F8F5F"/>
           </a:solidFill>
           <a:ln>
             <a:noFill/>
@@ -7401,13 +8054,13 @@
       </p:sp>
       <p:sp>
         <p:nvSpPr>
-          <p:cNvPr id="13" name="TextBox 12"/>
-          <p:cNvSpPr txBox="1"/>
-          <p:nvPr/>
-        </p:nvSpPr>
-        <p:spPr>
-          <a:xfrm>
-            <a:off x="822960" y="3886200"/>
+          <p:cNvPr id="14" name="TextBox 13"/>
+          <p:cNvSpPr txBox="1"/>
+          <p:nvPr/>
+        </p:nvSpPr>
+        <p:spPr>
+          <a:xfrm>
+            <a:off x="1188720" y="3840480"/>
             <a:ext cx="1828800" cy="365760"/>
           </a:xfrm>
           <a:prstGeom prst="rect">
@@ -7423,11 +8076,11 @@
           <a:p>
             <a:pPr algn="l"/>
             <a:r>
-              <a:rPr sz="1500" b="1">
-                <a:solidFill>
-                  <a:srgbClr val="2F9E44"/>
-                </a:solidFill>
-                <a:latin typeface="Calibri"/>
+              <a:rPr sz="1400" b="1">
+                <a:solidFill>
+                  <a:srgbClr val="1F8F5F"/>
+                </a:solidFill>
+                <a:latin typeface="Arial"/>
               </a:rPr>
               <a:t>июл 2026</a:t>
             </a:r>
@@ -7436,55 +8089,55 @@
       </p:sp>
       <p:sp>
         <p:nvSpPr>
-          <p:cNvPr id="14" name="TextBox 13"/>
-          <p:cNvSpPr txBox="1"/>
-          <p:nvPr/>
-        </p:nvSpPr>
-        <p:spPr>
-          <a:xfrm>
-            <a:off x="2834640" y="3886200"/>
-            <a:ext cx="8412480" cy="411480"/>
-          </a:xfrm>
-          <a:prstGeom prst="rect">
-            <a:avLst/>
-          </a:prstGeom>
-          <a:noFill/>
-        </p:spPr>
-        <p:txBody>
-          <a:bodyPr wrap="square">
-            <a:spAutoFit/>
-          </a:bodyPr>
-          <a:lstStyle/>
-          <a:p>
-            <a:pPr algn="l"/>
-            <a:r>
-              <a:rPr sz="1500" b="0">
-                <a:solidFill>
-                  <a:srgbClr val="0D223B"/>
-                </a:solidFill>
-                <a:latin typeface="Calibri"/>
-              </a:rPr>
-              <a:t>Статус «Ассоциация-заявитель» (Applying MA)</a:t>
-            </a:r>
-          </a:p>
-        </p:txBody>
-      </p:sp>
-      <p:sp>
-        <p:nvSpPr>
-          <p:cNvPr id="15" name="Rounded Rectangle 14"/>
+          <p:cNvPr id="15" name="TextBox 14"/>
+          <p:cNvSpPr txBox="1"/>
+          <p:nvPr/>
+        </p:nvSpPr>
+        <p:spPr>
+          <a:xfrm>
+            <a:off x="3200400" y="3840480"/>
+            <a:ext cx="8229600" cy="411480"/>
+          </a:xfrm>
+          <a:prstGeom prst="rect">
+            <a:avLst/>
+          </a:prstGeom>
+          <a:noFill/>
+        </p:spPr>
+        <p:txBody>
+          <a:bodyPr wrap="square">
+            <a:spAutoFit/>
+          </a:bodyPr>
+          <a:lstStyle/>
+          <a:p>
+            <a:pPr algn="l"/>
+            <a:r>
+              <a:rPr sz="1600" b="1">
+                <a:solidFill>
+                  <a:srgbClr val="07182A"/>
+                </a:solidFill>
+                <a:latin typeface="Arial"/>
+              </a:rPr>
+              <a:t>Статус Ассоциация-заявитель</a:t>
+            </a:r>
+          </a:p>
+        </p:txBody>
+      </p:sp>
+      <p:sp>
+        <p:nvSpPr>
+          <p:cNvPr id="16" name="Oval 15"/>
           <p:cNvSpPr/>
           <p:nvPr/>
         </p:nvSpPr>
         <p:spPr>
           <a:xfrm>
-            <a:off x="548640" y="4709159"/>
-            <a:ext cx="11064240" cy="960120"/>
-          </a:xfrm>
-          <a:prstGeom prst="roundRect">
+            <a:off x="640080" y="4983479"/>
+            <a:ext cx="256032" cy="256032"/>
+          </a:xfrm>
+          <a:prstGeom prst="ellipse">
             <a:avLst/>
           </a:prstGeom>
           <a:solidFill>
-            <a:srgbClr val="FFFFFF"/>
+            <a:srgbClr val="1F8F5F"/>
           </a:solidFill>
           <a:ln>
             <a:noFill/>
@@ -7514,13 +8167,13 @@
       </p:sp>
       <p:sp>
         <p:nvSpPr>
-          <p:cNvPr id="16" name="TextBox 15"/>
-          <p:cNvSpPr txBox="1"/>
-          <p:nvPr/>
-        </p:nvSpPr>
-        <p:spPr>
-          <a:xfrm>
-            <a:off x="822960" y="4983479"/>
+          <p:cNvPr id="17" name="TextBox 16"/>
+          <p:cNvSpPr txBox="1"/>
+          <p:nvPr/>
+        </p:nvSpPr>
+        <p:spPr>
+          <a:xfrm>
+            <a:off x="1188720" y="4937759"/>
             <a:ext cx="1828800" cy="365760"/>
           </a:xfrm>
           <a:prstGeom prst="rect">
@@ -7536,11 +8189,11 @@
           <a:p>
             <a:pPr algn="l"/>
             <a:r>
-              <a:rPr sz="1500" b="1">
-                <a:solidFill>
-                  <a:srgbClr val="2F9E44"/>
-                </a:solidFill>
-                <a:latin typeface="Calibri"/>
+              <a:rPr sz="1400" b="1">
+                <a:solidFill>
+                  <a:srgbClr val="1F8F5F"/>
+                </a:solidFill>
+                <a:latin typeface="Arial"/>
               </a:rPr>
               <a:t>окт 2026</a:t>
             </a:r>
@@ -7549,42 +8202,42 @@
       </p:sp>
       <p:sp>
         <p:nvSpPr>
-          <p:cNvPr id="17" name="TextBox 16"/>
-          <p:cNvSpPr txBox="1"/>
-          <p:nvPr/>
-        </p:nvSpPr>
-        <p:spPr>
-          <a:xfrm>
-            <a:off x="2834640" y="4983479"/>
-            <a:ext cx="8412480" cy="411480"/>
-          </a:xfrm>
-          <a:prstGeom prst="rect">
-            <a:avLst/>
-          </a:prstGeom>
-          <a:noFill/>
-        </p:spPr>
-        <p:txBody>
-          <a:bodyPr wrap="square">
-            <a:spAutoFit/>
-          </a:bodyPr>
-          <a:lstStyle/>
-          <a:p>
-            <a:pPr algn="l"/>
-            <a:r>
-              <a:rPr sz="1500" b="0">
-                <a:solidFill>
-                  <a:srgbClr val="0D223B"/>
-                </a:solidFill>
-                <a:latin typeface="Calibri"/>
-              </a:rPr>
-              <a:t>План: Full MA + запуск сертификации</a:t>
-            </a:r>
-          </a:p>
-        </p:txBody>
-      </p:sp>
-      <p:sp>
-        <p:nvSpPr>
           <p:cNvPr id="18" name="TextBox 17"/>
+          <p:cNvSpPr txBox="1"/>
+          <p:nvPr/>
+        </p:nvSpPr>
+        <p:spPr>
+          <a:xfrm>
+            <a:off x="3200400" y="4937759"/>
+            <a:ext cx="8229600" cy="411480"/>
+          </a:xfrm>
+          <a:prstGeom prst="rect">
+            <a:avLst/>
+          </a:prstGeom>
+          <a:noFill/>
+        </p:spPr>
+        <p:txBody>
+          <a:bodyPr wrap="square">
+            <a:spAutoFit/>
+          </a:bodyPr>
+          <a:lstStyle/>
+          <a:p>
+            <a:pPr algn="l"/>
+            <a:r>
+              <a:rPr sz="1600" b="1">
+                <a:solidFill>
+                  <a:srgbClr val="07182A"/>
+                </a:solidFill>
+                <a:latin typeface="Arial"/>
+              </a:rPr>
+              <a:t>План: Full MA + сертификация</a:t>
+            </a:r>
+          </a:p>
+        </p:txBody>
+      </p:sp>
+      <p:sp>
+        <p:nvSpPr>
+          <p:cNvPr id="19" name="TextBox 18"/>
           <p:cNvSpPr txBox="1"/>
           <p:nvPr/>
         </p:nvSpPr>
@@ -7608,9 +8261,9 @@
             <a:r>
               <a:rPr sz="1100" b="0">
                 <a:solidFill>
-                  <a:srgbClr val="5C6B72"/>
-                </a:solidFill>
-                <a:latin typeface="Calibri"/>
+                  <a:srgbClr val="9AAFBD"/>
+                </a:solidFill>
+                <a:latin typeface="Arial"/>
               </a:rPr>
               <a:t>IPMA Kyrgyz Republic  ·  ipma.kg</a:t>
             </a:r>
@@ -7619,14 +8272,14 @@
       </p:sp>
       <p:sp>
         <p:nvSpPr>
-          <p:cNvPr id="19" name="TextBox 18"/>
-          <p:cNvSpPr txBox="1"/>
-          <p:nvPr/>
-        </p:nvSpPr>
-        <p:spPr>
-          <a:xfrm>
-            <a:off x="10515600" y="6446520"/>
-            <a:ext cx="1280160" cy="274320"/>
+          <p:cNvPr id="20" name="TextBox 19"/>
+          <p:cNvSpPr txBox="1"/>
+          <p:nvPr/>
+        </p:nvSpPr>
+        <p:spPr>
+          <a:xfrm>
+            <a:off x="10424160" y="6446520"/>
+            <a:ext cx="1371600" cy="274320"/>
           </a:xfrm>
           <a:prstGeom prst="rect">
             <a:avLst/>
@@ -7643,9 +8296,9 @@
             <a:r>
               <a:rPr sz="1100" b="0">
                 <a:solidFill>
-                  <a:srgbClr val="5C6B72"/>
-                </a:solidFill>
-                <a:latin typeface="Calibri"/>
+                  <a:srgbClr val="9AAFBD"/>
+                </a:solidFill>
+                <a:latin typeface="Arial"/>
               </a:rPr>
               <a:t>06 / 12</a:t>
             </a:r>
@@ -7685,7 +8338,7 @@
             <a:avLst/>
           </a:prstGeom>
           <a:solidFill>
-            <a:srgbClr val="EEF2F1"/>
+            <a:srgbClr val="E8EEF2"/>
           </a:solidFill>
           <a:ln>
             <a:noFill/>
@@ -7713,9 +8366,52 @@
           </a:p>
         </p:txBody>
       </p:sp>
+      <p:sp>
+        <p:nvSpPr>
+          <p:cNvPr id="3" name="Rectangle 2"/>
+          <p:cNvSpPr/>
+          <p:nvPr/>
+        </p:nvSpPr>
+        <p:spPr>
+          <a:xfrm>
+            <a:off x="0" y="0"/>
+            <a:ext cx="12191695" cy="73152"/>
+          </a:xfrm>
+          <a:prstGeom prst="rect">
+            <a:avLst/>
+          </a:prstGeom>
+          <a:solidFill>
+            <a:srgbClr val="1F8F5F"/>
+          </a:solidFill>
+          <a:ln>
+            <a:noFill/>
+          </a:ln>
+        </p:spPr>
+        <p:style>
+          <a:lnRef idx="1">
+            <a:schemeClr val="accent1"/>
+          </a:lnRef>
+          <a:fillRef idx="3">
+            <a:schemeClr val="accent1"/>
+          </a:fillRef>
+          <a:effectRef idx="2">
+            <a:schemeClr val="accent1"/>
+          </a:effectRef>
+          <a:fontRef idx="minor">
+            <a:schemeClr val="lt1"/>
+          </a:fontRef>
+        </p:style>
+        <p:txBody>
+          <a:bodyPr rtlCol="0" anchor="ctr"/>
+          <a:lstStyle/>
+          <a:p>
+            <a:pPr algn="ctr"/>
+          </a:p>
+        </p:txBody>
+      </p:sp>
       <p:pic>
         <p:nvPicPr>
-          <p:cNvPr id="3" name="Picture 2" descr="ipma-kr-emblem.png"/>
+          <p:cNvPr id="4" name="Picture 3" descr="ipma-kr-emblem.png"/>
           <p:cNvPicPr>
             <a:picLocks noChangeAspect="1"/>
           </p:cNvPicPr>
@@ -7729,8 +8425,8 @@
         </p:blipFill>
         <p:spPr>
           <a:xfrm>
-            <a:off x="11292840" y="228600"/>
-            <a:ext cx="597448" cy="594360"/>
+            <a:off x="11338560" y="256032"/>
+            <a:ext cx="505533" cy="502920"/>
           </a:xfrm>
           <a:prstGeom prst="rect">
             <a:avLst/>
@@ -7739,14 +8435,14 @@
       </p:pic>
       <p:sp>
         <p:nvSpPr>
-          <p:cNvPr id="4" name="TextBox 3"/>
+          <p:cNvPr id="5" name="TextBox 4"/>
           <p:cNvSpPr txBox="1"/>
           <p:nvPr/>
         </p:nvSpPr>
         <p:spPr>
           <a:xfrm>
             <a:off x="548640" y="320040"/>
-            <a:ext cx="10972800" cy="274320"/>
+            <a:ext cx="10058400" cy="274320"/>
           </a:xfrm>
           <a:prstGeom prst="rect">
             <a:avLst/>
@@ -7763,9 +8459,9 @@
             <a:r>
               <a:rPr sz="1100" b="1">
                 <a:solidFill>
-                  <a:srgbClr val="1F7A34"/>
-                </a:solidFill>
-                <a:latin typeface="Calibri"/>
+                  <a:srgbClr val="1F8F5F"/>
+                </a:solidFill>
+                <a:latin typeface="Arial"/>
               </a:rPr>
               <a:t>07  »  СТРАТЕГИЯ</a:t>
             </a:r>
@@ -7774,161 +8470,607 @@
       </p:sp>
       <p:sp>
         <p:nvSpPr>
-          <p:cNvPr id="5" name="TextBox 4"/>
+          <p:cNvPr id="6" name="TextBox 5"/>
           <p:cNvSpPr txBox="1"/>
           <p:nvPr/>
         </p:nvSpPr>
         <p:spPr>
           <a:xfrm>
             <a:off x="548640" y="640080"/>
-            <a:ext cx="10515600" cy="548640"/>
-          </a:xfrm>
-          <a:prstGeom prst="rect">
-            <a:avLst/>
-          </a:prstGeom>
-          <a:noFill/>
-        </p:spPr>
-        <p:txBody>
-          <a:bodyPr wrap="square">
-            <a:spAutoFit/>
-          </a:bodyPr>
-          <a:lstStyle/>
-          <a:p>
-            <a:pPr algn="l"/>
-            <a:r>
-              <a:rPr sz="2800" b="1">
-                <a:solidFill>
-                  <a:srgbClr val="0D223B"/>
-                </a:solidFill>
-                <a:latin typeface="Arial"/>
-              </a:rPr>
-              <a:t>Стратегические цели</a:t>
-            </a:r>
-          </a:p>
-        </p:txBody>
-      </p:sp>
-      <p:sp>
-        <p:nvSpPr>
-          <p:cNvPr id="6" name="TextBox 5"/>
+            <a:ext cx="10058400" cy="640080"/>
+          </a:xfrm>
+          <a:prstGeom prst="rect">
+            <a:avLst/>
+          </a:prstGeom>
+          <a:noFill/>
+        </p:spPr>
+        <p:txBody>
+          <a:bodyPr wrap="square">
+            <a:spAutoFit/>
+          </a:bodyPr>
+          <a:lstStyle/>
+          <a:p>
+            <a:pPr algn="l"/>
+            <a:r>
+              <a:rPr sz="3200" b="1">
+                <a:solidFill>
+                  <a:srgbClr val="07182A"/>
+                </a:solidFill>
+                <a:latin typeface="Arial"/>
+              </a:rPr>
+              <a:t>Куда идём</a:t>
+            </a:r>
+          </a:p>
+        </p:txBody>
+      </p:sp>
+      <p:sp>
+        <p:nvSpPr>
+          <p:cNvPr id="7" name="Rectangle 6"/>
+          <p:cNvSpPr/>
+          <p:nvPr/>
+        </p:nvSpPr>
+        <p:spPr>
+          <a:xfrm>
+            <a:off x="548640" y="2103120"/>
+            <a:ext cx="10972800" cy="13716"/>
+          </a:xfrm>
+          <a:prstGeom prst="rect">
+            <a:avLst/>
+          </a:prstGeom>
+          <a:solidFill>
+            <a:srgbClr val="D0DCE3"/>
+          </a:solidFill>
+          <a:ln>
+            <a:noFill/>
+          </a:ln>
+        </p:spPr>
+        <p:style>
+          <a:lnRef idx="1">
+            <a:schemeClr val="accent1"/>
+          </a:lnRef>
+          <a:fillRef idx="3">
+            <a:schemeClr val="accent1"/>
+          </a:fillRef>
+          <a:effectRef idx="2">
+            <a:schemeClr val="accent1"/>
+          </a:effectRef>
+          <a:fontRef idx="minor">
+            <a:schemeClr val="lt1"/>
+          </a:fontRef>
+        </p:style>
+        <p:txBody>
+          <a:bodyPr rtlCol="0" anchor="ctr"/>
+          <a:lstStyle/>
+          <a:p>
+            <a:pPr algn="ctr"/>
+          </a:p>
+        </p:txBody>
+      </p:sp>
+      <p:sp>
+        <p:nvSpPr>
+          <p:cNvPr id="8" name="TextBox 7"/>
           <p:cNvSpPr txBox="1"/>
           <p:nvPr/>
         </p:nvSpPr>
         <p:spPr>
           <a:xfrm>
             <a:off x="548640" y="1417320"/>
-            <a:ext cx="10972800" cy="4572000"/>
-          </a:xfrm>
-          <a:prstGeom prst="rect">
-            <a:avLst/>
-          </a:prstGeom>
-          <a:noFill/>
-        </p:spPr>
-        <p:txBody>
-          <a:bodyPr wrap="square">
-            <a:spAutoFit/>
-          </a:bodyPr>
-          <a:lstStyle/>
-          <a:p>
-            <a:pPr>
-              <a:spcAft>
-                <a:spcPts val="1400"/>
-              </a:spcAft>
-            </a:pPr>
-            <a:r>
-              <a:rPr sz="1600" b="0">
-                <a:solidFill>
-                  <a:srgbClr val="28394A"/>
-                </a:solidFill>
-                <a:latin typeface="Calibri"/>
-              </a:rPr>
-              <a:t>» Перейти от Ассоциации-заявителя к Full Member Association</a:t>
-            </a:r>
-          </a:p>
-          <a:p>
-            <a:pPr>
-              <a:spcAft>
-                <a:spcPts val="1400"/>
-              </a:spcAft>
-            </a:pPr>
-            <a:r>
-              <a:rPr sz="1600" b="0">
-                <a:solidFill>
-                  <a:srgbClr val="28394A"/>
-                </a:solidFill>
-                <a:latin typeface="Calibri"/>
-              </a:rPr>
-              <a:t>» Создать независимый национальный CB по системе IPMA 4-L-C</a:t>
-            </a:r>
-          </a:p>
-          <a:p>
-            <a:pPr>
-              <a:spcAft>
-                <a:spcPts val="1400"/>
-              </a:spcAft>
-            </a:pPr>
-            <a:r>
-              <a:rPr sz="1600" b="0">
-                <a:solidFill>
-                  <a:srgbClr val="28394A"/>
-                </a:solidFill>
-                <a:latin typeface="Calibri"/>
-              </a:rPr>
-              <a:t>» Рост членской базы: индивидуальное, студенческое, корпоративное</a:t>
-            </a:r>
-          </a:p>
-          <a:p>
-            <a:pPr>
-              <a:spcAft>
-                <a:spcPts val="1400"/>
-              </a:spcAft>
-            </a:pPr>
-            <a:r>
-              <a:rPr sz="1600" b="0">
-                <a:solidFill>
-                  <a:srgbClr val="28394A"/>
-                </a:solidFill>
-                <a:latin typeface="Calibri"/>
-              </a:rPr>
-              <a:t>» Продвигать ICB4 / OCB / PEB в госсекторе и бизнесе</a:t>
-            </a:r>
-          </a:p>
-          <a:p>
-            <a:pPr>
-              <a:spcAft>
-                <a:spcPts val="1400"/>
-              </a:spcAft>
-            </a:pPr>
-            <a:r>
-              <a:rPr sz="1600" b="0">
-                <a:solidFill>
-                  <a:srgbClr val="28394A"/>
-                </a:solidFill>
-                <a:latin typeface="Calibri"/>
-              </a:rPr>
-              <a:t>» Партнёрства с вузами, госорганами и бизнес-сообществом</a:t>
-            </a:r>
-          </a:p>
-          <a:p>
-            <a:pPr>
-              <a:spcAft>
-                <a:spcPts val="1400"/>
-              </a:spcAft>
-            </a:pPr>
-            <a:r>
-              <a:rPr sz="1600" b="0">
-                <a:solidFill>
-                  <a:srgbClr val="28394A"/>
-                </a:solidFill>
-                <a:latin typeface="Calibri"/>
-              </a:rPr>
-              <a:t>» Сотрудничество с MA Центральной Азии и ЕАЭС · запуск Young Crew</a:t>
-            </a:r>
-          </a:p>
-        </p:txBody>
-      </p:sp>
-      <p:sp>
-        <p:nvSpPr>
-          <p:cNvPr id="7" name="TextBox 6"/>
+            <a:ext cx="640080" cy="365760"/>
+          </a:xfrm>
+          <a:prstGeom prst="rect">
+            <a:avLst/>
+          </a:prstGeom>
+          <a:noFill/>
+        </p:spPr>
+        <p:txBody>
+          <a:bodyPr wrap="square">
+            <a:spAutoFit/>
+          </a:bodyPr>
+          <a:lstStyle/>
+          <a:p>
+            <a:pPr algn="l"/>
+            <a:r>
+              <a:rPr sz="1400" b="1">
+                <a:solidFill>
+                  <a:srgbClr val="1F8F5F"/>
+                </a:solidFill>
+                <a:latin typeface="Arial"/>
+              </a:rPr>
+              <a:t>01</a:t>
+            </a:r>
+          </a:p>
+        </p:txBody>
+      </p:sp>
+      <p:sp>
+        <p:nvSpPr>
+          <p:cNvPr id="9" name="TextBox 8"/>
+          <p:cNvSpPr txBox="1"/>
+          <p:nvPr/>
+        </p:nvSpPr>
+        <p:spPr>
+          <a:xfrm>
+            <a:off x="1371600" y="1417320"/>
+            <a:ext cx="10058400" cy="457200"/>
+          </a:xfrm>
+          <a:prstGeom prst="rect">
+            <a:avLst/>
+          </a:prstGeom>
+          <a:noFill/>
+        </p:spPr>
+        <p:txBody>
+          <a:bodyPr wrap="square">
+            <a:spAutoFit/>
+          </a:bodyPr>
+          <a:lstStyle/>
+          <a:p>
+            <a:pPr algn="l"/>
+            <a:r>
+              <a:rPr sz="1500" b="0">
+                <a:solidFill>
+                  <a:srgbClr val="122433"/>
+                </a:solidFill>
+                <a:latin typeface="Arial"/>
+              </a:rPr>
+              <a:t>Перейти от Ассоциации-заявителя к Full Member Association</a:t>
+            </a:r>
+          </a:p>
+        </p:txBody>
+      </p:sp>
+      <p:sp>
+        <p:nvSpPr>
+          <p:cNvPr id="10" name="Rectangle 9"/>
+          <p:cNvSpPr/>
+          <p:nvPr/>
+        </p:nvSpPr>
+        <p:spPr>
+          <a:xfrm>
+            <a:off x="548640" y="2926080"/>
+            <a:ext cx="10972800" cy="13716"/>
+          </a:xfrm>
+          <a:prstGeom prst="rect">
+            <a:avLst/>
+          </a:prstGeom>
+          <a:solidFill>
+            <a:srgbClr val="D0DCE3"/>
+          </a:solidFill>
+          <a:ln>
+            <a:noFill/>
+          </a:ln>
+        </p:spPr>
+        <p:style>
+          <a:lnRef idx="1">
+            <a:schemeClr val="accent1"/>
+          </a:lnRef>
+          <a:fillRef idx="3">
+            <a:schemeClr val="accent1"/>
+          </a:fillRef>
+          <a:effectRef idx="2">
+            <a:schemeClr val="accent1"/>
+          </a:effectRef>
+          <a:fontRef idx="minor">
+            <a:schemeClr val="lt1"/>
+          </a:fontRef>
+        </p:style>
+        <p:txBody>
+          <a:bodyPr rtlCol="0" anchor="ctr"/>
+          <a:lstStyle/>
+          <a:p>
+            <a:pPr algn="ctr"/>
+          </a:p>
+        </p:txBody>
+      </p:sp>
+      <p:sp>
+        <p:nvSpPr>
+          <p:cNvPr id="11" name="TextBox 10"/>
+          <p:cNvSpPr txBox="1"/>
+          <p:nvPr/>
+        </p:nvSpPr>
+        <p:spPr>
+          <a:xfrm>
+            <a:off x="548640" y="2240280"/>
+            <a:ext cx="640080" cy="365760"/>
+          </a:xfrm>
+          <a:prstGeom prst="rect">
+            <a:avLst/>
+          </a:prstGeom>
+          <a:noFill/>
+        </p:spPr>
+        <p:txBody>
+          <a:bodyPr wrap="square">
+            <a:spAutoFit/>
+          </a:bodyPr>
+          <a:lstStyle/>
+          <a:p>
+            <a:pPr algn="l"/>
+            <a:r>
+              <a:rPr sz="1400" b="1">
+                <a:solidFill>
+                  <a:srgbClr val="1F8F5F"/>
+                </a:solidFill>
+                <a:latin typeface="Arial"/>
+              </a:rPr>
+              <a:t>02</a:t>
+            </a:r>
+          </a:p>
+        </p:txBody>
+      </p:sp>
+      <p:sp>
+        <p:nvSpPr>
+          <p:cNvPr id="12" name="TextBox 11"/>
+          <p:cNvSpPr txBox="1"/>
+          <p:nvPr/>
+        </p:nvSpPr>
+        <p:spPr>
+          <a:xfrm>
+            <a:off x="1371600" y="2240280"/>
+            <a:ext cx="10058400" cy="457200"/>
+          </a:xfrm>
+          <a:prstGeom prst="rect">
+            <a:avLst/>
+          </a:prstGeom>
+          <a:noFill/>
+        </p:spPr>
+        <p:txBody>
+          <a:bodyPr wrap="square">
+            <a:spAutoFit/>
+          </a:bodyPr>
+          <a:lstStyle/>
+          <a:p>
+            <a:pPr algn="l"/>
+            <a:r>
+              <a:rPr sz="1500" b="0">
+                <a:solidFill>
+                  <a:srgbClr val="122433"/>
+                </a:solidFill>
+                <a:latin typeface="Arial"/>
+              </a:rPr>
+              <a:t>Создать независимый национальный CB по системе IPMA 4-L-C</a:t>
+            </a:r>
+          </a:p>
+        </p:txBody>
+      </p:sp>
+      <p:sp>
+        <p:nvSpPr>
+          <p:cNvPr id="13" name="Rectangle 12"/>
+          <p:cNvSpPr/>
+          <p:nvPr/>
+        </p:nvSpPr>
+        <p:spPr>
+          <a:xfrm>
+            <a:off x="548640" y="3749040"/>
+            <a:ext cx="10972800" cy="13716"/>
+          </a:xfrm>
+          <a:prstGeom prst="rect">
+            <a:avLst/>
+          </a:prstGeom>
+          <a:solidFill>
+            <a:srgbClr val="D0DCE3"/>
+          </a:solidFill>
+          <a:ln>
+            <a:noFill/>
+          </a:ln>
+        </p:spPr>
+        <p:style>
+          <a:lnRef idx="1">
+            <a:schemeClr val="accent1"/>
+          </a:lnRef>
+          <a:fillRef idx="3">
+            <a:schemeClr val="accent1"/>
+          </a:fillRef>
+          <a:effectRef idx="2">
+            <a:schemeClr val="accent1"/>
+          </a:effectRef>
+          <a:fontRef idx="minor">
+            <a:schemeClr val="lt1"/>
+          </a:fontRef>
+        </p:style>
+        <p:txBody>
+          <a:bodyPr rtlCol="0" anchor="ctr"/>
+          <a:lstStyle/>
+          <a:p>
+            <a:pPr algn="ctr"/>
+          </a:p>
+        </p:txBody>
+      </p:sp>
+      <p:sp>
+        <p:nvSpPr>
+          <p:cNvPr id="14" name="TextBox 13"/>
+          <p:cNvSpPr txBox="1"/>
+          <p:nvPr/>
+        </p:nvSpPr>
+        <p:spPr>
+          <a:xfrm>
+            <a:off x="548640" y="3063240"/>
+            <a:ext cx="640080" cy="365760"/>
+          </a:xfrm>
+          <a:prstGeom prst="rect">
+            <a:avLst/>
+          </a:prstGeom>
+          <a:noFill/>
+        </p:spPr>
+        <p:txBody>
+          <a:bodyPr wrap="square">
+            <a:spAutoFit/>
+          </a:bodyPr>
+          <a:lstStyle/>
+          <a:p>
+            <a:pPr algn="l"/>
+            <a:r>
+              <a:rPr sz="1400" b="1">
+                <a:solidFill>
+                  <a:srgbClr val="1F8F5F"/>
+                </a:solidFill>
+                <a:latin typeface="Arial"/>
+              </a:rPr>
+              <a:t>03</a:t>
+            </a:r>
+          </a:p>
+        </p:txBody>
+      </p:sp>
+      <p:sp>
+        <p:nvSpPr>
+          <p:cNvPr id="15" name="TextBox 14"/>
+          <p:cNvSpPr txBox="1"/>
+          <p:nvPr/>
+        </p:nvSpPr>
+        <p:spPr>
+          <a:xfrm>
+            <a:off x="1371600" y="3063240"/>
+            <a:ext cx="10058400" cy="457200"/>
+          </a:xfrm>
+          <a:prstGeom prst="rect">
+            <a:avLst/>
+          </a:prstGeom>
+          <a:noFill/>
+        </p:spPr>
+        <p:txBody>
+          <a:bodyPr wrap="square">
+            <a:spAutoFit/>
+          </a:bodyPr>
+          <a:lstStyle/>
+          <a:p>
+            <a:pPr algn="l"/>
+            <a:r>
+              <a:rPr sz="1500" b="0">
+                <a:solidFill>
+                  <a:srgbClr val="122433"/>
+                </a:solidFill>
+                <a:latin typeface="Arial"/>
+              </a:rPr>
+              <a:t>Рост членской базы: индивидуальное, студенческое, корпоративное</a:t>
+            </a:r>
+          </a:p>
+        </p:txBody>
+      </p:sp>
+      <p:sp>
+        <p:nvSpPr>
+          <p:cNvPr id="16" name="Rectangle 15"/>
+          <p:cNvSpPr/>
+          <p:nvPr/>
+        </p:nvSpPr>
+        <p:spPr>
+          <a:xfrm>
+            <a:off x="548640" y="4572000"/>
+            <a:ext cx="10972800" cy="13716"/>
+          </a:xfrm>
+          <a:prstGeom prst="rect">
+            <a:avLst/>
+          </a:prstGeom>
+          <a:solidFill>
+            <a:srgbClr val="D0DCE3"/>
+          </a:solidFill>
+          <a:ln>
+            <a:noFill/>
+          </a:ln>
+        </p:spPr>
+        <p:style>
+          <a:lnRef idx="1">
+            <a:schemeClr val="accent1"/>
+          </a:lnRef>
+          <a:fillRef idx="3">
+            <a:schemeClr val="accent1"/>
+          </a:fillRef>
+          <a:effectRef idx="2">
+            <a:schemeClr val="accent1"/>
+          </a:effectRef>
+          <a:fontRef idx="minor">
+            <a:schemeClr val="lt1"/>
+          </a:fontRef>
+        </p:style>
+        <p:txBody>
+          <a:bodyPr rtlCol="0" anchor="ctr"/>
+          <a:lstStyle/>
+          <a:p>
+            <a:pPr algn="ctr"/>
+          </a:p>
+        </p:txBody>
+      </p:sp>
+      <p:sp>
+        <p:nvSpPr>
+          <p:cNvPr id="17" name="TextBox 16"/>
+          <p:cNvSpPr txBox="1"/>
+          <p:nvPr/>
+        </p:nvSpPr>
+        <p:spPr>
+          <a:xfrm>
+            <a:off x="548640" y="3886200"/>
+            <a:ext cx="640080" cy="365760"/>
+          </a:xfrm>
+          <a:prstGeom prst="rect">
+            <a:avLst/>
+          </a:prstGeom>
+          <a:noFill/>
+        </p:spPr>
+        <p:txBody>
+          <a:bodyPr wrap="square">
+            <a:spAutoFit/>
+          </a:bodyPr>
+          <a:lstStyle/>
+          <a:p>
+            <a:pPr algn="l"/>
+            <a:r>
+              <a:rPr sz="1400" b="1">
+                <a:solidFill>
+                  <a:srgbClr val="1F8F5F"/>
+                </a:solidFill>
+                <a:latin typeface="Arial"/>
+              </a:rPr>
+              <a:t>04</a:t>
+            </a:r>
+          </a:p>
+        </p:txBody>
+      </p:sp>
+      <p:sp>
+        <p:nvSpPr>
+          <p:cNvPr id="18" name="TextBox 17"/>
+          <p:cNvSpPr txBox="1"/>
+          <p:nvPr/>
+        </p:nvSpPr>
+        <p:spPr>
+          <a:xfrm>
+            <a:off x="1371600" y="3886200"/>
+            <a:ext cx="10058400" cy="457200"/>
+          </a:xfrm>
+          <a:prstGeom prst="rect">
+            <a:avLst/>
+          </a:prstGeom>
+          <a:noFill/>
+        </p:spPr>
+        <p:txBody>
+          <a:bodyPr wrap="square">
+            <a:spAutoFit/>
+          </a:bodyPr>
+          <a:lstStyle/>
+          <a:p>
+            <a:pPr algn="l"/>
+            <a:r>
+              <a:rPr sz="1500" b="0">
+                <a:solidFill>
+                  <a:srgbClr val="122433"/>
+                </a:solidFill>
+                <a:latin typeface="Arial"/>
+              </a:rPr>
+              <a:t>Продвигать ICB4 / OCB / PEB в госсекторе и бизнесе</a:t>
+            </a:r>
+          </a:p>
+        </p:txBody>
+      </p:sp>
+      <p:sp>
+        <p:nvSpPr>
+          <p:cNvPr id="19" name="Rectangle 18"/>
+          <p:cNvSpPr/>
+          <p:nvPr/>
+        </p:nvSpPr>
+        <p:spPr>
+          <a:xfrm>
+            <a:off x="548640" y="5394960"/>
+            <a:ext cx="10972800" cy="13716"/>
+          </a:xfrm>
+          <a:prstGeom prst="rect">
+            <a:avLst/>
+          </a:prstGeom>
+          <a:solidFill>
+            <a:srgbClr val="D0DCE3"/>
+          </a:solidFill>
+          <a:ln>
+            <a:noFill/>
+          </a:ln>
+        </p:spPr>
+        <p:style>
+          <a:lnRef idx="1">
+            <a:schemeClr val="accent1"/>
+          </a:lnRef>
+          <a:fillRef idx="3">
+            <a:schemeClr val="accent1"/>
+          </a:fillRef>
+          <a:effectRef idx="2">
+            <a:schemeClr val="accent1"/>
+          </a:effectRef>
+          <a:fontRef idx="minor">
+            <a:schemeClr val="lt1"/>
+          </a:fontRef>
+        </p:style>
+        <p:txBody>
+          <a:bodyPr rtlCol="0" anchor="ctr"/>
+          <a:lstStyle/>
+          <a:p>
+            <a:pPr algn="ctr"/>
+          </a:p>
+        </p:txBody>
+      </p:sp>
+      <p:sp>
+        <p:nvSpPr>
+          <p:cNvPr id="20" name="TextBox 19"/>
+          <p:cNvSpPr txBox="1"/>
+          <p:nvPr/>
+        </p:nvSpPr>
+        <p:spPr>
+          <a:xfrm>
+            <a:off x="548640" y="4709160"/>
+            <a:ext cx="640080" cy="365760"/>
+          </a:xfrm>
+          <a:prstGeom prst="rect">
+            <a:avLst/>
+          </a:prstGeom>
+          <a:noFill/>
+        </p:spPr>
+        <p:txBody>
+          <a:bodyPr wrap="square">
+            <a:spAutoFit/>
+          </a:bodyPr>
+          <a:lstStyle/>
+          <a:p>
+            <a:pPr algn="l"/>
+            <a:r>
+              <a:rPr sz="1400" b="1">
+                <a:solidFill>
+                  <a:srgbClr val="1F8F5F"/>
+                </a:solidFill>
+                <a:latin typeface="Arial"/>
+              </a:rPr>
+              <a:t>05</a:t>
+            </a:r>
+          </a:p>
+        </p:txBody>
+      </p:sp>
+      <p:sp>
+        <p:nvSpPr>
+          <p:cNvPr id="21" name="TextBox 20"/>
+          <p:cNvSpPr txBox="1"/>
+          <p:nvPr/>
+        </p:nvSpPr>
+        <p:spPr>
+          <a:xfrm>
+            <a:off x="1371600" y="4709160"/>
+            <a:ext cx="10058400" cy="457200"/>
+          </a:xfrm>
+          <a:prstGeom prst="rect">
+            <a:avLst/>
+          </a:prstGeom>
+          <a:noFill/>
+        </p:spPr>
+        <p:txBody>
+          <a:bodyPr wrap="square">
+            <a:spAutoFit/>
+          </a:bodyPr>
+          <a:lstStyle/>
+          <a:p>
+            <a:pPr algn="l"/>
+            <a:r>
+              <a:rPr sz="1500" b="0">
+                <a:solidFill>
+                  <a:srgbClr val="122433"/>
+                </a:solidFill>
+                <a:latin typeface="Arial"/>
+              </a:rPr>
+              <a:t>Партнёрства с вузами, госорганами, MA региона и Young Crew</a:t>
+            </a:r>
+          </a:p>
+        </p:txBody>
+      </p:sp>
+      <p:sp>
+        <p:nvSpPr>
+          <p:cNvPr id="22" name="TextBox 21"/>
           <p:cNvSpPr txBox="1"/>
           <p:nvPr/>
         </p:nvSpPr>
@@ -7952,9 +9094,9 @@
             <a:r>
               <a:rPr sz="1100" b="0">
                 <a:solidFill>
-                  <a:srgbClr val="5C6B72"/>
-                </a:solidFill>
-                <a:latin typeface="Calibri"/>
+                  <a:srgbClr val="9AAFBD"/>
+                </a:solidFill>
+                <a:latin typeface="Arial"/>
               </a:rPr>
               <a:t>IPMA Kyrgyz Republic  ·  ipma.kg</a:t>
             </a:r>
@@ -7963,14 +9105,14 @@
       </p:sp>
       <p:sp>
         <p:nvSpPr>
-          <p:cNvPr id="8" name="TextBox 7"/>
-          <p:cNvSpPr txBox="1"/>
-          <p:nvPr/>
-        </p:nvSpPr>
-        <p:spPr>
-          <a:xfrm>
-            <a:off x="10515600" y="6446520"/>
-            <a:ext cx="1280160" cy="274320"/>
+          <p:cNvPr id="23" name="TextBox 22"/>
+          <p:cNvSpPr txBox="1"/>
+          <p:nvPr/>
+        </p:nvSpPr>
+        <p:spPr>
+          <a:xfrm>
+            <a:off x="10424160" y="6446520"/>
+            <a:ext cx="1371600" cy="274320"/>
           </a:xfrm>
           <a:prstGeom prst="rect">
             <a:avLst/>
@@ -7987,9 +9129,9 @@
             <a:r>
               <a:rPr sz="1100" b="0">
                 <a:solidFill>
-                  <a:srgbClr val="5C6B72"/>
-                </a:solidFill>
-                <a:latin typeface="Calibri"/>
+                  <a:srgbClr val="9AAFBD"/>
+                </a:solidFill>
+                <a:latin typeface="Arial"/>
               </a:rPr>
               <a:t>07 / 12</a:t>
             </a:r>
@@ -8029,7 +9171,7 @@
             <a:avLst/>
           </a:prstGeom>
           <a:solidFill>
-            <a:srgbClr val="EEF2F1"/>
+            <a:srgbClr val="E8EEF2"/>
           </a:solidFill>
           <a:ln>
             <a:noFill/>
@@ -8057,9 +9199,52 @@
           </a:p>
         </p:txBody>
       </p:sp>
+      <p:sp>
+        <p:nvSpPr>
+          <p:cNvPr id="3" name="Rectangle 2"/>
+          <p:cNvSpPr/>
+          <p:nvPr/>
+        </p:nvSpPr>
+        <p:spPr>
+          <a:xfrm>
+            <a:off x="0" y="0"/>
+            <a:ext cx="12191695" cy="73152"/>
+          </a:xfrm>
+          <a:prstGeom prst="rect">
+            <a:avLst/>
+          </a:prstGeom>
+          <a:solidFill>
+            <a:srgbClr val="1F8F5F"/>
+          </a:solidFill>
+          <a:ln>
+            <a:noFill/>
+          </a:ln>
+        </p:spPr>
+        <p:style>
+          <a:lnRef idx="1">
+            <a:schemeClr val="accent1"/>
+          </a:lnRef>
+          <a:fillRef idx="3">
+            <a:schemeClr val="accent1"/>
+          </a:fillRef>
+          <a:effectRef idx="2">
+            <a:schemeClr val="accent1"/>
+          </a:effectRef>
+          <a:fontRef idx="minor">
+            <a:schemeClr val="lt1"/>
+          </a:fontRef>
+        </p:style>
+        <p:txBody>
+          <a:bodyPr rtlCol="0" anchor="ctr"/>
+          <a:lstStyle/>
+          <a:p>
+            <a:pPr algn="ctr"/>
+          </a:p>
+        </p:txBody>
+      </p:sp>
       <p:pic>
         <p:nvPicPr>
-          <p:cNvPr id="3" name="Picture 2" descr="ipma-kr-emblem.png"/>
+          <p:cNvPr id="4" name="Picture 3" descr="ipma-kr-emblem.png"/>
           <p:cNvPicPr>
             <a:picLocks noChangeAspect="1"/>
           </p:cNvPicPr>
@@ -8073,8 +9258,8 @@
         </p:blipFill>
         <p:spPr>
           <a:xfrm>
-            <a:off x="11292840" y="228600"/>
-            <a:ext cx="597448" cy="594360"/>
+            <a:off x="11338560" y="256032"/>
+            <a:ext cx="505533" cy="502920"/>
           </a:xfrm>
           <a:prstGeom prst="rect">
             <a:avLst/>
@@ -8083,14 +9268,14 @@
       </p:pic>
       <p:sp>
         <p:nvSpPr>
-          <p:cNvPr id="4" name="TextBox 3"/>
+          <p:cNvPr id="5" name="TextBox 4"/>
           <p:cNvSpPr txBox="1"/>
           <p:nvPr/>
         </p:nvSpPr>
         <p:spPr>
           <a:xfrm>
             <a:off x="548640" y="320040"/>
-            <a:ext cx="10972800" cy="274320"/>
+            <a:ext cx="10058400" cy="274320"/>
           </a:xfrm>
           <a:prstGeom prst="rect">
             <a:avLst/>
@@ -8107,9 +9292,9 @@
             <a:r>
               <a:rPr sz="1100" b="1">
                 <a:solidFill>
-                  <a:srgbClr val="1F7A34"/>
-                </a:solidFill>
-                <a:latin typeface="Calibri"/>
+                  <a:srgbClr val="1F8F5F"/>
+                </a:solidFill>
+                <a:latin typeface="Arial"/>
               </a:rPr>
               <a:t>08  »  СЕРТИФИКАЦИЯ</a:t>
             </a:r>
@@ -8118,49 +9303,49 @@
       </p:sp>
       <p:sp>
         <p:nvSpPr>
-          <p:cNvPr id="5" name="TextBox 4"/>
+          <p:cNvPr id="6" name="TextBox 5"/>
           <p:cNvSpPr txBox="1"/>
           <p:nvPr/>
         </p:nvSpPr>
         <p:spPr>
           <a:xfrm>
             <a:off x="548640" y="640080"/>
-            <a:ext cx="10515600" cy="548640"/>
-          </a:xfrm>
-          <a:prstGeom prst="rect">
-            <a:avLst/>
-          </a:prstGeom>
-          <a:noFill/>
-        </p:spPr>
-        <p:txBody>
-          <a:bodyPr wrap="square">
-            <a:spAutoFit/>
-          </a:bodyPr>
-          <a:lstStyle/>
-          <a:p>
-            <a:pPr algn="l"/>
-            <a:r>
-              <a:rPr sz="2800" b="1">
-                <a:solidFill>
-                  <a:srgbClr val="0D223B"/>
-                </a:solidFill>
-                <a:latin typeface="Arial"/>
-              </a:rPr>
-              <a:t>Certification Body · уровни IPMA</a:t>
-            </a:r>
-          </a:p>
-        </p:txBody>
-      </p:sp>
-      <p:sp>
-        <p:nvSpPr>
-          <p:cNvPr id="6" name="TextBox 5"/>
+            <a:ext cx="10058400" cy="640080"/>
+          </a:xfrm>
+          <a:prstGeom prst="rect">
+            <a:avLst/>
+          </a:prstGeom>
+          <a:noFill/>
+        </p:spPr>
+        <p:txBody>
+          <a:bodyPr wrap="square">
+            <a:spAutoFit/>
+          </a:bodyPr>
+          <a:lstStyle/>
+          <a:p>
+            <a:pPr algn="l"/>
+            <a:r>
+              <a:rPr sz="3200" b="1">
+                <a:solidFill>
+                  <a:srgbClr val="07182A"/>
+                </a:solidFill>
+                <a:latin typeface="Arial"/>
+              </a:rPr>
+              <a:t>Уровни IPMA</a:t>
+            </a:r>
+          </a:p>
+        </p:txBody>
+      </p:sp>
+      <p:sp>
+        <p:nvSpPr>
+          <p:cNvPr id="7" name="TextBox 6"/>
           <p:cNvSpPr txBox="1"/>
           <p:nvPr/>
         </p:nvSpPr>
         <p:spPr>
           <a:xfrm>
             <a:off x="548640" y="1325880"/>
-            <a:ext cx="10972800" cy="457200"/>
+            <a:ext cx="10972800" cy="365760"/>
           </a:xfrm>
           <a:prstGeom prst="rect">
             <a:avLst/>
@@ -8177,55 +9362,12 @@
             <a:r>
               <a:rPr sz="1400" b="0">
                 <a:solidFill>
-                  <a:srgbClr val="5C6B72"/>
-                </a:solidFill>
-                <a:latin typeface="Calibri"/>
-              </a:rPr>
-              <a:t>Независимый CB по 4-L-C. Оценка по ICB4: самооценка, экзамен, интервью.</a:t>
-            </a:r>
-          </a:p>
-        </p:txBody>
-      </p:sp>
-      <p:sp>
-        <p:nvSpPr>
-          <p:cNvPr id="7" name="Rounded Rectangle 6"/>
-          <p:cNvSpPr/>
-          <p:nvPr/>
-        </p:nvSpPr>
-        <p:spPr>
-          <a:xfrm>
-            <a:off x="548640" y="2011680"/>
-            <a:ext cx="2743200" cy="3200400"/>
-          </a:xfrm>
-          <a:prstGeom prst="roundRect">
-            <a:avLst/>
-          </a:prstGeom>
-          <a:solidFill>
-            <a:srgbClr val="FFFFFF"/>
-          </a:solidFill>
-          <a:ln>
-            <a:noFill/>
-          </a:ln>
-        </p:spPr>
-        <p:style>
-          <a:lnRef idx="1">
-            <a:schemeClr val="accent1"/>
-          </a:lnRef>
-          <a:fillRef idx="3">
-            <a:schemeClr val="accent1"/>
-          </a:fillRef>
-          <a:effectRef idx="2">
-            <a:schemeClr val="accent1"/>
-          </a:effectRef>
-          <a:fontRef idx="minor">
-            <a:schemeClr val="lt1"/>
-          </a:fontRef>
-        </p:style>
-        <p:txBody>
-          <a:bodyPr rtlCol="0" anchor="ctr"/>
-          <a:lstStyle/>
-          <a:p>
-            <a:pPr algn="ctr"/>
+                  <a:srgbClr val="3D5566"/>
+                </a:solidFill>
+                <a:latin typeface="Arial"/>
+              </a:rPr>
+              <a:t>Независимый CB · оценка по ICB4 · самооценка, экзамен, интервью</a:t>
+            </a:r>
           </a:p>
         </p:txBody>
       </p:sp>
@@ -8237,27 +9379,27 @@
         </p:nvSpPr>
         <p:spPr>
           <a:xfrm>
-            <a:off x="731520" y="2468880"/>
-            <a:ext cx="2377440" cy="548640"/>
-          </a:xfrm>
-          <a:prstGeom prst="rect">
-            <a:avLst/>
-          </a:prstGeom>
-          <a:noFill/>
-        </p:spPr>
-        <p:txBody>
-          <a:bodyPr wrap="square">
-            <a:spAutoFit/>
-          </a:bodyPr>
-          <a:lstStyle/>
-          <a:p>
-            <a:pPr algn="ctr"/>
-            <a:r>
-              <a:rPr sz="3600" b="1">
-                <a:solidFill>
-                  <a:srgbClr val="2F9E44"/>
-                </a:solidFill>
-                <a:latin typeface="Calibri"/>
+            <a:off x="548640" y="2194560"/>
+            <a:ext cx="2651760" cy="914400"/>
+          </a:xfrm>
+          <a:prstGeom prst="rect">
+            <a:avLst/>
+          </a:prstGeom>
+          <a:noFill/>
+        </p:spPr>
+        <p:txBody>
+          <a:bodyPr wrap="square">
+            <a:spAutoFit/>
+          </a:bodyPr>
+          <a:lstStyle/>
+          <a:p>
+            <a:pPr algn="l"/>
+            <a:r>
+              <a:rPr sz="5600" b="1">
+                <a:solidFill>
+                  <a:srgbClr val="1F8F5F"/>
+                </a:solidFill>
+                <a:latin typeface="Arial"/>
               </a:rPr>
               <a:t>A</a:t>
             </a:r>
@@ -8272,27 +9414,27 @@
         </p:nvSpPr>
         <p:spPr>
           <a:xfrm>
-            <a:off x="731520" y="3291840"/>
-            <a:ext cx="2377440" cy="731520"/>
-          </a:xfrm>
-          <a:prstGeom prst="rect">
-            <a:avLst/>
-          </a:prstGeom>
-          <a:noFill/>
-        </p:spPr>
-        <p:txBody>
-          <a:bodyPr wrap="square">
-            <a:spAutoFit/>
-          </a:bodyPr>
-          <a:lstStyle/>
-          <a:p>
-            <a:pPr algn="ctr"/>
-            <a:r>
-              <a:rPr sz="1400" b="1">
-                <a:solidFill>
-                  <a:srgbClr val="0D223B"/>
-                </a:solidFill>
-                <a:latin typeface="Calibri"/>
+            <a:off x="548640" y="3383280"/>
+            <a:ext cx="2651760" cy="548640"/>
+          </a:xfrm>
+          <a:prstGeom prst="rect">
+            <a:avLst/>
+          </a:prstGeom>
+          <a:noFill/>
+        </p:spPr>
+        <p:txBody>
+          <a:bodyPr wrap="square">
+            <a:spAutoFit/>
+          </a:bodyPr>
+          <a:lstStyle/>
+          <a:p>
+            <a:pPr algn="l"/>
+            <a:r>
+              <a:rPr sz="1300" b="1">
+                <a:solidFill>
+                  <a:srgbClr val="07182A"/>
+                </a:solidFill>
+                <a:latin typeface="Arial"/>
               </a:rPr>
               <a:t>Projects Director</a:t>
             </a:r>
@@ -8307,27 +9449,27 @@
         </p:nvSpPr>
         <p:spPr>
           <a:xfrm>
-            <a:off x="731520" y="4114800"/>
-            <a:ext cx="2377440" cy="457200"/>
-          </a:xfrm>
-          <a:prstGeom prst="rect">
-            <a:avLst/>
-          </a:prstGeom>
-          <a:noFill/>
-        </p:spPr>
-        <p:txBody>
-          <a:bodyPr wrap="square">
-            <a:spAutoFit/>
-          </a:bodyPr>
-          <a:lstStyle/>
-          <a:p>
-            <a:pPr algn="ctr"/>
+            <a:off x="548640" y="4023360"/>
+            <a:ext cx="2651760" cy="365760"/>
+          </a:xfrm>
+          <a:prstGeom prst="rect">
+            <a:avLst/>
+          </a:prstGeom>
+          <a:noFill/>
+        </p:spPr>
+        <p:txBody>
+          <a:bodyPr wrap="square">
+            <a:spAutoFit/>
+          </a:bodyPr>
+          <a:lstStyle/>
+          <a:p>
+            <a:pPr algn="l"/>
             <a:r>
               <a:rPr sz="1200" b="0">
                 <a:solidFill>
-                  <a:srgbClr val="5C6B72"/>
-                </a:solidFill>
-                <a:latin typeface="Calibri"/>
+                  <a:srgbClr val="3D5566"/>
+                </a:solidFill>
+                <a:latin typeface="Arial"/>
               </a:rPr>
               <a:t>Портфели</a:t>
             </a:r>
@@ -8336,44 +9478,36 @@
       </p:sp>
       <p:sp>
         <p:nvSpPr>
-          <p:cNvPr id="11" name="Rounded Rectangle 10"/>
-          <p:cNvSpPr/>
-          <p:nvPr/>
-        </p:nvSpPr>
-        <p:spPr>
-          <a:xfrm>
-            <a:off x="3429000" y="2011680"/>
-            <a:ext cx="2743200" cy="3200400"/>
-          </a:xfrm>
-          <a:prstGeom prst="roundRect">
-            <a:avLst/>
-          </a:prstGeom>
-          <a:solidFill>
-            <a:srgbClr val="FFFFFF"/>
-          </a:solidFill>
-          <a:ln>
-            <a:noFill/>
-          </a:ln>
-        </p:spPr>
-        <p:style>
-          <a:lnRef idx="1">
-            <a:schemeClr val="accent1"/>
-          </a:lnRef>
-          <a:fillRef idx="3">
-            <a:schemeClr val="accent1"/>
-          </a:fillRef>
-          <a:effectRef idx="2">
-            <a:schemeClr val="accent1"/>
-          </a:effectRef>
-          <a:fontRef idx="minor">
-            <a:schemeClr val="lt1"/>
-          </a:fontRef>
-        </p:style>
-        <p:txBody>
-          <a:bodyPr rtlCol="0" anchor="ctr"/>
-          <a:lstStyle/>
-          <a:p>
-            <a:pPr algn="ctr"/>
+          <p:cNvPr id="11" name="TextBox 10"/>
+          <p:cNvSpPr txBox="1"/>
+          <p:nvPr/>
+        </p:nvSpPr>
+        <p:spPr>
+          <a:xfrm>
+            <a:off x="3429000" y="2194560"/>
+            <a:ext cx="2651760" cy="914400"/>
+          </a:xfrm>
+          <a:prstGeom prst="rect">
+            <a:avLst/>
+          </a:prstGeom>
+          <a:noFill/>
+        </p:spPr>
+        <p:txBody>
+          <a:bodyPr wrap="square">
+            <a:spAutoFit/>
+          </a:bodyPr>
+          <a:lstStyle/>
+          <a:p>
+            <a:pPr algn="l"/>
+            <a:r>
+              <a:rPr sz="5600" b="1">
+                <a:solidFill>
+                  <a:srgbClr val="1F8F5F"/>
+                </a:solidFill>
+                <a:latin typeface="Arial"/>
+              </a:rPr>
+              <a:t>B</a:t>
+            </a:r>
           </a:p>
         </p:txBody>
       </p:sp>
@@ -8385,29 +9519,29 @@
         </p:nvSpPr>
         <p:spPr>
           <a:xfrm>
-            <a:off x="3611880" y="2468880"/>
-            <a:ext cx="2377440" cy="548640"/>
-          </a:xfrm>
-          <a:prstGeom prst="rect">
-            <a:avLst/>
-          </a:prstGeom>
-          <a:noFill/>
-        </p:spPr>
-        <p:txBody>
-          <a:bodyPr wrap="square">
-            <a:spAutoFit/>
-          </a:bodyPr>
-          <a:lstStyle/>
-          <a:p>
-            <a:pPr algn="ctr"/>
-            <a:r>
-              <a:rPr sz="3600" b="1">
-                <a:solidFill>
-                  <a:srgbClr val="2F9E44"/>
-                </a:solidFill>
-                <a:latin typeface="Calibri"/>
-              </a:rPr>
-              <a:t>B</a:t>
+            <a:off x="3429000" y="3383280"/>
+            <a:ext cx="2651760" cy="548640"/>
+          </a:xfrm>
+          <a:prstGeom prst="rect">
+            <a:avLst/>
+          </a:prstGeom>
+          <a:noFill/>
+        </p:spPr>
+        <p:txBody>
+          <a:bodyPr wrap="square">
+            <a:spAutoFit/>
+          </a:bodyPr>
+          <a:lstStyle/>
+          <a:p>
+            <a:pPr algn="l"/>
+            <a:r>
+              <a:rPr sz="1300" b="1">
+                <a:solidFill>
+                  <a:srgbClr val="07182A"/>
+                </a:solidFill>
+                <a:latin typeface="Arial"/>
+              </a:rPr>
+              <a:t>Senior Project Manager</a:t>
             </a:r>
           </a:p>
         </p:txBody>
@@ -8420,29 +9554,29 @@
         </p:nvSpPr>
         <p:spPr>
           <a:xfrm>
-            <a:off x="3611880" y="3291840"/>
-            <a:ext cx="2377440" cy="731520"/>
-          </a:xfrm>
-          <a:prstGeom prst="rect">
-            <a:avLst/>
-          </a:prstGeom>
-          <a:noFill/>
-        </p:spPr>
-        <p:txBody>
-          <a:bodyPr wrap="square">
-            <a:spAutoFit/>
-          </a:bodyPr>
-          <a:lstStyle/>
-          <a:p>
-            <a:pPr algn="ctr"/>
-            <a:r>
-              <a:rPr sz="1400" b="1">
-                <a:solidFill>
-                  <a:srgbClr val="0D223B"/>
-                </a:solidFill>
-                <a:latin typeface="Calibri"/>
-              </a:rPr>
-              <a:t>Senior PM</a:t>
+            <a:off x="3429000" y="4023360"/>
+            <a:ext cx="2651760" cy="365760"/>
+          </a:xfrm>
+          <a:prstGeom prst="rect">
+            <a:avLst/>
+          </a:prstGeom>
+          <a:noFill/>
+        </p:spPr>
+        <p:txBody>
+          <a:bodyPr wrap="square">
+            <a:spAutoFit/>
+          </a:bodyPr>
+          <a:lstStyle/>
+          <a:p>
+            <a:pPr algn="l"/>
+            <a:r>
+              <a:rPr sz="1200" b="0">
+                <a:solidFill>
+                  <a:srgbClr val="3D5566"/>
+                </a:solidFill>
+                <a:latin typeface="Arial"/>
+              </a:rPr>
+              <a:t>Сложные проекты</a:t>
             </a:r>
           </a:p>
         </p:txBody>
@@ -8455,107 +9589,99 @@
         </p:nvSpPr>
         <p:spPr>
           <a:xfrm>
-            <a:off x="3611880" y="4114800"/>
-            <a:ext cx="2377440" cy="457200"/>
-          </a:xfrm>
-          <a:prstGeom prst="rect">
-            <a:avLst/>
-          </a:prstGeom>
-          <a:noFill/>
-        </p:spPr>
-        <p:txBody>
-          <a:bodyPr wrap="square">
-            <a:spAutoFit/>
-          </a:bodyPr>
-          <a:lstStyle/>
-          <a:p>
-            <a:pPr algn="ctr"/>
+            <a:off x="6309359" y="2194560"/>
+            <a:ext cx="2651760" cy="914400"/>
+          </a:xfrm>
+          <a:prstGeom prst="rect">
+            <a:avLst/>
+          </a:prstGeom>
+          <a:noFill/>
+        </p:spPr>
+        <p:txBody>
+          <a:bodyPr wrap="square">
+            <a:spAutoFit/>
+          </a:bodyPr>
+          <a:lstStyle/>
+          <a:p>
+            <a:pPr algn="l"/>
+            <a:r>
+              <a:rPr sz="5600" b="1">
+                <a:solidFill>
+                  <a:srgbClr val="1F8F5F"/>
+                </a:solidFill>
+                <a:latin typeface="Arial"/>
+              </a:rPr>
+              <a:t>C</a:t>
+            </a:r>
+          </a:p>
+        </p:txBody>
+      </p:sp>
+      <p:sp>
+        <p:nvSpPr>
+          <p:cNvPr id="15" name="TextBox 14"/>
+          <p:cNvSpPr txBox="1"/>
+          <p:nvPr/>
+        </p:nvSpPr>
+        <p:spPr>
+          <a:xfrm>
+            <a:off x="6309359" y="3383280"/>
+            <a:ext cx="2651760" cy="548640"/>
+          </a:xfrm>
+          <a:prstGeom prst="rect">
+            <a:avLst/>
+          </a:prstGeom>
+          <a:noFill/>
+        </p:spPr>
+        <p:txBody>
+          <a:bodyPr wrap="square">
+            <a:spAutoFit/>
+          </a:bodyPr>
+          <a:lstStyle/>
+          <a:p>
+            <a:pPr algn="l"/>
+            <a:r>
+              <a:rPr sz="1300" b="1">
+                <a:solidFill>
+                  <a:srgbClr val="07182A"/>
+                </a:solidFill>
+                <a:latin typeface="Arial"/>
+              </a:rPr>
+              <a:t>Project Manager</a:t>
+            </a:r>
+          </a:p>
+        </p:txBody>
+      </p:sp>
+      <p:sp>
+        <p:nvSpPr>
+          <p:cNvPr id="16" name="TextBox 15"/>
+          <p:cNvSpPr txBox="1"/>
+          <p:nvPr/>
+        </p:nvSpPr>
+        <p:spPr>
+          <a:xfrm>
+            <a:off x="6309359" y="4023360"/>
+            <a:ext cx="2651760" cy="365760"/>
+          </a:xfrm>
+          <a:prstGeom prst="rect">
+            <a:avLst/>
+          </a:prstGeom>
+          <a:noFill/>
+        </p:spPr>
+        <p:txBody>
+          <a:bodyPr wrap="square">
+            <a:spAutoFit/>
+          </a:bodyPr>
+          <a:lstStyle/>
+          <a:p>
+            <a:pPr algn="l"/>
             <a:r>
               <a:rPr sz="1200" b="0">
                 <a:solidFill>
-                  <a:srgbClr val="5C6B72"/>
-                </a:solidFill>
-                <a:latin typeface="Calibri"/>
-              </a:rPr>
-              <a:t>Сложные проекты</a:t>
-            </a:r>
-          </a:p>
-        </p:txBody>
-      </p:sp>
-      <p:sp>
-        <p:nvSpPr>
-          <p:cNvPr id="15" name="Rounded Rectangle 14"/>
-          <p:cNvSpPr/>
-          <p:nvPr/>
-        </p:nvSpPr>
-        <p:spPr>
-          <a:xfrm>
-            <a:off x="6309359" y="2011680"/>
-            <a:ext cx="2743200" cy="3200400"/>
-          </a:xfrm>
-          <a:prstGeom prst="roundRect">
-            <a:avLst/>
-          </a:prstGeom>
-          <a:solidFill>
-            <a:srgbClr val="FFFFFF"/>
-          </a:solidFill>
-          <a:ln>
-            <a:noFill/>
-          </a:ln>
-        </p:spPr>
-        <p:style>
-          <a:lnRef idx="1">
-            <a:schemeClr val="accent1"/>
-          </a:lnRef>
-          <a:fillRef idx="3">
-            <a:schemeClr val="accent1"/>
-          </a:fillRef>
-          <a:effectRef idx="2">
-            <a:schemeClr val="accent1"/>
-          </a:effectRef>
-          <a:fontRef idx="minor">
-            <a:schemeClr val="lt1"/>
-          </a:fontRef>
-        </p:style>
-        <p:txBody>
-          <a:bodyPr rtlCol="0" anchor="ctr"/>
-          <a:lstStyle/>
-          <a:p>
-            <a:pPr algn="ctr"/>
-          </a:p>
-        </p:txBody>
-      </p:sp>
-      <p:sp>
-        <p:nvSpPr>
-          <p:cNvPr id="16" name="TextBox 15"/>
-          <p:cNvSpPr txBox="1"/>
-          <p:nvPr/>
-        </p:nvSpPr>
-        <p:spPr>
-          <a:xfrm>
-            <a:off x="6492239" y="2468880"/>
-            <a:ext cx="2377440" cy="548640"/>
-          </a:xfrm>
-          <a:prstGeom prst="rect">
-            <a:avLst/>
-          </a:prstGeom>
-          <a:noFill/>
-        </p:spPr>
-        <p:txBody>
-          <a:bodyPr wrap="square">
-            <a:spAutoFit/>
-          </a:bodyPr>
-          <a:lstStyle/>
-          <a:p>
-            <a:pPr algn="ctr"/>
-            <a:r>
-              <a:rPr sz="3600" b="1">
-                <a:solidFill>
-                  <a:srgbClr val="2F9E44"/>
-                </a:solidFill>
-                <a:latin typeface="Calibri"/>
-              </a:rPr>
-              <a:t>C</a:t>
+                  <a:srgbClr val="3D5566"/>
+                </a:solidFill>
+                <a:latin typeface="Arial"/>
+              </a:rPr>
+              <a:t>Средняя сложность</a:t>
             </a:r>
           </a:p>
         </p:txBody>
@@ -8568,29 +9694,29 @@
         </p:nvSpPr>
         <p:spPr>
           <a:xfrm>
-            <a:off x="6492239" y="3291840"/>
-            <a:ext cx="2377440" cy="731520"/>
-          </a:xfrm>
-          <a:prstGeom prst="rect">
-            <a:avLst/>
-          </a:prstGeom>
-          <a:noFill/>
-        </p:spPr>
-        <p:txBody>
-          <a:bodyPr wrap="square">
-            <a:spAutoFit/>
-          </a:bodyPr>
-          <a:lstStyle/>
-          <a:p>
-            <a:pPr algn="ctr"/>
-            <a:r>
-              <a:rPr sz="1400" b="1">
-                <a:solidFill>
-                  <a:srgbClr val="0D223B"/>
-                </a:solidFill>
-                <a:latin typeface="Calibri"/>
-              </a:rPr>
-              <a:t>Project Manager</a:t>
+            <a:off x="9189719" y="2194560"/>
+            <a:ext cx="2651760" cy="914400"/>
+          </a:xfrm>
+          <a:prstGeom prst="rect">
+            <a:avLst/>
+          </a:prstGeom>
+          <a:noFill/>
+        </p:spPr>
+        <p:txBody>
+          <a:bodyPr wrap="square">
+            <a:spAutoFit/>
+          </a:bodyPr>
+          <a:lstStyle/>
+          <a:p>
+            <a:pPr algn="l"/>
+            <a:r>
+              <a:rPr sz="5600" b="1">
+                <a:solidFill>
+                  <a:srgbClr val="1F8F5F"/>
+                </a:solidFill>
+                <a:latin typeface="Arial"/>
+              </a:rPr>
+              <a:t>D</a:t>
             </a:r>
           </a:p>
         </p:txBody>
@@ -8603,184 +9729,71 @@
         </p:nvSpPr>
         <p:spPr>
           <a:xfrm>
-            <a:off x="6492239" y="4114800"/>
-            <a:ext cx="2377440" cy="457200"/>
-          </a:xfrm>
-          <a:prstGeom prst="rect">
-            <a:avLst/>
-          </a:prstGeom>
-          <a:noFill/>
-        </p:spPr>
-        <p:txBody>
-          <a:bodyPr wrap="square">
-            <a:spAutoFit/>
-          </a:bodyPr>
-          <a:lstStyle/>
-          <a:p>
-            <a:pPr algn="ctr"/>
+            <a:off x="9189719" y="3383280"/>
+            <a:ext cx="2651760" cy="548640"/>
+          </a:xfrm>
+          <a:prstGeom prst="rect">
+            <a:avLst/>
+          </a:prstGeom>
+          <a:noFill/>
+        </p:spPr>
+        <p:txBody>
+          <a:bodyPr wrap="square">
+            <a:spAutoFit/>
+          </a:bodyPr>
+          <a:lstStyle/>
+          <a:p>
+            <a:pPr algn="l"/>
+            <a:r>
+              <a:rPr sz="1300" b="1">
+                <a:solidFill>
+                  <a:srgbClr val="07182A"/>
+                </a:solidFill>
+                <a:latin typeface="Arial"/>
+              </a:rPr>
+              <a:t>PM Associate</a:t>
+            </a:r>
+          </a:p>
+        </p:txBody>
+      </p:sp>
+      <p:sp>
+        <p:nvSpPr>
+          <p:cNvPr id="19" name="TextBox 18"/>
+          <p:cNvSpPr txBox="1"/>
+          <p:nvPr/>
+        </p:nvSpPr>
+        <p:spPr>
+          <a:xfrm>
+            <a:off x="9189719" y="4023360"/>
+            <a:ext cx="2651760" cy="365760"/>
+          </a:xfrm>
+          <a:prstGeom prst="rect">
+            <a:avLst/>
+          </a:prstGeom>
+          <a:noFill/>
+        </p:spPr>
+        <p:txBody>
+          <a:bodyPr wrap="square">
+            <a:spAutoFit/>
+          </a:bodyPr>
+          <a:lstStyle/>
+          <a:p>
+            <a:pPr algn="l"/>
             <a:r>
               <a:rPr sz="1200" b="0">
                 <a:solidFill>
-                  <a:srgbClr val="5C6B72"/>
-                </a:solidFill>
-                <a:latin typeface="Calibri"/>
-              </a:rPr>
-              <a:t>Средняя сложность</a:t>
-            </a:r>
-          </a:p>
-        </p:txBody>
-      </p:sp>
-      <p:sp>
-        <p:nvSpPr>
-          <p:cNvPr id="19" name="Rounded Rectangle 18"/>
-          <p:cNvSpPr/>
-          <p:nvPr/>
-        </p:nvSpPr>
-        <p:spPr>
-          <a:xfrm>
-            <a:off x="9189719" y="2011680"/>
-            <a:ext cx="2743200" cy="3200400"/>
-          </a:xfrm>
-          <a:prstGeom prst="roundRect">
-            <a:avLst/>
-          </a:prstGeom>
-          <a:solidFill>
-            <a:srgbClr val="FFFFFF"/>
-          </a:solidFill>
-          <a:ln>
-            <a:noFill/>
-          </a:ln>
-        </p:spPr>
-        <p:style>
-          <a:lnRef idx="1">
-            <a:schemeClr val="accent1"/>
-          </a:lnRef>
-          <a:fillRef idx="3">
-            <a:schemeClr val="accent1"/>
-          </a:fillRef>
-          <a:effectRef idx="2">
-            <a:schemeClr val="accent1"/>
-          </a:effectRef>
-          <a:fontRef idx="minor">
-            <a:schemeClr val="lt1"/>
-          </a:fontRef>
-        </p:style>
-        <p:txBody>
-          <a:bodyPr rtlCol="0" anchor="ctr"/>
-          <a:lstStyle/>
-          <a:p>
-            <a:pPr algn="ctr"/>
+                  <a:srgbClr val="3D5566"/>
+                </a:solidFill>
+                <a:latin typeface="Arial"/>
+              </a:rPr>
+              <a:t>Базовый</a:t>
+            </a:r>
           </a:p>
         </p:txBody>
       </p:sp>
       <p:sp>
         <p:nvSpPr>
           <p:cNvPr id="20" name="TextBox 19"/>
-          <p:cNvSpPr txBox="1"/>
-          <p:nvPr/>
-        </p:nvSpPr>
-        <p:spPr>
-          <a:xfrm>
-            <a:off x="9372599" y="2468880"/>
-            <a:ext cx="2377440" cy="548640"/>
-          </a:xfrm>
-          <a:prstGeom prst="rect">
-            <a:avLst/>
-          </a:prstGeom>
-          <a:noFill/>
-        </p:spPr>
-        <p:txBody>
-          <a:bodyPr wrap="square">
-            <a:spAutoFit/>
-          </a:bodyPr>
-          <a:lstStyle/>
-          <a:p>
-            <a:pPr algn="ctr"/>
-            <a:r>
-              <a:rPr sz="3600" b="1">
-                <a:solidFill>
-                  <a:srgbClr val="2F9E44"/>
-                </a:solidFill>
-                <a:latin typeface="Calibri"/>
-              </a:rPr>
-              <a:t>D</a:t>
-            </a:r>
-          </a:p>
-        </p:txBody>
-      </p:sp>
-      <p:sp>
-        <p:nvSpPr>
-          <p:cNvPr id="21" name="TextBox 20"/>
-          <p:cNvSpPr txBox="1"/>
-          <p:nvPr/>
-        </p:nvSpPr>
-        <p:spPr>
-          <a:xfrm>
-            <a:off x="9372599" y="3291840"/>
-            <a:ext cx="2377440" cy="731520"/>
-          </a:xfrm>
-          <a:prstGeom prst="rect">
-            <a:avLst/>
-          </a:prstGeom>
-          <a:noFill/>
-        </p:spPr>
-        <p:txBody>
-          <a:bodyPr wrap="square">
-            <a:spAutoFit/>
-          </a:bodyPr>
-          <a:lstStyle/>
-          <a:p>
-            <a:pPr algn="ctr"/>
-            <a:r>
-              <a:rPr sz="1400" b="1">
-                <a:solidFill>
-                  <a:srgbClr val="0D223B"/>
-                </a:solidFill>
-                <a:latin typeface="Calibri"/>
-              </a:rPr>
-              <a:t>PM Associate</a:t>
-            </a:r>
-          </a:p>
-        </p:txBody>
-      </p:sp>
-      <p:sp>
-        <p:nvSpPr>
-          <p:cNvPr id="22" name="TextBox 21"/>
-          <p:cNvSpPr txBox="1"/>
-          <p:nvPr/>
-        </p:nvSpPr>
-        <p:spPr>
-          <a:xfrm>
-            <a:off x="9372599" y="4114800"/>
-            <a:ext cx="2377440" cy="457200"/>
-          </a:xfrm>
-          <a:prstGeom prst="rect">
-            <a:avLst/>
-          </a:prstGeom>
-          <a:noFill/>
-        </p:spPr>
-        <p:txBody>
-          <a:bodyPr wrap="square">
-            <a:spAutoFit/>
-          </a:bodyPr>
-          <a:lstStyle/>
-          <a:p>
-            <a:pPr algn="ctr"/>
-            <a:r>
-              <a:rPr sz="1200" b="0">
-                <a:solidFill>
-                  <a:srgbClr val="5C6B72"/>
-                </a:solidFill>
-                <a:latin typeface="Calibri"/>
-              </a:rPr>
-              <a:t>Базовый уровень</a:t>
-            </a:r>
-          </a:p>
-        </p:txBody>
-      </p:sp>
-      <p:sp>
-        <p:nvSpPr>
-          <p:cNvPr id="23" name="TextBox 22"/>
           <p:cNvSpPr txBox="1"/>
           <p:nvPr/>
         </p:nvSpPr>
@@ -8804,9 +9817,9 @@
             <a:r>
               <a:rPr sz="1100" b="0">
                 <a:solidFill>
-                  <a:srgbClr val="5C6B72"/>
-                </a:solidFill>
-                <a:latin typeface="Calibri"/>
+                  <a:srgbClr val="9AAFBD"/>
+                </a:solidFill>
+                <a:latin typeface="Arial"/>
               </a:rPr>
               <a:t>IPMA Kyrgyz Republic  ·  ipma.kg</a:t>
             </a:r>
@@ -8815,14 +9828,14 @@
       </p:sp>
       <p:sp>
         <p:nvSpPr>
-          <p:cNvPr id="24" name="TextBox 23"/>
-          <p:cNvSpPr txBox="1"/>
-          <p:nvPr/>
-        </p:nvSpPr>
-        <p:spPr>
-          <a:xfrm>
-            <a:off x="10515600" y="6446520"/>
-            <a:ext cx="1280160" cy="274320"/>
+          <p:cNvPr id="21" name="TextBox 20"/>
+          <p:cNvSpPr txBox="1"/>
+          <p:nvPr/>
+        </p:nvSpPr>
+        <p:spPr>
+          <a:xfrm>
+            <a:off x="10424160" y="6446520"/>
+            <a:ext cx="1371600" cy="274320"/>
           </a:xfrm>
           <a:prstGeom prst="rect">
             <a:avLst/>
@@ -8839,9 +9852,9 @@
             <a:r>
               <a:rPr sz="1100" b="0">
                 <a:solidFill>
-                  <a:srgbClr val="5C6B72"/>
-                </a:solidFill>
-                <a:latin typeface="Calibri"/>
+                  <a:srgbClr val="9AAFBD"/>
+                </a:solidFill>
+                <a:latin typeface="Arial"/>
               </a:rPr>
               <a:t>08 / 12</a:t>
             </a:r>
@@ -8881,7 +9894,7 @@
             <a:avLst/>
           </a:prstGeom>
           <a:solidFill>
-            <a:srgbClr val="EEF2F1"/>
+            <a:srgbClr val="E8EEF2"/>
           </a:solidFill>
           <a:ln>
             <a:noFill/>
@@ -8909,9 +9922,52 @@
           </a:p>
         </p:txBody>
       </p:sp>
+      <p:sp>
+        <p:nvSpPr>
+          <p:cNvPr id="3" name="Rectangle 2"/>
+          <p:cNvSpPr/>
+          <p:nvPr/>
+        </p:nvSpPr>
+        <p:spPr>
+          <a:xfrm>
+            <a:off x="0" y="0"/>
+            <a:ext cx="12191695" cy="73152"/>
+          </a:xfrm>
+          <a:prstGeom prst="rect">
+            <a:avLst/>
+          </a:prstGeom>
+          <a:solidFill>
+            <a:srgbClr val="1F8F5F"/>
+          </a:solidFill>
+          <a:ln>
+            <a:noFill/>
+          </a:ln>
+        </p:spPr>
+        <p:style>
+          <a:lnRef idx="1">
+            <a:schemeClr val="accent1"/>
+          </a:lnRef>
+          <a:fillRef idx="3">
+            <a:schemeClr val="accent1"/>
+          </a:fillRef>
+          <a:effectRef idx="2">
+            <a:schemeClr val="accent1"/>
+          </a:effectRef>
+          <a:fontRef idx="minor">
+            <a:schemeClr val="lt1"/>
+          </a:fontRef>
+        </p:style>
+        <p:txBody>
+          <a:bodyPr rtlCol="0" anchor="ctr"/>
+          <a:lstStyle/>
+          <a:p>
+            <a:pPr algn="ctr"/>
+          </a:p>
+        </p:txBody>
+      </p:sp>
       <p:pic>
         <p:nvPicPr>
-          <p:cNvPr id="3" name="Picture 2" descr="ipma-kr-emblem.png"/>
+          <p:cNvPr id="4" name="Picture 3" descr="ipma-kr-emblem.png"/>
           <p:cNvPicPr>
             <a:picLocks noChangeAspect="1"/>
           </p:cNvPicPr>
@@ -8925,8 +9981,8 @@
         </p:blipFill>
         <p:spPr>
           <a:xfrm>
-            <a:off x="11292840" y="228600"/>
-            <a:ext cx="597448" cy="594360"/>
+            <a:off x="11338560" y="256032"/>
+            <a:ext cx="505533" cy="502920"/>
           </a:xfrm>
           <a:prstGeom prst="rect">
             <a:avLst/>
@@ -8935,14 +9991,14 @@
       </p:pic>
       <p:sp>
         <p:nvSpPr>
-          <p:cNvPr id="4" name="TextBox 3"/>
+          <p:cNvPr id="5" name="TextBox 4"/>
           <p:cNvSpPr txBox="1"/>
           <p:nvPr/>
         </p:nvSpPr>
         <p:spPr>
           <a:xfrm>
             <a:off x="548640" y="320040"/>
-            <a:ext cx="10972800" cy="274320"/>
+            <a:ext cx="10058400" cy="274320"/>
           </a:xfrm>
           <a:prstGeom prst="rect">
             <a:avLst/>
@@ -8959,9 +10015,9 @@
             <a:r>
               <a:rPr sz="1100" b="1">
                 <a:solidFill>
-                  <a:srgbClr val="1F7A34"/>
-                </a:solidFill>
-                <a:latin typeface="Calibri"/>
+                  <a:srgbClr val="1F8F5F"/>
+                </a:solidFill>
+                <a:latin typeface="Arial"/>
               </a:rPr>
               <a:t>09  »  ЧЛЕНСТВО</a:t>
             </a:r>
@@ -8970,55 +10026,55 @@
       </p:sp>
       <p:sp>
         <p:nvSpPr>
-          <p:cNvPr id="5" name="TextBox 4"/>
+          <p:cNvPr id="6" name="TextBox 5"/>
           <p:cNvSpPr txBox="1"/>
           <p:nvPr/>
         </p:nvSpPr>
         <p:spPr>
           <a:xfrm>
             <a:off x="548640" y="640080"/>
-            <a:ext cx="10515600" cy="548640"/>
-          </a:xfrm>
-          <a:prstGeom prst="rect">
-            <a:avLst/>
-          </a:prstGeom>
-          <a:noFill/>
-        </p:spPr>
-        <p:txBody>
-          <a:bodyPr wrap="square">
-            <a:spAutoFit/>
-          </a:bodyPr>
-          <a:lstStyle/>
-          <a:p>
-            <a:pPr algn="l"/>
-            <a:r>
-              <a:rPr sz="2800" b="1">
-                <a:solidFill>
-                  <a:srgbClr val="0D223B"/>
-                </a:solidFill>
-                <a:latin typeface="Arial"/>
-              </a:rPr>
-              <a:t>Рост членской базы</a:t>
-            </a:r>
-          </a:p>
-        </p:txBody>
-      </p:sp>
-      <p:sp>
-        <p:nvSpPr>
-          <p:cNvPr id="6" name="Rounded Rectangle 5"/>
+            <a:ext cx="10058400" cy="640080"/>
+          </a:xfrm>
+          <a:prstGeom prst="rect">
+            <a:avLst/>
+          </a:prstGeom>
+          <a:noFill/>
+        </p:spPr>
+        <p:txBody>
+          <a:bodyPr wrap="square">
+            <a:spAutoFit/>
+          </a:bodyPr>
+          <a:lstStyle/>
+          <a:p>
+            <a:pPr algn="l"/>
+            <a:r>
+              <a:rPr sz="3200" b="1">
+                <a:solidFill>
+                  <a:srgbClr val="07182A"/>
+                </a:solidFill>
+                <a:latin typeface="Arial"/>
+              </a:rPr>
+              <a:t>Рост сообщества</a:t>
+            </a:r>
+          </a:p>
+        </p:txBody>
+      </p:sp>
+      <p:sp>
+        <p:nvSpPr>
+          <p:cNvPr id="7" name="Rectangle 6"/>
           <p:cNvSpPr/>
           <p:nvPr/>
         </p:nvSpPr>
         <p:spPr>
           <a:xfrm>
-            <a:off x="548640" y="1463040"/>
-            <a:ext cx="11064240" cy="868680"/>
-          </a:xfrm>
-          <a:prstGeom prst="roundRect">
+            <a:off x="548640" y="2560320"/>
+            <a:ext cx="10972800" cy="13716"/>
+          </a:xfrm>
+          <a:prstGeom prst="rect">
             <a:avLst/>
           </a:prstGeom>
           <a:solidFill>
-            <a:srgbClr val="FFFFFF"/>
+            <a:srgbClr val="D0DCE3"/>
           </a:solidFill>
           <a:ln>
             <a:noFill/>
@@ -9048,33 +10104,33 @@
       </p:sp>
       <p:sp>
         <p:nvSpPr>
-          <p:cNvPr id="7" name="TextBox 6"/>
-          <p:cNvSpPr txBox="1"/>
-          <p:nvPr/>
-        </p:nvSpPr>
-        <p:spPr>
-          <a:xfrm>
-            <a:off x="868680" y="1719072"/>
-            <a:ext cx="1371600" cy="365760"/>
-          </a:xfrm>
-          <a:prstGeom prst="rect">
-            <a:avLst/>
-          </a:prstGeom>
-          <a:noFill/>
-        </p:spPr>
-        <p:txBody>
-          <a:bodyPr wrap="square">
-            <a:spAutoFit/>
-          </a:bodyPr>
-          <a:lstStyle/>
-          <a:p>
-            <a:pPr algn="l"/>
-            <a:r>
-              <a:rPr sz="1800" b="1">
-                <a:solidFill>
-                  <a:srgbClr val="2F9E44"/>
-                </a:solidFill>
-                <a:latin typeface="Calibri"/>
+          <p:cNvPr id="8" name="TextBox 7"/>
+          <p:cNvSpPr txBox="1"/>
+          <p:nvPr/>
+        </p:nvSpPr>
+        <p:spPr>
+          <a:xfrm>
+            <a:off x="548640" y="1554480"/>
+            <a:ext cx="2011680" cy="548640"/>
+          </a:xfrm>
+          <a:prstGeom prst="rect">
+            <a:avLst/>
+          </a:prstGeom>
+          <a:noFill/>
+        </p:spPr>
+        <p:txBody>
+          <a:bodyPr wrap="square">
+            <a:spAutoFit/>
+          </a:bodyPr>
+          <a:lstStyle/>
+          <a:p>
+            <a:pPr algn="l"/>
+            <a:r>
+              <a:rPr sz="2800" b="1">
+                <a:solidFill>
+                  <a:srgbClr val="1F8F5F"/>
+                </a:solidFill>
+                <a:latin typeface="Arial"/>
               </a:rPr>
               <a:t>2027</a:t>
             </a:r>
@@ -9083,33 +10139,33 @@
       </p:sp>
       <p:sp>
         <p:nvSpPr>
-          <p:cNvPr id="8" name="TextBox 7"/>
-          <p:cNvSpPr txBox="1"/>
-          <p:nvPr/>
-        </p:nvSpPr>
-        <p:spPr>
-          <a:xfrm>
-            <a:off x="2560320" y="1719072"/>
-            <a:ext cx="8686800" cy="365760"/>
-          </a:xfrm>
-          <a:prstGeom prst="rect">
-            <a:avLst/>
-          </a:prstGeom>
-          <a:noFill/>
-        </p:spPr>
-        <p:txBody>
-          <a:bodyPr wrap="square">
-            <a:spAutoFit/>
-          </a:bodyPr>
-          <a:lstStyle/>
-          <a:p>
-            <a:pPr algn="l"/>
-            <a:r>
-              <a:rPr sz="1500" b="0">
-                <a:solidFill>
-                  <a:srgbClr val="0D223B"/>
-                </a:solidFill>
-                <a:latin typeface="Calibri"/>
+          <p:cNvPr id="9" name="TextBox 8"/>
+          <p:cNvSpPr txBox="1"/>
+          <p:nvPr/>
+        </p:nvSpPr>
+        <p:spPr>
+          <a:xfrm>
+            <a:off x="2926080" y="1691640"/>
+            <a:ext cx="8686800" cy="457200"/>
+          </a:xfrm>
+          <a:prstGeom prst="rect">
+            <a:avLst/>
+          </a:prstGeom>
+          <a:noFill/>
+        </p:spPr>
+        <p:txBody>
+          <a:bodyPr wrap="square">
+            <a:spAutoFit/>
+          </a:bodyPr>
+          <a:lstStyle/>
+          <a:p>
+            <a:pPr algn="l"/>
+            <a:r>
+              <a:rPr sz="1600" b="0">
+                <a:solidFill>
+                  <a:srgbClr val="122433"/>
+                </a:solidFill>
+                <a:latin typeface="Arial"/>
               </a:rPr>
               <a:t>15–20 индивидуальных членов, студенческий трек</a:t>
             </a:r>
@@ -9118,20 +10174,20 @@
       </p:sp>
       <p:sp>
         <p:nvSpPr>
-          <p:cNvPr id="9" name="Rounded Rectangle 8"/>
+          <p:cNvPr id="10" name="Rectangle 9"/>
           <p:cNvSpPr/>
           <p:nvPr/>
         </p:nvSpPr>
         <p:spPr>
           <a:xfrm>
-            <a:off x="548640" y="2468880"/>
-            <a:ext cx="11064240" cy="868680"/>
-          </a:xfrm>
-          <a:prstGeom prst="roundRect">
+            <a:off x="548640" y="3794760"/>
+            <a:ext cx="10972800" cy="13716"/>
+          </a:xfrm>
+          <a:prstGeom prst="rect">
             <a:avLst/>
           </a:prstGeom>
           <a:solidFill>
-            <a:srgbClr val="FFFFFF"/>
+            <a:srgbClr val="D0DCE3"/>
           </a:solidFill>
           <a:ln>
             <a:noFill/>
@@ -9161,33 +10217,33 @@
       </p:sp>
       <p:sp>
         <p:nvSpPr>
-          <p:cNvPr id="10" name="TextBox 9"/>
-          <p:cNvSpPr txBox="1"/>
-          <p:nvPr/>
-        </p:nvSpPr>
-        <p:spPr>
-          <a:xfrm>
-            <a:off x="868680" y="2724912"/>
-            <a:ext cx="1371600" cy="365760"/>
-          </a:xfrm>
-          <a:prstGeom prst="rect">
-            <a:avLst/>
-          </a:prstGeom>
-          <a:noFill/>
-        </p:spPr>
-        <p:txBody>
-          <a:bodyPr wrap="square">
-            <a:spAutoFit/>
-          </a:bodyPr>
-          <a:lstStyle/>
-          <a:p>
-            <a:pPr algn="l"/>
-            <a:r>
-              <a:rPr sz="1800" b="1">
-                <a:solidFill>
-                  <a:srgbClr val="2F9E44"/>
-                </a:solidFill>
-                <a:latin typeface="Calibri"/>
+          <p:cNvPr id="11" name="TextBox 10"/>
+          <p:cNvSpPr txBox="1"/>
+          <p:nvPr/>
+        </p:nvSpPr>
+        <p:spPr>
+          <a:xfrm>
+            <a:off x="548640" y="2788920"/>
+            <a:ext cx="2011680" cy="548640"/>
+          </a:xfrm>
+          <a:prstGeom prst="rect">
+            <a:avLst/>
+          </a:prstGeom>
+          <a:noFill/>
+        </p:spPr>
+        <p:txBody>
+          <a:bodyPr wrap="square">
+            <a:spAutoFit/>
+          </a:bodyPr>
+          <a:lstStyle/>
+          <a:p>
+            <a:pPr algn="l"/>
+            <a:r>
+              <a:rPr sz="2800" b="1">
+                <a:solidFill>
+                  <a:srgbClr val="1F8F5F"/>
+                </a:solidFill>
+                <a:latin typeface="Arial"/>
               </a:rPr>
               <a:t>2028</a:t>
             </a:r>
@@ -9196,33 +10252,33 @@
       </p:sp>
       <p:sp>
         <p:nvSpPr>
-          <p:cNvPr id="11" name="TextBox 10"/>
-          <p:cNvSpPr txBox="1"/>
-          <p:nvPr/>
-        </p:nvSpPr>
-        <p:spPr>
-          <a:xfrm>
-            <a:off x="2560320" y="2724912"/>
-            <a:ext cx="8686800" cy="365760"/>
-          </a:xfrm>
-          <a:prstGeom prst="rect">
-            <a:avLst/>
-          </a:prstGeom>
-          <a:noFill/>
-        </p:spPr>
-        <p:txBody>
-          <a:bodyPr wrap="square">
-            <a:spAutoFit/>
-          </a:bodyPr>
-          <a:lstStyle/>
-          <a:p>
-            <a:pPr algn="l"/>
-            <a:r>
-              <a:rPr sz="1500" b="0">
-                <a:solidFill>
-                  <a:srgbClr val="0D223B"/>
-                </a:solidFill>
-                <a:latin typeface="Calibri"/>
+          <p:cNvPr id="12" name="TextBox 11"/>
+          <p:cNvSpPr txBox="1"/>
+          <p:nvPr/>
+        </p:nvSpPr>
+        <p:spPr>
+          <a:xfrm>
+            <a:off x="2926080" y="2926080"/>
+            <a:ext cx="8686800" cy="457200"/>
+          </a:xfrm>
+          <a:prstGeom prst="rect">
+            <a:avLst/>
+          </a:prstGeom>
+          <a:noFill/>
+        </p:spPr>
+        <p:txBody>
+          <a:bodyPr wrap="square">
+            <a:spAutoFit/>
+          </a:bodyPr>
+          <a:lstStyle/>
+          <a:p>
+            <a:pPr algn="l"/>
+            <a:r>
+              <a:rPr sz="1600" b="0">
+                <a:solidFill>
+                  <a:srgbClr val="122433"/>
+                </a:solidFill>
+                <a:latin typeface="Arial"/>
               </a:rPr>
               <a:t>50+ членов, первые корпоративные партнёры</a:t>
             </a:r>
@@ -9231,20 +10287,20 @@
       </p:sp>
       <p:sp>
         <p:nvSpPr>
-          <p:cNvPr id="12" name="Rounded Rectangle 11"/>
+          <p:cNvPr id="13" name="Rectangle 12"/>
           <p:cNvSpPr/>
           <p:nvPr/>
         </p:nvSpPr>
         <p:spPr>
           <a:xfrm>
-            <a:off x="548640" y="3474720"/>
-            <a:ext cx="11064240" cy="868680"/>
-          </a:xfrm>
-          <a:prstGeom prst="roundRect">
+            <a:off x="548640" y="5029200"/>
+            <a:ext cx="10972800" cy="13716"/>
+          </a:xfrm>
+          <a:prstGeom prst="rect">
             <a:avLst/>
           </a:prstGeom>
           <a:solidFill>
-            <a:srgbClr val="FFFFFF"/>
+            <a:srgbClr val="D0DCE3"/>
           </a:solidFill>
           <a:ln>
             <a:noFill/>
@@ -9274,33 +10330,33 @@
       </p:sp>
       <p:sp>
         <p:nvSpPr>
-          <p:cNvPr id="13" name="TextBox 12"/>
-          <p:cNvSpPr txBox="1"/>
-          <p:nvPr/>
-        </p:nvSpPr>
-        <p:spPr>
-          <a:xfrm>
-            <a:off x="868680" y="3730752"/>
-            <a:ext cx="1371600" cy="365760"/>
-          </a:xfrm>
-          <a:prstGeom prst="rect">
-            <a:avLst/>
-          </a:prstGeom>
-          <a:noFill/>
-        </p:spPr>
-        <p:txBody>
-          <a:bodyPr wrap="square">
-            <a:spAutoFit/>
-          </a:bodyPr>
-          <a:lstStyle/>
-          <a:p>
-            <a:pPr algn="l"/>
-            <a:r>
-              <a:rPr sz="1800" b="1">
-                <a:solidFill>
-                  <a:srgbClr val="2F9E44"/>
-                </a:solidFill>
-                <a:latin typeface="Calibri"/>
+          <p:cNvPr id="14" name="TextBox 13"/>
+          <p:cNvSpPr txBox="1"/>
+          <p:nvPr/>
+        </p:nvSpPr>
+        <p:spPr>
+          <a:xfrm>
+            <a:off x="548640" y="4023360"/>
+            <a:ext cx="2011680" cy="548640"/>
+          </a:xfrm>
+          <a:prstGeom prst="rect">
+            <a:avLst/>
+          </a:prstGeom>
+          <a:noFill/>
+        </p:spPr>
+        <p:txBody>
+          <a:bodyPr wrap="square">
+            <a:spAutoFit/>
+          </a:bodyPr>
+          <a:lstStyle/>
+          <a:p>
+            <a:pPr algn="l"/>
+            <a:r>
+              <a:rPr sz="2800" b="1">
+                <a:solidFill>
+                  <a:srgbClr val="1F8F5F"/>
+                </a:solidFill>
+                <a:latin typeface="Arial"/>
               </a:rPr>
               <a:t>2029</a:t>
             </a:r>
@@ -9309,33 +10365,33 @@
       </p:sp>
       <p:sp>
         <p:nvSpPr>
-          <p:cNvPr id="14" name="TextBox 13"/>
-          <p:cNvSpPr txBox="1"/>
-          <p:nvPr/>
-        </p:nvSpPr>
-        <p:spPr>
-          <a:xfrm>
-            <a:off x="2560320" y="3730752"/>
-            <a:ext cx="8686800" cy="365760"/>
-          </a:xfrm>
-          <a:prstGeom prst="rect">
-            <a:avLst/>
-          </a:prstGeom>
-          <a:noFill/>
-        </p:spPr>
-        <p:txBody>
-          <a:bodyPr wrap="square">
-            <a:spAutoFit/>
-          </a:bodyPr>
-          <a:lstStyle/>
-          <a:p>
-            <a:pPr algn="l"/>
-            <a:r>
-              <a:rPr sz="1500" b="0">
-                <a:solidFill>
-                  <a:srgbClr val="0D223B"/>
-                </a:solidFill>
-                <a:latin typeface="Calibri"/>
+          <p:cNvPr id="15" name="TextBox 14"/>
+          <p:cNvSpPr txBox="1"/>
+          <p:nvPr/>
+        </p:nvSpPr>
+        <p:spPr>
+          <a:xfrm>
+            <a:off x="2926080" y="4160520"/>
+            <a:ext cx="8686800" cy="457200"/>
+          </a:xfrm>
+          <a:prstGeom prst="rect">
+            <a:avLst/>
+          </a:prstGeom>
+          <a:noFill/>
+        </p:spPr>
+        <p:txBody>
+          <a:bodyPr wrap="square">
+            <a:spAutoFit/>
+          </a:bodyPr>
+          <a:lstStyle/>
+          <a:p>
+            <a:pPr algn="l"/>
+            <a:r>
+              <a:rPr sz="1600" b="0">
+                <a:solidFill>
+                  <a:srgbClr val="122433"/>
+                </a:solidFill>
+                <a:latin typeface="Arial"/>
               </a:rPr>
               <a:t>100+ членов, устойчивый рост сертификации</a:t>
             </a:r>
@@ -9344,43 +10400,42 @@
       </p:sp>
       <p:sp>
         <p:nvSpPr>
-          <p:cNvPr id="15" name="TextBox 14"/>
-          <p:cNvSpPr txBox="1"/>
-          <p:nvPr/>
-        </p:nvSpPr>
-        <p:spPr>
-          <a:xfrm>
-            <a:off x="548640" y="4754880"/>
-            <a:ext cx="10972800" cy="731520"/>
-          </a:xfrm>
-          <a:prstGeom prst="rect">
-            <a:avLst/>
-          </a:prstGeom>
-          <a:noFill/>
-        </p:spPr>
-        <p:txBody>
-          <a:bodyPr wrap="square">
-            <a:spAutoFit/>
-          </a:bodyPr>
-          <a:lstStyle/>
-          <a:p>
-            <a:pPr algn="l"/>
-            <a:r>
-              <a:rPr sz="1400" b="0">
-                <a:solidFill>
-                  <a:srgbClr val="28394A"/>
-                </a:solidFill>
-                <a:latin typeface="Calibri"/>
-              </a:rPr>
-              <a:t>Категории: индивидуальное · студенческое · корпоративное
-Скидки на сертификацию A–D (до 20%), материалы ICB4/OCB/PEB, национальный реестр.</a:t>
-            </a:r>
-          </a:p>
-        </p:txBody>
-      </p:sp>
-      <p:sp>
-        <p:nvSpPr>
           <p:cNvPr id="16" name="TextBox 15"/>
+          <p:cNvSpPr txBox="1"/>
+          <p:nvPr/>
+        </p:nvSpPr>
+        <p:spPr>
+          <a:xfrm>
+            <a:off x="548640" y="5394960"/>
+            <a:ext cx="10972800" cy="365760"/>
+          </a:xfrm>
+          <a:prstGeom prst="rect">
+            <a:avLst/>
+          </a:prstGeom>
+          <a:noFill/>
+        </p:spPr>
+        <p:txBody>
+          <a:bodyPr wrap="square">
+            <a:spAutoFit/>
+          </a:bodyPr>
+          <a:lstStyle/>
+          <a:p>
+            <a:pPr algn="l"/>
+            <a:r>
+              <a:rPr sz="1300" b="1">
+                <a:solidFill>
+                  <a:srgbClr val="1F8F5F"/>
+                </a:solidFill>
+                <a:latin typeface="Arial"/>
+              </a:rPr>
+              <a:t>Индивидуальное  ·  Студенческое  ·  Корпоративное</a:t>
+            </a:r>
+          </a:p>
+        </p:txBody>
+      </p:sp>
+      <p:sp>
+        <p:nvSpPr>
+          <p:cNvPr id="17" name="TextBox 16"/>
           <p:cNvSpPr txBox="1"/>
           <p:nvPr/>
         </p:nvSpPr>
@@ -9404,9 +10459,9 @@
             <a:r>
               <a:rPr sz="1100" b="0">
                 <a:solidFill>
-                  <a:srgbClr val="5C6B72"/>
-                </a:solidFill>
-                <a:latin typeface="Calibri"/>
+                  <a:srgbClr val="9AAFBD"/>
+                </a:solidFill>
+                <a:latin typeface="Arial"/>
               </a:rPr>
               <a:t>IPMA Kyrgyz Republic  ·  ipma.kg</a:t>
             </a:r>
@@ -9415,14 +10470,14 @@
       </p:sp>
       <p:sp>
         <p:nvSpPr>
-          <p:cNvPr id="17" name="TextBox 16"/>
-          <p:cNvSpPr txBox="1"/>
-          <p:nvPr/>
-        </p:nvSpPr>
-        <p:spPr>
-          <a:xfrm>
-            <a:off x="10515600" y="6446520"/>
-            <a:ext cx="1280160" cy="274320"/>
+          <p:cNvPr id="18" name="TextBox 17"/>
+          <p:cNvSpPr txBox="1"/>
+          <p:nvPr/>
+        </p:nvSpPr>
+        <p:spPr>
+          <a:xfrm>
+            <a:off x="10424160" y="6446520"/>
+            <a:ext cx="1371600" cy="274320"/>
           </a:xfrm>
           <a:prstGeom prst="rect">
             <a:avLst/>
@@ -9439,9 +10494,9 @@
             <a:r>
               <a:rPr sz="1100" b="0">
                 <a:solidFill>
-                  <a:srgbClr val="5C6B72"/>
-                </a:solidFill>
-                <a:latin typeface="Calibri"/>
+                  <a:srgbClr val="9AAFBD"/>
+                </a:solidFill>
+                <a:latin typeface="Arial"/>
               </a:rPr>
               <a:t>09 / 12</a:t>
             </a:r>

--- a/presentations/IPMA_Kyrgyzstan_CoD_Presentation.pptx
+++ b/presentations/IPMA_Kyrgyzstan_CoD_Presentation.pptx
@@ -15,8 +15,6 @@
     <p:sldId id="263" r:id="rId14"/>
     <p:sldId id="264" r:id="rId15"/>
     <p:sldId id="265" r:id="rId16"/>
-    <p:sldId id="266" r:id="rId17"/>
-    <p:sldId id="267" r:id="rId18"/>
   </p:sldIdLst>
   <p:sldSz cx="12191695" cy="6858000" type="screen4x3"/>
   <p:notesSz cx="6858000" cy="9144000"/>
@@ -3150,23 +3148,23 @@
         </p:nvSpPr>
         <p:spPr>
           <a:xfrm>
-            <a:off x="10789920" y="5120640"/>
-            <a:ext cx="1828800" cy="1371600"/>
-          </a:xfrm>
-          <a:prstGeom prst="rect">
-            <a:avLst/>
-          </a:prstGeom>
-          <a:noFill/>
-        </p:spPr>
-        <p:txBody>
-          <a:bodyPr wrap="square">
-            <a:spAutoFit/>
-          </a:bodyPr>
-          <a:lstStyle/>
-          <a:p>
-            <a:pPr algn="l"/>
-            <a:r>
-              <a:rPr sz="12000" b="1">
+            <a:off x="10881360" y="5212080"/>
+            <a:ext cx="1645920" cy="1280160"/>
+          </a:xfrm>
+          <a:prstGeom prst="rect">
+            <a:avLst/>
+          </a:prstGeom>
+          <a:noFill/>
+        </p:spPr>
+        <p:txBody>
+          <a:bodyPr wrap="square">
+            <a:spAutoFit/>
+          </a:bodyPr>
+          <a:lstStyle/>
+          <a:p>
+            <a:pPr algn="l"/>
+            <a:r>
+              <a:rPr sz="11000" b="1">
                 <a:solidFill>
                   <a:srgbClr val="E30613"/>
                 </a:solidFill>
@@ -3185,8 +3183,8 @@
         </p:nvSpPr>
         <p:spPr>
           <a:xfrm>
-            <a:off x="640080" y="1051560"/>
-            <a:ext cx="3474720" cy="384048"/>
+            <a:off x="640080" y="1005840"/>
+            <a:ext cx="3291840" cy="365760"/>
           </a:xfrm>
           <a:prstGeom prst="roundRect">
             <a:avLst/>
@@ -3228,8 +3226,8 @@
         </p:nvSpPr>
         <p:spPr>
           <a:xfrm>
-            <a:off x="777240" y="1115568"/>
-            <a:ext cx="3200400" cy="274320"/>
+            <a:off x="777240" y="1069848"/>
+            <a:ext cx="3017520" cy="256032"/>
           </a:xfrm>
           <a:prstGeom prst="rect">
             <a:avLst/>
@@ -3263,31 +3261,30 @@
         </p:nvSpPr>
         <p:spPr>
           <a:xfrm>
-            <a:off x="640080" y="1737360"/>
-            <a:ext cx="6217920" cy="2194560"/>
-          </a:xfrm>
-          <a:prstGeom prst="rect">
-            <a:avLst/>
-          </a:prstGeom>
-          <a:noFill/>
-        </p:spPr>
-        <p:txBody>
-          <a:bodyPr wrap="square">
-            <a:spAutoFit/>
-          </a:bodyPr>
-          <a:lstStyle/>
-          <a:p>
-            <a:pPr algn="l"/>
-            <a:r>
-              <a:rPr sz="4800" b="1">
+            <a:off x="640080" y="1645920"/>
+            <a:ext cx="6583680" cy="1828800"/>
+          </a:xfrm>
+          <a:prstGeom prst="rect">
+            <a:avLst/>
+          </a:prstGeom>
+          <a:noFill/>
+        </p:spPr>
+        <p:txBody>
+          <a:bodyPr wrap="square">
+            <a:spAutoFit/>
+          </a:bodyPr>
+          <a:lstStyle/>
+          <a:p>
+            <a:pPr algn="l"/>
+            <a:r>
+              <a:rPr sz="3400" b="1">
                 <a:solidFill>
                   <a:srgbClr val="FFFFFF"/>
                 </a:solidFill>
                 <a:latin typeface="Arial"/>
               </a:rPr>
-              <a:t>IPMA
-Kyrgyz
-Republic</a:t>
+              <a:t>Кыргызское объединение
+управления проектами</a:t>
             </a:r>
           </a:p>
         </p:txBody>
@@ -3300,8 +3297,8 @@
         </p:nvSpPr>
         <p:spPr>
           <a:xfrm>
-            <a:off x="640080" y="4206240"/>
-            <a:ext cx="5943600" cy="822960"/>
+            <a:off x="640080" y="3749039"/>
+            <a:ext cx="6400800" cy="548640"/>
           </a:xfrm>
           <a:prstGeom prst="rect">
             <a:avLst/>
@@ -3322,7 +3319,7 @@
                 </a:solidFill>
                 <a:latin typeface="Arial"/>
               </a:rPr>
-              <a:t>Кыргызское объединение управления проектами — Ассоциация-заявитель IPMA</a:t>
+              <a:t>ОО «KgPMU» · Kyrgyz Project Management Union · ipma.kg</a:t>
             </a:r>
           </a:p>
         </p:txBody>
@@ -3335,29 +3332,29 @@
         </p:nvSpPr>
         <p:spPr>
           <a:xfrm>
-            <a:off x="640080" y="5212080"/>
-            <a:ext cx="5943600" cy="365760"/>
-          </a:xfrm>
-          <a:prstGeom prst="rect">
-            <a:avLst/>
-          </a:prstGeom>
-          <a:noFill/>
-        </p:spPr>
-        <p:txBody>
-          <a:bodyPr wrap="square">
-            <a:spAutoFit/>
-          </a:bodyPr>
-          <a:lstStyle/>
-          <a:p>
-            <a:pPr algn="l"/>
-            <a:r>
-              <a:rPr sz="1300" b="0">
+            <a:off x="640080" y="4572000"/>
+            <a:ext cx="6400800" cy="457200"/>
+          </a:xfrm>
+          <a:prstGeom prst="rect">
+            <a:avLst/>
+          </a:prstGeom>
+          <a:noFill/>
+        </p:spPr>
+        <p:txBody>
+          <a:bodyPr wrap="square">
+            <a:spAutoFit/>
+          </a:bodyPr>
+          <a:lstStyle/>
+          <a:p>
+            <a:pPr algn="l"/>
+            <a:r>
+              <a:rPr sz="1400" b="0">
                 <a:solidFill>
                   <a:srgbClr val="7F9AAB"/>
                 </a:solidFill>
                 <a:latin typeface="Arial"/>
               </a:rPr>
-              <a:t>Урмат Мекишев · Президент KgPMU</a:t>
+              <a:t>Представляет: Урмат Мекишев, Президент KgPMU</a:t>
             </a:r>
           </a:p>
         </p:txBody>
@@ -3378,8 +3375,8 @@
         </p:blipFill>
         <p:spPr>
           <a:xfrm>
-            <a:off x="6949440" y="2194560"/>
-            <a:ext cx="4389120" cy="1282826"/>
+            <a:off x="7132320" y="2103120"/>
+            <a:ext cx="4206240" cy="1229375"/>
           </a:xfrm>
           <a:prstGeom prst="rect">
             <a:avLst/>
@@ -3451,7 +3448,7 @@
                 </a:solidFill>
                 <a:latin typeface="Arial"/>
               </a:rPr>
-              <a:t>01 / 12</a:t>
+              <a:t>01 / 10</a:t>
             </a:r>
           </a:p>
         </p:txBody>
@@ -3489,7 +3486,7 @@
             <a:avLst/>
           </a:prstGeom>
           <a:solidFill>
-            <a:srgbClr val="E8EEF2"/>
+            <a:srgbClr val="07182A"/>
           </a:solidFill>
           <a:ln>
             <a:noFill/>
@@ -3519,20 +3516,55 @@
       </p:sp>
       <p:sp>
         <p:nvSpPr>
-          <p:cNvPr id="3" name="Rectangle 2"/>
+          <p:cNvPr id="3" name="TextBox 2"/>
+          <p:cNvSpPr txBox="1"/>
+          <p:nvPr/>
+        </p:nvSpPr>
+        <p:spPr>
+          <a:xfrm>
+            <a:off x="10881360" y="5212080"/>
+            <a:ext cx="1645920" cy="1280160"/>
+          </a:xfrm>
+          <a:prstGeom prst="rect">
+            <a:avLst/>
+          </a:prstGeom>
+          <a:noFill/>
+        </p:spPr>
+        <p:txBody>
+          <a:bodyPr wrap="square">
+            <a:spAutoFit/>
+          </a:bodyPr>
+          <a:lstStyle/>
+          <a:p>
+            <a:pPr algn="l"/>
+            <a:r>
+              <a:rPr sz="11000" b="1">
+                <a:solidFill>
+                  <a:srgbClr val="E30613"/>
+                </a:solidFill>
+                <a:latin typeface="Arial"/>
+              </a:rPr>
+              <a:t>»</a:t>
+            </a:r>
+          </a:p>
+        </p:txBody>
+      </p:sp>
+      <p:sp>
+        <p:nvSpPr>
+          <p:cNvPr id="4" name="Rounded Rectangle 3"/>
           <p:cNvSpPr/>
           <p:nvPr/>
         </p:nvSpPr>
         <p:spPr>
           <a:xfrm>
-            <a:off x="0" y="0"/>
-            <a:ext cx="12191695" cy="73152"/>
-          </a:xfrm>
-          <a:prstGeom prst="rect">
+            <a:off x="640080" y="1051560"/>
+            <a:ext cx="2926080" cy="365760"/>
+          </a:xfrm>
+          <a:prstGeom prst="roundRect">
             <a:avLst/>
           </a:prstGeom>
           <a:solidFill>
-            <a:srgbClr val="1F8F5F"/>
+            <a:srgbClr val="0F2C45"/>
           </a:solidFill>
           <a:ln>
             <a:noFill/>
@@ -3560,9 +3592,151 @@
           </a:p>
         </p:txBody>
       </p:sp>
+      <p:sp>
+        <p:nvSpPr>
+          <p:cNvPr id="5" name="TextBox 4"/>
+          <p:cNvSpPr txBox="1"/>
+          <p:nvPr/>
+        </p:nvSpPr>
+        <p:spPr>
+          <a:xfrm>
+            <a:off x="777240" y="1115568"/>
+            <a:ext cx="2743200" cy="256032"/>
+          </a:xfrm>
+          <a:prstGeom prst="rect">
+            <a:avLst/>
+          </a:prstGeom>
+          <a:noFill/>
+        </p:spPr>
+        <p:txBody>
+          <a:bodyPr wrap="square">
+            <a:spAutoFit/>
+          </a:bodyPr>
+          <a:lstStyle/>
+          <a:p>
+            <a:pPr algn="l"/>
+            <a:r>
+              <a:rPr sz="1100" b="1">
+                <a:solidFill>
+                  <a:srgbClr val="3DD68C"/>
+                </a:solidFill>
+                <a:latin typeface="Arial"/>
+              </a:rPr>
+              <a:t>СПАСИБО ЗА ВНИМАНИЕ</a:t>
+            </a:r>
+          </a:p>
+        </p:txBody>
+      </p:sp>
+      <p:sp>
+        <p:nvSpPr>
+          <p:cNvPr id="6" name="TextBox 5"/>
+          <p:cNvSpPr txBox="1"/>
+          <p:nvPr/>
+        </p:nvSpPr>
+        <p:spPr>
+          <a:xfrm>
+            <a:off x="640080" y="1737360"/>
+            <a:ext cx="6400800" cy="1097280"/>
+          </a:xfrm>
+          <a:prstGeom prst="rect">
+            <a:avLst/>
+          </a:prstGeom>
+          <a:noFill/>
+        </p:spPr>
+        <p:txBody>
+          <a:bodyPr wrap="square">
+            <a:spAutoFit/>
+          </a:bodyPr>
+          <a:lstStyle/>
+          <a:p>
+            <a:pPr algn="l"/>
+            <a:r>
+              <a:rPr sz="3600" b="1">
+                <a:solidFill>
+                  <a:srgbClr val="FFFFFF"/>
+                </a:solidFill>
+                <a:latin typeface="Arial"/>
+              </a:rPr>
+              <a:t>Ждём сотрудничества</a:t>
+            </a:r>
+          </a:p>
+        </p:txBody>
+      </p:sp>
+      <p:sp>
+        <p:nvSpPr>
+          <p:cNvPr id="7" name="TextBox 6"/>
+          <p:cNvSpPr txBox="1"/>
+          <p:nvPr/>
+        </p:nvSpPr>
+        <p:spPr>
+          <a:xfrm>
+            <a:off x="640080" y="3108960"/>
+            <a:ext cx="6400800" cy="457200"/>
+          </a:xfrm>
+          <a:prstGeom prst="rect">
+            <a:avLst/>
+          </a:prstGeom>
+          <a:noFill/>
+        </p:spPr>
+        <p:txBody>
+          <a:bodyPr wrap="square">
+            <a:spAutoFit/>
+          </a:bodyPr>
+          <a:lstStyle/>
+          <a:p>
+            <a:pPr algn="l"/>
+            <a:r>
+              <a:rPr sz="1500" b="0">
+                <a:solidFill>
+                  <a:srgbClr val="B7CBD8"/>
+                </a:solidFill>
+                <a:latin typeface="Arial"/>
+              </a:rPr>
+              <a:t>KgPMU · IPMA Kyrgyz Republic · Бишкек</a:t>
+            </a:r>
+          </a:p>
+        </p:txBody>
+      </p:sp>
+      <p:sp>
+        <p:nvSpPr>
+          <p:cNvPr id="8" name="TextBox 7"/>
+          <p:cNvSpPr txBox="1"/>
+          <p:nvPr/>
+        </p:nvSpPr>
+        <p:spPr>
+          <a:xfrm>
+            <a:off x="640080" y="3931920"/>
+            <a:ext cx="6400800" cy="1280160"/>
+          </a:xfrm>
+          <a:prstGeom prst="rect">
+            <a:avLst/>
+          </a:prstGeom>
+          <a:noFill/>
+        </p:spPr>
+        <p:txBody>
+          <a:bodyPr wrap="square">
+            <a:spAutoFit/>
+          </a:bodyPr>
+          <a:lstStyle/>
+          <a:p>
+            <a:pPr algn="l"/>
+            <a:r>
+              <a:rPr sz="1600" b="0">
+                <a:solidFill>
+                  <a:srgbClr val="3DD68C"/>
+                </a:solidFill>
+                <a:latin typeface="Arial"/>
+              </a:rPr>
+              <a:t>info@ipma.kg
++996 555 655 755 · ipma.kg
+Урмат Мекишев · Президент KgPMU</a:t>
+            </a:r>
+          </a:p>
+        </p:txBody>
+      </p:sp>
       <p:pic>
         <p:nvPicPr>
-          <p:cNvPr id="4" name="Picture 3" descr="ipma-kr-emblem.png"/>
+          <p:cNvPr id="9" name="Picture 8" descr="ipma-kr-logo-white.png"/>
           <p:cNvPicPr>
             <a:picLocks noChangeAspect="1"/>
           </p:cNvPicPr>
@@ -3576,8 +3750,8 @@
         </p:blipFill>
         <p:spPr>
           <a:xfrm>
-            <a:off x="11338560" y="256032"/>
-            <a:ext cx="505533" cy="502920"/>
+            <a:off x="7132320" y="2286000"/>
+            <a:ext cx="4114800" cy="1202649"/>
           </a:xfrm>
           <a:prstGeom prst="rect">
             <a:avLst/>
@@ -3586,529 +3760,7 @@
       </p:pic>
       <p:sp>
         <p:nvSpPr>
-          <p:cNvPr id="5" name="TextBox 4"/>
-          <p:cNvSpPr txBox="1"/>
-          <p:nvPr/>
-        </p:nvSpPr>
-        <p:spPr>
-          <a:xfrm>
-            <a:off x="548640" y="320040"/>
-            <a:ext cx="10058400" cy="274320"/>
-          </a:xfrm>
-          <a:prstGeom prst="rect">
-            <a:avLst/>
-          </a:prstGeom>
-          <a:noFill/>
-        </p:spPr>
-        <p:txBody>
-          <a:bodyPr wrap="square">
-            <a:spAutoFit/>
-          </a:bodyPr>
-          <a:lstStyle/>
-          <a:p>
-            <a:pPr algn="l"/>
-            <a:r>
-              <a:rPr sz="1100" b="1">
-                <a:solidFill>
-                  <a:srgbClr val="1F8F5F"/>
-                </a:solidFill>
-                <a:latin typeface="Arial"/>
-              </a:rPr>
-              <a:t>10  »  ЭКОСИСТЕМА</a:t>
-            </a:r>
-          </a:p>
-        </p:txBody>
-      </p:sp>
-      <p:sp>
-        <p:nvSpPr>
-          <p:cNvPr id="6" name="TextBox 5"/>
-          <p:cNvSpPr txBox="1"/>
-          <p:nvPr/>
-        </p:nvSpPr>
-        <p:spPr>
-          <a:xfrm>
-            <a:off x="548640" y="640080"/>
-            <a:ext cx="10058400" cy="640080"/>
-          </a:xfrm>
-          <a:prstGeom prst="rect">
-            <a:avLst/>
-          </a:prstGeom>
-          <a:noFill/>
-        </p:spPr>
-        <p:txBody>
-          <a:bodyPr wrap="square">
-            <a:spAutoFit/>
-          </a:bodyPr>
-          <a:lstStyle/>
-          <a:p>
-            <a:pPr algn="l"/>
-            <a:r>
-              <a:rPr sz="3200" b="1">
-                <a:solidFill>
-                  <a:srgbClr val="07182A"/>
-                </a:solidFill>
-                <a:latin typeface="Arial"/>
-              </a:rPr>
-              <a:t>С кем строим</a:t>
-            </a:r>
-          </a:p>
-        </p:txBody>
-      </p:sp>
-      <p:sp>
-        <p:nvSpPr>
-          <p:cNvPr id="7" name="Rectangle 6"/>
-          <p:cNvSpPr/>
-          <p:nvPr/>
-        </p:nvSpPr>
-        <p:spPr>
-          <a:xfrm>
-            <a:off x="548640" y="1554480"/>
-            <a:ext cx="5394960" cy="54864"/>
-          </a:xfrm>
-          <a:prstGeom prst="rect">
-            <a:avLst/>
-          </a:prstGeom>
-          <a:solidFill>
-            <a:srgbClr val="1F8F5F"/>
-          </a:solidFill>
-          <a:ln>
-            <a:noFill/>
-          </a:ln>
-        </p:spPr>
-        <p:style>
-          <a:lnRef idx="1">
-            <a:schemeClr val="accent1"/>
-          </a:lnRef>
-          <a:fillRef idx="3">
-            <a:schemeClr val="accent1"/>
-          </a:fillRef>
-          <a:effectRef idx="2">
-            <a:schemeClr val="accent1"/>
-          </a:effectRef>
-          <a:fontRef idx="minor">
-            <a:schemeClr val="lt1"/>
-          </a:fontRef>
-        </p:style>
-        <p:txBody>
-          <a:bodyPr rtlCol="0" anchor="ctr"/>
-          <a:lstStyle/>
-          <a:p>
-            <a:pPr algn="ctr"/>
-          </a:p>
-        </p:txBody>
-      </p:sp>
-      <p:sp>
-        <p:nvSpPr>
-          <p:cNvPr id="8" name="TextBox 7"/>
-          <p:cNvSpPr txBox="1"/>
-          <p:nvPr/>
-        </p:nvSpPr>
-        <p:spPr>
-          <a:xfrm>
-            <a:off x="548640" y="1874520"/>
-            <a:ext cx="5394960" cy="411480"/>
-          </a:xfrm>
-          <a:prstGeom prst="rect">
-            <a:avLst/>
-          </a:prstGeom>
-          <a:noFill/>
-        </p:spPr>
-        <p:txBody>
-          <a:bodyPr wrap="square">
-            <a:spAutoFit/>
-          </a:bodyPr>
-          <a:lstStyle/>
-          <a:p>
-            <a:pPr algn="l"/>
-            <a:r>
-              <a:rPr sz="1800" b="1">
-                <a:solidFill>
-                  <a:srgbClr val="07182A"/>
-                </a:solidFill>
-                <a:latin typeface="Arial"/>
-              </a:rPr>
-              <a:t>Госсектор</a:t>
-            </a:r>
-          </a:p>
-        </p:txBody>
-      </p:sp>
-      <p:sp>
-        <p:nvSpPr>
-          <p:cNvPr id="9" name="TextBox 8"/>
-          <p:cNvSpPr txBox="1"/>
-          <p:nvPr/>
-        </p:nvSpPr>
-        <p:spPr>
-          <a:xfrm>
-            <a:off x="548640" y="2423160"/>
-            <a:ext cx="5394960" cy="640080"/>
-          </a:xfrm>
-          <a:prstGeom prst="rect">
-            <a:avLst/>
-          </a:prstGeom>
-          <a:noFill/>
-        </p:spPr>
-        <p:txBody>
-          <a:bodyPr wrap="square">
-            <a:spAutoFit/>
-          </a:bodyPr>
-          <a:lstStyle/>
-          <a:p>
-            <a:pPr algn="l"/>
-            <a:r>
-              <a:rPr sz="1400" b="0">
-                <a:solidFill>
-                  <a:srgbClr val="3D5566"/>
-                </a:solidFill>
-                <a:latin typeface="Arial"/>
-              </a:rPr>
-              <a:t>Цифровые и инфраструктурные проекты</a:t>
-            </a:r>
-          </a:p>
-        </p:txBody>
-      </p:sp>
-      <p:sp>
-        <p:nvSpPr>
-          <p:cNvPr id="10" name="Rectangle 9"/>
-          <p:cNvSpPr/>
-          <p:nvPr/>
-        </p:nvSpPr>
-        <p:spPr>
-          <a:xfrm>
-            <a:off x="6309359" y="1554480"/>
-            <a:ext cx="5394960" cy="54864"/>
-          </a:xfrm>
-          <a:prstGeom prst="rect">
-            <a:avLst/>
-          </a:prstGeom>
-          <a:solidFill>
-            <a:srgbClr val="1F8F5F"/>
-          </a:solidFill>
-          <a:ln>
-            <a:noFill/>
-          </a:ln>
-        </p:spPr>
-        <p:style>
-          <a:lnRef idx="1">
-            <a:schemeClr val="accent1"/>
-          </a:lnRef>
-          <a:fillRef idx="3">
-            <a:schemeClr val="accent1"/>
-          </a:fillRef>
-          <a:effectRef idx="2">
-            <a:schemeClr val="accent1"/>
-          </a:effectRef>
-          <a:fontRef idx="minor">
-            <a:schemeClr val="lt1"/>
-          </a:fontRef>
-        </p:style>
-        <p:txBody>
-          <a:bodyPr rtlCol="0" anchor="ctr"/>
-          <a:lstStyle/>
-          <a:p>
-            <a:pPr algn="ctr"/>
-          </a:p>
-        </p:txBody>
-      </p:sp>
-      <p:sp>
-        <p:nvSpPr>
-          <p:cNvPr id="11" name="TextBox 10"/>
-          <p:cNvSpPr txBox="1"/>
-          <p:nvPr/>
-        </p:nvSpPr>
-        <p:spPr>
-          <a:xfrm>
-            <a:off x="6309359" y="1874520"/>
-            <a:ext cx="5394960" cy="411480"/>
-          </a:xfrm>
-          <a:prstGeom prst="rect">
-            <a:avLst/>
-          </a:prstGeom>
-          <a:noFill/>
-        </p:spPr>
-        <p:txBody>
-          <a:bodyPr wrap="square">
-            <a:spAutoFit/>
-          </a:bodyPr>
-          <a:lstStyle/>
-          <a:p>
-            <a:pPr algn="l"/>
-            <a:r>
-              <a:rPr sz="1800" b="1">
-                <a:solidFill>
-                  <a:srgbClr val="07182A"/>
-                </a:solidFill>
-                <a:latin typeface="Arial"/>
-              </a:rPr>
-              <a:t>Бизнес</a:t>
-            </a:r>
-          </a:p>
-        </p:txBody>
-      </p:sp>
-      <p:sp>
-        <p:nvSpPr>
-          <p:cNvPr id="12" name="TextBox 11"/>
-          <p:cNvSpPr txBox="1"/>
-          <p:nvPr/>
-        </p:nvSpPr>
-        <p:spPr>
-          <a:xfrm>
-            <a:off x="6309359" y="2423160"/>
-            <a:ext cx="5394960" cy="640080"/>
-          </a:xfrm>
-          <a:prstGeom prst="rect">
-            <a:avLst/>
-          </a:prstGeom>
-          <a:noFill/>
-        </p:spPr>
-        <p:txBody>
-          <a:bodyPr wrap="square">
-            <a:spAutoFit/>
-          </a:bodyPr>
-          <a:lstStyle/>
-          <a:p>
-            <a:pPr algn="l"/>
-            <a:r>
-              <a:rPr sz="1400" b="0">
-                <a:solidFill>
-                  <a:srgbClr val="3D5566"/>
-                </a:solidFill>
-                <a:latin typeface="Arial"/>
-              </a:rPr>
-              <a:t>Компании и подрядчики</a:t>
-            </a:r>
-          </a:p>
-        </p:txBody>
-      </p:sp>
-      <p:sp>
-        <p:nvSpPr>
-          <p:cNvPr id="13" name="Rectangle 12"/>
-          <p:cNvSpPr/>
-          <p:nvPr/>
-        </p:nvSpPr>
-        <p:spPr>
-          <a:xfrm>
-            <a:off x="548640" y="3749039"/>
-            <a:ext cx="5394960" cy="54864"/>
-          </a:xfrm>
-          <a:prstGeom prst="rect">
-            <a:avLst/>
-          </a:prstGeom>
-          <a:solidFill>
-            <a:srgbClr val="1F8F5F"/>
-          </a:solidFill>
-          <a:ln>
-            <a:noFill/>
-          </a:ln>
-        </p:spPr>
-        <p:style>
-          <a:lnRef idx="1">
-            <a:schemeClr val="accent1"/>
-          </a:lnRef>
-          <a:fillRef idx="3">
-            <a:schemeClr val="accent1"/>
-          </a:fillRef>
-          <a:effectRef idx="2">
-            <a:schemeClr val="accent1"/>
-          </a:effectRef>
-          <a:fontRef idx="minor">
-            <a:schemeClr val="lt1"/>
-          </a:fontRef>
-        </p:style>
-        <p:txBody>
-          <a:bodyPr rtlCol="0" anchor="ctr"/>
-          <a:lstStyle/>
-          <a:p>
-            <a:pPr algn="ctr"/>
-          </a:p>
-        </p:txBody>
-      </p:sp>
-      <p:sp>
-        <p:nvSpPr>
-          <p:cNvPr id="14" name="TextBox 13"/>
-          <p:cNvSpPr txBox="1"/>
-          <p:nvPr/>
-        </p:nvSpPr>
-        <p:spPr>
-          <a:xfrm>
-            <a:off x="548640" y="4069079"/>
-            <a:ext cx="5394960" cy="411480"/>
-          </a:xfrm>
-          <a:prstGeom prst="rect">
-            <a:avLst/>
-          </a:prstGeom>
-          <a:noFill/>
-        </p:spPr>
-        <p:txBody>
-          <a:bodyPr wrap="square">
-            <a:spAutoFit/>
-          </a:bodyPr>
-          <a:lstStyle/>
-          <a:p>
-            <a:pPr algn="l"/>
-            <a:r>
-              <a:rPr sz="1800" b="1">
-                <a:solidFill>
-                  <a:srgbClr val="07182A"/>
-                </a:solidFill>
-                <a:latin typeface="Arial"/>
-              </a:rPr>
-              <a:t>Образование</a:t>
-            </a:r>
-          </a:p>
-        </p:txBody>
-      </p:sp>
-      <p:sp>
-        <p:nvSpPr>
-          <p:cNvPr id="15" name="TextBox 14"/>
-          <p:cNvSpPr txBox="1"/>
-          <p:nvPr/>
-        </p:nvSpPr>
-        <p:spPr>
-          <a:xfrm>
-            <a:off x="548640" y="4617719"/>
-            <a:ext cx="5394960" cy="640080"/>
-          </a:xfrm>
-          <a:prstGeom prst="rect">
-            <a:avLst/>
-          </a:prstGeom>
-          <a:noFill/>
-        </p:spPr>
-        <p:txBody>
-          <a:bodyPr wrap="square">
-            <a:spAutoFit/>
-          </a:bodyPr>
-          <a:lstStyle/>
-          <a:p>
-            <a:pPr algn="l"/>
-            <a:r>
-              <a:rPr sz="1400" b="0">
-                <a:solidFill>
-                  <a:srgbClr val="3D5566"/>
-                </a:solidFill>
-                <a:latin typeface="Arial"/>
-              </a:rPr>
-              <a:t>Университеты Бишкека</a:t>
-            </a:r>
-          </a:p>
-        </p:txBody>
-      </p:sp>
-      <p:sp>
-        <p:nvSpPr>
-          <p:cNvPr id="16" name="Rectangle 15"/>
-          <p:cNvSpPr/>
-          <p:nvPr/>
-        </p:nvSpPr>
-        <p:spPr>
-          <a:xfrm>
-            <a:off x="6309359" y="3749039"/>
-            <a:ext cx="5394960" cy="54864"/>
-          </a:xfrm>
-          <a:prstGeom prst="rect">
-            <a:avLst/>
-          </a:prstGeom>
-          <a:solidFill>
-            <a:srgbClr val="1F8F5F"/>
-          </a:solidFill>
-          <a:ln>
-            <a:noFill/>
-          </a:ln>
-        </p:spPr>
-        <p:style>
-          <a:lnRef idx="1">
-            <a:schemeClr val="accent1"/>
-          </a:lnRef>
-          <a:fillRef idx="3">
-            <a:schemeClr val="accent1"/>
-          </a:fillRef>
-          <a:effectRef idx="2">
-            <a:schemeClr val="accent1"/>
-          </a:effectRef>
-          <a:fontRef idx="minor">
-            <a:schemeClr val="lt1"/>
-          </a:fontRef>
-        </p:style>
-        <p:txBody>
-          <a:bodyPr rtlCol="0" anchor="ctr"/>
-          <a:lstStyle/>
-          <a:p>
-            <a:pPr algn="ctr"/>
-          </a:p>
-        </p:txBody>
-      </p:sp>
-      <p:sp>
-        <p:nvSpPr>
-          <p:cNvPr id="17" name="TextBox 16"/>
-          <p:cNvSpPr txBox="1"/>
-          <p:nvPr/>
-        </p:nvSpPr>
-        <p:spPr>
-          <a:xfrm>
-            <a:off x="6309359" y="4069079"/>
-            <a:ext cx="5394960" cy="411480"/>
-          </a:xfrm>
-          <a:prstGeom prst="rect">
-            <a:avLst/>
-          </a:prstGeom>
-          <a:noFill/>
-        </p:spPr>
-        <p:txBody>
-          <a:bodyPr wrap="square">
-            <a:spAutoFit/>
-          </a:bodyPr>
-          <a:lstStyle/>
-          <a:p>
-            <a:pPr algn="l"/>
-            <a:r>
-              <a:rPr sz="1800" b="1">
-                <a:solidFill>
-                  <a:srgbClr val="07182A"/>
-                </a:solidFill>
-                <a:latin typeface="Arial"/>
-              </a:rPr>
-              <a:t>Обучение</a:t>
-            </a:r>
-          </a:p>
-        </p:txBody>
-      </p:sp>
-      <p:sp>
-        <p:nvSpPr>
-          <p:cNvPr id="18" name="TextBox 17"/>
-          <p:cNvSpPr txBox="1"/>
-          <p:nvPr/>
-        </p:nvSpPr>
-        <p:spPr>
-          <a:xfrm>
-            <a:off x="6309359" y="4617719"/>
-            <a:ext cx="5394960" cy="640080"/>
-          </a:xfrm>
-          <a:prstGeom prst="rect">
-            <a:avLst/>
-          </a:prstGeom>
-          <a:noFill/>
-        </p:spPr>
-        <p:txBody>
-          <a:bodyPr wrap="square">
-            <a:spAutoFit/>
-          </a:bodyPr>
-          <a:lstStyle/>
-          <a:p>
-            <a:pPr algn="l"/>
-            <a:r>
-              <a:rPr sz="1400" b="0">
-                <a:solidFill>
-                  <a:srgbClr val="3D5566"/>
-                </a:solidFill>
-                <a:latin typeface="Arial"/>
-              </a:rPr>
-              <a:t>Подготовка к сертификации ICB4</a:t>
-            </a:r>
-          </a:p>
-        </p:txBody>
-      </p:sp>
-      <p:sp>
-        <p:nvSpPr>
-          <p:cNvPr id="19" name="TextBox 18"/>
+          <p:cNvPr id="10" name="TextBox 9"/>
           <p:cNvSpPr txBox="1"/>
           <p:nvPr/>
         </p:nvSpPr>
@@ -4132,7 +3784,7 @@
             <a:r>
               <a:rPr sz="1100" b="0">
                 <a:solidFill>
-                  <a:srgbClr val="9AAFBD"/>
+                  <a:srgbClr val="7F96A8"/>
                 </a:solidFill>
                 <a:latin typeface="Arial"/>
               </a:rPr>
@@ -4143,7 +3795,7 @@
       </p:sp>
       <p:sp>
         <p:nvSpPr>
-          <p:cNvPr id="20" name="TextBox 19"/>
+          <p:cNvPr id="11" name="TextBox 10"/>
           <p:cNvSpPr txBox="1"/>
           <p:nvPr/>
         </p:nvSpPr>
@@ -4167,1083 +3819,11 @@
             <a:r>
               <a:rPr sz="1100" b="0">
                 <a:solidFill>
-                  <a:srgbClr val="9AAFBD"/>
-                </a:solidFill>
-                <a:latin typeface="Arial"/>
-              </a:rPr>
-              <a:t>10 / 12</a:t>
-            </a:r>
-          </a:p>
-        </p:txBody>
-      </p:sp>
-    </p:spTree>
-  </p:cSld>
-  <p:clrMapOvr>
-    <a:masterClrMapping/>
-  </p:clrMapOvr>
-</p:sld>
-</file>
-
-<file path=ppt/slides/slide11.xml><?xml version="1.0" encoding="utf-8"?>
-<p:sld xmlns:a="http://schemas.openxmlformats.org/drawingml/2006/main" xmlns:p="http://schemas.openxmlformats.org/presentationml/2006/main" xmlns:r="http://schemas.openxmlformats.org/officeDocument/2006/relationships">
-  <p:cSld>
-    <p:spTree>
-      <p:nvGrpSpPr>
-        <p:cNvPr id="1" name=""/>
-        <p:cNvGrpSpPr/>
-        <p:nvPr/>
-      </p:nvGrpSpPr>
-      <p:grpSpPr/>
-      <p:sp>
-        <p:nvSpPr>
-          <p:cNvPr id="2" name="Rectangle 1"/>
-          <p:cNvSpPr/>
-          <p:nvPr/>
-        </p:nvSpPr>
-        <p:spPr>
-          <a:xfrm>
-            <a:off x="0" y="0"/>
-            <a:ext cx="12191695" cy="6858000"/>
-          </a:xfrm>
-          <a:prstGeom prst="rect">
-            <a:avLst/>
-          </a:prstGeom>
-          <a:solidFill>
-            <a:srgbClr val="E8EEF2"/>
-          </a:solidFill>
-          <a:ln>
-            <a:noFill/>
-          </a:ln>
-        </p:spPr>
-        <p:style>
-          <a:lnRef idx="1">
-            <a:schemeClr val="accent1"/>
-          </a:lnRef>
-          <a:fillRef idx="3">
-            <a:schemeClr val="accent1"/>
-          </a:fillRef>
-          <a:effectRef idx="2">
-            <a:schemeClr val="accent1"/>
-          </a:effectRef>
-          <a:fontRef idx="minor">
-            <a:schemeClr val="lt1"/>
-          </a:fontRef>
-        </p:style>
-        <p:txBody>
-          <a:bodyPr rtlCol="0" anchor="ctr"/>
-          <a:lstStyle/>
-          <a:p>
-            <a:pPr algn="ctr"/>
-          </a:p>
-        </p:txBody>
-      </p:sp>
-      <p:sp>
-        <p:nvSpPr>
-          <p:cNvPr id="3" name="Rectangle 2"/>
-          <p:cNvSpPr/>
-          <p:nvPr/>
-        </p:nvSpPr>
-        <p:spPr>
-          <a:xfrm>
-            <a:off x="0" y="0"/>
-            <a:ext cx="12191695" cy="73152"/>
-          </a:xfrm>
-          <a:prstGeom prst="rect">
-            <a:avLst/>
-          </a:prstGeom>
-          <a:solidFill>
-            <a:srgbClr val="1F8F5F"/>
-          </a:solidFill>
-          <a:ln>
-            <a:noFill/>
-          </a:ln>
-        </p:spPr>
-        <p:style>
-          <a:lnRef idx="1">
-            <a:schemeClr val="accent1"/>
-          </a:lnRef>
-          <a:fillRef idx="3">
-            <a:schemeClr val="accent1"/>
-          </a:fillRef>
-          <a:effectRef idx="2">
-            <a:schemeClr val="accent1"/>
-          </a:effectRef>
-          <a:fontRef idx="minor">
-            <a:schemeClr val="lt1"/>
-          </a:fontRef>
-        </p:style>
-        <p:txBody>
-          <a:bodyPr rtlCol="0" anchor="ctr"/>
-          <a:lstStyle/>
-          <a:p>
-            <a:pPr algn="ctr"/>
-          </a:p>
-        </p:txBody>
-      </p:sp>
-      <p:pic>
-        <p:nvPicPr>
-          <p:cNvPr id="4" name="Picture 3" descr="ipma-kr-emblem.png"/>
-          <p:cNvPicPr>
-            <a:picLocks noChangeAspect="1"/>
-          </p:cNvPicPr>
-          <p:nvPr/>
-        </p:nvPicPr>
-        <p:blipFill>
-          <a:blip r:embed="rId2"/>
-          <a:stretch>
-            <a:fillRect/>
-          </a:stretch>
-        </p:blipFill>
-        <p:spPr>
-          <a:xfrm>
-            <a:off x="11338560" y="256032"/>
-            <a:ext cx="505533" cy="502920"/>
-          </a:xfrm>
-          <a:prstGeom prst="rect">
-            <a:avLst/>
-          </a:prstGeom>
-        </p:spPr>
-      </p:pic>
-      <p:sp>
-        <p:nvSpPr>
-          <p:cNvPr id="5" name="TextBox 4"/>
-          <p:cNvSpPr txBox="1"/>
-          <p:nvPr/>
-        </p:nvSpPr>
-        <p:spPr>
-          <a:xfrm>
-            <a:off x="548640" y="320040"/>
-            <a:ext cx="10058400" cy="274320"/>
-          </a:xfrm>
-          <a:prstGeom prst="rect">
-            <a:avLst/>
-          </a:prstGeom>
-          <a:noFill/>
-        </p:spPr>
-        <p:txBody>
-          <a:bodyPr wrap="square">
-            <a:spAutoFit/>
-          </a:bodyPr>
-          <a:lstStyle/>
-          <a:p>
-            <a:pPr algn="l"/>
-            <a:r>
-              <a:rPr sz="1100" b="1">
-                <a:solidFill>
-                  <a:srgbClr val="1F8F5F"/>
-                </a:solidFill>
-                <a:latin typeface="Arial"/>
-              </a:rPr>
-              <a:t>11  »  МОЛОДЁЖЬ</a:t>
-            </a:r>
-          </a:p>
-        </p:txBody>
-      </p:sp>
-      <p:sp>
-        <p:nvSpPr>
-          <p:cNvPr id="6" name="TextBox 5"/>
-          <p:cNvSpPr txBox="1"/>
-          <p:nvPr/>
-        </p:nvSpPr>
-        <p:spPr>
-          <a:xfrm>
-            <a:off x="548640" y="640080"/>
-            <a:ext cx="10058400" cy="640080"/>
-          </a:xfrm>
-          <a:prstGeom prst="rect">
-            <a:avLst/>
-          </a:prstGeom>
-          <a:noFill/>
-        </p:spPr>
-        <p:txBody>
-          <a:bodyPr wrap="square">
-            <a:spAutoFit/>
-          </a:bodyPr>
-          <a:lstStyle/>
-          <a:p>
-            <a:pPr algn="l"/>
-            <a:r>
-              <a:rPr sz="3200" b="1">
-                <a:solidFill>
-                  <a:srgbClr val="07182A"/>
-                </a:solidFill>
-                <a:latin typeface="Arial"/>
-              </a:rPr>
-              <a:t>Young Crew</a:t>
-            </a:r>
-          </a:p>
-        </p:txBody>
-      </p:sp>
-      <p:sp>
-        <p:nvSpPr>
-          <p:cNvPr id="7" name="TextBox 6"/>
-          <p:cNvSpPr txBox="1"/>
-          <p:nvPr/>
-        </p:nvSpPr>
-        <p:spPr>
-          <a:xfrm>
-            <a:off x="548640" y="1417320"/>
-            <a:ext cx="457200" cy="365760"/>
-          </a:xfrm>
-          <a:prstGeom prst="rect">
-            <a:avLst/>
-          </a:prstGeom>
-          <a:noFill/>
-        </p:spPr>
-        <p:txBody>
-          <a:bodyPr wrap="square">
-            <a:spAutoFit/>
-          </a:bodyPr>
-          <a:lstStyle/>
-          <a:p>
-            <a:pPr algn="l"/>
-            <a:r>
-              <a:rPr sz="1600" b="1">
-                <a:solidFill>
-                  <a:srgbClr val="E30613"/>
-                </a:solidFill>
-                <a:latin typeface="Arial"/>
-              </a:rPr>
-              <a:t>»</a:t>
-            </a:r>
-          </a:p>
-        </p:txBody>
-      </p:sp>
-      <p:sp>
-        <p:nvSpPr>
-          <p:cNvPr id="8" name="TextBox 7"/>
-          <p:cNvSpPr txBox="1"/>
-          <p:nvPr/>
-        </p:nvSpPr>
-        <p:spPr>
-          <a:xfrm>
-            <a:off x="1097280" y="1417320"/>
-            <a:ext cx="10058400" cy="411480"/>
-          </a:xfrm>
-          <a:prstGeom prst="rect">
-            <a:avLst/>
-          </a:prstGeom>
-          <a:noFill/>
-        </p:spPr>
-        <p:txBody>
-          <a:bodyPr wrap="square">
-            <a:spAutoFit/>
-          </a:bodyPr>
-          <a:lstStyle/>
-          <a:p>
-            <a:pPr algn="l"/>
-            <a:r>
-              <a:rPr sz="1500" b="0">
-                <a:solidFill>
-                  <a:srgbClr val="122433"/>
-                </a:solidFill>
-                <a:latin typeface="Arial"/>
-              </a:rPr>
-              <a:t>Знакомить молодёжь со стандартами и ценностями IPMA</a:t>
-            </a:r>
-          </a:p>
-        </p:txBody>
-      </p:sp>
-      <p:sp>
-        <p:nvSpPr>
-          <p:cNvPr id="9" name="TextBox 8"/>
-          <p:cNvSpPr txBox="1"/>
-          <p:nvPr/>
-        </p:nvSpPr>
-        <p:spPr>
-          <a:xfrm>
-            <a:off x="548640" y="2103120"/>
-            <a:ext cx="457200" cy="365760"/>
-          </a:xfrm>
-          <a:prstGeom prst="rect">
-            <a:avLst/>
-          </a:prstGeom>
-          <a:noFill/>
-        </p:spPr>
-        <p:txBody>
-          <a:bodyPr wrap="square">
-            <a:spAutoFit/>
-          </a:bodyPr>
-          <a:lstStyle/>
-          <a:p>
-            <a:pPr algn="l"/>
-            <a:r>
-              <a:rPr sz="1600" b="1">
-                <a:solidFill>
-                  <a:srgbClr val="E30613"/>
-                </a:solidFill>
-                <a:latin typeface="Arial"/>
-              </a:rPr>
-              <a:t>»</a:t>
-            </a:r>
-          </a:p>
-        </p:txBody>
-      </p:sp>
-      <p:sp>
-        <p:nvSpPr>
-          <p:cNvPr id="10" name="TextBox 9"/>
-          <p:cNvSpPr txBox="1"/>
-          <p:nvPr/>
-        </p:nvSpPr>
-        <p:spPr>
-          <a:xfrm>
-            <a:off x="1097280" y="2103120"/>
-            <a:ext cx="10058400" cy="411480"/>
-          </a:xfrm>
-          <a:prstGeom prst="rect">
-            <a:avLst/>
-          </a:prstGeom>
-          <a:noFill/>
-        </p:spPr>
-        <p:txBody>
-          <a:bodyPr wrap="square">
-            <a:spAutoFit/>
-          </a:bodyPr>
-          <a:lstStyle/>
-          <a:p>
-            <a:pPr algn="l"/>
-            <a:r>
-              <a:rPr sz="1500" b="0">
-                <a:solidFill>
-                  <a:srgbClr val="122433"/>
-                </a:solidFill>
-                <a:latin typeface="Arial"/>
-              </a:rPr>
-              <a:t>Привлекать студентов через студенческое членство KgPMU</a:t>
-            </a:r>
-          </a:p>
-        </p:txBody>
-      </p:sp>
-      <p:sp>
-        <p:nvSpPr>
-          <p:cNvPr id="11" name="TextBox 10"/>
-          <p:cNvSpPr txBox="1"/>
-          <p:nvPr/>
-        </p:nvSpPr>
-        <p:spPr>
-          <a:xfrm>
-            <a:off x="548640" y="2788920"/>
-            <a:ext cx="457200" cy="365760"/>
-          </a:xfrm>
-          <a:prstGeom prst="rect">
-            <a:avLst/>
-          </a:prstGeom>
-          <a:noFill/>
-        </p:spPr>
-        <p:txBody>
-          <a:bodyPr wrap="square">
-            <a:spAutoFit/>
-          </a:bodyPr>
-          <a:lstStyle/>
-          <a:p>
-            <a:pPr algn="l"/>
-            <a:r>
-              <a:rPr sz="1600" b="1">
-                <a:solidFill>
-                  <a:srgbClr val="E30613"/>
-                </a:solidFill>
-                <a:latin typeface="Arial"/>
-              </a:rPr>
-              <a:t>»</a:t>
-            </a:r>
-          </a:p>
-        </p:txBody>
-      </p:sp>
-      <p:sp>
-        <p:nvSpPr>
-          <p:cNvPr id="12" name="TextBox 11"/>
-          <p:cNvSpPr txBox="1"/>
-          <p:nvPr/>
-        </p:nvSpPr>
-        <p:spPr>
-          <a:xfrm>
-            <a:off x="1097280" y="2788920"/>
-            <a:ext cx="10058400" cy="411480"/>
-          </a:xfrm>
-          <a:prstGeom prst="rect">
-            <a:avLst/>
-          </a:prstGeom>
-          <a:noFill/>
-        </p:spPr>
-        <p:txBody>
-          <a:bodyPr wrap="square">
-            <a:spAutoFit/>
-          </a:bodyPr>
-          <a:lstStyle/>
-          <a:p>
-            <a:pPr algn="l"/>
-            <a:r>
-              <a:rPr sz="1500" b="0">
-                <a:solidFill>
-                  <a:srgbClr val="122433"/>
-                </a:solidFill>
-                <a:latin typeface="Arial"/>
-              </a:rPr>
-              <a:t>Интегрировать ICB4 в образовательные программы вузов</a:t>
-            </a:r>
-          </a:p>
-        </p:txBody>
-      </p:sp>
-      <p:sp>
-        <p:nvSpPr>
-          <p:cNvPr id="13" name="TextBox 12"/>
-          <p:cNvSpPr txBox="1"/>
-          <p:nvPr/>
-        </p:nvSpPr>
-        <p:spPr>
-          <a:xfrm>
-            <a:off x="548640" y="3474720"/>
-            <a:ext cx="457200" cy="365760"/>
-          </a:xfrm>
-          <a:prstGeom prst="rect">
-            <a:avLst/>
-          </a:prstGeom>
-          <a:noFill/>
-        </p:spPr>
-        <p:txBody>
-          <a:bodyPr wrap="square">
-            <a:spAutoFit/>
-          </a:bodyPr>
-          <a:lstStyle/>
-          <a:p>
-            <a:pPr algn="l"/>
-            <a:r>
-              <a:rPr sz="1600" b="1">
-                <a:solidFill>
-                  <a:srgbClr val="E30613"/>
-                </a:solidFill>
-                <a:latin typeface="Arial"/>
-              </a:rPr>
-              <a:t>»</a:t>
-            </a:r>
-          </a:p>
-        </p:txBody>
-      </p:sp>
-      <p:sp>
-        <p:nvSpPr>
-          <p:cNvPr id="14" name="TextBox 13"/>
-          <p:cNvSpPr txBox="1"/>
-          <p:nvPr/>
-        </p:nvSpPr>
-        <p:spPr>
-          <a:xfrm>
-            <a:off x="1097280" y="3474720"/>
-            <a:ext cx="10058400" cy="411480"/>
-          </a:xfrm>
-          <a:prstGeom prst="rect">
-            <a:avLst/>
-          </a:prstGeom>
-          <a:noFill/>
-        </p:spPr>
-        <p:txBody>
-          <a:bodyPr wrap="square">
-            <a:spAutoFit/>
-          </a:bodyPr>
-          <a:lstStyle/>
-          <a:p>
-            <a:pPr algn="l"/>
-            <a:r>
-              <a:rPr sz="1500" b="0">
-                <a:solidFill>
-                  <a:srgbClr val="122433"/>
-                </a:solidFill>
-                <a:latin typeface="Arial"/>
-              </a:rPr>
-              <a:t>Путь к сертификации IPMA Level D</a:t>
-            </a:r>
-          </a:p>
-        </p:txBody>
-      </p:sp>
-      <p:sp>
-        <p:nvSpPr>
-          <p:cNvPr id="15" name="TextBox 14"/>
-          <p:cNvSpPr txBox="1"/>
-          <p:nvPr/>
-        </p:nvSpPr>
-        <p:spPr>
-          <a:xfrm>
-            <a:off x="548640" y="4160520"/>
-            <a:ext cx="457200" cy="365760"/>
-          </a:xfrm>
-          <a:prstGeom prst="rect">
-            <a:avLst/>
-          </a:prstGeom>
-          <a:noFill/>
-        </p:spPr>
-        <p:txBody>
-          <a:bodyPr wrap="square">
-            <a:spAutoFit/>
-          </a:bodyPr>
-          <a:lstStyle/>
-          <a:p>
-            <a:pPr algn="l"/>
-            <a:r>
-              <a:rPr sz="1600" b="1">
-                <a:solidFill>
-                  <a:srgbClr val="E30613"/>
-                </a:solidFill>
-                <a:latin typeface="Arial"/>
-              </a:rPr>
-              <a:t>»</a:t>
-            </a:r>
-          </a:p>
-        </p:txBody>
-      </p:sp>
-      <p:sp>
-        <p:nvSpPr>
-          <p:cNvPr id="16" name="TextBox 15"/>
-          <p:cNvSpPr txBox="1"/>
-          <p:nvPr/>
-        </p:nvSpPr>
-        <p:spPr>
-          <a:xfrm>
-            <a:off x="1097280" y="4160520"/>
-            <a:ext cx="10058400" cy="411480"/>
-          </a:xfrm>
-          <a:prstGeom prst="rect">
-            <a:avLst/>
-          </a:prstGeom>
-          <a:noFill/>
-        </p:spPr>
-        <p:txBody>
-          <a:bodyPr wrap="square">
-            <a:spAutoFit/>
-          </a:bodyPr>
-          <a:lstStyle/>
-          <a:p>
-            <a:pPr algn="l"/>
-            <a:r>
-              <a:rPr sz="1500" b="0">
-                <a:solidFill>
-                  <a:srgbClr val="122433"/>
-                </a:solidFill>
-                <a:latin typeface="Arial"/>
-              </a:rPr>
-              <a:t>Участие в международных форумах Young Crew</a:t>
-            </a:r>
-          </a:p>
-        </p:txBody>
-      </p:sp>
-      <p:sp>
-        <p:nvSpPr>
-          <p:cNvPr id="17" name="Rounded Rectangle 16"/>
-          <p:cNvSpPr/>
-          <p:nvPr/>
-        </p:nvSpPr>
-        <p:spPr>
-          <a:xfrm>
-            <a:off x="548640" y="5120640"/>
-            <a:ext cx="11064240" cy="685800"/>
-          </a:xfrm>
-          <a:prstGeom prst="roundRect">
-            <a:avLst/>
-          </a:prstGeom>
-          <a:solidFill>
-            <a:srgbClr val="07182A"/>
-          </a:solidFill>
-          <a:ln>
-            <a:noFill/>
-          </a:ln>
-        </p:spPr>
-        <p:style>
-          <a:lnRef idx="1">
-            <a:schemeClr val="accent1"/>
-          </a:lnRef>
-          <a:fillRef idx="3">
-            <a:schemeClr val="accent1"/>
-          </a:fillRef>
-          <a:effectRef idx="2">
-            <a:schemeClr val="accent1"/>
-          </a:effectRef>
-          <a:fontRef idx="minor">
-            <a:schemeClr val="lt1"/>
-          </a:fontRef>
-        </p:style>
-        <p:txBody>
-          <a:bodyPr rtlCol="0" anchor="ctr"/>
-          <a:lstStyle/>
-          <a:p>
-            <a:pPr algn="ctr"/>
-          </a:p>
-        </p:txBody>
-      </p:sp>
-      <p:sp>
-        <p:nvSpPr>
-          <p:cNvPr id="18" name="TextBox 17"/>
-          <p:cNvSpPr txBox="1"/>
-          <p:nvPr/>
-        </p:nvSpPr>
-        <p:spPr>
-          <a:xfrm>
-            <a:off x="822960" y="5285232"/>
-            <a:ext cx="10515600" cy="365760"/>
-          </a:xfrm>
-          <a:prstGeom prst="rect">
-            <a:avLst/>
-          </a:prstGeom>
-          <a:noFill/>
-        </p:spPr>
-        <p:txBody>
-          <a:bodyPr wrap="square">
-            <a:spAutoFit/>
-          </a:bodyPr>
-          <a:lstStyle/>
-          <a:p>
-            <a:pPr algn="l"/>
-            <a:r>
-              <a:rPr sz="1400" b="1">
-                <a:solidFill>
-                  <a:srgbClr val="FFFFFF"/>
-                </a:solidFill>
-                <a:latin typeface="Arial"/>
-              </a:rPr>
-              <a:t>Поддержка будущего профессии P3M в Кыргызстане</a:t>
-            </a:r>
-          </a:p>
-        </p:txBody>
-      </p:sp>
-      <p:sp>
-        <p:nvSpPr>
-          <p:cNvPr id="19" name="TextBox 18"/>
-          <p:cNvSpPr txBox="1"/>
-          <p:nvPr/>
-        </p:nvSpPr>
-        <p:spPr>
-          <a:xfrm>
-            <a:off x="502920" y="6446520"/>
-            <a:ext cx="8229600" cy="274320"/>
-          </a:xfrm>
-          <a:prstGeom prst="rect">
-            <a:avLst/>
-          </a:prstGeom>
-          <a:noFill/>
-        </p:spPr>
-        <p:txBody>
-          <a:bodyPr wrap="square">
-            <a:spAutoFit/>
-          </a:bodyPr>
-          <a:lstStyle/>
-          <a:p>
-            <a:pPr algn="l"/>
-            <a:r>
-              <a:rPr sz="1100" b="0">
-                <a:solidFill>
-                  <a:srgbClr val="9AAFBD"/>
-                </a:solidFill>
-                <a:latin typeface="Arial"/>
-              </a:rPr>
-              <a:t>IPMA Kyrgyz Republic  ·  ipma.kg</a:t>
-            </a:r>
-          </a:p>
-        </p:txBody>
-      </p:sp>
-      <p:sp>
-        <p:nvSpPr>
-          <p:cNvPr id="20" name="TextBox 19"/>
-          <p:cNvSpPr txBox="1"/>
-          <p:nvPr/>
-        </p:nvSpPr>
-        <p:spPr>
-          <a:xfrm>
-            <a:off x="10424160" y="6446520"/>
-            <a:ext cx="1371600" cy="274320"/>
-          </a:xfrm>
-          <a:prstGeom prst="rect">
-            <a:avLst/>
-          </a:prstGeom>
-          <a:noFill/>
-        </p:spPr>
-        <p:txBody>
-          <a:bodyPr wrap="square">
-            <a:spAutoFit/>
-          </a:bodyPr>
-          <a:lstStyle/>
-          <a:p>
-            <a:pPr algn="r"/>
-            <a:r>
-              <a:rPr sz="1100" b="0">
-                <a:solidFill>
-                  <a:srgbClr val="9AAFBD"/>
-                </a:solidFill>
-                <a:latin typeface="Arial"/>
-              </a:rPr>
-              <a:t>11 / 12</a:t>
-            </a:r>
-          </a:p>
-        </p:txBody>
-      </p:sp>
-    </p:spTree>
-  </p:cSld>
-  <p:clrMapOvr>
-    <a:masterClrMapping/>
-  </p:clrMapOvr>
-</p:sld>
-</file>
-
-<file path=ppt/slides/slide12.xml><?xml version="1.0" encoding="utf-8"?>
-<p:sld xmlns:a="http://schemas.openxmlformats.org/drawingml/2006/main" xmlns:p="http://schemas.openxmlformats.org/presentationml/2006/main" xmlns:r="http://schemas.openxmlformats.org/officeDocument/2006/relationships">
-  <p:cSld>
-    <p:spTree>
-      <p:nvGrpSpPr>
-        <p:cNvPr id="1" name=""/>
-        <p:cNvGrpSpPr/>
-        <p:nvPr/>
-      </p:nvGrpSpPr>
-      <p:grpSpPr/>
-      <p:sp>
-        <p:nvSpPr>
-          <p:cNvPr id="2" name="Rectangle 1"/>
-          <p:cNvSpPr/>
-          <p:nvPr/>
-        </p:nvSpPr>
-        <p:spPr>
-          <a:xfrm>
-            <a:off x="0" y="0"/>
-            <a:ext cx="12191695" cy="6858000"/>
-          </a:xfrm>
-          <a:prstGeom prst="rect">
-            <a:avLst/>
-          </a:prstGeom>
-          <a:solidFill>
-            <a:srgbClr val="07182A"/>
-          </a:solidFill>
-          <a:ln>
-            <a:noFill/>
-          </a:ln>
-        </p:spPr>
-        <p:style>
-          <a:lnRef idx="1">
-            <a:schemeClr val="accent1"/>
-          </a:lnRef>
-          <a:fillRef idx="3">
-            <a:schemeClr val="accent1"/>
-          </a:fillRef>
-          <a:effectRef idx="2">
-            <a:schemeClr val="accent1"/>
-          </a:effectRef>
-          <a:fontRef idx="minor">
-            <a:schemeClr val="lt1"/>
-          </a:fontRef>
-        </p:style>
-        <p:txBody>
-          <a:bodyPr rtlCol="0" anchor="ctr"/>
-          <a:lstStyle/>
-          <a:p>
-            <a:pPr algn="ctr"/>
-          </a:p>
-        </p:txBody>
-      </p:sp>
-      <p:sp>
-        <p:nvSpPr>
-          <p:cNvPr id="3" name="TextBox 2"/>
-          <p:cNvSpPr txBox="1"/>
-          <p:nvPr/>
-        </p:nvSpPr>
-        <p:spPr>
-          <a:xfrm>
-            <a:off x="10789920" y="5120640"/>
-            <a:ext cx="1828800" cy="1371600"/>
-          </a:xfrm>
-          <a:prstGeom prst="rect">
-            <a:avLst/>
-          </a:prstGeom>
-          <a:noFill/>
-        </p:spPr>
-        <p:txBody>
-          <a:bodyPr wrap="square">
-            <a:spAutoFit/>
-          </a:bodyPr>
-          <a:lstStyle/>
-          <a:p>
-            <a:pPr algn="l"/>
-            <a:r>
-              <a:rPr sz="12000" b="1">
-                <a:solidFill>
-                  <a:srgbClr val="E30613"/>
-                </a:solidFill>
-                <a:latin typeface="Arial"/>
-              </a:rPr>
-              <a:t>»</a:t>
-            </a:r>
-          </a:p>
-        </p:txBody>
-      </p:sp>
-      <p:sp>
-        <p:nvSpPr>
-          <p:cNvPr id="4" name="Rounded Rectangle 3"/>
-          <p:cNvSpPr/>
-          <p:nvPr/>
-        </p:nvSpPr>
-        <p:spPr>
-          <a:xfrm>
-            <a:off x="640080" y="1051560"/>
-            <a:ext cx="2011680" cy="384048"/>
-          </a:xfrm>
-          <a:prstGeom prst="roundRect">
-            <a:avLst/>
-          </a:prstGeom>
-          <a:solidFill>
-            <a:srgbClr val="0F2C45"/>
-          </a:solidFill>
-          <a:ln>
-            <a:noFill/>
-          </a:ln>
-        </p:spPr>
-        <p:style>
-          <a:lnRef idx="1">
-            <a:schemeClr val="accent1"/>
-          </a:lnRef>
-          <a:fillRef idx="3">
-            <a:schemeClr val="accent1"/>
-          </a:fillRef>
-          <a:effectRef idx="2">
-            <a:schemeClr val="accent1"/>
-          </a:effectRef>
-          <a:fontRef idx="minor">
-            <a:schemeClr val="lt1"/>
-          </a:fontRef>
-        </p:style>
-        <p:txBody>
-          <a:bodyPr rtlCol="0" anchor="ctr"/>
-          <a:lstStyle/>
-          <a:p>
-            <a:pPr algn="ctr"/>
-          </a:p>
-        </p:txBody>
-      </p:sp>
-      <p:sp>
-        <p:nvSpPr>
-          <p:cNvPr id="5" name="TextBox 4"/>
-          <p:cNvSpPr txBox="1"/>
-          <p:nvPr/>
-        </p:nvSpPr>
-        <p:spPr>
-          <a:xfrm>
-            <a:off x="777240" y="1115568"/>
-            <a:ext cx="1828800" cy="274320"/>
-          </a:xfrm>
-          <a:prstGeom prst="rect">
-            <a:avLst/>
-          </a:prstGeom>
-          <a:noFill/>
-        </p:spPr>
-        <p:txBody>
-          <a:bodyPr wrap="square">
-            <a:spAutoFit/>
-          </a:bodyPr>
-          <a:lstStyle/>
-          <a:p>
-            <a:pPr algn="l"/>
-            <a:r>
-              <a:rPr sz="1100" b="1">
-                <a:solidFill>
-                  <a:srgbClr val="3DD68C"/>
-                </a:solidFill>
-                <a:latin typeface="Arial"/>
-              </a:rPr>
-              <a:t>СПАСИБО</a:t>
-            </a:r>
-          </a:p>
-        </p:txBody>
-      </p:sp>
-      <p:sp>
-        <p:nvSpPr>
-          <p:cNvPr id="6" name="TextBox 5"/>
-          <p:cNvSpPr txBox="1"/>
-          <p:nvPr/>
-        </p:nvSpPr>
-        <p:spPr>
-          <a:xfrm>
-            <a:off x="640080" y="1737360"/>
-            <a:ext cx="6400800" cy="1463040"/>
-          </a:xfrm>
-          <a:prstGeom prst="rect">
-            <a:avLst/>
-          </a:prstGeom>
-          <a:noFill/>
-        </p:spPr>
-        <p:txBody>
-          <a:bodyPr wrap="square">
-            <a:spAutoFit/>
-          </a:bodyPr>
-          <a:lstStyle/>
-          <a:p>
-            <a:pPr algn="l"/>
-            <a:r>
-              <a:rPr sz="3600" b="1">
-                <a:solidFill>
-                  <a:srgbClr val="FFFFFF"/>
-                </a:solidFill>
-                <a:latin typeface="Arial"/>
-              </a:rPr>
-              <a:t>Приглашаем
-к сотрудничеству</a:t>
-            </a:r>
-          </a:p>
-        </p:txBody>
-      </p:sp>
-      <p:sp>
-        <p:nvSpPr>
-          <p:cNvPr id="7" name="TextBox 6"/>
-          <p:cNvSpPr txBox="1"/>
-          <p:nvPr/>
-        </p:nvSpPr>
-        <p:spPr>
-          <a:xfrm>
-            <a:off x="640080" y="3474720"/>
-            <a:ext cx="5943600" cy="914400"/>
-          </a:xfrm>
-          <a:prstGeom prst="rect">
-            <a:avLst/>
-          </a:prstGeom>
-          <a:noFill/>
-        </p:spPr>
-        <p:txBody>
-          <a:bodyPr wrap="square">
-            <a:spAutoFit/>
-          </a:bodyPr>
-          <a:lstStyle/>
-          <a:p>
-            <a:pPr algn="l"/>
-            <a:r>
-              <a:rPr sz="1400" b="0">
-                <a:solidFill>
-                  <a:srgbClr val="B7CBD8"/>
-                </a:solidFill>
-                <a:latin typeface="Arial"/>
-              </a:rPr>
-              <a:t>Уже Ассоциация-заявитель. Следующий шаг — Full MA, сертификация и голос Центральной Азии в семье IPMA.</a:t>
-            </a:r>
-          </a:p>
-        </p:txBody>
-      </p:sp>
-      <p:sp>
-        <p:nvSpPr>
-          <p:cNvPr id="8" name="TextBox 7"/>
-          <p:cNvSpPr txBox="1"/>
-          <p:nvPr/>
-        </p:nvSpPr>
-        <p:spPr>
-          <a:xfrm>
-            <a:off x="640080" y="4663440"/>
-            <a:ext cx="5943600" cy="914400"/>
-          </a:xfrm>
-          <a:prstGeom prst="rect">
-            <a:avLst/>
-          </a:prstGeom>
-          <a:noFill/>
-        </p:spPr>
-        <p:txBody>
-          <a:bodyPr wrap="square">
-            <a:spAutoFit/>
-          </a:bodyPr>
-          <a:lstStyle/>
-          <a:p>
-            <a:pPr algn="l"/>
-            <a:r>
-              <a:rPr sz="1400" b="0">
-                <a:solidFill>
-                  <a:srgbClr val="3DD68C"/>
-                </a:solidFill>
-                <a:latin typeface="Arial"/>
-              </a:rPr>
-              <a:t>info@ipma.kg
-+996 555 655 755 · ipma.kg
-Урмат Мекишев · Президент · Бишкек</a:t>
-            </a:r>
-          </a:p>
-        </p:txBody>
-      </p:sp>
-      <p:pic>
-        <p:nvPicPr>
-          <p:cNvPr id="9" name="Picture 8" descr="ipma-kr-logo-white.png"/>
-          <p:cNvPicPr>
-            <a:picLocks noChangeAspect="1"/>
-          </p:cNvPicPr>
-          <p:nvPr/>
-        </p:nvPicPr>
-        <p:blipFill>
-          <a:blip r:embed="rId2"/>
-          <a:stretch>
-            <a:fillRect/>
-          </a:stretch>
-        </p:blipFill>
-        <p:spPr>
-          <a:xfrm>
-            <a:off x="7132320" y="2286000"/>
-            <a:ext cx="4114800" cy="1202649"/>
-          </a:xfrm>
-          <a:prstGeom prst="rect">
-            <a:avLst/>
-          </a:prstGeom>
-        </p:spPr>
-      </p:pic>
-      <p:sp>
-        <p:nvSpPr>
-          <p:cNvPr id="10" name="TextBox 9"/>
-          <p:cNvSpPr txBox="1"/>
-          <p:nvPr/>
-        </p:nvSpPr>
-        <p:spPr>
-          <a:xfrm>
-            <a:off x="502920" y="6446520"/>
-            <a:ext cx="8229600" cy="274320"/>
-          </a:xfrm>
-          <a:prstGeom prst="rect">
-            <a:avLst/>
-          </a:prstGeom>
-          <a:noFill/>
-        </p:spPr>
-        <p:txBody>
-          <a:bodyPr wrap="square">
-            <a:spAutoFit/>
-          </a:bodyPr>
-          <a:lstStyle/>
-          <a:p>
-            <a:pPr algn="l"/>
-            <a:r>
-              <a:rPr sz="1100" b="0">
-                <a:solidFill>
                   <a:srgbClr val="7F96A8"/>
                 </a:solidFill>
                 <a:latin typeface="Arial"/>
               </a:rPr>
-              <a:t>IPMA Kyrgyz Republic  ·  ipma.kg</a:t>
-            </a:r>
-          </a:p>
-        </p:txBody>
-      </p:sp>
-      <p:sp>
-        <p:nvSpPr>
-          <p:cNvPr id="11" name="TextBox 10"/>
-          <p:cNvSpPr txBox="1"/>
-          <p:nvPr/>
-        </p:nvSpPr>
-        <p:spPr>
-          <a:xfrm>
-            <a:off x="10424160" y="6446520"/>
-            <a:ext cx="1371600" cy="274320"/>
-          </a:xfrm>
-          <a:prstGeom prst="rect">
-            <a:avLst/>
-          </a:prstGeom>
-          <a:noFill/>
-        </p:spPr>
-        <p:txBody>
-          <a:bodyPr wrap="square">
-            <a:spAutoFit/>
-          </a:bodyPr>
-          <a:lstStyle/>
-          <a:p>
-            <a:pPr algn="r"/>
-            <a:r>
-              <a:rPr sz="1100" b="0">
-                <a:solidFill>
-                  <a:srgbClr val="7F96A8"/>
-                </a:solidFill>
-                <a:latin typeface="Arial"/>
-              </a:rPr>
-              <a:t>12 / 12</a:t>
+              <a:t>10 / 10</a:t>
             </a:r>
           </a:p>
         </p:txBody>
@@ -5318,7 +3898,7 @@
         <p:spPr>
           <a:xfrm>
             <a:off x="0" y="0"/>
-            <a:ext cx="12191695" cy="73152"/>
+            <a:ext cx="12191695" cy="64008"/>
           </a:xfrm>
           <a:prstGeom prst="rect">
             <a:avLst/>
@@ -5406,7 +3986,7 @@
                 </a:solidFill>
                 <a:latin typeface="Arial"/>
               </a:rPr>
-              <a:t>02  »  ВВЕДЕНИЕ</a:t>
+              <a:t>02  »  КТО МЫ</a:t>
             </a:r>
           </a:p>
         </p:txBody>
@@ -5420,48 +4000,121 @@
         <p:spPr>
           <a:xfrm>
             <a:off x="548640" y="640080"/>
-            <a:ext cx="10058400" cy="640080"/>
-          </a:xfrm>
-          <a:prstGeom prst="rect">
-            <a:avLst/>
-          </a:prstGeom>
-          <a:noFill/>
-        </p:spPr>
-        <p:txBody>
-          <a:bodyPr wrap="square">
-            <a:spAutoFit/>
-          </a:bodyPr>
-          <a:lstStyle/>
-          <a:p>
-            <a:pPr algn="l"/>
-            <a:r>
-              <a:rPr sz="3200" b="1">
+            <a:ext cx="10515600" cy="594360"/>
+          </a:xfrm>
+          <a:prstGeom prst="rect">
+            <a:avLst/>
+          </a:prstGeom>
+          <a:noFill/>
+        </p:spPr>
+        <p:txBody>
+          <a:bodyPr wrap="square">
+            <a:spAutoFit/>
+          </a:bodyPr>
+          <a:lstStyle/>
+          <a:p>
+            <a:pPr algn="l"/>
+            <a:r>
+              <a:rPr sz="3000" b="1">
                 <a:solidFill>
                   <a:srgbClr val="07182A"/>
                 </a:solidFill>
                 <a:latin typeface="Arial"/>
               </a:rPr>
-              <a:t>Кто ведёт ассоциацию</a:t>
-            </a:r>
-          </a:p>
-        </p:txBody>
-      </p:sp>
-      <p:sp>
-        <p:nvSpPr>
-          <p:cNvPr id="7" name="Rectangle 6"/>
+              <a:t>Президент KgPMU</a:t>
+            </a:r>
+          </a:p>
+        </p:txBody>
+      </p:sp>
+      <p:sp>
+        <p:nvSpPr>
+          <p:cNvPr id="7" name="TextBox 6"/>
+          <p:cNvSpPr txBox="1"/>
+          <p:nvPr/>
+        </p:nvSpPr>
+        <p:spPr>
+          <a:xfrm>
+            <a:off x="548640" y="1371600"/>
+            <a:ext cx="10972800" cy="365760"/>
+          </a:xfrm>
+          <a:prstGeom prst="rect">
+            <a:avLst/>
+          </a:prstGeom>
+          <a:noFill/>
+        </p:spPr>
+        <p:txBody>
+          <a:bodyPr wrap="square">
+            <a:spAutoFit/>
+          </a:bodyPr>
+          <a:lstStyle/>
+          <a:p>
+            <a:pPr algn="l"/>
+            <a:r>
+              <a:rPr sz="1500" b="1">
+                <a:solidFill>
+                  <a:srgbClr val="1F8F5F"/>
+                </a:solidFill>
+                <a:latin typeface="Arial"/>
+              </a:rPr>
+              <a:t>Мекишев Урмат Казбекович — сертифицированный эксперт IPMA Level B</a:t>
+            </a:r>
+          </a:p>
+        </p:txBody>
+      </p:sp>
+      <p:sp>
+        <p:nvSpPr>
+          <p:cNvPr id="8" name="TextBox 7"/>
+          <p:cNvSpPr txBox="1"/>
+          <p:nvPr/>
+        </p:nvSpPr>
+        <p:spPr>
+          <a:xfrm>
+            <a:off x="548640" y="1920240"/>
+            <a:ext cx="6858000" cy="3474720"/>
+          </a:xfrm>
+          <a:prstGeom prst="rect">
+            <a:avLst/>
+          </a:prstGeom>
+          <a:noFill/>
+        </p:spPr>
+        <p:txBody>
+          <a:bodyPr wrap="square">
+            <a:spAutoFit/>
+          </a:bodyPr>
+          <a:lstStyle/>
+          <a:p>
+            <a:pPr algn="l"/>
+            <a:r>
+              <a:rPr sz="1400" b="0">
+                <a:solidFill>
+                  <a:srgbClr val="3D5566"/>
+                </a:solidFill>
+                <a:latin typeface="Arial"/>
+              </a:rPr>
+              <a:t>Проектный менеджер и бизнес-аналитик с более чем 15-летним опытом в цифровизации, автоматизации и управлении проектами.
+Обладатель международной сертификации IPMA Level B (Certified Senior Project Manager).
+Руководил проектами цифровизации государственных систем, внедрения геоинформационных технологий и автоматизации бизнес-процессов.
+Профессиональная деятельность отмечена благодарностями и наградами государственных органов и международных организаций.</a:t>
+            </a:r>
+          </a:p>
+        </p:txBody>
+      </p:sp>
+      <p:sp>
+        <p:nvSpPr>
+          <p:cNvPr id="9" name="Rounded Rectangle 8"/>
           <p:cNvSpPr/>
           <p:nvPr/>
         </p:nvSpPr>
         <p:spPr>
           <a:xfrm>
-            <a:off x="548640" y="1554480"/>
-            <a:ext cx="73152" cy="4023360"/>
-          </a:xfrm>
-          <a:prstGeom prst="rect">
+            <a:off x="7772400" y="1920240"/>
+            <a:ext cx="3840480" cy="3474720"/>
+          </a:xfrm>
+          <a:prstGeom prst="roundRect">
             <a:avLst/>
           </a:prstGeom>
           <a:solidFill>
-            <a:srgbClr val="E30613"/>
+            <a:srgbClr val="FFFFFF"/>
           </a:solidFill>
           <a:ln>
             <a:noFill/>
@@ -5491,105 +4144,38 @@
       </p:sp>
       <p:sp>
         <p:nvSpPr>
-          <p:cNvPr id="8" name="TextBox 7"/>
-          <p:cNvSpPr txBox="1"/>
-          <p:nvPr/>
-        </p:nvSpPr>
-        <p:spPr>
-          <a:xfrm>
-            <a:off x="868680" y="1645920"/>
-            <a:ext cx="4846320" cy="274320"/>
-          </a:xfrm>
-          <a:prstGeom prst="rect">
-            <a:avLst/>
-          </a:prstGeom>
-          <a:noFill/>
-        </p:spPr>
-        <p:txBody>
-          <a:bodyPr wrap="square">
-            <a:spAutoFit/>
-          </a:bodyPr>
-          <a:lstStyle/>
-          <a:p>
-            <a:pPr algn="l"/>
-            <a:r>
-              <a:rPr sz="1100" b="1">
-                <a:solidFill>
-                  <a:srgbClr val="1F8F5F"/>
-                </a:solidFill>
-                <a:latin typeface="Arial"/>
-              </a:rPr>
-              <a:t>ПРЕЗИДЕНТ</a:t>
-            </a:r>
-          </a:p>
-        </p:txBody>
-      </p:sp>
-      <p:sp>
-        <p:nvSpPr>
-          <p:cNvPr id="9" name="TextBox 8"/>
-          <p:cNvSpPr txBox="1"/>
-          <p:nvPr/>
-        </p:nvSpPr>
-        <p:spPr>
-          <a:xfrm>
-            <a:off x="868680" y="2011680"/>
-            <a:ext cx="4846320" cy="457200"/>
-          </a:xfrm>
-          <a:prstGeom prst="rect">
-            <a:avLst/>
-          </a:prstGeom>
-          <a:noFill/>
-        </p:spPr>
-        <p:txBody>
-          <a:bodyPr wrap="square">
-            <a:spAutoFit/>
-          </a:bodyPr>
-          <a:lstStyle/>
-          <a:p>
-            <a:pPr algn="l"/>
-            <a:r>
-              <a:rPr sz="1800" b="1">
-                <a:solidFill>
-                  <a:srgbClr val="07182A"/>
-                </a:solidFill>
-                <a:latin typeface="Arial"/>
-              </a:rPr>
-              <a:t>Мекишев Урмат Казбекович</a:t>
-            </a:r>
-          </a:p>
-        </p:txBody>
-      </p:sp>
-      <p:sp>
-        <p:nvSpPr>
           <p:cNvPr id="10" name="TextBox 9"/>
           <p:cNvSpPr txBox="1"/>
           <p:nvPr/>
         </p:nvSpPr>
         <p:spPr>
           <a:xfrm>
-            <a:off x="868680" y="2651760"/>
-            <a:ext cx="4846320" cy="1828800"/>
-          </a:xfrm>
-          <a:prstGeom prst="rect">
-            <a:avLst/>
-          </a:prstGeom>
-          <a:noFill/>
-        </p:spPr>
-        <p:txBody>
-          <a:bodyPr wrap="square">
-            <a:spAutoFit/>
-          </a:bodyPr>
-          <a:lstStyle/>
-          <a:p>
-            <a:pPr algn="l"/>
-            <a:r>
-              <a:rPr sz="1300" b="0">
-                <a:solidFill>
-                  <a:srgbClr val="3D5566"/>
-                </a:solidFill>
-                <a:latin typeface="Arial"/>
-              </a:rPr>
-              <a:t>Сертифицированный эксперт IPMA. Более 15 лет в управлении крупными инфраструктурными проектами. Инициатор внедрения ICB4 в госсекторе и бизнесе КР.</a:t>
+            <a:off x="8046720" y="2194560"/>
+            <a:ext cx="3383280" cy="2926080"/>
+          </a:xfrm>
+          <a:prstGeom prst="rect">
+            <a:avLst/>
+          </a:prstGeom>
+          <a:noFill/>
+        </p:spPr>
+        <p:txBody>
+          <a:bodyPr wrap="square">
+            <a:spAutoFit/>
+          </a:bodyPr>
+          <a:lstStyle/>
+          <a:p>
+            <a:pPr algn="l"/>
+            <a:r>
+              <a:rPr sz="1400" b="0">
+                <a:solidFill>
+                  <a:srgbClr val="122433"/>
+                </a:solidFill>
+                <a:latin typeface="Arial"/>
+              </a:rPr>
+              <a:t>• GovTech и цифровые сервисы
+• ГИС и открытые данные
+• Автоматизация процессов
+• Развитие стандартов IPMA в КР</a:t>
             </a:r>
           </a:p>
         </p:txBody>
@@ -5597,189 +4183,6 @@
       <p:sp>
         <p:nvSpPr>
           <p:cNvPr id="11" name="TextBox 10"/>
-          <p:cNvSpPr txBox="1"/>
-          <p:nvPr/>
-        </p:nvSpPr>
-        <p:spPr>
-          <a:xfrm>
-            <a:off x="868680" y="4663440"/>
-            <a:ext cx="4846320" cy="822960"/>
-          </a:xfrm>
-          <a:prstGeom prst="rect">
-            <a:avLst/>
-          </a:prstGeom>
-          <a:noFill/>
-        </p:spPr>
-        <p:txBody>
-          <a:bodyPr wrap="square">
-            <a:spAutoFit/>
-          </a:bodyPr>
-          <a:lstStyle/>
-          <a:p>
-            <a:pPr algn="l"/>
-            <a:r>
-              <a:rPr sz="1200" b="0">
-                <a:solidFill>
-                  <a:srgbClr val="122433"/>
-                </a:solidFill>
-                <a:latin typeface="Arial"/>
-              </a:rPr>
-              <a:t>«Создать в Кыргызстане профессиональное сообщество лидеров…»</a:t>
-            </a:r>
-          </a:p>
-        </p:txBody>
-      </p:sp>
-      <p:sp>
-        <p:nvSpPr>
-          <p:cNvPr id="12" name="Rectangle 11"/>
-          <p:cNvSpPr/>
-          <p:nvPr/>
-        </p:nvSpPr>
-        <p:spPr>
-          <a:xfrm>
-            <a:off x="6309360" y="1554480"/>
-            <a:ext cx="73152" cy="4023360"/>
-          </a:xfrm>
-          <a:prstGeom prst="rect">
-            <a:avLst/>
-          </a:prstGeom>
-          <a:solidFill>
-            <a:srgbClr val="1F8F5F"/>
-          </a:solidFill>
-          <a:ln>
-            <a:noFill/>
-          </a:ln>
-        </p:spPr>
-        <p:style>
-          <a:lnRef idx="1">
-            <a:schemeClr val="accent1"/>
-          </a:lnRef>
-          <a:fillRef idx="3">
-            <a:schemeClr val="accent1"/>
-          </a:fillRef>
-          <a:effectRef idx="2">
-            <a:schemeClr val="accent1"/>
-          </a:effectRef>
-          <a:fontRef idx="minor">
-            <a:schemeClr val="lt1"/>
-          </a:fontRef>
-        </p:style>
-        <p:txBody>
-          <a:bodyPr rtlCol="0" anchor="ctr"/>
-          <a:lstStyle/>
-          <a:p>
-            <a:pPr algn="ctr"/>
-          </a:p>
-        </p:txBody>
-      </p:sp>
-      <p:sp>
-        <p:nvSpPr>
-          <p:cNvPr id="13" name="TextBox 12"/>
-          <p:cNvSpPr txBox="1"/>
-          <p:nvPr/>
-        </p:nvSpPr>
-        <p:spPr>
-          <a:xfrm>
-            <a:off x="6629400" y="1645920"/>
-            <a:ext cx="4846320" cy="274320"/>
-          </a:xfrm>
-          <a:prstGeom prst="rect">
-            <a:avLst/>
-          </a:prstGeom>
-          <a:noFill/>
-        </p:spPr>
-        <p:txBody>
-          <a:bodyPr wrap="square">
-            <a:spAutoFit/>
-          </a:bodyPr>
-          <a:lstStyle/>
-          <a:p>
-            <a:pPr algn="l"/>
-            <a:r>
-              <a:rPr sz="1100" b="1">
-                <a:solidFill>
-                  <a:srgbClr val="1F8F5F"/>
-                </a:solidFill>
-                <a:latin typeface="Arial"/>
-              </a:rPr>
-              <a:t>ПОЧЁТНЫЙ ЧЛЕН</a:t>
-            </a:r>
-          </a:p>
-        </p:txBody>
-      </p:sp>
-      <p:sp>
-        <p:nvSpPr>
-          <p:cNvPr id="14" name="TextBox 13"/>
-          <p:cNvSpPr txBox="1"/>
-          <p:nvPr/>
-        </p:nvSpPr>
-        <p:spPr>
-          <a:xfrm>
-            <a:off x="6629400" y="2011680"/>
-            <a:ext cx="4846320" cy="457200"/>
-          </a:xfrm>
-          <a:prstGeom prst="rect">
-            <a:avLst/>
-          </a:prstGeom>
-          <a:noFill/>
-        </p:spPr>
-        <p:txBody>
-          <a:bodyPr wrap="square">
-            <a:spAutoFit/>
-          </a:bodyPr>
-          <a:lstStyle/>
-          <a:p>
-            <a:pPr algn="l"/>
-            <a:r>
-              <a:rPr sz="1800" b="1">
-                <a:solidFill>
-                  <a:srgbClr val="07182A"/>
-                </a:solidFill>
-                <a:latin typeface="Arial"/>
-              </a:rPr>
-              <a:t>Бабаев Игбал Алиджанович</a:t>
-            </a:r>
-          </a:p>
-        </p:txBody>
-      </p:sp>
-      <p:sp>
-        <p:nvSpPr>
-          <p:cNvPr id="15" name="TextBox 14"/>
-          <p:cNvSpPr txBox="1"/>
-          <p:nvPr/>
-        </p:nvSpPr>
-        <p:spPr>
-          <a:xfrm>
-            <a:off x="6629400" y="2651760"/>
-            <a:ext cx="4846320" cy="2011680"/>
-          </a:xfrm>
-          <a:prstGeom prst="rect">
-            <a:avLst/>
-          </a:prstGeom>
-          <a:noFill/>
-        </p:spPr>
-        <p:txBody>
-          <a:bodyPr wrap="square">
-            <a:spAutoFit/>
-          </a:bodyPr>
-          <a:lstStyle/>
-          <a:p>
-            <a:pPr algn="l"/>
-            <a:r>
-              <a:rPr sz="1300" b="0">
-                <a:solidFill>
-                  <a:srgbClr val="3D5566"/>
-                </a:solidFill>
-                <a:latin typeface="Arial"/>
-              </a:rPr>
-              <a:t>Д.т.н., профессор, президент Азербайджанской ассоциации УП. Поддерживает развитие проектной культуры в Кыргызстане и регионе.</a:t>
-            </a:r>
-          </a:p>
-        </p:txBody>
-      </p:sp>
-      <p:sp>
-        <p:nvSpPr>
-          <p:cNvPr id="16" name="TextBox 15"/>
           <p:cNvSpPr txBox="1"/>
           <p:nvPr/>
         </p:nvSpPr>
@@ -5814,7 +4217,7 @@
       </p:sp>
       <p:sp>
         <p:nvSpPr>
-          <p:cNvPr id="17" name="TextBox 16"/>
+          <p:cNvPr id="12" name="TextBox 11"/>
           <p:cNvSpPr txBox="1"/>
           <p:nvPr/>
         </p:nvSpPr>
@@ -5842,7 +4245,7 @@
                 </a:solidFill>
                 <a:latin typeface="Arial"/>
               </a:rPr>
-              <a:t>02 / 12</a:t>
+              <a:t>02 / 10</a:t>
             </a:r>
           </a:p>
         </p:txBody>
@@ -5880,7 +4283,7 @@
             <a:avLst/>
           </a:prstGeom>
           <a:solidFill>
-            <a:srgbClr val="07182A"/>
+            <a:srgbClr val="E8EEF2"/>
           </a:solidFill>
           <a:ln>
             <a:noFill/>
@@ -5910,42 +4313,74 @@
       </p:sp>
       <p:sp>
         <p:nvSpPr>
-          <p:cNvPr id="3" name="TextBox 2"/>
-          <p:cNvSpPr txBox="1"/>
-          <p:nvPr/>
-        </p:nvSpPr>
-        <p:spPr>
-          <a:xfrm>
-            <a:off x="10789920" y="5120640"/>
-            <a:ext cx="1828800" cy="1371600"/>
-          </a:xfrm>
-          <a:prstGeom prst="rect">
-            <a:avLst/>
-          </a:prstGeom>
-          <a:noFill/>
-        </p:spPr>
-        <p:txBody>
-          <a:bodyPr wrap="square">
-            <a:spAutoFit/>
-          </a:bodyPr>
-          <a:lstStyle/>
-          <a:p>
-            <a:pPr algn="l"/>
-            <a:r>
-              <a:rPr sz="12000" b="1">
-                <a:solidFill>
-                  <a:srgbClr val="E30613"/>
-                </a:solidFill>
-                <a:latin typeface="Arial"/>
-              </a:rPr>
-              <a:t>»</a:t>
-            </a:r>
-          </a:p>
-        </p:txBody>
-      </p:sp>
-      <p:sp>
-        <p:nvSpPr>
-          <p:cNvPr id="4" name="TextBox 3"/>
+          <p:cNvPr id="3" name="Rectangle 2"/>
+          <p:cNvSpPr/>
+          <p:nvPr/>
+        </p:nvSpPr>
+        <p:spPr>
+          <a:xfrm>
+            <a:off x="0" y="0"/>
+            <a:ext cx="12191695" cy="64008"/>
+          </a:xfrm>
+          <a:prstGeom prst="rect">
+            <a:avLst/>
+          </a:prstGeom>
+          <a:solidFill>
+            <a:srgbClr val="1F8F5F"/>
+          </a:solidFill>
+          <a:ln>
+            <a:noFill/>
+          </a:ln>
+        </p:spPr>
+        <p:style>
+          <a:lnRef idx="1">
+            <a:schemeClr val="accent1"/>
+          </a:lnRef>
+          <a:fillRef idx="3">
+            <a:schemeClr val="accent1"/>
+          </a:fillRef>
+          <a:effectRef idx="2">
+            <a:schemeClr val="accent1"/>
+          </a:effectRef>
+          <a:fontRef idx="minor">
+            <a:schemeClr val="lt1"/>
+          </a:fontRef>
+        </p:style>
+        <p:txBody>
+          <a:bodyPr rtlCol="0" anchor="ctr"/>
+          <a:lstStyle/>
+          <a:p>
+            <a:pPr algn="ctr"/>
+          </a:p>
+        </p:txBody>
+      </p:sp>
+      <p:pic>
+        <p:nvPicPr>
+          <p:cNvPr id="4" name="Picture 3" descr="ipma-kr-emblem.png"/>
+          <p:cNvPicPr>
+            <a:picLocks noChangeAspect="1"/>
+          </p:cNvPicPr>
+          <p:nvPr/>
+        </p:nvPicPr>
+        <p:blipFill>
+          <a:blip r:embed="rId2"/>
+          <a:stretch>
+            <a:fillRect/>
+          </a:stretch>
+        </p:blipFill>
+        <p:spPr>
+          <a:xfrm>
+            <a:off x="11338560" y="256032"/>
+            <a:ext cx="505533" cy="502920"/>
+          </a:xfrm>
+          <a:prstGeom prst="rect">
+            <a:avLst/>
+          </a:prstGeom>
+        </p:spPr>
+      </p:pic>
+      <p:sp>
+        <p:nvSpPr>
+          <p:cNvPr id="5" name="TextBox 4"/>
           <p:cNvSpPr txBox="1"/>
           <p:nvPr/>
         </p:nvSpPr>
@@ -5969,46 +4404,11 @@
             <a:r>
               <a:rPr sz="1100" b="1">
                 <a:solidFill>
-                  <a:srgbClr val="3DD68C"/>
-                </a:solidFill>
-                <a:latin typeface="Arial"/>
-              </a:rPr>
-              <a:t>03  »  МИССИЯ</a:t>
-            </a:r>
-          </a:p>
-        </p:txBody>
-      </p:sp>
-      <p:sp>
-        <p:nvSpPr>
-          <p:cNvPr id="5" name="TextBox 4"/>
-          <p:cNvSpPr txBox="1"/>
-          <p:nvPr/>
-        </p:nvSpPr>
-        <p:spPr>
-          <a:xfrm>
-            <a:off x="640080" y="1828800"/>
-            <a:ext cx="10515600" cy="2560320"/>
-          </a:xfrm>
-          <a:prstGeom prst="rect">
-            <a:avLst/>
-          </a:prstGeom>
-          <a:noFill/>
-        </p:spPr>
-        <p:txBody>
-          <a:bodyPr wrap="square">
-            <a:spAutoFit/>
-          </a:bodyPr>
-          <a:lstStyle/>
-          <a:p>
-            <a:pPr algn="l"/>
-            <a:r>
-              <a:rPr sz="2800" b="1">
-                <a:solidFill>
-                  <a:srgbClr val="FFFFFF"/>
-                </a:solidFill>
-                <a:latin typeface="Arial"/>
-              </a:rPr>
-              <a:t>Экосистема компетентных проектных лидеров — через образование, сертификацию и практики IPMA ICB4.</a:t>
+                  <a:srgbClr val="1F8F5F"/>
+                </a:solidFill>
+                <a:latin typeface="Arial"/>
+              </a:rPr>
+              <a:t>03  »  О СТРАНЕ</a:t>
             </a:r>
           </a:p>
         </p:txBody>
@@ -6021,29 +4421,29 @@
         </p:nvSpPr>
         <p:spPr>
           <a:xfrm>
-            <a:off x="640080" y="4663440"/>
-            <a:ext cx="9144000" cy="548640"/>
-          </a:xfrm>
-          <a:prstGeom prst="rect">
-            <a:avLst/>
-          </a:prstGeom>
-          <a:noFill/>
-        </p:spPr>
-        <p:txBody>
-          <a:bodyPr wrap="square">
-            <a:spAutoFit/>
-          </a:bodyPr>
-          <a:lstStyle/>
-          <a:p>
-            <a:pPr algn="l"/>
-            <a:r>
-              <a:rPr sz="1500" b="0">
-                <a:solidFill>
-                  <a:srgbClr val="A9C0D0"/>
-                </a:solidFill>
-                <a:latin typeface="Arial"/>
-              </a:rPr>
-              <a:t>Повышаем зрелость управления проектами государства и бизнеса в Кыргызстане.</a:t>
+            <a:off x="548640" y="640080"/>
+            <a:ext cx="10515600" cy="594360"/>
+          </a:xfrm>
+          <a:prstGeom prst="rect">
+            <a:avLst/>
+          </a:prstGeom>
+          <a:noFill/>
+        </p:spPr>
+        <p:txBody>
+          <a:bodyPr wrap="square">
+            <a:spAutoFit/>
+          </a:bodyPr>
+          <a:lstStyle/>
+          <a:p>
+            <a:pPr algn="l"/>
+            <a:r>
+              <a:rPr sz="3000" b="1">
+                <a:solidFill>
+                  <a:srgbClr val="07182A"/>
+                </a:solidFill>
+                <a:latin typeface="Arial"/>
+              </a:rPr>
+              <a:t>Кыргызская Республика</a:t>
             </a:r>
           </a:p>
         </p:txBody>
@@ -6051,6 +4451,461 @@
       <p:sp>
         <p:nvSpPr>
           <p:cNvPr id="7" name="TextBox 6"/>
+          <p:cNvSpPr txBox="1"/>
+          <p:nvPr/>
+        </p:nvSpPr>
+        <p:spPr>
+          <a:xfrm>
+            <a:off x="548640" y="1463040"/>
+            <a:ext cx="2743200" cy="502920"/>
+          </a:xfrm>
+          <a:prstGeom prst="rect">
+            <a:avLst/>
+          </a:prstGeom>
+          <a:noFill/>
+        </p:spPr>
+        <p:txBody>
+          <a:bodyPr wrap="square">
+            <a:spAutoFit/>
+          </a:bodyPr>
+          <a:lstStyle/>
+          <a:p>
+            <a:pPr algn="l"/>
+            <a:r>
+              <a:rPr sz="1800" b="1">
+                <a:solidFill>
+                  <a:srgbClr val="07182A"/>
+                </a:solidFill>
+                <a:latin typeface="Arial"/>
+              </a:rPr>
+              <a:t>≈200 тыс. км²</a:t>
+            </a:r>
+          </a:p>
+        </p:txBody>
+      </p:sp>
+      <p:sp>
+        <p:nvSpPr>
+          <p:cNvPr id="8" name="TextBox 7"/>
+          <p:cNvSpPr txBox="1"/>
+          <p:nvPr/>
+        </p:nvSpPr>
+        <p:spPr>
+          <a:xfrm>
+            <a:off x="548640" y="2011680"/>
+            <a:ext cx="2743200" cy="365760"/>
+          </a:xfrm>
+          <a:prstGeom prst="rect">
+            <a:avLst/>
+          </a:prstGeom>
+          <a:noFill/>
+        </p:spPr>
+        <p:txBody>
+          <a:bodyPr wrap="square">
+            <a:spAutoFit/>
+          </a:bodyPr>
+          <a:lstStyle/>
+          <a:p>
+            <a:pPr algn="l"/>
+            <a:r>
+              <a:rPr sz="1200" b="0">
+                <a:solidFill>
+                  <a:srgbClr val="3D5566"/>
+                </a:solidFill>
+                <a:latin typeface="Arial"/>
+              </a:rPr>
+              <a:t>Центральная Азия</a:t>
+            </a:r>
+          </a:p>
+        </p:txBody>
+      </p:sp>
+      <p:sp>
+        <p:nvSpPr>
+          <p:cNvPr id="9" name="TextBox 8"/>
+          <p:cNvSpPr txBox="1"/>
+          <p:nvPr/>
+        </p:nvSpPr>
+        <p:spPr>
+          <a:xfrm>
+            <a:off x="3429000" y="1463040"/>
+            <a:ext cx="2743200" cy="502920"/>
+          </a:xfrm>
+          <a:prstGeom prst="rect">
+            <a:avLst/>
+          </a:prstGeom>
+          <a:noFill/>
+        </p:spPr>
+        <p:txBody>
+          <a:bodyPr wrap="square">
+            <a:spAutoFit/>
+          </a:bodyPr>
+          <a:lstStyle/>
+          <a:p>
+            <a:pPr algn="l"/>
+            <a:r>
+              <a:rPr sz="1800" b="1">
+                <a:solidFill>
+                  <a:srgbClr val="07182A"/>
+                </a:solidFill>
+                <a:latin typeface="Arial"/>
+              </a:rPr>
+              <a:t>≈7,4 млн</a:t>
+            </a:r>
+          </a:p>
+        </p:txBody>
+      </p:sp>
+      <p:sp>
+        <p:nvSpPr>
+          <p:cNvPr id="10" name="TextBox 9"/>
+          <p:cNvSpPr txBox="1"/>
+          <p:nvPr/>
+        </p:nvSpPr>
+        <p:spPr>
+          <a:xfrm>
+            <a:off x="3429000" y="2011680"/>
+            <a:ext cx="2743200" cy="365760"/>
+          </a:xfrm>
+          <a:prstGeom prst="rect">
+            <a:avLst/>
+          </a:prstGeom>
+          <a:noFill/>
+        </p:spPr>
+        <p:txBody>
+          <a:bodyPr wrap="square">
+            <a:spAutoFit/>
+          </a:bodyPr>
+          <a:lstStyle/>
+          <a:p>
+            <a:pPr algn="l"/>
+            <a:r>
+              <a:rPr sz="1200" b="0">
+                <a:solidFill>
+                  <a:srgbClr val="3D5566"/>
+                </a:solidFill>
+                <a:latin typeface="Arial"/>
+              </a:rPr>
+              <a:t>население</a:t>
+            </a:r>
+          </a:p>
+        </p:txBody>
+      </p:sp>
+      <p:sp>
+        <p:nvSpPr>
+          <p:cNvPr id="11" name="TextBox 10"/>
+          <p:cNvSpPr txBox="1"/>
+          <p:nvPr/>
+        </p:nvSpPr>
+        <p:spPr>
+          <a:xfrm>
+            <a:off x="6309359" y="1463040"/>
+            <a:ext cx="2743200" cy="502920"/>
+          </a:xfrm>
+          <a:prstGeom prst="rect">
+            <a:avLst/>
+          </a:prstGeom>
+          <a:noFill/>
+        </p:spPr>
+        <p:txBody>
+          <a:bodyPr wrap="square">
+            <a:spAutoFit/>
+          </a:bodyPr>
+          <a:lstStyle/>
+          <a:p>
+            <a:pPr algn="l"/>
+            <a:r>
+              <a:rPr sz="1800" b="1">
+                <a:solidFill>
+                  <a:srgbClr val="07182A"/>
+                </a:solidFill>
+                <a:latin typeface="Arial"/>
+              </a:rPr>
+              <a:t>ЕАЭС</a:t>
+            </a:r>
+          </a:p>
+        </p:txBody>
+      </p:sp>
+      <p:sp>
+        <p:nvSpPr>
+          <p:cNvPr id="12" name="TextBox 11"/>
+          <p:cNvSpPr txBox="1"/>
+          <p:nvPr/>
+        </p:nvSpPr>
+        <p:spPr>
+          <a:xfrm>
+            <a:off x="6309359" y="2011680"/>
+            <a:ext cx="2743200" cy="365760"/>
+          </a:xfrm>
+          <a:prstGeom prst="rect">
+            <a:avLst/>
+          </a:prstGeom>
+          <a:noFill/>
+        </p:spPr>
+        <p:txBody>
+          <a:bodyPr wrap="square">
+            <a:spAutoFit/>
+          </a:bodyPr>
+          <a:lstStyle/>
+          <a:p>
+            <a:pPr algn="l"/>
+            <a:r>
+              <a:rPr sz="1200" b="0">
+                <a:solidFill>
+                  <a:srgbClr val="3D5566"/>
+                </a:solidFill>
+                <a:latin typeface="Arial"/>
+              </a:rPr>
+              <a:t>единое пространство</a:t>
+            </a:r>
+          </a:p>
+        </p:txBody>
+      </p:sp>
+      <p:sp>
+        <p:nvSpPr>
+          <p:cNvPr id="13" name="TextBox 12"/>
+          <p:cNvSpPr txBox="1"/>
+          <p:nvPr/>
+        </p:nvSpPr>
+        <p:spPr>
+          <a:xfrm>
+            <a:off x="9189719" y="1463040"/>
+            <a:ext cx="2743200" cy="502920"/>
+          </a:xfrm>
+          <a:prstGeom prst="rect">
+            <a:avLst/>
+          </a:prstGeom>
+          <a:noFill/>
+        </p:spPr>
+        <p:txBody>
+          <a:bodyPr wrap="square">
+            <a:spAutoFit/>
+          </a:bodyPr>
+          <a:lstStyle/>
+          <a:p>
+            <a:pPr algn="l"/>
+            <a:r>
+              <a:rPr sz="1800" b="1">
+                <a:solidFill>
+                  <a:srgbClr val="07182A"/>
+                </a:solidFill>
+                <a:latin typeface="Arial"/>
+              </a:rPr>
+              <a:t>WNG</a:t>
+            </a:r>
+          </a:p>
+        </p:txBody>
+      </p:sp>
+      <p:sp>
+        <p:nvSpPr>
+          <p:cNvPr id="14" name="TextBox 13"/>
+          <p:cNvSpPr txBox="1"/>
+          <p:nvPr/>
+        </p:nvSpPr>
+        <p:spPr>
+          <a:xfrm>
+            <a:off x="9189719" y="2011680"/>
+            <a:ext cx="2743200" cy="365760"/>
+          </a:xfrm>
+          <a:prstGeom prst="rect">
+            <a:avLst/>
+          </a:prstGeom>
+          <a:noFill/>
+        </p:spPr>
+        <p:txBody>
+          <a:bodyPr wrap="square">
+            <a:spAutoFit/>
+          </a:bodyPr>
+          <a:lstStyle/>
+          <a:p>
+            <a:pPr algn="l"/>
+            <a:r>
+              <a:rPr sz="1200" b="0">
+                <a:solidFill>
+                  <a:srgbClr val="3D5566"/>
+                </a:solidFill>
+                <a:latin typeface="Arial"/>
+              </a:rPr>
+              <a:t>Игры кочевников</a:t>
+            </a:r>
+          </a:p>
+        </p:txBody>
+      </p:sp>
+      <p:sp>
+        <p:nvSpPr>
+          <p:cNvPr id="15" name="TextBox 14"/>
+          <p:cNvSpPr txBox="1"/>
+          <p:nvPr/>
+        </p:nvSpPr>
+        <p:spPr>
+          <a:xfrm>
+            <a:off x="548640" y="2651760"/>
+            <a:ext cx="10972800" cy="502920"/>
+          </a:xfrm>
+          <a:prstGeom prst="rect">
+            <a:avLst/>
+          </a:prstGeom>
+          <a:noFill/>
+        </p:spPr>
+        <p:txBody>
+          <a:bodyPr wrap="square">
+            <a:spAutoFit/>
+          </a:bodyPr>
+          <a:lstStyle/>
+          <a:p>
+            <a:pPr algn="l"/>
+            <a:r>
+              <a:rPr sz="1400" b="0">
+                <a:solidFill>
+                  <a:srgbClr val="122433"/>
+                </a:solidFill>
+                <a:latin typeface="Arial"/>
+              </a:rPr>
+              <a:t>»  Стратегическое положение: пересечение маршрутов ЕАЭС и Большого Шёлкового пути</a:t>
+            </a:r>
+          </a:p>
+        </p:txBody>
+      </p:sp>
+      <p:sp>
+        <p:nvSpPr>
+          <p:cNvPr id="16" name="TextBox 15"/>
+          <p:cNvSpPr txBox="1"/>
+          <p:nvPr/>
+        </p:nvSpPr>
+        <p:spPr>
+          <a:xfrm>
+            <a:off x="548640" y="3291839"/>
+            <a:ext cx="10972800" cy="502920"/>
+          </a:xfrm>
+          <a:prstGeom prst="rect">
+            <a:avLst/>
+          </a:prstGeom>
+          <a:noFill/>
+        </p:spPr>
+        <p:txBody>
+          <a:bodyPr wrap="square">
+            <a:spAutoFit/>
+          </a:bodyPr>
+          <a:lstStyle/>
+          <a:p>
+            <a:pPr algn="l"/>
+            <a:r>
+              <a:rPr sz="1400" b="0">
+                <a:solidFill>
+                  <a:srgbClr val="122433"/>
+                </a:solidFill>
+                <a:latin typeface="Arial"/>
+              </a:rPr>
+              <a:t>»  Соседи: Казахстан, Узбекистан, Таджикистан, Китай</a:t>
+            </a:r>
+          </a:p>
+        </p:txBody>
+      </p:sp>
+      <p:sp>
+        <p:nvSpPr>
+          <p:cNvPr id="17" name="TextBox 16"/>
+          <p:cNvSpPr txBox="1"/>
+          <p:nvPr/>
+        </p:nvSpPr>
+        <p:spPr>
+          <a:xfrm>
+            <a:off x="548640" y="3931920"/>
+            <a:ext cx="10972800" cy="502920"/>
+          </a:xfrm>
+          <a:prstGeom prst="rect">
+            <a:avLst/>
+          </a:prstGeom>
+          <a:noFill/>
+        </p:spPr>
+        <p:txBody>
+          <a:bodyPr wrap="square">
+            <a:spAutoFit/>
+          </a:bodyPr>
+          <a:lstStyle/>
+          <a:p>
+            <a:pPr algn="l"/>
+            <a:r>
+              <a:rPr sz="1400" b="0">
+                <a:solidFill>
+                  <a:srgbClr val="122433"/>
+                </a:solidFill>
+                <a:latin typeface="Arial"/>
+              </a:rPr>
+              <a:t>»  Природа и культура: горная страна, кочевое наследие, гостеприимство</a:t>
+            </a:r>
+          </a:p>
+        </p:txBody>
+      </p:sp>
+      <p:sp>
+        <p:nvSpPr>
+          <p:cNvPr id="18" name="TextBox 17"/>
+          <p:cNvSpPr txBox="1"/>
+          <p:nvPr/>
+        </p:nvSpPr>
+        <p:spPr>
+          <a:xfrm>
+            <a:off x="548640" y="4572000"/>
+            <a:ext cx="10972800" cy="502920"/>
+          </a:xfrm>
+          <a:prstGeom prst="rect">
+            <a:avLst/>
+          </a:prstGeom>
+          <a:noFill/>
+        </p:spPr>
+        <p:txBody>
+          <a:bodyPr wrap="square">
+            <a:spAutoFit/>
+          </a:bodyPr>
+          <a:lstStyle/>
+          <a:p>
+            <a:pPr algn="l"/>
+            <a:r>
+              <a:rPr sz="1400" b="0">
+                <a:solidFill>
+                  <a:srgbClr val="122433"/>
+                </a:solidFill>
+                <a:latin typeface="Arial"/>
+              </a:rPr>
+              <a:t>»  Всемирные игры кочевников — глобальная витрина культуры и soft power</a:t>
+            </a:r>
+          </a:p>
+        </p:txBody>
+      </p:sp>
+      <p:sp>
+        <p:nvSpPr>
+          <p:cNvPr id="19" name="TextBox 18"/>
+          <p:cNvSpPr txBox="1"/>
+          <p:nvPr/>
+        </p:nvSpPr>
+        <p:spPr>
+          <a:xfrm>
+            <a:off x="548640" y="5212079"/>
+            <a:ext cx="10972800" cy="502920"/>
+          </a:xfrm>
+          <a:prstGeom prst="rect">
+            <a:avLst/>
+          </a:prstGeom>
+          <a:noFill/>
+        </p:spPr>
+        <p:txBody>
+          <a:bodyPr wrap="square">
+            <a:spAutoFit/>
+          </a:bodyPr>
+          <a:lstStyle/>
+          <a:p>
+            <a:pPr algn="l"/>
+            <a:r>
+              <a:rPr sz="1400" b="0">
+                <a:solidFill>
+                  <a:srgbClr val="122433"/>
+                </a:solidFill>
+                <a:latin typeface="Arial"/>
+              </a:rPr>
+              <a:t>»  Цифровизация госуправления создаёт устойчивый спрос на P3M-компетенции</a:t>
+            </a:r>
+          </a:p>
+        </p:txBody>
+      </p:sp>
+      <p:sp>
+        <p:nvSpPr>
+          <p:cNvPr id="20" name="TextBox 19"/>
           <p:cNvSpPr txBox="1"/>
           <p:nvPr/>
         </p:nvSpPr>
@@ -6074,7 +4929,7 @@
             <a:r>
               <a:rPr sz="1100" b="0">
                 <a:solidFill>
-                  <a:srgbClr val="7F96A8"/>
+                  <a:srgbClr val="9AAFBD"/>
                 </a:solidFill>
                 <a:latin typeface="Arial"/>
               </a:rPr>
@@ -6085,7 +4940,7 @@
       </p:sp>
       <p:sp>
         <p:nvSpPr>
-          <p:cNvPr id="8" name="TextBox 7"/>
+          <p:cNvPr id="21" name="TextBox 20"/>
           <p:cNvSpPr txBox="1"/>
           <p:nvPr/>
         </p:nvSpPr>
@@ -6109,11 +4964,11 @@
             <a:r>
               <a:rPr sz="1100" b="0">
                 <a:solidFill>
-                  <a:srgbClr val="7F96A8"/>
-                </a:solidFill>
-                <a:latin typeface="Arial"/>
-              </a:rPr>
-              <a:t>03 / 12</a:t>
+                  <a:srgbClr val="9AAFBD"/>
+                </a:solidFill>
+                <a:latin typeface="Arial"/>
+              </a:rPr>
+              <a:t>03 / 10</a:t>
             </a:r>
           </a:p>
         </p:txBody>
@@ -6188,7 +5043,7 @@
         <p:spPr>
           <a:xfrm>
             <a:off x="0" y="0"/>
-            <a:ext cx="12191695" cy="73152"/>
+            <a:ext cx="12191695" cy="64008"/>
           </a:xfrm>
           <a:prstGeom prst="rect">
             <a:avLst/>
@@ -6276,7 +5131,7 @@
                 </a:solidFill>
                 <a:latin typeface="Arial"/>
               </a:rPr>
-              <a:t>04  »  ЦЕННОСТИ</a:t>
+              <a:t>04  »  ЭКОНОМИКА</a:t>
             </a:r>
           </a:p>
         </p:txBody>
@@ -6290,28 +5145,28 @@
         <p:spPr>
           <a:xfrm>
             <a:off x="548640" y="640080"/>
-            <a:ext cx="10058400" cy="640080"/>
-          </a:xfrm>
-          <a:prstGeom prst="rect">
-            <a:avLst/>
-          </a:prstGeom>
-          <a:noFill/>
-        </p:spPr>
-        <p:txBody>
-          <a:bodyPr wrap="square">
-            <a:spAutoFit/>
-          </a:bodyPr>
-          <a:lstStyle/>
-          <a:p>
-            <a:pPr algn="l"/>
-            <a:r>
-              <a:rPr sz="3200" b="1">
+            <a:ext cx="10515600" cy="594360"/>
+          </a:xfrm>
+          <a:prstGeom prst="rect">
+            <a:avLst/>
+          </a:prstGeom>
+          <a:noFill/>
+        </p:spPr>
+        <p:txBody>
+          <a:bodyPr wrap="square">
+            <a:spAutoFit/>
+          </a:bodyPr>
+          <a:lstStyle/>
+          <a:p>
+            <a:pPr algn="l"/>
+            <a:r>
+              <a:rPr sz="3000" b="1">
                 <a:solidFill>
                   <a:srgbClr val="07182A"/>
                 </a:solidFill>
                 <a:latin typeface="Arial"/>
               </a:rPr>
-              <a:t>На чём стоим</a:t>
+              <a:t>Показатели и позиция в мире</a:t>
             </a:r>
           </a:p>
         </p:txBody>
@@ -6325,7 +5180,7 @@
         <p:spPr>
           <a:xfrm>
             <a:off x="548640" y="1554480"/>
-            <a:ext cx="5394960" cy="54864"/>
+            <a:ext cx="3566160" cy="54864"/>
           </a:xfrm>
           <a:prstGeom prst="rect">
             <a:avLst/>
@@ -6367,29 +5222,29 @@
         </p:nvSpPr>
         <p:spPr>
           <a:xfrm>
-            <a:off x="548640" y="1874520"/>
-            <a:ext cx="5394960" cy="411480"/>
-          </a:xfrm>
-          <a:prstGeom prst="rect">
-            <a:avLst/>
-          </a:prstGeom>
-          <a:noFill/>
-        </p:spPr>
-        <p:txBody>
-          <a:bodyPr wrap="square">
-            <a:spAutoFit/>
-          </a:bodyPr>
-          <a:lstStyle/>
-          <a:p>
-            <a:pPr algn="l"/>
-            <a:r>
-              <a:rPr sz="1800" b="1">
+            <a:off x="548640" y="1828800"/>
+            <a:ext cx="3566160" cy="640080"/>
+          </a:xfrm>
+          <a:prstGeom prst="rect">
+            <a:avLst/>
+          </a:prstGeom>
+          <a:noFill/>
+        </p:spPr>
+        <p:txBody>
+          <a:bodyPr wrap="square">
+            <a:spAutoFit/>
+          </a:bodyPr>
+          <a:lstStyle/>
+          <a:p>
+            <a:pPr algn="l"/>
+            <a:r>
+              <a:rPr sz="2800" b="1">
                 <a:solidFill>
                   <a:srgbClr val="07182A"/>
                 </a:solidFill>
                 <a:latin typeface="Arial"/>
               </a:rPr>
-              <a:t>Честность</a:t>
+              <a:t>≈11%</a:t>
             </a:r>
           </a:p>
         </p:txBody>
@@ -6402,29 +5257,30 @@
         </p:nvSpPr>
         <p:spPr>
           <a:xfrm>
-            <a:off x="548640" y="2423160"/>
-            <a:ext cx="5394960" cy="640080"/>
-          </a:xfrm>
-          <a:prstGeom prst="rect">
-            <a:avLst/>
-          </a:prstGeom>
-          <a:noFill/>
-        </p:spPr>
-        <p:txBody>
-          <a:bodyPr wrap="square">
-            <a:spAutoFit/>
-          </a:bodyPr>
-          <a:lstStyle/>
-          <a:p>
-            <a:pPr algn="l"/>
-            <a:r>
-              <a:rPr sz="1400" b="0">
+            <a:off x="548640" y="2651760"/>
+            <a:ext cx="3566160" cy="914400"/>
+          </a:xfrm>
+          <a:prstGeom prst="rect">
+            <a:avLst/>
+          </a:prstGeom>
+          <a:noFill/>
+        </p:spPr>
+        <p:txBody>
+          <a:bodyPr wrap="square">
+            <a:spAutoFit/>
+          </a:bodyPr>
+          <a:lstStyle/>
+          <a:p>
+            <a:pPr algn="l"/>
+            <a:r>
+              <a:rPr sz="1300" b="0">
                 <a:solidFill>
                   <a:srgbClr val="3D5566"/>
                 </a:solidFill>
                 <a:latin typeface="Arial"/>
               </a:rPr>
-              <a:t>Прозрачность и этика в работе и оценке</a:t>
+              <a:t>Рост реального ВВП в 2025
+(оценки МВФ / ВБ)</a:t>
             </a:r>
           </a:p>
         </p:txBody>
@@ -6437,8 +5293,8 @@
         </p:nvSpPr>
         <p:spPr>
           <a:xfrm>
-            <a:off x="6309359" y="1554480"/>
-            <a:ext cx="5394960" cy="54864"/>
+            <a:off x="4389120" y="1554480"/>
+            <a:ext cx="3566160" cy="54864"/>
           </a:xfrm>
           <a:prstGeom prst="rect">
             <a:avLst/>
@@ -6480,29 +5336,29 @@
         </p:nvSpPr>
         <p:spPr>
           <a:xfrm>
-            <a:off x="6309359" y="1874520"/>
-            <a:ext cx="5394960" cy="411480"/>
-          </a:xfrm>
-          <a:prstGeom prst="rect">
-            <a:avLst/>
-          </a:prstGeom>
-          <a:noFill/>
-        </p:spPr>
-        <p:txBody>
-          <a:bodyPr wrap="square">
-            <a:spAutoFit/>
-          </a:bodyPr>
-          <a:lstStyle/>
-          <a:p>
-            <a:pPr algn="l"/>
-            <a:r>
-              <a:rPr sz="1800" b="1">
+            <a:off x="4389120" y="1828800"/>
+            <a:ext cx="3566160" cy="640080"/>
+          </a:xfrm>
+          <a:prstGeom prst="rect">
+            <a:avLst/>
+          </a:prstGeom>
+          <a:noFill/>
+        </p:spPr>
+        <p:txBody>
+          <a:bodyPr wrap="square">
+            <a:spAutoFit/>
+          </a:bodyPr>
+          <a:lstStyle/>
+          <a:p>
+            <a:pPr algn="l"/>
+            <a:r>
+              <a:rPr sz="2800" b="1">
                 <a:solidFill>
                   <a:srgbClr val="07182A"/>
                 </a:solidFill>
                 <a:latin typeface="Arial"/>
               </a:rPr>
-              <a:t>Ответственность</a:t>
+              <a:t>≈$23 млрд</a:t>
             </a:r>
           </a:p>
         </p:txBody>
@@ -6515,29 +5371,30 @@
         </p:nvSpPr>
         <p:spPr>
           <a:xfrm>
-            <a:off x="6309359" y="2423160"/>
-            <a:ext cx="5394960" cy="640080"/>
-          </a:xfrm>
-          <a:prstGeom prst="rect">
-            <a:avLst/>
-          </a:prstGeom>
-          <a:noFill/>
-        </p:spPr>
-        <p:txBody>
-          <a:bodyPr wrap="square">
-            <a:spAutoFit/>
-          </a:bodyPr>
-          <a:lstStyle/>
-          <a:p>
-            <a:pPr algn="l"/>
-            <a:r>
-              <a:rPr sz="1400" b="0">
+            <a:off x="4389120" y="2651760"/>
+            <a:ext cx="3566160" cy="914400"/>
+          </a:xfrm>
+          <a:prstGeom prst="rect">
+            <a:avLst/>
+          </a:prstGeom>
+          <a:noFill/>
+        </p:spPr>
+        <p:txBody>
+          <a:bodyPr wrap="square">
+            <a:spAutoFit/>
+          </a:bodyPr>
+          <a:lstStyle/>
+          <a:p>
+            <a:pPr algn="l"/>
+            <a:r>
+              <a:rPr sz="1300" b="0">
                 <a:solidFill>
                   <a:srgbClr val="3D5566"/>
                 </a:solidFill>
                 <a:latin typeface="Arial"/>
               </a:rPr>
-              <a:t>Профессионализм мирового уровня</a:t>
+              <a:t>Номинальный ВВП · рост
+дохода на душу населения</a:t>
             </a:r>
           </a:p>
         </p:txBody>
@@ -6550,8 +5407,8 @@
         </p:nvSpPr>
         <p:spPr>
           <a:xfrm>
-            <a:off x="548640" y="3749039"/>
-            <a:ext cx="5394960" cy="54864"/>
+            <a:off x="8229600" y="1554480"/>
+            <a:ext cx="3566160" cy="54864"/>
           </a:xfrm>
           <a:prstGeom prst="rect">
             <a:avLst/>
@@ -6593,29 +5450,29 @@
         </p:nvSpPr>
         <p:spPr>
           <a:xfrm>
-            <a:off x="548640" y="4069079"/>
-            <a:ext cx="5394960" cy="411480"/>
-          </a:xfrm>
-          <a:prstGeom prst="rect">
-            <a:avLst/>
-          </a:prstGeom>
-          <a:noFill/>
-        </p:spPr>
-        <p:txBody>
-          <a:bodyPr wrap="square">
-            <a:spAutoFit/>
-          </a:bodyPr>
-          <a:lstStyle/>
-          <a:p>
-            <a:pPr algn="l"/>
-            <a:r>
-              <a:rPr sz="1800" b="1">
+            <a:off x="8229600" y="1828800"/>
+            <a:ext cx="3566160" cy="640080"/>
+          </a:xfrm>
+          <a:prstGeom prst="rect">
+            <a:avLst/>
+          </a:prstGeom>
+          <a:noFill/>
+        </p:spPr>
+        <p:txBody>
+          <a:bodyPr wrap="square">
+            <a:spAutoFit/>
+          </a:bodyPr>
+          <a:lstStyle/>
+          <a:p>
+            <a:pPr algn="l"/>
+            <a:r>
+              <a:rPr sz="2800" b="1">
                 <a:solidFill>
                   <a:srgbClr val="07182A"/>
                 </a:solidFill>
                 <a:latin typeface="Arial"/>
               </a:rPr>
-              <a:t>Уважение и доверие</a:t>
+              <a:t>Топ‑рост</a:t>
             </a:r>
           </a:p>
         </p:txBody>
@@ -6628,29 +5485,30 @@
         </p:nvSpPr>
         <p:spPr>
           <a:xfrm>
-            <a:off x="548640" y="4617719"/>
-            <a:ext cx="5394960" cy="640080"/>
-          </a:xfrm>
-          <a:prstGeom prst="rect">
-            <a:avLst/>
-          </a:prstGeom>
-          <a:noFill/>
-        </p:spPr>
-        <p:txBody>
-          <a:bodyPr wrap="square">
-            <a:spAutoFit/>
-          </a:bodyPr>
-          <a:lstStyle/>
-          <a:p>
-            <a:pPr algn="l"/>
-            <a:r>
-              <a:rPr sz="1400" b="0">
+            <a:off x="8229600" y="2651760"/>
+            <a:ext cx="3566160" cy="914400"/>
+          </a:xfrm>
+          <a:prstGeom prst="rect">
+            <a:avLst/>
+          </a:prstGeom>
+          <a:noFill/>
+        </p:spPr>
+        <p:txBody>
+          <a:bodyPr wrap="square">
+            <a:spAutoFit/>
+          </a:bodyPr>
+          <a:lstStyle/>
+          <a:p>
+            <a:pPr algn="l"/>
+            <a:r>
+              <a:rPr sz="1300" b="0">
                 <a:solidFill>
                   <a:srgbClr val="3D5566"/>
                 </a:solidFill>
                 <a:latin typeface="Arial"/>
               </a:rPr>
-              <a:t>Беспристрастность сертификации</a:t>
+              <a:t>Один из лидеров по темпам
+роста в 2021–2025 (МВФ)</a:t>
             </a:r>
           </a:p>
         </p:txBody>
@@ -6663,8 +5521,8 @@
         </p:nvSpPr>
         <p:spPr>
           <a:xfrm>
-            <a:off x="6309359" y="3749039"/>
-            <a:ext cx="5394960" cy="54864"/>
+            <a:off x="548640" y="3931920"/>
+            <a:ext cx="3566160" cy="54864"/>
           </a:xfrm>
           <a:prstGeom prst="rect">
             <a:avLst/>
@@ -6706,29 +5564,29 @@
         </p:nvSpPr>
         <p:spPr>
           <a:xfrm>
-            <a:off x="6309359" y="4069079"/>
-            <a:ext cx="5394960" cy="411480"/>
-          </a:xfrm>
-          <a:prstGeom prst="rect">
-            <a:avLst/>
-          </a:prstGeom>
-          <a:noFill/>
-        </p:spPr>
-        <p:txBody>
-          <a:bodyPr wrap="square">
-            <a:spAutoFit/>
-          </a:bodyPr>
-          <a:lstStyle/>
-          <a:p>
-            <a:pPr algn="l"/>
-            <a:r>
-              <a:rPr sz="1800" b="1">
+            <a:off x="548640" y="4160520"/>
+            <a:ext cx="3566160" cy="411480"/>
+          </a:xfrm>
+          <a:prstGeom prst="rect">
+            <a:avLst/>
+          </a:prstGeom>
+          <a:noFill/>
+        </p:spPr>
+        <p:txBody>
+          <a:bodyPr wrap="square">
+            <a:spAutoFit/>
+          </a:bodyPr>
+          <a:lstStyle/>
+          <a:p>
+            <a:pPr algn="l"/>
+            <a:r>
+              <a:rPr sz="1600" b="1">
                 <a:solidFill>
                   <a:srgbClr val="07182A"/>
                 </a:solidFill>
                 <a:latin typeface="Arial"/>
               </a:rPr>
-              <a:t>Открытость</a:t>
+              <a:t>Строительство</a:t>
             </a:r>
           </a:p>
         </p:txBody>
@@ -6741,36 +5599,297 @@
         </p:nvSpPr>
         <p:spPr>
           <a:xfrm>
-            <a:off x="6309359" y="4617719"/>
-            <a:ext cx="5394960" cy="640080"/>
-          </a:xfrm>
-          <a:prstGeom prst="rect">
-            <a:avLst/>
-          </a:prstGeom>
-          <a:noFill/>
-        </p:spPr>
-        <p:txBody>
-          <a:bodyPr wrap="square">
-            <a:spAutoFit/>
-          </a:bodyPr>
-          <a:lstStyle/>
-          <a:p>
-            <a:pPr algn="l"/>
-            <a:r>
-              <a:rPr sz="1400" b="0">
+            <a:off x="548640" y="4709160"/>
+            <a:ext cx="3566160" cy="640080"/>
+          </a:xfrm>
+          <a:prstGeom prst="rect">
+            <a:avLst/>
+          </a:prstGeom>
+          <a:noFill/>
+        </p:spPr>
+        <p:txBody>
+          <a:bodyPr wrap="square">
+            <a:spAutoFit/>
+          </a:bodyPr>
+          <a:lstStyle/>
+          <a:p>
+            <a:pPr algn="l"/>
+            <a:r>
+              <a:rPr sz="1300" b="0">
                 <a:solidFill>
                   <a:srgbClr val="3D5566"/>
                 </a:solidFill>
                 <a:latin typeface="Arial"/>
               </a:rPr>
-              <a:t>Международные практики на пользу КР</a:t>
-            </a:r>
-          </a:p>
-        </p:txBody>
-      </p:sp>
-      <p:sp>
-        <p:nvSpPr>
-          <p:cNvPr id="19" name="TextBox 18"/>
+              <a:t>Драйвер роста · инфраструктура</a:t>
+            </a:r>
+          </a:p>
+        </p:txBody>
+      </p:sp>
+      <p:sp>
+        <p:nvSpPr>
+          <p:cNvPr id="19" name="Rectangle 18"/>
+          <p:cNvSpPr/>
+          <p:nvPr/>
+        </p:nvSpPr>
+        <p:spPr>
+          <a:xfrm>
+            <a:off x="4389120" y="3931920"/>
+            <a:ext cx="3566160" cy="54864"/>
+          </a:xfrm>
+          <a:prstGeom prst="rect">
+            <a:avLst/>
+          </a:prstGeom>
+          <a:solidFill>
+            <a:srgbClr val="1F8F5F"/>
+          </a:solidFill>
+          <a:ln>
+            <a:noFill/>
+          </a:ln>
+        </p:spPr>
+        <p:style>
+          <a:lnRef idx="1">
+            <a:schemeClr val="accent1"/>
+          </a:lnRef>
+          <a:fillRef idx="3">
+            <a:schemeClr val="accent1"/>
+          </a:fillRef>
+          <a:effectRef idx="2">
+            <a:schemeClr val="accent1"/>
+          </a:effectRef>
+          <a:fontRef idx="minor">
+            <a:schemeClr val="lt1"/>
+          </a:fontRef>
+        </p:style>
+        <p:txBody>
+          <a:bodyPr rtlCol="0" anchor="ctr"/>
+          <a:lstStyle/>
+          <a:p>
+            <a:pPr algn="ctr"/>
+          </a:p>
+        </p:txBody>
+      </p:sp>
+      <p:sp>
+        <p:nvSpPr>
+          <p:cNvPr id="20" name="TextBox 19"/>
+          <p:cNvSpPr txBox="1"/>
+          <p:nvPr/>
+        </p:nvSpPr>
+        <p:spPr>
+          <a:xfrm>
+            <a:off x="4389120" y="4160520"/>
+            <a:ext cx="3566160" cy="411480"/>
+          </a:xfrm>
+          <a:prstGeom prst="rect">
+            <a:avLst/>
+          </a:prstGeom>
+          <a:noFill/>
+        </p:spPr>
+        <p:txBody>
+          <a:bodyPr wrap="square">
+            <a:spAutoFit/>
+          </a:bodyPr>
+          <a:lstStyle/>
+          <a:p>
+            <a:pPr algn="l"/>
+            <a:r>
+              <a:rPr sz="1600" b="1">
+                <a:solidFill>
+                  <a:srgbClr val="07182A"/>
+                </a:solidFill>
+                <a:latin typeface="Arial"/>
+              </a:rPr>
+              <a:t>Цифровизация</a:t>
+            </a:r>
+          </a:p>
+        </p:txBody>
+      </p:sp>
+      <p:sp>
+        <p:nvSpPr>
+          <p:cNvPr id="21" name="TextBox 20"/>
+          <p:cNvSpPr txBox="1"/>
+          <p:nvPr/>
+        </p:nvSpPr>
+        <p:spPr>
+          <a:xfrm>
+            <a:off x="4389120" y="4709160"/>
+            <a:ext cx="3566160" cy="640080"/>
+          </a:xfrm>
+          <a:prstGeom prst="rect">
+            <a:avLst/>
+          </a:prstGeom>
+          <a:noFill/>
+        </p:spPr>
+        <p:txBody>
+          <a:bodyPr wrap="square">
+            <a:spAutoFit/>
+          </a:bodyPr>
+          <a:lstStyle/>
+          <a:p>
+            <a:pPr algn="l"/>
+            <a:r>
+              <a:rPr sz="1300" b="0">
+                <a:solidFill>
+                  <a:srgbClr val="3D5566"/>
+                </a:solidFill>
+                <a:latin typeface="Arial"/>
+              </a:rPr>
+              <a:t>Таможня, налоги, госуслуги</a:t>
+            </a:r>
+          </a:p>
+        </p:txBody>
+      </p:sp>
+      <p:sp>
+        <p:nvSpPr>
+          <p:cNvPr id="22" name="Rectangle 21"/>
+          <p:cNvSpPr/>
+          <p:nvPr/>
+        </p:nvSpPr>
+        <p:spPr>
+          <a:xfrm>
+            <a:off x="8229600" y="3931920"/>
+            <a:ext cx="3566160" cy="54864"/>
+          </a:xfrm>
+          <a:prstGeom prst="rect">
+            <a:avLst/>
+          </a:prstGeom>
+          <a:solidFill>
+            <a:srgbClr val="1F8F5F"/>
+          </a:solidFill>
+          <a:ln>
+            <a:noFill/>
+          </a:ln>
+        </p:spPr>
+        <p:style>
+          <a:lnRef idx="1">
+            <a:schemeClr val="accent1"/>
+          </a:lnRef>
+          <a:fillRef idx="3">
+            <a:schemeClr val="accent1"/>
+          </a:fillRef>
+          <a:effectRef idx="2">
+            <a:schemeClr val="accent1"/>
+          </a:effectRef>
+          <a:fontRef idx="minor">
+            <a:schemeClr val="lt1"/>
+          </a:fontRef>
+        </p:style>
+        <p:txBody>
+          <a:bodyPr rtlCol="0" anchor="ctr"/>
+          <a:lstStyle/>
+          <a:p>
+            <a:pPr algn="ctr"/>
+          </a:p>
+        </p:txBody>
+      </p:sp>
+      <p:sp>
+        <p:nvSpPr>
+          <p:cNvPr id="23" name="TextBox 22"/>
+          <p:cNvSpPr txBox="1"/>
+          <p:nvPr/>
+        </p:nvSpPr>
+        <p:spPr>
+          <a:xfrm>
+            <a:off x="8229600" y="4160520"/>
+            <a:ext cx="3566160" cy="411480"/>
+          </a:xfrm>
+          <a:prstGeom prst="rect">
+            <a:avLst/>
+          </a:prstGeom>
+          <a:noFill/>
+        </p:spPr>
+        <p:txBody>
+          <a:bodyPr wrap="square">
+            <a:spAutoFit/>
+          </a:bodyPr>
+          <a:lstStyle/>
+          <a:p>
+            <a:pPr algn="l"/>
+            <a:r>
+              <a:rPr sz="1600" b="1">
+                <a:solidFill>
+                  <a:srgbClr val="07182A"/>
+                </a:solidFill>
+                <a:latin typeface="Arial"/>
+              </a:rPr>
+              <a:t>ГЭС / коридоры</a:t>
+            </a:r>
+          </a:p>
+        </p:txBody>
+      </p:sp>
+      <p:sp>
+        <p:nvSpPr>
+          <p:cNvPr id="24" name="TextBox 23"/>
+          <p:cNvSpPr txBox="1"/>
+          <p:nvPr/>
+        </p:nvSpPr>
+        <p:spPr>
+          <a:xfrm>
+            <a:off x="8229600" y="4709160"/>
+            <a:ext cx="3566160" cy="640080"/>
+          </a:xfrm>
+          <a:prstGeom prst="rect">
+            <a:avLst/>
+          </a:prstGeom>
+          <a:noFill/>
+        </p:spPr>
+        <p:txBody>
+          <a:bodyPr wrap="square">
+            <a:spAutoFit/>
+          </a:bodyPr>
+          <a:lstStyle/>
+          <a:p>
+            <a:pPr algn="l"/>
+            <a:r>
+              <a:rPr sz="1300" b="0">
+                <a:solidFill>
+                  <a:srgbClr val="3D5566"/>
+                </a:solidFill>
+                <a:latin typeface="Arial"/>
+              </a:rPr>
+              <a:t>Крупные инфраструктурные инициативы</a:t>
+            </a:r>
+          </a:p>
+        </p:txBody>
+      </p:sp>
+      <p:sp>
+        <p:nvSpPr>
+          <p:cNvPr id="25" name="TextBox 24"/>
+          <p:cNvSpPr txBox="1"/>
+          <p:nvPr/>
+        </p:nvSpPr>
+        <p:spPr>
+          <a:xfrm>
+            <a:off x="548640" y="5669280"/>
+            <a:ext cx="10972800" cy="320040"/>
+          </a:xfrm>
+          <a:prstGeom prst="rect">
+            <a:avLst/>
+          </a:prstGeom>
+          <a:noFill/>
+        </p:spPr>
+        <p:txBody>
+          <a:bodyPr wrap="square">
+            <a:spAutoFit/>
+          </a:bodyPr>
+          <a:lstStyle/>
+          <a:p>
+            <a:pPr algn="l"/>
+            <a:r>
+              <a:rPr sz="1100" b="0">
+                <a:solidFill>
+                  <a:srgbClr val="9AAFBD"/>
+                </a:solidFill>
+                <a:latin typeface="Arial"/>
+              </a:rPr>
+              <a:t>Источники: IMF Article IV 2026, World Bank — ориентиры для CoD</a:t>
+            </a:r>
+          </a:p>
+        </p:txBody>
+      </p:sp>
+      <p:sp>
+        <p:nvSpPr>
+          <p:cNvPr id="26" name="TextBox 25"/>
           <p:cNvSpPr txBox="1"/>
           <p:nvPr/>
         </p:nvSpPr>
@@ -6805,7 +5924,7 @@
       </p:sp>
       <p:sp>
         <p:nvSpPr>
-          <p:cNvPr id="20" name="TextBox 19"/>
+          <p:cNvPr id="27" name="TextBox 26"/>
           <p:cNvSpPr txBox="1"/>
           <p:nvPr/>
         </p:nvSpPr>
@@ -6833,7 +5952,7 @@
                 </a:solidFill>
                 <a:latin typeface="Arial"/>
               </a:rPr>
-              <a:t>04 / 12</a:t>
+              <a:t>04 / 10</a:t>
             </a:r>
           </a:p>
         </p:txBody>
@@ -6871,7 +5990,7 @@
             <a:avLst/>
           </a:prstGeom>
           <a:solidFill>
-            <a:srgbClr val="E8EEF2"/>
+            <a:srgbClr val="07182A"/>
           </a:solidFill>
           <a:ln>
             <a:noFill/>
@@ -6901,74 +6020,42 @@
       </p:sp>
       <p:sp>
         <p:nvSpPr>
-          <p:cNvPr id="3" name="Rectangle 2"/>
-          <p:cNvSpPr/>
-          <p:nvPr/>
-        </p:nvSpPr>
-        <p:spPr>
-          <a:xfrm>
-            <a:off x="0" y="0"/>
-            <a:ext cx="12191695" cy="73152"/>
-          </a:xfrm>
-          <a:prstGeom prst="rect">
-            <a:avLst/>
-          </a:prstGeom>
-          <a:solidFill>
-            <a:srgbClr val="1F8F5F"/>
-          </a:solidFill>
-          <a:ln>
-            <a:noFill/>
-          </a:ln>
-        </p:spPr>
-        <p:style>
-          <a:lnRef idx="1">
-            <a:schemeClr val="accent1"/>
-          </a:lnRef>
-          <a:fillRef idx="3">
-            <a:schemeClr val="accent1"/>
-          </a:fillRef>
-          <a:effectRef idx="2">
-            <a:schemeClr val="accent1"/>
-          </a:effectRef>
-          <a:fontRef idx="minor">
-            <a:schemeClr val="lt1"/>
-          </a:fontRef>
-        </p:style>
-        <p:txBody>
-          <a:bodyPr rtlCol="0" anchor="ctr"/>
-          <a:lstStyle/>
-          <a:p>
-            <a:pPr algn="ctr"/>
-          </a:p>
-        </p:txBody>
-      </p:sp>
-      <p:pic>
-        <p:nvPicPr>
-          <p:cNvPr id="4" name="Picture 3" descr="ipma-kr-emblem.png"/>
-          <p:cNvPicPr>
-            <a:picLocks noChangeAspect="1"/>
-          </p:cNvPicPr>
-          <p:nvPr/>
-        </p:nvPicPr>
-        <p:blipFill>
-          <a:blip r:embed="rId2"/>
-          <a:stretch>
-            <a:fillRect/>
-          </a:stretch>
-        </p:blipFill>
-        <p:spPr>
-          <a:xfrm>
-            <a:off x="11338560" y="256032"/>
-            <a:ext cx="505533" cy="502920"/>
-          </a:xfrm>
-          <a:prstGeom prst="rect">
-            <a:avLst/>
-          </a:prstGeom>
-        </p:spPr>
-      </p:pic>
-      <p:sp>
-        <p:nvSpPr>
-          <p:cNvPr id="5" name="TextBox 4"/>
+          <p:cNvPr id="3" name="TextBox 2"/>
+          <p:cNvSpPr txBox="1"/>
+          <p:nvPr/>
+        </p:nvSpPr>
+        <p:spPr>
+          <a:xfrm>
+            <a:off x="10881360" y="5212080"/>
+            <a:ext cx="1645920" cy="1280160"/>
+          </a:xfrm>
+          <a:prstGeom prst="rect">
+            <a:avLst/>
+          </a:prstGeom>
+          <a:noFill/>
+        </p:spPr>
+        <p:txBody>
+          <a:bodyPr wrap="square">
+            <a:spAutoFit/>
+          </a:bodyPr>
+          <a:lstStyle/>
+          <a:p>
+            <a:pPr algn="l"/>
+            <a:r>
+              <a:rPr sz="11000" b="1">
+                <a:solidFill>
+                  <a:srgbClr val="E30613"/>
+                </a:solidFill>
+                <a:latin typeface="Arial"/>
+              </a:rPr>
+              <a:t>»</a:t>
+            </a:r>
+          </a:p>
+        </p:txBody>
+      </p:sp>
+      <p:sp>
+        <p:nvSpPr>
+          <p:cNvPr id="4" name="TextBox 3"/>
           <p:cNvSpPr txBox="1"/>
           <p:nvPr/>
         </p:nvSpPr>
@@ -6992,11 +6079,46 @@
             <a:r>
               <a:rPr sz="1100" b="1">
                 <a:solidFill>
-                  <a:srgbClr val="1F8F5F"/>
-                </a:solidFill>
-                <a:latin typeface="Arial"/>
-              </a:rPr>
-              <a:t>05  »  КОНТЕКСТ</a:t>
+                  <a:srgbClr val="3DD68C"/>
+                </a:solidFill>
+                <a:latin typeface="Arial"/>
+              </a:rPr>
+              <a:t>05  »  МИССИЯ</a:t>
+            </a:r>
+          </a:p>
+        </p:txBody>
+      </p:sp>
+      <p:sp>
+        <p:nvSpPr>
+          <p:cNvPr id="5" name="TextBox 4"/>
+          <p:cNvSpPr txBox="1"/>
+          <p:nvPr/>
+        </p:nvSpPr>
+        <p:spPr>
+          <a:xfrm>
+            <a:off x="548640" y="640080"/>
+            <a:ext cx="10515600" cy="594360"/>
+          </a:xfrm>
+          <a:prstGeom prst="rect">
+            <a:avLst/>
+          </a:prstGeom>
+          <a:noFill/>
+        </p:spPr>
+        <p:txBody>
+          <a:bodyPr wrap="square">
+            <a:spAutoFit/>
+          </a:bodyPr>
+          <a:lstStyle/>
+          <a:p>
+            <a:pPr algn="l"/>
+            <a:r>
+              <a:rPr sz="3000" b="1">
+                <a:solidFill>
+                  <a:srgbClr val="FFFFFF"/>
+                </a:solidFill>
+                <a:latin typeface="Arial"/>
+              </a:rPr>
+              <a:t>Миссия KgPMU</a:t>
             </a:r>
           </a:p>
         </p:txBody>
@@ -7009,29 +6131,29 @@
         </p:nvSpPr>
         <p:spPr>
           <a:xfrm>
-            <a:off x="548640" y="640080"/>
-            <a:ext cx="10058400" cy="640080"/>
-          </a:xfrm>
-          <a:prstGeom prst="rect">
-            <a:avLst/>
-          </a:prstGeom>
-          <a:noFill/>
-        </p:spPr>
-        <p:txBody>
-          <a:bodyPr wrap="square">
-            <a:spAutoFit/>
-          </a:bodyPr>
-          <a:lstStyle/>
-          <a:p>
-            <a:pPr algn="l"/>
-            <a:r>
-              <a:rPr sz="3200" b="1">
-                <a:solidFill>
-                  <a:srgbClr val="07182A"/>
-                </a:solidFill>
-                <a:latin typeface="Arial"/>
-              </a:rPr>
-              <a:t>Кыргызстан</a:t>
+            <a:off x="640080" y="1737360"/>
+            <a:ext cx="10515600" cy="2011680"/>
+          </a:xfrm>
+          <a:prstGeom prst="rect">
+            <a:avLst/>
+          </a:prstGeom>
+          <a:noFill/>
+        </p:spPr>
+        <p:txBody>
+          <a:bodyPr wrap="square">
+            <a:spAutoFit/>
+          </a:bodyPr>
+          <a:lstStyle/>
+          <a:p>
+            <a:pPr algn="l"/>
+            <a:r>
+              <a:rPr sz="2400" b="1">
+                <a:solidFill>
+                  <a:srgbClr val="FFFFFF"/>
+                </a:solidFill>
+                <a:latin typeface="Arial"/>
+              </a:rPr>
+              <a:t>Создать в Кыргызстане сообщество лидеров, способных реализовывать проекты мирового уровня — на стандартах IPMA и национальных ценностях.</a:t>
             </a:r>
           </a:p>
         </p:txBody>
@@ -7044,29 +6166,29 @@
         </p:nvSpPr>
         <p:spPr>
           <a:xfrm>
-            <a:off x="548640" y="1325880"/>
-            <a:ext cx="10972800" cy="365760"/>
-          </a:xfrm>
-          <a:prstGeom prst="rect">
-            <a:avLst/>
-          </a:prstGeom>
-          <a:noFill/>
-        </p:spPr>
-        <p:txBody>
-          <a:bodyPr wrap="square">
-            <a:spAutoFit/>
-          </a:bodyPr>
-          <a:lstStyle/>
-          <a:p>
-            <a:pPr algn="l"/>
-            <a:r>
-              <a:rPr sz="1400" b="0">
-                <a:solidFill>
-                  <a:srgbClr val="3D5566"/>
-                </a:solidFill>
-                <a:latin typeface="Arial"/>
-              </a:rPr>
-              <a:t>Центральная Азия — пересечение маршрутов ЕАЭС и Большого Шёлкового пути</a:t>
+            <a:off x="640080" y="4023360"/>
+            <a:ext cx="10515600" cy="1371600"/>
+          </a:xfrm>
+          <a:prstGeom prst="rect">
+            <a:avLst/>
+          </a:prstGeom>
+          <a:noFill/>
+        </p:spPr>
+        <p:txBody>
+          <a:bodyPr wrap="square">
+            <a:spAutoFit/>
+          </a:bodyPr>
+          <a:lstStyle/>
+          <a:p>
+            <a:pPr algn="l"/>
+            <a:r>
+              <a:rPr sz="1500" b="0">
+                <a:solidFill>
+                  <a:srgbClr val="A9C0D0"/>
+                </a:solidFill>
+                <a:latin typeface="Arial"/>
+              </a:rPr>
+              <a:t>Повышаем зрелость управления проектами через образование, сертификацию и обмен практиками по ICB4. Формируем национальное сообщество и независимый орган сертификации 4‑L‑C. Интегрируем Кыргызстан в глобальную семью IPMA.</a:t>
             </a:r>
           </a:p>
         </p:txBody>
@@ -7074,450 +6196,6 @@
       <p:sp>
         <p:nvSpPr>
           <p:cNvPr id="8" name="TextBox 7"/>
-          <p:cNvSpPr txBox="1"/>
-          <p:nvPr/>
-        </p:nvSpPr>
-        <p:spPr>
-          <a:xfrm>
-            <a:off x="548640" y="2194560"/>
-            <a:ext cx="2651760" cy="640080"/>
-          </a:xfrm>
-          <a:prstGeom prst="rect">
-            <a:avLst/>
-          </a:prstGeom>
-          <a:noFill/>
-        </p:spPr>
-        <p:txBody>
-          <a:bodyPr wrap="square">
-            <a:spAutoFit/>
-          </a:bodyPr>
-          <a:lstStyle/>
-          <a:p>
-            <a:pPr algn="l"/>
-            <a:r>
-              <a:rPr sz="2800" b="1">
-                <a:solidFill>
-                  <a:srgbClr val="07182A"/>
-                </a:solidFill>
-                <a:latin typeface="Arial"/>
-              </a:rPr>
-              <a:t>≈200k</a:t>
-            </a:r>
-          </a:p>
-        </p:txBody>
-      </p:sp>
-      <p:sp>
-        <p:nvSpPr>
-          <p:cNvPr id="9" name="TextBox 8"/>
-          <p:cNvSpPr txBox="1"/>
-          <p:nvPr/>
-        </p:nvSpPr>
-        <p:spPr>
-          <a:xfrm>
-            <a:off x="548640" y="3017520"/>
-            <a:ext cx="2651760" cy="457200"/>
-          </a:xfrm>
-          <a:prstGeom prst="rect">
-            <a:avLst/>
-          </a:prstGeom>
-          <a:noFill/>
-        </p:spPr>
-        <p:txBody>
-          <a:bodyPr wrap="square">
-            <a:spAutoFit/>
-          </a:bodyPr>
-          <a:lstStyle/>
-          <a:p>
-            <a:pPr algn="l"/>
-            <a:r>
-              <a:rPr sz="1300" b="0">
-                <a:solidFill>
-                  <a:srgbClr val="3D5566"/>
-                </a:solidFill>
-                <a:latin typeface="Arial"/>
-              </a:rPr>
-              <a:t>км²</a:t>
-            </a:r>
-          </a:p>
-        </p:txBody>
-      </p:sp>
-      <p:sp>
-        <p:nvSpPr>
-          <p:cNvPr id="10" name="Rectangle 9"/>
-          <p:cNvSpPr/>
-          <p:nvPr/>
-        </p:nvSpPr>
-        <p:spPr>
-          <a:xfrm>
-            <a:off x="3355848" y="2011680"/>
-            <a:ext cx="18288" cy="1828800"/>
-          </a:xfrm>
-          <a:prstGeom prst="rect">
-            <a:avLst/>
-          </a:prstGeom>
-          <a:solidFill>
-            <a:srgbClr val="D0DCE3"/>
-          </a:solidFill>
-          <a:ln>
-            <a:noFill/>
-          </a:ln>
-        </p:spPr>
-        <p:style>
-          <a:lnRef idx="1">
-            <a:schemeClr val="accent1"/>
-          </a:lnRef>
-          <a:fillRef idx="3">
-            <a:schemeClr val="accent1"/>
-          </a:fillRef>
-          <a:effectRef idx="2">
-            <a:schemeClr val="accent1"/>
-          </a:effectRef>
-          <a:fontRef idx="minor">
-            <a:schemeClr val="lt1"/>
-          </a:fontRef>
-        </p:style>
-        <p:txBody>
-          <a:bodyPr rtlCol="0" anchor="ctr"/>
-          <a:lstStyle/>
-          <a:p>
-            <a:pPr algn="ctr"/>
-          </a:p>
-        </p:txBody>
-      </p:sp>
-      <p:sp>
-        <p:nvSpPr>
-          <p:cNvPr id="11" name="TextBox 10"/>
-          <p:cNvSpPr txBox="1"/>
-          <p:nvPr/>
-        </p:nvSpPr>
-        <p:spPr>
-          <a:xfrm>
-            <a:off x="3429000" y="2194560"/>
-            <a:ext cx="2651760" cy="640080"/>
-          </a:xfrm>
-          <a:prstGeom prst="rect">
-            <a:avLst/>
-          </a:prstGeom>
-          <a:noFill/>
-        </p:spPr>
-        <p:txBody>
-          <a:bodyPr wrap="square">
-            <a:spAutoFit/>
-          </a:bodyPr>
-          <a:lstStyle/>
-          <a:p>
-            <a:pPr algn="l"/>
-            <a:r>
-              <a:rPr sz="2800" b="1">
-                <a:solidFill>
-                  <a:srgbClr val="07182A"/>
-                </a:solidFill>
-                <a:latin typeface="Arial"/>
-              </a:rPr>
-              <a:t>7,4 млн</a:t>
-            </a:r>
-          </a:p>
-        </p:txBody>
-      </p:sp>
-      <p:sp>
-        <p:nvSpPr>
-          <p:cNvPr id="12" name="TextBox 11"/>
-          <p:cNvSpPr txBox="1"/>
-          <p:nvPr/>
-        </p:nvSpPr>
-        <p:spPr>
-          <a:xfrm>
-            <a:off x="3429000" y="3017520"/>
-            <a:ext cx="2651760" cy="457200"/>
-          </a:xfrm>
-          <a:prstGeom prst="rect">
-            <a:avLst/>
-          </a:prstGeom>
-          <a:noFill/>
-        </p:spPr>
-        <p:txBody>
-          <a:bodyPr wrap="square">
-            <a:spAutoFit/>
-          </a:bodyPr>
-          <a:lstStyle/>
-          <a:p>
-            <a:pPr algn="l"/>
-            <a:r>
-              <a:rPr sz="1300" b="0">
-                <a:solidFill>
-                  <a:srgbClr val="3D5566"/>
-                </a:solidFill>
-                <a:latin typeface="Arial"/>
-              </a:rPr>
-              <a:t>население</a:t>
-            </a:r>
-          </a:p>
-        </p:txBody>
-      </p:sp>
-      <p:sp>
-        <p:nvSpPr>
-          <p:cNvPr id="13" name="Rectangle 12"/>
-          <p:cNvSpPr/>
-          <p:nvPr/>
-        </p:nvSpPr>
-        <p:spPr>
-          <a:xfrm>
-            <a:off x="6236207" y="2011680"/>
-            <a:ext cx="18288" cy="1828800"/>
-          </a:xfrm>
-          <a:prstGeom prst="rect">
-            <a:avLst/>
-          </a:prstGeom>
-          <a:solidFill>
-            <a:srgbClr val="D0DCE3"/>
-          </a:solidFill>
-          <a:ln>
-            <a:noFill/>
-          </a:ln>
-        </p:spPr>
-        <p:style>
-          <a:lnRef idx="1">
-            <a:schemeClr val="accent1"/>
-          </a:lnRef>
-          <a:fillRef idx="3">
-            <a:schemeClr val="accent1"/>
-          </a:fillRef>
-          <a:effectRef idx="2">
-            <a:schemeClr val="accent1"/>
-          </a:effectRef>
-          <a:fontRef idx="minor">
-            <a:schemeClr val="lt1"/>
-          </a:fontRef>
-        </p:style>
-        <p:txBody>
-          <a:bodyPr rtlCol="0" anchor="ctr"/>
-          <a:lstStyle/>
-          <a:p>
-            <a:pPr algn="ctr"/>
-          </a:p>
-        </p:txBody>
-      </p:sp>
-      <p:sp>
-        <p:nvSpPr>
-          <p:cNvPr id="14" name="TextBox 13"/>
-          <p:cNvSpPr txBox="1"/>
-          <p:nvPr/>
-        </p:nvSpPr>
-        <p:spPr>
-          <a:xfrm>
-            <a:off x="6309359" y="2194560"/>
-            <a:ext cx="2651760" cy="640080"/>
-          </a:xfrm>
-          <a:prstGeom prst="rect">
-            <a:avLst/>
-          </a:prstGeom>
-          <a:noFill/>
-        </p:spPr>
-        <p:txBody>
-          <a:bodyPr wrap="square">
-            <a:spAutoFit/>
-          </a:bodyPr>
-          <a:lstStyle/>
-          <a:p>
-            <a:pPr algn="l"/>
-            <a:r>
-              <a:rPr sz="2800" b="1">
-                <a:solidFill>
-                  <a:srgbClr val="07182A"/>
-                </a:solidFill>
-                <a:latin typeface="Arial"/>
-              </a:rPr>
-              <a:t>Бишкек</a:t>
-            </a:r>
-          </a:p>
-        </p:txBody>
-      </p:sp>
-      <p:sp>
-        <p:nvSpPr>
-          <p:cNvPr id="15" name="TextBox 14"/>
-          <p:cNvSpPr txBox="1"/>
-          <p:nvPr/>
-        </p:nvSpPr>
-        <p:spPr>
-          <a:xfrm>
-            <a:off x="6309359" y="3017520"/>
-            <a:ext cx="2651760" cy="457200"/>
-          </a:xfrm>
-          <a:prstGeom prst="rect">
-            <a:avLst/>
-          </a:prstGeom>
-          <a:noFill/>
-        </p:spPr>
-        <p:txBody>
-          <a:bodyPr wrap="square">
-            <a:spAutoFit/>
-          </a:bodyPr>
-          <a:lstStyle/>
-          <a:p>
-            <a:pPr algn="l"/>
-            <a:r>
-              <a:rPr sz="1300" b="0">
-                <a:solidFill>
-                  <a:srgbClr val="3D5566"/>
-                </a:solidFill>
-                <a:latin typeface="Arial"/>
-              </a:rPr>
-              <a:t>штаб-квартира</a:t>
-            </a:r>
-          </a:p>
-        </p:txBody>
-      </p:sp>
-      <p:sp>
-        <p:nvSpPr>
-          <p:cNvPr id="16" name="Rectangle 15"/>
-          <p:cNvSpPr/>
-          <p:nvPr/>
-        </p:nvSpPr>
-        <p:spPr>
-          <a:xfrm>
-            <a:off x="9116567" y="2011680"/>
-            <a:ext cx="18288" cy="1828800"/>
-          </a:xfrm>
-          <a:prstGeom prst="rect">
-            <a:avLst/>
-          </a:prstGeom>
-          <a:solidFill>
-            <a:srgbClr val="D0DCE3"/>
-          </a:solidFill>
-          <a:ln>
-            <a:noFill/>
-          </a:ln>
-        </p:spPr>
-        <p:style>
-          <a:lnRef idx="1">
-            <a:schemeClr val="accent1"/>
-          </a:lnRef>
-          <a:fillRef idx="3">
-            <a:schemeClr val="accent1"/>
-          </a:fillRef>
-          <a:effectRef idx="2">
-            <a:schemeClr val="accent1"/>
-          </a:effectRef>
-          <a:fontRef idx="minor">
-            <a:schemeClr val="lt1"/>
-          </a:fontRef>
-        </p:style>
-        <p:txBody>
-          <a:bodyPr rtlCol="0" anchor="ctr"/>
-          <a:lstStyle/>
-          <a:p>
-            <a:pPr algn="ctr"/>
-          </a:p>
-        </p:txBody>
-      </p:sp>
-      <p:sp>
-        <p:nvSpPr>
-          <p:cNvPr id="17" name="TextBox 16"/>
-          <p:cNvSpPr txBox="1"/>
-          <p:nvPr/>
-        </p:nvSpPr>
-        <p:spPr>
-          <a:xfrm>
-            <a:off x="9189719" y="2194560"/>
-            <a:ext cx="2651760" cy="640080"/>
-          </a:xfrm>
-          <a:prstGeom prst="rect">
-            <a:avLst/>
-          </a:prstGeom>
-          <a:noFill/>
-        </p:spPr>
-        <p:txBody>
-          <a:bodyPr wrap="square">
-            <a:spAutoFit/>
-          </a:bodyPr>
-          <a:lstStyle/>
-          <a:p>
-            <a:pPr algn="l"/>
-            <a:r>
-              <a:rPr sz="2800" b="1">
-                <a:solidFill>
-                  <a:srgbClr val="07182A"/>
-                </a:solidFill>
-                <a:latin typeface="Arial"/>
-              </a:rPr>
-              <a:t>ЕАЭС</a:t>
-            </a:r>
-          </a:p>
-        </p:txBody>
-      </p:sp>
-      <p:sp>
-        <p:nvSpPr>
-          <p:cNvPr id="18" name="TextBox 17"/>
-          <p:cNvSpPr txBox="1"/>
-          <p:nvPr/>
-        </p:nvSpPr>
-        <p:spPr>
-          <a:xfrm>
-            <a:off x="9189719" y="3017520"/>
-            <a:ext cx="2651760" cy="457200"/>
-          </a:xfrm>
-          <a:prstGeom prst="rect">
-            <a:avLst/>
-          </a:prstGeom>
-          <a:noFill/>
-        </p:spPr>
-        <p:txBody>
-          <a:bodyPr wrap="square">
-            <a:spAutoFit/>
-          </a:bodyPr>
-          <a:lstStyle/>
-          <a:p>
-            <a:pPr algn="l"/>
-            <a:r>
-              <a:rPr sz="1300" b="0">
-                <a:solidFill>
-                  <a:srgbClr val="3D5566"/>
-                </a:solidFill>
-                <a:latin typeface="Arial"/>
-              </a:rPr>
-              <a:t>пространство</a:t>
-            </a:r>
-          </a:p>
-        </p:txBody>
-      </p:sp>
-      <p:sp>
-        <p:nvSpPr>
-          <p:cNvPr id="19" name="TextBox 18"/>
-          <p:cNvSpPr txBox="1"/>
-          <p:nvPr/>
-        </p:nvSpPr>
-        <p:spPr>
-          <a:xfrm>
-            <a:off x="548640" y="4572000"/>
-            <a:ext cx="10972800" cy="731520"/>
-          </a:xfrm>
-          <a:prstGeom prst="rect">
-            <a:avLst/>
-          </a:prstGeom>
-          <a:noFill/>
-        </p:spPr>
-        <p:txBody>
-          <a:bodyPr wrap="square">
-            <a:spAutoFit/>
-          </a:bodyPr>
-          <a:lstStyle/>
-          <a:p>
-            <a:pPr algn="l"/>
-            <a:r>
-              <a:rPr sz="1400" b="0">
-                <a:solidFill>
-                  <a:srgbClr val="1F8F5F"/>
-                </a:solidFill>
-                <a:latin typeface="Arial"/>
-              </a:rPr>
-              <a:t>Госуправление · Инфраструктура · Цифровизация · Строительство · IT · Медицина и НПО</a:t>
-            </a:r>
-          </a:p>
-        </p:txBody>
-      </p:sp>
-      <p:sp>
-        <p:nvSpPr>
-          <p:cNvPr id="20" name="TextBox 19"/>
           <p:cNvSpPr txBox="1"/>
           <p:nvPr/>
         </p:nvSpPr>
@@ -7541,7 +6219,7 @@
             <a:r>
               <a:rPr sz="1100" b="0">
                 <a:solidFill>
-                  <a:srgbClr val="9AAFBD"/>
+                  <a:srgbClr val="7F96A8"/>
                 </a:solidFill>
                 <a:latin typeface="Arial"/>
               </a:rPr>
@@ -7552,7 +6230,7 @@
       </p:sp>
       <p:sp>
         <p:nvSpPr>
-          <p:cNvPr id="21" name="TextBox 20"/>
+          <p:cNvPr id="9" name="TextBox 8"/>
           <p:cNvSpPr txBox="1"/>
           <p:nvPr/>
         </p:nvSpPr>
@@ -7576,11 +6254,11 @@
             <a:r>
               <a:rPr sz="1100" b="0">
                 <a:solidFill>
-                  <a:srgbClr val="9AAFBD"/>
-                </a:solidFill>
-                <a:latin typeface="Arial"/>
-              </a:rPr>
-              <a:t>05 / 12</a:t>
+                  <a:srgbClr val="7F96A8"/>
+                </a:solidFill>
+                <a:latin typeface="Arial"/>
+              </a:rPr>
+              <a:t>05 / 10</a:t>
             </a:r>
           </a:p>
         </p:txBody>
@@ -7655,7 +6333,7 @@
         <p:spPr>
           <a:xfrm>
             <a:off x="0" y="0"/>
-            <a:ext cx="12191695" cy="73152"/>
+            <a:ext cx="12191695" cy="64008"/>
           </a:xfrm>
           <a:prstGeom prst="rect">
             <a:avLst/>
@@ -7743,7 +6421,7 @@
                 </a:solidFill>
                 <a:latin typeface="Arial"/>
               </a:rPr>
-              <a:t>06  »  ПУТЬ</a:t>
+              <a:t>06  »  СТРАТЕГИЯ</a:t>
             </a:r>
           </a:p>
         </p:txBody>
@@ -7757,72 +6435,64 @@
         <p:spPr>
           <a:xfrm>
             <a:off x="548640" y="640080"/>
-            <a:ext cx="10058400" cy="640080"/>
-          </a:xfrm>
-          <a:prstGeom prst="rect">
-            <a:avLst/>
-          </a:prstGeom>
-          <a:noFill/>
-        </p:spPr>
-        <p:txBody>
-          <a:bodyPr wrap="square">
-            <a:spAutoFit/>
-          </a:bodyPr>
-          <a:lstStyle/>
-          <a:p>
-            <a:pPr algn="l"/>
-            <a:r>
-              <a:rPr sz="3200" b="1">
+            <a:ext cx="10515600" cy="594360"/>
+          </a:xfrm>
+          <a:prstGeom prst="rect">
+            <a:avLst/>
+          </a:prstGeom>
+          <a:noFill/>
+        </p:spPr>
+        <p:txBody>
+          <a:bodyPr wrap="square">
+            <a:spAutoFit/>
+          </a:bodyPr>
+          <a:lstStyle/>
+          <a:p>
+            <a:pPr algn="l"/>
+            <a:r>
+              <a:rPr sz="3000" b="1">
                 <a:solidFill>
                   <a:srgbClr val="07182A"/>
                 </a:solidFill>
                 <a:latin typeface="Arial"/>
               </a:rPr>
-              <a:t>Уже сделано</a:t>
-            </a:r>
-          </a:p>
-        </p:txBody>
-      </p:sp>
-      <p:sp>
-        <p:nvSpPr>
-          <p:cNvPr id="7" name="Oval 6"/>
-          <p:cNvSpPr/>
-          <p:nvPr/>
-        </p:nvSpPr>
-        <p:spPr>
-          <a:xfrm>
-            <a:off x="640080" y="1691640"/>
-            <a:ext cx="256032" cy="256032"/>
-          </a:xfrm>
-          <a:prstGeom prst="ellipse">
-            <a:avLst/>
-          </a:prstGeom>
-          <a:solidFill>
-            <a:srgbClr val="1F8F5F"/>
-          </a:solidFill>
-          <a:ln>
-            <a:noFill/>
-          </a:ln>
-        </p:spPr>
-        <p:style>
-          <a:lnRef idx="1">
-            <a:schemeClr val="accent1"/>
-          </a:lnRef>
-          <a:fillRef idx="3">
-            <a:schemeClr val="accent1"/>
-          </a:fillRef>
-          <a:effectRef idx="2">
-            <a:schemeClr val="accent1"/>
-          </a:effectRef>
-          <a:fontRef idx="minor">
-            <a:schemeClr val="lt1"/>
-          </a:fontRef>
-        </p:style>
-        <p:txBody>
-          <a:bodyPr rtlCol="0" anchor="ctr"/>
-          <a:lstStyle/>
-          <a:p>
-            <a:pPr algn="ctr"/>
+              <a:t>Спрос и стратегические цели</a:t>
+            </a:r>
+          </a:p>
+        </p:txBody>
+      </p:sp>
+      <p:sp>
+        <p:nvSpPr>
+          <p:cNvPr id="7" name="TextBox 6"/>
+          <p:cNvSpPr txBox="1"/>
+          <p:nvPr/>
+        </p:nvSpPr>
+        <p:spPr>
+          <a:xfrm>
+            <a:off x="548640" y="1371600"/>
+            <a:ext cx="10972800" cy="320040"/>
+          </a:xfrm>
+          <a:prstGeom prst="rect">
+            <a:avLst/>
+          </a:prstGeom>
+          <a:noFill/>
+        </p:spPr>
+        <p:txBody>
+          <a:bodyPr wrap="square">
+            <a:spAutoFit/>
+          </a:bodyPr>
+          <a:lstStyle/>
+          <a:p>
+            <a:pPr algn="l"/>
+            <a:r>
+              <a:rPr sz="1300" b="1">
+                <a:solidFill>
+                  <a:srgbClr val="1F8F5F"/>
+                </a:solidFill>
+                <a:latin typeface="Arial"/>
+              </a:rPr>
+              <a:t>Спрос: Госуправление · Строительство · IT · Медицина и НПО · Инфраструктура · Цифровизация</a:t>
+            </a:r>
           </a:p>
         </p:txBody>
       </p:sp>
@@ -7834,29 +6504,29 @@
         </p:nvSpPr>
         <p:spPr>
           <a:xfrm>
-            <a:off x="1188720" y="1645920"/>
-            <a:ext cx="1828800" cy="365760"/>
-          </a:xfrm>
-          <a:prstGeom prst="rect">
-            <a:avLst/>
-          </a:prstGeom>
-          <a:noFill/>
-        </p:spPr>
-        <p:txBody>
-          <a:bodyPr wrap="square">
-            <a:spAutoFit/>
-          </a:bodyPr>
-          <a:lstStyle/>
-          <a:p>
-            <a:pPr algn="l"/>
-            <a:r>
-              <a:rPr sz="1400" b="1">
+            <a:off x="548640" y="1874519"/>
+            <a:ext cx="548640" cy="365760"/>
+          </a:xfrm>
+          <a:prstGeom prst="rect">
+            <a:avLst/>
+          </a:prstGeom>
+          <a:noFill/>
+        </p:spPr>
+        <p:txBody>
+          <a:bodyPr wrap="square">
+            <a:spAutoFit/>
+          </a:bodyPr>
+          <a:lstStyle/>
+          <a:p>
+            <a:pPr algn="l"/>
+            <a:r>
+              <a:rPr sz="1300" b="1">
                 <a:solidFill>
                   <a:srgbClr val="1F8F5F"/>
                 </a:solidFill>
                 <a:latin typeface="Arial"/>
               </a:rPr>
-              <a:t>апр 2026</a:t>
+              <a:t>01</a:t>
             </a:r>
           </a:p>
         </p:txBody>
@@ -7869,73 +6539,65 @@
         </p:nvSpPr>
         <p:spPr>
           <a:xfrm>
-            <a:off x="3200400" y="1645920"/>
-            <a:ext cx="8229600" cy="411480"/>
-          </a:xfrm>
-          <a:prstGeom prst="rect">
-            <a:avLst/>
-          </a:prstGeom>
-          <a:noFill/>
-        </p:spPr>
-        <p:txBody>
-          <a:bodyPr wrap="square">
-            <a:spAutoFit/>
-          </a:bodyPr>
-          <a:lstStyle/>
-          <a:p>
-            <a:pPr algn="l"/>
-            <a:r>
-              <a:rPr sz="1600" b="1">
-                <a:solidFill>
-                  <a:srgbClr val="07182A"/>
-                </a:solidFill>
-                <a:latin typeface="Arial"/>
-              </a:rPr>
-              <a:t>Регистрация в Минюсте КР</a:t>
-            </a:r>
-          </a:p>
-        </p:txBody>
-      </p:sp>
-      <p:sp>
-        <p:nvSpPr>
-          <p:cNvPr id="10" name="Oval 9"/>
-          <p:cNvSpPr/>
-          <p:nvPr/>
-        </p:nvSpPr>
-        <p:spPr>
-          <a:xfrm>
-            <a:off x="640080" y="2788920"/>
-            <a:ext cx="256032" cy="256032"/>
-          </a:xfrm>
-          <a:prstGeom prst="ellipse">
-            <a:avLst/>
-          </a:prstGeom>
-          <a:solidFill>
-            <a:srgbClr val="1F8F5F"/>
-          </a:solidFill>
-          <a:ln>
-            <a:noFill/>
-          </a:ln>
-        </p:spPr>
-        <p:style>
-          <a:lnRef idx="1">
-            <a:schemeClr val="accent1"/>
-          </a:lnRef>
-          <a:fillRef idx="3">
-            <a:schemeClr val="accent1"/>
-          </a:fillRef>
-          <a:effectRef idx="2">
-            <a:schemeClr val="accent1"/>
-          </a:effectRef>
-          <a:fontRef idx="minor">
-            <a:schemeClr val="lt1"/>
-          </a:fontRef>
-        </p:style>
-        <p:txBody>
-          <a:bodyPr rtlCol="0" anchor="ctr"/>
-          <a:lstStyle/>
-          <a:p>
-            <a:pPr algn="ctr"/>
+            <a:off x="1280160" y="1874519"/>
+            <a:ext cx="10058400" cy="411480"/>
+          </a:xfrm>
+          <a:prstGeom prst="rect">
+            <a:avLst/>
+          </a:prstGeom>
+          <a:noFill/>
+        </p:spPr>
+        <p:txBody>
+          <a:bodyPr wrap="square">
+            <a:spAutoFit/>
+          </a:bodyPr>
+          <a:lstStyle/>
+          <a:p>
+            <a:pPr algn="l"/>
+            <a:r>
+              <a:rPr sz="1400" b="0">
+                <a:solidFill>
+                  <a:srgbClr val="122433"/>
+                </a:solidFill>
+                <a:latin typeface="Arial"/>
+              </a:rPr>
+              <a:t>Перейти от Ассоциации-заявителя к Full Member Association</a:t>
+            </a:r>
+          </a:p>
+        </p:txBody>
+      </p:sp>
+      <p:sp>
+        <p:nvSpPr>
+          <p:cNvPr id="10" name="TextBox 9"/>
+          <p:cNvSpPr txBox="1"/>
+          <p:nvPr/>
+        </p:nvSpPr>
+        <p:spPr>
+          <a:xfrm>
+            <a:off x="548640" y="2468879"/>
+            <a:ext cx="548640" cy="365760"/>
+          </a:xfrm>
+          <a:prstGeom prst="rect">
+            <a:avLst/>
+          </a:prstGeom>
+          <a:noFill/>
+        </p:spPr>
+        <p:txBody>
+          <a:bodyPr wrap="square">
+            <a:spAutoFit/>
+          </a:bodyPr>
+          <a:lstStyle/>
+          <a:p>
+            <a:pPr algn="l"/>
+            <a:r>
+              <a:rPr sz="1300" b="1">
+                <a:solidFill>
+                  <a:srgbClr val="1F8F5F"/>
+                </a:solidFill>
+                <a:latin typeface="Arial"/>
+              </a:rPr>
+              <a:t>02</a:t>
+            </a:r>
           </a:p>
         </p:txBody>
       </p:sp>
@@ -7947,108 +6609,100 @@
         </p:nvSpPr>
         <p:spPr>
           <a:xfrm>
-            <a:off x="1188720" y="2743200"/>
-            <a:ext cx="1828800" cy="365760"/>
-          </a:xfrm>
-          <a:prstGeom prst="rect">
-            <a:avLst/>
-          </a:prstGeom>
-          <a:noFill/>
-        </p:spPr>
-        <p:txBody>
-          <a:bodyPr wrap="square">
-            <a:spAutoFit/>
-          </a:bodyPr>
-          <a:lstStyle/>
-          <a:p>
-            <a:pPr algn="l"/>
-            <a:r>
-              <a:rPr sz="1400" b="1">
+            <a:off x="1280160" y="2468879"/>
+            <a:ext cx="10058400" cy="411480"/>
+          </a:xfrm>
+          <a:prstGeom prst="rect">
+            <a:avLst/>
+          </a:prstGeom>
+          <a:noFill/>
+        </p:spPr>
+        <p:txBody>
+          <a:bodyPr wrap="square">
+            <a:spAutoFit/>
+          </a:bodyPr>
+          <a:lstStyle/>
+          <a:p>
+            <a:pPr algn="l"/>
+            <a:r>
+              <a:rPr sz="1400" b="0">
+                <a:solidFill>
+                  <a:srgbClr val="122433"/>
+                </a:solidFill>
+                <a:latin typeface="Arial"/>
+              </a:rPr>
+              <a:t>Создать независимый национальный CB по системе IPMA 4-L-C</a:t>
+            </a:r>
+          </a:p>
+        </p:txBody>
+      </p:sp>
+      <p:sp>
+        <p:nvSpPr>
+          <p:cNvPr id="12" name="TextBox 11"/>
+          <p:cNvSpPr txBox="1"/>
+          <p:nvPr/>
+        </p:nvSpPr>
+        <p:spPr>
+          <a:xfrm>
+            <a:off x="548640" y="3063239"/>
+            <a:ext cx="548640" cy="365760"/>
+          </a:xfrm>
+          <a:prstGeom prst="rect">
+            <a:avLst/>
+          </a:prstGeom>
+          <a:noFill/>
+        </p:spPr>
+        <p:txBody>
+          <a:bodyPr wrap="square">
+            <a:spAutoFit/>
+          </a:bodyPr>
+          <a:lstStyle/>
+          <a:p>
+            <a:pPr algn="l"/>
+            <a:r>
+              <a:rPr sz="1300" b="1">
                 <a:solidFill>
                   <a:srgbClr val="1F8F5F"/>
                 </a:solidFill>
                 <a:latin typeface="Arial"/>
               </a:rPr>
-              <a:t>июн 2026</a:t>
-            </a:r>
-          </a:p>
-        </p:txBody>
-      </p:sp>
-      <p:sp>
-        <p:nvSpPr>
-          <p:cNvPr id="12" name="TextBox 11"/>
-          <p:cNvSpPr txBox="1"/>
-          <p:nvPr/>
-        </p:nvSpPr>
-        <p:spPr>
-          <a:xfrm>
-            <a:off x="3200400" y="2743200"/>
-            <a:ext cx="8229600" cy="411480"/>
-          </a:xfrm>
-          <a:prstGeom prst="rect">
-            <a:avLst/>
-          </a:prstGeom>
-          <a:noFill/>
-        </p:spPr>
-        <p:txBody>
-          <a:bodyPr wrap="square">
-            <a:spAutoFit/>
-          </a:bodyPr>
-          <a:lstStyle/>
-          <a:p>
-            <a:pPr algn="l"/>
-            <a:r>
-              <a:rPr sz="1600" b="1">
-                <a:solidFill>
-                  <a:srgbClr val="07182A"/>
-                </a:solidFill>
-                <a:latin typeface="Arial"/>
-              </a:rPr>
-              <a:t>Документы направлены в IPMA</a:t>
-            </a:r>
-          </a:p>
-        </p:txBody>
-      </p:sp>
-      <p:sp>
-        <p:nvSpPr>
-          <p:cNvPr id="13" name="Oval 12"/>
-          <p:cNvSpPr/>
-          <p:nvPr/>
-        </p:nvSpPr>
-        <p:spPr>
-          <a:xfrm>
-            <a:off x="640080" y="3886200"/>
-            <a:ext cx="256032" cy="256032"/>
-          </a:xfrm>
-          <a:prstGeom prst="ellipse">
-            <a:avLst/>
-          </a:prstGeom>
-          <a:solidFill>
-            <a:srgbClr val="1F8F5F"/>
-          </a:solidFill>
-          <a:ln>
-            <a:noFill/>
-          </a:ln>
-        </p:spPr>
-        <p:style>
-          <a:lnRef idx="1">
-            <a:schemeClr val="accent1"/>
-          </a:lnRef>
-          <a:fillRef idx="3">
-            <a:schemeClr val="accent1"/>
-          </a:fillRef>
-          <a:effectRef idx="2">
-            <a:schemeClr val="accent1"/>
-          </a:effectRef>
-          <a:fontRef idx="minor">
-            <a:schemeClr val="lt1"/>
-          </a:fontRef>
-        </p:style>
-        <p:txBody>
-          <a:bodyPr rtlCol="0" anchor="ctr"/>
-          <a:lstStyle/>
-          <a:p>
-            <a:pPr algn="ctr"/>
+              <a:t>03</a:t>
+            </a:r>
+          </a:p>
+        </p:txBody>
+      </p:sp>
+      <p:sp>
+        <p:nvSpPr>
+          <p:cNvPr id="13" name="TextBox 12"/>
+          <p:cNvSpPr txBox="1"/>
+          <p:nvPr/>
+        </p:nvSpPr>
+        <p:spPr>
+          <a:xfrm>
+            <a:off x="1280160" y="3063239"/>
+            <a:ext cx="10058400" cy="411480"/>
+          </a:xfrm>
+          <a:prstGeom prst="rect">
+            <a:avLst/>
+          </a:prstGeom>
+          <a:noFill/>
+        </p:spPr>
+        <p:txBody>
+          <a:bodyPr wrap="square">
+            <a:spAutoFit/>
+          </a:bodyPr>
+          <a:lstStyle/>
+          <a:p>
+            <a:pPr algn="l"/>
+            <a:r>
+              <a:rPr sz="1400" b="0">
+                <a:solidFill>
+                  <a:srgbClr val="122433"/>
+                </a:solidFill>
+                <a:latin typeface="Arial"/>
+              </a:rPr>
+              <a:t>Рост членской базы: индивидуальное, студенческое, корпоративное</a:t>
+            </a:r>
           </a:p>
         </p:txBody>
       </p:sp>
@@ -8060,29 +6714,29 @@
         </p:nvSpPr>
         <p:spPr>
           <a:xfrm>
-            <a:off x="1188720" y="3840480"/>
-            <a:ext cx="1828800" cy="365760"/>
-          </a:xfrm>
-          <a:prstGeom prst="rect">
-            <a:avLst/>
-          </a:prstGeom>
-          <a:noFill/>
-        </p:spPr>
-        <p:txBody>
-          <a:bodyPr wrap="square">
-            <a:spAutoFit/>
-          </a:bodyPr>
-          <a:lstStyle/>
-          <a:p>
-            <a:pPr algn="l"/>
-            <a:r>
-              <a:rPr sz="1400" b="1">
+            <a:off x="548640" y="3657600"/>
+            <a:ext cx="548640" cy="365760"/>
+          </a:xfrm>
+          <a:prstGeom prst="rect">
+            <a:avLst/>
+          </a:prstGeom>
+          <a:noFill/>
+        </p:spPr>
+        <p:txBody>
+          <a:bodyPr wrap="square">
+            <a:spAutoFit/>
+          </a:bodyPr>
+          <a:lstStyle/>
+          <a:p>
+            <a:pPr algn="l"/>
+            <a:r>
+              <a:rPr sz="1300" b="1">
                 <a:solidFill>
                   <a:srgbClr val="1F8F5F"/>
                 </a:solidFill>
                 <a:latin typeface="Arial"/>
               </a:rPr>
-              <a:t>июл 2026</a:t>
+              <a:t>04</a:t>
             </a:r>
           </a:p>
         </p:txBody>
@@ -8095,73 +6749,65 @@
         </p:nvSpPr>
         <p:spPr>
           <a:xfrm>
-            <a:off x="3200400" y="3840480"/>
-            <a:ext cx="8229600" cy="411480"/>
-          </a:xfrm>
-          <a:prstGeom prst="rect">
-            <a:avLst/>
-          </a:prstGeom>
-          <a:noFill/>
-        </p:spPr>
-        <p:txBody>
-          <a:bodyPr wrap="square">
-            <a:spAutoFit/>
-          </a:bodyPr>
-          <a:lstStyle/>
-          <a:p>
-            <a:pPr algn="l"/>
-            <a:r>
-              <a:rPr sz="1600" b="1">
-                <a:solidFill>
-                  <a:srgbClr val="07182A"/>
-                </a:solidFill>
-                <a:latin typeface="Arial"/>
-              </a:rPr>
-              <a:t>Статус Ассоциация-заявитель</a:t>
-            </a:r>
-          </a:p>
-        </p:txBody>
-      </p:sp>
-      <p:sp>
-        <p:nvSpPr>
-          <p:cNvPr id="16" name="Oval 15"/>
-          <p:cNvSpPr/>
-          <p:nvPr/>
-        </p:nvSpPr>
-        <p:spPr>
-          <a:xfrm>
-            <a:off x="640080" y="4983479"/>
-            <a:ext cx="256032" cy="256032"/>
-          </a:xfrm>
-          <a:prstGeom prst="ellipse">
-            <a:avLst/>
-          </a:prstGeom>
-          <a:solidFill>
-            <a:srgbClr val="1F8F5F"/>
-          </a:solidFill>
-          <a:ln>
-            <a:noFill/>
-          </a:ln>
-        </p:spPr>
-        <p:style>
-          <a:lnRef idx="1">
-            <a:schemeClr val="accent1"/>
-          </a:lnRef>
-          <a:fillRef idx="3">
-            <a:schemeClr val="accent1"/>
-          </a:fillRef>
-          <a:effectRef idx="2">
-            <a:schemeClr val="accent1"/>
-          </a:effectRef>
-          <a:fontRef idx="minor">
-            <a:schemeClr val="lt1"/>
-          </a:fontRef>
-        </p:style>
-        <p:txBody>
-          <a:bodyPr rtlCol="0" anchor="ctr"/>
-          <a:lstStyle/>
-          <a:p>
-            <a:pPr algn="ctr"/>
+            <a:off x="1280160" y="3657600"/>
+            <a:ext cx="10058400" cy="411480"/>
+          </a:xfrm>
+          <a:prstGeom prst="rect">
+            <a:avLst/>
+          </a:prstGeom>
+          <a:noFill/>
+        </p:spPr>
+        <p:txBody>
+          <a:bodyPr wrap="square">
+            <a:spAutoFit/>
+          </a:bodyPr>
+          <a:lstStyle/>
+          <a:p>
+            <a:pPr algn="l"/>
+            <a:r>
+              <a:rPr sz="1400" b="0">
+                <a:solidFill>
+                  <a:srgbClr val="122433"/>
+                </a:solidFill>
+                <a:latin typeface="Arial"/>
+              </a:rPr>
+              <a:t>Продвигать ICB4 / OCB / PEB в госсекторе и бизнесе</a:t>
+            </a:r>
+          </a:p>
+        </p:txBody>
+      </p:sp>
+      <p:sp>
+        <p:nvSpPr>
+          <p:cNvPr id="16" name="TextBox 15"/>
+          <p:cNvSpPr txBox="1"/>
+          <p:nvPr/>
+        </p:nvSpPr>
+        <p:spPr>
+          <a:xfrm>
+            <a:off x="548640" y="4251960"/>
+            <a:ext cx="548640" cy="365760"/>
+          </a:xfrm>
+          <a:prstGeom prst="rect">
+            <a:avLst/>
+          </a:prstGeom>
+          <a:noFill/>
+        </p:spPr>
+        <p:txBody>
+          <a:bodyPr wrap="square">
+            <a:spAutoFit/>
+          </a:bodyPr>
+          <a:lstStyle/>
+          <a:p>
+            <a:pPr algn="l"/>
+            <a:r>
+              <a:rPr sz="1300" b="1">
+                <a:solidFill>
+                  <a:srgbClr val="1F8F5F"/>
+                </a:solidFill>
+                <a:latin typeface="Arial"/>
+              </a:rPr>
+              <a:t>05</a:t>
+            </a:r>
           </a:p>
         </p:txBody>
       </p:sp>
@@ -8173,64 +6819,64 @@
         </p:nvSpPr>
         <p:spPr>
           <a:xfrm>
-            <a:off x="1188720" y="4937759"/>
-            <a:ext cx="1828800" cy="365760"/>
-          </a:xfrm>
-          <a:prstGeom prst="rect">
-            <a:avLst/>
-          </a:prstGeom>
-          <a:noFill/>
-        </p:spPr>
-        <p:txBody>
-          <a:bodyPr wrap="square">
-            <a:spAutoFit/>
-          </a:bodyPr>
-          <a:lstStyle/>
-          <a:p>
-            <a:pPr algn="l"/>
-            <a:r>
-              <a:rPr sz="1400" b="1">
+            <a:off x="1280160" y="4251960"/>
+            <a:ext cx="10058400" cy="411480"/>
+          </a:xfrm>
+          <a:prstGeom prst="rect">
+            <a:avLst/>
+          </a:prstGeom>
+          <a:noFill/>
+        </p:spPr>
+        <p:txBody>
+          <a:bodyPr wrap="square">
+            <a:spAutoFit/>
+          </a:bodyPr>
+          <a:lstStyle/>
+          <a:p>
+            <a:pPr algn="l"/>
+            <a:r>
+              <a:rPr sz="1400" b="0">
+                <a:solidFill>
+                  <a:srgbClr val="122433"/>
+                </a:solidFill>
+                <a:latin typeface="Arial"/>
+              </a:rPr>
+              <a:t>Партнёрства с вузами, госорганами и бизнес-сообществом</a:t>
+            </a:r>
+          </a:p>
+        </p:txBody>
+      </p:sp>
+      <p:sp>
+        <p:nvSpPr>
+          <p:cNvPr id="18" name="TextBox 17"/>
+          <p:cNvSpPr txBox="1"/>
+          <p:nvPr/>
+        </p:nvSpPr>
+        <p:spPr>
+          <a:xfrm>
+            <a:off x="548640" y="4846320"/>
+            <a:ext cx="548640" cy="365760"/>
+          </a:xfrm>
+          <a:prstGeom prst="rect">
+            <a:avLst/>
+          </a:prstGeom>
+          <a:noFill/>
+        </p:spPr>
+        <p:txBody>
+          <a:bodyPr wrap="square">
+            <a:spAutoFit/>
+          </a:bodyPr>
+          <a:lstStyle/>
+          <a:p>
+            <a:pPr algn="l"/>
+            <a:r>
+              <a:rPr sz="1300" b="1">
                 <a:solidFill>
                   <a:srgbClr val="1F8F5F"/>
                 </a:solidFill>
                 <a:latin typeface="Arial"/>
               </a:rPr>
-              <a:t>окт 2026</a:t>
-            </a:r>
-          </a:p>
-        </p:txBody>
-      </p:sp>
-      <p:sp>
-        <p:nvSpPr>
-          <p:cNvPr id="18" name="TextBox 17"/>
-          <p:cNvSpPr txBox="1"/>
-          <p:nvPr/>
-        </p:nvSpPr>
-        <p:spPr>
-          <a:xfrm>
-            <a:off x="3200400" y="4937759"/>
-            <a:ext cx="8229600" cy="411480"/>
-          </a:xfrm>
-          <a:prstGeom prst="rect">
-            <a:avLst/>
-          </a:prstGeom>
-          <a:noFill/>
-        </p:spPr>
-        <p:txBody>
-          <a:bodyPr wrap="square">
-            <a:spAutoFit/>
-          </a:bodyPr>
-          <a:lstStyle/>
-          <a:p>
-            <a:pPr algn="l"/>
-            <a:r>
-              <a:rPr sz="1600" b="1">
-                <a:solidFill>
-                  <a:srgbClr val="07182A"/>
-                </a:solidFill>
-                <a:latin typeface="Arial"/>
-              </a:rPr>
-              <a:t>План: Full MA + сертификация</a:t>
+              <a:t>06</a:t>
             </a:r>
           </a:p>
         </p:txBody>
@@ -8238,6 +6884,111 @@
       <p:sp>
         <p:nvSpPr>
           <p:cNvPr id="19" name="TextBox 18"/>
+          <p:cNvSpPr txBox="1"/>
+          <p:nvPr/>
+        </p:nvSpPr>
+        <p:spPr>
+          <a:xfrm>
+            <a:off x="1280160" y="4846320"/>
+            <a:ext cx="10058400" cy="411480"/>
+          </a:xfrm>
+          <a:prstGeom prst="rect">
+            <a:avLst/>
+          </a:prstGeom>
+          <a:noFill/>
+        </p:spPr>
+        <p:txBody>
+          <a:bodyPr wrap="square">
+            <a:spAutoFit/>
+          </a:bodyPr>
+          <a:lstStyle/>
+          <a:p>
+            <a:pPr algn="l"/>
+            <a:r>
+              <a:rPr sz="1400" b="0">
+                <a:solidFill>
+                  <a:srgbClr val="122433"/>
+                </a:solidFill>
+                <a:latin typeface="Arial"/>
+              </a:rPr>
+              <a:t>Сотрудничество с MA Центральной Азии и ЕАЭС</a:t>
+            </a:r>
+          </a:p>
+        </p:txBody>
+      </p:sp>
+      <p:sp>
+        <p:nvSpPr>
+          <p:cNvPr id="20" name="TextBox 19"/>
+          <p:cNvSpPr txBox="1"/>
+          <p:nvPr/>
+        </p:nvSpPr>
+        <p:spPr>
+          <a:xfrm>
+            <a:off x="548640" y="5440680"/>
+            <a:ext cx="548640" cy="365760"/>
+          </a:xfrm>
+          <a:prstGeom prst="rect">
+            <a:avLst/>
+          </a:prstGeom>
+          <a:noFill/>
+        </p:spPr>
+        <p:txBody>
+          <a:bodyPr wrap="square">
+            <a:spAutoFit/>
+          </a:bodyPr>
+          <a:lstStyle/>
+          <a:p>
+            <a:pPr algn="l"/>
+            <a:r>
+              <a:rPr sz="1300" b="1">
+                <a:solidFill>
+                  <a:srgbClr val="1F8F5F"/>
+                </a:solidFill>
+                <a:latin typeface="Arial"/>
+              </a:rPr>
+              <a:t>07</a:t>
+            </a:r>
+          </a:p>
+        </p:txBody>
+      </p:sp>
+      <p:sp>
+        <p:nvSpPr>
+          <p:cNvPr id="21" name="TextBox 20"/>
+          <p:cNvSpPr txBox="1"/>
+          <p:nvPr/>
+        </p:nvSpPr>
+        <p:spPr>
+          <a:xfrm>
+            <a:off x="1280160" y="5440680"/>
+            <a:ext cx="10058400" cy="411480"/>
+          </a:xfrm>
+          <a:prstGeom prst="rect">
+            <a:avLst/>
+          </a:prstGeom>
+          <a:noFill/>
+        </p:spPr>
+        <p:txBody>
+          <a:bodyPr wrap="square">
+            <a:spAutoFit/>
+          </a:bodyPr>
+          <a:lstStyle/>
+          <a:p>
+            <a:pPr algn="l"/>
+            <a:r>
+              <a:rPr sz="1400" b="0">
+                <a:solidFill>
+                  <a:srgbClr val="122433"/>
+                </a:solidFill>
+                <a:latin typeface="Arial"/>
+              </a:rPr>
+              <a:t>Запустить Young Crew в Кыргызстане</a:t>
+            </a:r>
+          </a:p>
+        </p:txBody>
+      </p:sp>
+      <p:sp>
+        <p:nvSpPr>
+          <p:cNvPr id="22" name="TextBox 21"/>
           <p:cNvSpPr txBox="1"/>
           <p:nvPr/>
         </p:nvSpPr>
@@ -8272,7 +7023,7 @@
       </p:sp>
       <p:sp>
         <p:nvSpPr>
-          <p:cNvPr id="20" name="TextBox 19"/>
+          <p:cNvPr id="23" name="TextBox 22"/>
           <p:cNvSpPr txBox="1"/>
           <p:nvPr/>
         </p:nvSpPr>
@@ -8300,7 +7051,7 @@
                 </a:solidFill>
                 <a:latin typeface="Arial"/>
               </a:rPr>
-              <a:t>06 / 12</a:t>
+              <a:t>06 / 10</a:t>
             </a:r>
           </a:p>
         </p:txBody>
@@ -8375,7 +7126,7 @@
         <p:spPr>
           <a:xfrm>
             <a:off x="0" y="0"/>
-            <a:ext cx="12191695" cy="73152"/>
+            <a:ext cx="12191695" cy="64008"/>
           </a:xfrm>
           <a:prstGeom prst="rect">
             <a:avLst/>
@@ -8463,7 +7214,7 @@
                 </a:solidFill>
                 <a:latin typeface="Arial"/>
               </a:rPr>
-              <a:t>07  »  СТРАТЕГИЯ</a:t>
+              <a:t>07  »  ЭКОСИСТЕМА</a:t>
             </a:r>
           </a:p>
         </p:txBody>
@@ -8477,28 +7228,28 @@
         <p:spPr>
           <a:xfrm>
             <a:off x="548640" y="640080"/>
-            <a:ext cx="10058400" cy="640080"/>
-          </a:xfrm>
-          <a:prstGeom prst="rect">
-            <a:avLst/>
-          </a:prstGeom>
-          <a:noFill/>
-        </p:spPr>
-        <p:txBody>
-          <a:bodyPr wrap="square">
-            <a:spAutoFit/>
-          </a:bodyPr>
-          <a:lstStyle/>
-          <a:p>
-            <a:pPr algn="l"/>
-            <a:r>
-              <a:rPr sz="3200" b="1">
+            <a:ext cx="10515600" cy="594360"/>
+          </a:xfrm>
+          <a:prstGeom prst="rect">
+            <a:avLst/>
+          </a:prstGeom>
+          <a:noFill/>
+        </p:spPr>
+        <p:txBody>
+          <a:bodyPr wrap="square">
+            <a:spAutoFit/>
+          </a:bodyPr>
+          <a:lstStyle/>
+          <a:p>
+            <a:pPr algn="l"/>
+            <a:r>
+              <a:rPr sz="3000" b="1">
                 <a:solidFill>
                   <a:srgbClr val="07182A"/>
                 </a:solidFill>
                 <a:latin typeface="Arial"/>
               </a:rPr>
-              <a:t>Куда идём</a:t>
+              <a:t>Экосистема и продвижение</a:t>
             </a:r>
           </a:p>
         </p:txBody>
@@ -8511,14 +7262,14 @@
         </p:nvSpPr>
         <p:spPr>
           <a:xfrm>
-            <a:off x="548640" y="2103120"/>
-            <a:ext cx="10972800" cy="13716"/>
+            <a:off x="548640" y="1554480"/>
+            <a:ext cx="5394960" cy="54864"/>
           </a:xfrm>
           <a:prstGeom prst="rect">
             <a:avLst/>
           </a:prstGeom>
           <a:solidFill>
-            <a:srgbClr val="D0DCE3"/>
+            <a:srgbClr val="1F8F5F"/>
           </a:solidFill>
           <a:ln>
             <a:noFill/>
@@ -8554,29 +7305,29 @@
         </p:nvSpPr>
         <p:spPr>
           <a:xfrm>
-            <a:off x="548640" y="1417320"/>
-            <a:ext cx="640080" cy="365760"/>
-          </a:xfrm>
-          <a:prstGeom prst="rect">
-            <a:avLst/>
-          </a:prstGeom>
-          <a:noFill/>
-        </p:spPr>
-        <p:txBody>
-          <a:bodyPr wrap="square">
-            <a:spAutoFit/>
-          </a:bodyPr>
-          <a:lstStyle/>
-          <a:p>
-            <a:pPr algn="l"/>
-            <a:r>
-              <a:rPr sz="1400" b="1">
-                <a:solidFill>
-                  <a:srgbClr val="1F8F5F"/>
-                </a:solidFill>
-                <a:latin typeface="Arial"/>
-              </a:rPr>
-              <a:t>01</a:t>
+            <a:off x="548640" y="1874520"/>
+            <a:ext cx="5394960" cy="411480"/>
+          </a:xfrm>
+          <a:prstGeom prst="rect">
+            <a:avLst/>
+          </a:prstGeom>
+          <a:noFill/>
+        </p:spPr>
+        <p:txBody>
+          <a:bodyPr wrap="square">
+            <a:spAutoFit/>
+          </a:bodyPr>
+          <a:lstStyle/>
+          <a:p>
+            <a:pPr algn="l"/>
+            <a:r>
+              <a:rPr sz="1800" b="1">
+                <a:solidFill>
+                  <a:srgbClr val="07182A"/>
+                </a:solidFill>
+                <a:latin typeface="Arial"/>
+              </a:rPr>
+              <a:t>Госсектор</a:t>
             </a:r>
           </a:p>
         </p:txBody>
@@ -8589,29 +7340,29 @@
         </p:nvSpPr>
         <p:spPr>
           <a:xfrm>
-            <a:off x="1371600" y="1417320"/>
-            <a:ext cx="10058400" cy="457200"/>
-          </a:xfrm>
-          <a:prstGeom prst="rect">
-            <a:avLst/>
-          </a:prstGeom>
-          <a:noFill/>
-        </p:spPr>
-        <p:txBody>
-          <a:bodyPr wrap="square">
-            <a:spAutoFit/>
-          </a:bodyPr>
-          <a:lstStyle/>
-          <a:p>
-            <a:pPr algn="l"/>
-            <a:r>
-              <a:rPr sz="1500" b="0">
-                <a:solidFill>
-                  <a:srgbClr val="122433"/>
-                </a:solidFill>
-                <a:latin typeface="Arial"/>
-              </a:rPr>
-              <a:t>Перейти от Ассоциации-заявителя к Full Member Association</a:t>
+            <a:off x="548640" y="2468880"/>
+            <a:ext cx="5394960" cy="640080"/>
+          </a:xfrm>
+          <a:prstGeom prst="rect">
+            <a:avLst/>
+          </a:prstGeom>
+          <a:noFill/>
+        </p:spPr>
+        <p:txBody>
+          <a:bodyPr wrap="square">
+            <a:spAutoFit/>
+          </a:bodyPr>
+          <a:lstStyle/>
+          <a:p>
+            <a:pPr algn="l"/>
+            <a:r>
+              <a:rPr sz="1400" b="0">
+                <a:solidFill>
+                  <a:srgbClr val="3D5566"/>
+                </a:solidFill>
+                <a:latin typeface="Arial"/>
+              </a:rPr>
+              <a:t>Цифровые и инфраструктурные проекты</a:t>
             </a:r>
           </a:p>
         </p:txBody>
@@ -8624,14 +7375,14 @@
         </p:nvSpPr>
         <p:spPr>
           <a:xfrm>
-            <a:off x="548640" y="2926080"/>
-            <a:ext cx="10972800" cy="13716"/>
+            <a:off x="6309359" y="1554480"/>
+            <a:ext cx="5394960" cy="54864"/>
           </a:xfrm>
           <a:prstGeom prst="rect">
             <a:avLst/>
           </a:prstGeom>
           <a:solidFill>
-            <a:srgbClr val="D0DCE3"/>
+            <a:srgbClr val="1F8F5F"/>
           </a:solidFill>
           <a:ln>
             <a:noFill/>
@@ -8667,29 +7418,29 @@
         </p:nvSpPr>
         <p:spPr>
           <a:xfrm>
-            <a:off x="548640" y="2240280"/>
-            <a:ext cx="640080" cy="365760"/>
-          </a:xfrm>
-          <a:prstGeom prst="rect">
-            <a:avLst/>
-          </a:prstGeom>
-          <a:noFill/>
-        </p:spPr>
-        <p:txBody>
-          <a:bodyPr wrap="square">
-            <a:spAutoFit/>
-          </a:bodyPr>
-          <a:lstStyle/>
-          <a:p>
-            <a:pPr algn="l"/>
-            <a:r>
-              <a:rPr sz="1400" b="1">
-                <a:solidFill>
-                  <a:srgbClr val="1F8F5F"/>
-                </a:solidFill>
-                <a:latin typeface="Arial"/>
-              </a:rPr>
-              <a:t>02</a:t>
+            <a:off x="6309359" y="1874520"/>
+            <a:ext cx="5394960" cy="411480"/>
+          </a:xfrm>
+          <a:prstGeom prst="rect">
+            <a:avLst/>
+          </a:prstGeom>
+          <a:noFill/>
+        </p:spPr>
+        <p:txBody>
+          <a:bodyPr wrap="square">
+            <a:spAutoFit/>
+          </a:bodyPr>
+          <a:lstStyle/>
+          <a:p>
+            <a:pPr algn="l"/>
+            <a:r>
+              <a:rPr sz="1800" b="1">
+                <a:solidFill>
+                  <a:srgbClr val="07182A"/>
+                </a:solidFill>
+                <a:latin typeface="Arial"/>
+              </a:rPr>
+              <a:t>Бизнес</a:t>
             </a:r>
           </a:p>
         </p:txBody>
@@ -8702,29 +7453,29 @@
         </p:nvSpPr>
         <p:spPr>
           <a:xfrm>
-            <a:off x="1371600" y="2240280"/>
-            <a:ext cx="10058400" cy="457200"/>
-          </a:xfrm>
-          <a:prstGeom prst="rect">
-            <a:avLst/>
-          </a:prstGeom>
-          <a:noFill/>
-        </p:spPr>
-        <p:txBody>
-          <a:bodyPr wrap="square">
-            <a:spAutoFit/>
-          </a:bodyPr>
-          <a:lstStyle/>
-          <a:p>
-            <a:pPr algn="l"/>
-            <a:r>
-              <a:rPr sz="1500" b="0">
-                <a:solidFill>
-                  <a:srgbClr val="122433"/>
-                </a:solidFill>
-                <a:latin typeface="Arial"/>
-              </a:rPr>
-              <a:t>Создать независимый национальный CB по системе IPMA 4-L-C</a:t>
+            <a:off x="6309359" y="2468880"/>
+            <a:ext cx="5394960" cy="640080"/>
+          </a:xfrm>
+          <a:prstGeom prst="rect">
+            <a:avLst/>
+          </a:prstGeom>
+          <a:noFill/>
+        </p:spPr>
+        <p:txBody>
+          <a:bodyPr wrap="square">
+            <a:spAutoFit/>
+          </a:bodyPr>
+          <a:lstStyle/>
+          <a:p>
+            <a:pPr algn="l"/>
+            <a:r>
+              <a:rPr sz="1400" b="0">
+                <a:solidFill>
+                  <a:srgbClr val="3D5566"/>
+                </a:solidFill>
+                <a:latin typeface="Arial"/>
+              </a:rPr>
+              <a:t>Компании и подрядчики</a:t>
             </a:r>
           </a:p>
         </p:txBody>
@@ -8737,14 +7488,14 @@
         </p:nvSpPr>
         <p:spPr>
           <a:xfrm>
-            <a:off x="548640" y="3749040"/>
-            <a:ext cx="10972800" cy="13716"/>
+            <a:off x="548640" y="3749039"/>
+            <a:ext cx="5394960" cy="54864"/>
           </a:xfrm>
           <a:prstGeom prst="rect">
             <a:avLst/>
           </a:prstGeom>
           <a:solidFill>
-            <a:srgbClr val="D0DCE3"/>
+            <a:srgbClr val="1F8F5F"/>
           </a:solidFill>
           <a:ln>
             <a:noFill/>
@@ -8780,29 +7531,29 @@
         </p:nvSpPr>
         <p:spPr>
           <a:xfrm>
-            <a:off x="548640" y="3063240"/>
-            <a:ext cx="640080" cy="365760"/>
-          </a:xfrm>
-          <a:prstGeom prst="rect">
-            <a:avLst/>
-          </a:prstGeom>
-          <a:noFill/>
-        </p:spPr>
-        <p:txBody>
-          <a:bodyPr wrap="square">
-            <a:spAutoFit/>
-          </a:bodyPr>
-          <a:lstStyle/>
-          <a:p>
-            <a:pPr algn="l"/>
-            <a:r>
-              <a:rPr sz="1400" b="1">
-                <a:solidFill>
-                  <a:srgbClr val="1F8F5F"/>
-                </a:solidFill>
-                <a:latin typeface="Arial"/>
-              </a:rPr>
-              <a:t>03</a:t>
+            <a:off x="548640" y="4069079"/>
+            <a:ext cx="5394960" cy="411480"/>
+          </a:xfrm>
+          <a:prstGeom prst="rect">
+            <a:avLst/>
+          </a:prstGeom>
+          <a:noFill/>
+        </p:spPr>
+        <p:txBody>
+          <a:bodyPr wrap="square">
+            <a:spAutoFit/>
+          </a:bodyPr>
+          <a:lstStyle/>
+          <a:p>
+            <a:pPr algn="l"/>
+            <a:r>
+              <a:rPr sz="1800" b="1">
+                <a:solidFill>
+                  <a:srgbClr val="07182A"/>
+                </a:solidFill>
+                <a:latin typeface="Arial"/>
+              </a:rPr>
+              <a:t>Образование</a:t>
             </a:r>
           </a:p>
         </p:txBody>
@@ -8815,29 +7566,29 @@
         </p:nvSpPr>
         <p:spPr>
           <a:xfrm>
-            <a:off x="1371600" y="3063240"/>
-            <a:ext cx="10058400" cy="457200"/>
-          </a:xfrm>
-          <a:prstGeom prst="rect">
-            <a:avLst/>
-          </a:prstGeom>
-          <a:noFill/>
-        </p:spPr>
-        <p:txBody>
-          <a:bodyPr wrap="square">
-            <a:spAutoFit/>
-          </a:bodyPr>
-          <a:lstStyle/>
-          <a:p>
-            <a:pPr algn="l"/>
-            <a:r>
-              <a:rPr sz="1500" b="0">
-                <a:solidFill>
-                  <a:srgbClr val="122433"/>
-                </a:solidFill>
-                <a:latin typeface="Arial"/>
-              </a:rPr>
-              <a:t>Рост членской базы: индивидуальное, студенческое, корпоративное</a:t>
+            <a:off x="548640" y="4663439"/>
+            <a:ext cx="5394960" cy="640080"/>
+          </a:xfrm>
+          <a:prstGeom prst="rect">
+            <a:avLst/>
+          </a:prstGeom>
+          <a:noFill/>
+        </p:spPr>
+        <p:txBody>
+          <a:bodyPr wrap="square">
+            <a:spAutoFit/>
+          </a:bodyPr>
+          <a:lstStyle/>
+          <a:p>
+            <a:pPr algn="l"/>
+            <a:r>
+              <a:rPr sz="1400" b="0">
+                <a:solidFill>
+                  <a:srgbClr val="3D5566"/>
+                </a:solidFill>
+                <a:latin typeface="Arial"/>
+              </a:rPr>
+              <a:t>Университеты Бишкека</a:t>
             </a:r>
           </a:p>
         </p:txBody>
@@ -8850,14 +7601,14 @@
         </p:nvSpPr>
         <p:spPr>
           <a:xfrm>
-            <a:off x="548640" y="4572000"/>
-            <a:ext cx="10972800" cy="13716"/>
+            <a:off x="6309359" y="3749039"/>
+            <a:ext cx="5394960" cy="54864"/>
           </a:xfrm>
           <a:prstGeom prst="rect">
             <a:avLst/>
           </a:prstGeom>
           <a:solidFill>
-            <a:srgbClr val="D0DCE3"/>
+            <a:srgbClr val="1F8F5F"/>
           </a:solidFill>
           <a:ln>
             <a:noFill/>
@@ -8893,29 +7644,29 @@
         </p:nvSpPr>
         <p:spPr>
           <a:xfrm>
-            <a:off x="548640" y="3886200"/>
-            <a:ext cx="640080" cy="365760"/>
-          </a:xfrm>
-          <a:prstGeom prst="rect">
-            <a:avLst/>
-          </a:prstGeom>
-          <a:noFill/>
-        </p:spPr>
-        <p:txBody>
-          <a:bodyPr wrap="square">
-            <a:spAutoFit/>
-          </a:bodyPr>
-          <a:lstStyle/>
-          <a:p>
-            <a:pPr algn="l"/>
-            <a:r>
-              <a:rPr sz="1400" b="1">
-                <a:solidFill>
-                  <a:srgbClr val="1F8F5F"/>
-                </a:solidFill>
-                <a:latin typeface="Arial"/>
-              </a:rPr>
-              <a:t>04</a:t>
+            <a:off x="6309359" y="4069079"/>
+            <a:ext cx="5394960" cy="411480"/>
+          </a:xfrm>
+          <a:prstGeom prst="rect">
+            <a:avLst/>
+          </a:prstGeom>
+          <a:noFill/>
+        </p:spPr>
+        <p:txBody>
+          <a:bodyPr wrap="square">
+            <a:spAutoFit/>
+          </a:bodyPr>
+          <a:lstStyle/>
+          <a:p>
+            <a:pPr algn="l"/>
+            <a:r>
+              <a:rPr sz="1800" b="1">
+                <a:solidFill>
+                  <a:srgbClr val="07182A"/>
+                </a:solidFill>
+                <a:latin typeface="Arial"/>
+              </a:rPr>
+              <a:t>Обучение</a:t>
             </a:r>
           </a:p>
         </p:txBody>
@@ -8928,149 +7679,36 @@
         </p:nvSpPr>
         <p:spPr>
           <a:xfrm>
-            <a:off x="1371600" y="3886200"/>
-            <a:ext cx="10058400" cy="457200"/>
-          </a:xfrm>
-          <a:prstGeom prst="rect">
-            <a:avLst/>
-          </a:prstGeom>
-          <a:noFill/>
-        </p:spPr>
-        <p:txBody>
-          <a:bodyPr wrap="square">
-            <a:spAutoFit/>
-          </a:bodyPr>
-          <a:lstStyle/>
-          <a:p>
-            <a:pPr algn="l"/>
-            <a:r>
-              <a:rPr sz="1500" b="0">
-                <a:solidFill>
-                  <a:srgbClr val="122433"/>
-                </a:solidFill>
-                <a:latin typeface="Arial"/>
-              </a:rPr>
-              <a:t>Продвигать ICB4 / OCB / PEB в госсекторе и бизнесе</a:t>
-            </a:r>
-          </a:p>
-        </p:txBody>
-      </p:sp>
-      <p:sp>
-        <p:nvSpPr>
-          <p:cNvPr id="19" name="Rectangle 18"/>
-          <p:cNvSpPr/>
-          <p:nvPr/>
-        </p:nvSpPr>
-        <p:spPr>
-          <a:xfrm>
-            <a:off x="548640" y="5394960"/>
-            <a:ext cx="10972800" cy="13716"/>
-          </a:xfrm>
-          <a:prstGeom prst="rect">
-            <a:avLst/>
-          </a:prstGeom>
-          <a:solidFill>
-            <a:srgbClr val="D0DCE3"/>
-          </a:solidFill>
-          <a:ln>
-            <a:noFill/>
-          </a:ln>
-        </p:spPr>
-        <p:style>
-          <a:lnRef idx="1">
-            <a:schemeClr val="accent1"/>
-          </a:lnRef>
-          <a:fillRef idx="3">
-            <a:schemeClr val="accent1"/>
-          </a:fillRef>
-          <a:effectRef idx="2">
-            <a:schemeClr val="accent1"/>
-          </a:effectRef>
-          <a:fontRef idx="minor">
-            <a:schemeClr val="lt1"/>
-          </a:fontRef>
-        </p:style>
-        <p:txBody>
-          <a:bodyPr rtlCol="0" anchor="ctr"/>
-          <a:lstStyle/>
-          <a:p>
-            <a:pPr algn="ctr"/>
-          </a:p>
-        </p:txBody>
-      </p:sp>
-      <p:sp>
-        <p:nvSpPr>
-          <p:cNvPr id="20" name="TextBox 19"/>
-          <p:cNvSpPr txBox="1"/>
-          <p:nvPr/>
-        </p:nvSpPr>
-        <p:spPr>
-          <a:xfrm>
-            <a:off x="548640" y="4709160"/>
-            <a:ext cx="640080" cy="365760"/>
-          </a:xfrm>
-          <a:prstGeom prst="rect">
-            <a:avLst/>
-          </a:prstGeom>
-          <a:noFill/>
-        </p:spPr>
-        <p:txBody>
-          <a:bodyPr wrap="square">
-            <a:spAutoFit/>
-          </a:bodyPr>
-          <a:lstStyle/>
-          <a:p>
-            <a:pPr algn="l"/>
-            <a:r>
-              <a:rPr sz="1400" b="1">
-                <a:solidFill>
-                  <a:srgbClr val="1F8F5F"/>
-                </a:solidFill>
-                <a:latin typeface="Arial"/>
-              </a:rPr>
-              <a:t>05</a:t>
-            </a:r>
-          </a:p>
-        </p:txBody>
-      </p:sp>
-      <p:sp>
-        <p:nvSpPr>
-          <p:cNvPr id="21" name="TextBox 20"/>
-          <p:cNvSpPr txBox="1"/>
-          <p:nvPr/>
-        </p:nvSpPr>
-        <p:spPr>
-          <a:xfrm>
-            <a:off x="1371600" y="4709160"/>
-            <a:ext cx="10058400" cy="457200"/>
-          </a:xfrm>
-          <a:prstGeom prst="rect">
-            <a:avLst/>
-          </a:prstGeom>
-          <a:noFill/>
-        </p:spPr>
-        <p:txBody>
-          <a:bodyPr wrap="square">
-            <a:spAutoFit/>
-          </a:bodyPr>
-          <a:lstStyle/>
-          <a:p>
-            <a:pPr algn="l"/>
-            <a:r>
-              <a:rPr sz="1500" b="0">
-                <a:solidFill>
-                  <a:srgbClr val="122433"/>
-                </a:solidFill>
-                <a:latin typeface="Arial"/>
-              </a:rPr>
-              <a:t>Партнёрства с вузами, госорганами, MA региона и Young Crew</a:t>
-            </a:r>
-          </a:p>
-        </p:txBody>
-      </p:sp>
-      <p:sp>
-        <p:nvSpPr>
-          <p:cNvPr id="22" name="TextBox 21"/>
+            <a:off x="6309359" y="4663439"/>
+            <a:ext cx="5394960" cy="640080"/>
+          </a:xfrm>
+          <a:prstGeom prst="rect">
+            <a:avLst/>
+          </a:prstGeom>
+          <a:noFill/>
+        </p:spPr>
+        <p:txBody>
+          <a:bodyPr wrap="square">
+            <a:spAutoFit/>
+          </a:bodyPr>
+          <a:lstStyle/>
+          <a:p>
+            <a:pPr algn="l"/>
+            <a:r>
+              <a:rPr sz="1400" b="0">
+                <a:solidFill>
+                  <a:srgbClr val="3D5566"/>
+                </a:solidFill>
+                <a:latin typeface="Arial"/>
+              </a:rPr>
+              <a:t>Подготовка к сертификации ICB4</a:t>
+            </a:r>
+          </a:p>
+        </p:txBody>
+      </p:sp>
+      <p:sp>
+        <p:nvSpPr>
+          <p:cNvPr id="19" name="TextBox 18"/>
           <p:cNvSpPr txBox="1"/>
           <p:nvPr/>
         </p:nvSpPr>
@@ -9105,7 +7743,7 @@
       </p:sp>
       <p:sp>
         <p:nvSpPr>
-          <p:cNvPr id="23" name="TextBox 22"/>
+          <p:cNvPr id="20" name="TextBox 19"/>
           <p:cNvSpPr txBox="1"/>
           <p:nvPr/>
         </p:nvSpPr>
@@ -9133,7 +7771,7 @@
                 </a:solidFill>
                 <a:latin typeface="Arial"/>
               </a:rPr>
-              <a:t>07 / 12</a:t>
+              <a:t>07 / 10</a:t>
             </a:r>
           </a:p>
         </p:txBody>
@@ -9208,7 +7846,7 @@
         <p:spPr>
           <a:xfrm>
             <a:off x="0" y="0"/>
-            <a:ext cx="12191695" cy="73152"/>
+            <a:ext cx="12191695" cy="64008"/>
           </a:xfrm>
           <a:prstGeom prst="rect">
             <a:avLst/>
@@ -9296,7 +7934,7 @@
                 </a:solidFill>
                 <a:latin typeface="Arial"/>
               </a:rPr>
-              <a:t>08  »  СЕРТИФИКАЦИЯ</a:t>
+              <a:t>08  »  РЕЗУЛЬТАТЫ</a:t>
             </a:r>
           </a:p>
         </p:txBody>
@@ -9310,64 +7948,72 @@
         <p:spPr>
           <a:xfrm>
             <a:off x="548640" y="640080"/>
-            <a:ext cx="10058400" cy="640080"/>
-          </a:xfrm>
-          <a:prstGeom prst="rect">
-            <a:avLst/>
-          </a:prstGeom>
-          <a:noFill/>
-        </p:spPr>
-        <p:txBody>
-          <a:bodyPr wrap="square">
-            <a:spAutoFit/>
-          </a:bodyPr>
-          <a:lstStyle/>
-          <a:p>
-            <a:pPr algn="l"/>
-            <a:r>
-              <a:rPr sz="3200" b="1">
+            <a:ext cx="10515600" cy="594360"/>
+          </a:xfrm>
+          <a:prstGeom prst="rect">
+            <a:avLst/>
+          </a:prstGeom>
+          <a:noFill/>
+        </p:spPr>
+        <p:txBody>
+          <a:bodyPr wrap="square">
+            <a:spAutoFit/>
+          </a:bodyPr>
+          <a:lstStyle/>
+          <a:p>
+            <a:pPr algn="l"/>
+            <a:r>
+              <a:rPr sz="3000" b="1">
                 <a:solidFill>
                   <a:srgbClr val="07182A"/>
                 </a:solidFill>
                 <a:latin typeface="Arial"/>
               </a:rPr>
-              <a:t>Уровни IPMA</a:t>
-            </a:r>
-          </a:p>
-        </p:txBody>
-      </p:sp>
-      <p:sp>
-        <p:nvSpPr>
-          <p:cNvPr id="7" name="TextBox 6"/>
-          <p:cNvSpPr txBox="1"/>
-          <p:nvPr/>
-        </p:nvSpPr>
-        <p:spPr>
-          <a:xfrm>
-            <a:off x="548640" y="1325880"/>
-            <a:ext cx="10972800" cy="365760"/>
-          </a:xfrm>
-          <a:prstGeom prst="rect">
-            <a:avLst/>
-          </a:prstGeom>
-          <a:noFill/>
-        </p:spPr>
-        <p:txBody>
-          <a:bodyPr wrap="square">
-            <a:spAutoFit/>
-          </a:bodyPr>
-          <a:lstStyle/>
-          <a:p>
-            <a:pPr algn="l"/>
-            <a:r>
-              <a:rPr sz="1400" b="0">
-                <a:solidFill>
-                  <a:srgbClr val="3D5566"/>
-                </a:solidFill>
-                <a:latin typeface="Arial"/>
-              </a:rPr>
-              <a:t>Независимый CB · оценка по ICB4 · самооценка, экзамен, интервью</a:t>
-            </a:r>
+              <a:t>Что уже сделано</a:t>
+            </a:r>
+          </a:p>
+        </p:txBody>
+      </p:sp>
+      <p:sp>
+        <p:nvSpPr>
+          <p:cNvPr id="7" name="Oval 6"/>
+          <p:cNvSpPr/>
+          <p:nvPr/>
+        </p:nvSpPr>
+        <p:spPr>
+          <a:xfrm>
+            <a:off x="640080" y="1691640"/>
+            <a:ext cx="320040" cy="320040"/>
+          </a:xfrm>
+          <a:prstGeom prst="ellipse">
+            <a:avLst/>
+          </a:prstGeom>
+          <a:solidFill>
+            <a:srgbClr val="1F8F5F"/>
+          </a:solidFill>
+          <a:ln>
+            <a:noFill/>
+          </a:ln>
+        </p:spPr>
+        <p:style>
+          <a:lnRef idx="1">
+            <a:schemeClr val="accent1"/>
+          </a:lnRef>
+          <a:fillRef idx="3">
+            <a:schemeClr val="accent1"/>
+          </a:fillRef>
+          <a:effectRef idx="2">
+            <a:schemeClr val="accent1"/>
+          </a:effectRef>
+          <a:fontRef idx="minor">
+            <a:schemeClr val="lt1"/>
+          </a:fontRef>
+        </p:style>
+        <p:txBody>
+          <a:bodyPr rtlCol="0" anchor="ctr"/>
+          <a:lstStyle/>
+          <a:p>
+            <a:pPr algn="ctr"/>
           </a:p>
         </p:txBody>
       </p:sp>
@@ -9379,29 +8025,29 @@
         </p:nvSpPr>
         <p:spPr>
           <a:xfrm>
-            <a:off x="548640" y="2194560"/>
-            <a:ext cx="2651760" cy="914400"/>
-          </a:xfrm>
-          <a:prstGeom prst="rect">
-            <a:avLst/>
-          </a:prstGeom>
-          <a:noFill/>
-        </p:spPr>
-        <p:txBody>
-          <a:bodyPr wrap="square">
-            <a:spAutoFit/>
-          </a:bodyPr>
-          <a:lstStyle/>
-          <a:p>
-            <a:pPr algn="l"/>
-            <a:r>
-              <a:rPr sz="5600" b="1">
-                <a:solidFill>
-                  <a:srgbClr val="1F8F5F"/>
-                </a:solidFill>
-                <a:latin typeface="Arial"/>
-              </a:rPr>
-              <a:t>A</a:t>
+            <a:off x="640080" y="1728216"/>
+            <a:ext cx="320040" cy="274320"/>
+          </a:xfrm>
+          <a:prstGeom prst="rect">
+            <a:avLst/>
+          </a:prstGeom>
+          <a:noFill/>
+        </p:spPr>
+        <p:txBody>
+          <a:bodyPr wrap="square">
+            <a:spAutoFit/>
+          </a:bodyPr>
+          <a:lstStyle/>
+          <a:p>
+            <a:pPr algn="ctr"/>
+            <a:r>
+              <a:rPr sz="1100" b="1">
+                <a:solidFill>
+                  <a:srgbClr val="FFFFFF"/>
+                </a:solidFill>
+                <a:latin typeface="Arial"/>
+              </a:rPr>
+              <a:t>1</a:t>
             </a:r>
           </a:p>
         </p:txBody>
@@ -9414,65 +8060,73 @@
         </p:nvSpPr>
         <p:spPr>
           <a:xfrm>
-            <a:off x="548640" y="3383280"/>
-            <a:ext cx="2651760" cy="548640"/>
-          </a:xfrm>
-          <a:prstGeom prst="rect">
-            <a:avLst/>
-          </a:prstGeom>
-          <a:noFill/>
-        </p:spPr>
-        <p:txBody>
-          <a:bodyPr wrap="square">
-            <a:spAutoFit/>
-          </a:bodyPr>
-          <a:lstStyle/>
-          <a:p>
-            <a:pPr algn="l"/>
-            <a:r>
-              <a:rPr sz="1300" b="1">
+            <a:off x="1280160" y="1691640"/>
+            <a:ext cx="10058400" cy="548640"/>
+          </a:xfrm>
+          <a:prstGeom prst="rect">
+            <a:avLst/>
+          </a:prstGeom>
+          <a:noFill/>
+        </p:spPr>
+        <p:txBody>
+          <a:bodyPr wrap="square">
+            <a:spAutoFit/>
+          </a:bodyPr>
+          <a:lstStyle/>
+          <a:p>
+            <a:pPr algn="l"/>
+            <a:r>
+              <a:rPr sz="1600" b="1">
                 <a:solidFill>
                   <a:srgbClr val="07182A"/>
                 </a:solidFill>
                 <a:latin typeface="Arial"/>
               </a:rPr>
-              <a:t>Projects Director</a:t>
-            </a:r>
-          </a:p>
-        </p:txBody>
-      </p:sp>
-      <p:sp>
-        <p:nvSpPr>
-          <p:cNvPr id="10" name="TextBox 9"/>
-          <p:cNvSpPr txBox="1"/>
-          <p:nvPr/>
-        </p:nvSpPr>
-        <p:spPr>
-          <a:xfrm>
-            <a:off x="548640" y="4023360"/>
-            <a:ext cx="2651760" cy="365760"/>
-          </a:xfrm>
-          <a:prstGeom prst="rect">
-            <a:avLst/>
-          </a:prstGeom>
-          <a:noFill/>
-        </p:spPr>
-        <p:txBody>
-          <a:bodyPr wrap="square">
-            <a:spAutoFit/>
-          </a:bodyPr>
-          <a:lstStyle/>
-          <a:p>
-            <a:pPr algn="l"/>
-            <a:r>
-              <a:rPr sz="1200" b="0">
-                <a:solidFill>
-                  <a:srgbClr val="3D5566"/>
-                </a:solidFill>
-                <a:latin typeface="Arial"/>
-              </a:rPr>
-              <a:t>Портфели</a:t>
-            </a:r>
+              <a:t>Регистрация ОО «KgPMU» в Министерстве юстиции КР</a:t>
+            </a:r>
+          </a:p>
+        </p:txBody>
+      </p:sp>
+      <p:sp>
+        <p:nvSpPr>
+          <p:cNvPr id="10" name="Oval 9"/>
+          <p:cNvSpPr/>
+          <p:nvPr/>
+        </p:nvSpPr>
+        <p:spPr>
+          <a:xfrm>
+            <a:off x="640080" y="2788919"/>
+            <a:ext cx="320040" cy="320040"/>
+          </a:xfrm>
+          <a:prstGeom prst="ellipse">
+            <a:avLst/>
+          </a:prstGeom>
+          <a:solidFill>
+            <a:srgbClr val="1F8F5F"/>
+          </a:solidFill>
+          <a:ln>
+            <a:noFill/>
+          </a:ln>
+        </p:spPr>
+        <p:style>
+          <a:lnRef idx="1">
+            <a:schemeClr val="accent1"/>
+          </a:lnRef>
+          <a:fillRef idx="3">
+            <a:schemeClr val="accent1"/>
+          </a:fillRef>
+          <a:effectRef idx="2">
+            <a:schemeClr val="accent1"/>
+          </a:effectRef>
+          <a:fontRef idx="minor">
+            <a:schemeClr val="lt1"/>
+          </a:fontRef>
+        </p:style>
+        <p:txBody>
+          <a:bodyPr rtlCol="0" anchor="ctr"/>
+          <a:lstStyle/>
+          <a:p>
+            <a:pPr algn="ctr"/>
           </a:p>
         </p:txBody>
       </p:sp>
@@ -9484,29 +8138,29 @@
         </p:nvSpPr>
         <p:spPr>
           <a:xfrm>
-            <a:off x="3429000" y="2194560"/>
-            <a:ext cx="2651760" cy="914400"/>
-          </a:xfrm>
-          <a:prstGeom prst="rect">
-            <a:avLst/>
-          </a:prstGeom>
-          <a:noFill/>
-        </p:spPr>
-        <p:txBody>
-          <a:bodyPr wrap="square">
-            <a:spAutoFit/>
-          </a:bodyPr>
-          <a:lstStyle/>
-          <a:p>
-            <a:pPr algn="l"/>
-            <a:r>
-              <a:rPr sz="5600" b="1">
-                <a:solidFill>
-                  <a:srgbClr val="1F8F5F"/>
-                </a:solidFill>
-                <a:latin typeface="Arial"/>
-              </a:rPr>
-              <a:t>B</a:t>
+            <a:off x="640080" y="2825495"/>
+            <a:ext cx="320040" cy="274320"/>
+          </a:xfrm>
+          <a:prstGeom prst="rect">
+            <a:avLst/>
+          </a:prstGeom>
+          <a:noFill/>
+        </p:spPr>
+        <p:txBody>
+          <a:bodyPr wrap="square">
+            <a:spAutoFit/>
+          </a:bodyPr>
+          <a:lstStyle/>
+          <a:p>
+            <a:pPr algn="ctr"/>
+            <a:r>
+              <a:rPr sz="1100" b="1">
+                <a:solidFill>
+                  <a:srgbClr val="FFFFFF"/>
+                </a:solidFill>
+                <a:latin typeface="Arial"/>
+              </a:rPr>
+              <a:t>2</a:t>
             </a:r>
           </a:p>
         </p:txBody>
@@ -9519,65 +8173,73 @@
         </p:nvSpPr>
         <p:spPr>
           <a:xfrm>
-            <a:off x="3429000" y="3383280"/>
-            <a:ext cx="2651760" cy="548640"/>
-          </a:xfrm>
-          <a:prstGeom prst="rect">
-            <a:avLst/>
-          </a:prstGeom>
-          <a:noFill/>
-        </p:spPr>
-        <p:txBody>
-          <a:bodyPr wrap="square">
-            <a:spAutoFit/>
-          </a:bodyPr>
-          <a:lstStyle/>
-          <a:p>
-            <a:pPr algn="l"/>
-            <a:r>
-              <a:rPr sz="1300" b="1">
+            <a:off x="1280160" y="2788919"/>
+            <a:ext cx="10058400" cy="548640"/>
+          </a:xfrm>
+          <a:prstGeom prst="rect">
+            <a:avLst/>
+          </a:prstGeom>
+          <a:noFill/>
+        </p:spPr>
+        <p:txBody>
+          <a:bodyPr wrap="square">
+            <a:spAutoFit/>
+          </a:bodyPr>
+          <a:lstStyle/>
+          <a:p>
+            <a:pPr algn="l"/>
+            <a:r>
+              <a:rPr sz="1600" b="1">
                 <a:solidFill>
                   <a:srgbClr val="07182A"/>
                 </a:solidFill>
                 <a:latin typeface="Arial"/>
               </a:rPr>
-              <a:t>Senior Project Manager</a:t>
-            </a:r>
-          </a:p>
-        </p:txBody>
-      </p:sp>
-      <p:sp>
-        <p:nvSpPr>
-          <p:cNvPr id="13" name="TextBox 12"/>
-          <p:cNvSpPr txBox="1"/>
-          <p:nvPr/>
-        </p:nvSpPr>
-        <p:spPr>
-          <a:xfrm>
-            <a:off x="3429000" y="4023360"/>
-            <a:ext cx="2651760" cy="365760"/>
-          </a:xfrm>
-          <a:prstGeom prst="rect">
-            <a:avLst/>
-          </a:prstGeom>
-          <a:noFill/>
-        </p:spPr>
-        <p:txBody>
-          <a:bodyPr wrap="square">
-            <a:spAutoFit/>
-          </a:bodyPr>
-          <a:lstStyle/>
-          <a:p>
-            <a:pPr algn="l"/>
-            <a:r>
-              <a:rPr sz="1200" b="0">
-                <a:solidFill>
-                  <a:srgbClr val="3D5566"/>
-                </a:solidFill>
-                <a:latin typeface="Arial"/>
-              </a:rPr>
-              <a:t>Сложные проекты</a:t>
-            </a:r>
+              <a:t>Пакет документов направлен в IPMA · статус Ассоциации-заявителя</a:t>
+            </a:r>
+          </a:p>
+        </p:txBody>
+      </p:sp>
+      <p:sp>
+        <p:nvSpPr>
+          <p:cNvPr id="13" name="Oval 12"/>
+          <p:cNvSpPr/>
+          <p:nvPr/>
+        </p:nvSpPr>
+        <p:spPr>
+          <a:xfrm>
+            <a:off x="640080" y="3886200"/>
+            <a:ext cx="320040" cy="320040"/>
+          </a:xfrm>
+          <a:prstGeom prst="ellipse">
+            <a:avLst/>
+          </a:prstGeom>
+          <a:solidFill>
+            <a:srgbClr val="1F8F5F"/>
+          </a:solidFill>
+          <a:ln>
+            <a:noFill/>
+          </a:ln>
+        </p:spPr>
+        <p:style>
+          <a:lnRef idx="1">
+            <a:schemeClr val="accent1"/>
+          </a:lnRef>
+          <a:fillRef idx="3">
+            <a:schemeClr val="accent1"/>
+          </a:fillRef>
+          <a:effectRef idx="2">
+            <a:schemeClr val="accent1"/>
+          </a:effectRef>
+          <a:fontRef idx="minor">
+            <a:schemeClr val="lt1"/>
+          </a:fontRef>
+        </p:style>
+        <p:txBody>
+          <a:bodyPr rtlCol="0" anchor="ctr"/>
+          <a:lstStyle/>
+          <a:p>
+            <a:pPr algn="ctr"/>
           </a:p>
         </p:txBody>
       </p:sp>
@@ -9589,29 +8251,29 @@
         </p:nvSpPr>
         <p:spPr>
           <a:xfrm>
-            <a:off x="6309359" y="2194560"/>
-            <a:ext cx="2651760" cy="914400"/>
-          </a:xfrm>
-          <a:prstGeom prst="rect">
-            <a:avLst/>
-          </a:prstGeom>
-          <a:noFill/>
-        </p:spPr>
-        <p:txBody>
-          <a:bodyPr wrap="square">
-            <a:spAutoFit/>
-          </a:bodyPr>
-          <a:lstStyle/>
-          <a:p>
-            <a:pPr algn="l"/>
-            <a:r>
-              <a:rPr sz="5600" b="1">
-                <a:solidFill>
-                  <a:srgbClr val="1F8F5F"/>
-                </a:solidFill>
-                <a:latin typeface="Arial"/>
-              </a:rPr>
-              <a:t>C</a:t>
+            <a:off x="640080" y="3922776"/>
+            <a:ext cx="320040" cy="274320"/>
+          </a:xfrm>
+          <a:prstGeom prst="rect">
+            <a:avLst/>
+          </a:prstGeom>
+          <a:noFill/>
+        </p:spPr>
+        <p:txBody>
+          <a:bodyPr wrap="square">
+            <a:spAutoFit/>
+          </a:bodyPr>
+          <a:lstStyle/>
+          <a:p>
+            <a:pPr algn="ctr"/>
+            <a:r>
+              <a:rPr sz="1100" b="1">
+                <a:solidFill>
+                  <a:srgbClr val="FFFFFF"/>
+                </a:solidFill>
+                <a:latin typeface="Arial"/>
+              </a:rPr>
+              <a:t>3</a:t>
             </a:r>
           </a:p>
         </p:txBody>
@@ -9624,65 +8286,73 @@
         </p:nvSpPr>
         <p:spPr>
           <a:xfrm>
-            <a:off x="6309359" y="3383280"/>
-            <a:ext cx="2651760" cy="548640"/>
-          </a:xfrm>
-          <a:prstGeom prst="rect">
-            <a:avLst/>
-          </a:prstGeom>
-          <a:noFill/>
-        </p:spPr>
-        <p:txBody>
-          <a:bodyPr wrap="square">
-            <a:spAutoFit/>
-          </a:bodyPr>
-          <a:lstStyle/>
-          <a:p>
-            <a:pPr algn="l"/>
-            <a:r>
-              <a:rPr sz="1300" b="1">
+            <a:off x="1280160" y="3886200"/>
+            <a:ext cx="10058400" cy="548640"/>
+          </a:xfrm>
+          <a:prstGeom prst="rect">
+            <a:avLst/>
+          </a:prstGeom>
+          <a:noFill/>
+        </p:spPr>
+        <p:txBody>
+          <a:bodyPr wrap="square">
+            <a:spAutoFit/>
+          </a:bodyPr>
+          <a:lstStyle/>
+          <a:p>
+            <a:pPr algn="l"/>
+            <a:r>
+              <a:rPr sz="1600" b="1">
                 <a:solidFill>
                   <a:srgbClr val="07182A"/>
                 </a:solidFill>
                 <a:latin typeface="Arial"/>
               </a:rPr>
-              <a:t>Project Manager</a:t>
-            </a:r>
-          </a:p>
-        </p:txBody>
-      </p:sp>
-      <p:sp>
-        <p:nvSpPr>
-          <p:cNvPr id="16" name="TextBox 15"/>
-          <p:cNvSpPr txBox="1"/>
-          <p:nvPr/>
-        </p:nvSpPr>
-        <p:spPr>
-          <a:xfrm>
-            <a:off x="6309359" y="4023360"/>
-            <a:ext cx="2651760" cy="365760"/>
-          </a:xfrm>
-          <a:prstGeom prst="rect">
-            <a:avLst/>
-          </a:prstGeom>
-          <a:noFill/>
-        </p:spPr>
-        <p:txBody>
-          <a:bodyPr wrap="square">
-            <a:spAutoFit/>
-          </a:bodyPr>
-          <a:lstStyle/>
-          <a:p>
-            <a:pPr algn="l"/>
-            <a:r>
-              <a:rPr sz="1200" b="0">
-                <a:solidFill>
-                  <a:srgbClr val="3D5566"/>
-                </a:solidFill>
-                <a:latin typeface="Arial"/>
-              </a:rPr>
-              <a:t>Средняя сложность</a:t>
-            </a:r>
+              <a:t>Урмат Мекишев прошёл обучение и получил сертификат IPMA Level B</a:t>
+            </a:r>
+          </a:p>
+        </p:txBody>
+      </p:sp>
+      <p:sp>
+        <p:nvSpPr>
+          <p:cNvPr id="16" name="Oval 15"/>
+          <p:cNvSpPr/>
+          <p:nvPr/>
+        </p:nvSpPr>
+        <p:spPr>
+          <a:xfrm>
+            <a:off x="640080" y="4983480"/>
+            <a:ext cx="320040" cy="320040"/>
+          </a:xfrm>
+          <a:prstGeom prst="ellipse">
+            <a:avLst/>
+          </a:prstGeom>
+          <a:solidFill>
+            <a:srgbClr val="1F8F5F"/>
+          </a:solidFill>
+          <a:ln>
+            <a:noFill/>
+          </a:ln>
+        </p:spPr>
+        <p:style>
+          <a:lnRef idx="1">
+            <a:schemeClr val="accent1"/>
+          </a:lnRef>
+          <a:fillRef idx="3">
+            <a:schemeClr val="accent1"/>
+          </a:fillRef>
+          <a:effectRef idx="2">
+            <a:schemeClr val="accent1"/>
+          </a:effectRef>
+          <a:fontRef idx="minor">
+            <a:schemeClr val="lt1"/>
+          </a:fontRef>
+        </p:style>
+        <p:txBody>
+          <a:bodyPr rtlCol="0" anchor="ctr"/>
+          <a:lstStyle/>
+          <a:p>
+            <a:pPr algn="ctr"/>
           </a:p>
         </p:txBody>
       </p:sp>
@@ -9694,29 +8364,29 @@
         </p:nvSpPr>
         <p:spPr>
           <a:xfrm>
-            <a:off x="9189719" y="2194560"/>
-            <a:ext cx="2651760" cy="914400"/>
-          </a:xfrm>
-          <a:prstGeom prst="rect">
-            <a:avLst/>
-          </a:prstGeom>
-          <a:noFill/>
-        </p:spPr>
-        <p:txBody>
-          <a:bodyPr wrap="square">
-            <a:spAutoFit/>
-          </a:bodyPr>
-          <a:lstStyle/>
-          <a:p>
-            <a:pPr algn="l"/>
-            <a:r>
-              <a:rPr sz="5600" b="1">
-                <a:solidFill>
-                  <a:srgbClr val="1F8F5F"/>
-                </a:solidFill>
-                <a:latin typeface="Arial"/>
-              </a:rPr>
-              <a:t>D</a:t>
+            <a:off x="640080" y="5020056"/>
+            <a:ext cx="320040" cy="274320"/>
+          </a:xfrm>
+          <a:prstGeom prst="rect">
+            <a:avLst/>
+          </a:prstGeom>
+          <a:noFill/>
+        </p:spPr>
+        <p:txBody>
+          <a:bodyPr wrap="square">
+            <a:spAutoFit/>
+          </a:bodyPr>
+          <a:lstStyle/>
+          <a:p>
+            <a:pPr algn="ctr"/>
+            <a:r>
+              <a:rPr sz="1100" b="1">
+                <a:solidFill>
+                  <a:srgbClr val="FFFFFF"/>
+                </a:solidFill>
+                <a:latin typeface="Arial"/>
+              </a:rPr>
+              <a:t>4</a:t>
             </a:r>
           </a:p>
         </p:txBody>
@@ -9729,29 +8399,29 @@
         </p:nvSpPr>
         <p:spPr>
           <a:xfrm>
-            <a:off x="9189719" y="3383280"/>
-            <a:ext cx="2651760" cy="548640"/>
-          </a:xfrm>
-          <a:prstGeom prst="rect">
-            <a:avLst/>
-          </a:prstGeom>
-          <a:noFill/>
-        </p:spPr>
-        <p:txBody>
-          <a:bodyPr wrap="square">
-            <a:spAutoFit/>
-          </a:bodyPr>
-          <a:lstStyle/>
-          <a:p>
-            <a:pPr algn="l"/>
-            <a:r>
-              <a:rPr sz="1300" b="1">
+            <a:off x="1280160" y="4983480"/>
+            <a:ext cx="10058400" cy="548640"/>
+          </a:xfrm>
+          <a:prstGeom prst="rect">
+            <a:avLst/>
+          </a:prstGeom>
+          <a:noFill/>
+        </p:spPr>
+        <p:txBody>
+          <a:bodyPr wrap="square">
+            <a:spAutoFit/>
+          </a:bodyPr>
+          <a:lstStyle/>
+          <a:p>
+            <a:pPr algn="l"/>
+            <a:r>
+              <a:rPr sz="1600" b="1">
                 <a:solidFill>
                   <a:srgbClr val="07182A"/>
                 </a:solidFill>
                 <a:latin typeface="Arial"/>
               </a:rPr>
-              <a:t>PM Associate</a:t>
+              <a:t>С AzPMA: гибридное обучение — 4 сертификации (3 × Level C, 1 × Level B)</a:t>
             </a:r>
           </a:p>
         </p:txBody>
@@ -9759,41 +8429,6 @@
       <p:sp>
         <p:nvSpPr>
           <p:cNvPr id="19" name="TextBox 18"/>
-          <p:cNvSpPr txBox="1"/>
-          <p:nvPr/>
-        </p:nvSpPr>
-        <p:spPr>
-          <a:xfrm>
-            <a:off x="9189719" y="4023360"/>
-            <a:ext cx="2651760" cy="365760"/>
-          </a:xfrm>
-          <a:prstGeom prst="rect">
-            <a:avLst/>
-          </a:prstGeom>
-          <a:noFill/>
-        </p:spPr>
-        <p:txBody>
-          <a:bodyPr wrap="square">
-            <a:spAutoFit/>
-          </a:bodyPr>
-          <a:lstStyle/>
-          <a:p>
-            <a:pPr algn="l"/>
-            <a:r>
-              <a:rPr sz="1200" b="0">
-                <a:solidFill>
-                  <a:srgbClr val="3D5566"/>
-                </a:solidFill>
-                <a:latin typeface="Arial"/>
-              </a:rPr>
-              <a:t>Базовый</a:t>
-            </a:r>
-          </a:p>
-        </p:txBody>
-      </p:sp>
-      <p:sp>
-        <p:nvSpPr>
-          <p:cNvPr id="20" name="TextBox 19"/>
           <p:cNvSpPr txBox="1"/>
           <p:nvPr/>
         </p:nvSpPr>
@@ -9828,7 +8463,7 @@
       </p:sp>
       <p:sp>
         <p:nvSpPr>
-          <p:cNvPr id="21" name="TextBox 20"/>
+          <p:cNvPr id="20" name="TextBox 19"/>
           <p:cNvSpPr txBox="1"/>
           <p:nvPr/>
         </p:nvSpPr>
@@ -9856,7 +8491,7 @@
                 </a:solidFill>
                 <a:latin typeface="Arial"/>
               </a:rPr>
-              <a:t>08 / 12</a:t>
+              <a:t>08 / 10</a:t>
             </a:r>
           </a:p>
         </p:txBody>
@@ -9894,7 +8529,7 @@
             <a:avLst/>
           </a:prstGeom>
           <a:solidFill>
-            <a:srgbClr val="E8EEF2"/>
+            <a:srgbClr val="07182A"/>
           </a:solidFill>
           <a:ln>
             <a:noFill/>
@@ -9924,20 +8559,160 @@
       </p:sp>
       <p:sp>
         <p:nvSpPr>
-          <p:cNvPr id="3" name="Rectangle 2"/>
+          <p:cNvPr id="3" name="TextBox 2"/>
+          <p:cNvSpPr txBox="1"/>
+          <p:nvPr/>
+        </p:nvSpPr>
+        <p:spPr>
+          <a:xfrm>
+            <a:off x="10881360" y="5212080"/>
+            <a:ext cx="1645920" cy="1280160"/>
+          </a:xfrm>
+          <a:prstGeom prst="rect">
+            <a:avLst/>
+          </a:prstGeom>
+          <a:noFill/>
+        </p:spPr>
+        <p:txBody>
+          <a:bodyPr wrap="square">
+            <a:spAutoFit/>
+          </a:bodyPr>
+          <a:lstStyle/>
+          <a:p>
+            <a:pPr algn="l"/>
+            <a:r>
+              <a:rPr sz="11000" b="1">
+                <a:solidFill>
+                  <a:srgbClr val="E30613"/>
+                </a:solidFill>
+                <a:latin typeface="Arial"/>
+              </a:rPr>
+              <a:t>»</a:t>
+            </a:r>
+          </a:p>
+        </p:txBody>
+      </p:sp>
+      <p:sp>
+        <p:nvSpPr>
+          <p:cNvPr id="4" name="TextBox 3"/>
+          <p:cNvSpPr txBox="1"/>
+          <p:nvPr/>
+        </p:nvSpPr>
+        <p:spPr>
+          <a:xfrm>
+            <a:off x="548640" y="320040"/>
+            <a:ext cx="10058400" cy="274320"/>
+          </a:xfrm>
+          <a:prstGeom prst="rect">
+            <a:avLst/>
+          </a:prstGeom>
+          <a:noFill/>
+        </p:spPr>
+        <p:txBody>
+          <a:bodyPr wrap="square">
+            <a:spAutoFit/>
+          </a:bodyPr>
+          <a:lstStyle/>
+          <a:p>
+            <a:pPr algn="l"/>
+            <a:r>
+              <a:rPr sz="1100" b="1">
+                <a:solidFill>
+                  <a:srgbClr val="3DD68C"/>
+                </a:solidFill>
+                <a:latin typeface="Arial"/>
+              </a:rPr>
+              <a:t>09  »  COUNCIL OF DELEGATES</a:t>
+            </a:r>
+          </a:p>
+        </p:txBody>
+      </p:sp>
+      <p:sp>
+        <p:nvSpPr>
+          <p:cNvPr id="5" name="TextBox 4"/>
+          <p:cNvSpPr txBox="1"/>
+          <p:nvPr/>
+        </p:nvSpPr>
+        <p:spPr>
+          <a:xfrm>
+            <a:off x="548640" y="640080"/>
+            <a:ext cx="10515600" cy="594360"/>
+          </a:xfrm>
+          <a:prstGeom prst="rect">
+            <a:avLst/>
+          </a:prstGeom>
+          <a:noFill/>
+        </p:spPr>
+        <p:txBody>
+          <a:bodyPr wrap="square">
+            <a:spAutoFit/>
+          </a:bodyPr>
+          <a:lstStyle/>
+          <a:p>
+            <a:pPr algn="l"/>
+            <a:r>
+              <a:rPr sz="3000" b="1">
+                <a:solidFill>
+                  <a:srgbClr val="FFFFFF"/>
+                </a:solidFill>
+                <a:latin typeface="Arial"/>
+              </a:rPr>
+              <a:t>Благодарим делегатов</a:t>
+            </a:r>
+          </a:p>
+        </p:txBody>
+      </p:sp>
+      <p:sp>
+        <p:nvSpPr>
+          <p:cNvPr id="6" name="TextBox 5"/>
+          <p:cNvSpPr txBox="1"/>
+          <p:nvPr/>
+        </p:nvSpPr>
+        <p:spPr>
+          <a:xfrm>
+            <a:off x="640080" y="1737360"/>
+            <a:ext cx="10515600" cy="1371600"/>
+          </a:xfrm>
+          <a:prstGeom prst="rect">
+            <a:avLst/>
+          </a:prstGeom>
+          <a:noFill/>
+        </p:spPr>
+        <p:txBody>
+          <a:bodyPr wrap="square">
+            <a:spAutoFit/>
+          </a:bodyPr>
+          <a:lstStyle/>
+          <a:p>
+            <a:pPr algn="l"/>
+            <a:r>
+              <a:rPr sz="2400" b="1">
+                <a:solidFill>
+                  <a:srgbClr val="FFFFFF"/>
+                </a:solidFill>
+                <a:latin typeface="Arial"/>
+              </a:rPr>
+              <a:t>Спасибо Совету делегатов IPMA за внимание к голосу Центральной Азии.</a:t>
+            </a:r>
+          </a:p>
+        </p:txBody>
+      </p:sp>
+      <p:sp>
+        <p:nvSpPr>
+          <p:cNvPr id="7" name="Rounded Rectangle 6"/>
           <p:cNvSpPr/>
           <p:nvPr/>
         </p:nvSpPr>
         <p:spPr>
           <a:xfrm>
-            <a:off x="0" y="0"/>
-            <a:ext cx="12191695" cy="73152"/>
-          </a:xfrm>
-          <a:prstGeom prst="rect">
+            <a:off x="640080" y="3383280"/>
+            <a:ext cx="10789920" cy="1463040"/>
+          </a:xfrm>
+          <a:prstGeom prst="roundRect">
             <a:avLst/>
           </a:prstGeom>
           <a:solidFill>
-            <a:srgbClr val="1F8F5F"/>
+            <a:srgbClr val="0F2C45"/>
           </a:solidFill>
           <a:ln>
             <a:noFill/>
@@ -9965,143 +8740,6 @@
           </a:p>
         </p:txBody>
       </p:sp>
-      <p:pic>
-        <p:nvPicPr>
-          <p:cNvPr id="4" name="Picture 3" descr="ipma-kr-emblem.png"/>
-          <p:cNvPicPr>
-            <a:picLocks noChangeAspect="1"/>
-          </p:cNvPicPr>
-          <p:nvPr/>
-        </p:nvPicPr>
-        <p:blipFill>
-          <a:blip r:embed="rId2"/>
-          <a:stretch>
-            <a:fillRect/>
-          </a:stretch>
-        </p:blipFill>
-        <p:spPr>
-          <a:xfrm>
-            <a:off x="11338560" y="256032"/>
-            <a:ext cx="505533" cy="502920"/>
-          </a:xfrm>
-          <a:prstGeom prst="rect">
-            <a:avLst/>
-          </a:prstGeom>
-        </p:spPr>
-      </p:pic>
-      <p:sp>
-        <p:nvSpPr>
-          <p:cNvPr id="5" name="TextBox 4"/>
-          <p:cNvSpPr txBox="1"/>
-          <p:nvPr/>
-        </p:nvSpPr>
-        <p:spPr>
-          <a:xfrm>
-            <a:off x="548640" y="320040"/>
-            <a:ext cx="10058400" cy="274320"/>
-          </a:xfrm>
-          <a:prstGeom prst="rect">
-            <a:avLst/>
-          </a:prstGeom>
-          <a:noFill/>
-        </p:spPr>
-        <p:txBody>
-          <a:bodyPr wrap="square">
-            <a:spAutoFit/>
-          </a:bodyPr>
-          <a:lstStyle/>
-          <a:p>
-            <a:pPr algn="l"/>
-            <a:r>
-              <a:rPr sz="1100" b="1">
-                <a:solidFill>
-                  <a:srgbClr val="1F8F5F"/>
-                </a:solidFill>
-                <a:latin typeface="Arial"/>
-              </a:rPr>
-              <a:t>09  »  ЧЛЕНСТВО</a:t>
-            </a:r>
-          </a:p>
-        </p:txBody>
-      </p:sp>
-      <p:sp>
-        <p:nvSpPr>
-          <p:cNvPr id="6" name="TextBox 5"/>
-          <p:cNvSpPr txBox="1"/>
-          <p:nvPr/>
-        </p:nvSpPr>
-        <p:spPr>
-          <a:xfrm>
-            <a:off x="548640" y="640080"/>
-            <a:ext cx="10058400" cy="640080"/>
-          </a:xfrm>
-          <a:prstGeom prst="rect">
-            <a:avLst/>
-          </a:prstGeom>
-          <a:noFill/>
-        </p:spPr>
-        <p:txBody>
-          <a:bodyPr wrap="square">
-            <a:spAutoFit/>
-          </a:bodyPr>
-          <a:lstStyle/>
-          <a:p>
-            <a:pPr algn="l"/>
-            <a:r>
-              <a:rPr sz="3200" b="1">
-                <a:solidFill>
-                  <a:srgbClr val="07182A"/>
-                </a:solidFill>
-                <a:latin typeface="Arial"/>
-              </a:rPr>
-              <a:t>Рост сообщества</a:t>
-            </a:r>
-          </a:p>
-        </p:txBody>
-      </p:sp>
-      <p:sp>
-        <p:nvSpPr>
-          <p:cNvPr id="7" name="Rectangle 6"/>
-          <p:cNvSpPr/>
-          <p:nvPr/>
-        </p:nvSpPr>
-        <p:spPr>
-          <a:xfrm>
-            <a:off x="548640" y="2560320"/>
-            <a:ext cx="10972800" cy="13716"/>
-          </a:xfrm>
-          <a:prstGeom prst="rect">
-            <a:avLst/>
-          </a:prstGeom>
-          <a:solidFill>
-            <a:srgbClr val="D0DCE3"/>
-          </a:solidFill>
-          <a:ln>
-            <a:noFill/>
-          </a:ln>
-        </p:spPr>
-        <p:style>
-          <a:lnRef idx="1">
-            <a:schemeClr val="accent1"/>
-          </a:lnRef>
-          <a:fillRef idx="3">
-            <a:schemeClr val="accent1"/>
-          </a:fillRef>
-          <a:effectRef idx="2">
-            <a:schemeClr val="accent1"/>
-          </a:effectRef>
-          <a:fontRef idx="minor">
-            <a:schemeClr val="lt1"/>
-          </a:fontRef>
-        </p:style>
-        <p:txBody>
-          <a:bodyPr rtlCol="0" anchor="ctr"/>
-          <a:lstStyle/>
-          <a:p>
-            <a:pPr algn="ctr"/>
-          </a:p>
-        </p:txBody>
-      </p:sp>
       <p:sp>
         <p:nvSpPr>
           <p:cNvPr id="8" name="TextBox 7"/>
@@ -10110,29 +8748,29 @@
         </p:nvSpPr>
         <p:spPr>
           <a:xfrm>
-            <a:off x="548640" y="1554480"/>
-            <a:ext cx="2011680" cy="548640"/>
-          </a:xfrm>
-          <a:prstGeom prst="rect">
-            <a:avLst/>
-          </a:prstGeom>
-          <a:noFill/>
-        </p:spPr>
-        <p:txBody>
-          <a:bodyPr wrap="square">
-            <a:spAutoFit/>
-          </a:bodyPr>
-          <a:lstStyle/>
-          <a:p>
-            <a:pPr algn="l"/>
-            <a:r>
-              <a:rPr sz="2800" b="1">
-                <a:solidFill>
-                  <a:srgbClr val="1F8F5F"/>
-                </a:solidFill>
-                <a:latin typeface="Arial"/>
-              </a:rPr>
-              <a:t>2027</a:t>
+            <a:off x="914400" y="3657600"/>
+            <a:ext cx="10241280" cy="1005840"/>
+          </a:xfrm>
+          <a:prstGeom prst="rect">
+            <a:avLst/>
+          </a:prstGeom>
+          <a:noFill/>
+        </p:spPr>
+        <p:txBody>
+          <a:bodyPr wrap="square">
+            <a:spAutoFit/>
+          </a:bodyPr>
+          <a:lstStyle/>
+          <a:p>
+            <a:pPr algn="l"/>
+            <a:r>
+              <a:rPr sz="1600" b="0">
+                <a:solidFill>
+                  <a:srgbClr val="D7E8F0"/>
+                </a:solidFill>
+                <a:latin typeface="Arial"/>
+              </a:rPr>
+              <a:t>Просим поддержать KgPMU и своим голосом помочь включить Кыргызское объединение управления проектами в большую семью IPMA — как полноправного национального партнёра.</a:t>
             </a:r>
           </a:p>
         </p:txBody>
@@ -10145,297 +8783,36 @@
         </p:nvSpPr>
         <p:spPr>
           <a:xfrm>
-            <a:off x="2926080" y="1691640"/>
-            <a:ext cx="8686800" cy="457200"/>
-          </a:xfrm>
-          <a:prstGeom prst="rect">
-            <a:avLst/>
-          </a:prstGeom>
-          <a:noFill/>
-        </p:spPr>
-        <p:txBody>
-          <a:bodyPr wrap="square">
-            <a:spAutoFit/>
-          </a:bodyPr>
-          <a:lstStyle/>
-          <a:p>
-            <a:pPr algn="l"/>
-            <a:r>
-              <a:rPr sz="1600" b="0">
-                <a:solidFill>
-                  <a:srgbClr val="122433"/>
-                </a:solidFill>
-                <a:latin typeface="Arial"/>
-              </a:rPr>
-              <a:t>15–20 индивидуальных членов, студенческий трек</a:t>
-            </a:r>
-          </a:p>
-        </p:txBody>
-      </p:sp>
-      <p:sp>
-        <p:nvSpPr>
-          <p:cNvPr id="10" name="Rectangle 9"/>
-          <p:cNvSpPr/>
-          <p:nvPr/>
-        </p:nvSpPr>
-        <p:spPr>
-          <a:xfrm>
-            <a:off x="548640" y="3794760"/>
-            <a:ext cx="10972800" cy="13716"/>
-          </a:xfrm>
-          <a:prstGeom prst="rect">
-            <a:avLst/>
-          </a:prstGeom>
-          <a:solidFill>
-            <a:srgbClr val="D0DCE3"/>
-          </a:solidFill>
-          <a:ln>
-            <a:noFill/>
-          </a:ln>
-        </p:spPr>
-        <p:style>
-          <a:lnRef idx="1">
-            <a:schemeClr val="accent1"/>
-          </a:lnRef>
-          <a:fillRef idx="3">
-            <a:schemeClr val="accent1"/>
-          </a:fillRef>
-          <a:effectRef idx="2">
-            <a:schemeClr val="accent1"/>
-          </a:effectRef>
-          <a:fontRef idx="minor">
-            <a:schemeClr val="lt1"/>
-          </a:fontRef>
-        </p:style>
-        <p:txBody>
-          <a:bodyPr rtlCol="0" anchor="ctr"/>
-          <a:lstStyle/>
-          <a:p>
-            <a:pPr algn="ctr"/>
-          </a:p>
-        </p:txBody>
-      </p:sp>
-      <p:sp>
-        <p:nvSpPr>
-          <p:cNvPr id="11" name="TextBox 10"/>
-          <p:cNvSpPr txBox="1"/>
-          <p:nvPr/>
-        </p:nvSpPr>
-        <p:spPr>
-          <a:xfrm>
-            <a:off x="548640" y="2788920"/>
-            <a:ext cx="2011680" cy="548640"/>
-          </a:xfrm>
-          <a:prstGeom prst="rect">
-            <a:avLst/>
-          </a:prstGeom>
-          <a:noFill/>
-        </p:spPr>
-        <p:txBody>
-          <a:bodyPr wrap="square">
-            <a:spAutoFit/>
-          </a:bodyPr>
-          <a:lstStyle/>
-          <a:p>
-            <a:pPr algn="l"/>
-            <a:r>
-              <a:rPr sz="2800" b="1">
-                <a:solidFill>
-                  <a:srgbClr val="1F8F5F"/>
-                </a:solidFill>
-                <a:latin typeface="Arial"/>
-              </a:rPr>
-              <a:t>2028</a:t>
-            </a:r>
-          </a:p>
-        </p:txBody>
-      </p:sp>
-      <p:sp>
-        <p:nvSpPr>
-          <p:cNvPr id="12" name="TextBox 11"/>
-          <p:cNvSpPr txBox="1"/>
-          <p:nvPr/>
-        </p:nvSpPr>
-        <p:spPr>
-          <a:xfrm>
-            <a:off x="2926080" y="2926080"/>
-            <a:ext cx="8686800" cy="457200"/>
-          </a:xfrm>
-          <a:prstGeom prst="rect">
-            <a:avLst/>
-          </a:prstGeom>
-          <a:noFill/>
-        </p:spPr>
-        <p:txBody>
-          <a:bodyPr wrap="square">
-            <a:spAutoFit/>
-          </a:bodyPr>
-          <a:lstStyle/>
-          <a:p>
-            <a:pPr algn="l"/>
-            <a:r>
-              <a:rPr sz="1600" b="0">
-                <a:solidFill>
-                  <a:srgbClr val="122433"/>
-                </a:solidFill>
-                <a:latin typeface="Arial"/>
-              </a:rPr>
-              <a:t>50+ членов, первые корпоративные партнёры</a:t>
-            </a:r>
-          </a:p>
-        </p:txBody>
-      </p:sp>
-      <p:sp>
-        <p:nvSpPr>
-          <p:cNvPr id="13" name="Rectangle 12"/>
-          <p:cNvSpPr/>
-          <p:nvPr/>
-        </p:nvSpPr>
-        <p:spPr>
-          <a:xfrm>
-            <a:off x="548640" y="5029200"/>
-            <a:ext cx="10972800" cy="13716"/>
-          </a:xfrm>
-          <a:prstGeom prst="rect">
-            <a:avLst/>
-          </a:prstGeom>
-          <a:solidFill>
-            <a:srgbClr val="D0DCE3"/>
-          </a:solidFill>
-          <a:ln>
-            <a:noFill/>
-          </a:ln>
-        </p:spPr>
-        <p:style>
-          <a:lnRef idx="1">
-            <a:schemeClr val="accent1"/>
-          </a:lnRef>
-          <a:fillRef idx="3">
-            <a:schemeClr val="accent1"/>
-          </a:fillRef>
-          <a:effectRef idx="2">
-            <a:schemeClr val="accent1"/>
-          </a:effectRef>
-          <a:fontRef idx="minor">
-            <a:schemeClr val="lt1"/>
-          </a:fontRef>
-        </p:style>
-        <p:txBody>
-          <a:bodyPr rtlCol="0" anchor="ctr"/>
-          <a:lstStyle/>
-          <a:p>
-            <a:pPr algn="ctr"/>
-          </a:p>
-        </p:txBody>
-      </p:sp>
-      <p:sp>
-        <p:nvSpPr>
-          <p:cNvPr id="14" name="TextBox 13"/>
-          <p:cNvSpPr txBox="1"/>
-          <p:nvPr/>
-        </p:nvSpPr>
-        <p:spPr>
-          <a:xfrm>
-            <a:off x="548640" y="4023360"/>
-            <a:ext cx="2011680" cy="548640"/>
-          </a:xfrm>
-          <a:prstGeom prst="rect">
-            <a:avLst/>
-          </a:prstGeom>
-          <a:noFill/>
-        </p:spPr>
-        <p:txBody>
-          <a:bodyPr wrap="square">
-            <a:spAutoFit/>
-          </a:bodyPr>
-          <a:lstStyle/>
-          <a:p>
-            <a:pPr algn="l"/>
-            <a:r>
-              <a:rPr sz="2800" b="1">
-                <a:solidFill>
-                  <a:srgbClr val="1F8F5F"/>
-                </a:solidFill>
-                <a:latin typeface="Arial"/>
-              </a:rPr>
-              <a:t>2029</a:t>
-            </a:r>
-          </a:p>
-        </p:txBody>
-      </p:sp>
-      <p:sp>
-        <p:nvSpPr>
-          <p:cNvPr id="15" name="TextBox 14"/>
-          <p:cNvSpPr txBox="1"/>
-          <p:nvPr/>
-        </p:nvSpPr>
-        <p:spPr>
-          <a:xfrm>
-            <a:off x="2926080" y="4160520"/>
-            <a:ext cx="8686800" cy="457200"/>
-          </a:xfrm>
-          <a:prstGeom prst="rect">
-            <a:avLst/>
-          </a:prstGeom>
-          <a:noFill/>
-        </p:spPr>
-        <p:txBody>
-          <a:bodyPr wrap="square">
-            <a:spAutoFit/>
-          </a:bodyPr>
-          <a:lstStyle/>
-          <a:p>
-            <a:pPr algn="l"/>
-            <a:r>
-              <a:rPr sz="1600" b="0">
-                <a:solidFill>
-                  <a:srgbClr val="122433"/>
-                </a:solidFill>
-                <a:latin typeface="Arial"/>
-              </a:rPr>
-              <a:t>100+ членов, устойчивый рост сертификации</a:t>
-            </a:r>
-          </a:p>
-        </p:txBody>
-      </p:sp>
-      <p:sp>
-        <p:nvSpPr>
-          <p:cNvPr id="16" name="TextBox 15"/>
-          <p:cNvSpPr txBox="1"/>
-          <p:nvPr/>
-        </p:nvSpPr>
-        <p:spPr>
-          <a:xfrm>
-            <a:off x="548640" y="5394960"/>
-            <a:ext cx="10972800" cy="365760"/>
-          </a:xfrm>
-          <a:prstGeom prst="rect">
-            <a:avLst/>
-          </a:prstGeom>
-          <a:noFill/>
-        </p:spPr>
-        <p:txBody>
-          <a:bodyPr wrap="square">
-            <a:spAutoFit/>
-          </a:bodyPr>
-          <a:lstStyle/>
-          <a:p>
-            <a:pPr algn="l"/>
-            <a:r>
-              <a:rPr sz="1300" b="1">
-                <a:solidFill>
-                  <a:srgbClr val="1F8F5F"/>
-                </a:solidFill>
-                <a:latin typeface="Arial"/>
-              </a:rPr>
-              <a:t>Индивидуальное  ·  Студенческое  ·  Корпоративное</a:t>
-            </a:r>
-          </a:p>
-        </p:txBody>
-      </p:sp>
-      <p:sp>
-        <p:nvSpPr>
-          <p:cNvPr id="17" name="TextBox 16"/>
+            <a:off x="640080" y="5120640"/>
+            <a:ext cx="10515600" cy="457200"/>
+          </a:xfrm>
+          <a:prstGeom prst="rect">
+            <a:avLst/>
+          </a:prstGeom>
+          <a:noFill/>
+        </p:spPr>
+        <p:txBody>
+          <a:bodyPr wrap="square">
+            <a:spAutoFit/>
+          </a:bodyPr>
+          <a:lstStyle/>
+          <a:p>
+            <a:pPr algn="l"/>
+            <a:r>
+              <a:rPr sz="1400" b="0">
+                <a:solidFill>
+                  <a:srgbClr val="A9C0D0"/>
+                </a:solidFill>
+                <a:latin typeface="Arial"/>
+              </a:rPr>
+              <a:t>Мы готовы сотрудничать, учиться у зрелых MA и делиться опытом emerging-рынка.</a:t>
+            </a:r>
+          </a:p>
+        </p:txBody>
+      </p:sp>
+      <p:sp>
+        <p:nvSpPr>
+          <p:cNvPr id="10" name="TextBox 9"/>
           <p:cNvSpPr txBox="1"/>
           <p:nvPr/>
         </p:nvSpPr>
@@ -10459,7 +8836,7 @@
             <a:r>
               <a:rPr sz="1100" b="0">
                 <a:solidFill>
-                  <a:srgbClr val="9AAFBD"/>
+                  <a:srgbClr val="7F96A8"/>
                 </a:solidFill>
                 <a:latin typeface="Arial"/>
               </a:rPr>
@@ -10470,7 +8847,7 @@
       </p:sp>
       <p:sp>
         <p:nvSpPr>
-          <p:cNvPr id="18" name="TextBox 17"/>
+          <p:cNvPr id="11" name="TextBox 10"/>
           <p:cNvSpPr txBox="1"/>
           <p:nvPr/>
         </p:nvSpPr>
@@ -10494,11 +8871,11 @@
             <a:r>
               <a:rPr sz="1100" b="0">
                 <a:solidFill>
-                  <a:srgbClr val="9AAFBD"/>
-                </a:solidFill>
-                <a:latin typeface="Arial"/>
-              </a:rPr>
-              <a:t>09 / 12</a:t>
+                  <a:srgbClr val="7F96A8"/>
+                </a:solidFill>
+                <a:latin typeface="Arial"/>
+              </a:rPr>
+              <a:t>09 / 10</a:t>
             </a:r>
           </a:p>
         </p:txBody>

--- a/presentations/IPMA_Kyrgyzstan_CoD_Presentation.pptx
+++ b/presentations/IPMA_Kyrgyzstan_CoD_Presentation.pptx
@@ -3112,7 +3112,7 @@
             <a:avLst/>
           </a:prstGeom>
           <a:solidFill>
-            <a:srgbClr val="F5F8FB"/>
+            <a:srgbClr val="0D223B"/>
           </a:solidFill>
           <a:ln>
             <a:noFill/>
@@ -3142,25 +3142,25 @@
       </p:sp>
       <p:sp>
         <p:nvSpPr>
-          <p:cNvPr id="3" name="Oval 2"/>
+          <p:cNvPr id="3" name="Rounded Rectangle 2"/>
           <p:cNvSpPr/>
           <p:nvPr/>
         </p:nvSpPr>
         <p:spPr>
           <a:xfrm>
-            <a:off x="7772400" y="-1371600"/>
-            <a:ext cx="5486400" cy="4114800"/>
-          </a:xfrm>
-          <a:prstGeom prst="ellipse">
+            <a:off x="640080" y="1371600"/>
+            <a:ext cx="2926080" cy="347472"/>
+          </a:xfrm>
+          <a:prstGeom prst="roundRect">
             <a:avLst/>
           </a:prstGeom>
           <a:solidFill>
-            <a:srgbClr val="DCE6F2">
-              <a:alpha val="35000"/>
-            </a:srgbClr>
+            <a:srgbClr val="142E45"/>
           </a:solidFill>
           <a:ln>
-            <a:noFill/>
+            <a:solidFill>
+              <a:srgbClr val="2A455C"/>
+            </a:solidFill>
           </a:ln>
         </p:spPr>
         <p:style>
@@ -3182,118 +3182,28 @@
           <a:lstStyle/>
           <a:p>
             <a:pPr algn="ctr"/>
-          </a:p>
-        </p:txBody>
-      </p:sp>
-      <p:sp>
-        <p:nvSpPr>
-          <p:cNvPr id="4" name="Oval 3"/>
-          <p:cNvSpPr/>
-          <p:nvPr/>
-        </p:nvSpPr>
-        <p:spPr>
-          <a:xfrm>
-            <a:off x="-1828800" y="4114800"/>
-            <a:ext cx="5029200" cy="3657600"/>
-          </a:xfrm>
-          <a:prstGeom prst="ellipse">
-            <a:avLst/>
-          </a:prstGeom>
-          <a:solidFill>
-            <a:srgbClr val="E3EBF4">
-              <a:alpha val="40000"/>
-            </a:srgbClr>
-          </a:solidFill>
-          <a:ln>
-            <a:noFill/>
-          </a:ln>
-        </p:spPr>
-        <p:style>
-          <a:lnRef idx="1">
-            <a:schemeClr val="accent1"/>
-          </a:lnRef>
-          <a:fillRef idx="3">
-            <a:schemeClr val="accent1"/>
-          </a:fillRef>
-          <a:effectRef idx="2">
-            <a:schemeClr val="accent1"/>
-          </a:effectRef>
-          <a:fontRef idx="minor">
-            <a:schemeClr val="lt1"/>
-          </a:fontRef>
-        </p:style>
-        <p:txBody>
-          <a:bodyPr rtlCol="0" anchor="ctr"/>
-          <a:lstStyle/>
-          <a:p>
-            <a:pPr algn="ctr"/>
-          </a:p>
-        </p:txBody>
-      </p:sp>
-      <p:sp>
-        <p:nvSpPr>
-          <p:cNvPr id="5" name="Rounded Rectangle 4"/>
-          <p:cNvSpPr/>
-          <p:nvPr/>
-        </p:nvSpPr>
-        <p:spPr>
-          <a:xfrm>
-            <a:off x="640080" y="1463040"/>
-            <a:ext cx="2377440" cy="347472"/>
-          </a:xfrm>
-          <a:prstGeom prst="roundRect">
-            <a:avLst/>
-          </a:prstGeom>
-          <a:solidFill>
-            <a:srgbClr val="FBE6E9"/>
-          </a:solidFill>
-          <a:ln>
-            <a:solidFill>
-              <a:srgbClr val="F0A0A8"/>
-            </a:solidFill>
-          </a:ln>
-        </p:spPr>
-        <p:style>
-          <a:lnRef idx="1">
-            <a:schemeClr val="accent1"/>
-          </a:lnRef>
-          <a:fillRef idx="3">
-            <a:schemeClr val="accent1"/>
-          </a:fillRef>
-          <a:effectRef idx="2">
-            <a:schemeClr val="accent1"/>
-          </a:effectRef>
-          <a:fontRef idx="minor">
-            <a:schemeClr val="lt1"/>
-          </a:fontRef>
-        </p:style>
-        <p:txBody>
-          <a:bodyPr rtlCol="0" anchor="ctr"/>
-          <a:lstStyle/>
-          <a:p>
-            <a:pPr algn="ctr"/>
             <a:r>
               <a:rPr sz="1000" b="1">
                 <a:solidFill>
-                  <a:srgbClr val="E62739"/>
-                </a:solidFill>
-                <a:latin typeface="Calibri"/>
-              </a:rPr>
-              <a:t>COUNCIL OF DELEGATES</a:t>
-            </a:r>
-          </a:p>
-        </p:txBody>
-      </p:sp>
-      <p:sp>
-        <p:nvSpPr>
-          <p:cNvPr id="6" name="TextBox 5"/>
+                  <a:srgbClr val="7FE0A0"/>
+                </a:solidFill>
+                <a:latin typeface="Calibri"/>
+              </a:rPr>
+              <a:t>»»  COUNCIL OF DELEGATES</a:t>
+            </a:r>
+          </a:p>
+        </p:txBody>
+      </p:sp>
+      <p:sp>
+        <p:nvSpPr>
+          <p:cNvPr id="4" name="TextBox 3"/>
           <p:cNvSpPr txBox="1"/>
           <p:nvPr/>
         </p:nvSpPr>
         <p:spPr>
           <a:xfrm>
-            <a:off x="640080" y="2011680"/>
-            <a:ext cx="6583680" cy="2011680"/>
+            <a:off x="640080" y="1965960"/>
+            <a:ext cx="6583680" cy="2103120"/>
           </a:xfrm>
           <a:prstGeom prst="rect">
             <a:avLst/>
@@ -3307,9 +3217,9 @@
           <a:lstStyle/>
           <a:p>
             <a:r>
-              <a:rPr sz="3600" b="1">
-                <a:solidFill>
-                  <a:srgbClr val="122033"/>
+              <a:rPr sz="3400" b="1">
+                <a:solidFill>
+                  <a:srgbClr val="FFFFFF"/>
                 </a:solidFill>
                 <a:latin typeface="Calibri"/>
               </a:rPr>
@@ -3320,13 +3230,13 @@
       </p:sp>
       <p:sp>
         <p:nvSpPr>
-          <p:cNvPr id="7" name="TextBox 6"/>
+          <p:cNvPr id="5" name="TextBox 4"/>
           <p:cNvSpPr txBox="1"/>
           <p:nvPr/>
         </p:nvSpPr>
         <p:spPr>
           <a:xfrm>
-            <a:off x="640080" y="4114800"/>
+            <a:off x="640080" y="4206240"/>
             <a:ext cx="6400800" cy="457200"/>
           </a:xfrm>
           <a:prstGeom prst="rect">
@@ -3344,7 +3254,7 @@
             <a:r>
               <a:rPr sz="1400" b="0">
                 <a:solidFill>
-                  <a:srgbClr val="4A6074"/>
+                  <a:srgbClr val="BCD0DF"/>
                 </a:solidFill>
                 <a:latin typeface="Calibri"/>
               </a:rPr>
@@ -3355,13 +3265,13 @@
       </p:sp>
       <p:sp>
         <p:nvSpPr>
-          <p:cNvPr id="8" name="TextBox 7"/>
+          <p:cNvPr id="6" name="TextBox 5"/>
           <p:cNvSpPr txBox="1"/>
           <p:nvPr/>
         </p:nvSpPr>
         <p:spPr>
           <a:xfrm>
-            <a:off x="640080" y="4709160"/>
+            <a:off x="640080" y="4754880"/>
             <a:ext cx="6400800" cy="365760"/>
           </a:xfrm>
           <a:prstGeom prst="rect">
@@ -3379,7 +3289,7 @@
             <a:r>
               <a:rPr sz="1300" b="0">
                 <a:solidFill>
-                  <a:srgbClr val="7A8FA3"/>
+                  <a:srgbClr val="8FA6B8"/>
                 </a:solidFill>
                 <a:latin typeface="Calibri"/>
               </a:rPr>
@@ -3390,7 +3300,7 @@
       </p:sp>
       <p:pic>
         <p:nvPicPr>
-          <p:cNvPr id="9" name="Picture 8" descr="ipma-kr-logo-grey.png"/>
+          <p:cNvPr id="7" name="Picture 6" descr="ipma-kr-logo-white.png"/>
           <p:cNvPicPr>
             <a:picLocks noChangeAspect="1"/>
           </p:cNvPicPr>
@@ -3404,48 +3314,24 @@
         </p:blipFill>
         <p:spPr>
           <a:xfrm>
-            <a:off x="7589520" y="2103120"/>
-            <a:ext cx="3840480" cy="1122473"/>
+            <a:off x="7498079" y="2194560"/>
+            <a:ext cx="3931920" cy="1149198"/>
           </a:xfrm>
           <a:prstGeom prst="rect">
             <a:avLst/>
           </a:prstGeom>
         </p:spPr>
       </p:pic>
-      <p:pic>
-        <p:nvPicPr>
-          <p:cNvPr id="10" name="Picture 9" descr="ipma-kr-emblem.png"/>
-          <p:cNvPicPr>
-            <a:picLocks noChangeAspect="1"/>
-          </p:cNvPicPr>
-          <p:nvPr/>
-        </p:nvPicPr>
-        <p:blipFill>
-          <a:blip r:embed="rId3"/>
-          <a:stretch>
-            <a:fillRect/>
-          </a:stretch>
-        </p:blipFill>
-        <p:spPr>
-          <a:xfrm>
-            <a:off x="640080" y="6355080"/>
-            <a:ext cx="257362" cy="256032"/>
-          </a:xfrm>
-          <a:prstGeom prst="rect">
-            <a:avLst/>
-          </a:prstGeom>
-        </p:spPr>
-      </p:pic>
-      <p:sp>
-        <p:nvSpPr>
-          <p:cNvPr id="11" name="TextBox 10"/>
+      <p:sp>
+        <p:nvSpPr>
+          <p:cNvPr id="8" name="TextBox 7"/>
           <p:cNvSpPr txBox="1"/>
           <p:nvPr/>
         </p:nvSpPr>
         <p:spPr>
           <a:xfrm>
-            <a:off x="1005840" y="6355080"/>
-            <a:ext cx="5486400" cy="274320"/>
+            <a:off x="9326880" y="4754880"/>
+            <a:ext cx="2743200" cy="1828800"/>
           </a:xfrm>
           <a:prstGeom prst="rect">
             <a:avLst/>
@@ -3460,27 +3346,27 @@
           <a:p>
             <a:pPr algn="l"/>
             <a:r>
-              <a:rPr sz="1000" b="1">
-                <a:solidFill>
-                  <a:srgbClr val="7A8FA3"/>
-                </a:solidFill>
-                <a:latin typeface="Calibri"/>
-              </a:rPr>
-              <a:t>IPMA Kyrgyz Republic</a:t>
-            </a:r>
-          </a:p>
-        </p:txBody>
-      </p:sp>
-      <p:sp>
-        <p:nvSpPr>
-          <p:cNvPr id="12" name="TextBox 11"/>
+              <a:rPr sz="12000" b="1">
+                <a:solidFill>
+                  <a:srgbClr val="E30613"/>
+                </a:solidFill>
+                <a:latin typeface="Calibri"/>
+              </a:rPr>
+              <a:t>»</a:t>
+            </a:r>
+          </a:p>
+        </p:txBody>
+      </p:sp>
+      <p:sp>
+        <p:nvSpPr>
+          <p:cNvPr id="9" name="TextBox 8"/>
           <p:cNvSpPr txBox="1"/>
           <p:nvPr/>
         </p:nvSpPr>
         <p:spPr>
           <a:xfrm>
-            <a:off x="10515600" y="6355080"/>
-            <a:ext cx="1188720" cy="274320"/>
+            <a:off x="640080" y="6355080"/>
+            <a:ext cx="6400800" cy="274320"/>
           </a:xfrm>
           <a:prstGeom prst="rect">
             <a:avLst/>
@@ -3493,11 +3379,46 @@
           </a:bodyPr>
           <a:lstStyle/>
           <a:p>
+            <a:pPr algn="l"/>
+            <a:r>
+              <a:rPr sz="1000" b="1">
+                <a:solidFill>
+                  <a:srgbClr val="8FA6B8"/>
+                </a:solidFill>
+                <a:latin typeface="Calibri"/>
+              </a:rPr>
+              <a:t>IPMA » Kyrgyz Republic</a:t>
+            </a:r>
+          </a:p>
+        </p:txBody>
+      </p:sp>
+      <p:sp>
+        <p:nvSpPr>
+          <p:cNvPr id="10" name="TextBox 9"/>
+          <p:cNvSpPr txBox="1"/>
+          <p:nvPr/>
+        </p:nvSpPr>
+        <p:spPr>
+          <a:xfrm>
+            <a:off x="10515600" y="6355080"/>
+            <a:ext cx="1188720" cy="274320"/>
+          </a:xfrm>
+          <a:prstGeom prst="rect">
+            <a:avLst/>
+          </a:prstGeom>
+          <a:noFill/>
+        </p:spPr>
+        <p:txBody>
+          <a:bodyPr wrap="none">
+            <a:spAutoFit/>
+          </a:bodyPr>
+          <a:lstStyle/>
+          <a:p>
             <a:pPr algn="r"/>
             <a:r>
               <a:rPr sz="1000" b="1">
                 <a:solidFill>
-                  <a:srgbClr val="7A8FA3"/>
+                  <a:srgbClr val="8FA6B8"/>
                 </a:solidFill>
                 <a:latin typeface="Calibri"/>
               </a:rPr>
@@ -3539,7 +3460,7 @@
             <a:avLst/>
           </a:prstGeom>
           <a:solidFill>
-            <a:srgbClr val="F5F8FB"/>
+            <a:srgbClr val="0D223B"/>
           </a:solidFill>
           <a:ln>
             <a:noFill/>
@@ -3569,25 +3490,25 @@
       </p:sp>
       <p:sp>
         <p:nvSpPr>
-          <p:cNvPr id="3" name="Oval 2"/>
+          <p:cNvPr id="3" name="Rounded Rectangle 2"/>
           <p:cNvSpPr/>
           <p:nvPr/>
         </p:nvSpPr>
         <p:spPr>
           <a:xfrm>
-            <a:off x="7772400" y="-1371600"/>
-            <a:ext cx="5486400" cy="4114800"/>
-          </a:xfrm>
-          <a:prstGeom prst="ellipse">
+            <a:off x="640080" y="1554480"/>
+            <a:ext cx="2560320" cy="347472"/>
+          </a:xfrm>
+          <a:prstGeom prst="roundRect">
             <a:avLst/>
           </a:prstGeom>
           <a:solidFill>
-            <a:srgbClr val="DCE6F2">
-              <a:alpha val="35000"/>
-            </a:srgbClr>
+            <a:srgbClr val="142E45"/>
           </a:solidFill>
           <a:ln>
-            <a:noFill/>
+            <a:solidFill>
+              <a:srgbClr val="2A455C"/>
+            </a:solidFill>
           </a:ln>
         </p:spPr>
         <p:style>
@@ -3609,118 +3530,28 @@
           <a:lstStyle/>
           <a:p>
             <a:pPr algn="ctr"/>
-          </a:p>
-        </p:txBody>
-      </p:sp>
-      <p:sp>
-        <p:nvSpPr>
-          <p:cNvPr id="4" name="Oval 3"/>
-          <p:cNvSpPr/>
-          <p:nvPr/>
-        </p:nvSpPr>
-        <p:spPr>
-          <a:xfrm>
-            <a:off x="-1828800" y="4114800"/>
-            <a:ext cx="5029200" cy="3657600"/>
-          </a:xfrm>
-          <a:prstGeom prst="ellipse">
-            <a:avLst/>
-          </a:prstGeom>
-          <a:solidFill>
-            <a:srgbClr val="E3EBF4">
-              <a:alpha val="40000"/>
-            </a:srgbClr>
-          </a:solidFill>
-          <a:ln>
-            <a:noFill/>
-          </a:ln>
-        </p:spPr>
-        <p:style>
-          <a:lnRef idx="1">
-            <a:schemeClr val="accent1"/>
-          </a:lnRef>
-          <a:fillRef idx="3">
-            <a:schemeClr val="accent1"/>
-          </a:fillRef>
-          <a:effectRef idx="2">
-            <a:schemeClr val="accent1"/>
-          </a:effectRef>
-          <a:fontRef idx="minor">
-            <a:schemeClr val="lt1"/>
-          </a:fontRef>
-        </p:style>
-        <p:txBody>
-          <a:bodyPr rtlCol="0" anchor="ctr"/>
-          <a:lstStyle/>
-          <a:p>
-            <a:pPr algn="ctr"/>
-          </a:p>
-        </p:txBody>
-      </p:sp>
-      <p:sp>
-        <p:nvSpPr>
-          <p:cNvPr id="5" name="Rounded Rectangle 4"/>
-          <p:cNvSpPr/>
-          <p:nvPr/>
-        </p:nvSpPr>
-        <p:spPr>
-          <a:xfrm>
-            <a:off x="640080" y="1645920"/>
-            <a:ext cx="2286000" cy="347472"/>
-          </a:xfrm>
-          <a:prstGeom prst="roundRect">
-            <a:avLst/>
-          </a:prstGeom>
-          <a:solidFill>
-            <a:srgbClr val="FBE6E9"/>
-          </a:solidFill>
-          <a:ln>
-            <a:solidFill>
-              <a:srgbClr val="F0A0A8"/>
-            </a:solidFill>
-          </a:ln>
-        </p:spPr>
-        <p:style>
-          <a:lnRef idx="1">
-            <a:schemeClr val="accent1"/>
-          </a:lnRef>
-          <a:fillRef idx="3">
-            <a:schemeClr val="accent1"/>
-          </a:fillRef>
-          <a:effectRef idx="2">
-            <a:schemeClr val="accent1"/>
-          </a:effectRef>
-          <a:fontRef idx="minor">
-            <a:schemeClr val="lt1"/>
-          </a:fontRef>
-        </p:style>
-        <p:txBody>
-          <a:bodyPr rtlCol="0" anchor="ctr"/>
-          <a:lstStyle/>
-          <a:p>
-            <a:pPr algn="ctr"/>
             <a:r>
               <a:rPr sz="1000" b="1">
                 <a:solidFill>
-                  <a:srgbClr val="E62739"/>
-                </a:solidFill>
-                <a:latin typeface="Calibri"/>
-              </a:rPr>
-              <a:t>СПАСИБО ЗА ВНИМАНИЕ</a:t>
-            </a:r>
-          </a:p>
-        </p:txBody>
-      </p:sp>
-      <p:sp>
-        <p:nvSpPr>
-          <p:cNvPr id="6" name="TextBox 5"/>
+                  <a:srgbClr val="7FE0A0"/>
+                </a:solidFill>
+                <a:latin typeface="Calibri"/>
+              </a:rPr>
+              <a:t>»»  СПАСИБО ЗА ВНИМАНИЕ</a:t>
+            </a:r>
+          </a:p>
+        </p:txBody>
+      </p:sp>
+      <p:sp>
+        <p:nvSpPr>
+          <p:cNvPr id="4" name="TextBox 3"/>
           <p:cNvSpPr txBox="1"/>
           <p:nvPr/>
         </p:nvSpPr>
         <p:spPr>
           <a:xfrm>
-            <a:off x="640080" y="2286000"/>
-            <a:ext cx="6400800" cy="1097280"/>
+            <a:off x="640080" y="2194560"/>
+            <a:ext cx="6400800" cy="1005840"/>
           </a:xfrm>
           <a:prstGeom prst="rect">
             <a:avLst/>
@@ -3735,9 +3566,9 @@
           <a:p>
             <a:pPr algn="l"/>
             <a:r>
-              <a:rPr sz="4000" b="1">
-                <a:solidFill>
-                  <a:srgbClr val="122033"/>
+              <a:rPr sz="3600" b="1">
+                <a:solidFill>
+                  <a:srgbClr val="FFFFFF"/>
                 </a:solidFill>
                 <a:latin typeface="Calibri"/>
               </a:rPr>
@@ -3748,13 +3579,13 @@
       </p:sp>
       <p:sp>
         <p:nvSpPr>
-          <p:cNvPr id="7" name="TextBox 6"/>
+          <p:cNvPr id="5" name="TextBox 4"/>
           <p:cNvSpPr txBox="1"/>
           <p:nvPr/>
         </p:nvSpPr>
         <p:spPr>
           <a:xfrm>
-            <a:off x="640080" y="3566160"/>
+            <a:off x="640080" y="3383280"/>
             <a:ext cx="6400800" cy="365760"/>
           </a:xfrm>
           <a:prstGeom prst="rect">
@@ -3772,7 +3603,7 @@
             <a:r>
               <a:rPr sz="1500" b="0">
                 <a:solidFill>
-                  <a:srgbClr val="4A6074"/>
+                  <a:srgbClr val="BCD0DF"/>
                 </a:solidFill>
                 <a:latin typeface="Calibri"/>
               </a:rPr>
@@ -3783,14 +3614,14 @@
       </p:sp>
       <p:sp>
         <p:nvSpPr>
-          <p:cNvPr id="8" name="TextBox 7"/>
+          <p:cNvPr id="6" name="TextBox 5"/>
           <p:cNvSpPr txBox="1"/>
           <p:nvPr/>
         </p:nvSpPr>
         <p:spPr>
           <a:xfrm>
-            <a:off x="640080" y="4114800"/>
-            <a:ext cx="6400800" cy="457200"/>
+            <a:off x="640080" y="4023360"/>
+            <a:ext cx="6400800" cy="365760"/>
           </a:xfrm>
           <a:prstGeom prst="rect">
             <a:avLst/>
@@ -3807,24 +3638,24 @@
             <a:r>
               <a:rPr sz="1400" b="1">
                 <a:solidFill>
-                  <a:srgbClr val="E62739"/>
-                </a:solidFill>
-                <a:latin typeface="Calibri"/>
-              </a:rPr>
-              <a:t>info@ipma.kg    ·    +996 555 655 755    ·    ipma.kg</a:t>
-            </a:r>
-          </a:p>
-        </p:txBody>
-      </p:sp>
-      <p:sp>
-        <p:nvSpPr>
-          <p:cNvPr id="9" name="TextBox 8"/>
+                  <a:srgbClr val="7FE0A0"/>
+                </a:solidFill>
+                <a:latin typeface="Calibri"/>
+              </a:rPr>
+              <a:t>info@ipma.kg  ·  +996 555 655 755  ·  ipma.kg</a:t>
+            </a:r>
+          </a:p>
+        </p:txBody>
+      </p:sp>
+      <p:sp>
+        <p:nvSpPr>
+          <p:cNvPr id="7" name="TextBox 6"/>
           <p:cNvSpPr txBox="1"/>
           <p:nvPr/>
         </p:nvSpPr>
         <p:spPr>
           <a:xfrm>
-            <a:off x="640080" y="4754880"/>
+            <a:off x="640080" y="4572000"/>
             <a:ext cx="6400800" cy="365760"/>
           </a:xfrm>
           <a:prstGeom prst="rect">
@@ -3842,7 +3673,7 @@
             <a:r>
               <a:rPr sz="1300" b="0">
                 <a:solidFill>
-                  <a:srgbClr val="7A8FA3"/>
+                  <a:srgbClr val="8FA6B8"/>
                 </a:solidFill>
                 <a:latin typeface="Calibri"/>
               </a:rPr>
@@ -3853,7 +3684,7 @@
       </p:sp>
       <p:pic>
         <p:nvPicPr>
-          <p:cNvPr id="10" name="Picture 9" descr="ipma-kr-logo-grey.png"/>
+          <p:cNvPr id="8" name="Picture 7" descr="ipma-kr-logo-white.png"/>
           <p:cNvPicPr>
             <a:picLocks noChangeAspect="1"/>
           </p:cNvPicPr>
@@ -3867,48 +3698,24 @@
         </p:blipFill>
         <p:spPr>
           <a:xfrm>
-            <a:off x="7589520" y="2286000"/>
-            <a:ext cx="3840480" cy="1122473"/>
+            <a:off x="7498079" y="2286000"/>
+            <a:ext cx="3931920" cy="1149198"/>
           </a:xfrm>
           <a:prstGeom prst="rect">
             <a:avLst/>
           </a:prstGeom>
         </p:spPr>
       </p:pic>
-      <p:pic>
-        <p:nvPicPr>
-          <p:cNvPr id="11" name="Picture 10" descr="ipma-kr-emblem.png"/>
-          <p:cNvPicPr>
-            <a:picLocks noChangeAspect="1"/>
-          </p:cNvPicPr>
-          <p:nvPr/>
-        </p:nvPicPr>
-        <p:blipFill>
-          <a:blip r:embed="rId3"/>
-          <a:stretch>
-            <a:fillRect/>
-          </a:stretch>
-        </p:blipFill>
+      <p:sp>
+        <p:nvSpPr>
+          <p:cNvPr id="9" name="TextBox 8"/>
+          <p:cNvSpPr txBox="1"/>
+          <p:nvPr/>
+        </p:nvSpPr>
         <p:spPr>
           <a:xfrm>
             <a:off x="640080" y="6355080"/>
-            <a:ext cx="257362" cy="256032"/>
-          </a:xfrm>
-          <a:prstGeom prst="rect">
-            <a:avLst/>
-          </a:prstGeom>
-        </p:spPr>
-      </p:pic>
-      <p:sp>
-        <p:nvSpPr>
-          <p:cNvPr id="12" name="TextBox 11"/>
-          <p:cNvSpPr txBox="1"/>
-          <p:nvPr/>
-        </p:nvSpPr>
-        <p:spPr>
-          <a:xfrm>
-            <a:off x="1005840" y="6355080"/>
-            <a:ext cx="5486400" cy="274320"/>
+            <a:ext cx="6400800" cy="274320"/>
           </a:xfrm>
           <a:prstGeom prst="rect">
             <a:avLst/>
@@ -3925,18 +3732,18 @@
             <a:r>
               <a:rPr sz="1000" b="1">
                 <a:solidFill>
-                  <a:srgbClr val="7A8FA3"/>
-                </a:solidFill>
-                <a:latin typeface="Calibri"/>
-              </a:rPr>
-              <a:t>IPMA Kyrgyz Republic</a:t>
-            </a:r>
-          </a:p>
-        </p:txBody>
-      </p:sp>
-      <p:sp>
-        <p:nvSpPr>
-          <p:cNvPr id="13" name="TextBox 12"/>
+                  <a:srgbClr val="8FA6B8"/>
+                </a:solidFill>
+                <a:latin typeface="Calibri"/>
+              </a:rPr>
+              <a:t>IPMA » Kyrgyz Republic</a:t>
+            </a:r>
+          </a:p>
+        </p:txBody>
+      </p:sp>
+      <p:sp>
+        <p:nvSpPr>
+          <p:cNvPr id="10" name="TextBox 9"/>
           <p:cNvSpPr txBox="1"/>
           <p:nvPr/>
         </p:nvSpPr>
@@ -3960,7 +3767,7 @@
             <a:r>
               <a:rPr sz="1000" b="1">
                 <a:solidFill>
-                  <a:srgbClr val="7A8FA3"/>
+                  <a:srgbClr val="8FA6B8"/>
                 </a:solidFill>
                 <a:latin typeface="Calibri"/>
               </a:rPr>
@@ -4002,7 +3809,7 @@
             <a:avLst/>
           </a:prstGeom>
           <a:solidFill>
-            <a:srgbClr val="F5F8FB"/>
+            <a:srgbClr val="EEF2F1"/>
           </a:solidFill>
           <a:ln>
             <a:noFill/>
@@ -4032,25 +3839,95 @@
       </p:sp>
       <p:sp>
         <p:nvSpPr>
-          <p:cNvPr id="3" name="Oval 2"/>
+          <p:cNvPr id="3" name="TextBox 2"/>
+          <p:cNvSpPr txBox="1"/>
+          <p:nvPr/>
+        </p:nvSpPr>
+        <p:spPr>
+          <a:xfrm>
+            <a:off x="640080" y="502920"/>
+            <a:ext cx="10058400" cy="320040"/>
+          </a:xfrm>
+          <a:prstGeom prst="rect">
+            <a:avLst/>
+          </a:prstGeom>
+          <a:noFill/>
+        </p:spPr>
+        <p:txBody>
+          <a:bodyPr wrap="none">
+            <a:spAutoFit/>
+          </a:bodyPr>
+          <a:lstStyle/>
+          <a:p>
+            <a:pPr algn="l"/>
+            <a:r>
+              <a:rPr sz="1100" b="1">
+                <a:solidFill>
+                  <a:srgbClr val="1F7A34"/>
+                </a:solidFill>
+                <a:latin typeface="Calibri"/>
+              </a:rPr>
+              <a:t>02  »»  КТО МЫ</a:t>
+            </a:r>
+          </a:p>
+        </p:txBody>
+      </p:sp>
+      <p:sp>
+        <p:nvSpPr>
+          <p:cNvPr id="4" name="TextBox 3"/>
+          <p:cNvSpPr txBox="1"/>
+          <p:nvPr/>
+        </p:nvSpPr>
+        <p:spPr>
+          <a:xfrm>
+            <a:off x="640080" y="868680"/>
+            <a:ext cx="10058400" cy="640080"/>
+          </a:xfrm>
+          <a:prstGeom prst="rect">
+            <a:avLst/>
+          </a:prstGeom>
+          <a:noFill/>
+        </p:spPr>
+        <p:txBody>
+          <a:bodyPr wrap="none">
+            <a:spAutoFit/>
+          </a:bodyPr>
+          <a:lstStyle/>
+          <a:p>
+            <a:pPr algn="l"/>
+            <a:r>
+              <a:rPr sz="3000" b="1">
+                <a:solidFill>
+                  <a:srgbClr val="0D223B"/>
+                </a:solidFill>
+                <a:latin typeface="Calibri"/>
+              </a:rPr>
+              <a:t>Президент KgPMU</a:t>
+            </a:r>
+          </a:p>
+        </p:txBody>
+      </p:sp>
+      <p:sp>
+        <p:nvSpPr>
+          <p:cNvPr id="5" name="Rounded Rectangle 4"/>
           <p:cNvSpPr/>
           <p:nvPr/>
         </p:nvSpPr>
         <p:spPr>
           <a:xfrm>
-            <a:off x="7772400" y="-1371600"/>
-            <a:ext cx="5486400" cy="4114800"/>
-          </a:xfrm>
-          <a:prstGeom prst="ellipse">
+            <a:off x="640080" y="1737360"/>
+            <a:ext cx="6400800" cy="4114800"/>
+          </a:xfrm>
+          <a:prstGeom prst="roundRect">
             <a:avLst/>
           </a:prstGeom>
           <a:solidFill>
-            <a:srgbClr val="DCE6F2">
-              <a:alpha val="35000"/>
-            </a:srgbClr>
+            <a:srgbClr val="FFFFFF"/>
           </a:solidFill>
           <a:ln>
-            <a:noFill/>
+            <a:solidFill>
+              <a:srgbClr val="D9E2DF"/>
+            </a:solidFill>
           </a:ln>
         </p:spPr>
         <p:style>
@@ -4077,199 +3954,14 @@
       </p:sp>
       <p:sp>
         <p:nvSpPr>
-          <p:cNvPr id="4" name="Oval 3"/>
-          <p:cNvSpPr/>
-          <p:nvPr/>
-        </p:nvSpPr>
-        <p:spPr>
-          <a:xfrm>
-            <a:off x="-1828800" y="4114800"/>
-            <a:ext cx="5029200" cy="3657600"/>
-          </a:xfrm>
-          <a:prstGeom prst="ellipse">
-            <a:avLst/>
-          </a:prstGeom>
-          <a:solidFill>
-            <a:srgbClr val="E3EBF4">
-              <a:alpha val="40000"/>
-            </a:srgbClr>
-          </a:solidFill>
-          <a:ln>
-            <a:noFill/>
-          </a:ln>
-        </p:spPr>
-        <p:style>
-          <a:lnRef idx="1">
-            <a:schemeClr val="accent1"/>
-          </a:lnRef>
-          <a:fillRef idx="3">
-            <a:schemeClr val="accent1"/>
-          </a:fillRef>
-          <a:effectRef idx="2">
-            <a:schemeClr val="accent1"/>
-          </a:effectRef>
-          <a:fontRef idx="minor">
-            <a:schemeClr val="lt1"/>
-          </a:fontRef>
-        </p:style>
-        <p:txBody>
-          <a:bodyPr rtlCol="0" anchor="ctr"/>
-          <a:lstStyle/>
-          <a:p>
-            <a:pPr algn="ctr"/>
-          </a:p>
-        </p:txBody>
-      </p:sp>
-      <p:sp>
-        <p:nvSpPr>
-          <p:cNvPr id="5" name="TextBox 4"/>
-          <p:cNvSpPr txBox="1"/>
-          <p:nvPr/>
-        </p:nvSpPr>
-        <p:spPr>
-          <a:xfrm>
-            <a:off x="640080" y="502920"/>
-            <a:ext cx="9144000" cy="320040"/>
-          </a:xfrm>
-          <a:prstGeom prst="rect">
-            <a:avLst/>
-          </a:prstGeom>
-          <a:noFill/>
-        </p:spPr>
-        <p:txBody>
-          <a:bodyPr wrap="none">
-            <a:spAutoFit/>
-          </a:bodyPr>
-          <a:lstStyle/>
-          <a:p>
-            <a:pPr algn="l"/>
-            <a:r>
-              <a:rPr sz="1100" b="1">
-                <a:solidFill>
-                  <a:srgbClr val="E62739"/>
-                </a:solidFill>
-                <a:latin typeface="Calibri"/>
-              </a:rPr>
-              <a:t>02  »  КТО МЫ</a:t>
-            </a:r>
-          </a:p>
-        </p:txBody>
-      </p:sp>
-      <p:sp>
-        <p:nvSpPr>
           <p:cNvPr id="6" name="TextBox 5"/>
           <p:cNvSpPr txBox="1"/>
           <p:nvPr/>
         </p:nvSpPr>
         <p:spPr>
           <a:xfrm>
-            <a:off x="640080" y="868680"/>
-            <a:ext cx="9144000" cy="731520"/>
-          </a:xfrm>
-          <a:prstGeom prst="rect">
-            <a:avLst/>
-          </a:prstGeom>
-          <a:noFill/>
-        </p:spPr>
-        <p:txBody>
-          <a:bodyPr wrap="none">
-            <a:spAutoFit/>
-          </a:bodyPr>
-          <a:lstStyle/>
-          <a:p>
-            <a:pPr algn="l"/>
-            <a:r>
-              <a:rPr sz="3200" b="1">
-                <a:solidFill>
-                  <a:srgbClr val="122033"/>
-                </a:solidFill>
-                <a:latin typeface="Calibri"/>
-              </a:rPr>
-              <a:t>Президент KgPMU</a:t>
-            </a:r>
-          </a:p>
-        </p:txBody>
-      </p:sp>
-      <p:sp>
-        <p:nvSpPr>
-          <p:cNvPr id="7" name="TextBox 6"/>
-          <p:cNvSpPr txBox="1"/>
-          <p:nvPr/>
-        </p:nvSpPr>
-        <p:spPr>
-          <a:xfrm>
-            <a:off x="640080" y="1691640"/>
-            <a:ext cx="6400800" cy="274320"/>
-          </a:xfrm>
-          <a:prstGeom prst="rect">
-            <a:avLst/>
-          </a:prstGeom>
-          <a:noFill/>
-        </p:spPr>
-        <p:txBody>
-          <a:bodyPr wrap="none">
-            <a:spAutoFit/>
-          </a:bodyPr>
-          <a:lstStyle/>
-          <a:p>
-            <a:pPr algn="l"/>
-            <a:r>
-              <a:rPr sz="1100" b="1">
-                <a:solidFill>
-                  <a:srgbClr val="E62739"/>
-                </a:solidFill>
-                <a:latin typeface="Calibri"/>
-              </a:rPr>
-              <a:t>МЕКИШЕВ УРМАТ КАЗБЕКОВИЧ</a:t>
-            </a:r>
-          </a:p>
-        </p:txBody>
-      </p:sp>
-      <p:sp>
-        <p:nvSpPr>
-          <p:cNvPr id="8" name="TextBox 7"/>
-          <p:cNvSpPr txBox="1"/>
-          <p:nvPr/>
-        </p:nvSpPr>
-        <p:spPr>
-          <a:xfrm>
-            <a:off x="640080" y="2011680"/>
-            <a:ext cx="6583680" cy="502920"/>
-          </a:xfrm>
-          <a:prstGeom prst="rect">
-            <a:avLst/>
-          </a:prstGeom>
-          <a:noFill/>
-        </p:spPr>
-        <p:txBody>
-          <a:bodyPr wrap="none">
-            <a:spAutoFit/>
-          </a:bodyPr>
-          <a:lstStyle/>
-          <a:p>
-            <a:pPr algn="l"/>
-            <a:r>
-              <a:rPr sz="1800" b="1">
-                <a:solidFill>
-                  <a:srgbClr val="122033"/>
-                </a:solidFill>
-                <a:latin typeface="Calibri"/>
-              </a:rPr>
-              <a:t>Президент KgPMU · сертифицированный эксперт IPMA</a:t>
-            </a:r>
-          </a:p>
-        </p:txBody>
-      </p:sp>
-      <p:sp>
-        <p:nvSpPr>
-          <p:cNvPr id="9" name="TextBox 8"/>
-          <p:cNvSpPr txBox="1"/>
-          <p:nvPr/>
-        </p:nvSpPr>
-        <p:spPr>
-          <a:xfrm>
-            <a:off x="640080" y="2606040"/>
-            <a:ext cx="6400800" cy="2560320"/>
+            <a:off x="868680" y="1920240"/>
+            <a:ext cx="5943600" cy="3657600"/>
           </a:xfrm>
           <a:prstGeom prst="rect">
             <a:avLst/>
@@ -4283,17 +3975,36 @@
           <a:lstStyle/>
           <a:p>
             <a:r>
-              <a:rPr sz="1300" b="0">
-                <a:solidFill>
-                  <a:srgbClr val="4A6074"/>
-                </a:solidFill>
-                <a:latin typeface="Calibri"/>
-              </a:rPr>
-              <a:t>Проектный менеджер и бизнес-аналитик с более чем 15-летним опытом в цифровизации, автоматизации и управлении проектами. Обладатель международной сертификации IPMA Level B (Certified Senior Project Manager).</a:t>
-            </a:r>
-          </a:p>
-          <a:p>
-            <a:pPr algn="l">
+              <a:rPr sz="1100" b="1">
+                <a:solidFill>
+                  <a:srgbClr val="1F7A34"/>
+                </a:solidFill>
+                <a:latin typeface="Calibri"/>
+              </a:rPr>
+              <a:t>МЕКИШЕВ УРМАТ КАЗБЕКОВИЧ</a:t>
+            </a:r>
+          </a:p>
+          <a:p>
+            <a:pPr>
+              <a:spcBef>
+                <a:spcPts val="800"/>
+              </a:spcBef>
+              <a:spcAft>
+                <a:spcPts val="600"/>
+              </a:spcAft>
+            </a:pPr>
+            <a:r>
+              <a:rPr sz="1600" b="1">
+                <a:solidFill>
+                  <a:srgbClr val="0D223B"/>
+                </a:solidFill>
+                <a:latin typeface="Calibri"/>
+              </a:rPr>
+              <a:t>Президент KgPMU · сертифицированный эксперт IPMA</a:t>
+            </a:r>
+          </a:p>
+          <a:p>
+            <a:pPr>
               <a:spcBef>
                 <a:spcPts val="1000"/>
               </a:spcBef>
@@ -4304,59 +4015,45 @@
             <a:r>
               <a:rPr sz="1300" b="0">
                 <a:solidFill>
-                  <a:srgbClr val="4A6074"/>
-                </a:solidFill>
-                <a:latin typeface="Calibri"/>
-              </a:rPr>
-              <a:t>Руководил проектами цифровизации государственных систем, внедрения геоинформационных технологий и автоматизации бизнес-процессов — в том числе в сфере таможенных и муниципальных цифровых сервисов.</a:t>
-            </a:r>
-          </a:p>
-        </p:txBody>
-      </p:sp>
-      <p:sp>
-        <p:nvSpPr>
-          <p:cNvPr id="10" name="Rounded Rectangle 9"/>
-          <p:cNvSpPr/>
-          <p:nvPr/>
-        </p:nvSpPr>
-        <p:spPr>
-          <a:xfrm>
-            <a:off x="640080" y="5212080"/>
-            <a:ext cx="4206240" cy="320040"/>
-          </a:xfrm>
-          <a:prstGeom prst="roundRect">
-            <a:avLst/>
-          </a:prstGeom>
-          <a:solidFill>
-            <a:srgbClr val="FBE6E9"/>
-          </a:solidFill>
-          <a:ln>
-            <a:noFill/>
-          </a:ln>
-        </p:spPr>
-        <p:style>
-          <a:lnRef idx="1">
-            <a:schemeClr val="accent1"/>
-          </a:lnRef>
-          <a:fillRef idx="3">
-            <a:schemeClr val="accent1"/>
-          </a:fillRef>
-          <a:effectRef idx="2">
-            <a:schemeClr val="accent1"/>
-          </a:effectRef>
-          <a:fontRef idx="minor">
-            <a:schemeClr val="lt1"/>
-          </a:fontRef>
-        </p:style>
-        <p:txBody>
-          <a:bodyPr rtlCol="0" anchor="ctr"/>
-          <a:lstStyle/>
-          <a:p>
-            <a:pPr algn="ctr"/>
-            <a:r>
-              <a:rPr sz="1100" b="1">
-                <a:solidFill>
-                  <a:srgbClr val="E62739"/>
+                  <a:srgbClr val="28394A"/>
+                </a:solidFill>
+                <a:latin typeface="Calibri"/>
+              </a:rPr>
+              <a:t>Проектный менеджер и бизнес-аналитик с более чем 15-летним опытом. Обладатель IPMA Level B (Certified Senior Project Manager).</a:t>
+            </a:r>
+          </a:p>
+          <a:p>
+            <a:pPr>
+              <a:spcBef>
+                <a:spcPts val="800"/>
+              </a:spcBef>
+              <a:spcAft>
+                <a:spcPts val="600"/>
+              </a:spcAft>
+            </a:pPr>
+            <a:r>
+              <a:rPr sz="1300" b="0">
+                <a:solidFill>
+                  <a:srgbClr val="28394A"/>
+                </a:solidFill>
+                <a:latin typeface="Calibri"/>
+              </a:rPr>
+              <a:t>Руководил проектами цифровизации госсистем, ГИС и автоматизации — включая таможенные и муниципальные сервисы.</a:t>
+            </a:r>
+          </a:p>
+          <a:p>
+            <a:pPr>
+              <a:spcBef>
+                <a:spcPts val="1400"/>
+              </a:spcBef>
+              <a:spcAft>
+                <a:spcPts val="600"/>
+              </a:spcAft>
+            </a:pPr>
+            <a:r>
+              <a:rPr sz="1200" b="1">
+                <a:solidFill>
+                  <a:srgbClr val="1F7A34"/>
                 </a:solidFill>
                 <a:latin typeface="Calibri"/>
               </a:rPr>
@@ -4367,14 +4064,14 @@
       </p:sp>
       <p:sp>
         <p:nvSpPr>
-          <p:cNvPr id="11" name="TextBox 10"/>
+          <p:cNvPr id="7" name="TextBox 6"/>
           <p:cNvSpPr txBox="1"/>
           <p:nvPr/>
         </p:nvSpPr>
         <p:spPr>
           <a:xfrm>
-            <a:off x="7498079" y="1737360"/>
-            <a:ext cx="4114800" cy="822960"/>
+            <a:off x="7406640" y="1783080"/>
+            <a:ext cx="4206240" cy="868680"/>
           </a:xfrm>
           <a:prstGeom prst="rect">
             <a:avLst/>
@@ -4388,17 +4085,17 @@
           <a:lstStyle/>
           <a:p>
             <a:r>
-              <a:rPr sz="1200" b="1">
-                <a:solidFill>
-                  <a:srgbClr val="122033"/>
-                </a:solidFill>
-                <a:latin typeface="Calibri"/>
-              </a:rPr>
-              <a:t>Государственные проекты</a:t>
-            </a:r>
-          </a:p>
-          <a:p>
-            <a:pPr algn="l">
+              <a:rPr sz="1300" b="1">
+                <a:solidFill>
+                  <a:srgbClr val="0D223B"/>
+                </a:solidFill>
+                <a:latin typeface="Calibri"/>
+              </a:rPr>
+              <a:t>»  Государственные проекты</a:t>
+            </a:r>
+          </a:p>
+          <a:p>
+            <a:pPr>
               <a:spcBef>
                 <a:spcPts val="200"/>
               </a:spcBef>
@@ -4409,7 +4106,7 @@
             <a:r>
               <a:rPr sz="1200" b="0">
                 <a:solidFill>
-                  <a:srgbClr val="4A6074"/>
+                  <a:srgbClr val="28394A"/>
                 </a:solidFill>
                 <a:latin typeface="Calibri"/>
               </a:rPr>
@@ -4420,57 +4117,14 @@
       </p:sp>
       <p:sp>
         <p:nvSpPr>
-          <p:cNvPr id="12" name="Rectangle 11"/>
-          <p:cNvSpPr/>
-          <p:nvPr/>
-        </p:nvSpPr>
-        <p:spPr>
-          <a:xfrm>
-            <a:off x="7498079" y="2514600"/>
-            <a:ext cx="3931920" cy="9144"/>
-          </a:xfrm>
-          <a:prstGeom prst="rect">
-            <a:avLst/>
-          </a:prstGeom>
-          <a:solidFill>
-            <a:srgbClr val="D0D8E2"/>
-          </a:solidFill>
-          <a:ln>
-            <a:noFill/>
-          </a:ln>
-        </p:spPr>
-        <p:style>
-          <a:lnRef idx="1">
-            <a:schemeClr val="accent1"/>
-          </a:lnRef>
-          <a:fillRef idx="3">
-            <a:schemeClr val="accent1"/>
-          </a:fillRef>
-          <a:effectRef idx="2">
-            <a:schemeClr val="accent1"/>
-          </a:effectRef>
-          <a:fontRef idx="minor">
-            <a:schemeClr val="lt1"/>
-          </a:fontRef>
-        </p:style>
-        <p:txBody>
-          <a:bodyPr rtlCol="0" anchor="ctr"/>
-          <a:lstStyle/>
-          <a:p>
-            <a:pPr algn="ctr"/>
-          </a:p>
-        </p:txBody>
-      </p:sp>
-      <p:sp>
-        <p:nvSpPr>
-          <p:cNvPr id="13" name="TextBox 12"/>
+          <p:cNvPr id="8" name="TextBox 7"/>
           <p:cNvSpPr txBox="1"/>
           <p:nvPr/>
         </p:nvSpPr>
         <p:spPr>
           <a:xfrm>
-            <a:off x="7498079" y="2697480"/>
-            <a:ext cx="4114800" cy="822960"/>
+            <a:off x="7406640" y="2788920"/>
+            <a:ext cx="4206240" cy="868680"/>
           </a:xfrm>
           <a:prstGeom prst="rect">
             <a:avLst/>
@@ -4484,17 +4138,17 @@
           <a:lstStyle/>
           <a:p>
             <a:r>
-              <a:rPr sz="1200" b="1">
-                <a:solidFill>
-                  <a:srgbClr val="122033"/>
-                </a:solidFill>
-                <a:latin typeface="Calibri"/>
-              </a:rPr>
-              <a:t>Геоинформационные решения</a:t>
-            </a:r>
-          </a:p>
-          <a:p>
-            <a:pPr algn="l">
+              <a:rPr sz="1300" b="1">
+                <a:solidFill>
+                  <a:srgbClr val="0D223B"/>
+                </a:solidFill>
+                <a:latin typeface="Calibri"/>
+              </a:rPr>
+              <a:t>»  Геоинформационные решения</a:t>
+            </a:r>
+          </a:p>
+          <a:p>
+            <a:pPr>
               <a:spcBef>
                 <a:spcPts val="200"/>
               </a:spcBef>
@@ -4505,7 +4159,7 @@
             <a:r>
               <a:rPr sz="1200" b="0">
                 <a:solidFill>
-                  <a:srgbClr val="4A6074"/>
+                  <a:srgbClr val="28394A"/>
                 </a:solidFill>
                 <a:latin typeface="Calibri"/>
               </a:rPr>
@@ -4516,57 +4170,14 @@
       </p:sp>
       <p:sp>
         <p:nvSpPr>
-          <p:cNvPr id="14" name="Rectangle 13"/>
-          <p:cNvSpPr/>
-          <p:nvPr/>
-        </p:nvSpPr>
-        <p:spPr>
-          <a:xfrm>
-            <a:off x="7498079" y="3474720"/>
-            <a:ext cx="3931920" cy="9144"/>
-          </a:xfrm>
-          <a:prstGeom prst="rect">
-            <a:avLst/>
-          </a:prstGeom>
-          <a:solidFill>
-            <a:srgbClr val="D0D8E2"/>
-          </a:solidFill>
-          <a:ln>
-            <a:noFill/>
-          </a:ln>
-        </p:spPr>
-        <p:style>
-          <a:lnRef idx="1">
-            <a:schemeClr val="accent1"/>
-          </a:lnRef>
-          <a:fillRef idx="3">
-            <a:schemeClr val="accent1"/>
-          </a:fillRef>
-          <a:effectRef idx="2">
-            <a:schemeClr val="accent1"/>
-          </a:effectRef>
-          <a:fontRef idx="minor">
-            <a:schemeClr val="lt1"/>
-          </a:fontRef>
-        </p:style>
-        <p:txBody>
-          <a:bodyPr rtlCol="0" anchor="ctr"/>
-          <a:lstStyle/>
-          <a:p>
-            <a:pPr algn="ctr"/>
-          </a:p>
-        </p:txBody>
-      </p:sp>
-      <p:sp>
-        <p:nvSpPr>
-          <p:cNvPr id="15" name="TextBox 14"/>
+          <p:cNvPr id="9" name="TextBox 8"/>
           <p:cNvSpPr txBox="1"/>
           <p:nvPr/>
         </p:nvSpPr>
         <p:spPr>
           <a:xfrm>
-            <a:off x="7498079" y="3657600"/>
-            <a:ext cx="4114800" cy="822960"/>
+            <a:off x="7406640" y="3794760"/>
+            <a:ext cx="4206240" cy="868680"/>
           </a:xfrm>
           <a:prstGeom prst="rect">
             <a:avLst/>
@@ -4580,17 +4191,17 @@
           <a:lstStyle/>
           <a:p>
             <a:r>
-              <a:rPr sz="1200" b="1">
-                <a:solidFill>
-                  <a:srgbClr val="122033"/>
-                </a:solidFill>
-                <a:latin typeface="Calibri"/>
-              </a:rPr>
-              <a:t>Признание</a:t>
-            </a:r>
-          </a:p>
-          <a:p>
-            <a:pPr algn="l">
+              <a:rPr sz="1300" b="1">
+                <a:solidFill>
+                  <a:srgbClr val="0D223B"/>
+                </a:solidFill>
+                <a:latin typeface="Calibri"/>
+              </a:rPr>
+              <a:t>»  Признание</a:t>
+            </a:r>
+          </a:p>
+          <a:p>
+            <a:pPr>
               <a:spcBef>
                 <a:spcPts val="200"/>
               </a:spcBef>
@@ -4601,7 +4212,7 @@
             <a:r>
               <a:rPr sz="1200" b="0">
                 <a:solidFill>
-                  <a:srgbClr val="4A6074"/>
+                  <a:srgbClr val="28394A"/>
                 </a:solidFill>
                 <a:latin typeface="Calibri"/>
               </a:rPr>
@@ -4612,57 +4223,14 @@
       </p:sp>
       <p:sp>
         <p:nvSpPr>
-          <p:cNvPr id="16" name="Rectangle 15"/>
-          <p:cNvSpPr/>
-          <p:nvPr/>
-        </p:nvSpPr>
-        <p:spPr>
-          <a:xfrm>
-            <a:off x="7498079" y="4434840"/>
-            <a:ext cx="3931920" cy="9144"/>
-          </a:xfrm>
-          <a:prstGeom prst="rect">
-            <a:avLst/>
-          </a:prstGeom>
-          <a:solidFill>
-            <a:srgbClr val="D0D8E2"/>
-          </a:solidFill>
-          <a:ln>
-            <a:noFill/>
-          </a:ln>
-        </p:spPr>
-        <p:style>
-          <a:lnRef idx="1">
-            <a:schemeClr val="accent1"/>
-          </a:lnRef>
-          <a:fillRef idx="3">
-            <a:schemeClr val="accent1"/>
-          </a:fillRef>
-          <a:effectRef idx="2">
-            <a:schemeClr val="accent1"/>
-          </a:effectRef>
-          <a:fontRef idx="minor">
-            <a:schemeClr val="lt1"/>
-          </a:fontRef>
-        </p:style>
-        <p:txBody>
-          <a:bodyPr rtlCol="0" anchor="ctr"/>
-          <a:lstStyle/>
-          <a:p>
-            <a:pPr algn="ctr"/>
-          </a:p>
-        </p:txBody>
-      </p:sp>
-      <p:sp>
-        <p:nvSpPr>
-          <p:cNvPr id="17" name="TextBox 16"/>
+          <p:cNvPr id="10" name="TextBox 9"/>
           <p:cNvSpPr txBox="1"/>
           <p:nvPr/>
         </p:nvSpPr>
         <p:spPr>
           <a:xfrm>
-            <a:off x="7498079" y="4617720"/>
-            <a:ext cx="4114800" cy="822960"/>
+            <a:off x="7406640" y="4800600"/>
+            <a:ext cx="4206240" cy="868680"/>
           </a:xfrm>
           <a:prstGeom prst="rect">
             <a:avLst/>
@@ -4676,17 +4244,17 @@
           <a:lstStyle/>
           <a:p>
             <a:r>
-              <a:rPr sz="1200" b="1">
-                <a:solidFill>
-                  <a:srgbClr val="122033"/>
-                </a:solidFill>
-                <a:latin typeface="Calibri"/>
-              </a:rPr>
-              <a:t>Сообщество</a:t>
-            </a:r>
-          </a:p>
-          <a:p>
-            <a:pPr algn="l">
+              <a:rPr sz="1300" b="1">
+                <a:solidFill>
+                  <a:srgbClr val="0D223B"/>
+                </a:solidFill>
+                <a:latin typeface="Calibri"/>
+              </a:rPr>
+              <a:t>»  Сообщество</a:t>
+            </a:r>
+          </a:p>
+          <a:p>
+            <a:pPr>
               <a:spcBef>
                 <a:spcPts val="200"/>
               </a:spcBef>
@@ -4697,61 +4265,18 @@
             <a:r>
               <a:rPr sz="1200" b="0">
                 <a:solidFill>
-                  <a:srgbClr val="4A6074"/>
+                  <a:srgbClr val="28394A"/>
                 </a:solidFill>
                 <a:latin typeface="Calibri"/>
               </a:rPr>
               <a:t>Развитие профессиональных стандартов IPMA в Кыргызстане</a:t>
             </a:r>
-          </a:p>
-        </p:txBody>
-      </p:sp>
-      <p:sp>
-        <p:nvSpPr>
-          <p:cNvPr id="18" name="Rectangle 17"/>
-          <p:cNvSpPr/>
-          <p:nvPr/>
-        </p:nvSpPr>
-        <p:spPr>
-          <a:xfrm>
-            <a:off x="7498079" y="5394959"/>
-            <a:ext cx="3931920" cy="9144"/>
-          </a:xfrm>
-          <a:prstGeom prst="rect">
-            <a:avLst/>
-          </a:prstGeom>
-          <a:solidFill>
-            <a:srgbClr val="D0D8E2"/>
-          </a:solidFill>
-          <a:ln>
-            <a:noFill/>
-          </a:ln>
-        </p:spPr>
-        <p:style>
-          <a:lnRef idx="1">
-            <a:schemeClr val="accent1"/>
-          </a:lnRef>
-          <a:fillRef idx="3">
-            <a:schemeClr val="accent1"/>
-          </a:fillRef>
-          <a:effectRef idx="2">
-            <a:schemeClr val="accent1"/>
-          </a:effectRef>
-          <a:fontRef idx="minor">
-            <a:schemeClr val="lt1"/>
-          </a:fontRef>
-        </p:style>
-        <p:txBody>
-          <a:bodyPr rtlCol="0" anchor="ctr"/>
-          <a:lstStyle/>
-          <a:p>
-            <a:pPr algn="ctr"/>
           </a:p>
         </p:txBody>
       </p:sp>
       <p:pic>
         <p:nvPicPr>
-          <p:cNvPr id="19" name="Picture 18" descr="ipma-kr-emblem.png"/>
+          <p:cNvPr id="11" name="Picture 10" descr="ipma-kr-emblem.png"/>
           <p:cNvPicPr>
             <a:picLocks noChangeAspect="1"/>
           </p:cNvPicPr>
@@ -4766,7 +4291,7 @@
         <p:spPr>
           <a:xfrm>
             <a:off x="640080" y="6355080"/>
-            <a:ext cx="257362" cy="256032"/>
+            <a:ext cx="238979" cy="237744"/>
           </a:xfrm>
           <a:prstGeom prst="rect">
             <a:avLst/>
@@ -4775,14 +4300,14 @@
       </p:pic>
       <p:sp>
         <p:nvSpPr>
-          <p:cNvPr id="20" name="TextBox 19"/>
+          <p:cNvPr id="12" name="TextBox 11"/>
           <p:cNvSpPr txBox="1"/>
           <p:nvPr/>
         </p:nvSpPr>
         <p:spPr>
           <a:xfrm>
             <a:off x="1005840" y="6355080"/>
-            <a:ext cx="5486400" cy="274320"/>
+            <a:ext cx="6400800" cy="274320"/>
           </a:xfrm>
           <a:prstGeom prst="rect">
             <a:avLst/>
@@ -4799,18 +4324,18 @@
             <a:r>
               <a:rPr sz="1000" b="1">
                 <a:solidFill>
-                  <a:srgbClr val="7A8FA3"/>
-                </a:solidFill>
-                <a:latin typeface="Calibri"/>
-              </a:rPr>
-              <a:t>IPMA Kyrgyz Republic</a:t>
-            </a:r>
-          </a:p>
-        </p:txBody>
-      </p:sp>
-      <p:sp>
-        <p:nvSpPr>
-          <p:cNvPr id="21" name="TextBox 20"/>
+                  <a:srgbClr val="5C6B72"/>
+                </a:solidFill>
+                <a:latin typeface="Calibri"/>
+              </a:rPr>
+              <a:t>IPMA » Kyrgyz Republic</a:t>
+            </a:r>
+          </a:p>
+        </p:txBody>
+      </p:sp>
+      <p:sp>
+        <p:nvSpPr>
+          <p:cNvPr id="13" name="TextBox 12"/>
           <p:cNvSpPr txBox="1"/>
           <p:nvPr/>
         </p:nvSpPr>
@@ -4834,7 +4359,7 @@
             <a:r>
               <a:rPr sz="1000" b="1">
                 <a:solidFill>
-                  <a:srgbClr val="7A8FA3"/>
+                  <a:srgbClr val="5C6B72"/>
                 </a:solidFill>
                 <a:latin typeface="Calibri"/>
               </a:rPr>
@@ -4876,7 +4401,7 @@
             <a:avLst/>
           </a:prstGeom>
           <a:solidFill>
-            <a:srgbClr val="F5F8FB"/>
+            <a:srgbClr val="EEF2F1"/>
           </a:solidFill>
           <a:ln>
             <a:noFill/>
@@ -4906,104 +4431,14 @@
       </p:sp>
       <p:sp>
         <p:nvSpPr>
-          <p:cNvPr id="3" name="Oval 2"/>
-          <p:cNvSpPr/>
-          <p:nvPr/>
-        </p:nvSpPr>
-        <p:spPr>
-          <a:xfrm>
-            <a:off x="7772400" y="-1371600"/>
-            <a:ext cx="5486400" cy="4114800"/>
-          </a:xfrm>
-          <a:prstGeom prst="ellipse">
-            <a:avLst/>
-          </a:prstGeom>
-          <a:solidFill>
-            <a:srgbClr val="DCE6F2">
-              <a:alpha val="35000"/>
-            </a:srgbClr>
-          </a:solidFill>
-          <a:ln>
-            <a:noFill/>
-          </a:ln>
-        </p:spPr>
-        <p:style>
-          <a:lnRef idx="1">
-            <a:schemeClr val="accent1"/>
-          </a:lnRef>
-          <a:fillRef idx="3">
-            <a:schemeClr val="accent1"/>
-          </a:fillRef>
-          <a:effectRef idx="2">
-            <a:schemeClr val="accent1"/>
-          </a:effectRef>
-          <a:fontRef idx="minor">
-            <a:schemeClr val="lt1"/>
-          </a:fontRef>
-        </p:style>
-        <p:txBody>
-          <a:bodyPr rtlCol="0" anchor="ctr"/>
-          <a:lstStyle/>
-          <a:p>
-            <a:pPr algn="ctr"/>
-          </a:p>
-        </p:txBody>
-      </p:sp>
-      <p:sp>
-        <p:nvSpPr>
-          <p:cNvPr id="4" name="Oval 3"/>
-          <p:cNvSpPr/>
-          <p:nvPr/>
-        </p:nvSpPr>
-        <p:spPr>
-          <a:xfrm>
-            <a:off x="-1828800" y="4114800"/>
-            <a:ext cx="5029200" cy="3657600"/>
-          </a:xfrm>
-          <a:prstGeom prst="ellipse">
-            <a:avLst/>
-          </a:prstGeom>
-          <a:solidFill>
-            <a:srgbClr val="E3EBF4">
-              <a:alpha val="40000"/>
-            </a:srgbClr>
-          </a:solidFill>
-          <a:ln>
-            <a:noFill/>
-          </a:ln>
-        </p:spPr>
-        <p:style>
-          <a:lnRef idx="1">
-            <a:schemeClr val="accent1"/>
-          </a:lnRef>
-          <a:fillRef idx="3">
-            <a:schemeClr val="accent1"/>
-          </a:fillRef>
-          <a:effectRef idx="2">
-            <a:schemeClr val="accent1"/>
-          </a:effectRef>
-          <a:fontRef idx="minor">
-            <a:schemeClr val="lt1"/>
-          </a:fontRef>
-        </p:style>
-        <p:txBody>
-          <a:bodyPr rtlCol="0" anchor="ctr"/>
-          <a:lstStyle/>
-          <a:p>
-            <a:pPr algn="ctr"/>
-          </a:p>
-        </p:txBody>
-      </p:sp>
-      <p:sp>
-        <p:nvSpPr>
-          <p:cNvPr id="5" name="TextBox 4"/>
+          <p:cNvPr id="3" name="TextBox 2"/>
           <p:cNvSpPr txBox="1"/>
           <p:nvPr/>
         </p:nvSpPr>
         <p:spPr>
           <a:xfrm>
             <a:off x="640080" y="502920"/>
-            <a:ext cx="9144000" cy="320040"/>
+            <a:ext cx="10058400" cy="320040"/>
           </a:xfrm>
           <a:prstGeom prst="rect">
             <a:avLst/>
@@ -5020,25 +4455,25 @@
             <a:r>
               <a:rPr sz="1100" b="1">
                 <a:solidFill>
-                  <a:srgbClr val="E62739"/>
-                </a:solidFill>
-                <a:latin typeface="Calibri"/>
-              </a:rPr>
-              <a:t>03  »  О СТРАНЕ</a:t>
-            </a:r>
-          </a:p>
-        </p:txBody>
-      </p:sp>
-      <p:sp>
-        <p:nvSpPr>
-          <p:cNvPr id="6" name="TextBox 5"/>
+                  <a:srgbClr val="1F7A34"/>
+                </a:solidFill>
+                <a:latin typeface="Calibri"/>
+              </a:rPr>
+              <a:t>03  »»  О СТРАНЕ</a:t>
+            </a:r>
+          </a:p>
+        </p:txBody>
+      </p:sp>
+      <p:sp>
+        <p:nvSpPr>
+          <p:cNvPr id="4" name="TextBox 3"/>
           <p:cNvSpPr txBox="1"/>
           <p:nvPr/>
         </p:nvSpPr>
         <p:spPr>
           <a:xfrm>
             <a:off x="640080" y="868680"/>
-            <a:ext cx="9144000" cy="731520"/>
+            <a:ext cx="10058400" cy="640080"/>
           </a:xfrm>
           <a:prstGeom prst="rect">
             <a:avLst/>
@@ -5053,9 +4488,9 @@
           <a:p>
             <a:pPr algn="l"/>
             <a:r>
-              <a:rPr sz="3200" b="1">
-                <a:solidFill>
-                  <a:srgbClr val="122033"/>
+              <a:rPr sz="3000" b="1">
+                <a:solidFill>
+                  <a:srgbClr val="0D223B"/>
                 </a:solidFill>
                 <a:latin typeface="Calibri"/>
               </a:rPr>
@@ -5066,13 +4501,13 @@
       </p:sp>
       <p:sp>
         <p:nvSpPr>
-          <p:cNvPr id="7" name="TextBox 6"/>
+          <p:cNvPr id="5" name="TextBox 4"/>
           <p:cNvSpPr txBox="1"/>
           <p:nvPr/>
         </p:nvSpPr>
         <p:spPr>
           <a:xfrm>
-            <a:off x="640080" y="1645920"/>
+            <a:off x="640080" y="1600200"/>
             <a:ext cx="10058400" cy="365760"/>
           </a:xfrm>
           <a:prstGeom prst="rect">
@@ -5090,7 +4525,7 @@
             <a:r>
               <a:rPr sz="1400" b="0">
                 <a:solidFill>
-                  <a:srgbClr val="4A6074"/>
+                  <a:srgbClr val="28394A"/>
                 </a:solidFill>
                 <a:latin typeface="Calibri"/>
               </a:rPr>
@@ -5101,14 +4536,14 @@
       </p:sp>
       <p:sp>
         <p:nvSpPr>
-          <p:cNvPr id="8" name="TextBox 7"/>
+          <p:cNvPr id="6" name="TextBox 5"/>
           <p:cNvSpPr txBox="1"/>
           <p:nvPr/>
         </p:nvSpPr>
         <p:spPr>
           <a:xfrm>
-            <a:off x="640080" y="2194560"/>
-            <a:ext cx="2651760" cy="1097280"/>
+            <a:off x="640080" y="2148840"/>
+            <a:ext cx="2651760" cy="1005840"/>
           </a:xfrm>
           <a:prstGeom prst="rect">
             <a:avLst/>
@@ -5124,7 +4559,7 @@
             <a:r>
               <a:rPr sz="2400" b="1">
                 <a:solidFill>
-                  <a:srgbClr val="122033"/>
+                  <a:srgbClr val="0D223B"/>
                 </a:solidFill>
                 <a:latin typeface="Calibri"/>
               </a:rPr>
@@ -5132,7 +4567,7 @@
             </a:r>
           </a:p>
           <a:p>
-            <a:pPr algn="l">
+            <a:pPr>
               <a:spcBef>
                 <a:spcPts val="600"/>
               </a:spcBef>
@@ -5143,7 +4578,7 @@
             <a:r>
               <a:rPr sz="1100" b="0">
                 <a:solidFill>
-                  <a:srgbClr val="4A6074"/>
+                  <a:srgbClr val="28394A"/>
                 </a:solidFill>
                 <a:latin typeface="Calibri"/>
               </a:rPr>
@@ -5154,57 +4589,14 @@
       </p:sp>
       <p:sp>
         <p:nvSpPr>
-          <p:cNvPr id="9" name="Rectangle 8"/>
-          <p:cNvSpPr/>
-          <p:nvPr/>
-        </p:nvSpPr>
-        <p:spPr>
-          <a:xfrm>
-            <a:off x="640080" y="2148840"/>
-            <a:ext cx="2468880" cy="13716"/>
-          </a:xfrm>
-          <a:prstGeom prst="rect">
-            <a:avLst/>
-          </a:prstGeom>
-          <a:solidFill>
-            <a:srgbClr val="D0D8E2"/>
-          </a:solidFill>
-          <a:ln>
-            <a:noFill/>
-          </a:ln>
-        </p:spPr>
-        <p:style>
-          <a:lnRef idx="1">
-            <a:schemeClr val="accent1"/>
-          </a:lnRef>
-          <a:fillRef idx="3">
-            <a:schemeClr val="accent1"/>
-          </a:fillRef>
-          <a:effectRef idx="2">
-            <a:schemeClr val="accent1"/>
-          </a:effectRef>
-          <a:fontRef idx="minor">
-            <a:schemeClr val="lt1"/>
-          </a:fontRef>
-        </p:style>
-        <p:txBody>
-          <a:bodyPr rtlCol="0" anchor="ctr"/>
-          <a:lstStyle/>
-          <a:p>
-            <a:pPr algn="ctr"/>
-          </a:p>
-        </p:txBody>
-      </p:sp>
-      <p:sp>
-        <p:nvSpPr>
-          <p:cNvPr id="10" name="TextBox 9"/>
+          <p:cNvPr id="7" name="TextBox 6"/>
           <p:cNvSpPr txBox="1"/>
           <p:nvPr/>
         </p:nvSpPr>
         <p:spPr>
           <a:xfrm>
-            <a:off x="3474720" y="2194560"/>
-            <a:ext cx="2651760" cy="1097280"/>
+            <a:off x="3474720" y="2148840"/>
+            <a:ext cx="2651760" cy="1005840"/>
           </a:xfrm>
           <a:prstGeom prst="rect">
             <a:avLst/>
@@ -5220,7 +4612,7 @@
             <a:r>
               <a:rPr sz="2400" b="1">
                 <a:solidFill>
-                  <a:srgbClr val="122033"/>
+                  <a:srgbClr val="0D223B"/>
                 </a:solidFill>
                 <a:latin typeface="Calibri"/>
               </a:rPr>
@@ -5228,7 +4620,7 @@
             </a:r>
           </a:p>
           <a:p>
-            <a:pPr algn="l">
+            <a:pPr>
               <a:spcBef>
                 <a:spcPts val="600"/>
               </a:spcBef>
@@ -5239,7 +4631,7 @@
             <a:r>
               <a:rPr sz="1100" b="0">
                 <a:solidFill>
-                  <a:srgbClr val="4A6074"/>
+                  <a:srgbClr val="28394A"/>
                 </a:solidFill>
                 <a:latin typeface="Calibri"/>
               </a:rPr>
@@ -5250,57 +4642,14 @@
       </p:sp>
       <p:sp>
         <p:nvSpPr>
-          <p:cNvPr id="11" name="Rectangle 10"/>
-          <p:cNvSpPr/>
-          <p:nvPr/>
-        </p:nvSpPr>
-        <p:spPr>
-          <a:xfrm>
-            <a:off x="3474720" y="2148840"/>
-            <a:ext cx="2468880" cy="13716"/>
-          </a:xfrm>
-          <a:prstGeom prst="rect">
-            <a:avLst/>
-          </a:prstGeom>
-          <a:solidFill>
-            <a:srgbClr val="D0D8E2"/>
-          </a:solidFill>
-          <a:ln>
-            <a:noFill/>
-          </a:ln>
-        </p:spPr>
-        <p:style>
-          <a:lnRef idx="1">
-            <a:schemeClr val="accent1"/>
-          </a:lnRef>
-          <a:fillRef idx="3">
-            <a:schemeClr val="accent1"/>
-          </a:fillRef>
-          <a:effectRef idx="2">
-            <a:schemeClr val="accent1"/>
-          </a:effectRef>
-          <a:fontRef idx="minor">
-            <a:schemeClr val="lt1"/>
-          </a:fontRef>
-        </p:style>
-        <p:txBody>
-          <a:bodyPr rtlCol="0" anchor="ctr"/>
-          <a:lstStyle/>
-          <a:p>
-            <a:pPr algn="ctr"/>
-          </a:p>
-        </p:txBody>
-      </p:sp>
-      <p:sp>
-        <p:nvSpPr>
-          <p:cNvPr id="12" name="TextBox 11"/>
+          <p:cNvPr id="8" name="TextBox 7"/>
           <p:cNvSpPr txBox="1"/>
           <p:nvPr/>
         </p:nvSpPr>
         <p:spPr>
           <a:xfrm>
-            <a:off x="6309360" y="2194560"/>
-            <a:ext cx="2651760" cy="1097280"/>
+            <a:off x="6309360" y="2148840"/>
+            <a:ext cx="2651760" cy="1005840"/>
           </a:xfrm>
           <a:prstGeom prst="rect">
             <a:avLst/>
@@ -5316,7 +4665,7 @@
             <a:r>
               <a:rPr sz="2400" b="1">
                 <a:solidFill>
-                  <a:srgbClr val="122033"/>
+                  <a:srgbClr val="0D223B"/>
                 </a:solidFill>
                 <a:latin typeface="Calibri"/>
               </a:rPr>
@@ -5324,7 +4673,7 @@
             </a:r>
           </a:p>
           <a:p>
-            <a:pPr algn="l">
+            <a:pPr>
               <a:spcBef>
                 <a:spcPts val="600"/>
               </a:spcBef>
@@ -5335,7 +4684,7 @@
             <a:r>
               <a:rPr sz="1100" b="0">
                 <a:solidFill>
-                  <a:srgbClr val="4A6074"/>
+                  <a:srgbClr val="28394A"/>
                 </a:solidFill>
                 <a:latin typeface="Calibri"/>
               </a:rPr>
@@ -5346,57 +4695,14 @@
       </p:sp>
       <p:sp>
         <p:nvSpPr>
-          <p:cNvPr id="13" name="Rectangle 12"/>
-          <p:cNvSpPr/>
-          <p:nvPr/>
-        </p:nvSpPr>
-        <p:spPr>
-          <a:xfrm>
-            <a:off x="6309360" y="2148840"/>
-            <a:ext cx="2468880" cy="13716"/>
-          </a:xfrm>
-          <a:prstGeom prst="rect">
-            <a:avLst/>
-          </a:prstGeom>
-          <a:solidFill>
-            <a:srgbClr val="D0D8E2"/>
-          </a:solidFill>
-          <a:ln>
-            <a:noFill/>
-          </a:ln>
-        </p:spPr>
-        <p:style>
-          <a:lnRef idx="1">
-            <a:schemeClr val="accent1"/>
-          </a:lnRef>
-          <a:fillRef idx="3">
-            <a:schemeClr val="accent1"/>
-          </a:fillRef>
-          <a:effectRef idx="2">
-            <a:schemeClr val="accent1"/>
-          </a:effectRef>
-          <a:fontRef idx="minor">
-            <a:schemeClr val="lt1"/>
-          </a:fontRef>
-        </p:style>
-        <p:txBody>
-          <a:bodyPr rtlCol="0" anchor="ctr"/>
-          <a:lstStyle/>
-          <a:p>
-            <a:pPr algn="ctr"/>
-          </a:p>
-        </p:txBody>
-      </p:sp>
-      <p:sp>
-        <p:nvSpPr>
-          <p:cNvPr id="14" name="TextBox 13"/>
+          <p:cNvPr id="9" name="TextBox 8"/>
           <p:cNvSpPr txBox="1"/>
           <p:nvPr/>
         </p:nvSpPr>
         <p:spPr>
           <a:xfrm>
-            <a:off x="9144000" y="2194560"/>
-            <a:ext cx="2651760" cy="1097280"/>
+            <a:off x="9144000" y="2148840"/>
+            <a:ext cx="2651760" cy="1005840"/>
           </a:xfrm>
           <a:prstGeom prst="rect">
             <a:avLst/>
@@ -5412,7 +4718,7 @@
             <a:r>
               <a:rPr sz="2400" b="1">
                 <a:solidFill>
-                  <a:srgbClr val="122033"/>
+                  <a:srgbClr val="0D223B"/>
                 </a:solidFill>
                 <a:latin typeface="Calibri"/>
               </a:rPr>
@@ -5420,7 +4726,7 @@
             </a:r>
           </a:p>
           <a:p>
-            <a:pPr algn="l">
+            <a:pPr>
               <a:spcBef>
                 <a:spcPts val="600"/>
               </a:spcBef>
@@ -5431,7 +4737,7 @@
             <a:r>
               <a:rPr sz="1100" b="0">
                 <a:solidFill>
-                  <a:srgbClr val="4A6074"/>
+                  <a:srgbClr val="28394A"/>
                 </a:solidFill>
                 <a:latin typeface="Calibri"/>
               </a:rPr>
@@ -5442,56 +4748,13 @@
       </p:sp>
       <p:sp>
         <p:nvSpPr>
-          <p:cNvPr id="15" name="Rectangle 14"/>
-          <p:cNvSpPr/>
-          <p:nvPr/>
-        </p:nvSpPr>
-        <p:spPr>
-          <a:xfrm>
-            <a:off x="9144000" y="2148840"/>
-            <a:ext cx="2468880" cy="13716"/>
-          </a:xfrm>
-          <a:prstGeom prst="rect">
-            <a:avLst/>
-          </a:prstGeom>
-          <a:solidFill>
-            <a:srgbClr val="D0D8E2"/>
-          </a:solidFill>
-          <a:ln>
-            <a:noFill/>
-          </a:ln>
-        </p:spPr>
-        <p:style>
-          <a:lnRef idx="1">
-            <a:schemeClr val="accent1"/>
-          </a:lnRef>
-          <a:fillRef idx="3">
-            <a:schemeClr val="accent1"/>
-          </a:fillRef>
-          <a:effectRef idx="2">
-            <a:schemeClr val="accent1"/>
-          </a:effectRef>
-          <a:fontRef idx="minor">
-            <a:schemeClr val="lt1"/>
-          </a:fontRef>
-        </p:style>
-        <p:txBody>
-          <a:bodyPr rtlCol="0" anchor="ctr"/>
-          <a:lstStyle/>
-          <a:p>
-            <a:pPr algn="ctr"/>
-          </a:p>
-        </p:txBody>
-      </p:sp>
-      <p:sp>
-        <p:nvSpPr>
-          <p:cNvPr id="16" name="TextBox 15"/>
+          <p:cNvPr id="10" name="TextBox 9"/>
           <p:cNvSpPr txBox="1"/>
           <p:nvPr/>
         </p:nvSpPr>
         <p:spPr>
           <a:xfrm>
-            <a:off x="640080" y="3566160"/>
+            <a:off x="640080" y="3383280"/>
             <a:ext cx="5303520" cy="685800"/>
           </a:xfrm>
           <a:prstGeom prst="rect">
@@ -5508,15 +4771,15 @@
             <a:r>
               <a:rPr sz="1200" b="1">
                 <a:solidFill>
-                  <a:srgbClr val="122033"/>
-                </a:solidFill>
-                <a:latin typeface="Calibri"/>
-              </a:rPr>
-              <a:t>Стратегическое положение</a:t>
-            </a:r>
-          </a:p>
-          <a:p>
-            <a:pPr algn="l">
+                  <a:srgbClr val="0D223B"/>
+                </a:solidFill>
+                <a:latin typeface="Calibri"/>
+              </a:rPr>
+              <a:t>»  Стратегическое положение</a:t>
+            </a:r>
+          </a:p>
+          <a:p>
+            <a:pPr>
               <a:spcBef>
                 <a:spcPts val="200"/>
               </a:spcBef>
@@ -5527,7 +4790,7 @@
             <a:r>
               <a:rPr sz="1200" b="0">
                 <a:solidFill>
-                  <a:srgbClr val="4A6074"/>
+                  <a:srgbClr val="28394A"/>
                 </a:solidFill>
                 <a:latin typeface="Calibri"/>
               </a:rPr>
@@ -5538,13 +4801,13 @@
       </p:sp>
       <p:sp>
         <p:nvSpPr>
-          <p:cNvPr id="17" name="TextBox 16"/>
+          <p:cNvPr id="11" name="TextBox 10"/>
           <p:cNvSpPr txBox="1"/>
           <p:nvPr/>
         </p:nvSpPr>
         <p:spPr>
           <a:xfrm>
-            <a:off x="6400800" y="3566160"/>
+            <a:off x="6400800" y="3383280"/>
             <a:ext cx="5029200" cy="685800"/>
           </a:xfrm>
           <a:prstGeom prst="rect">
@@ -5561,15 +4824,15 @@
             <a:r>
               <a:rPr sz="1200" b="1">
                 <a:solidFill>
-                  <a:srgbClr val="122033"/>
-                </a:solidFill>
-                <a:latin typeface="Calibri"/>
-              </a:rPr>
-              <a:t>Всемирные игры кочевников</a:t>
-            </a:r>
-          </a:p>
-          <a:p>
-            <a:pPr algn="l">
+                  <a:srgbClr val="0D223B"/>
+                </a:solidFill>
+                <a:latin typeface="Calibri"/>
+              </a:rPr>
+              <a:t>»  Всемирные игры кочевников</a:t>
+            </a:r>
+          </a:p>
+          <a:p>
+            <a:pPr>
               <a:spcBef>
                 <a:spcPts val="200"/>
               </a:spcBef>
@@ -5580,24 +4843,24 @@
             <a:r>
               <a:rPr sz="1200" b="0">
                 <a:solidFill>
-                  <a:srgbClr val="4A6074"/>
-                </a:solidFill>
-                <a:latin typeface="Calibri"/>
-              </a:rPr>
-              <a:t>Глобальная витрина культуры и soft power Кыргызстана</a:t>
-            </a:r>
-          </a:p>
-        </p:txBody>
-      </p:sp>
-      <p:sp>
-        <p:nvSpPr>
-          <p:cNvPr id="18" name="TextBox 17"/>
+                  <a:srgbClr val="28394A"/>
+                </a:solidFill>
+                <a:latin typeface="Calibri"/>
+              </a:rPr>
+              <a:t>Глобальная витрина культуры и soft power</a:t>
+            </a:r>
+          </a:p>
+        </p:txBody>
+      </p:sp>
+      <p:sp>
+        <p:nvSpPr>
+          <p:cNvPr id="12" name="TextBox 11"/>
           <p:cNvSpPr txBox="1"/>
           <p:nvPr/>
         </p:nvSpPr>
         <p:spPr>
           <a:xfrm>
-            <a:off x="640080" y="4343400"/>
+            <a:off x="640080" y="4160520"/>
             <a:ext cx="5303520" cy="685800"/>
           </a:xfrm>
           <a:prstGeom prst="rect">
@@ -5614,15 +4877,15 @@
             <a:r>
               <a:rPr sz="1200" b="1">
                 <a:solidFill>
-                  <a:srgbClr val="122033"/>
-                </a:solidFill>
-                <a:latin typeface="Calibri"/>
-              </a:rPr>
-              <a:t>Соседи</a:t>
-            </a:r>
-          </a:p>
-          <a:p>
-            <a:pPr algn="l">
+                  <a:srgbClr val="0D223B"/>
+                </a:solidFill>
+                <a:latin typeface="Calibri"/>
+              </a:rPr>
+              <a:t>»  Соседи</a:t>
+            </a:r>
+          </a:p>
+          <a:p>
+            <a:pPr>
               <a:spcBef>
                 <a:spcPts val="200"/>
               </a:spcBef>
@@ -5633,7 +4896,7 @@
             <a:r>
               <a:rPr sz="1200" b="0">
                 <a:solidFill>
-                  <a:srgbClr val="4A6074"/>
+                  <a:srgbClr val="28394A"/>
                 </a:solidFill>
                 <a:latin typeface="Calibri"/>
               </a:rPr>
@@ -5644,13 +4907,13 @@
       </p:sp>
       <p:sp>
         <p:nvSpPr>
-          <p:cNvPr id="19" name="TextBox 18"/>
+          <p:cNvPr id="13" name="TextBox 12"/>
           <p:cNvSpPr txBox="1"/>
           <p:nvPr/>
         </p:nvSpPr>
         <p:spPr>
           <a:xfrm>
-            <a:off x="6400800" y="4343400"/>
+            <a:off x="6400800" y="4160520"/>
             <a:ext cx="5029200" cy="685800"/>
           </a:xfrm>
           <a:prstGeom prst="rect">
@@ -5667,15 +4930,15 @@
             <a:r>
               <a:rPr sz="1200" b="1">
                 <a:solidFill>
-                  <a:srgbClr val="122033"/>
-                </a:solidFill>
-                <a:latin typeface="Calibri"/>
-              </a:rPr>
-              <a:t>Цифровизация</a:t>
-            </a:r>
-          </a:p>
-          <a:p>
-            <a:pPr algn="l">
+                  <a:srgbClr val="0D223B"/>
+                </a:solidFill>
+                <a:latin typeface="Calibri"/>
+              </a:rPr>
+              <a:t>»  Цифровизация</a:t>
+            </a:r>
+          </a:p>
+          <a:p>
+            <a:pPr>
               <a:spcBef>
                 <a:spcPts val="200"/>
               </a:spcBef>
@@ -5686,24 +4949,24 @@
             <a:r>
               <a:rPr sz="1200" b="0">
                 <a:solidFill>
-                  <a:srgbClr val="4A6074"/>
-                </a:solidFill>
-                <a:latin typeface="Calibri"/>
-              </a:rPr>
-              <a:t>Госуслуги, таможня, реестры — устойчивый спрос на P3M</a:t>
-            </a:r>
-          </a:p>
-        </p:txBody>
-      </p:sp>
-      <p:sp>
-        <p:nvSpPr>
-          <p:cNvPr id="20" name="TextBox 19"/>
+                  <a:srgbClr val="28394A"/>
+                </a:solidFill>
+                <a:latin typeface="Calibri"/>
+              </a:rPr>
+              <a:t>Госуслуги, таможня, реестры — спрос на P3M</a:t>
+            </a:r>
+          </a:p>
+        </p:txBody>
+      </p:sp>
+      <p:sp>
+        <p:nvSpPr>
+          <p:cNvPr id="14" name="TextBox 13"/>
           <p:cNvSpPr txBox="1"/>
           <p:nvPr/>
         </p:nvSpPr>
         <p:spPr>
           <a:xfrm>
-            <a:off x="640080" y="5120640"/>
+            <a:off x="640080" y="4937759"/>
             <a:ext cx="5303520" cy="685800"/>
           </a:xfrm>
           <a:prstGeom prst="rect">
@@ -5720,15 +4983,15 @@
             <a:r>
               <a:rPr sz="1200" b="1">
                 <a:solidFill>
-                  <a:srgbClr val="122033"/>
-                </a:solidFill>
-                <a:latin typeface="Calibri"/>
-              </a:rPr>
-              <a:t>Природа и культура</a:t>
-            </a:r>
-          </a:p>
-          <a:p>
-            <a:pPr algn="l">
+                  <a:srgbClr val="0D223B"/>
+                </a:solidFill>
+                <a:latin typeface="Calibri"/>
+              </a:rPr>
+              <a:t>»  Природа и культура</a:t>
+            </a:r>
+          </a:p>
+          <a:p>
+            <a:pPr>
               <a:spcBef>
                 <a:spcPts val="200"/>
               </a:spcBef>
@@ -5739,7 +5002,7 @@
             <a:r>
               <a:rPr sz="1200" b="0">
                 <a:solidFill>
-                  <a:srgbClr val="4A6074"/>
+                  <a:srgbClr val="28394A"/>
                 </a:solidFill>
                 <a:latin typeface="Calibri"/>
               </a:rPr>
@@ -5750,13 +5013,13 @@
       </p:sp>
       <p:sp>
         <p:nvSpPr>
-          <p:cNvPr id="21" name="TextBox 20"/>
+          <p:cNvPr id="15" name="TextBox 14"/>
           <p:cNvSpPr txBox="1"/>
           <p:nvPr/>
         </p:nvSpPr>
         <p:spPr>
           <a:xfrm>
-            <a:off x="6400800" y="5120640"/>
+            <a:off x="6400800" y="4937759"/>
             <a:ext cx="5029200" cy="685800"/>
           </a:xfrm>
           <a:prstGeom prst="rect">
@@ -5773,15 +5036,15 @@
             <a:r>
               <a:rPr sz="1200" b="1">
                 <a:solidFill>
-                  <a:srgbClr val="122033"/>
-                </a:solidFill>
-                <a:latin typeface="Calibri"/>
-              </a:rPr>
-              <a:t>Возможность для IPMA</a:t>
-            </a:r>
-          </a:p>
-          <a:p>
-            <a:pPr algn="l">
+                  <a:srgbClr val="0D223B"/>
+                </a:solidFill>
+                <a:latin typeface="Calibri"/>
+              </a:rPr>
+              <a:t>»  Возможность для IPMA</a:t>
+            </a:r>
+          </a:p>
+          <a:p>
+            <a:pPr>
               <a:spcBef>
                 <a:spcPts val="200"/>
               </a:spcBef>
@@ -5792,18 +5055,18 @@
             <a:r>
               <a:rPr sz="1200" b="0">
                 <a:solidFill>
-                  <a:srgbClr val="4A6074"/>
-                </a:solidFill>
-                <a:latin typeface="Calibri"/>
-              </a:rPr>
-              <a:t>Растущая потребность в компетентных руководителях проектов</a:t>
+                  <a:srgbClr val="28394A"/>
+                </a:solidFill>
+                <a:latin typeface="Calibri"/>
+              </a:rPr>
+              <a:t>Потребность в компетентных руководителях проектов</a:t>
             </a:r>
           </a:p>
         </p:txBody>
       </p:sp>
       <p:pic>
         <p:nvPicPr>
-          <p:cNvPr id="22" name="Picture 21" descr="ipma-kr-emblem.png"/>
+          <p:cNvPr id="16" name="Picture 15" descr="ipma-kr-emblem.png"/>
           <p:cNvPicPr>
             <a:picLocks noChangeAspect="1"/>
           </p:cNvPicPr>
@@ -5818,7 +5081,7 @@
         <p:spPr>
           <a:xfrm>
             <a:off x="640080" y="6355080"/>
-            <a:ext cx="257362" cy="256032"/>
+            <a:ext cx="238979" cy="237744"/>
           </a:xfrm>
           <a:prstGeom prst="rect">
             <a:avLst/>
@@ -5827,14 +5090,14 @@
       </p:pic>
       <p:sp>
         <p:nvSpPr>
-          <p:cNvPr id="23" name="TextBox 22"/>
+          <p:cNvPr id="17" name="TextBox 16"/>
           <p:cNvSpPr txBox="1"/>
           <p:nvPr/>
         </p:nvSpPr>
         <p:spPr>
           <a:xfrm>
             <a:off x="1005840" y="6355080"/>
-            <a:ext cx="5486400" cy="274320"/>
+            <a:ext cx="6400800" cy="274320"/>
           </a:xfrm>
           <a:prstGeom prst="rect">
             <a:avLst/>
@@ -5851,18 +5114,18 @@
             <a:r>
               <a:rPr sz="1000" b="1">
                 <a:solidFill>
-                  <a:srgbClr val="7A8FA3"/>
-                </a:solidFill>
-                <a:latin typeface="Calibri"/>
-              </a:rPr>
-              <a:t>IPMA Kyrgyz Republic</a:t>
-            </a:r>
-          </a:p>
-        </p:txBody>
-      </p:sp>
-      <p:sp>
-        <p:nvSpPr>
-          <p:cNvPr id="24" name="TextBox 23"/>
+                  <a:srgbClr val="5C6B72"/>
+                </a:solidFill>
+                <a:latin typeface="Calibri"/>
+              </a:rPr>
+              <a:t>IPMA » Kyrgyz Republic</a:t>
+            </a:r>
+          </a:p>
+        </p:txBody>
+      </p:sp>
+      <p:sp>
+        <p:nvSpPr>
+          <p:cNvPr id="18" name="TextBox 17"/>
           <p:cNvSpPr txBox="1"/>
           <p:nvPr/>
         </p:nvSpPr>
@@ -5886,7 +5149,7 @@
             <a:r>
               <a:rPr sz="1000" b="1">
                 <a:solidFill>
-                  <a:srgbClr val="7A8FA3"/>
+                  <a:srgbClr val="5C6B72"/>
                 </a:solidFill>
                 <a:latin typeface="Calibri"/>
               </a:rPr>
@@ -5928,7 +5191,7 @@
             <a:avLst/>
           </a:prstGeom>
           <a:solidFill>
-            <a:srgbClr val="F5F8FB"/>
+            <a:srgbClr val="EEF2F1"/>
           </a:solidFill>
           <a:ln>
             <a:noFill/>
@@ -5958,25 +5221,130 @@
       </p:sp>
       <p:sp>
         <p:nvSpPr>
-          <p:cNvPr id="3" name="Oval 2"/>
+          <p:cNvPr id="3" name="TextBox 2"/>
+          <p:cNvSpPr txBox="1"/>
+          <p:nvPr/>
+        </p:nvSpPr>
+        <p:spPr>
+          <a:xfrm>
+            <a:off x="640080" y="502920"/>
+            <a:ext cx="10058400" cy="320040"/>
+          </a:xfrm>
+          <a:prstGeom prst="rect">
+            <a:avLst/>
+          </a:prstGeom>
+          <a:noFill/>
+        </p:spPr>
+        <p:txBody>
+          <a:bodyPr wrap="none">
+            <a:spAutoFit/>
+          </a:bodyPr>
+          <a:lstStyle/>
+          <a:p>
+            <a:pPr algn="l"/>
+            <a:r>
+              <a:rPr sz="1100" b="1">
+                <a:solidFill>
+                  <a:srgbClr val="1F7A34"/>
+                </a:solidFill>
+                <a:latin typeface="Calibri"/>
+              </a:rPr>
+              <a:t>04  »»  ЭКОНОМИКА</a:t>
+            </a:r>
+          </a:p>
+        </p:txBody>
+      </p:sp>
+      <p:sp>
+        <p:nvSpPr>
+          <p:cNvPr id="4" name="TextBox 3"/>
+          <p:cNvSpPr txBox="1"/>
+          <p:nvPr/>
+        </p:nvSpPr>
+        <p:spPr>
+          <a:xfrm>
+            <a:off x="640080" y="868680"/>
+            <a:ext cx="10058400" cy="640080"/>
+          </a:xfrm>
+          <a:prstGeom prst="rect">
+            <a:avLst/>
+          </a:prstGeom>
+          <a:noFill/>
+        </p:spPr>
+        <p:txBody>
+          <a:bodyPr wrap="none">
+            <a:spAutoFit/>
+          </a:bodyPr>
+          <a:lstStyle/>
+          <a:p>
+            <a:pPr algn="l"/>
+            <a:r>
+              <a:rPr sz="3000" b="1">
+                <a:solidFill>
+                  <a:srgbClr val="0D223B"/>
+                </a:solidFill>
+                <a:latin typeface="Calibri"/>
+              </a:rPr>
+              <a:t>Показатели и позиция в мире</a:t>
+            </a:r>
+          </a:p>
+        </p:txBody>
+      </p:sp>
+      <p:sp>
+        <p:nvSpPr>
+          <p:cNvPr id="5" name="TextBox 4"/>
+          <p:cNvSpPr txBox="1"/>
+          <p:nvPr/>
+        </p:nvSpPr>
+        <p:spPr>
+          <a:xfrm>
+            <a:off x="640080" y="1600200"/>
+            <a:ext cx="10515600" cy="365760"/>
+          </a:xfrm>
+          <a:prstGeom prst="rect">
+            <a:avLst/>
+          </a:prstGeom>
+          <a:noFill/>
+        </p:spPr>
+        <p:txBody>
+          <a:bodyPr wrap="none">
+            <a:spAutoFit/>
+          </a:bodyPr>
+          <a:lstStyle/>
+          <a:p>
+            <a:pPr algn="l"/>
+            <a:r>
+              <a:rPr sz="1400" b="0">
+                <a:solidFill>
+                  <a:srgbClr val="28394A"/>
+                </a:solidFill>
+                <a:latin typeface="Calibri"/>
+              </a:rPr>
+              <a:t>Один из самых быстрорастущих рынков региона</a:t>
+            </a:r>
+          </a:p>
+        </p:txBody>
+      </p:sp>
+      <p:sp>
+        <p:nvSpPr>
+          <p:cNvPr id="6" name="Rounded Rectangle 5"/>
           <p:cNvSpPr/>
           <p:nvPr/>
         </p:nvSpPr>
         <p:spPr>
           <a:xfrm>
-            <a:off x="7772400" y="-1371600"/>
-            <a:ext cx="5486400" cy="4114800"/>
-          </a:xfrm>
-          <a:prstGeom prst="ellipse">
+            <a:off x="640080" y="2194560"/>
+            <a:ext cx="3566160" cy="1325880"/>
+          </a:xfrm>
+          <a:prstGeom prst="roundRect">
             <a:avLst/>
           </a:prstGeom>
           <a:solidFill>
-            <a:srgbClr val="DCE6F2">
-              <a:alpha val="35000"/>
-            </a:srgbClr>
+            <a:srgbClr val="FFFFFF"/>
           </a:solidFill>
           <a:ln>
-            <a:noFill/>
+            <a:solidFill>
+              <a:srgbClr val="D9E2DF"/>
+            </a:solidFill>
           </a:ln>
         </p:spPr>
         <p:style>
@@ -6003,22 +5371,20 @@
       </p:sp>
       <p:sp>
         <p:nvSpPr>
-          <p:cNvPr id="4" name="Oval 3"/>
+          <p:cNvPr id="7" name="Rectangle 6"/>
           <p:cNvSpPr/>
           <p:nvPr/>
         </p:nvSpPr>
         <p:spPr>
           <a:xfrm>
-            <a:off x="-1828800" y="4114800"/>
-            <a:ext cx="5029200" cy="3657600"/>
-          </a:xfrm>
-          <a:prstGeom prst="ellipse">
+            <a:off x="640080" y="2377440"/>
+            <a:ext cx="73152" cy="960120"/>
+          </a:xfrm>
+          <a:prstGeom prst="rect">
             <a:avLst/>
           </a:prstGeom>
           <a:solidFill>
-            <a:srgbClr val="E3EBF4">
-              <a:alpha val="40000"/>
-            </a:srgbClr>
+            <a:srgbClr val="2F9E44"/>
           </a:solidFill>
           <a:ln>
             <a:noFill/>
@@ -6048,162 +5414,14 @@
       </p:sp>
       <p:sp>
         <p:nvSpPr>
-          <p:cNvPr id="5" name="TextBox 4"/>
+          <p:cNvPr id="8" name="TextBox 7"/>
           <p:cNvSpPr txBox="1"/>
           <p:nvPr/>
         </p:nvSpPr>
         <p:spPr>
           <a:xfrm>
-            <a:off x="640080" y="502920"/>
-            <a:ext cx="9144000" cy="320040"/>
-          </a:xfrm>
-          <a:prstGeom prst="rect">
-            <a:avLst/>
-          </a:prstGeom>
-          <a:noFill/>
-        </p:spPr>
-        <p:txBody>
-          <a:bodyPr wrap="none">
-            <a:spAutoFit/>
-          </a:bodyPr>
-          <a:lstStyle/>
-          <a:p>
-            <a:pPr algn="l"/>
-            <a:r>
-              <a:rPr sz="1100" b="1">
-                <a:solidFill>
-                  <a:srgbClr val="E62739"/>
-                </a:solidFill>
-                <a:latin typeface="Calibri"/>
-              </a:rPr>
-              <a:t>04  »  ЭКОНОМИКА</a:t>
-            </a:r>
-          </a:p>
-        </p:txBody>
-      </p:sp>
-      <p:sp>
-        <p:nvSpPr>
-          <p:cNvPr id="6" name="TextBox 5"/>
-          <p:cNvSpPr txBox="1"/>
-          <p:nvPr/>
-        </p:nvSpPr>
-        <p:spPr>
-          <a:xfrm>
-            <a:off x="640080" y="868680"/>
-            <a:ext cx="9144000" cy="731520"/>
-          </a:xfrm>
-          <a:prstGeom prst="rect">
-            <a:avLst/>
-          </a:prstGeom>
-          <a:noFill/>
-        </p:spPr>
-        <p:txBody>
-          <a:bodyPr wrap="none">
-            <a:spAutoFit/>
-          </a:bodyPr>
-          <a:lstStyle/>
-          <a:p>
-            <a:pPr algn="l"/>
-            <a:r>
-              <a:rPr sz="3200" b="1">
-                <a:solidFill>
-                  <a:srgbClr val="122033"/>
-                </a:solidFill>
-                <a:latin typeface="Calibri"/>
-              </a:rPr>
-              <a:t>Показатели и позиция в мире</a:t>
-            </a:r>
-          </a:p>
-        </p:txBody>
-      </p:sp>
-      <p:sp>
-        <p:nvSpPr>
-          <p:cNvPr id="7" name="TextBox 6"/>
-          <p:cNvSpPr txBox="1"/>
-          <p:nvPr/>
-        </p:nvSpPr>
-        <p:spPr>
-          <a:xfrm>
-            <a:off x="640080" y="1645920"/>
-            <a:ext cx="10515600" cy="411480"/>
-          </a:xfrm>
-          <a:prstGeom prst="rect">
-            <a:avLst/>
-          </a:prstGeom>
-          <a:noFill/>
-        </p:spPr>
-        <p:txBody>
-          <a:bodyPr wrap="none">
-            <a:spAutoFit/>
-          </a:bodyPr>
-          <a:lstStyle/>
-          <a:p>
-            <a:pPr algn="l"/>
-            <a:r>
-              <a:rPr sz="1400" b="0">
-                <a:solidFill>
-                  <a:srgbClr val="4A6074"/>
-                </a:solidFill>
-                <a:latin typeface="Calibri"/>
-              </a:rPr>
-              <a:t>Один из самых быстрорастущих рынков региона — с активной стройкой, сервисами и цифровой повесткой</a:t>
-            </a:r>
-          </a:p>
-        </p:txBody>
-      </p:sp>
-      <p:sp>
-        <p:nvSpPr>
-          <p:cNvPr id="8" name="Rectangle 7"/>
-          <p:cNvSpPr/>
-          <p:nvPr/>
-        </p:nvSpPr>
-        <p:spPr>
-          <a:xfrm>
-            <a:off x="640080" y="2286000"/>
-            <a:ext cx="3200400" cy="36576"/>
-          </a:xfrm>
-          <a:prstGeom prst="rect">
-            <a:avLst/>
-          </a:prstGeom>
-          <a:solidFill>
-            <a:srgbClr val="E62739"/>
-          </a:solidFill>
-          <a:ln>
-            <a:noFill/>
-          </a:ln>
-        </p:spPr>
-        <p:style>
-          <a:lnRef idx="1">
-            <a:schemeClr val="accent1"/>
-          </a:lnRef>
-          <a:fillRef idx="3">
-            <a:schemeClr val="accent1"/>
-          </a:fillRef>
-          <a:effectRef idx="2">
-            <a:schemeClr val="accent1"/>
-          </a:effectRef>
-          <a:fontRef idx="minor">
-            <a:schemeClr val="lt1"/>
-          </a:fontRef>
-        </p:style>
-        <p:txBody>
-          <a:bodyPr rtlCol="0" anchor="ctr"/>
-          <a:lstStyle/>
-          <a:p>
-            <a:pPr algn="ctr"/>
-          </a:p>
-        </p:txBody>
-      </p:sp>
-      <p:sp>
-        <p:nvSpPr>
-          <p:cNvPr id="9" name="TextBox 8"/>
-          <p:cNvSpPr txBox="1"/>
-          <p:nvPr/>
-        </p:nvSpPr>
-        <p:spPr>
-          <a:xfrm>
-            <a:off x="640080" y="2423160"/>
-            <a:ext cx="3383280" cy="1188720"/>
+            <a:off x="868680" y="2423160"/>
+            <a:ext cx="3108960" cy="1005840"/>
           </a:xfrm>
           <a:prstGeom prst="rect">
             <a:avLst/>
@@ -6217,9 +5435,9 @@
           <a:lstStyle/>
           <a:p>
             <a:r>
-              <a:rPr sz="2600" b="1">
-                <a:solidFill>
-                  <a:srgbClr val="122033"/>
+              <a:rPr sz="2200" b="1">
+                <a:solidFill>
+                  <a:srgbClr val="0D223B"/>
                 </a:solidFill>
                 <a:latin typeface="Calibri"/>
               </a:rPr>
@@ -6227,7 +5445,7 @@
             </a:r>
           </a:p>
           <a:p>
-            <a:pPr algn="l">
+            <a:pPr>
               <a:spcBef>
                 <a:spcPts val="600"/>
               </a:spcBef>
@@ -6238,34 +5456,36 @@
             <a:r>
               <a:rPr sz="1200" b="0">
                 <a:solidFill>
-                  <a:srgbClr val="4A6074"/>
-                </a:solidFill>
-                <a:latin typeface="Calibri"/>
-              </a:rPr>
-              <a:t>Рост реального ВВП в 2025 (оценки МВФ / Всемирного банка)</a:t>
-            </a:r>
-          </a:p>
-        </p:txBody>
-      </p:sp>
-      <p:sp>
-        <p:nvSpPr>
-          <p:cNvPr id="10" name="Rectangle 9"/>
+                  <a:srgbClr val="28394A"/>
+                </a:solidFill>
+                <a:latin typeface="Calibri"/>
+              </a:rPr>
+              <a:t>Рост реального ВВП в 2025 (МВФ / ВБ)</a:t>
+            </a:r>
+          </a:p>
+        </p:txBody>
+      </p:sp>
+      <p:sp>
+        <p:nvSpPr>
+          <p:cNvPr id="9" name="Rounded Rectangle 8"/>
           <p:cNvSpPr/>
           <p:nvPr/>
         </p:nvSpPr>
         <p:spPr>
           <a:xfrm>
-            <a:off x="4389120" y="2286000"/>
-            <a:ext cx="3200400" cy="36576"/>
-          </a:xfrm>
-          <a:prstGeom prst="rect">
+            <a:off x="4434840" y="2194560"/>
+            <a:ext cx="3566160" cy="1325880"/>
+          </a:xfrm>
+          <a:prstGeom prst="roundRect">
             <a:avLst/>
           </a:prstGeom>
           <a:solidFill>
-            <a:srgbClr val="D4B000"/>
+            <a:srgbClr val="FFFFFF"/>
           </a:solidFill>
           <a:ln>
-            <a:noFill/>
+            <a:solidFill>
+              <a:srgbClr val="D9E2DF"/>
+            </a:solidFill>
           </a:ln>
         </p:spPr>
         <p:style>
@@ -6292,14 +5512,57 @@
       </p:sp>
       <p:sp>
         <p:nvSpPr>
+          <p:cNvPr id="10" name="Rectangle 9"/>
+          <p:cNvSpPr/>
+          <p:nvPr/>
+        </p:nvSpPr>
+        <p:spPr>
+          <a:xfrm>
+            <a:off x="4434840" y="2377440"/>
+            <a:ext cx="73152" cy="960120"/>
+          </a:xfrm>
+          <a:prstGeom prst="rect">
+            <a:avLst/>
+          </a:prstGeom>
+          <a:solidFill>
+            <a:srgbClr val="DD9130"/>
+          </a:solidFill>
+          <a:ln>
+            <a:noFill/>
+          </a:ln>
+        </p:spPr>
+        <p:style>
+          <a:lnRef idx="1">
+            <a:schemeClr val="accent1"/>
+          </a:lnRef>
+          <a:fillRef idx="3">
+            <a:schemeClr val="accent1"/>
+          </a:fillRef>
+          <a:effectRef idx="2">
+            <a:schemeClr val="accent1"/>
+          </a:effectRef>
+          <a:fontRef idx="minor">
+            <a:schemeClr val="lt1"/>
+          </a:fontRef>
+        </p:style>
+        <p:txBody>
+          <a:bodyPr rtlCol="0" anchor="ctr"/>
+          <a:lstStyle/>
+          <a:p>
+            <a:pPr algn="ctr"/>
+          </a:p>
+        </p:txBody>
+      </p:sp>
+      <p:sp>
+        <p:nvSpPr>
           <p:cNvPr id="11" name="TextBox 10"/>
           <p:cNvSpPr txBox="1"/>
           <p:nvPr/>
         </p:nvSpPr>
         <p:spPr>
           <a:xfrm>
-            <a:off x="4389120" y="2423160"/>
-            <a:ext cx="3383280" cy="1188720"/>
+            <a:off x="4663440" y="2423160"/>
+            <a:ext cx="3108960" cy="1005840"/>
           </a:xfrm>
           <a:prstGeom prst="rect">
             <a:avLst/>
@@ -6313,9 +5576,9 @@
           <a:lstStyle/>
           <a:p>
             <a:r>
-              <a:rPr sz="2600" b="1">
-                <a:solidFill>
-                  <a:srgbClr val="122033"/>
+              <a:rPr sz="2200" b="1">
+                <a:solidFill>
+                  <a:srgbClr val="0D223B"/>
                 </a:solidFill>
                 <a:latin typeface="Calibri"/>
               </a:rPr>
@@ -6323,7 +5586,7 @@
             </a:r>
           </a:p>
           <a:p>
-            <a:pPr algn="l">
+            <a:pPr>
               <a:spcBef>
                 <a:spcPts val="600"/>
               </a:spcBef>
@@ -6334,34 +5597,36 @@
             <a:r>
               <a:rPr sz="1200" b="0">
                 <a:solidFill>
-                  <a:srgbClr val="4A6074"/>
-                </a:solidFill>
-                <a:latin typeface="Calibri"/>
-              </a:rPr>
-              <a:t>Номинальный ВВП · рост ВВП на душу населения в последние годы</a:t>
-            </a:r>
-          </a:p>
-        </p:txBody>
-      </p:sp>
-      <p:sp>
-        <p:nvSpPr>
-          <p:cNvPr id="12" name="Rectangle 11"/>
+                  <a:srgbClr val="28394A"/>
+                </a:solidFill>
+                <a:latin typeface="Calibri"/>
+              </a:rPr>
+              <a:t>Номинальный ВВП</a:t>
+            </a:r>
+          </a:p>
+        </p:txBody>
+      </p:sp>
+      <p:sp>
+        <p:nvSpPr>
+          <p:cNvPr id="12" name="Rounded Rectangle 11"/>
           <p:cNvSpPr/>
           <p:nvPr/>
         </p:nvSpPr>
         <p:spPr>
           <a:xfrm>
-            <a:off x="8138159" y="2286000"/>
-            <a:ext cx="3200400" cy="36576"/>
-          </a:xfrm>
-          <a:prstGeom prst="rect">
+            <a:off x="8229600" y="2194560"/>
+            <a:ext cx="3566160" cy="1325880"/>
+          </a:xfrm>
+          <a:prstGeom prst="roundRect">
             <a:avLst/>
           </a:prstGeom>
           <a:solidFill>
-            <a:srgbClr val="1F8F5F"/>
+            <a:srgbClr val="FFFFFF"/>
           </a:solidFill>
           <a:ln>
-            <a:noFill/>
+            <a:solidFill>
+              <a:srgbClr val="D9E2DF"/>
+            </a:solidFill>
           </a:ln>
         </p:spPr>
         <p:style>
@@ -6388,14 +5653,57 @@
       </p:sp>
       <p:sp>
         <p:nvSpPr>
-          <p:cNvPr id="13" name="TextBox 12"/>
+          <p:cNvPr id="13" name="Rectangle 12"/>
+          <p:cNvSpPr/>
+          <p:nvPr/>
+        </p:nvSpPr>
+        <p:spPr>
+          <a:xfrm>
+            <a:off x="8229600" y="2377440"/>
+            <a:ext cx="73152" cy="960120"/>
+          </a:xfrm>
+          <a:prstGeom prst="rect">
+            <a:avLst/>
+          </a:prstGeom>
+          <a:solidFill>
+            <a:srgbClr val="0D223B"/>
+          </a:solidFill>
+          <a:ln>
+            <a:noFill/>
+          </a:ln>
+        </p:spPr>
+        <p:style>
+          <a:lnRef idx="1">
+            <a:schemeClr val="accent1"/>
+          </a:lnRef>
+          <a:fillRef idx="3">
+            <a:schemeClr val="accent1"/>
+          </a:fillRef>
+          <a:effectRef idx="2">
+            <a:schemeClr val="accent1"/>
+          </a:effectRef>
+          <a:fontRef idx="minor">
+            <a:schemeClr val="lt1"/>
+          </a:fontRef>
+        </p:style>
+        <p:txBody>
+          <a:bodyPr rtlCol="0" anchor="ctr"/>
+          <a:lstStyle/>
+          <a:p>
+            <a:pPr algn="ctr"/>
+          </a:p>
+        </p:txBody>
+      </p:sp>
+      <p:sp>
+        <p:nvSpPr>
+          <p:cNvPr id="14" name="TextBox 13"/>
           <p:cNvSpPr txBox="1"/>
           <p:nvPr/>
         </p:nvSpPr>
         <p:spPr>
           <a:xfrm>
-            <a:off x="8138159" y="2423160"/>
-            <a:ext cx="3383280" cy="1188720"/>
+            <a:off x="8458200" y="2423160"/>
+            <a:ext cx="3108960" cy="1005840"/>
           </a:xfrm>
           <a:prstGeom prst="rect">
             <a:avLst/>
@@ -6409,9 +5717,9 @@
           <a:lstStyle/>
           <a:p>
             <a:r>
-              <a:rPr sz="2600" b="1">
-                <a:solidFill>
-                  <a:srgbClr val="122033"/>
+              <a:rPr sz="2200" b="1">
+                <a:solidFill>
+                  <a:srgbClr val="0D223B"/>
                 </a:solidFill>
                 <a:latin typeface="Calibri"/>
               </a:rPr>
@@ -6419,7 +5727,7 @@
             </a:r>
           </a:p>
           <a:p>
-            <a:pPr algn="l">
+            <a:pPr>
               <a:spcBef>
                 <a:spcPts val="600"/>
               </a:spcBef>
@@ -6430,34 +5738,36 @@
             <a:r>
               <a:rPr sz="1200" b="0">
                 <a:solidFill>
-                  <a:srgbClr val="4A6074"/>
-                </a:solidFill>
-                <a:latin typeface="Calibri"/>
-              </a:rPr>
-              <a:t>Среди лидеров по темпам роста в 2021–2025 (оценка МВФ)</a:t>
-            </a:r>
-          </a:p>
-        </p:txBody>
-      </p:sp>
-      <p:sp>
-        <p:nvSpPr>
-          <p:cNvPr id="14" name="Rectangle 13"/>
+                  <a:srgbClr val="28394A"/>
+                </a:solidFill>
+                <a:latin typeface="Calibri"/>
+              </a:rPr>
+              <a:t>Лидеры роста 2021–2025 (МВФ)</a:t>
+            </a:r>
+          </a:p>
+        </p:txBody>
+      </p:sp>
+      <p:sp>
+        <p:nvSpPr>
+          <p:cNvPr id="15" name="Rounded Rectangle 14"/>
           <p:cNvSpPr/>
           <p:nvPr/>
         </p:nvSpPr>
         <p:spPr>
           <a:xfrm>
-            <a:off x="640080" y="3840480"/>
-            <a:ext cx="3200400" cy="36576"/>
-          </a:xfrm>
-          <a:prstGeom prst="rect">
+            <a:off x="640080" y="3794760"/>
+            <a:ext cx="3566160" cy="1325880"/>
+          </a:xfrm>
+          <a:prstGeom prst="roundRect">
             <a:avLst/>
           </a:prstGeom>
           <a:solidFill>
-            <a:srgbClr val="E62739"/>
+            <a:srgbClr val="FFFFFF"/>
           </a:solidFill>
           <a:ln>
-            <a:noFill/>
+            <a:solidFill>
+              <a:srgbClr val="D9E2DF"/>
+            </a:solidFill>
           </a:ln>
         </p:spPr>
         <p:style>
@@ -6484,14 +5794,57 @@
       </p:sp>
       <p:sp>
         <p:nvSpPr>
-          <p:cNvPr id="15" name="TextBox 14"/>
+          <p:cNvPr id="16" name="Rectangle 15"/>
+          <p:cNvSpPr/>
+          <p:nvPr/>
+        </p:nvSpPr>
+        <p:spPr>
+          <a:xfrm>
+            <a:off x="640080" y="3977640"/>
+            <a:ext cx="73152" cy="960120"/>
+          </a:xfrm>
+          <a:prstGeom prst="rect">
+            <a:avLst/>
+          </a:prstGeom>
+          <a:solidFill>
+            <a:srgbClr val="2F9E44"/>
+          </a:solidFill>
+          <a:ln>
+            <a:noFill/>
+          </a:ln>
+        </p:spPr>
+        <p:style>
+          <a:lnRef idx="1">
+            <a:schemeClr val="accent1"/>
+          </a:lnRef>
+          <a:fillRef idx="3">
+            <a:schemeClr val="accent1"/>
+          </a:fillRef>
+          <a:effectRef idx="2">
+            <a:schemeClr val="accent1"/>
+          </a:effectRef>
+          <a:fontRef idx="minor">
+            <a:schemeClr val="lt1"/>
+          </a:fontRef>
+        </p:style>
+        <p:txBody>
+          <a:bodyPr rtlCol="0" anchor="ctr"/>
+          <a:lstStyle/>
+          <a:p>
+            <a:pPr algn="ctr"/>
+          </a:p>
+        </p:txBody>
+      </p:sp>
+      <p:sp>
+        <p:nvSpPr>
+          <p:cNvPr id="17" name="TextBox 16"/>
           <p:cNvSpPr txBox="1"/>
           <p:nvPr/>
         </p:nvSpPr>
         <p:spPr>
           <a:xfrm>
-            <a:off x="640080" y="3977640"/>
-            <a:ext cx="3383280" cy="1188720"/>
+            <a:off x="868680" y="4023360"/>
+            <a:ext cx="3108960" cy="1005840"/>
           </a:xfrm>
           <a:prstGeom prst="rect">
             <a:avLst/>
@@ -6505,9 +5858,9 @@
           <a:lstStyle/>
           <a:p>
             <a:r>
-              <a:rPr sz="2600" b="1">
-                <a:solidFill>
-                  <a:srgbClr val="122033"/>
+              <a:rPr sz="2200" b="1">
+                <a:solidFill>
+                  <a:srgbClr val="0D223B"/>
                 </a:solidFill>
                 <a:latin typeface="Calibri"/>
               </a:rPr>
@@ -6515,7 +5868,7 @@
             </a:r>
           </a:p>
           <a:p>
-            <a:pPr algn="l">
+            <a:pPr>
               <a:spcBef>
                 <a:spcPts val="600"/>
               </a:spcBef>
@@ -6526,34 +5879,36 @@
             <a:r>
               <a:rPr sz="1200" b="0">
                 <a:solidFill>
-                  <a:srgbClr val="4A6074"/>
-                </a:solidFill>
-                <a:latin typeface="Calibri"/>
-              </a:rPr>
-              <a:t>Один из драйверов роста · инфраструктура и инвестиции</a:t>
-            </a:r>
-          </a:p>
-        </p:txBody>
-      </p:sp>
-      <p:sp>
-        <p:nvSpPr>
-          <p:cNvPr id="16" name="Rectangle 15"/>
+                  <a:srgbClr val="28394A"/>
+                </a:solidFill>
+                <a:latin typeface="Calibri"/>
+              </a:rPr>
+              <a:t>Инфраструктура и инвестиции</a:t>
+            </a:r>
+          </a:p>
+        </p:txBody>
+      </p:sp>
+      <p:sp>
+        <p:nvSpPr>
+          <p:cNvPr id="18" name="Rounded Rectangle 17"/>
           <p:cNvSpPr/>
           <p:nvPr/>
         </p:nvSpPr>
         <p:spPr>
           <a:xfrm>
-            <a:off x="4389120" y="3840480"/>
-            <a:ext cx="3200400" cy="36576"/>
-          </a:xfrm>
-          <a:prstGeom prst="rect">
+            <a:off x="4434840" y="3794760"/>
+            <a:ext cx="3566160" cy="1325880"/>
+          </a:xfrm>
+          <a:prstGeom prst="roundRect">
             <a:avLst/>
           </a:prstGeom>
           <a:solidFill>
-            <a:srgbClr val="D4B000"/>
+            <a:srgbClr val="FFFFFF"/>
           </a:solidFill>
           <a:ln>
-            <a:noFill/>
+            <a:solidFill>
+              <a:srgbClr val="D9E2DF"/>
+            </a:solidFill>
           </a:ln>
         </p:spPr>
         <p:style>
@@ -6580,14 +5935,57 @@
       </p:sp>
       <p:sp>
         <p:nvSpPr>
-          <p:cNvPr id="17" name="TextBox 16"/>
+          <p:cNvPr id="19" name="Rectangle 18"/>
+          <p:cNvSpPr/>
+          <p:nvPr/>
+        </p:nvSpPr>
+        <p:spPr>
+          <a:xfrm>
+            <a:off x="4434840" y="3977640"/>
+            <a:ext cx="73152" cy="960120"/>
+          </a:xfrm>
+          <a:prstGeom prst="rect">
+            <a:avLst/>
+          </a:prstGeom>
+          <a:solidFill>
+            <a:srgbClr val="DD9130"/>
+          </a:solidFill>
+          <a:ln>
+            <a:noFill/>
+          </a:ln>
+        </p:spPr>
+        <p:style>
+          <a:lnRef idx="1">
+            <a:schemeClr val="accent1"/>
+          </a:lnRef>
+          <a:fillRef idx="3">
+            <a:schemeClr val="accent1"/>
+          </a:fillRef>
+          <a:effectRef idx="2">
+            <a:schemeClr val="accent1"/>
+          </a:effectRef>
+          <a:fontRef idx="minor">
+            <a:schemeClr val="lt1"/>
+          </a:fontRef>
+        </p:style>
+        <p:txBody>
+          <a:bodyPr rtlCol="0" anchor="ctr"/>
+          <a:lstStyle/>
+          <a:p>
+            <a:pPr algn="ctr"/>
+          </a:p>
+        </p:txBody>
+      </p:sp>
+      <p:sp>
+        <p:nvSpPr>
+          <p:cNvPr id="20" name="TextBox 19"/>
           <p:cNvSpPr txBox="1"/>
           <p:nvPr/>
         </p:nvSpPr>
         <p:spPr>
           <a:xfrm>
-            <a:off x="4389120" y="3977640"/>
-            <a:ext cx="3383280" cy="1188720"/>
+            <a:off x="4663440" y="4023360"/>
+            <a:ext cx="3108960" cy="1005840"/>
           </a:xfrm>
           <a:prstGeom prst="rect">
             <a:avLst/>
@@ -6601,9 +5999,9 @@
           <a:lstStyle/>
           <a:p>
             <a:r>
-              <a:rPr sz="2600" b="1">
-                <a:solidFill>
-                  <a:srgbClr val="122033"/>
+              <a:rPr sz="2200" b="1">
+                <a:solidFill>
+                  <a:srgbClr val="0D223B"/>
                 </a:solidFill>
                 <a:latin typeface="Calibri"/>
               </a:rPr>
@@ -6611,7 +6009,7 @@
             </a:r>
           </a:p>
           <a:p>
-            <a:pPr algn="l">
+            <a:pPr>
               <a:spcBef>
                 <a:spcPts val="600"/>
               </a:spcBef>
@@ -6622,34 +6020,36 @@
             <a:r>
               <a:rPr sz="1200" b="0">
                 <a:solidFill>
-                  <a:srgbClr val="4A6074"/>
-                </a:solidFill>
-                <a:latin typeface="Calibri"/>
-              </a:rPr>
-              <a:t>Налоги, таможня, госуслуги · цифровая инфраструктура и AI-повестка</a:t>
-            </a:r>
-          </a:p>
-        </p:txBody>
-      </p:sp>
-      <p:sp>
-        <p:nvSpPr>
-          <p:cNvPr id="18" name="Rectangle 17"/>
+                  <a:srgbClr val="28394A"/>
+                </a:solidFill>
+                <a:latin typeface="Calibri"/>
+              </a:rPr>
+              <a:t>Госуслуги, таможня, AI-повестка</a:t>
+            </a:r>
+          </a:p>
+        </p:txBody>
+      </p:sp>
+      <p:sp>
+        <p:nvSpPr>
+          <p:cNvPr id="21" name="Rounded Rectangle 20"/>
           <p:cNvSpPr/>
           <p:nvPr/>
         </p:nvSpPr>
         <p:spPr>
           <a:xfrm>
-            <a:off x="8138159" y="3840480"/>
-            <a:ext cx="3200400" cy="36576"/>
-          </a:xfrm>
-          <a:prstGeom prst="rect">
+            <a:off x="8229600" y="3794760"/>
+            <a:ext cx="3566160" cy="1325880"/>
+          </a:xfrm>
+          <a:prstGeom prst="roundRect">
             <a:avLst/>
           </a:prstGeom>
           <a:solidFill>
-            <a:srgbClr val="1F8F5F"/>
+            <a:srgbClr val="FFFFFF"/>
           </a:solidFill>
           <a:ln>
-            <a:noFill/>
+            <a:solidFill>
+              <a:srgbClr val="D9E2DF"/>
+            </a:solidFill>
           </a:ln>
         </p:spPr>
         <p:style>
@@ -6676,14 +6076,57 @@
       </p:sp>
       <p:sp>
         <p:nvSpPr>
-          <p:cNvPr id="19" name="TextBox 18"/>
+          <p:cNvPr id="22" name="Rectangle 21"/>
+          <p:cNvSpPr/>
+          <p:nvPr/>
+        </p:nvSpPr>
+        <p:spPr>
+          <a:xfrm>
+            <a:off x="8229600" y="3977640"/>
+            <a:ext cx="73152" cy="960120"/>
+          </a:xfrm>
+          <a:prstGeom prst="rect">
+            <a:avLst/>
+          </a:prstGeom>
+          <a:solidFill>
+            <a:srgbClr val="0D223B"/>
+          </a:solidFill>
+          <a:ln>
+            <a:noFill/>
+          </a:ln>
+        </p:spPr>
+        <p:style>
+          <a:lnRef idx="1">
+            <a:schemeClr val="accent1"/>
+          </a:lnRef>
+          <a:fillRef idx="3">
+            <a:schemeClr val="accent1"/>
+          </a:fillRef>
+          <a:effectRef idx="2">
+            <a:schemeClr val="accent1"/>
+          </a:effectRef>
+          <a:fontRef idx="minor">
+            <a:schemeClr val="lt1"/>
+          </a:fontRef>
+        </p:style>
+        <p:txBody>
+          <a:bodyPr rtlCol="0" anchor="ctr"/>
+          <a:lstStyle/>
+          <a:p>
+            <a:pPr algn="ctr"/>
+          </a:p>
+        </p:txBody>
+      </p:sp>
+      <p:sp>
+        <p:nvSpPr>
+          <p:cNvPr id="23" name="TextBox 22"/>
           <p:cNvSpPr txBox="1"/>
           <p:nvPr/>
         </p:nvSpPr>
         <p:spPr>
           <a:xfrm>
-            <a:off x="8138159" y="3977640"/>
-            <a:ext cx="3383280" cy="1188720"/>
+            <a:off x="8458200" y="4023360"/>
+            <a:ext cx="3108960" cy="1005840"/>
           </a:xfrm>
           <a:prstGeom prst="rect">
             <a:avLst/>
@@ -6697,9 +6140,9 @@
           <a:lstStyle/>
           <a:p>
             <a:r>
-              <a:rPr sz="2600" b="1">
-                <a:solidFill>
-                  <a:srgbClr val="122033"/>
+              <a:rPr sz="2200" b="1">
+                <a:solidFill>
+                  <a:srgbClr val="0D223B"/>
                 </a:solidFill>
                 <a:latin typeface="Calibri"/>
               </a:rPr>
@@ -6707,7 +6150,7 @@
             </a:r>
           </a:p>
           <a:p>
-            <a:pPr algn="l">
+            <a:pPr>
               <a:spcBef>
                 <a:spcPts val="600"/>
               </a:spcBef>
@@ -6718,24 +6161,24 @@
             <a:r>
               <a:rPr sz="1200" b="0">
                 <a:solidFill>
-                  <a:srgbClr val="4A6074"/>
-                </a:solidFill>
-                <a:latin typeface="Calibri"/>
-              </a:rPr>
-              <a:t>Крупные инфраструктурные инициативы и региональная связанность</a:t>
-            </a:r>
-          </a:p>
-        </p:txBody>
-      </p:sp>
-      <p:sp>
-        <p:nvSpPr>
-          <p:cNvPr id="20" name="TextBox 19"/>
+                  <a:srgbClr val="28394A"/>
+                </a:solidFill>
+                <a:latin typeface="Calibri"/>
+              </a:rPr>
+              <a:t>Региональная связанность</a:t>
+            </a:r>
+          </a:p>
+        </p:txBody>
+      </p:sp>
+      <p:sp>
+        <p:nvSpPr>
+          <p:cNvPr id="24" name="TextBox 23"/>
           <p:cNvSpPr txBox="1"/>
           <p:nvPr/>
         </p:nvSpPr>
         <p:spPr>
           <a:xfrm>
-            <a:off x="640080" y="5669280"/>
+            <a:off x="640080" y="5623560"/>
             <a:ext cx="10515600" cy="320040"/>
           </a:xfrm>
           <a:prstGeom prst="rect">
@@ -6753,18 +6196,18 @@
             <a:r>
               <a:rPr sz="1100" b="0">
                 <a:solidFill>
-                  <a:srgbClr val="7A8FA3"/>
-                </a:solidFill>
-                <a:latin typeface="Calibri"/>
-              </a:rPr>
-              <a:t>Источники: IMF Article IV (2026), World Bank Kyrgyz Republic overview — округлённые ориентиры для CoD.</a:t>
+                  <a:srgbClr val="5C6B72"/>
+                </a:solidFill>
+                <a:latin typeface="Calibri"/>
+              </a:rPr>
+              <a:t>Источники: IMF Article IV (2026), World Bank — ориентиры для CoD.</a:t>
             </a:r>
           </a:p>
         </p:txBody>
       </p:sp>
       <p:pic>
         <p:nvPicPr>
-          <p:cNvPr id="21" name="Picture 20" descr="ipma-kr-emblem.png"/>
+          <p:cNvPr id="25" name="Picture 24" descr="ipma-kr-emblem.png"/>
           <p:cNvPicPr>
             <a:picLocks noChangeAspect="1"/>
           </p:cNvPicPr>
@@ -6779,7 +6222,7 @@
         <p:spPr>
           <a:xfrm>
             <a:off x="640080" y="6355080"/>
-            <a:ext cx="257362" cy="256032"/>
+            <a:ext cx="238979" cy="237744"/>
           </a:xfrm>
           <a:prstGeom prst="rect">
             <a:avLst/>
@@ -6788,14 +6231,14 @@
       </p:pic>
       <p:sp>
         <p:nvSpPr>
-          <p:cNvPr id="22" name="TextBox 21"/>
+          <p:cNvPr id="26" name="TextBox 25"/>
           <p:cNvSpPr txBox="1"/>
           <p:nvPr/>
         </p:nvSpPr>
         <p:spPr>
           <a:xfrm>
             <a:off x="1005840" y="6355080"/>
-            <a:ext cx="5486400" cy="274320"/>
+            <a:ext cx="6400800" cy="274320"/>
           </a:xfrm>
           <a:prstGeom prst="rect">
             <a:avLst/>
@@ -6812,18 +6255,18 @@
             <a:r>
               <a:rPr sz="1000" b="1">
                 <a:solidFill>
-                  <a:srgbClr val="7A8FA3"/>
-                </a:solidFill>
-                <a:latin typeface="Calibri"/>
-              </a:rPr>
-              <a:t>IPMA Kyrgyz Republic</a:t>
-            </a:r>
-          </a:p>
-        </p:txBody>
-      </p:sp>
-      <p:sp>
-        <p:nvSpPr>
-          <p:cNvPr id="23" name="TextBox 22"/>
+                  <a:srgbClr val="5C6B72"/>
+                </a:solidFill>
+                <a:latin typeface="Calibri"/>
+              </a:rPr>
+              <a:t>IPMA » Kyrgyz Republic</a:t>
+            </a:r>
+          </a:p>
+        </p:txBody>
+      </p:sp>
+      <p:sp>
+        <p:nvSpPr>
+          <p:cNvPr id="27" name="TextBox 26"/>
           <p:cNvSpPr txBox="1"/>
           <p:nvPr/>
         </p:nvSpPr>
@@ -6847,7 +6290,7 @@
             <a:r>
               <a:rPr sz="1000" b="1">
                 <a:solidFill>
-                  <a:srgbClr val="7A8FA3"/>
+                  <a:srgbClr val="5C6B72"/>
                 </a:solidFill>
                 <a:latin typeface="Calibri"/>
               </a:rPr>
@@ -6889,7 +6332,7 @@
             <a:avLst/>
           </a:prstGeom>
           <a:solidFill>
-            <a:srgbClr val="F5F8FB"/>
+            <a:srgbClr val="0D223B"/>
           </a:solidFill>
           <a:ln>
             <a:noFill/>
@@ -6919,104 +6362,14 @@
       </p:sp>
       <p:sp>
         <p:nvSpPr>
-          <p:cNvPr id="3" name="Oval 2"/>
-          <p:cNvSpPr/>
-          <p:nvPr/>
-        </p:nvSpPr>
-        <p:spPr>
-          <a:xfrm>
-            <a:off x="7772400" y="-1371600"/>
-            <a:ext cx="5486400" cy="4114800"/>
-          </a:xfrm>
-          <a:prstGeom prst="ellipse">
-            <a:avLst/>
-          </a:prstGeom>
-          <a:solidFill>
-            <a:srgbClr val="DCE6F2">
-              <a:alpha val="35000"/>
-            </a:srgbClr>
-          </a:solidFill>
-          <a:ln>
-            <a:noFill/>
-          </a:ln>
-        </p:spPr>
-        <p:style>
-          <a:lnRef idx="1">
-            <a:schemeClr val="accent1"/>
-          </a:lnRef>
-          <a:fillRef idx="3">
-            <a:schemeClr val="accent1"/>
-          </a:fillRef>
-          <a:effectRef idx="2">
-            <a:schemeClr val="accent1"/>
-          </a:effectRef>
-          <a:fontRef idx="minor">
-            <a:schemeClr val="lt1"/>
-          </a:fontRef>
-        </p:style>
-        <p:txBody>
-          <a:bodyPr rtlCol="0" anchor="ctr"/>
-          <a:lstStyle/>
-          <a:p>
-            <a:pPr algn="ctr"/>
-          </a:p>
-        </p:txBody>
-      </p:sp>
-      <p:sp>
-        <p:nvSpPr>
-          <p:cNvPr id="4" name="Oval 3"/>
-          <p:cNvSpPr/>
-          <p:nvPr/>
-        </p:nvSpPr>
-        <p:spPr>
-          <a:xfrm>
-            <a:off x="-1828800" y="4114800"/>
-            <a:ext cx="5029200" cy="3657600"/>
-          </a:xfrm>
-          <a:prstGeom prst="ellipse">
-            <a:avLst/>
-          </a:prstGeom>
-          <a:solidFill>
-            <a:srgbClr val="E3EBF4">
-              <a:alpha val="40000"/>
-            </a:srgbClr>
-          </a:solidFill>
-          <a:ln>
-            <a:noFill/>
-          </a:ln>
-        </p:spPr>
-        <p:style>
-          <a:lnRef idx="1">
-            <a:schemeClr val="accent1"/>
-          </a:lnRef>
-          <a:fillRef idx="3">
-            <a:schemeClr val="accent1"/>
-          </a:fillRef>
-          <a:effectRef idx="2">
-            <a:schemeClr val="accent1"/>
-          </a:effectRef>
-          <a:fontRef idx="minor">
-            <a:schemeClr val="lt1"/>
-          </a:fontRef>
-        </p:style>
-        <p:txBody>
-          <a:bodyPr rtlCol="0" anchor="ctr"/>
-          <a:lstStyle/>
-          <a:p>
-            <a:pPr algn="ctr"/>
-          </a:p>
-        </p:txBody>
-      </p:sp>
-      <p:sp>
-        <p:nvSpPr>
-          <p:cNvPr id="5" name="TextBox 4"/>
+          <p:cNvPr id="3" name="TextBox 2"/>
           <p:cNvSpPr txBox="1"/>
           <p:nvPr/>
         </p:nvSpPr>
         <p:spPr>
           <a:xfrm>
             <a:off x="640080" y="502920"/>
-            <a:ext cx="9144000" cy="320040"/>
+            <a:ext cx="10058400" cy="320040"/>
           </a:xfrm>
           <a:prstGeom prst="rect">
             <a:avLst/>
@@ -7033,25 +6386,25 @@
             <a:r>
               <a:rPr sz="1100" b="1">
                 <a:solidFill>
-                  <a:srgbClr val="E62739"/>
-                </a:solidFill>
-                <a:latin typeface="Calibri"/>
-              </a:rPr>
-              <a:t>05  »  МИССИЯ</a:t>
-            </a:r>
-          </a:p>
-        </p:txBody>
-      </p:sp>
-      <p:sp>
-        <p:nvSpPr>
-          <p:cNvPr id="6" name="TextBox 5"/>
+                  <a:srgbClr val="7FE0A0"/>
+                </a:solidFill>
+                <a:latin typeface="Calibri"/>
+              </a:rPr>
+              <a:t>05  »»  МИССИЯ</a:t>
+            </a:r>
+          </a:p>
+        </p:txBody>
+      </p:sp>
+      <p:sp>
+        <p:nvSpPr>
+          <p:cNvPr id="4" name="TextBox 3"/>
           <p:cNvSpPr txBox="1"/>
           <p:nvPr/>
         </p:nvSpPr>
         <p:spPr>
           <a:xfrm>
-            <a:off x="640080" y="868680"/>
-            <a:ext cx="9144000" cy="731520"/>
+            <a:off x="640080" y="914400"/>
+            <a:ext cx="10058400" cy="548640"/>
           </a:xfrm>
           <a:prstGeom prst="rect">
             <a:avLst/>
@@ -7066,9 +6419,9 @@
           <a:p>
             <a:pPr algn="l"/>
             <a:r>
-              <a:rPr sz="3200" b="1">
-                <a:solidFill>
-                  <a:srgbClr val="122033"/>
+              <a:rPr sz="3000" b="1">
+                <a:solidFill>
+                  <a:srgbClr val="FFFFFF"/>
                 </a:solidFill>
                 <a:latin typeface="Calibri"/>
               </a:rPr>
@@ -7079,7 +6432,7 @@
       </p:sp>
       <p:sp>
         <p:nvSpPr>
-          <p:cNvPr id="7" name="TextBox 6"/>
+          <p:cNvPr id="5" name="TextBox 4"/>
           <p:cNvSpPr txBox="1"/>
           <p:nvPr/>
         </p:nvSpPr>
@@ -7100,9 +6453,9 @@
           <a:lstStyle/>
           <a:p>
             <a:r>
-              <a:rPr sz="2600" b="1">
-                <a:solidFill>
-                  <a:srgbClr val="122033"/>
+              <a:rPr sz="2400" b="1">
+                <a:solidFill>
+                  <a:srgbClr val="FFFFFF"/>
                 </a:solidFill>
                 <a:latin typeface="Calibri"/>
               </a:rPr>
@@ -7113,14 +6466,14 @@
       </p:sp>
       <p:sp>
         <p:nvSpPr>
-          <p:cNvPr id="8" name="TextBox 7"/>
+          <p:cNvPr id="6" name="TextBox 5"/>
           <p:cNvSpPr txBox="1"/>
           <p:nvPr/>
         </p:nvSpPr>
         <p:spPr>
           <a:xfrm>
-            <a:off x="640080" y="4206240"/>
-            <a:ext cx="10058400" cy="1371600"/>
+            <a:off x="640080" y="4297680"/>
+            <a:ext cx="10058400" cy="1280160"/>
           </a:xfrm>
           <a:prstGeom prst="rect">
             <a:avLst/>
@@ -7136,49 +6489,25 @@
             <a:r>
               <a:rPr sz="1400" b="0">
                 <a:solidFill>
-                  <a:srgbClr val="4A6074"/>
-                </a:solidFill>
-                <a:latin typeface="Calibri"/>
-              </a:rPr>
-              <a:t>Повышаем зрелость управления проектами через образование, сертификацию и обмен практиками по ICB4. Формируем национальное сообщество и независимый орган сертификации 4‑L‑C. Интегрируем Кыргызстан в глобальную семью IPMA.</a:t>
-            </a:r>
-          </a:p>
-        </p:txBody>
-      </p:sp>
-      <p:pic>
-        <p:nvPicPr>
-          <p:cNvPr id="9" name="Picture 8" descr="ipma-kr-emblem.png"/>
-          <p:cNvPicPr>
-            <a:picLocks noChangeAspect="1"/>
-          </p:cNvPicPr>
-          <p:nvPr/>
-        </p:nvPicPr>
-        <p:blipFill>
-          <a:blip r:embed="rId2"/>
-          <a:stretch>
-            <a:fillRect/>
-          </a:stretch>
-        </p:blipFill>
+                  <a:srgbClr val="C7D6E2"/>
+                </a:solidFill>
+                <a:latin typeface="Calibri"/>
+              </a:rPr>
+              <a:t>Повышаем зрелость через образование, сертификацию и ICB4. Формируем CB 4‑L‑C. Интегрируем Кыргызстан в глобальную семью IPMA.</a:t>
+            </a:r>
+          </a:p>
+        </p:txBody>
+      </p:sp>
+      <p:sp>
+        <p:nvSpPr>
+          <p:cNvPr id="7" name="TextBox 6"/>
+          <p:cNvSpPr txBox="1"/>
+          <p:nvPr/>
+        </p:nvSpPr>
         <p:spPr>
           <a:xfrm>
             <a:off x="640080" y="6355080"/>
-            <a:ext cx="257362" cy="256032"/>
-          </a:xfrm>
-          <a:prstGeom prst="rect">
-            <a:avLst/>
-          </a:prstGeom>
-        </p:spPr>
-      </p:pic>
-      <p:sp>
-        <p:nvSpPr>
-          <p:cNvPr id="10" name="TextBox 9"/>
-          <p:cNvSpPr txBox="1"/>
-          <p:nvPr/>
-        </p:nvSpPr>
-        <p:spPr>
-          <a:xfrm>
-            <a:off x="1005840" y="6355080"/>
-            <a:ext cx="5486400" cy="274320"/>
+            <a:ext cx="6400800" cy="274320"/>
           </a:xfrm>
           <a:prstGeom prst="rect">
             <a:avLst/>
@@ -7195,7 +6524,7 @@
             <a:r>
               <a:rPr sz="1000" b="1">
                 <a:solidFill>
-                  <a:srgbClr val="7A8FA3"/>
+                  <a:srgbClr val="8FA6B8"/>
                 </a:solidFill>
                 <a:latin typeface="Calibri"/>
               </a:rPr>
@@ -7206,7 +6535,7 @@
       </p:sp>
       <p:sp>
         <p:nvSpPr>
-          <p:cNvPr id="11" name="TextBox 10"/>
+          <p:cNvPr id="8" name="TextBox 7"/>
           <p:cNvSpPr txBox="1"/>
           <p:nvPr/>
         </p:nvSpPr>
@@ -7230,7 +6559,7 @@
             <a:r>
               <a:rPr sz="1000" b="1">
                 <a:solidFill>
-                  <a:srgbClr val="7A8FA3"/>
+                  <a:srgbClr val="8FA6B8"/>
                 </a:solidFill>
                 <a:latin typeface="Calibri"/>
               </a:rPr>
@@ -7272,7 +6601,7 @@
             <a:avLst/>
           </a:prstGeom>
           <a:solidFill>
-            <a:srgbClr val="F5F8FB"/>
+            <a:srgbClr val="EEF2F1"/>
           </a:solidFill>
           <a:ln>
             <a:noFill/>
@@ -7302,25 +6631,130 @@
       </p:sp>
       <p:sp>
         <p:nvSpPr>
-          <p:cNvPr id="3" name="Oval 2"/>
+          <p:cNvPr id="3" name="TextBox 2"/>
+          <p:cNvSpPr txBox="1"/>
+          <p:nvPr/>
+        </p:nvSpPr>
+        <p:spPr>
+          <a:xfrm>
+            <a:off x="640080" y="502920"/>
+            <a:ext cx="10058400" cy="320040"/>
+          </a:xfrm>
+          <a:prstGeom prst="rect">
+            <a:avLst/>
+          </a:prstGeom>
+          <a:noFill/>
+        </p:spPr>
+        <p:txBody>
+          <a:bodyPr wrap="none">
+            <a:spAutoFit/>
+          </a:bodyPr>
+          <a:lstStyle/>
+          <a:p>
+            <a:pPr algn="l"/>
+            <a:r>
+              <a:rPr sz="1100" b="1">
+                <a:solidFill>
+                  <a:srgbClr val="1F7A34"/>
+                </a:solidFill>
+                <a:latin typeface="Calibri"/>
+              </a:rPr>
+              <a:t>06  »»  СТРАТЕГИЯ</a:t>
+            </a:r>
+          </a:p>
+        </p:txBody>
+      </p:sp>
+      <p:sp>
+        <p:nvSpPr>
+          <p:cNvPr id="4" name="TextBox 3"/>
+          <p:cNvSpPr txBox="1"/>
+          <p:nvPr/>
+        </p:nvSpPr>
+        <p:spPr>
+          <a:xfrm>
+            <a:off x="640080" y="868680"/>
+            <a:ext cx="10058400" cy="640080"/>
+          </a:xfrm>
+          <a:prstGeom prst="rect">
+            <a:avLst/>
+          </a:prstGeom>
+          <a:noFill/>
+        </p:spPr>
+        <p:txBody>
+          <a:bodyPr wrap="none">
+            <a:spAutoFit/>
+          </a:bodyPr>
+          <a:lstStyle/>
+          <a:p>
+            <a:pPr algn="l"/>
+            <a:r>
+              <a:rPr sz="3000" b="1">
+                <a:solidFill>
+                  <a:srgbClr val="0D223B"/>
+                </a:solidFill>
+                <a:latin typeface="Calibri"/>
+              </a:rPr>
+              <a:t>Спрос и цели</a:t>
+            </a:r>
+          </a:p>
+        </p:txBody>
+      </p:sp>
+      <p:sp>
+        <p:nvSpPr>
+          <p:cNvPr id="5" name="TextBox 4"/>
+          <p:cNvSpPr txBox="1"/>
+          <p:nvPr/>
+        </p:nvSpPr>
+        <p:spPr>
+          <a:xfrm>
+            <a:off x="640080" y="1691640"/>
+            <a:ext cx="4572000" cy="274320"/>
+          </a:xfrm>
+          <a:prstGeom prst="rect">
+            <a:avLst/>
+          </a:prstGeom>
+          <a:noFill/>
+        </p:spPr>
+        <p:txBody>
+          <a:bodyPr wrap="none">
+            <a:spAutoFit/>
+          </a:bodyPr>
+          <a:lstStyle/>
+          <a:p>
+            <a:pPr algn="l"/>
+            <a:r>
+              <a:rPr sz="1100" b="1">
+                <a:solidFill>
+                  <a:srgbClr val="1F7A34"/>
+                </a:solidFill>
+                <a:latin typeface="Calibri"/>
+              </a:rPr>
+              <a:t>СПРОС НА P3M</a:t>
+            </a:r>
+          </a:p>
+        </p:txBody>
+      </p:sp>
+      <p:sp>
+        <p:nvSpPr>
+          <p:cNvPr id="6" name="Rounded Rectangle 5"/>
           <p:cNvSpPr/>
           <p:nvPr/>
         </p:nvSpPr>
         <p:spPr>
           <a:xfrm>
-            <a:off x="7772400" y="-1371600"/>
-            <a:ext cx="5486400" cy="4114800"/>
-          </a:xfrm>
-          <a:prstGeom prst="ellipse">
+            <a:off x="640080" y="2103120"/>
+            <a:ext cx="2779776" cy="292608"/>
+          </a:xfrm>
+          <a:prstGeom prst="roundRect">
             <a:avLst/>
           </a:prstGeom>
           <a:solidFill>
-            <a:srgbClr val="DCE6F2">
-              <a:alpha val="35000"/>
-            </a:srgbClr>
+            <a:srgbClr val="E8F6EC"/>
           </a:solidFill>
           <a:ln>
-            <a:noFill/>
+            <a:solidFill>
+              <a:srgbClr val="C6E6CF"/>
+            </a:solidFill>
           </a:ln>
         </p:spPr>
         <p:style>
@@ -7342,30 +6776,39 @@
           <a:lstStyle/>
           <a:p>
             <a:pPr algn="ctr"/>
-          </a:p>
-        </p:txBody>
-      </p:sp>
-      <p:sp>
-        <p:nvSpPr>
-          <p:cNvPr id="4" name="Oval 3"/>
+            <a:r>
+              <a:rPr sz="1000" b="1">
+                <a:solidFill>
+                  <a:srgbClr val="1F7A34"/>
+                </a:solidFill>
+                <a:latin typeface="Calibri"/>
+              </a:rPr>
+              <a:t>Госуправление</a:t>
+            </a:r>
+          </a:p>
+        </p:txBody>
+      </p:sp>
+      <p:sp>
+        <p:nvSpPr>
+          <p:cNvPr id="7" name="Rounded Rectangle 6"/>
           <p:cNvSpPr/>
           <p:nvPr/>
         </p:nvSpPr>
         <p:spPr>
           <a:xfrm>
-            <a:off x="-1828800" y="4114800"/>
-            <a:ext cx="5029200" cy="3657600"/>
-          </a:xfrm>
-          <a:prstGeom prst="ellipse">
+            <a:off x="3529584" y="2103120"/>
+            <a:ext cx="2779776" cy="292608"/>
+          </a:xfrm>
+          <a:prstGeom prst="roundRect">
             <a:avLst/>
           </a:prstGeom>
           <a:solidFill>
-            <a:srgbClr val="E3EBF4">
-              <a:alpha val="40000"/>
-            </a:srgbClr>
+            <a:srgbClr val="E8F6EC"/>
           </a:solidFill>
           <a:ln>
-            <a:noFill/>
+            <a:solidFill>
+              <a:srgbClr val="C6E6CF"/>
+            </a:solidFill>
           </a:ln>
         </p:spPr>
         <p:style>
@@ -7387,110 +6830,14 @@
           <a:lstStyle/>
           <a:p>
             <a:pPr algn="ctr"/>
-          </a:p>
-        </p:txBody>
-      </p:sp>
-      <p:sp>
-        <p:nvSpPr>
-          <p:cNvPr id="5" name="TextBox 4"/>
-          <p:cNvSpPr txBox="1"/>
-          <p:nvPr/>
-        </p:nvSpPr>
-        <p:spPr>
-          <a:xfrm>
-            <a:off x="640080" y="502920"/>
-            <a:ext cx="9144000" cy="320040"/>
-          </a:xfrm>
-          <a:prstGeom prst="rect">
-            <a:avLst/>
-          </a:prstGeom>
-          <a:noFill/>
-        </p:spPr>
-        <p:txBody>
-          <a:bodyPr wrap="none">
-            <a:spAutoFit/>
-          </a:bodyPr>
-          <a:lstStyle/>
-          <a:p>
-            <a:pPr algn="l"/>
-            <a:r>
-              <a:rPr sz="1100" b="1">
-                <a:solidFill>
-                  <a:srgbClr val="E62739"/>
-                </a:solidFill>
-                <a:latin typeface="Calibri"/>
-              </a:rPr>
-              <a:t>06  »  СТРАТЕГИЯ</a:t>
-            </a:r>
-          </a:p>
-        </p:txBody>
-      </p:sp>
-      <p:sp>
-        <p:nvSpPr>
-          <p:cNvPr id="6" name="TextBox 5"/>
-          <p:cNvSpPr txBox="1"/>
-          <p:nvPr/>
-        </p:nvSpPr>
-        <p:spPr>
-          <a:xfrm>
-            <a:off x="640080" y="868680"/>
-            <a:ext cx="9144000" cy="731520"/>
-          </a:xfrm>
-          <a:prstGeom prst="rect">
-            <a:avLst/>
-          </a:prstGeom>
-          <a:noFill/>
-        </p:spPr>
-        <p:txBody>
-          <a:bodyPr wrap="none">
-            <a:spAutoFit/>
-          </a:bodyPr>
-          <a:lstStyle/>
-          <a:p>
-            <a:pPr algn="l"/>
-            <a:r>
-              <a:rPr sz="3200" b="1">
-                <a:solidFill>
-                  <a:srgbClr val="122033"/>
-                </a:solidFill>
-                <a:latin typeface="Calibri"/>
-              </a:rPr>
-              <a:t>Спрос и цели</a:t>
-            </a:r>
-          </a:p>
-        </p:txBody>
-      </p:sp>
-      <p:sp>
-        <p:nvSpPr>
-          <p:cNvPr id="7" name="TextBox 6"/>
-          <p:cNvSpPr txBox="1"/>
-          <p:nvPr/>
-        </p:nvSpPr>
-        <p:spPr>
-          <a:xfrm>
-            <a:off x="640080" y="1737360"/>
-            <a:ext cx="4572000" cy="274320"/>
-          </a:xfrm>
-          <a:prstGeom prst="rect">
-            <a:avLst/>
-          </a:prstGeom>
-          <a:noFill/>
-        </p:spPr>
-        <p:txBody>
-          <a:bodyPr wrap="none">
-            <a:spAutoFit/>
-          </a:bodyPr>
-          <a:lstStyle/>
-          <a:p>
-            <a:pPr algn="l"/>
-            <a:r>
-              <a:rPr sz="1100" b="1">
-                <a:solidFill>
-                  <a:srgbClr val="E62739"/>
-                </a:solidFill>
-                <a:latin typeface="Calibri"/>
-              </a:rPr>
-              <a:t>СПРОС НА P3M</a:t>
+            <a:r>
+              <a:rPr sz="1000" b="1">
+                <a:solidFill>
+                  <a:srgbClr val="1F7A34"/>
+                </a:solidFill>
+                <a:latin typeface="Calibri"/>
+              </a:rPr>
+              <a:t>Строительство</a:t>
             </a:r>
           </a:p>
         </p:txBody>
@@ -7503,18 +6850,18 @@
         </p:nvSpPr>
         <p:spPr>
           <a:xfrm>
-            <a:off x="640080" y="2148840"/>
-            <a:ext cx="3118104" cy="292608"/>
+            <a:off x="640080" y="2487168"/>
+            <a:ext cx="1188720" cy="292608"/>
           </a:xfrm>
           <a:prstGeom prst="roundRect">
             <a:avLst/>
           </a:prstGeom>
           <a:solidFill>
-            <a:srgbClr val="FBE6E9"/>
+            <a:srgbClr val="E8F6EC"/>
           </a:solidFill>
           <a:ln>
             <a:solidFill>
-              <a:srgbClr val="F0A0A8"/>
+              <a:srgbClr val="C6E6CF"/>
             </a:solidFill>
           </a:ln>
         </p:spPr>
@@ -7540,11 +6887,11 @@
             <a:r>
               <a:rPr sz="1000" b="1">
                 <a:solidFill>
-                  <a:srgbClr val="E62739"/>
-                </a:solidFill>
-                <a:latin typeface="Calibri"/>
-              </a:rPr>
-              <a:t>Госуправление</a:t>
+                  <a:srgbClr val="1F7A34"/>
+                </a:solidFill>
+                <a:latin typeface="Calibri"/>
+              </a:rPr>
+              <a:t>IT</a:t>
             </a:r>
           </a:p>
         </p:txBody>
@@ -7557,18 +6904,18 @@
         </p:nvSpPr>
         <p:spPr>
           <a:xfrm>
-            <a:off x="3895344" y="2148840"/>
-            <a:ext cx="3118104" cy="292608"/>
+            <a:off x="1938528" y="2487168"/>
+            <a:ext cx="2944368" cy="292608"/>
           </a:xfrm>
           <a:prstGeom prst="roundRect">
             <a:avLst/>
           </a:prstGeom>
           <a:solidFill>
-            <a:srgbClr val="FBE6E9"/>
+            <a:srgbClr val="E8F6EC"/>
           </a:solidFill>
           <a:ln>
             <a:solidFill>
-              <a:srgbClr val="F0A0A8"/>
+              <a:srgbClr val="C6E6CF"/>
             </a:solidFill>
           </a:ln>
         </p:spPr>
@@ -7594,11 +6941,11 @@
             <a:r>
               <a:rPr sz="1000" b="1">
                 <a:solidFill>
-                  <a:srgbClr val="E62739"/>
-                </a:solidFill>
-                <a:latin typeface="Calibri"/>
-              </a:rPr>
-              <a:t>Строительство</a:t>
+                  <a:srgbClr val="1F7A34"/>
+                </a:solidFill>
+                <a:latin typeface="Calibri"/>
+              </a:rPr>
+              <a:t>Медицина и НПО</a:t>
             </a:r>
           </a:p>
         </p:txBody>
@@ -7611,18 +6958,18 @@
         </p:nvSpPr>
         <p:spPr>
           <a:xfrm>
-            <a:off x="640080" y="2532888"/>
-            <a:ext cx="905256" cy="292608"/>
+            <a:off x="4992624" y="2487168"/>
+            <a:ext cx="2944368" cy="292608"/>
           </a:xfrm>
           <a:prstGeom prst="roundRect">
             <a:avLst/>
           </a:prstGeom>
           <a:solidFill>
-            <a:srgbClr val="FBE6E9"/>
+            <a:srgbClr val="E8F6EC"/>
           </a:solidFill>
           <a:ln>
             <a:solidFill>
-              <a:srgbClr val="F0A0A8"/>
+              <a:srgbClr val="C6E6CF"/>
             </a:solidFill>
           </a:ln>
         </p:spPr>
@@ -7648,11 +6995,11 @@
             <a:r>
               <a:rPr sz="1000" b="1">
                 <a:solidFill>
-                  <a:srgbClr val="E62739"/>
-                </a:solidFill>
-                <a:latin typeface="Calibri"/>
-              </a:rPr>
-              <a:t>IT</a:t>
+                  <a:srgbClr val="1F7A34"/>
+                </a:solidFill>
+                <a:latin typeface="Calibri"/>
+              </a:rPr>
+              <a:t>Инфраструктура</a:t>
             </a:r>
           </a:p>
         </p:txBody>
@@ -7665,18 +7012,18 @@
         </p:nvSpPr>
         <p:spPr>
           <a:xfrm>
-            <a:off x="1682495" y="2532888"/>
-            <a:ext cx="3319272" cy="292608"/>
+            <a:off x="640080" y="2871215"/>
+            <a:ext cx="2615184" cy="292608"/>
           </a:xfrm>
           <a:prstGeom prst="roundRect">
             <a:avLst/>
           </a:prstGeom>
           <a:solidFill>
-            <a:srgbClr val="FBE6E9"/>
+            <a:srgbClr val="E8F6EC"/>
           </a:solidFill>
           <a:ln>
             <a:solidFill>
-              <a:srgbClr val="F0A0A8"/>
+              <a:srgbClr val="C6E6CF"/>
             </a:solidFill>
           </a:ln>
         </p:spPr>
@@ -7702,115 +7049,7 @@
             <a:r>
               <a:rPr sz="1000" b="1">
                 <a:solidFill>
-                  <a:srgbClr val="E62739"/>
-                </a:solidFill>
-                <a:latin typeface="Calibri"/>
-              </a:rPr>
-              <a:t>Медицина и НПО</a:t>
-            </a:r>
-          </a:p>
-        </p:txBody>
-      </p:sp>
-      <p:sp>
-        <p:nvSpPr>
-          <p:cNvPr id="12" name="Rounded Rectangle 11"/>
-          <p:cNvSpPr/>
-          <p:nvPr/>
-        </p:nvSpPr>
-        <p:spPr>
-          <a:xfrm>
-            <a:off x="5138927" y="2532888"/>
-            <a:ext cx="3319272" cy="292608"/>
-          </a:xfrm>
-          <a:prstGeom prst="roundRect">
-            <a:avLst/>
-          </a:prstGeom>
-          <a:solidFill>
-            <a:srgbClr val="FBE6E9"/>
-          </a:solidFill>
-          <a:ln>
-            <a:solidFill>
-              <a:srgbClr val="F0A0A8"/>
-            </a:solidFill>
-          </a:ln>
-        </p:spPr>
-        <p:style>
-          <a:lnRef idx="1">
-            <a:schemeClr val="accent1"/>
-          </a:lnRef>
-          <a:fillRef idx="3">
-            <a:schemeClr val="accent1"/>
-          </a:fillRef>
-          <a:effectRef idx="2">
-            <a:schemeClr val="accent1"/>
-          </a:effectRef>
-          <a:fontRef idx="minor">
-            <a:schemeClr val="lt1"/>
-          </a:fontRef>
-        </p:style>
-        <p:txBody>
-          <a:bodyPr rtlCol="0" anchor="ctr"/>
-          <a:lstStyle/>
-          <a:p>
-            <a:pPr algn="ctr"/>
-            <a:r>
-              <a:rPr sz="1000" b="1">
-                <a:solidFill>
-                  <a:srgbClr val="E62739"/>
-                </a:solidFill>
-                <a:latin typeface="Calibri"/>
-              </a:rPr>
-              <a:t>Инфраструктура</a:t>
-            </a:r>
-          </a:p>
-        </p:txBody>
-      </p:sp>
-      <p:sp>
-        <p:nvSpPr>
-          <p:cNvPr id="13" name="Rounded Rectangle 12"/>
-          <p:cNvSpPr/>
-          <p:nvPr/>
-        </p:nvSpPr>
-        <p:spPr>
-          <a:xfrm>
-            <a:off x="640080" y="2916936"/>
-            <a:ext cx="2916936" cy="292608"/>
-          </a:xfrm>
-          <a:prstGeom prst="roundRect">
-            <a:avLst/>
-          </a:prstGeom>
-          <a:solidFill>
-            <a:srgbClr val="FBE6E9"/>
-          </a:solidFill>
-          <a:ln>
-            <a:solidFill>
-              <a:srgbClr val="F0A0A8"/>
-            </a:solidFill>
-          </a:ln>
-        </p:spPr>
-        <p:style>
-          <a:lnRef idx="1">
-            <a:schemeClr val="accent1"/>
-          </a:lnRef>
-          <a:fillRef idx="3">
-            <a:schemeClr val="accent1"/>
-          </a:fillRef>
-          <a:effectRef idx="2">
-            <a:schemeClr val="accent1"/>
-          </a:effectRef>
-          <a:fontRef idx="minor">
-            <a:schemeClr val="lt1"/>
-          </a:fontRef>
-        </p:style>
-        <p:txBody>
-          <a:bodyPr rtlCol="0" anchor="ctr"/>
-          <a:lstStyle/>
-          <a:p>
-            <a:pPr algn="ctr"/>
-            <a:r>
-              <a:rPr sz="1000" b="1">
-                <a:solidFill>
-                  <a:srgbClr val="E62739"/>
+                  <a:srgbClr val="1F7A34"/>
                 </a:solidFill>
                 <a:latin typeface="Calibri"/>
               </a:rPr>
@@ -7821,14 +7060,14 @@
       </p:sp>
       <p:sp>
         <p:nvSpPr>
-          <p:cNvPr id="14" name="TextBox 13"/>
+          <p:cNvPr id="12" name="TextBox 11"/>
           <p:cNvSpPr txBox="1"/>
           <p:nvPr/>
         </p:nvSpPr>
         <p:spPr>
           <a:xfrm>
             <a:off x="640080" y="3108960"/>
-            <a:ext cx="5029200" cy="1371600"/>
+            <a:ext cx="5029200" cy="1280160"/>
           </a:xfrm>
           <a:prstGeom prst="rect">
             <a:avLst/>
@@ -7844,7 +7083,7 @@
             <a:r>
               <a:rPr sz="1300" b="0">
                 <a:solidFill>
-                  <a:srgbClr val="4A6074"/>
+                  <a:srgbClr val="28394A"/>
                 </a:solidFill>
                 <a:latin typeface="Calibri"/>
               </a:rPr>
@@ -7855,13 +7094,13 @@
       </p:sp>
       <p:sp>
         <p:nvSpPr>
-          <p:cNvPr id="15" name="TextBox 14"/>
+          <p:cNvPr id="13" name="TextBox 12"/>
           <p:cNvSpPr txBox="1"/>
           <p:nvPr/>
         </p:nvSpPr>
         <p:spPr>
           <a:xfrm>
-            <a:off x="6400800" y="1737360"/>
+            <a:off x="6400800" y="1691640"/>
             <a:ext cx="5029200" cy="274320"/>
           </a:xfrm>
           <a:prstGeom prst="rect">
@@ -7879,7 +7118,7 @@
             <a:r>
               <a:rPr sz="1100" b="1">
                 <a:solidFill>
-                  <a:srgbClr val="E62739"/>
+                  <a:srgbClr val="1F7A34"/>
                 </a:solidFill>
                 <a:latin typeface="Calibri"/>
               </a:rPr>
@@ -7890,13 +7129,13 @@
       </p:sp>
       <p:sp>
         <p:nvSpPr>
-          <p:cNvPr id="16" name="TextBox 15"/>
+          <p:cNvPr id="14" name="TextBox 13"/>
           <p:cNvSpPr txBox="1"/>
           <p:nvPr/>
         </p:nvSpPr>
         <p:spPr>
           <a:xfrm>
-            <a:off x="6400800" y="2148840"/>
+            <a:off x="6400800" y="2103120"/>
             <a:ext cx="411480" cy="320040"/>
           </a:xfrm>
           <a:prstGeom prst="rect">
@@ -7914,7 +7153,7 @@
             <a:r>
               <a:rPr sz="1200" b="1">
                 <a:solidFill>
-                  <a:srgbClr val="E62739"/>
+                  <a:srgbClr val="2F9E44"/>
                 </a:solidFill>
                 <a:latin typeface="Calibri"/>
               </a:rPr>
@@ -7925,13 +7164,13 @@
       </p:sp>
       <p:sp>
         <p:nvSpPr>
-          <p:cNvPr id="17" name="TextBox 16"/>
+          <p:cNvPr id="15" name="TextBox 14"/>
           <p:cNvSpPr txBox="1"/>
           <p:nvPr/>
         </p:nvSpPr>
         <p:spPr>
           <a:xfrm>
-            <a:off x="6858000" y="2148840"/>
+            <a:off x="6858000" y="2103120"/>
             <a:ext cx="4754880" cy="502920"/>
           </a:xfrm>
           <a:prstGeom prst="rect">
@@ -7948,7 +7187,7 @@
             <a:r>
               <a:rPr sz="1200" b="0">
                 <a:solidFill>
-                  <a:srgbClr val="4A6074"/>
+                  <a:srgbClr val="28394A"/>
                 </a:solidFill>
                 <a:latin typeface="Calibri"/>
               </a:rPr>
@@ -7959,56 +7198,13 @@
       </p:sp>
       <p:sp>
         <p:nvSpPr>
-          <p:cNvPr id="18" name="Rectangle 17"/>
-          <p:cNvSpPr/>
-          <p:nvPr/>
-        </p:nvSpPr>
-        <p:spPr>
-          <a:xfrm>
-            <a:off x="6400800" y="2651760"/>
-            <a:ext cx="5029200" cy="9144"/>
-          </a:xfrm>
-          <a:prstGeom prst="rect">
-            <a:avLst/>
-          </a:prstGeom>
-          <a:solidFill>
-            <a:srgbClr val="D0D8E2"/>
-          </a:solidFill>
-          <a:ln>
-            <a:noFill/>
-          </a:ln>
-        </p:spPr>
-        <p:style>
-          <a:lnRef idx="1">
-            <a:schemeClr val="accent1"/>
-          </a:lnRef>
-          <a:fillRef idx="3">
-            <a:schemeClr val="accent1"/>
-          </a:fillRef>
-          <a:effectRef idx="2">
-            <a:schemeClr val="accent1"/>
-          </a:effectRef>
-          <a:fontRef idx="minor">
-            <a:schemeClr val="lt1"/>
-          </a:fontRef>
-        </p:style>
-        <p:txBody>
-          <a:bodyPr rtlCol="0" anchor="ctr"/>
-          <a:lstStyle/>
-          <a:p>
-            <a:pPr algn="ctr"/>
-          </a:p>
-        </p:txBody>
-      </p:sp>
-      <p:sp>
-        <p:nvSpPr>
-          <p:cNvPr id="19" name="TextBox 18"/>
+          <p:cNvPr id="16" name="TextBox 15"/>
           <p:cNvSpPr txBox="1"/>
           <p:nvPr/>
         </p:nvSpPr>
         <p:spPr>
           <a:xfrm>
-            <a:off x="6400800" y="2743200"/>
+            <a:off x="6400800" y="2697479"/>
             <a:ext cx="411480" cy="320040"/>
           </a:xfrm>
           <a:prstGeom prst="rect">
@@ -8026,7 +7222,7 @@
             <a:r>
               <a:rPr sz="1200" b="1">
                 <a:solidFill>
-                  <a:srgbClr val="E62739"/>
+                  <a:srgbClr val="2F9E44"/>
                 </a:solidFill>
                 <a:latin typeface="Calibri"/>
               </a:rPr>
@@ -8037,13 +7233,13 @@
       </p:sp>
       <p:sp>
         <p:nvSpPr>
-          <p:cNvPr id="20" name="TextBox 19"/>
+          <p:cNvPr id="17" name="TextBox 16"/>
           <p:cNvSpPr txBox="1"/>
           <p:nvPr/>
         </p:nvSpPr>
         <p:spPr>
           <a:xfrm>
-            <a:off x="6858000" y="2743200"/>
+            <a:off x="6858000" y="2697479"/>
             <a:ext cx="4754880" cy="502920"/>
           </a:xfrm>
           <a:prstGeom prst="rect">
@@ -8060,7 +7256,7 @@
             <a:r>
               <a:rPr sz="1200" b="0">
                 <a:solidFill>
-                  <a:srgbClr val="4A6074"/>
+                  <a:srgbClr val="28394A"/>
                 </a:solidFill>
                 <a:latin typeface="Calibri"/>
               </a:rPr>
@@ -8071,56 +7267,13 @@
       </p:sp>
       <p:sp>
         <p:nvSpPr>
-          <p:cNvPr id="21" name="Rectangle 20"/>
-          <p:cNvSpPr/>
-          <p:nvPr/>
-        </p:nvSpPr>
-        <p:spPr>
-          <a:xfrm>
-            <a:off x="6400800" y="3246120"/>
-            <a:ext cx="5029200" cy="9144"/>
-          </a:xfrm>
-          <a:prstGeom prst="rect">
-            <a:avLst/>
-          </a:prstGeom>
-          <a:solidFill>
-            <a:srgbClr val="D0D8E2"/>
-          </a:solidFill>
-          <a:ln>
-            <a:noFill/>
-          </a:ln>
-        </p:spPr>
-        <p:style>
-          <a:lnRef idx="1">
-            <a:schemeClr val="accent1"/>
-          </a:lnRef>
-          <a:fillRef idx="3">
-            <a:schemeClr val="accent1"/>
-          </a:fillRef>
-          <a:effectRef idx="2">
-            <a:schemeClr val="accent1"/>
-          </a:effectRef>
-          <a:fontRef idx="minor">
-            <a:schemeClr val="lt1"/>
-          </a:fontRef>
-        </p:style>
-        <p:txBody>
-          <a:bodyPr rtlCol="0" anchor="ctr"/>
-          <a:lstStyle/>
-          <a:p>
-            <a:pPr algn="ctr"/>
-          </a:p>
-        </p:txBody>
-      </p:sp>
-      <p:sp>
-        <p:nvSpPr>
-          <p:cNvPr id="22" name="TextBox 21"/>
+          <p:cNvPr id="18" name="TextBox 17"/>
           <p:cNvSpPr txBox="1"/>
           <p:nvPr/>
         </p:nvSpPr>
         <p:spPr>
           <a:xfrm>
-            <a:off x="6400800" y="3337560"/>
+            <a:off x="6400800" y="3291839"/>
             <a:ext cx="411480" cy="320040"/>
           </a:xfrm>
           <a:prstGeom prst="rect">
@@ -8138,7 +7291,7 @@
             <a:r>
               <a:rPr sz="1200" b="1">
                 <a:solidFill>
-                  <a:srgbClr val="E62739"/>
+                  <a:srgbClr val="2F9E44"/>
                 </a:solidFill>
                 <a:latin typeface="Calibri"/>
               </a:rPr>
@@ -8149,13 +7302,13 @@
       </p:sp>
       <p:sp>
         <p:nvSpPr>
-          <p:cNvPr id="23" name="TextBox 22"/>
+          <p:cNvPr id="19" name="TextBox 18"/>
           <p:cNvSpPr txBox="1"/>
           <p:nvPr/>
         </p:nvSpPr>
         <p:spPr>
           <a:xfrm>
-            <a:off x="6858000" y="3337560"/>
+            <a:off x="6858000" y="3291839"/>
             <a:ext cx="4754880" cy="502920"/>
           </a:xfrm>
           <a:prstGeom prst="rect">
@@ -8172,7 +7325,7 @@
             <a:r>
               <a:rPr sz="1200" b="0">
                 <a:solidFill>
-                  <a:srgbClr val="4A6074"/>
+                  <a:srgbClr val="28394A"/>
                 </a:solidFill>
                 <a:latin typeface="Calibri"/>
               </a:rPr>
@@ -8183,56 +7336,13 @@
       </p:sp>
       <p:sp>
         <p:nvSpPr>
-          <p:cNvPr id="24" name="Rectangle 23"/>
-          <p:cNvSpPr/>
-          <p:nvPr/>
-        </p:nvSpPr>
-        <p:spPr>
-          <a:xfrm>
-            <a:off x="6400800" y="3840480"/>
-            <a:ext cx="5029200" cy="9144"/>
-          </a:xfrm>
-          <a:prstGeom prst="rect">
-            <a:avLst/>
-          </a:prstGeom>
-          <a:solidFill>
-            <a:srgbClr val="D0D8E2"/>
-          </a:solidFill>
-          <a:ln>
-            <a:noFill/>
-          </a:ln>
-        </p:spPr>
-        <p:style>
-          <a:lnRef idx="1">
-            <a:schemeClr val="accent1"/>
-          </a:lnRef>
-          <a:fillRef idx="3">
-            <a:schemeClr val="accent1"/>
-          </a:fillRef>
-          <a:effectRef idx="2">
-            <a:schemeClr val="accent1"/>
-          </a:effectRef>
-          <a:fontRef idx="minor">
-            <a:schemeClr val="lt1"/>
-          </a:fontRef>
-        </p:style>
-        <p:txBody>
-          <a:bodyPr rtlCol="0" anchor="ctr"/>
-          <a:lstStyle/>
-          <a:p>
-            <a:pPr algn="ctr"/>
-          </a:p>
-        </p:txBody>
-      </p:sp>
-      <p:sp>
-        <p:nvSpPr>
-          <p:cNvPr id="25" name="TextBox 24"/>
+          <p:cNvPr id="20" name="TextBox 19"/>
           <p:cNvSpPr txBox="1"/>
           <p:nvPr/>
         </p:nvSpPr>
         <p:spPr>
           <a:xfrm>
-            <a:off x="6400800" y="3931920"/>
+            <a:off x="6400800" y="3886200"/>
             <a:ext cx="411480" cy="320040"/>
           </a:xfrm>
           <a:prstGeom prst="rect">
@@ -8250,7 +7360,7 @@
             <a:r>
               <a:rPr sz="1200" b="1">
                 <a:solidFill>
-                  <a:srgbClr val="E62739"/>
+                  <a:srgbClr val="2F9E44"/>
                 </a:solidFill>
                 <a:latin typeface="Calibri"/>
               </a:rPr>
@@ -8261,13 +7371,13 @@
       </p:sp>
       <p:sp>
         <p:nvSpPr>
-          <p:cNvPr id="26" name="TextBox 25"/>
+          <p:cNvPr id="21" name="TextBox 20"/>
           <p:cNvSpPr txBox="1"/>
           <p:nvPr/>
         </p:nvSpPr>
         <p:spPr>
           <a:xfrm>
-            <a:off x="6858000" y="3931920"/>
+            <a:off x="6858000" y="3886200"/>
             <a:ext cx="4754880" cy="502920"/>
           </a:xfrm>
           <a:prstGeom prst="rect">
@@ -8284,7 +7394,7 @@
             <a:r>
               <a:rPr sz="1200" b="0">
                 <a:solidFill>
-                  <a:srgbClr val="4A6074"/>
+                  <a:srgbClr val="28394A"/>
                 </a:solidFill>
                 <a:latin typeface="Calibri"/>
               </a:rPr>
@@ -8295,56 +7405,13 @@
       </p:sp>
       <p:sp>
         <p:nvSpPr>
-          <p:cNvPr id="27" name="Rectangle 26"/>
-          <p:cNvSpPr/>
-          <p:nvPr/>
-        </p:nvSpPr>
-        <p:spPr>
-          <a:xfrm>
-            <a:off x="6400800" y="4434840"/>
-            <a:ext cx="5029200" cy="9144"/>
-          </a:xfrm>
-          <a:prstGeom prst="rect">
-            <a:avLst/>
-          </a:prstGeom>
-          <a:solidFill>
-            <a:srgbClr val="D0D8E2"/>
-          </a:solidFill>
-          <a:ln>
-            <a:noFill/>
-          </a:ln>
-        </p:spPr>
-        <p:style>
-          <a:lnRef idx="1">
-            <a:schemeClr val="accent1"/>
-          </a:lnRef>
-          <a:fillRef idx="3">
-            <a:schemeClr val="accent1"/>
-          </a:fillRef>
-          <a:effectRef idx="2">
-            <a:schemeClr val="accent1"/>
-          </a:effectRef>
-          <a:fontRef idx="minor">
-            <a:schemeClr val="lt1"/>
-          </a:fontRef>
-        </p:style>
-        <p:txBody>
-          <a:bodyPr rtlCol="0" anchor="ctr"/>
-          <a:lstStyle/>
-          <a:p>
-            <a:pPr algn="ctr"/>
-          </a:p>
-        </p:txBody>
-      </p:sp>
-      <p:sp>
-        <p:nvSpPr>
-          <p:cNvPr id="28" name="TextBox 27"/>
+          <p:cNvPr id="22" name="TextBox 21"/>
           <p:cNvSpPr txBox="1"/>
           <p:nvPr/>
         </p:nvSpPr>
         <p:spPr>
           <a:xfrm>
-            <a:off x="6400800" y="4526280"/>
+            <a:off x="6400800" y="4480560"/>
             <a:ext cx="411480" cy="320040"/>
           </a:xfrm>
           <a:prstGeom prst="rect">
@@ -8362,7 +7429,7 @@
             <a:r>
               <a:rPr sz="1200" b="1">
                 <a:solidFill>
-                  <a:srgbClr val="E62739"/>
+                  <a:srgbClr val="2F9E44"/>
                 </a:solidFill>
                 <a:latin typeface="Calibri"/>
               </a:rPr>
@@ -8373,13 +7440,13 @@
       </p:sp>
       <p:sp>
         <p:nvSpPr>
-          <p:cNvPr id="29" name="TextBox 28"/>
+          <p:cNvPr id="23" name="TextBox 22"/>
           <p:cNvSpPr txBox="1"/>
           <p:nvPr/>
         </p:nvSpPr>
         <p:spPr>
           <a:xfrm>
-            <a:off x="6858000" y="4526280"/>
+            <a:off x="6858000" y="4480560"/>
             <a:ext cx="4754880" cy="502920"/>
           </a:xfrm>
           <a:prstGeom prst="rect">
@@ -8396,7 +7463,7 @@
             <a:r>
               <a:rPr sz="1200" b="0">
                 <a:solidFill>
-                  <a:srgbClr val="4A6074"/>
+                  <a:srgbClr val="28394A"/>
                 </a:solidFill>
                 <a:latin typeface="Calibri"/>
               </a:rPr>
@@ -8407,56 +7474,13 @@
       </p:sp>
       <p:sp>
         <p:nvSpPr>
-          <p:cNvPr id="30" name="Rectangle 29"/>
-          <p:cNvSpPr/>
-          <p:nvPr/>
-        </p:nvSpPr>
-        <p:spPr>
-          <a:xfrm>
-            <a:off x="6400800" y="5029200"/>
-            <a:ext cx="5029200" cy="9144"/>
-          </a:xfrm>
-          <a:prstGeom prst="rect">
-            <a:avLst/>
-          </a:prstGeom>
-          <a:solidFill>
-            <a:srgbClr val="D0D8E2"/>
-          </a:solidFill>
-          <a:ln>
-            <a:noFill/>
-          </a:ln>
-        </p:spPr>
-        <p:style>
-          <a:lnRef idx="1">
-            <a:schemeClr val="accent1"/>
-          </a:lnRef>
-          <a:fillRef idx="3">
-            <a:schemeClr val="accent1"/>
-          </a:fillRef>
-          <a:effectRef idx="2">
-            <a:schemeClr val="accent1"/>
-          </a:effectRef>
-          <a:fontRef idx="minor">
-            <a:schemeClr val="lt1"/>
-          </a:fontRef>
-        </p:style>
-        <p:txBody>
-          <a:bodyPr rtlCol="0" anchor="ctr"/>
-          <a:lstStyle/>
-          <a:p>
-            <a:pPr algn="ctr"/>
-          </a:p>
-        </p:txBody>
-      </p:sp>
-      <p:sp>
-        <p:nvSpPr>
-          <p:cNvPr id="31" name="TextBox 30"/>
+          <p:cNvPr id="24" name="TextBox 23"/>
           <p:cNvSpPr txBox="1"/>
           <p:nvPr/>
         </p:nvSpPr>
         <p:spPr>
           <a:xfrm>
-            <a:off x="6400800" y="5120640"/>
+            <a:off x="6400800" y="5074920"/>
             <a:ext cx="411480" cy="320040"/>
           </a:xfrm>
           <a:prstGeom prst="rect">
@@ -8474,7 +7498,7 @@
             <a:r>
               <a:rPr sz="1200" b="1">
                 <a:solidFill>
-                  <a:srgbClr val="E62739"/>
+                  <a:srgbClr val="2F9E44"/>
                 </a:solidFill>
                 <a:latin typeface="Calibri"/>
               </a:rPr>
@@ -8485,13 +7509,13 @@
       </p:sp>
       <p:sp>
         <p:nvSpPr>
-          <p:cNvPr id="32" name="TextBox 31"/>
+          <p:cNvPr id="25" name="TextBox 24"/>
           <p:cNvSpPr txBox="1"/>
           <p:nvPr/>
         </p:nvSpPr>
         <p:spPr>
           <a:xfrm>
-            <a:off x="6858000" y="5120640"/>
+            <a:off x="6858000" y="5074920"/>
             <a:ext cx="4754880" cy="502920"/>
           </a:xfrm>
           <a:prstGeom prst="rect">
@@ -8508,61 +7532,18 @@
             <a:r>
               <a:rPr sz="1200" b="0">
                 <a:solidFill>
-                  <a:srgbClr val="4A6074"/>
+                  <a:srgbClr val="28394A"/>
                 </a:solidFill>
                 <a:latin typeface="Calibri"/>
               </a:rPr>
               <a:t>Сотрудничество с MA ЦА и ЕАЭС · запуск Young Crew</a:t>
             </a:r>
-          </a:p>
-        </p:txBody>
-      </p:sp>
-      <p:sp>
-        <p:nvSpPr>
-          <p:cNvPr id="33" name="Rectangle 32"/>
-          <p:cNvSpPr/>
-          <p:nvPr/>
-        </p:nvSpPr>
-        <p:spPr>
-          <a:xfrm>
-            <a:off x="6400800" y="5623560"/>
-            <a:ext cx="5029200" cy="9144"/>
-          </a:xfrm>
-          <a:prstGeom prst="rect">
-            <a:avLst/>
-          </a:prstGeom>
-          <a:solidFill>
-            <a:srgbClr val="D0D8E2"/>
-          </a:solidFill>
-          <a:ln>
-            <a:noFill/>
-          </a:ln>
-        </p:spPr>
-        <p:style>
-          <a:lnRef idx="1">
-            <a:schemeClr val="accent1"/>
-          </a:lnRef>
-          <a:fillRef idx="3">
-            <a:schemeClr val="accent1"/>
-          </a:fillRef>
-          <a:effectRef idx="2">
-            <a:schemeClr val="accent1"/>
-          </a:effectRef>
-          <a:fontRef idx="minor">
-            <a:schemeClr val="lt1"/>
-          </a:fontRef>
-        </p:style>
-        <p:txBody>
-          <a:bodyPr rtlCol="0" anchor="ctr"/>
-          <a:lstStyle/>
-          <a:p>
-            <a:pPr algn="ctr"/>
           </a:p>
         </p:txBody>
       </p:sp>
       <p:pic>
         <p:nvPicPr>
-          <p:cNvPr id="34" name="Picture 33" descr="ipma-kr-emblem.png"/>
+          <p:cNvPr id="26" name="Picture 25" descr="ipma-kr-emblem.png"/>
           <p:cNvPicPr>
             <a:picLocks noChangeAspect="1"/>
           </p:cNvPicPr>
@@ -8577,7 +7558,7 @@
         <p:spPr>
           <a:xfrm>
             <a:off x="640080" y="6355080"/>
-            <a:ext cx="257362" cy="256032"/>
+            <a:ext cx="238979" cy="237744"/>
           </a:xfrm>
           <a:prstGeom prst="rect">
             <a:avLst/>
@@ -8586,14 +7567,14 @@
       </p:pic>
       <p:sp>
         <p:nvSpPr>
-          <p:cNvPr id="35" name="TextBox 34"/>
+          <p:cNvPr id="27" name="TextBox 26"/>
           <p:cNvSpPr txBox="1"/>
           <p:nvPr/>
         </p:nvSpPr>
         <p:spPr>
           <a:xfrm>
             <a:off x="1005840" y="6355080"/>
-            <a:ext cx="5486400" cy="274320"/>
+            <a:ext cx="6400800" cy="274320"/>
           </a:xfrm>
           <a:prstGeom prst="rect">
             <a:avLst/>
@@ -8610,18 +7591,18 @@
             <a:r>
               <a:rPr sz="1000" b="1">
                 <a:solidFill>
-                  <a:srgbClr val="7A8FA3"/>
-                </a:solidFill>
-                <a:latin typeface="Calibri"/>
-              </a:rPr>
-              <a:t>IPMA Kyrgyz Republic</a:t>
-            </a:r>
-          </a:p>
-        </p:txBody>
-      </p:sp>
-      <p:sp>
-        <p:nvSpPr>
-          <p:cNvPr id="36" name="TextBox 35"/>
+                  <a:srgbClr val="5C6B72"/>
+                </a:solidFill>
+                <a:latin typeface="Calibri"/>
+              </a:rPr>
+              <a:t>IPMA » Kyrgyz Republic</a:t>
+            </a:r>
+          </a:p>
+        </p:txBody>
+      </p:sp>
+      <p:sp>
+        <p:nvSpPr>
+          <p:cNvPr id="28" name="TextBox 27"/>
           <p:cNvSpPr txBox="1"/>
           <p:nvPr/>
         </p:nvSpPr>
@@ -8645,7 +7626,7 @@
             <a:r>
               <a:rPr sz="1000" b="1">
                 <a:solidFill>
-                  <a:srgbClr val="7A8FA3"/>
+                  <a:srgbClr val="5C6B72"/>
                 </a:solidFill>
                 <a:latin typeface="Calibri"/>
               </a:rPr>
@@ -8687,7 +7668,7 @@
             <a:avLst/>
           </a:prstGeom>
           <a:solidFill>
-            <a:srgbClr val="F5F8FB"/>
+            <a:srgbClr val="EEF2F1"/>
           </a:solidFill>
           <a:ln>
             <a:noFill/>
@@ -8717,25 +7698,95 @@
       </p:sp>
       <p:sp>
         <p:nvSpPr>
-          <p:cNvPr id="3" name="Oval 2"/>
+          <p:cNvPr id="3" name="TextBox 2"/>
+          <p:cNvSpPr txBox="1"/>
+          <p:nvPr/>
+        </p:nvSpPr>
+        <p:spPr>
+          <a:xfrm>
+            <a:off x="640080" y="502920"/>
+            <a:ext cx="10058400" cy="320040"/>
+          </a:xfrm>
+          <a:prstGeom prst="rect">
+            <a:avLst/>
+          </a:prstGeom>
+          <a:noFill/>
+        </p:spPr>
+        <p:txBody>
+          <a:bodyPr wrap="none">
+            <a:spAutoFit/>
+          </a:bodyPr>
+          <a:lstStyle/>
+          <a:p>
+            <a:pPr algn="l"/>
+            <a:r>
+              <a:rPr sz="1100" b="1">
+                <a:solidFill>
+                  <a:srgbClr val="1F7A34"/>
+                </a:solidFill>
+                <a:latin typeface="Calibri"/>
+              </a:rPr>
+              <a:t>07  »»  ЭКОСИСТЕМА</a:t>
+            </a:r>
+          </a:p>
+        </p:txBody>
+      </p:sp>
+      <p:sp>
+        <p:nvSpPr>
+          <p:cNvPr id="4" name="TextBox 3"/>
+          <p:cNvSpPr txBox="1"/>
+          <p:nvPr/>
+        </p:nvSpPr>
+        <p:spPr>
+          <a:xfrm>
+            <a:off x="640080" y="868680"/>
+            <a:ext cx="10058400" cy="640080"/>
+          </a:xfrm>
+          <a:prstGeom prst="rect">
+            <a:avLst/>
+          </a:prstGeom>
+          <a:noFill/>
+        </p:spPr>
+        <p:txBody>
+          <a:bodyPr wrap="none">
+            <a:spAutoFit/>
+          </a:bodyPr>
+          <a:lstStyle/>
+          <a:p>
+            <a:pPr algn="l"/>
+            <a:r>
+              <a:rPr sz="3000" b="1">
+                <a:solidFill>
+                  <a:srgbClr val="0D223B"/>
+                </a:solidFill>
+                <a:latin typeface="Calibri"/>
+              </a:rPr>
+              <a:t>Экосистема и продвижение</a:t>
+            </a:r>
+          </a:p>
+        </p:txBody>
+      </p:sp>
+      <p:sp>
+        <p:nvSpPr>
+          <p:cNvPr id="5" name="Rounded Rectangle 4"/>
           <p:cNvSpPr/>
           <p:nvPr/>
         </p:nvSpPr>
         <p:spPr>
           <a:xfrm>
-            <a:off x="7772400" y="-1371600"/>
-            <a:ext cx="5486400" cy="4114800"/>
-          </a:xfrm>
-          <a:prstGeom prst="ellipse">
+            <a:off x="640080" y="1920240"/>
+            <a:ext cx="5029200" cy="1737360"/>
+          </a:xfrm>
+          <a:prstGeom prst="roundRect">
             <a:avLst/>
           </a:prstGeom>
           <a:solidFill>
-            <a:srgbClr val="DCE6F2">
-              <a:alpha val="35000"/>
-            </a:srgbClr>
+            <a:srgbClr val="FFFFFF"/>
           </a:solidFill>
           <a:ln>
-            <a:noFill/>
+            <a:solidFill>
+              <a:srgbClr val="D9E2DF"/>
+            </a:solidFill>
           </a:ln>
         </p:spPr>
         <p:style>
@@ -8762,25 +7813,97 @@
       </p:sp>
       <p:sp>
         <p:nvSpPr>
-          <p:cNvPr id="4" name="Oval 3"/>
+          <p:cNvPr id="6" name="TextBox 5"/>
+          <p:cNvSpPr txBox="1"/>
+          <p:nvPr/>
+        </p:nvSpPr>
+        <p:spPr>
+          <a:xfrm>
+            <a:off x="868680" y="2148840"/>
+            <a:ext cx="4572000" cy="1371600"/>
+          </a:xfrm>
+          <a:prstGeom prst="rect">
+            <a:avLst/>
+          </a:prstGeom>
+          <a:noFill/>
+        </p:spPr>
+        <p:txBody>
+          <a:bodyPr wrap="square">
+            <a:spAutoFit/>
+          </a:bodyPr>
+          <a:lstStyle/>
+          <a:p>
+            <a:r>
+              <a:rPr sz="1100" b="1">
+                <a:solidFill>
+                  <a:srgbClr val="1F7A34"/>
+                </a:solidFill>
+                <a:latin typeface="Calibri"/>
+              </a:rPr>
+              <a:t>01</a:t>
+            </a:r>
+          </a:p>
+          <a:p>
+            <a:pPr>
+              <a:spcBef>
+                <a:spcPts val="600"/>
+              </a:spcBef>
+              <a:spcAft>
+                <a:spcPts val="600"/>
+              </a:spcAft>
+            </a:pPr>
+            <a:r>
+              <a:rPr sz="2000" b="1">
+                <a:solidFill>
+                  <a:srgbClr val="0D223B"/>
+                </a:solidFill>
+                <a:latin typeface="Calibri"/>
+              </a:rPr>
+              <a:t>Госсектор</a:t>
+            </a:r>
+          </a:p>
+          <a:p>
+            <a:pPr>
+              <a:spcBef>
+                <a:spcPts val="600"/>
+              </a:spcBef>
+              <a:spcAft>
+                <a:spcPts val="600"/>
+              </a:spcAft>
+            </a:pPr>
+            <a:r>
+              <a:rPr sz="1300" b="0">
+                <a:solidFill>
+                  <a:srgbClr val="28394A"/>
+                </a:solidFill>
+                <a:latin typeface="Calibri"/>
+              </a:rPr>
+              <a:t>Цифровые и инфраструктурные проекты министерств и ведомств</a:t>
+            </a:r>
+          </a:p>
+        </p:txBody>
+      </p:sp>
+      <p:sp>
+        <p:nvSpPr>
+          <p:cNvPr id="7" name="Rounded Rectangle 6"/>
           <p:cNvSpPr/>
           <p:nvPr/>
         </p:nvSpPr>
         <p:spPr>
           <a:xfrm>
-            <a:off x="-1828800" y="4114800"/>
-            <a:ext cx="5029200" cy="3657600"/>
-          </a:xfrm>
-          <a:prstGeom prst="ellipse">
+            <a:off x="6400800" y="1920240"/>
+            <a:ext cx="5029200" cy="1737360"/>
+          </a:xfrm>
+          <a:prstGeom prst="roundRect">
             <a:avLst/>
           </a:prstGeom>
           <a:solidFill>
-            <a:srgbClr val="E3EBF4">
-              <a:alpha val="40000"/>
-            </a:srgbClr>
+            <a:srgbClr val="FFFFFF"/>
           </a:solidFill>
           <a:ln>
-            <a:noFill/>
+            <a:solidFill>
+              <a:srgbClr val="D9E2DF"/>
+            </a:solidFill>
           </a:ln>
         </p:spPr>
         <p:style>
@@ -8807,14 +7930,14 @@
       </p:sp>
       <p:sp>
         <p:nvSpPr>
-          <p:cNvPr id="5" name="TextBox 4"/>
+          <p:cNvPr id="8" name="TextBox 7"/>
           <p:cNvSpPr txBox="1"/>
           <p:nvPr/>
         </p:nvSpPr>
         <p:spPr>
           <a:xfrm>
-            <a:off x="640080" y="502920"/>
-            <a:ext cx="9144000" cy="320040"/>
+            <a:off x="6629400" y="2148840"/>
+            <a:ext cx="4572000" cy="1371600"/>
           </a:xfrm>
           <a:prstGeom prst="rect">
             <a:avLst/>
@@ -8822,78 +7945,82 @@
           <a:noFill/>
         </p:spPr>
         <p:txBody>
-          <a:bodyPr wrap="none">
+          <a:bodyPr wrap="square">
             <a:spAutoFit/>
           </a:bodyPr>
           <a:lstStyle/>
           <a:p>
-            <a:pPr algn="l"/>
             <a:r>
               <a:rPr sz="1100" b="1">
                 <a:solidFill>
-                  <a:srgbClr val="E62739"/>
-                </a:solidFill>
-                <a:latin typeface="Calibri"/>
-              </a:rPr>
-              <a:t>07  »  ЭКОСИСТЕМА</a:t>
-            </a:r>
-          </a:p>
-        </p:txBody>
-      </p:sp>
-      <p:sp>
-        <p:nvSpPr>
-          <p:cNvPr id="6" name="TextBox 5"/>
-          <p:cNvSpPr txBox="1"/>
-          <p:nvPr/>
-        </p:nvSpPr>
-        <p:spPr>
-          <a:xfrm>
-            <a:off x="640080" y="868680"/>
-            <a:ext cx="9144000" cy="731520"/>
-          </a:xfrm>
-          <a:prstGeom prst="rect">
-            <a:avLst/>
-          </a:prstGeom>
-          <a:noFill/>
-        </p:spPr>
-        <p:txBody>
-          <a:bodyPr wrap="none">
-            <a:spAutoFit/>
-          </a:bodyPr>
-          <a:lstStyle/>
-          <a:p>
-            <a:pPr algn="l"/>
-            <a:r>
-              <a:rPr sz="3200" b="1">
-                <a:solidFill>
-                  <a:srgbClr val="122033"/>
-                </a:solidFill>
-                <a:latin typeface="Calibri"/>
-              </a:rPr>
-              <a:t>Экосистема и продвижение</a:t>
-            </a:r>
-          </a:p>
-        </p:txBody>
-      </p:sp>
-      <p:sp>
-        <p:nvSpPr>
-          <p:cNvPr id="7" name="Rectangle 6"/>
+                  <a:srgbClr val="1F7A34"/>
+                </a:solidFill>
+                <a:latin typeface="Calibri"/>
+              </a:rPr>
+              <a:t>02</a:t>
+            </a:r>
+          </a:p>
+          <a:p>
+            <a:pPr>
+              <a:spcBef>
+                <a:spcPts val="600"/>
+              </a:spcBef>
+              <a:spcAft>
+                <a:spcPts val="600"/>
+              </a:spcAft>
+            </a:pPr>
+            <a:r>
+              <a:rPr sz="2000" b="1">
+                <a:solidFill>
+                  <a:srgbClr val="0D223B"/>
+                </a:solidFill>
+                <a:latin typeface="Calibri"/>
+              </a:rPr>
+              <a:t>Бизнес</a:t>
+            </a:r>
+          </a:p>
+          <a:p>
+            <a:pPr>
+              <a:spcBef>
+                <a:spcPts val="600"/>
+              </a:spcBef>
+              <a:spcAft>
+                <a:spcPts val="600"/>
+              </a:spcAft>
+            </a:pPr>
+            <a:r>
+              <a:rPr sz="1300" b="0">
+                <a:solidFill>
+                  <a:srgbClr val="28394A"/>
+                </a:solidFill>
+                <a:latin typeface="Calibri"/>
+              </a:rPr>
+              <a:t>Компании и подрядчики, реализующие проекты и программы</a:t>
+            </a:r>
+          </a:p>
+        </p:txBody>
+      </p:sp>
+      <p:sp>
+        <p:nvSpPr>
+          <p:cNvPr id="9" name="Rounded Rectangle 8"/>
           <p:cNvSpPr/>
           <p:nvPr/>
         </p:nvSpPr>
         <p:spPr>
           <a:xfrm>
-            <a:off x="640080" y="2011680"/>
-            <a:ext cx="4754880" cy="41148"/>
-          </a:xfrm>
-          <a:prstGeom prst="rect">
+            <a:off x="640080" y="4023360"/>
+            <a:ext cx="5029200" cy="1737360"/>
+          </a:xfrm>
+          <a:prstGeom prst="roundRect">
             <a:avLst/>
           </a:prstGeom>
           <a:solidFill>
-            <a:srgbClr val="E62739"/>
+            <a:srgbClr val="FFFFFF"/>
           </a:solidFill>
           <a:ln>
-            <a:noFill/>
+            <a:solidFill>
+              <a:srgbClr val="D9E2DF"/>
+            </a:solidFill>
           </a:ln>
         </p:spPr>
         <p:style>
@@ -8920,14 +8047,14 @@
       </p:sp>
       <p:sp>
         <p:nvSpPr>
-          <p:cNvPr id="8" name="TextBox 7"/>
+          <p:cNvPr id="10" name="TextBox 9"/>
           <p:cNvSpPr txBox="1"/>
           <p:nvPr/>
         </p:nvSpPr>
         <p:spPr>
           <a:xfrm>
-            <a:off x="640080" y="2194560"/>
-            <a:ext cx="4937760" cy="1280160"/>
+            <a:off x="868680" y="4251960"/>
+            <a:ext cx="4572000" cy="1371600"/>
           </a:xfrm>
           <a:prstGeom prst="rect">
             <a:avLst/>
@@ -8941,55 +8068,76 @@
           <a:lstStyle/>
           <a:p>
             <a:r>
-              <a:rPr sz="1800" b="1">
-                <a:solidFill>
-                  <a:srgbClr val="122033"/>
-                </a:solidFill>
-                <a:latin typeface="Calibri"/>
-              </a:rPr>
-              <a:t>Госсектор</a:t>
-            </a:r>
-          </a:p>
-          <a:p>
-            <a:pPr algn="l">
+              <a:rPr sz="1100" b="1">
+                <a:solidFill>
+                  <a:srgbClr val="1F7A34"/>
+                </a:solidFill>
+                <a:latin typeface="Calibri"/>
+              </a:rPr>
+              <a:t>03</a:t>
+            </a:r>
+          </a:p>
+          <a:p>
+            <a:pPr>
               <a:spcBef>
-                <a:spcPts val="800"/>
+                <a:spcPts val="600"/>
               </a:spcBef>
               <a:spcAft>
                 <a:spcPts val="600"/>
               </a:spcAft>
             </a:pPr>
             <a:r>
-              <a:rPr sz="1400" b="0">
-                <a:solidFill>
-                  <a:srgbClr val="4A6074"/>
-                </a:solidFill>
-                <a:latin typeface="Calibri"/>
-              </a:rPr>
-              <a:t>Цифровые и инфраструктурные проекты министерств и ведомств</a:t>
-            </a:r>
-          </a:p>
-        </p:txBody>
-      </p:sp>
-      <p:sp>
-        <p:nvSpPr>
-          <p:cNvPr id="9" name="Rectangle 8"/>
+              <a:rPr sz="2000" b="1">
+                <a:solidFill>
+                  <a:srgbClr val="0D223B"/>
+                </a:solidFill>
+                <a:latin typeface="Calibri"/>
+              </a:rPr>
+              <a:t>Образование</a:t>
+            </a:r>
+          </a:p>
+          <a:p>
+            <a:pPr>
+              <a:spcBef>
+                <a:spcPts val="600"/>
+              </a:spcBef>
+              <a:spcAft>
+                <a:spcPts val="600"/>
+              </a:spcAft>
+            </a:pPr>
+            <a:r>
+              <a:rPr sz="1300" b="0">
+                <a:solidFill>
+                  <a:srgbClr val="28394A"/>
+                </a:solidFill>
+                <a:latin typeface="Calibri"/>
+              </a:rPr>
+              <a:t>Университеты Бишкека — источник молодых кадров и Young Crew</a:t>
+            </a:r>
+          </a:p>
+        </p:txBody>
+      </p:sp>
+      <p:sp>
+        <p:nvSpPr>
+          <p:cNvPr id="11" name="Rounded Rectangle 10"/>
           <p:cNvSpPr/>
           <p:nvPr/>
         </p:nvSpPr>
         <p:spPr>
           <a:xfrm>
-            <a:off x="6400800" y="2011680"/>
-            <a:ext cx="4754880" cy="41148"/>
-          </a:xfrm>
-          <a:prstGeom prst="rect">
+            <a:off x="6400800" y="4023360"/>
+            <a:ext cx="5029200" cy="1737360"/>
+          </a:xfrm>
+          <a:prstGeom prst="roundRect">
             <a:avLst/>
           </a:prstGeom>
           <a:solidFill>
-            <a:srgbClr val="D4B000"/>
+            <a:srgbClr val="FFFFFF"/>
           </a:solidFill>
           <a:ln>
-            <a:noFill/>
+            <a:solidFill>
+              <a:srgbClr val="D9E2DF"/>
+            </a:solidFill>
           </a:ln>
         </p:spPr>
         <p:style>
@@ -9016,14 +8164,14 @@
       </p:sp>
       <p:sp>
         <p:nvSpPr>
-          <p:cNvPr id="10" name="TextBox 9"/>
+          <p:cNvPr id="12" name="TextBox 11"/>
           <p:cNvSpPr txBox="1"/>
           <p:nvPr/>
         </p:nvSpPr>
         <p:spPr>
           <a:xfrm>
-            <a:off x="6400800" y="2194560"/>
-            <a:ext cx="4937760" cy="1280160"/>
+            <a:off x="6629400" y="4251960"/>
+            <a:ext cx="4572000" cy="1371600"/>
           </a:xfrm>
           <a:prstGeom prst="rect">
             <a:avLst/>
@@ -9037,220 +8185,47 @@
           <a:lstStyle/>
           <a:p>
             <a:r>
-              <a:rPr sz="1800" b="1">
-                <a:solidFill>
-                  <a:srgbClr val="122033"/>
-                </a:solidFill>
-                <a:latin typeface="Calibri"/>
-              </a:rPr>
-              <a:t>Бизнес</a:t>
-            </a:r>
-          </a:p>
-          <a:p>
-            <a:pPr algn="l">
+              <a:rPr sz="1100" b="1">
+                <a:solidFill>
+                  <a:srgbClr val="1F7A34"/>
+                </a:solidFill>
+                <a:latin typeface="Calibri"/>
+              </a:rPr>
+              <a:t>04</a:t>
+            </a:r>
+          </a:p>
+          <a:p>
+            <a:pPr>
               <a:spcBef>
-                <a:spcPts val="800"/>
+                <a:spcPts val="600"/>
               </a:spcBef>
               <a:spcAft>
                 <a:spcPts val="600"/>
               </a:spcAft>
             </a:pPr>
             <a:r>
-              <a:rPr sz="1400" b="0">
-                <a:solidFill>
-                  <a:srgbClr val="4A6074"/>
-                </a:solidFill>
-                <a:latin typeface="Calibri"/>
-              </a:rPr>
-              <a:t>Компании и подрядчики, реализующие проекты и программы</a:t>
-            </a:r>
-          </a:p>
-        </p:txBody>
-      </p:sp>
-      <p:sp>
-        <p:nvSpPr>
-          <p:cNvPr id="11" name="Rectangle 10"/>
-          <p:cNvSpPr/>
-          <p:nvPr/>
-        </p:nvSpPr>
-        <p:spPr>
-          <a:xfrm>
-            <a:off x="640080" y="3931920"/>
-            <a:ext cx="4754880" cy="41148"/>
-          </a:xfrm>
-          <a:prstGeom prst="rect">
-            <a:avLst/>
-          </a:prstGeom>
-          <a:solidFill>
-            <a:srgbClr val="1F8F5F"/>
-          </a:solidFill>
-          <a:ln>
-            <a:noFill/>
-          </a:ln>
-        </p:spPr>
-        <p:style>
-          <a:lnRef idx="1">
-            <a:schemeClr val="accent1"/>
-          </a:lnRef>
-          <a:fillRef idx="3">
-            <a:schemeClr val="accent1"/>
-          </a:fillRef>
-          <a:effectRef idx="2">
-            <a:schemeClr val="accent1"/>
-          </a:effectRef>
-          <a:fontRef idx="minor">
-            <a:schemeClr val="lt1"/>
-          </a:fontRef>
-        </p:style>
-        <p:txBody>
-          <a:bodyPr rtlCol="0" anchor="ctr"/>
-          <a:lstStyle/>
-          <a:p>
-            <a:pPr algn="ctr"/>
-          </a:p>
-        </p:txBody>
-      </p:sp>
-      <p:sp>
-        <p:nvSpPr>
-          <p:cNvPr id="12" name="TextBox 11"/>
-          <p:cNvSpPr txBox="1"/>
-          <p:nvPr/>
-        </p:nvSpPr>
-        <p:spPr>
-          <a:xfrm>
-            <a:off x="640080" y="4114800"/>
-            <a:ext cx="4937760" cy="1280160"/>
-          </a:xfrm>
-          <a:prstGeom prst="rect">
-            <a:avLst/>
-          </a:prstGeom>
-          <a:noFill/>
-        </p:spPr>
-        <p:txBody>
-          <a:bodyPr wrap="square">
-            <a:spAutoFit/>
-          </a:bodyPr>
-          <a:lstStyle/>
-          <a:p>
-            <a:r>
-              <a:rPr sz="1800" b="1">
-                <a:solidFill>
-                  <a:srgbClr val="122033"/>
-                </a:solidFill>
-                <a:latin typeface="Calibri"/>
-              </a:rPr>
-              <a:t>Образование</a:t>
-            </a:r>
-          </a:p>
-          <a:p>
-            <a:pPr algn="l">
+              <a:rPr sz="2000" b="1">
+                <a:solidFill>
+                  <a:srgbClr val="0D223B"/>
+                </a:solidFill>
+                <a:latin typeface="Calibri"/>
+              </a:rPr>
+              <a:t>Обучение</a:t>
+            </a:r>
+          </a:p>
+          <a:p>
+            <a:pPr>
               <a:spcBef>
-                <a:spcPts val="800"/>
+                <a:spcPts val="600"/>
               </a:spcBef>
               <a:spcAft>
                 <a:spcPts val="600"/>
               </a:spcAft>
             </a:pPr>
             <a:r>
-              <a:rPr sz="1400" b="0">
-                <a:solidFill>
-                  <a:srgbClr val="4A6074"/>
-                </a:solidFill>
-                <a:latin typeface="Calibri"/>
-              </a:rPr>
-              <a:t>Университеты Бишкека — источник молодых кадров и Young Crew</a:t>
-            </a:r>
-          </a:p>
-        </p:txBody>
-      </p:sp>
-      <p:sp>
-        <p:nvSpPr>
-          <p:cNvPr id="13" name="Rectangle 12"/>
-          <p:cNvSpPr/>
-          <p:nvPr/>
-        </p:nvSpPr>
-        <p:spPr>
-          <a:xfrm>
-            <a:off x="6400800" y="3931920"/>
-            <a:ext cx="4754880" cy="41148"/>
-          </a:xfrm>
-          <a:prstGeom prst="rect">
-            <a:avLst/>
-          </a:prstGeom>
-          <a:solidFill>
-            <a:srgbClr val="F06A76"/>
-          </a:solidFill>
-          <a:ln>
-            <a:noFill/>
-          </a:ln>
-        </p:spPr>
-        <p:style>
-          <a:lnRef idx="1">
-            <a:schemeClr val="accent1"/>
-          </a:lnRef>
-          <a:fillRef idx="3">
-            <a:schemeClr val="accent1"/>
-          </a:fillRef>
-          <a:effectRef idx="2">
-            <a:schemeClr val="accent1"/>
-          </a:effectRef>
-          <a:fontRef idx="minor">
-            <a:schemeClr val="lt1"/>
-          </a:fontRef>
-        </p:style>
-        <p:txBody>
-          <a:bodyPr rtlCol="0" anchor="ctr"/>
-          <a:lstStyle/>
-          <a:p>
-            <a:pPr algn="ctr"/>
-          </a:p>
-        </p:txBody>
-      </p:sp>
-      <p:sp>
-        <p:nvSpPr>
-          <p:cNvPr id="14" name="TextBox 13"/>
-          <p:cNvSpPr txBox="1"/>
-          <p:nvPr/>
-        </p:nvSpPr>
-        <p:spPr>
-          <a:xfrm>
-            <a:off x="6400800" y="4114800"/>
-            <a:ext cx="4937760" cy="1280160"/>
-          </a:xfrm>
-          <a:prstGeom prst="rect">
-            <a:avLst/>
-          </a:prstGeom>
-          <a:noFill/>
-        </p:spPr>
-        <p:txBody>
-          <a:bodyPr wrap="square">
-            <a:spAutoFit/>
-          </a:bodyPr>
-          <a:lstStyle/>
-          <a:p>
-            <a:r>
-              <a:rPr sz="1800" b="1">
-                <a:solidFill>
-                  <a:srgbClr val="122033"/>
-                </a:solidFill>
-                <a:latin typeface="Calibri"/>
-              </a:rPr>
-              <a:t>Обучение</a:t>
-            </a:r>
-          </a:p>
-          <a:p>
-            <a:pPr algn="l">
-              <a:spcBef>
-                <a:spcPts val="800"/>
-              </a:spcBef>
-              <a:spcAft>
-                <a:spcPts val="600"/>
-              </a:spcAft>
-            </a:pPr>
-            <a:r>
-              <a:rPr sz="1400" b="0">
-                <a:solidFill>
-                  <a:srgbClr val="4A6074"/>
+              <a:rPr sz="1300" b="0">
+                <a:solidFill>
+                  <a:srgbClr val="28394A"/>
                 </a:solidFill>
                 <a:latin typeface="Calibri"/>
               </a:rPr>
@@ -9261,7 +8236,7 @@
       </p:sp>
       <p:pic>
         <p:nvPicPr>
-          <p:cNvPr id="15" name="Picture 14" descr="ipma-kr-emblem.png"/>
+          <p:cNvPr id="13" name="Picture 12" descr="ipma-kr-emblem.png"/>
           <p:cNvPicPr>
             <a:picLocks noChangeAspect="1"/>
           </p:cNvPicPr>
@@ -9276,7 +8251,7 @@
         <p:spPr>
           <a:xfrm>
             <a:off x="640080" y="6355080"/>
-            <a:ext cx="257362" cy="256032"/>
+            <a:ext cx="238979" cy="237744"/>
           </a:xfrm>
           <a:prstGeom prst="rect">
             <a:avLst/>
@@ -9285,14 +8260,14 @@
       </p:pic>
       <p:sp>
         <p:nvSpPr>
-          <p:cNvPr id="16" name="TextBox 15"/>
+          <p:cNvPr id="14" name="TextBox 13"/>
           <p:cNvSpPr txBox="1"/>
           <p:nvPr/>
         </p:nvSpPr>
         <p:spPr>
           <a:xfrm>
             <a:off x="1005840" y="6355080"/>
-            <a:ext cx="5486400" cy="274320"/>
+            <a:ext cx="6400800" cy="274320"/>
           </a:xfrm>
           <a:prstGeom prst="rect">
             <a:avLst/>
@@ -9309,18 +8284,18 @@
             <a:r>
               <a:rPr sz="1000" b="1">
                 <a:solidFill>
-                  <a:srgbClr val="7A8FA3"/>
-                </a:solidFill>
-                <a:latin typeface="Calibri"/>
-              </a:rPr>
-              <a:t>IPMA Kyrgyz Republic</a:t>
-            </a:r>
-          </a:p>
-        </p:txBody>
-      </p:sp>
-      <p:sp>
-        <p:nvSpPr>
-          <p:cNvPr id="17" name="TextBox 16"/>
+                  <a:srgbClr val="5C6B72"/>
+                </a:solidFill>
+                <a:latin typeface="Calibri"/>
+              </a:rPr>
+              <a:t>IPMA » Kyrgyz Republic</a:t>
+            </a:r>
+          </a:p>
+        </p:txBody>
+      </p:sp>
+      <p:sp>
+        <p:nvSpPr>
+          <p:cNvPr id="15" name="TextBox 14"/>
           <p:cNvSpPr txBox="1"/>
           <p:nvPr/>
         </p:nvSpPr>
@@ -9344,7 +8319,7 @@
             <a:r>
               <a:rPr sz="1000" b="1">
                 <a:solidFill>
-                  <a:srgbClr val="7A8FA3"/>
+                  <a:srgbClr val="5C6B72"/>
                 </a:solidFill>
                 <a:latin typeface="Calibri"/>
               </a:rPr>
@@ -9386,7 +8361,7 @@
             <a:avLst/>
           </a:prstGeom>
           <a:solidFill>
-            <a:srgbClr val="F5F8FB"/>
+            <a:srgbClr val="EEF2F1"/>
           </a:solidFill>
           <a:ln>
             <a:noFill/>
@@ -9416,22 +8391,90 @@
       </p:sp>
       <p:sp>
         <p:nvSpPr>
-          <p:cNvPr id="3" name="Oval 2"/>
+          <p:cNvPr id="3" name="TextBox 2"/>
+          <p:cNvSpPr txBox="1"/>
+          <p:nvPr/>
+        </p:nvSpPr>
+        <p:spPr>
+          <a:xfrm>
+            <a:off x="640080" y="502920"/>
+            <a:ext cx="10058400" cy="320040"/>
+          </a:xfrm>
+          <a:prstGeom prst="rect">
+            <a:avLst/>
+          </a:prstGeom>
+          <a:noFill/>
+        </p:spPr>
+        <p:txBody>
+          <a:bodyPr wrap="none">
+            <a:spAutoFit/>
+          </a:bodyPr>
+          <a:lstStyle/>
+          <a:p>
+            <a:pPr algn="l"/>
+            <a:r>
+              <a:rPr sz="1100" b="1">
+                <a:solidFill>
+                  <a:srgbClr val="1F7A34"/>
+                </a:solidFill>
+                <a:latin typeface="Calibri"/>
+              </a:rPr>
+              <a:t>08  »»  РЕЗУЛЬТАТЫ</a:t>
+            </a:r>
+          </a:p>
+        </p:txBody>
+      </p:sp>
+      <p:sp>
+        <p:nvSpPr>
+          <p:cNvPr id="4" name="TextBox 3"/>
+          <p:cNvSpPr txBox="1"/>
+          <p:nvPr/>
+        </p:nvSpPr>
+        <p:spPr>
+          <a:xfrm>
+            <a:off x="640080" y="868680"/>
+            <a:ext cx="10058400" cy="640080"/>
+          </a:xfrm>
+          <a:prstGeom prst="rect">
+            <a:avLst/>
+          </a:prstGeom>
+          <a:noFill/>
+        </p:spPr>
+        <p:txBody>
+          <a:bodyPr wrap="none">
+            <a:spAutoFit/>
+          </a:bodyPr>
+          <a:lstStyle/>
+          <a:p>
+            <a:pPr algn="l"/>
+            <a:r>
+              <a:rPr sz="3000" b="1">
+                <a:solidFill>
+                  <a:srgbClr val="0D223B"/>
+                </a:solidFill>
+                <a:latin typeface="Calibri"/>
+              </a:rPr>
+              <a:t>Что уже сделано</a:t>
+            </a:r>
+          </a:p>
+        </p:txBody>
+      </p:sp>
+      <p:sp>
+        <p:nvSpPr>
+          <p:cNvPr id="5" name="Rectangle 4"/>
           <p:cNvSpPr/>
           <p:nvPr/>
         </p:nvSpPr>
         <p:spPr>
           <a:xfrm>
-            <a:off x="7772400" y="-1371600"/>
-            <a:ext cx="5486400" cy="4114800"/>
-          </a:xfrm>
-          <a:prstGeom prst="ellipse">
+            <a:off x="868680" y="1965960"/>
+            <a:ext cx="36576" cy="3657600"/>
+          </a:xfrm>
+          <a:prstGeom prst="rect">
             <a:avLst/>
           </a:prstGeom>
           <a:solidFill>
-            <a:srgbClr val="DCE6F2">
-              <a:alpha val="35000"/>
-            </a:srgbClr>
+            <a:srgbClr val="2F9E44"/>
           </a:solidFill>
           <a:ln>
             <a:noFill/>
@@ -9461,25 +8504,25 @@
       </p:sp>
       <p:sp>
         <p:nvSpPr>
-          <p:cNvPr id="4" name="Oval 3"/>
+          <p:cNvPr id="6" name="Oval 5"/>
           <p:cNvSpPr/>
           <p:nvPr/>
         </p:nvSpPr>
         <p:spPr>
           <a:xfrm>
-            <a:off x="-1828800" y="4114800"/>
-            <a:ext cx="5029200" cy="3657600"/>
+            <a:off x="749808" y="2039112"/>
+            <a:ext cx="256032" cy="256032"/>
           </a:xfrm>
           <a:prstGeom prst="ellipse">
             <a:avLst/>
           </a:prstGeom>
           <a:solidFill>
-            <a:srgbClr val="E3EBF4">
-              <a:alpha val="40000"/>
-            </a:srgbClr>
+            <a:srgbClr val="FFFFFF"/>
           </a:solidFill>
-          <a:ln>
-            <a:noFill/>
+          <a:ln w="31750">
+            <a:solidFill>
+              <a:srgbClr val="2F9E44"/>
+            </a:solidFill>
           </a:ln>
         </p:spPr>
         <p:style>
@@ -9506,165 +8549,7 @@
       </p:sp>
       <p:sp>
         <p:nvSpPr>
-          <p:cNvPr id="5" name="TextBox 4"/>
-          <p:cNvSpPr txBox="1"/>
-          <p:nvPr/>
-        </p:nvSpPr>
-        <p:spPr>
-          <a:xfrm>
-            <a:off x="640080" y="502920"/>
-            <a:ext cx="9144000" cy="320040"/>
-          </a:xfrm>
-          <a:prstGeom prst="rect">
-            <a:avLst/>
-          </a:prstGeom>
-          <a:noFill/>
-        </p:spPr>
-        <p:txBody>
-          <a:bodyPr wrap="none">
-            <a:spAutoFit/>
-          </a:bodyPr>
-          <a:lstStyle/>
-          <a:p>
-            <a:pPr algn="l"/>
-            <a:r>
-              <a:rPr sz="1100" b="1">
-                <a:solidFill>
-                  <a:srgbClr val="E62739"/>
-                </a:solidFill>
-                <a:latin typeface="Calibri"/>
-              </a:rPr>
-              <a:t>08  »  РЕЗУЛЬТАТЫ</a:t>
-            </a:r>
-          </a:p>
-        </p:txBody>
-      </p:sp>
-      <p:sp>
-        <p:nvSpPr>
-          <p:cNvPr id="6" name="TextBox 5"/>
-          <p:cNvSpPr txBox="1"/>
-          <p:nvPr/>
-        </p:nvSpPr>
-        <p:spPr>
-          <a:xfrm>
-            <a:off x="640080" y="868680"/>
-            <a:ext cx="9144000" cy="731520"/>
-          </a:xfrm>
-          <a:prstGeom prst="rect">
-            <a:avLst/>
-          </a:prstGeom>
-          <a:noFill/>
-        </p:spPr>
-        <p:txBody>
-          <a:bodyPr wrap="none">
-            <a:spAutoFit/>
-          </a:bodyPr>
-          <a:lstStyle/>
-          <a:p>
-            <a:pPr algn="l"/>
-            <a:r>
-              <a:rPr sz="3200" b="1">
-                <a:solidFill>
-                  <a:srgbClr val="122033"/>
-                </a:solidFill>
-                <a:latin typeface="Calibri"/>
-              </a:rPr>
-              <a:t>Что уже сделано</a:t>
-            </a:r>
-          </a:p>
-        </p:txBody>
-      </p:sp>
-      <p:sp>
-        <p:nvSpPr>
-          <p:cNvPr id="7" name="Rectangle 6"/>
-          <p:cNvSpPr/>
-          <p:nvPr/>
-        </p:nvSpPr>
-        <p:spPr>
-          <a:xfrm>
-            <a:off x="868680" y="2011680"/>
-            <a:ext cx="36576" cy="3657600"/>
-          </a:xfrm>
-          <a:prstGeom prst="rect">
-            <a:avLst/>
-          </a:prstGeom>
-          <a:solidFill>
-            <a:srgbClr val="E62739"/>
-          </a:solidFill>
-          <a:ln>
-            <a:noFill/>
-          </a:ln>
-        </p:spPr>
-        <p:style>
-          <a:lnRef idx="1">
-            <a:schemeClr val="accent1"/>
-          </a:lnRef>
-          <a:fillRef idx="3">
-            <a:schemeClr val="accent1"/>
-          </a:fillRef>
-          <a:effectRef idx="2">
-            <a:schemeClr val="accent1"/>
-          </a:effectRef>
-          <a:fontRef idx="minor">
-            <a:schemeClr val="lt1"/>
-          </a:fontRef>
-        </p:style>
-        <p:txBody>
-          <a:bodyPr rtlCol="0" anchor="ctr"/>
-          <a:lstStyle/>
-          <a:p>
-            <a:pPr algn="ctr"/>
-          </a:p>
-        </p:txBody>
-      </p:sp>
-      <p:sp>
-        <p:nvSpPr>
-          <p:cNvPr id="8" name="Oval 7"/>
-          <p:cNvSpPr/>
-          <p:nvPr/>
-        </p:nvSpPr>
-        <p:spPr>
-          <a:xfrm>
-            <a:off x="749808" y="2039112"/>
-            <a:ext cx="256032" cy="256032"/>
-          </a:xfrm>
-          <a:prstGeom prst="ellipse">
-            <a:avLst/>
-          </a:prstGeom>
-          <a:solidFill>
-            <a:srgbClr val="FFFFFF"/>
-          </a:solidFill>
-          <a:ln w="31750">
-            <a:solidFill>
-              <a:srgbClr val="E62739"/>
-            </a:solidFill>
-          </a:ln>
-        </p:spPr>
-        <p:style>
-          <a:lnRef idx="1">
-            <a:schemeClr val="accent1"/>
-          </a:lnRef>
-          <a:fillRef idx="3">
-            <a:schemeClr val="accent1"/>
-          </a:fillRef>
-          <a:effectRef idx="2">
-            <a:schemeClr val="accent1"/>
-          </a:effectRef>
-          <a:fontRef idx="minor">
-            <a:schemeClr val="lt1"/>
-          </a:fontRef>
-        </p:style>
-        <p:txBody>
-          <a:bodyPr rtlCol="0" anchor="ctr"/>
-          <a:lstStyle/>
-          <a:p>
-            <a:pPr algn="ctr"/>
-          </a:p>
-        </p:txBody>
-      </p:sp>
-      <p:sp>
-        <p:nvSpPr>
-          <p:cNvPr id="9" name="TextBox 8"/>
+          <p:cNvPr id="7" name="TextBox 6"/>
           <p:cNvSpPr txBox="1"/>
           <p:nvPr/>
         </p:nvSpPr>
@@ -9687,7 +8572,7 @@
             <a:r>
               <a:rPr sz="1500" b="1">
                 <a:solidFill>
-                  <a:srgbClr val="122033"/>
+                  <a:srgbClr val="0D223B"/>
                 </a:solidFill>
                 <a:latin typeface="Calibri"/>
               </a:rPr>
@@ -9695,7 +8580,7 @@
             </a:r>
           </a:p>
           <a:p>
-            <a:pPr algn="l">
+            <a:pPr>
               <a:spcBef>
                 <a:spcPts val="400"/>
               </a:spcBef>
@@ -9706,18 +8591,18 @@
             <a:r>
               <a:rPr sz="1300" b="0">
                 <a:solidFill>
-                  <a:srgbClr val="4A6074"/>
-                </a:solidFill>
-                <a:latin typeface="Calibri"/>
-              </a:rPr>
-              <a:t>Официальная регистрация в Министерстве юстиции Кыргызской Республики</a:t>
-            </a:r>
-          </a:p>
-        </p:txBody>
-      </p:sp>
-      <p:sp>
-        <p:nvSpPr>
-          <p:cNvPr id="10" name="Oval 9"/>
+                  <a:srgbClr val="28394A"/>
+                </a:solidFill>
+                <a:latin typeface="Calibri"/>
+              </a:rPr>
+              <a:t>Официальная регистрация в Министерстве юстиции КР</a:t>
+            </a:r>
+          </a:p>
+        </p:txBody>
+      </p:sp>
+      <p:sp>
+        <p:nvSpPr>
+          <p:cNvPr id="8" name="Oval 7"/>
           <p:cNvSpPr/>
           <p:nvPr/>
         </p:nvSpPr>
@@ -9734,7 +8619,7 @@
           </a:solidFill>
           <a:ln w="31750">
             <a:solidFill>
-              <a:srgbClr val="E62739"/>
+              <a:srgbClr val="2F9E44"/>
             </a:solidFill>
           </a:ln>
         </p:spPr>
@@ -9762,7 +8647,7 @@
       </p:sp>
       <p:sp>
         <p:nvSpPr>
-          <p:cNvPr id="11" name="TextBox 10"/>
+          <p:cNvPr id="9" name="TextBox 8"/>
           <p:cNvSpPr txBox="1"/>
           <p:nvPr/>
         </p:nvSpPr>
@@ -9785,7 +8670,7 @@
             <a:r>
               <a:rPr sz="1500" b="1">
                 <a:solidFill>
-                  <a:srgbClr val="122033"/>
+                  <a:srgbClr val="0D223B"/>
                 </a:solidFill>
                 <a:latin typeface="Calibri"/>
               </a:rPr>
@@ -9793,7 +8678,7 @@
             </a:r>
           </a:p>
           <a:p>
-            <a:pPr algn="l">
+            <a:pPr>
               <a:spcBef>
                 <a:spcPts val="400"/>
               </a:spcBef>
@@ -9804,18 +8689,18 @@
             <a:r>
               <a:rPr sz="1300" b="0">
                 <a:solidFill>
-                  <a:srgbClr val="4A6074"/>
-                </a:solidFill>
-                <a:latin typeface="Calibri"/>
-              </a:rPr>
-              <a:t>Заявка направлена в штаб-квартиру IPMA · статус Ассоциации-заявителя</a:t>
-            </a:r>
-          </a:p>
-        </p:txBody>
-      </p:sp>
-      <p:sp>
-        <p:nvSpPr>
-          <p:cNvPr id="12" name="Oval 11"/>
+                  <a:srgbClr val="28394A"/>
+                </a:solidFill>
+                <a:latin typeface="Calibri"/>
+              </a:rPr>
+              <a:t>Заявка в штаб-квартиру · статус Ассоциации-заявителя</a:t>
+            </a:r>
+          </a:p>
+        </p:txBody>
+      </p:sp>
+      <p:sp>
+        <p:nvSpPr>
+          <p:cNvPr id="10" name="Oval 9"/>
           <p:cNvSpPr/>
           <p:nvPr/>
         </p:nvSpPr>
@@ -9832,7 +8717,7 @@
           </a:solidFill>
           <a:ln w="31750">
             <a:solidFill>
-              <a:srgbClr val="E62739"/>
+              <a:srgbClr val="2F9E44"/>
             </a:solidFill>
           </a:ln>
         </p:spPr>
@@ -9860,7 +8745,7 @@
       </p:sp>
       <p:sp>
         <p:nvSpPr>
-          <p:cNvPr id="13" name="TextBox 12"/>
+          <p:cNvPr id="11" name="TextBox 10"/>
           <p:cNvSpPr txBox="1"/>
           <p:nvPr/>
         </p:nvSpPr>
@@ -9883,7 +8768,7 @@
             <a:r>
               <a:rPr sz="1500" b="1">
                 <a:solidFill>
-                  <a:srgbClr val="122033"/>
+                  <a:srgbClr val="0D223B"/>
                 </a:solidFill>
                 <a:latin typeface="Calibri"/>
               </a:rPr>
@@ -9891,7 +8776,7 @@
             </a:r>
           </a:p>
           <a:p>
-            <a:pPr algn="l">
+            <a:pPr>
               <a:spcBef>
                 <a:spcPts val="400"/>
               </a:spcBef>
@@ -9902,18 +8787,18 @@
             <a:r>
               <a:rPr sz="1300" b="0">
                 <a:solidFill>
-                  <a:srgbClr val="4A6074"/>
-                </a:solidFill>
-                <a:latin typeface="Calibri"/>
-              </a:rPr>
-              <a:t>Урмат Мекишев прошёл обучение и получил сертификат IPMA Level B</a:t>
-            </a:r>
-          </a:p>
-        </p:txBody>
-      </p:sp>
-      <p:sp>
-        <p:nvSpPr>
-          <p:cNvPr id="14" name="Oval 13"/>
+                  <a:srgbClr val="28394A"/>
+                </a:solidFill>
+                <a:latin typeface="Calibri"/>
+              </a:rPr>
+              <a:t>Урмат Мекишев — сертификат IPMA Level B</a:t>
+            </a:r>
+          </a:p>
+        </p:txBody>
+      </p:sp>
+      <p:sp>
+        <p:nvSpPr>
+          <p:cNvPr id="12" name="Oval 11"/>
           <p:cNvSpPr/>
           <p:nvPr/>
         </p:nvSpPr>
@@ -9930,7 +8815,7 @@
           </a:solidFill>
           <a:ln w="31750">
             <a:solidFill>
-              <a:srgbClr val="E62739"/>
+              <a:srgbClr val="2F9E44"/>
             </a:solidFill>
           </a:ln>
         </p:spPr>
@@ -9958,7 +8843,7 @@
       </p:sp>
       <p:sp>
         <p:nvSpPr>
-          <p:cNvPr id="15" name="TextBox 14"/>
+          <p:cNvPr id="13" name="TextBox 12"/>
           <p:cNvSpPr txBox="1"/>
           <p:nvPr/>
         </p:nvSpPr>
@@ -9981,7 +8866,7 @@
             <a:r>
               <a:rPr sz="1500" b="1">
                 <a:solidFill>
-                  <a:srgbClr val="122033"/>
+                  <a:srgbClr val="0D223B"/>
                 </a:solidFill>
                 <a:latin typeface="Calibri"/>
               </a:rPr>
@@ -9989,7 +8874,7 @@
             </a:r>
           </a:p>
           <a:p>
-            <a:pPr algn="l">
+            <a:pPr>
               <a:spcBef>
                 <a:spcPts val="400"/>
               </a:spcBef>
@@ -10000,18 +8885,18 @@
             <a:r>
               <a:rPr sz="1300" b="0">
                 <a:solidFill>
-                  <a:srgbClr val="4A6074"/>
-                </a:solidFill>
-                <a:latin typeface="Calibri"/>
-              </a:rPr>
-              <a:t>Гибридная программа: 4 студента успешно сертифицированы — 3 × Level C и 1 × Level B</a:t>
+                  <a:srgbClr val="28394A"/>
+                </a:solidFill>
+                <a:latin typeface="Calibri"/>
+              </a:rPr>
+              <a:t>4 студента: 3 × Level C и 1 × Level B</a:t>
             </a:r>
           </a:p>
         </p:txBody>
       </p:sp>
       <p:pic>
         <p:nvPicPr>
-          <p:cNvPr id="16" name="Picture 15" descr="ipma-kr-emblem.png"/>
+          <p:cNvPr id="14" name="Picture 13" descr="ipma-kr-emblem.png"/>
           <p:cNvPicPr>
             <a:picLocks noChangeAspect="1"/>
           </p:cNvPicPr>
@@ -10026,7 +8911,7 @@
         <p:spPr>
           <a:xfrm>
             <a:off x="640080" y="6355080"/>
-            <a:ext cx="257362" cy="256032"/>
+            <a:ext cx="238979" cy="237744"/>
           </a:xfrm>
           <a:prstGeom prst="rect">
             <a:avLst/>
@@ -10035,14 +8920,14 @@
       </p:pic>
       <p:sp>
         <p:nvSpPr>
-          <p:cNvPr id="17" name="TextBox 16"/>
+          <p:cNvPr id="15" name="TextBox 14"/>
           <p:cNvSpPr txBox="1"/>
           <p:nvPr/>
         </p:nvSpPr>
         <p:spPr>
           <a:xfrm>
             <a:off x="1005840" y="6355080"/>
-            <a:ext cx="5486400" cy="274320"/>
+            <a:ext cx="6400800" cy="274320"/>
           </a:xfrm>
           <a:prstGeom prst="rect">
             <a:avLst/>
@@ -10059,18 +8944,18 @@
             <a:r>
               <a:rPr sz="1000" b="1">
                 <a:solidFill>
-                  <a:srgbClr val="7A8FA3"/>
-                </a:solidFill>
-                <a:latin typeface="Calibri"/>
-              </a:rPr>
-              <a:t>KgPMU × AzPMA</a:t>
-            </a:r>
-          </a:p>
-        </p:txBody>
-      </p:sp>
-      <p:sp>
-        <p:nvSpPr>
-          <p:cNvPr id="18" name="TextBox 17"/>
+                  <a:srgbClr val="5C6B72"/>
+                </a:solidFill>
+                <a:latin typeface="Calibri"/>
+              </a:rPr>
+              <a:t>KgPMU » AzPMA</a:t>
+            </a:r>
+          </a:p>
+        </p:txBody>
+      </p:sp>
+      <p:sp>
+        <p:nvSpPr>
+          <p:cNvPr id="16" name="TextBox 15"/>
           <p:cNvSpPr txBox="1"/>
           <p:nvPr/>
         </p:nvSpPr>
@@ -10094,7 +8979,7 @@
             <a:r>
               <a:rPr sz="1000" b="1">
                 <a:solidFill>
-                  <a:srgbClr val="7A8FA3"/>
+                  <a:srgbClr val="5C6B72"/>
                 </a:solidFill>
                 <a:latin typeface="Calibri"/>
               </a:rPr>
@@ -10136,7 +9021,7 @@
             <a:avLst/>
           </a:prstGeom>
           <a:solidFill>
-            <a:srgbClr val="F5F8FB"/>
+            <a:srgbClr val="0D223B"/>
           </a:solidFill>
           <a:ln>
             <a:noFill/>
@@ -10166,25 +9051,129 @@
       </p:sp>
       <p:sp>
         <p:nvSpPr>
-          <p:cNvPr id="3" name="Oval 2"/>
+          <p:cNvPr id="3" name="TextBox 2"/>
+          <p:cNvSpPr txBox="1"/>
+          <p:nvPr/>
+        </p:nvSpPr>
+        <p:spPr>
+          <a:xfrm>
+            <a:off x="640080" y="502920"/>
+            <a:ext cx="10058400" cy="320040"/>
+          </a:xfrm>
+          <a:prstGeom prst="rect">
+            <a:avLst/>
+          </a:prstGeom>
+          <a:noFill/>
+        </p:spPr>
+        <p:txBody>
+          <a:bodyPr wrap="none">
+            <a:spAutoFit/>
+          </a:bodyPr>
+          <a:lstStyle/>
+          <a:p>
+            <a:pPr algn="l"/>
+            <a:r>
+              <a:rPr sz="1100" b="1">
+                <a:solidFill>
+                  <a:srgbClr val="7FE0A0"/>
+                </a:solidFill>
+                <a:latin typeface="Calibri"/>
+              </a:rPr>
+              <a:t>09  »»  COUNCIL OF DELEGATES</a:t>
+            </a:r>
+          </a:p>
+        </p:txBody>
+      </p:sp>
+      <p:sp>
+        <p:nvSpPr>
+          <p:cNvPr id="4" name="TextBox 3"/>
+          <p:cNvSpPr txBox="1"/>
+          <p:nvPr/>
+        </p:nvSpPr>
+        <p:spPr>
+          <a:xfrm>
+            <a:off x="640080" y="914400"/>
+            <a:ext cx="10058400" cy="548640"/>
+          </a:xfrm>
+          <a:prstGeom prst="rect">
+            <a:avLst/>
+          </a:prstGeom>
+          <a:noFill/>
+        </p:spPr>
+        <p:txBody>
+          <a:bodyPr wrap="none">
+            <a:spAutoFit/>
+          </a:bodyPr>
+          <a:lstStyle/>
+          <a:p>
+            <a:pPr algn="l"/>
+            <a:r>
+              <a:rPr sz="3000" b="1">
+                <a:solidFill>
+                  <a:srgbClr val="FFFFFF"/>
+                </a:solidFill>
+                <a:latin typeface="Calibri"/>
+              </a:rPr>
+              <a:t>Благодарим делегатов</a:t>
+            </a:r>
+          </a:p>
+        </p:txBody>
+      </p:sp>
+      <p:sp>
+        <p:nvSpPr>
+          <p:cNvPr id="5" name="TextBox 4"/>
+          <p:cNvSpPr txBox="1"/>
+          <p:nvPr/>
+        </p:nvSpPr>
+        <p:spPr>
+          <a:xfrm>
+            <a:off x="640080" y="2011680"/>
+            <a:ext cx="10058400" cy="1280160"/>
+          </a:xfrm>
+          <a:prstGeom prst="rect">
+            <a:avLst/>
+          </a:prstGeom>
+          <a:noFill/>
+        </p:spPr>
+        <p:txBody>
+          <a:bodyPr wrap="square">
+            <a:spAutoFit/>
+          </a:bodyPr>
+          <a:lstStyle/>
+          <a:p>
+            <a:r>
+              <a:rPr sz="2400" b="1">
+                <a:solidFill>
+                  <a:srgbClr val="FFFFFF"/>
+                </a:solidFill>
+                <a:latin typeface="Calibri"/>
+              </a:rPr>
+              <a:t>Спасибо Совету делегатов IPMA за внимание к голосу Центральной Азии.</a:t>
+            </a:r>
+          </a:p>
+        </p:txBody>
+      </p:sp>
+      <p:sp>
+        <p:nvSpPr>
+          <p:cNvPr id="6" name="Rounded Rectangle 5"/>
           <p:cNvSpPr/>
           <p:nvPr/>
         </p:nvSpPr>
         <p:spPr>
           <a:xfrm>
-            <a:off x="7772400" y="-1371600"/>
-            <a:ext cx="5486400" cy="4114800"/>
-          </a:xfrm>
-          <a:prstGeom prst="ellipse">
+            <a:off x="640080" y="3566160"/>
+            <a:ext cx="10515600" cy="1280160"/>
+          </a:xfrm>
+          <a:prstGeom prst="roundRect">
             <a:avLst/>
           </a:prstGeom>
           <a:solidFill>
-            <a:srgbClr val="DCE6F2">
-              <a:alpha val="35000"/>
-            </a:srgbClr>
+            <a:srgbClr val="143528"/>
           </a:solidFill>
           <a:ln>
-            <a:noFill/>
+            <a:solidFill>
+              <a:srgbClr val="2F9E44"/>
+            </a:solidFill>
           </a:ln>
         </p:spPr>
         <p:style>
@@ -10202,68 +9191,32 @@
           </a:fontRef>
         </p:style>
         <p:txBody>
-          <a:bodyPr rtlCol="0" anchor="ctr"/>
+          <a:bodyPr rtlCol="0" anchor="ctr" wrap="square" lIns="228600" tIns="228600"/>
           <a:lstStyle/>
           <a:p>
             <a:pPr algn="ctr"/>
-          </a:p>
-        </p:txBody>
-      </p:sp>
-      <p:sp>
-        <p:nvSpPr>
-          <p:cNvPr id="4" name="Oval 3"/>
-          <p:cNvSpPr/>
-          <p:nvPr/>
-        </p:nvSpPr>
-        <p:spPr>
-          <a:xfrm>
-            <a:off x="-1828800" y="4114800"/>
-            <a:ext cx="5029200" cy="3657600"/>
-          </a:xfrm>
-          <a:prstGeom prst="ellipse">
-            <a:avLst/>
-          </a:prstGeom>
-          <a:solidFill>
-            <a:srgbClr val="E3EBF4">
-              <a:alpha val="40000"/>
-            </a:srgbClr>
-          </a:solidFill>
-          <a:ln>
-            <a:noFill/>
-          </a:ln>
-        </p:spPr>
-        <p:style>
-          <a:lnRef idx="1">
-            <a:schemeClr val="accent1"/>
-          </a:lnRef>
-          <a:fillRef idx="3">
-            <a:schemeClr val="accent1"/>
-          </a:fillRef>
-          <a:effectRef idx="2">
-            <a:schemeClr val="accent1"/>
-          </a:effectRef>
-          <a:fontRef idx="minor">
-            <a:schemeClr val="lt1"/>
-          </a:fontRef>
-        </p:style>
-        <p:txBody>
-          <a:bodyPr rtlCol="0" anchor="ctr"/>
-          <a:lstStyle/>
-          <a:p>
-            <a:pPr algn="ctr"/>
-          </a:p>
-        </p:txBody>
-      </p:sp>
-      <p:sp>
-        <p:nvSpPr>
-          <p:cNvPr id="5" name="TextBox 4"/>
+            <a:r>
+              <a:rPr sz="1400" b="0">
+                <a:solidFill>
+                  <a:srgbClr val="FFFFFF"/>
+                </a:solidFill>
+                <a:latin typeface="Calibri"/>
+              </a:rPr>
+              <a:t>Просим поддержать KgPMU и своим голосом помочь включить объединение в семью IPMA как полноправного национального партнёра.</a:t>
+            </a:r>
+          </a:p>
+        </p:txBody>
+      </p:sp>
+      <p:sp>
+        <p:nvSpPr>
+          <p:cNvPr id="7" name="TextBox 6"/>
           <p:cNvSpPr txBox="1"/>
           <p:nvPr/>
         </p:nvSpPr>
         <p:spPr>
           <a:xfrm>
-            <a:off x="640080" y="502920"/>
-            <a:ext cx="9144000" cy="320040"/>
+            <a:off x="640080" y="5029200"/>
+            <a:ext cx="10058400" cy="457200"/>
           </a:xfrm>
           <a:prstGeom prst="rect">
             <a:avLst/>
@@ -10278,27 +9231,27 @@
           <a:p>
             <a:pPr algn="l"/>
             <a:r>
-              <a:rPr sz="1100" b="1">
-                <a:solidFill>
-                  <a:srgbClr val="E62739"/>
-                </a:solidFill>
-                <a:latin typeface="Calibri"/>
-              </a:rPr>
-              <a:t>09  »  COUNCIL OF DELEGATES</a:t>
-            </a:r>
-          </a:p>
-        </p:txBody>
-      </p:sp>
-      <p:sp>
-        <p:nvSpPr>
-          <p:cNvPr id="6" name="TextBox 5"/>
+              <a:rPr sz="1400" b="0">
+                <a:solidFill>
+                  <a:srgbClr val="C7D6E2"/>
+                </a:solidFill>
+                <a:latin typeface="Calibri"/>
+              </a:rPr>
+              <a:t>Мы готовы сотрудничать, учиться у зрелых MA и делиться опытом emerging-рынка.</a:t>
+            </a:r>
+          </a:p>
+        </p:txBody>
+      </p:sp>
+      <p:sp>
+        <p:nvSpPr>
+          <p:cNvPr id="8" name="TextBox 7"/>
           <p:cNvSpPr txBox="1"/>
           <p:nvPr/>
         </p:nvSpPr>
         <p:spPr>
           <a:xfrm>
-            <a:off x="640080" y="868680"/>
-            <a:ext cx="9144000" cy="731520"/>
+            <a:off x="640080" y="6355080"/>
+            <a:ext cx="6400800" cy="274320"/>
           </a:xfrm>
           <a:prstGeom prst="rect">
             <a:avLst/>
@@ -10313,101 +9266,13 @@
           <a:p>
             <a:pPr algn="l"/>
             <a:r>
-              <a:rPr sz="3200" b="1">
-                <a:solidFill>
-                  <a:srgbClr val="122033"/>
-                </a:solidFill>
-                <a:latin typeface="Calibri"/>
-              </a:rPr>
-              <a:t>Благодарим делегатов</a:t>
-            </a:r>
-          </a:p>
-        </p:txBody>
-      </p:sp>
-      <p:sp>
-        <p:nvSpPr>
-          <p:cNvPr id="7" name="TextBox 6"/>
-          <p:cNvSpPr txBox="1"/>
-          <p:nvPr/>
-        </p:nvSpPr>
-        <p:spPr>
-          <a:xfrm>
-            <a:off x="640080" y="2011680"/>
-            <a:ext cx="10058400" cy="1371600"/>
-          </a:xfrm>
-          <a:prstGeom prst="rect">
-            <a:avLst/>
-          </a:prstGeom>
-          <a:noFill/>
-        </p:spPr>
-        <p:txBody>
-          <a:bodyPr wrap="square">
-            <a:spAutoFit/>
-          </a:bodyPr>
-          <a:lstStyle/>
-          <a:p>
-            <a:r>
-              <a:rPr sz="2600" b="1">
-                <a:solidFill>
-                  <a:srgbClr val="122033"/>
-                </a:solidFill>
-                <a:latin typeface="Calibri"/>
-              </a:rPr>
-              <a:t>Спасибо Совету делегатов IPMA за внимание к голосу Центральной Азии.</a:t>
-            </a:r>
-          </a:p>
-        </p:txBody>
-      </p:sp>
-      <p:sp>
-        <p:nvSpPr>
-          <p:cNvPr id="8" name="Rounded Rectangle 7"/>
-          <p:cNvSpPr/>
-          <p:nvPr/>
-        </p:nvSpPr>
-        <p:spPr>
-          <a:xfrm>
-            <a:off x="640080" y="3657600"/>
-            <a:ext cx="10515600" cy="1234440"/>
-          </a:xfrm>
-          <a:prstGeom prst="roundRect">
-            <a:avLst/>
-          </a:prstGeom>
-          <a:solidFill>
-            <a:srgbClr val="F0F5FA"/>
-          </a:solidFill>
-          <a:ln>
-            <a:solidFill>
-              <a:srgbClr val="F0A0A8"/>
-            </a:solidFill>
-          </a:ln>
-        </p:spPr>
-        <p:style>
-          <a:lnRef idx="1">
-            <a:schemeClr val="accent1"/>
-          </a:lnRef>
-          <a:fillRef idx="3">
-            <a:schemeClr val="accent1"/>
-          </a:fillRef>
-          <a:effectRef idx="2">
-            <a:schemeClr val="accent1"/>
-          </a:effectRef>
-          <a:fontRef idx="minor">
-            <a:schemeClr val="lt1"/>
-          </a:fontRef>
-        </p:style>
-        <p:txBody>
-          <a:bodyPr rtlCol="0" anchor="ctr" wrap="square" lIns="228600" rIns="228600" tIns="228600"/>
-          <a:lstStyle/>
-          <a:p>
-            <a:pPr algn="ctr"/>
-            <a:r>
-              <a:rPr sz="1400" b="0">
-                <a:solidFill>
-                  <a:srgbClr val="122033"/>
-                </a:solidFill>
-                <a:latin typeface="Calibri"/>
-              </a:rPr>
-              <a:t>Просим поддержать KgPMU и своим голосом помочь включить Кыргызское объединение управления проектами в большую семью IPMA — как полноправного национального партнёра.</a:t>
+              <a:rPr sz="1000" b="1">
+                <a:solidFill>
+                  <a:srgbClr val="8FA6B8"/>
+                </a:solidFill>
+                <a:latin typeface="Calibri"/>
+              </a:rPr>
+              <a:t>Support KgPMU</a:t>
             </a:r>
           </a:p>
         </p:txBody>
@@ -10420,8 +9285,8 @@
         </p:nvSpPr>
         <p:spPr>
           <a:xfrm>
-            <a:off x="640080" y="5074920"/>
-            <a:ext cx="10058400" cy="457200"/>
+            <a:off x="10515600" y="6355080"/>
+            <a:ext cx="1188720" cy="274320"/>
           </a:xfrm>
           <a:prstGeom prst="rect">
             <a:avLst/>
@@ -10434,105 +9299,11 @@
           </a:bodyPr>
           <a:lstStyle/>
           <a:p>
-            <a:pPr algn="l"/>
-            <a:r>
-              <a:rPr sz="1400" b="0">
-                <a:solidFill>
-                  <a:srgbClr val="4A6074"/>
-                </a:solidFill>
-                <a:latin typeface="Calibri"/>
-              </a:rPr>
-              <a:t>Мы готовы сотрудничать, учиться у зрелых MA и делиться опытом emerging-рынка.</a:t>
-            </a:r>
-          </a:p>
-        </p:txBody>
-      </p:sp>
-      <p:pic>
-        <p:nvPicPr>
-          <p:cNvPr id="10" name="Picture 9" descr="ipma-kr-emblem.png"/>
-          <p:cNvPicPr>
-            <a:picLocks noChangeAspect="1"/>
-          </p:cNvPicPr>
-          <p:nvPr/>
-        </p:nvPicPr>
-        <p:blipFill>
-          <a:blip r:embed="rId2"/>
-          <a:stretch>
-            <a:fillRect/>
-          </a:stretch>
-        </p:blipFill>
-        <p:spPr>
-          <a:xfrm>
-            <a:off x="640080" y="6355080"/>
-            <a:ext cx="257362" cy="256032"/>
-          </a:xfrm>
-          <a:prstGeom prst="rect">
-            <a:avLst/>
-          </a:prstGeom>
-        </p:spPr>
-      </p:pic>
-      <p:sp>
-        <p:nvSpPr>
-          <p:cNvPr id="11" name="TextBox 10"/>
-          <p:cNvSpPr txBox="1"/>
-          <p:nvPr/>
-        </p:nvSpPr>
-        <p:spPr>
-          <a:xfrm>
-            <a:off x="1005840" y="6355080"/>
-            <a:ext cx="5486400" cy="274320"/>
-          </a:xfrm>
-          <a:prstGeom prst="rect">
-            <a:avLst/>
-          </a:prstGeom>
-          <a:noFill/>
-        </p:spPr>
-        <p:txBody>
-          <a:bodyPr wrap="none">
-            <a:spAutoFit/>
-          </a:bodyPr>
-          <a:lstStyle/>
-          <a:p>
-            <a:pPr algn="l"/>
+            <a:pPr algn="r"/>
             <a:r>
               <a:rPr sz="1000" b="1">
                 <a:solidFill>
-                  <a:srgbClr val="7A8FA3"/>
-                </a:solidFill>
-                <a:latin typeface="Calibri"/>
-              </a:rPr>
-              <a:t>Support KgPMU</a:t>
-            </a:r>
-          </a:p>
-        </p:txBody>
-      </p:sp>
-      <p:sp>
-        <p:nvSpPr>
-          <p:cNvPr id="12" name="TextBox 11"/>
-          <p:cNvSpPr txBox="1"/>
-          <p:nvPr/>
-        </p:nvSpPr>
-        <p:spPr>
-          <a:xfrm>
-            <a:off x="10515600" y="6355080"/>
-            <a:ext cx="1188720" cy="274320"/>
-          </a:xfrm>
-          <a:prstGeom prst="rect">
-            <a:avLst/>
-          </a:prstGeom>
-          <a:noFill/>
-        </p:spPr>
-        <p:txBody>
-          <a:bodyPr wrap="none">
-            <a:spAutoFit/>
-          </a:bodyPr>
-          <a:lstStyle/>
-          <a:p>
-            <a:pPr algn="r"/>
-            <a:r>
-              <a:rPr sz="1000" b="1">
-                <a:solidFill>
-                  <a:srgbClr val="7A8FA3"/>
+                  <a:srgbClr val="8FA6B8"/>
                 </a:solidFill>
                 <a:latin typeface="Calibri"/>
               </a:rPr>
